--- a/presentation/slides.pptx
+++ b/presentation/slides.pptx
@@ -26,9 +26,14 @@
     <p:sldId id="274" r:id="rId20"/>
     <p:sldId id="275" r:id="rId21"/>
     <p:sldId id="276" r:id="rId22"/>
+    <p:sldId id="277" r:id="rId23"/>
+    <p:sldId id="278" r:id="rId24"/>
+    <p:sldId id="279" r:id="rId25"/>
+    <p:sldId id="280" r:id="rId26"/>
+    <p:sldId id="281" r:id="rId27"/>
   </p:sldIdLst>
   <p:notesMasterIdLst>
-    <p:notesMasterId r:id="rId23"/>
+    <p:notesMasterId r:id="rId28"/>
   </p:notesMasterIdLst>
   <p:sldSz cx="9334500" cy="5248275"/>
   <p:notesSz cx="5248275" cy="9334500"/>
@@ -1690,6 +1695,446 @@
             <a:fld id="{F7021451-1387-4CA6-816F-3879F97B5CBC}" type="slidenum">
               <a:rPr lang="en-US"/>
               <a:t>21</a:t>
+            </a:fld>
+            <a:endParaRPr lang="en-US"/>
+          </a:p>
+        </p:txBody>
+      </p:sp>
+    </p:spTree>
+    <p:extLst>
+      <p:ext uri="{BB962C8B-B14F-4D97-AF65-F5344CB8AC3E}">
+        <p14:creationId xmlns:p14="http://schemas.microsoft.com/office/powerpoint/2010/main" val="1024086991"/>
+      </p:ext>
+    </p:extLst>
+  </p:cSld>
+  <p:clrMapOvr>
+    <a:masterClrMapping/>
+  </p:clrMapOvr>
+</p:notes>
+</file>
+
+<file path=ppt/notesSlides/notesSlide22.xml><?xml version="1.0" encoding="utf-8"?>
+<p:notes xmlns:a="http://schemas.openxmlformats.org/drawingml/2006/main" xmlns:r="http://schemas.openxmlformats.org/officeDocument/2006/relationships" xmlns:p="http://schemas.openxmlformats.org/presentationml/2006/main">
+  <p:cSld>
+    <p:spTree>
+      <p:nvGrpSpPr>
+        <p:cNvPr id="1" name=""/>
+        <p:cNvGrpSpPr/>
+        <p:nvPr/>
+      </p:nvGrpSpPr>
+      <p:grpSpPr>
+        <a:xfrm>
+          <a:off x="0" y="0"/>
+          <a:ext cx="0" cy="0"/>
+          <a:chOff x="0" y="0"/>
+          <a:chExt cx="0" cy="0"/>
+        </a:xfrm>
+      </p:grpSpPr>
+      <p:sp>
+        <p:nvSpPr>
+          <p:cNvPr id="2" name="Slide Image Placeholder 1"/>
+          <p:cNvSpPr>
+            <a:spLocks noGrp="1" noRot="1" noChangeAspect="1"/>
+          </p:cNvSpPr>
+          <p:nvPr>
+            <p:ph type="sldImg"/>
+          </p:nvPr>
+        </p:nvSpPr>
+        <p:spPr/>
+      </p:sp>
+      <p:sp>
+        <p:nvSpPr>
+          <p:cNvPr id="3" name="Notes Placeholder 2"/>
+          <p:cNvSpPr>
+            <a:spLocks noGrp="1"/>
+          </p:cNvSpPr>
+          <p:nvPr>
+            <p:ph type="body" idx="1"/>
+          </p:nvPr>
+        </p:nvSpPr>
+        <p:spPr/>
+        <p:txBody>
+          <a:bodyPr/>
+          <a:lstStyle/>
+          <a:p>
+            <a:r>
+              <a:rPr lang="en-US" dirty="0"/>
+              <a:t/>
+            </a:r>
+            <a:endParaRPr lang="en-US" dirty="0"/>
+          </a:p>
+        </p:txBody>
+      </p:sp>
+      <p:sp>
+        <p:nvSpPr>
+          <p:cNvPr id="4" name="Slide Number Placeholder 3"/>
+          <p:cNvSpPr>
+            <a:spLocks noGrp="1"/>
+          </p:cNvSpPr>
+          <p:nvPr>
+            <p:ph type="sldNum" sz="quarter" idx="10"/>
+          </p:nvPr>
+        </p:nvSpPr>
+        <p:spPr/>
+        <p:txBody>
+          <a:bodyPr/>
+          <a:lstStyle/>
+          <a:p>
+            <a:fld id="{F7021451-1387-4CA6-816F-3879F97B5CBC}" type="slidenum">
+              <a:rPr lang="en-US"/>
+              <a:t>22</a:t>
+            </a:fld>
+            <a:endParaRPr lang="en-US"/>
+          </a:p>
+        </p:txBody>
+      </p:sp>
+    </p:spTree>
+    <p:extLst>
+      <p:ext uri="{BB962C8B-B14F-4D97-AF65-F5344CB8AC3E}">
+        <p14:creationId xmlns:p14="http://schemas.microsoft.com/office/powerpoint/2010/main" val="1024086991"/>
+      </p:ext>
+    </p:extLst>
+  </p:cSld>
+  <p:clrMapOvr>
+    <a:masterClrMapping/>
+  </p:clrMapOvr>
+</p:notes>
+</file>
+
+<file path=ppt/notesSlides/notesSlide23.xml><?xml version="1.0" encoding="utf-8"?>
+<p:notes xmlns:a="http://schemas.openxmlformats.org/drawingml/2006/main" xmlns:r="http://schemas.openxmlformats.org/officeDocument/2006/relationships" xmlns:p="http://schemas.openxmlformats.org/presentationml/2006/main">
+  <p:cSld>
+    <p:spTree>
+      <p:nvGrpSpPr>
+        <p:cNvPr id="1" name=""/>
+        <p:cNvGrpSpPr/>
+        <p:nvPr/>
+      </p:nvGrpSpPr>
+      <p:grpSpPr>
+        <a:xfrm>
+          <a:off x="0" y="0"/>
+          <a:ext cx="0" cy="0"/>
+          <a:chOff x="0" y="0"/>
+          <a:chExt cx="0" cy="0"/>
+        </a:xfrm>
+      </p:grpSpPr>
+      <p:sp>
+        <p:nvSpPr>
+          <p:cNvPr id="2" name="Slide Image Placeholder 1"/>
+          <p:cNvSpPr>
+            <a:spLocks noGrp="1" noRot="1" noChangeAspect="1"/>
+          </p:cNvSpPr>
+          <p:nvPr>
+            <p:ph type="sldImg"/>
+          </p:nvPr>
+        </p:nvSpPr>
+        <p:spPr/>
+      </p:sp>
+      <p:sp>
+        <p:nvSpPr>
+          <p:cNvPr id="3" name="Notes Placeholder 2"/>
+          <p:cNvSpPr>
+            <a:spLocks noGrp="1"/>
+          </p:cNvSpPr>
+          <p:nvPr>
+            <p:ph type="body" idx="1"/>
+          </p:nvPr>
+        </p:nvSpPr>
+        <p:spPr/>
+        <p:txBody>
+          <a:bodyPr/>
+          <a:lstStyle/>
+          <a:p>
+            <a:r>
+              <a:rPr lang="en-US" dirty="0"/>
+              <a:t/>
+            </a:r>
+            <a:endParaRPr lang="en-US" dirty="0"/>
+          </a:p>
+        </p:txBody>
+      </p:sp>
+      <p:sp>
+        <p:nvSpPr>
+          <p:cNvPr id="4" name="Slide Number Placeholder 3"/>
+          <p:cNvSpPr>
+            <a:spLocks noGrp="1"/>
+          </p:cNvSpPr>
+          <p:nvPr>
+            <p:ph type="sldNum" sz="quarter" idx="10"/>
+          </p:nvPr>
+        </p:nvSpPr>
+        <p:spPr/>
+        <p:txBody>
+          <a:bodyPr/>
+          <a:lstStyle/>
+          <a:p>
+            <a:fld id="{F7021451-1387-4CA6-816F-3879F97B5CBC}" type="slidenum">
+              <a:rPr lang="en-US"/>
+              <a:t>23</a:t>
+            </a:fld>
+            <a:endParaRPr lang="en-US"/>
+          </a:p>
+        </p:txBody>
+      </p:sp>
+    </p:spTree>
+    <p:extLst>
+      <p:ext uri="{BB962C8B-B14F-4D97-AF65-F5344CB8AC3E}">
+        <p14:creationId xmlns:p14="http://schemas.microsoft.com/office/powerpoint/2010/main" val="1024086991"/>
+      </p:ext>
+    </p:extLst>
+  </p:cSld>
+  <p:clrMapOvr>
+    <a:masterClrMapping/>
+  </p:clrMapOvr>
+</p:notes>
+</file>
+
+<file path=ppt/notesSlides/notesSlide24.xml><?xml version="1.0" encoding="utf-8"?>
+<p:notes xmlns:a="http://schemas.openxmlformats.org/drawingml/2006/main" xmlns:r="http://schemas.openxmlformats.org/officeDocument/2006/relationships" xmlns:p="http://schemas.openxmlformats.org/presentationml/2006/main">
+  <p:cSld>
+    <p:spTree>
+      <p:nvGrpSpPr>
+        <p:cNvPr id="1" name=""/>
+        <p:cNvGrpSpPr/>
+        <p:nvPr/>
+      </p:nvGrpSpPr>
+      <p:grpSpPr>
+        <a:xfrm>
+          <a:off x="0" y="0"/>
+          <a:ext cx="0" cy="0"/>
+          <a:chOff x="0" y="0"/>
+          <a:chExt cx="0" cy="0"/>
+        </a:xfrm>
+      </p:grpSpPr>
+      <p:sp>
+        <p:nvSpPr>
+          <p:cNvPr id="2" name="Slide Image Placeholder 1"/>
+          <p:cNvSpPr>
+            <a:spLocks noGrp="1" noRot="1" noChangeAspect="1"/>
+          </p:cNvSpPr>
+          <p:nvPr>
+            <p:ph type="sldImg"/>
+          </p:nvPr>
+        </p:nvSpPr>
+        <p:spPr/>
+      </p:sp>
+      <p:sp>
+        <p:nvSpPr>
+          <p:cNvPr id="3" name="Notes Placeholder 2"/>
+          <p:cNvSpPr>
+            <a:spLocks noGrp="1"/>
+          </p:cNvSpPr>
+          <p:nvPr>
+            <p:ph type="body" idx="1"/>
+          </p:nvPr>
+        </p:nvSpPr>
+        <p:spPr/>
+        <p:txBody>
+          <a:bodyPr/>
+          <a:lstStyle/>
+          <a:p>
+            <a:r>
+              <a:rPr lang="en-US" dirty="0"/>
+              <a:t/>
+            </a:r>
+            <a:endParaRPr lang="en-US" dirty="0"/>
+          </a:p>
+        </p:txBody>
+      </p:sp>
+      <p:sp>
+        <p:nvSpPr>
+          <p:cNvPr id="4" name="Slide Number Placeholder 3"/>
+          <p:cNvSpPr>
+            <a:spLocks noGrp="1"/>
+          </p:cNvSpPr>
+          <p:nvPr>
+            <p:ph type="sldNum" sz="quarter" idx="10"/>
+          </p:nvPr>
+        </p:nvSpPr>
+        <p:spPr/>
+        <p:txBody>
+          <a:bodyPr/>
+          <a:lstStyle/>
+          <a:p>
+            <a:fld id="{F7021451-1387-4CA6-816F-3879F97B5CBC}" type="slidenum">
+              <a:rPr lang="en-US"/>
+              <a:t>24</a:t>
+            </a:fld>
+            <a:endParaRPr lang="en-US"/>
+          </a:p>
+        </p:txBody>
+      </p:sp>
+    </p:spTree>
+    <p:extLst>
+      <p:ext uri="{BB962C8B-B14F-4D97-AF65-F5344CB8AC3E}">
+        <p14:creationId xmlns:p14="http://schemas.microsoft.com/office/powerpoint/2010/main" val="1024086991"/>
+      </p:ext>
+    </p:extLst>
+  </p:cSld>
+  <p:clrMapOvr>
+    <a:masterClrMapping/>
+  </p:clrMapOvr>
+</p:notes>
+</file>
+
+<file path=ppt/notesSlides/notesSlide25.xml><?xml version="1.0" encoding="utf-8"?>
+<p:notes xmlns:a="http://schemas.openxmlformats.org/drawingml/2006/main" xmlns:r="http://schemas.openxmlformats.org/officeDocument/2006/relationships" xmlns:p="http://schemas.openxmlformats.org/presentationml/2006/main">
+  <p:cSld>
+    <p:spTree>
+      <p:nvGrpSpPr>
+        <p:cNvPr id="1" name=""/>
+        <p:cNvGrpSpPr/>
+        <p:nvPr/>
+      </p:nvGrpSpPr>
+      <p:grpSpPr>
+        <a:xfrm>
+          <a:off x="0" y="0"/>
+          <a:ext cx="0" cy="0"/>
+          <a:chOff x="0" y="0"/>
+          <a:chExt cx="0" cy="0"/>
+        </a:xfrm>
+      </p:grpSpPr>
+      <p:sp>
+        <p:nvSpPr>
+          <p:cNvPr id="2" name="Slide Image Placeholder 1"/>
+          <p:cNvSpPr>
+            <a:spLocks noGrp="1" noRot="1" noChangeAspect="1"/>
+          </p:cNvSpPr>
+          <p:nvPr>
+            <p:ph type="sldImg"/>
+          </p:nvPr>
+        </p:nvSpPr>
+        <p:spPr/>
+      </p:sp>
+      <p:sp>
+        <p:nvSpPr>
+          <p:cNvPr id="3" name="Notes Placeholder 2"/>
+          <p:cNvSpPr>
+            <a:spLocks noGrp="1"/>
+          </p:cNvSpPr>
+          <p:nvPr>
+            <p:ph type="body" idx="1"/>
+          </p:nvPr>
+        </p:nvSpPr>
+        <p:spPr/>
+        <p:txBody>
+          <a:bodyPr/>
+          <a:lstStyle/>
+          <a:p>
+            <a:r>
+              <a:rPr lang="en-US" dirty="0"/>
+              <a:t/>
+            </a:r>
+            <a:endParaRPr lang="en-US" dirty="0"/>
+          </a:p>
+        </p:txBody>
+      </p:sp>
+      <p:sp>
+        <p:nvSpPr>
+          <p:cNvPr id="4" name="Slide Number Placeholder 3"/>
+          <p:cNvSpPr>
+            <a:spLocks noGrp="1"/>
+          </p:cNvSpPr>
+          <p:nvPr>
+            <p:ph type="sldNum" sz="quarter" idx="10"/>
+          </p:nvPr>
+        </p:nvSpPr>
+        <p:spPr/>
+        <p:txBody>
+          <a:bodyPr/>
+          <a:lstStyle/>
+          <a:p>
+            <a:fld id="{F7021451-1387-4CA6-816F-3879F97B5CBC}" type="slidenum">
+              <a:rPr lang="en-US"/>
+              <a:t>25</a:t>
+            </a:fld>
+            <a:endParaRPr lang="en-US"/>
+          </a:p>
+        </p:txBody>
+      </p:sp>
+    </p:spTree>
+    <p:extLst>
+      <p:ext uri="{BB962C8B-B14F-4D97-AF65-F5344CB8AC3E}">
+        <p14:creationId xmlns:p14="http://schemas.microsoft.com/office/powerpoint/2010/main" val="1024086991"/>
+      </p:ext>
+    </p:extLst>
+  </p:cSld>
+  <p:clrMapOvr>
+    <a:masterClrMapping/>
+  </p:clrMapOvr>
+</p:notes>
+</file>
+
+<file path=ppt/notesSlides/notesSlide26.xml><?xml version="1.0" encoding="utf-8"?>
+<p:notes xmlns:a="http://schemas.openxmlformats.org/drawingml/2006/main" xmlns:r="http://schemas.openxmlformats.org/officeDocument/2006/relationships" xmlns:p="http://schemas.openxmlformats.org/presentationml/2006/main">
+  <p:cSld>
+    <p:spTree>
+      <p:nvGrpSpPr>
+        <p:cNvPr id="1" name=""/>
+        <p:cNvGrpSpPr/>
+        <p:nvPr/>
+      </p:nvGrpSpPr>
+      <p:grpSpPr>
+        <a:xfrm>
+          <a:off x="0" y="0"/>
+          <a:ext cx="0" cy="0"/>
+          <a:chOff x="0" y="0"/>
+          <a:chExt cx="0" cy="0"/>
+        </a:xfrm>
+      </p:grpSpPr>
+      <p:sp>
+        <p:nvSpPr>
+          <p:cNvPr id="2" name="Slide Image Placeholder 1"/>
+          <p:cNvSpPr>
+            <a:spLocks noGrp="1" noRot="1" noChangeAspect="1"/>
+          </p:cNvSpPr>
+          <p:nvPr>
+            <p:ph type="sldImg"/>
+          </p:nvPr>
+        </p:nvSpPr>
+        <p:spPr/>
+      </p:sp>
+      <p:sp>
+        <p:nvSpPr>
+          <p:cNvPr id="3" name="Notes Placeholder 2"/>
+          <p:cNvSpPr>
+            <a:spLocks noGrp="1"/>
+          </p:cNvSpPr>
+          <p:nvPr>
+            <p:ph type="body" idx="1"/>
+          </p:nvPr>
+        </p:nvSpPr>
+        <p:spPr/>
+        <p:txBody>
+          <a:bodyPr/>
+          <a:lstStyle/>
+          <a:p>
+            <a:r>
+              <a:rPr lang="en-US" dirty="0"/>
+              <a:t/>
+            </a:r>
+            <a:endParaRPr lang="en-US" dirty="0"/>
+          </a:p>
+        </p:txBody>
+      </p:sp>
+      <p:sp>
+        <p:nvSpPr>
+          <p:cNvPr id="4" name="Slide Number Placeholder 3"/>
+          <p:cNvSpPr>
+            <a:spLocks noGrp="1"/>
+          </p:cNvSpPr>
+          <p:nvPr>
+            <p:ph type="sldNum" sz="quarter" idx="10"/>
+          </p:nvPr>
+        </p:nvSpPr>
+        <p:spPr/>
+        <p:txBody>
+          <a:bodyPr/>
+          <a:lstStyle/>
+          <a:p>
+            <a:fld id="{F7021451-1387-4CA6-816F-3879F97B5CBC}" type="slidenum">
+              <a:rPr lang="en-US"/>
+              <a:t>26</a:t>
             </a:fld>
             <a:endParaRPr lang="en-US"/>
           </a:p>
@@ -3141,6 +3586,201 @@
 <file path=ppt/slides/slide21.xml><?xml version="1.0" encoding="utf-8"?>
 <p:sld xmlns:a="http://schemas.openxmlformats.org/drawingml/2006/main" xmlns:r="http://schemas.openxmlformats.org/officeDocument/2006/relationships" xmlns:p="http://schemas.openxmlformats.org/presentationml/2006/main">
   <p:cSld name="Slide 21">
+    <p:bg>
+      <p:bgPr>
+        <a:blipFill dpi="0" rotWithShape="1">
+          <a:blip r:embed="rId1">
+            <a:lum/>
+          </a:blip>
+          <a:srcRect/>
+          <a:stretch>
+            <a:fillRect/>
+          </a:stretch>
+        </a:blipFill>
+        <a:effectLst/>
+      </p:bgPr>
+    </p:bg>
+    <p:spTree>
+      <p:nvGrpSpPr>
+        <p:cNvPr id="1" name=""/>
+        <p:cNvGrpSpPr/>
+        <p:nvPr/>
+      </p:nvGrpSpPr>
+      <p:grpSpPr>
+        <a:xfrm>
+          <a:off x="0" y="0"/>
+          <a:ext cx="0" cy="0"/>
+          <a:chOff x="0" y="0"/>
+          <a:chExt cx="0" cy="0"/>
+        </a:xfrm>
+      </p:grpSpPr>
+    </p:spTree>
+  </p:cSld>
+  <p:clrMapOvr>
+    <a:masterClrMapping/>
+  </p:clrMapOvr>
+</p:sld>
+</file>
+
+<file path=ppt/slides/slide22.xml><?xml version="1.0" encoding="utf-8"?>
+<p:sld xmlns:a="http://schemas.openxmlformats.org/drawingml/2006/main" xmlns:r="http://schemas.openxmlformats.org/officeDocument/2006/relationships" xmlns:p="http://schemas.openxmlformats.org/presentationml/2006/main">
+  <p:cSld name="Slide 22">
+    <p:bg>
+      <p:bgPr>
+        <a:blipFill dpi="0" rotWithShape="1">
+          <a:blip r:embed="rId1">
+            <a:lum/>
+          </a:blip>
+          <a:srcRect/>
+          <a:stretch>
+            <a:fillRect/>
+          </a:stretch>
+        </a:blipFill>
+        <a:effectLst/>
+      </p:bgPr>
+    </p:bg>
+    <p:spTree>
+      <p:nvGrpSpPr>
+        <p:cNvPr id="1" name=""/>
+        <p:cNvGrpSpPr/>
+        <p:nvPr/>
+      </p:nvGrpSpPr>
+      <p:grpSpPr>
+        <a:xfrm>
+          <a:off x="0" y="0"/>
+          <a:ext cx="0" cy="0"/>
+          <a:chOff x="0" y="0"/>
+          <a:chExt cx="0" cy="0"/>
+        </a:xfrm>
+      </p:grpSpPr>
+    </p:spTree>
+  </p:cSld>
+  <p:clrMapOvr>
+    <a:masterClrMapping/>
+  </p:clrMapOvr>
+</p:sld>
+</file>
+
+<file path=ppt/slides/slide23.xml><?xml version="1.0" encoding="utf-8"?>
+<p:sld xmlns:a="http://schemas.openxmlformats.org/drawingml/2006/main" xmlns:r="http://schemas.openxmlformats.org/officeDocument/2006/relationships" xmlns:p="http://schemas.openxmlformats.org/presentationml/2006/main">
+  <p:cSld name="Slide 23">
+    <p:bg>
+      <p:bgPr>
+        <a:blipFill dpi="0" rotWithShape="1">
+          <a:blip r:embed="rId1">
+            <a:lum/>
+          </a:blip>
+          <a:srcRect/>
+          <a:stretch>
+            <a:fillRect/>
+          </a:stretch>
+        </a:blipFill>
+        <a:effectLst/>
+      </p:bgPr>
+    </p:bg>
+    <p:spTree>
+      <p:nvGrpSpPr>
+        <p:cNvPr id="1" name=""/>
+        <p:cNvGrpSpPr/>
+        <p:nvPr/>
+      </p:nvGrpSpPr>
+      <p:grpSpPr>
+        <a:xfrm>
+          <a:off x="0" y="0"/>
+          <a:ext cx="0" cy="0"/>
+          <a:chOff x="0" y="0"/>
+          <a:chExt cx="0" cy="0"/>
+        </a:xfrm>
+      </p:grpSpPr>
+    </p:spTree>
+  </p:cSld>
+  <p:clrMapOvr>
+    <a:masterClrMapping/>
+  </p:clrMapOvr>
+</p:sld>
+</file>
+
+<file path=ppt/slides/slide24.xml><?xml version="1.0" encoding="utf-8"?>
+<p:sld xmlns:a="http://schemas.openxmlformats.org/drawingml/2006/main" xmlns:r="http://schemas.openxmlformats.org/officeDocument/2006/relationships" xmlns:p="http://schemas.openxmlformats.org/presentationml/2006/main">
+  <p:cSld name="Slide 24">
+    <p:bg>
+      <p:bgPr>
+        <a:blipFill dpi="0" rotWithShape="1">
+          <a:blip r:embed="rId1">
+            <a:lum/>
+          </a:blip>
+          <a:srcRect/>
+          <a:stretch>
+            <a:fillRect/>
+          </a:stretch>
+        </a:blipFill>
+        <a:effectLst/>
+      </p:bgPr>
+    </p:bg>
+    <p:spTree>
+      <p:nvGrpSpPr>
+        <p:cNvPr id="1" name=""/>
+        <p:cNvGrpSpPr/>
+        <p:nvPr/>
+      </p:nvGrpSpPr>
+      <p:grpSpPr>
+        <a:xfrm>
+          <a:off x="0" y="0"/>
+          <a:ext cx="0" cy="0"/>
+          <a:chOff x="0" y="0"/>
+          <a:chExt cx="0" cy="0"/>
+        </a:xfrm>
+      </p:grpSpPr>
+    </p:spTree>
+  </p:cSld>
+  <p:clrMapOvr>
+    <a:masterClrMapping/>
+  </p:clrMapOvr>
+</p:sld>
+</file>
+
+<file path=ppt/slides/slide25.xml><?xml version="1.0" encoding="utf-8"?>
+<p:sld xmlns:a="http://schemas.openxmlformats.org/drawingml/2006/main" xmlns:r="http://schemas.openxmlformats.org/officeDocument/2006/relationships" xmlns:p="http://schemas.openxmlformats.org/presentationml/2006/main">
+  <p:cSld name="Slide 25">
+    <p:bg>
+      <p:bgPr>
+        <a:blipFill dpi="0" rotWithShape="1">
+          <a:blip r:embed="rId1">
+            <a:lum/>
+          </a:blip>
+          <a:srcRect/>
+          <a:stretch>
+            <a:fillRect/>
+          </a:stretch>
+        </a:blipFill>
+        <a:effectLst/>
+      </p:bgPr>
+    </p:bg>
+    <p:spTree>
+      <p:nvGrpSpPr>
+        <p:cNvPr id="1" name=""/>
+        <p:cNvGrpSpPr/>
+        <p:nvPr/>
+      </p:nvGrpSpPr>
+      <p:grpSpPr>
+        <a:xfrm>
+          <a:off x="0" y="0"/>
+          <a:ext cx="0" cy="0"/>
+          <a:chOff x="0" y="0"/>
+          <a:chExt cx="0" cy="0"/>
+        </a:xfrm>
+      </p:grpSpPr>
+    </p:spTree>
+  </p:cSld>
+  <p:clrMapOvr>
+    <a:masterClrMapping/>
+  </p:clrMapOvr>
+</p:sld>
+</file>
+
+<file path=ppt/slides/slide26.xml><?xml version="1.0" encoding="utf-8"?>
+<p:sld xmlns:a="http://schemas.openxmlformats.org/drawingml/2006/main" xmlns:r="http://schemas.openxmlformats.org/officeDocument/2006/relationships" xmlns:p="http://schemas.openxmlformats.org/presentationml/2006/main">
+  <p:cSld name="Slide 26">
     <p:bg>
       <p:bgPr>
         <a:blipFill dpi="0" rotWithShape="1">

--- a/presentation/slides.pptx
+++ b/presentation/slides.pptx
@@ -31,9 +31,10 @@
     <p:sldId id="279" r:id="rId25"/>
     <p:sldId id="280" r:id="rId26"/>
     <p:sldId id="281" r:id="rId27"/>
+    <p:sldId id="282" r:id="rId28"/>
   </p:sldIdLst>
   <p:notesMasterIdLst>
-    <p:notesMasterId r:id="rId28"/>
+    <p:notesMasterId r:id="rId29"/>
   </p:notesMasterIdLst>
   <p:sldSz cx="9334500" cy="5248275"/>
   <p:notesSz cx="5248275" cy="9334500"/>
@@ -2135,6 +2136,94 @@
             <a:fld id="{F7021451-1387-4CA6-816F-3879F97B5CBC}" type="slidenum">
               <a:rPr lang="en-US"/>
               <a:t>26</a:t>
+            </a:fld>
+            <a:endParaRPr lang="en-US"/>
+          </a:p>
+        </p:txBody>
+      </p:sp>
+    </p:spTree>
+    <p:extLst>
+      <p:ext uri="{BB962C8B-B14F-4D97-AF65-F5344CB8AC3E}">
+        <p14:creationId xmlns:p14="http://schemas.microsoft.com/office/powerpoint/2010/main" val="1024086991"/>
+      </p:ext>
+    </p:extLst>
+  </p:cSld>
+  <p:clrMapOvr>
+    <a:masterClrMapping/>
+  </p:clrMapOvr>
+</p:notes>
+</file>
+
+<file path=ppt/notesSlides/notesSlide27.xml><?xml version="1.0" encoding="utf-8"?>
+<p:notes xmlns:a="http://schemas.openxmlformats.org/drawingml/2006/main" xmlns:r="http://schemas.openxmlformats.org/officeDocument/2006/relationships" xmlns:p="http://schemas.openxmlformats.org/presentationml/2006/main">
+  <p:cSld>
+    <p:spTree>
+      <p:nvGrpSpPr>
+        <p:cNvPr id="1" name=""/>
+        <p:cNvGrpSpPr/>
+        <p:nvPr/>
+      </p:nvGrpSpPr>
+      <p:grpSpPr>
+        <a:xfrm>
+          <a:off x="0" y="0"/>
+          <a:ext cx="0" cy="0"/>
+          <a:chOff x="0" y="0"/>
+          <a:chExt cx="0" cy="0"/>
+        </a:xfrm>
+      </p:grpSpPr>
+      <p:sp>
+        <p:nvSpPr>
+          <p:cNvPr id="2" name="Slide Image Placeholder 1"/>
+          <p:cNvSpPr>
+            <a:spLocks noGrp="1" noRot="1" noChangeAspect="1"/>
+          </p:cNvSpPr>
+          <p:nvPr>
+            <p:ph type="sldImg"/>
+          </p:nvPr>
+        </p:nvSpPr>
+        <p:spPr/>
+      </p:sp>
+      <p:sp>
+        <p:nvSpPr>
+          <p:cNvPr id="3" name="Notes Placeholder 2"/>
+          <p:cNvSpPr>
+            <a:spLocks noGrp="1"/>
+          </p:cNvSpPr>
+          <p:nvPr>
+            <p:ph type="body" idx="1"/>
+          </p:nvPr>
+        </p:nvSpPr>
+        <p:spPr/>
+        <p:txBody>
+          <a:bodyPr/>
+          <a:lstStyle/>
+          <a:p>
+            <a:r>
+              <a:rPr lang="en-US" dirty="0"/>
+              <a:t/>
+            </a:r>
+            <a:endParaRPr lang="en-US" dirty="0"/>
+          </a:p>
+        </p:txBody>
+      </p:sp>
+      <p:sp>
+        <p:nvSpPr>
+          <p:cNvPr id="4" name="Slide Number Placeholder 3"/>
+          <p:cNvSpPr>
+            <a:spLocks noGrp="1"/>
+          </p:cNvSpPr>
+          <p:nvPr>
+            <p:ph type="sldNum" sz="quarter" idx="10"/>
+          </p:nvPr>
+        </p:nvSpPr>
+        <p:spPr/>
+        <p:txBody>
+          <a:bodyPr/>
+          <a:lstStyle/>
+          <a:p>
+            <a:fld id="{F7021451-1387-4CA6-816F-3879F97B5CBC}" type="slidenum">
+              <a:rPr lang="en-US"/>
+              <a:t>27</a:t>
             </a:fld>
             <a:endParaRPr lang="en-US"/>
           </a:p>
@@ -3781,6 +3870,45 @@
 <file path=ppt/slides/slide26.xml><?xml version="1.0" encoding="utf-8"?>
 <p:sld xmlns:a="http://schemas.openxmlformats.org/drawingml/2006/main" xmlns:r="http://schemas.openxmlformats.org/officeDocument/2006/relationships" xmlns:p="http://schemas.openxmlformats.org/presentationml/2006/main">
   <p:cSld name="Slide 26">
+    <p:bg>
+      <p:bgPr>
+        <a:blipFill dpi="0" rotWithShape="1">
+          <a:blip r:embed="rId1">
+            <a:lum/>
+          </a:blip>
+          <a:srcRect/>
+          <a:stretch>
+            <a:fillRect/>
+          </a:stretch>
+        </a:blipFill>
+        <a:effectLst/>
+      </p:bgPr>
+    </p:bg>
+    <p:spTree>
+      <p:nvGrpSpPr>
+        <p:cNvPr id="1" name=""/>
+        <p:cNvGrpSpPr/>
+        <p:nvPr/>
+      </p:nvGrpSpPr>
+      <p:grpSpPr>
+        <a:xfrm>
+          <a:off x="0" y="0"/>
+          <a:ext cx="0" cy="0"/>
+          <a:chOff x="0" y="0"/>
+          <a:chExt cx="0" cy="0"/>
+        </a:xfrm>
+      </p:grpSpPr>
+    </p:spTree>
+  </p:cSld>
+  <p:clrMapOvr>
+    <a:masterClrMapping/>
+  </p:clrMapOvr>
+</p:sld>
+</file>
+
+<file path=ppt/slides/slide27.xml><?xml version="1.0" encoding="utf-8"?>
+<p:sld xmlns:a="http://schemas.openxmlformats.org/drawingml/2006/main" xmlns:r="http://schemas.openxmlformats.org/officeDocument/2006/relationships" xmlns:p="http://schemas.openxmlformats.org/presentationml/2006/main">
+  <p:cSld name="Slide 27">
     <p:bg>
       <p:bgPr>
         <a:blipFill dpi="0" rotWithShape="1">

--- a/presentation/slides.pptx
+++ b/presentation/slides.pptx
@@ -943,7 +943,7 @@
           <a:lstStyle/>
           <a:p>
             <a:r>
-              <a:t>QR ведёт на репозиторий; отчёт REPORT.md.</a:t>
+              <a:t>QR ведёт на репозиторий и на релиз v1.0.0; отчёт REPORT.md.</a:t>
             </a:r>
           </a:p>
         </p:txBody>
@@ -4007,7 +4007,7 @@
             <a:avLst/>
           </a:prstGeom>
           <a:solidFill>
-            <a:srgbClr val="A2391D"/>
+            <a:srgbClr val="D0603A"/>
           </a:solidFill>
           <a:ln>
             <a:noFill/>
@@ -4094,7 +4094,7 @@
             <a:r>
               <a:rPr sz="2000" b="0">
                 <a:solidFill>
-                  <a:srgbClr val="B0B0B0"/>
+                  <a:srgbClr val="B8B8B8"/>
                 </a:solidFill>
                 <a:latin typeface="Inter"/>
               </a:rPr>
@@ -4128,7 +4128,7 @@
             <a:r>
               <a:rPr sz="1500" b="0">
                 <a:solidFill>
-                  <a:srgbClr val="B0B0B0"/>
+                  <a:srgbClr val="B8B8B8"/>
                 </a:solidFill>
                 <a:latin typeface="Inter"/>
               </a:rPr>
@@ -4188,7 +4188,7 @@
             <a:r>
               <a:rPr sz="1000">
                 <a:solidFill>
-                  <a:srgbClr val="9A9A9A"/>
+                  <a:srgbClr val="A6A6A6"/>
                 </a:solidFill>
                 <a:latin typeface="Inter"/>
               </a:rPr>
@@ -4268,6 +4268,7 @@
       </p:par>
     </p:tnLst>
   </p:timing>
+  <p:transition spd="med" fade="1"/>
 </p:sld>
 </file>
 
@@ -4339,7 +4340,7 @@
             <a:avLst/>
           </a:prstGeom>
           <a:solidFill>
-            <a:srgbClr val="A2391D"/>
+            <a:srgbClr val="D0603A"/>
           </a:solidFill>
           <a:ln>
             <a:noFill/>
@@ -4459,7 +4460,7 @@
             <a:avLst/>
           </a:prstGeom>
           <a:solidFill>
-            <a:srgbClr val="A2391D"/>
+            <a:srgbClr val="D0603A"/>
           </a:solidFill>
           <a:ln>
             <a:noFill/>
@@ -4523,7 +4524,7 @@
             <a:r>
               <a:rPr sz="1500" b="0">
                 <a:solidFill>
-                  <a:srgbClr val="F0F0F0"/>
+                  <a:srgbClr val="EDEDED"/>
                 </a:solidFill>
                 <a:latin typeface="Inter"/>
               </a:rPr>
@@ -4590,7 +4591,7 @@
             <a:avLst/>
           </a:prstGeom>
           <a:solidFill>
-            <a:srgbClr val="A2391D"/>
+            <a:srgbClr val="D0603A"/>
           </a:solidFill>
           <a:ln>
             <a:noFill/>
@@ -4654,7 +4655,7 @@
             <a:r>
               <a:rPr sz="1500" b="0">
                 <a:solidFill>
-                  <a:srgbClr val="F0F0F0"/>
+                  <a:srgbClr val="EDEDED"/>
                 </a:solidFill>
                 <a:latin typeface="Inter"/>
               </a:rPr>
@@ -4721,7 +4722,7 @@
             <a:avLst/>
           </a:prstGeom>
           <a:solidFill>
-            <a:srgbClr val="A2391D"/>
+            <a:srgbClr val="D0603A"/>
           </a:solidFill>
           <a:ln>
             <a:noFill/>
@@ -4785,7 +4786,7 @@
             <a:r>
               <a:rPr sz="1500" b="0">
                 <a:solidFill>
-                  <a:srgbClr val="F0F0F0"/>
+                  <a:srgbClr val="EDEDED"/>
                 </a:solidFill>
                 <a:latin typeface="Inter"/>
               </a:rPr>
@@ -4819,7 +4820,7 @@
             <a:r>
               <a:rPr sz="1100" b="0">
                 <a:solidFill>
-                  <a:srgbClr val="9A9A9A"/>
+                  <a:srgbClr val="A6A6A6"/>
                 </a:solidFill>
                 <a:latin typeface="Inter"/>
               </a:rPr>
@@ -4854,7 +4855,7 @@
             <a:r>
               <a:rPr sz="1000">
                 <a:solidFill>
-                  <a:srgbClr val="9A9A9A"/>
+                  <a:srgbClr val="A6A6A6"/>
                 </a:solidFill>
                 <a:latin typeface="Inter"/>
               </a:rPr>
@@ -5034,6 +5035,7 @@
       </p:par>
     </p:tnLst>
   </p:timing>
+  <p:transition spd="med" fade="1"/>
 </p:sld>
 </file>
 
@@ -5105,7 +5107,7 @@
             <a:avLst/>
           </a:prstGeom>
           <a:solidFill>
-            <a:srgbClr val="A2391D"/>
+            <a:srgbClr val="D0603A"/>
           </a:solidFill>
           <a:ln>
             <a:noFill/>
@@ -5216,7 +5218,7 @@
             <a:avLst/>
           </a:prstGeom>
           <a:solidFill>
-            <a:srgbClr val="A2391D"/>
+            <a:srgbClr val="D0603A"/>
           </a:solidFill>
           <a:ln>
             <a:noFill/>
@@ -5270,7 +5272,7 @@
             <a:r>
               <a:rPr sz="1000">
                 <a:solidFill>
-                  <a:srgbClr val="9A9A9A"/>
+                  <a:srgbClr val="A6A6A6"/>
                 </a:solidFill>
                 <a:latin typeface="Inter"/>
               </a:rPr>
@@ -5422,7 +5424,7 @@
             <a:avLst/>
           </a:prstGeom>
           <a:solidFill>
-            <a:srgbClr val="A2391D"/>
+            <a:srgbClr val="D0603A"/>
           </a:solidFill>
           <a:ln>
             <a:noFill/>
@@ -5501,7 +5503,7 @@
         <p:spPr>
           <a:xfrm>
             <a:off x="571500" y="1554480"/>
-            <a:ext cx="10873945" cy="4023359"/>
+            <a:ext cx="10894978" cy="4023360"/>
           </a:xfrm>
           <a:prstGeom prst="rect">
             <a:avLst/>
@@ -5533,7 +5535,7 @@
             <a:r>
               <a:rPr sz="1100" b="0">
                 <a:solidFill>
-                  <a:srgbClr val="9A9A9A"/>
+                  <a:srgbClr val="A6A6A6"/>
                 </a:solidFill>
                 <a:latin typeface="Inter"/>
               </a:rPr>
@@ -5568,7 +5570,7 @@
             <a:r>
               <a:rPr sz="1000">
                 <a:solidFill>
-                  <a:srgbClr val="9A9A9A"/>
+                  <a:srgbClr val="A6A6A6"/>
                 </a:solidFill>
                 <a:latin typeface="Inter"/>
               </a:rPr>
@@ -5582,6 +5584,7 @@
   <p:clrMapOvr>
     <a:masterClrMapping/>
   </p:clrMapOvr>
+  <p:transition spd="med" fade="1"/>
 </p:sld>
 </file>
 
@@ -5653,7 +5656,7 @@
             <a:avLst/>
           </a:prstGeom>
           <a:solidFill>
-            <a:srgbClr val="A2391D"/>
+            <a:srgbClr val="D0603A"/>
           </a:solidFill>
           <a:ln>
             <a:noFill/>
@@ -5745,11 +5748,11 @@
             <a:r>
               <a:rPr sz="1700" b="0">
                 <a:solidFill>
-                  <a:srgbClr val="F0F0F0"/>
+                  <a:srgbClr val="EDEDED"/>
                 </a:solidFill>
                 <a:latin typeface="Inter"/>
               </a:rPr>
-              <a:t>•  Чтение, объявленное правилом v1, даёт 0.43 (60 support, 80 contradict).</a:t>
+              <a:t>•  Чтение, объявленное правилом v1, даёт 0.43 (60 matched, 80 mismatched).</a:t>
             </a:r>
           </a:p>
           <a:p>
@@ -5761,11 +5764,11 @@
             <a:r>
               <a:rPr sz="1700" b="0">
                 <a:solidFill>
-                  <a:srgbClr val="F0F0F0"/>
+                  <a:srgbClr val="EDEDED"/>
                 </a:solidFill>
                 <a:latin typeface="Inter"/>
               </a:rPr>
-              <a:t>•  После уточнения v2: 140 matched, 0 контрпримеров.</a:t>
+              <a:t>•  Каждый mismatched-байт привязан к пакету-источнику и сохранён.</a:t>
             </a:r>
           </a:p>
           <a:p>
@@ -5777,7 +5780,23 @@
             <a:r>
               <a:rPr sz="1700" b="0">
                 <a:solidFill>
-                  <a:srgbClr val="F0F0F0"/>
+                  <a:srgbClr val="EDEDED"/>
+                </a:solidFill>
+                <a:latin typeface="Inter"/>
+              </a:rPr>
+              <a:t>•  После уточнения v2: 140 matched, 0 контрпримеров.</a:t>
+            </a:r>
+          </a:p>
+          <a:p>
+            <a:pPr>
+              <a:spcAft>
+                <a:spcPts val="1000"/>
+              </a:spcAft>
+            </a:pPr>
+            <a:r>
+              <a:rPr sz="1700" b="0">
+                <a:solidFill>
+                  <a:srgbClr val="EDEDED"/>
                 </a:solidFill>
                 <a:latin typeface="Inter"/>
               </a:rPr>
@@ -5803,7 +5822,7 @@
         <p:spPr>
           <a:xfrm>
             <a:off x="6240780" y="1554480"/>
-            <a:ext cx="5379415" cy="3533603"/>
+            <a:ext cx="5379415" cy="3531201"/>
           </a:xfrm>
           <a:prstGeom prst="rect">
             <a:avLst/>
@@ -5835,7 +5854,7 @@
             <a:r>
               <a:rPr sz="1100" b="0">
                 <a:solidFill>
-                  <a:srgbClr val="9A9A9A"/>
+                  <a:srgbClr val="A6A6A6"/>
                 </a:solidFill>
                 <a:latin typeface="Inter"/>
               </a:rPr>
@@ -5870,7 +5889,7 @@
             <a:r>
               <a:rPr sz="1000">
                 <a:solidFill>
-                  <a:srgbClr val="9A9A9A"/>
+                  <a:srgbClr val="A6A6A6"/>
                 </a:solidFill>
                 <a:latin typeface="Inter"/>
               </a:rPr>
@@ -5884,6 +5903,7 @@
   <p:clrMapOvr>
     <a:masterClrMapping/>
   </p:clrMapOvr>
+  <p:transition spd="med" fade="1"/>
 </p:sld>
 </file>
 
@@ -5955,7 +5975,7 @@
             <a:avLst/>
           </a:prstGeom>
           <a:solidFill>
-            <a:srgbClr val="A2391D"/>
+            <a:srgbClr val="D0603A"/>
           </a:solidFill>
           <a:ln>
             <a:noFill/>
@@ -6047,7 +6067,7 @@
             <a:r>
               <a:rPr sz="1700" b="0">
                 <a:solidFill>
-                  <a:srgbClr val="F0F0F0"/>
+                  <a:srgbClr val="EDEDED"/>
                 </a:solidFill>
                 <a:latin typeface="Inter"/>
               </a:rPr>
@@ -6063,7 +6083,7 @@
             <a:r>
               <a:rPr sz="1700" b="0">
                 <a:solidFill>
-                  <a:srgbClr val="F0F0F0"/>
+                  <a:srgbClr val="EDEDED"/>
                 </a:solidFill>
                 <a:latin typeface="Inter"/>
               </a:rPr>
@@ -6079,7 +6099,7 @@
             <a:r>
               <a:rPr sz="1700" b="0">
                 <a:solidFill>
-                  <a:srgbClr val="F0F0F0"/>
+                  <a:srgbClr val="EDEDED"/>
                 </a:solidFill>
                 <a:latin typeface="Inter"/>
               </a:rPr>
@@ -6138,7 +6158,7 @@
             <a:r>
               <a:rPr sz="1000">
                 <a:solidFill>
-                  <a:srgbClr val="9A9A9A"/>
+                  <a:srgbClr val="A6A6A6"/>
                 </a:solidFill>
                 <a:latin typeface="Inter"/>
               </a:rPr>
@@ -6152,6 +6172,7 @@
   <p:clrMapOvr>
     <a:masterClrMapping/>
   </p:clrMapOvr>
+  <p:transition spd="med" fade="1"/>
 </p:sld>
 </file>
 
@@ -6223,7 +6244,7 @@
             <a:avLst/>
           </a:prstGeom>
           <a:solidFill>
-            <a:srgbClr val="A2391D"/>
+            <a:srgbClr val="D0603A"/>
           </a:solidFill>
           <a:ln>
             <a:noFill/>
@@ -6315,7 +6336,7 @@
             <a:r>
               <a:rPr sz="1700" b="0">
                 <a:solidFill>
-                  <a:srgbClr val="F0F0F0"/>
+                  <a:srgbClr val="EDEDED"/>
                 </a:solidFill>
                 <a:latin typeface="Inter"/>
               </a:rPr>
@@ -6331,7 +6352,7 @@
             <a:r>
               <a:rPr sz="1700" b="0">
                 <a:solidFill>
-                  <a:srgbClr val="F0F0F0"/>
+                  <a:srgbClr val="EDEDED"/>
                 </a:solidFill>
                 <a:latin typeface="Inter"/>
               </a:rPr>
@@ -6347,7 +6368,7 @@
             <a:r>
               <a:rPr sz="1700" b="0">
                 <a:solidFill>
-                  <a:srgbClr val="F0F0F0"/>
+                  <a:srgbClr val="EDEDED"/>
                 </a:solidFill>
                 <a:latin typeface="Inter"/>
               </a:rPr>
@@ -6363,7 +6384,7 @@
             <a:r>
               <a:rPr sz="1700" b="0">
                 <a:solidFill>
-                  <a:srgbClr val="F0F0F0"/>
+                  <a:srgbClr val="EDEDED"/>
                 </a:solidFill>
                 <a:latin typeface="Inter"/>
               </a:rPr>
@@ -6379,7 +6400,7 @@
             <a:r>
               <a:rPr sz="1700" b="0">
                 <a:solidFill>
-                  <a:srgbClr val="F0F0F0"/>
+                  <a:srgbClr val="EDEDED"/>
                 </a:solidFill>
                 <a:latin typeface="Inter"/>
               </a:rPr>
@@ -6418,7 +6439,7 @@
             <a:r>
               <a:rPr sz="1700" b="0">
                 <a:solidFill>
-                  <a:srgbClr val="F0F0F0"/>
+                  <a:srgbClr val="EDEDED"/>
                 </a:solidFill>
                 <a:latin typeface="Inter"/>
               </a:rPr>
@@ -6434,7 +6455,7 @@
             <a:r>
               <a:rPr sz="1700" b="0">
                 <a:solidFill>
-                  <a:srgbClr val="F0F0F0"/>
+                  <a:srgbClr val="EDEDED"/>
                 </a:solidFill>
                 <a:latin typeface="Inter"/>
               </a:rPr>
@@ -6452,7 +6473,7 @@
             <a:r>
               <a:rPr sz="1700" b="0">
                 <a:solidFill>
-                  <a:srgbClr val="F0F0F0"/>
+                  <a:srgbClr val="EDEDED"/>
                 </a:solidFill>
                 <a:latin typeface="Inter"/>
               </a:rPr>
@@ -6468,7 +6489,7 @@
             <a:r>
               <a:rPr sz="1700" b="0">
                 <a:solidFill>
-                  <a:srgbClr val="F0F0F0"/>
+                  <a:srgbClr val="EDEDED"/>
                 </a:solidFill>
                 <a:latin typeface="Inter"/>
               </a:rPr>
@@ -6502,7 +6523,7 @@
             <a:r>
               <a:rPr sz="1100" b="0">
                 <a:solidFill>
-                  <a:srgbClr val="9A9A9A"/>
+                  <a:srgbClr val="A6A6A6"/>
                 </a:solidFill>
                 <a:latin typeface="Inter"/>
               </a:rPr>
@@ -6537,7 +6558,7 @@
             <a:r>
               <a:rPr sz="1000">
                 <a:solidFill>
-                  <a:srgbClr val="9A9A9A"/>
+                  <a:srgbClr val="A6A6A6"/>
                 </a:solidFill>
                 <a:latin typeface="Inter"/>
               </a:rPr>
@@ -6551,6 +6572,7 @@
   <p:clrMapOvr>
     <a:masterClrMapping/>
   </p:clrMapOvr>
+  <p:transition spd="med" fade="1"/>
 </p:sld>
 </file>
 
@@ -6622,7 +6644,7 @@
             <a:avLst/>
           </a:prstGeom>
           <a:solidFill>
-            <a:srgbClr val="A2391D"/>
+            <a:srgbClr val="D0603A"/>
           </a:solidFill>
           <a:ln>
             <a:noFill/>
@@ -6720,7 +6742,7 @@
             <a:r>
               <a:rPr sz="1300" b="0">
                 <a:solidFill>
-                  <a:srgbClr val="B0B0B0"/>
+                  <a:srgbClr val="B8B8B8"/>
                 </a:solidFill>
                 <a:latin typeface="Inter"/>
               </a:rPr>
@@ -6765,7 +6787,7 @@
             <a:r>
               <a:rPr sz="1300" b="0">
                 <a:solidFill>
-                  <a:srgbClr val="B0B0B0"/>
+                  <a:srgbClr val="B8B8B8"/>
                 </a:solidFill>
                 <a:latin typeface="Inter"/>
               </a:rPr>
@@ -6810,7 +6832,7 @@
             <a:r>
               <a:rPr sz="1300" b="0">
                 <a:solidFill>
-                  <a:srgbClr val="B0B0B0"/>
+                  <a:srgbClr val="B8B8B8"/>
                 </a:solidFill>
                 <a:latin typeface="Inter"/>
               </a:rPr>
@@ -6855,7 +6877,7 @@
             <a:r>
               <a:rPr sz="1300" b="0">
                 <a:solidFill>
-                  <a:srgbClr val="B0B0B0"/>
+                  <a:srgbClr val="B8B8B8"/>
                 </a:solidFill>
                 <a:latin typeface="Inter"/>
               </a:rPr>
@@ -6900,7 +6922,7 @@
             <a:r>
               <a:rPr sz="1300" b="0">
                 <a:solidFill>
-                  <a:srgbClr val="B0B0B0"/>
+                  <a:srgbClr val="B8B8B8"/>
                 </a:solidFill>
                 <a:latin typeface="Inter"/>
               </a:rPr>
@@ -6945,7 +6967,7 @@
             <a:r>
               <a:rPr sz="1300" b="0">
                 <a:solidFill>
-                  <a:srgbClr val="B0B0B0"/>
+                  <a:srgbClr val="B8B8B8"/>
                 </a:solidFill>
                 <a:latin typeface="Inter"/>
               </a:rPr>
@@ -6971,7 +6993,7 @@
         <p:spPr>
           <a:xfrm>
             <a:off x="7429500" y="1554480"/>
-            <a:ext cx="4190694" cy="3213739"/>
+            <a:ext cx="4190695" cy="3211868"/>
           </a:xfrm>
           <a:prstGeom prst="rect">
             <a:avLst/>
@@ -7003,7 +7025,7 @@
             <a:r>
               <a:rPr sz="1100" b="0">
                 <a:solidFill>
-                  <a:srgbClr val="9A9A9A"/>
+                  <a:srgbClr val="A6A6A6"/>
                 </a:solidFill>
                 <a:latin typeface="Inter"/>
               </a:rPr>
@@ -7038,7 +7060,7 @@
             <a:r>
               <a:rPr sz="1000">
                 <a:solidFill>
-                  <a:srgbClr val="9A9A9A"/>
+                  <a:srgbClr val="A6A6A6"/>
                 </a:solidFill>
                 <a:latin typeface="Inter"/>
               </a:rPr>
@@ -7052,6 +7074,7 @@
   <p:clrMapOvr>
     <a:masterClrMapping/>
   </p:clrMapOvr>
+  <p:transition spd="med" fade="1"/>
 </p:sld>
 </file>
 
@@ -7123,7 +7146,7 @@
             <a:avLst/>
           </a:prstGeom>
           <a:solidFill>
-            <a:srgbClr val="A2391D"/>
+            <a:srgbClr val="D0603A"/>
           </a:solidFill>
           <a:ln>
             <a:noFill/>
@@ -7185,80 +7208,9 @@
           </a:p>
         </p:txBody>
       </p:sp>
-      <p:sp>
-        <p:nvSpPr>
-          <p:cNvPr id="5" name="TextBox 4"/>
-          <p:cNvSpPr txBox="1"/>
-          <p:nvPr/>
-        </p:nvSpPr>
-        <p:spPr>
-          <a:xfrm>
-            <a:off x="571500" y="1554480"/>
-            <a:ext cx="5394960" cy="3931920"/>
-          </a:xfrm>
-          <a:prstGeom prst="rect">
-            <a:avLst/>
-          </a:prstGeom>
-          <a:noFill/>
-        </p:spPr>
-        <p:txBody>
-          <a:bodyPr wrap="square" anchor="t">
-            <a:spAutoFit/>
-          </a:bodyPr>
-          <a:lstStyle/>
-          <a:p>
-            <a:pPr>
-              <a:spcAft>
-                <a:spcPts val="1000"/>
-              </a:spcAft>
-            </a:pPr>
-            <a:r>
-              <a:rPr sz="1700" b="0">
-                <a:solidFill>
-                  <a:srgbClr val="F0F0F0"/>
-                </a:solidFill>
-                <a:latin typeface="Inter"/>
-              </a:rPr>
-              <a:t>•  Ядро отделено от GUI контрактами JSON — веб тонкая обёртка, не дубль.</a:t>
-            </a:r>
-          </a:p>
-          <a:p>
-            <a:pPr>
-              <a:spcAft>
-                <a:spcPts val="1000"/>
-              </a:spcAft>
-            </a:pPr>
-            <a:r>
-              <a:rPr sz="1700" b="0">
-                <a:solidFill>
-                  <a:srgbClr val="F0F0F0"/>
-                </a:solidFill>
-                <a:latin typeface="Inter"/>
-              </a:rPr>
-              <a:t>•  Те же src.capture и src.protocol, своей логики нет.</a:t>
-            </a:r>
-          </a:p>
-          <a:p>
-            <a:pPr>
-              <a:spcAft>
-                <a:spcPts val="1000"/>
-              </a:spcAft>
-            </a:pPr>
-            <a:r>
-              <a:rPr sz="1700" b="0">
-                <a:solidFill>
-                  <a:srgbClr val="F0F0F0"/>
-                </a:solidFill>
-                <a:latin typeface="Inter"/>
-              </a:rPr>
-              <a:t>•  Ставится отдельно: pip install -e ".[web]".</a:t>
-            </a:r>
-          </a:p>
-        </p:txBody>
-      </p:sp>
       <p:pic>
         <p:nvPicPr>
-          <p:cNvPr id="6" name="Picture 5" descr="web.png"/>
+          <p:cNvPr id="5" name="Picture 4" descr="web.png"/>
           <p:cNvPicPr>
             <a:picLocks noChangeAspect="1"/>
           </p:cNvPicPr>
@@ -7272,24 +7224,24 @@
         </p:blipFill>
         <p:spPr>
           <a:xfrm>
+            <a:off x="571500" y="1554480"/>
+            <a:ext cx="2400300" cy="4114800"/>
+          </a:xfrm>
+          <a:prstGeom prst="rect">
+            <a:avLst/>
+          </a:prstGeom>
+        </p:spPr>
+      </p:pic>
+      <p:sp>
+        <p:nvSpPr>
+          <p:cNvPr id="6" name="TextBox 5"/>
+          <p:cNvSpPr txBox="1"/>
+          <p:nvPr/>
+        </p:nvSpPr>
+        <p:spPr>
+          <a:xfrm>
             <a:off x="6240780" y="1554480"/>
-            <a:ext cx="2400300" cy="4114800"/>
-          </a:xfrm>
-          <a:prstGeom prst="rect">
-            <a:avLst/>
-          </a:prstGeom>
-        </p:spPr>
-      </p:pic>
-      <p:sp>
-        <p:nvSpPr>
-          <p:cNvPr id="7" name="TextBox 6"/>
-          <p:cNvSpPr txBox="1"/>
-          <p:nvPr/>
-        </p:nvSpPr>
-        <p:spPr>
-          <a:xfrm>
-            <a:off x="571500" y="5989320"/>
-            <a:ext cx="11048695" cy="457200"/>
+            <a:ext cx="5379415" cy="3931920"/>
           </a:xfrm>
           <a:prstGeom prst="rect">
             <a:avLst/>
@@ -7302,28 +7254,65 @@
           </a:bodyPr>
           <a:lstStyle/>
           <a:p>
-            <a:r>
-              <a:rPr sz="1100" b="0">
-                <a:solidFill>
-                  <a:srgbClr val="9A9A9A"/>
+            <a:pPr>
+              <a:spcAft>
+                <a:spcPts val="1000"/>
+              </a:spcAft>
+            </a:pPr>
+            <a:r>
+              <a:rPr sz="1700" b="0">
+                <a:solidFill>
+                  <a:srgbClr val="EDEDED"/>
                 </a:solidFill>
                 <a:latin typeface="Inter"/>
               </a:rPr>
-              <a:t>FastAPI + HTMX, 127.0.0.1, extra .[web].</a:t>
-            </a:r>
-          </a:p>
-        </p:txBody>
-      </p:sp>
-      <p:sp>
-        <p:nvSpPr>
-          <p:cNvPr id="8" name="TextBox 7"/>
+              <a:t>•  Ядро отделено от GUI контрактами JSON — веб тонкая обёртка, не дубль.</a:t>
+            </a:r>
+          </a:p>
+          <a:p>
+            <a:pPr>
+              <a:spcAft>
+                <a:spcPts val="1000"/>
+              </a:spcAft>
+            </a:pPr>
+            <a:r>
+              <a:rPr sz="1700" b="0">
+                <a:solidFill>
+                  <a:srgbClr val="EDEDED"/>
+                </a:solidFill>
+                <a:latin typeface="Inter"/>
+              </a:rPr>
+              <a:t>•  Те же src.capture и src.protocol, своей логики нет.</a:t>
+            </a:r>
+          </a:p>
+          <a:p>
+            <a:pPr>
+              <a:spcAft>
+                <a:spcPts val="1000"/>
+              </a:spcAft>
+            </a:pPr>
+            <a:r>
+              <a:rPr sz="1700" b="0">
+                <a:solidFill>
+                  <a:srgbClr val="EDEDED"/>
+                </a:solidFill>
+                <a:latin typeface="Inter"/>
+              </a:rPr>
+              <a:t>•  Ставится отдельно: pip install -e ".[web]".</a:t>
+            </a:r>
+          </a:p>
+        </p:txBody>
+      </p:sp>
+      <p:sp>
+        <p:nvSpPr>
+          <p:cNvPr id="7" name="TextBox 6"/>
           <p:cNvSpPr txBox="1"/>
           <p:nvPr/>
         </p:nvSpPr>
         <p:spPr>
           <a:xfrm>
-            <a:off x="571500" y="6400800"/>
-            <a:ext cx="11048695" cy="274320"/>
+            <a:off x="571500" y="5989320"/>
+            <a:ext cx="11048695" cy="457200"/>
           </a:xfrm>
           <a:prstGeom prst="rect">
             <a:avLst/>
@@ -7336,11 +7325,45 @@
           </a:bodyPr>
           <a:lstStyle/>
           <a:p>
+            <a:r>
+              <a:rPr sz="1100" b="0">
+                <a:solidFill>
+                  <a:srgbClr val="A6A6A6"/>
+                </a:solidFill>
+                <a:latin typeface="Inter"/>
+              </a:rPr>
+              <a:t>FastAPI + HTMX, 127.0.0.1, extra .[web].</a:t>
+            </a:r>
+          </a:p>
+        </p:txBody>
+      </p:sp>
+      <p:sp>
+        <p:nvSpPr>
+          <p:cNvPr id="8" name="TextBox 7"/>
+          <p:cNvSpPr txBox="1"/>
+          <p:nvPr/>
+        </p:nvSpPr>
+        <p:spPr>
+          <a:xfrm>
+            <a:off x="571500" y="6400800"/>
+            <a:ext cx="11048695" cy="274320"/>
+          </a:xfrm>
+          <a:prstGeom prst="rect">
+            <a:avLst/>
+          </a:prstGeom>
+          <a:noFill/>
+        </p:spPr>
+        <p:txBody>
+          <a:bodyPr wrap="square" anchor="t">
+            <a:spAutoFit/>
+          </a:bodyPr>
+          <a:lstStyle/>
+          <a:p>
             <a:pPr algn="ctr"/>
             <a:r>
               <a:rPr sz="1000">
                 <a:solidFill>
-                  <a:srgbClr val="9A9A9A"/>
+                  <a:srgbClr val="A6A6A6"/>
                 </a:solidFill>
                 <a:latin typeface="Inter"/>
               </a:rPr>
@@ -7354,6 +7377,123 @@
   <p:clrMapOvr>
     <a:masterClrMapping/>
   </p:clrMapOvr>
+  <p:timing>
+    <p:tnLst>
+      <p:par>
+        <p:cTn id="1" dur="indefinite" restart="never" nodeType="tmRoot">
+          <p:childTnLst>
+            <p:seq concurrent="1" nextAc="seek">
+              <p:cTn id="2" dur="indefinite" nodeType="mainSeq">
+                <p:childTnLst>
+                  <p:par>
+                    <p:cTn id="3" presetID="10" presetClass="entr" presetSubtype="0" fill="hold" grpId="0" nodeType="clickEffect">
+                      <p:stCondLst>
+                        <p:cond delay="0"/>
+                      </p:stCondLst>
+                      <p:childTnLst>
+                        <p:set>
+                          <p:cBhvr>
+                            <p:cTn id="4" dur="1" fill="hold">
+                              <p:stCondLst>
+                                <p:cond delay="0"/>
+                              </p:stCondLst>
+                            </p:cTn>
+                            <p:tgtEl>
+                              <p:spTgt spid="5"/>
+                            </p:tgtEl>
+                            <p:attrNameLst>
+                              <p:attrName>style.visibility</p:attrName>
+                            </p:attrNameLst>
+                          </p:cBhvr>
+                          <p:to>
+                            <p:strVal val="visible"/>
+                          </p:to>
+                        </p:set>
+                        <p:anim calcmode="lin" valueType="num">
+                          <p:cBhvr additive="base">
+                            <p:cTn id="5" dur="500" fill="hold"/>
+                            <p:tgtEl>
+                              <p:spTgt spid="5"/>
+                            </p:tgtEl>
+                            <p:attrNameLst>
+                              <p:attrName>style.opacity</p:attrName>
+                            </p:attrNameLst>
+                          </p:cBhvr>
+                          <p:tavLst>
+                            <p:tav tm="0">
+                              <p:val>
+                                <p:fltVal val="0"/>
+                              </p:val>
+                            </p:tav>
+                            <p:tav tm="100000">
+                              <p:val>
+                                <p:fltVal val="1"/>
+                              </p:val>
+                            </p:tav>
+                          </p:tavLst>
+                        </p:anim>
+                      </p:childTnLst>
+                    </p:cTn>
+                  </p:par>
+                  <p:par>
+                    <p:cTn id="6" presetID="10" presetClass="entr" presetSubtype="0" fill="hold" grpId="0" nodeType="clickEffect">
+                      <p:stCondLst>
+                        <p:cond delay="0"/>
+                      </p:stCondLst>
+                      <p:childTnLst>
+                        <p:set>
+                          <p:cBhvr>
+                            <p:cTn id="7" dur="1" fill="hold">
+                              <p:stCondLst>
+                                <p:cond delay="0"/>
+                              </p:stCondLst>
+                            </p:cTn>
+                            <p:tgtEl>
+                              <p:spTgt spid="6"/>
+                            </p:tgtEl>
+                            <p:attrNameLst>
+                              <p:attrName>style.visibility</p:attrName>
+                            </p:attrNameLst>
+                          </p:cBhvr>
+                          <p:to>
+                            <p:strVal val="visible"/>
+                          </p:to>
+                        </p:set>
+                        <p:anim calcmode="lin" valueType="num">
+                          <p:cBhvr additive="base">
+                            <p:cTn id="8" dur="500" fill="hold"/>
+                            <p:tgtEl>
+                              <p:spTgt spid="6"/>
+                            </p:tgtEl>
+                            <p:attrNameLst>
+                              <p:attrName>style.opacity</p:attrName>
+                            </p:attrNameLst>
+                          </p:cBhvr>
+                          <p:tavLst>
+                            <p:tav tm="0">
+                              <p:val>
+                                <p:fltVal val="0"/>
+                              </p:val>
+                            </p:tav>
+                            <p:tav tm="100000">
+                              <p:val>
+                                <p:fltVal val="1"/>
+                              </p:val>
+                            </p:tav>
+                          </p:tavLst>
+                        </p:anim>
+                      </p:childTnLst>
+                    </p:cTn>
+                  </p:par>
+                </p:childTnLst>
+              </p:cTn>
+            </p:seq>
+          </p:childTnLst>
+        </p:cTn>
+      </p:par>
+    </p:tnLst>
+  </p:timing>
+  <p:transition spd="med" fade="1"/>
 </p:sld>
 </file>
 
@@ -7425,7 +7565,7 @@
             <a:avLst/>
           </a:prstGeom>
           <a:solidFill>
-            <a:srgbClr val="A2391D"/>
+            <a:srgbClr val="D0603A"/>
           </a:solidFill>
           <a:ln>
             <a:noFill/>
@@ -7536,7 +7676,7 @@
             <a:avLst/>
           </a:prstGeom>
           <a:solidFill>
-            <a:srgbClr val="A2391D"/>
+            <a:srgbClr val="D0603A"/>
           </a:solidFill>
           <a:ln>
             <a:noFill/>
@@ -7590,7 +7730,7 @@
             <a:r>
               <a:rPr sz="1000">
                 <a:solidFill>
-                  <a:srgbClr val="9A9A9A"/>
+                  <a:srgbClr val="A6A6A6"/>
                 </a:solidFill>
                 <a:latin typeface="Inter"/>
               </a:rPr>
@@ -7742,7 +7882,7 @@
             <a:avLst/>
           </a:prstGeom>
           <a:solidFill>
-            <a:srgbClr val="A2391D"/>
+            <a:srgbClr val="D0603A"/>
           </a:solidFill>
           <a:ln>
             <a:noFill/>
@@ -7834,7 +7974,7 @@
             <a:r>
               <a:rPr sz="1700" b="0">
                 <a:solidFill>
-                  <a:srgbClr val="F0F0F0"/>
+                  <a:srgbClr val="EDEDED"/>
                 </a:solidFill>
                 <a:latin typeface="Inter"/>
               </a:rPr>
@@ -7850,7 +7990,7 @@
             <a:r>
               <a:rPr sz="1700" b="0">
                 <a:solidFill>
-                  <a:srgbClr val="F0F0F0"/>
+                  <a:srgbClr val="EDEDED"/>
                 </a:solidFill>
                 <a:latin typeface="Inter"/>
               </a:rPr>
@@ -7866,7 +8006,7 @@
             <a:r>
               <a:rPr sz="1700" b="0">
                 <a:solidFill>
-                  <a:srgbClr val="F0F0F0"/>
+                  <a:srgbClr val="EDEDED"/>
                 </a:solidFill>
                 <a:latin typeface="Inter"/>
               </a:rPr>
@@ -7905,7 +8045,7 @@
             <a:r>
               <a:rPr sz="1700" b="0">
                 <a:solidFill>
-                  <a:srgbClr val="F0F0F0"/>
+                  <a:srgbClr val="EDEDED"/>
                 </a:solidFill>
                 <a:latin typeface="Inter"/>
               </a:rPr>
@@ -7921,7 +8061,7 @@
             <a:r>
               <a:rPr sz="1700" b="0">
                 <a:solidFill>
-                  <a:srgbClr val="F0F0F0"/>
+                  <a:srgbClr val="EDEDED"/>
                 </a:solidFill>
                 <a:latin typeface="Inter"/>
               </a:rPr>
@@ -7937,7 +8077,7 @@
             <a:r>
               <a:rPr sz="1700" b="0">
                 <a:solidFill>
-                  <a:srgbClr val="F0F0F0"/>
+                  <a:srgbClr val="EDEDED"/>
                 </a:solidFill>
                 <a:latin typeface="Inter"/>
               </a:rPr>
@@ -7972,7 +8112,7 @@
             <a:r>
               <a:rPr sz="1000">
                 <a:solidFill>
-                  <a:srgbClr val="9A9A9A"/>
+                  <a:srgbClr val="A6A6A6"/>
                 </a:solidFill>
                 <a:latin typeface="Inter"/>
               </a:rPr>
@@ -7986,6 +8126,7 @@
   <p:clrMapOvr>
     <a:masterClrMapping/>
   </p:clrMapOvr>
+  <p:transition spd="med" fade="1"/>
 </p:sld>
 </file>
 
@@ -8057,7 +8198,7 @@
             <a:avLst/>
           </a:prstGeom>
           <a:solidFill>
-            <a:srgbClr val="A2391D"/>
+            <a:srgbClr val="D0603A"/>
           </a:solidFill>
           <a:ln>
             <a:noFill/>
@@ -8173,7 +8314,7 @@
             <a:r>
               <a:rPr sz="1800" b="0">
                 <a:solidFill>
-                  <a:srgbClr val="F0F0F0"/>
+                  <a:srgbClr val="EDEDED"/>
                 </a:solidFill>
                 <a:latin typeface="Inter"/>
               </a:rPr>
@@ -8191,7 +8332,7 @@
             <a:r>
               <a:rPr sz="1800" b="0">
                 <a:solidFill>
-                  <a:srgbClr val="F0F0F0"/>
+                  <a:srgbClr val="EDEDED"/>
                 </a:solidFill>
                 <a:latin typeface="Inter"/>
               </a:rPr>
@@ -8207,7 +8348,7 @@
             <a:r>
               <a:rPr sz="1800" b="0">
                 <a:solidFill>
-                  <a:srgbClr val="F0F0F0"/>
+                  <a:srgbClr val="EDEDED"/>
                 </a:solidFill>
                 <a:latin typeface="Inter"/>
               </a:rPr>
@@ -8225,7 +8366,7 @@
             <a:r>
               <a:rPr sz="1800" b="0">
                 <a:solidFill>
-                  <a:srgbClr val="F0F0F0"/>
+                  <a:srgbClr val="EDEDED"/>
                 </a:solidFill>
                 <a:latin typeface="Inter"/>
               </a:rPr>
@@ -8259,7 +8400,7 @@
             <a:r>
               <a:rPr sz="1100" b="0">
                 <a:solidFill>
-                  <a:srgbClr val="9A9A9A"/>
+                  <a:srgbClr val="A6A6A6"/>
                 </a:solidFill>
                 <a:latin typeface="Inter"/>
               </a:rPr>
@@ -8294,7 +8435,7 @@
             <a:r>
               <a:rPr sz="1000">
                 <a:solidFill>
-                  <a:srgbClr val="9A9A9A"/>
+                  <a:srgbClr val="A6A6A6"/>
                 </a:solidFill>
                 <a:latin typeface="Inter"/>
               </a:rPr>
@@ -8308,6 +8449,7 @@
   <p:clrMapOvr>
     <a:masterClrMapping/>
   </p:clrMapOvr>
+  <p:transition spd="med" fade="1"/>
 </p:sld>
 </file>
 
@@ -8379,7 +8521,7 @@
             <a:avLst/>
           </a:prstGeom>
           <a:solidFill>
-            <a:srgbClr val="A2391D"/>
+            <a:srgbClr val="D0603A"/>
           </a:solidFill>
           <a:ln>
             <a:noFill/>
@@ -8471,7 +8613,7 @@
             <a:r>
               <a:rPr sz="1700" b="0">
                 <a:solidFill>
-                  <a:srgbClr val="F0F0F0"/>
+                  <a:srgbClr val="EDEDED"/>
                 </a:solidFill>
                 <a:latin typeface="Inter"/>
               </a:rPr>
@@ -8487,7 +8629,7 @@
             <a:r>
               <a:rPr sz="1700" b="0">
                 <a:solidFill>
-                  <a:srgbClr val="F0F0F0"/>
+                  <a:srgbClr val="EDEDED"/>
                 </a:solidFill>
                 <a:latin typeface="Inter"/>
               </a:rPr>
@@ -8526,7 +8668,7 @@
             <a:r>
               <a:rPr sz="1700" b="0">
                 <a:solidFill>
-                  <a:srgbClr val="F0F0F0"/>
+                  <a:srgbClr val="EDEDED"/>
                 </a:solidFill>
                 <a:latin typeface="Inter"/>
               </a:rPr>
@@ -8542,7 +8684,7 @@
             <a:r>
               <a:rPr sz="1700" b="0">
                 <a:solidFill>
-                  <a:srgbClr val="F0F0F0"/>
+                  <a:srgbClr val="EDEDED"/>
                 </a:solidFill>
                 <a:latin typeface="Inter"/>
               </a:rPr>
@@ -8576,7 +8718,7 @@
             <a:r>
               <a:rPr sz="1100" b="0">
                 <a:solidFill>
-                  <a:srgbClr val="9A9A9A"/>
+                  <a:srgbClr val="A6A6A6"/>
                 </a:solidFill>
                 <a:latin typeface="Inter"/>
               </a:rPr>
@@ -8611,7 +8753,7 @@
             <a:r>
               <a:rPr sz="1000">
                 <a:solidFill>
-                  <a:srgbClr val="9A9A9A"/>
+                  <a:srgbClr val="A6A6A6"/>
                 </a:solidFill>
                 <a:latin typeface="Inter"/>
               </a:rPr>
@@ -8625,6 +8767,7 @@
   <p:clrMapOvr>
     <a:masterClrMapping/>
   </p:clrMapOvr>
+  <p:transition spd="med" fade="1"/>
 </p:sld>
 </file>
 
@@ -8696,7 +8839,7 @@
             <a:avLst/>
           </a:prstGeom>
           <a:solidFill>
-            <a:srgbClr val="A2391D"/>
+            <a:srgbClr val="D0603A"/>
           </a:solidFill>
           <a:ln>
             <a:noFill/>
@@ -8788,7 +8931,7 @@
             <a:r>
               <a:rPr sz="1700" b="0">
                 <a:solidFill>
-                  <a:srgbClr val="F0F0F0"/>
+                  <a:srgbClr val="EDEDED"/>
                 </a:solidFill>
                 <a:latin typeface="Inter"/>
               </a:rPr>
@@ -8804,7 +8947,7 @@
             <a:r>
               <a:rPr sz="1700" b="0">
                 <a:solidFill>
-                  <a:srgbClr val="F0F0F0"/>
+                  <a:srgbClr val="EDEDED"/>
                 </a:solidFill>
                 <a:latin typeface="Inter"/>
               </a:rPr>
@@ -8820,7 +8963,7 @@
             <a:r>
               <a:rPr sz="1700" b="0">
                 <a:solidFill>
-                  <a:srgbClr val="F0F0F0"/>
+                  <a:srgbClr val="EDEDED"/>
                 </a:solidFill>
                 <a:latin typeface="Inter"/>
               </a:rPr>
@@ -8836,7 +8979,7 @@
             <a:r>
               <a:rPr sz="1700" b="0">
                 <a:solidFill>
-                  <a:srgbClr val="F0F0F0"/>
+                  <a:srgbClr val="EDEDED"/>
                 </a:solidFill>
                 <a:latin typeface="Inter"/>
               </a:rPr>
@@ -8895,7 +9038,7 @@
             <a:r>
               <a:rPr sz="1100">
                 <a:solidFill>
-                  <a:srgbClr val="9A9A9A"/>
+                  <a:srgbClr val="A6A6A6"/>
                 </a:solidFill>
                 <a:hlinkClick r:id="rId3"/>
               </a:rPr>
@@ -8930,7 +9073,7 @@
             <a:r>
               <a:rPr sz="1000">
                 <a:solidFill>
-                  <a:srgbClr val="9A9A9A"/>
+                  <a:srgbClr val="A6A6A6"/>
                 </a:solidFill>
                 <a:latin typeface="Inter"/>
               </a:rPr>
@@ -8944,6 +9087,7 @@
   <p:clrMapOvr>
     <a:masterClrMapping/>
   </p:clrMapOvr>
+  <p:transition spd="med" fade="1"/>
 </p:sld>
 </file>
 
@@ -9015,7 +9159,7 @@
             <a:avLst/>
           </a:prstGeom>
           <a:solidFill>
-            <a:srgbClr val="A2391D"/>
+            <a:srgbClr val="D0603A"/>
           </a:solidFill>
           <a:ln>
             <a:noFill/>
@@ -9051,8 +9195,8 @@
         </p:nvSpPr>
         <p:spPr>
           <a:xfrm>
-            <a:off x="571500" y="2743200"/>
-            <a:ext cx="11048695" cy="1097280"/>
+            <a:off x="571500" y="1371600"/>
+            <a:ext cx="11048695" cy="914400"/>
           </a:xfrm>
           <a:prstGeom prst="rect">
             <a:avLst/>
@@ -9085,8 +9229,8 @@
         </p:nvSpPr>
         <p:spPr>
           <a:xfrm>
-            <a:off x="571500" y="3840480"/>
-            <a:ext cx="11048695" cy="731520"/>
+            <a:off x="571500" y="2377440"/>
+            <a:ext cx="11048695" cy="548640"/>
           </a:xfrm>
           <a:prstGeom prst="rect">
             <a:avLst/>
@@ -9102,7 +9246,7 @@
             <a:r>
               <a:rPr sz="1800" b="0">
                 <a:solidFill>
-                  <a:srgbClr val="B0B0B0"/>
+                  <a:srgbClr val="B8B8B8"/>
                 </a:solidFill>
                 <a:latin typeface="Inter"/>
               </a:rPr>
@@ -9119,8 +9263,8 @@
         </p:nvSpPr>
         <p:spPr>
           <a:xfrm>
-            <a:off x="571500" y="4572000"/>
-            <a:ext cx="11048695" cy="548640"/>
+            <a:off x="571500" y="3017520"/>
+            <a:ext cx="3439058" cy="914400"/>
           </a:xfrm>
           <a:prstGeom prst="rect">
             <a:avLst/>
@@ -9133,14 +9277,27 @@
           </a:bodyPr>
           <a:lstStyle/>
           <a:p>
-            <a:r>
-              <a:rPr sz="1400">
-                <a:solidFill>
-                  <a:srgbClr val="E0603A"/>
-                </a:solidFill>
-                <a:hlinkClick r:id="rId2"/>
-              </a:rPr>
-              <a:t>https://github.com/Pavel1778/madrigal-protocol-lab</a:t>
+            <a:pPr algn="ctr"/>
+            <a:r>
+              <a:rPr sz="3000" b="0">
+                <a:solidFill>
+                  <a:srgbClr val="FFFFFF"/>
+                </a:solidFill>
+                <a:latin typeface="Manrope"/>
+              </a:rPr>
+              <a:t>741</a:t>
+            </a:r>
+          </a:p>
+          <a:p>
+            <a:pPr algn="ctr"/>
+            <a:r>
+              <a:rPr sz="1200" b="0">
+                <a:solidFill>
+                  <a:srgbClr val="B8B8B8"/>
+                </a:solidFill>
+                <a:latin typeface="Inter"/>
+              </a:rPr>
+              <a:t>тест</a:t>
             </a:r>
           </a:p>
         </p:txBody>
@@ -9153,8 +9310,8 @@
         </p:nvSpPr>
         <p:spPr>
           <a:xfrm>
-            <a:off x="571500" y="6400800"/>
-            <a:ext cx="11048695" cy="274320"/>
+            <a:off x="4376318" y="3017520"/>
+            <a:ext cx="3439058" cy="914400"/>
           </a:xfrm>
           <a:prstGeom prst="rect">
             <a:avLst/>
@@ -9169,9 +9326,221 @@
           <a:p>
             <a:pPr algn="ctr"/>
             <a:r>
+              <a:rPr sz="3000" b="0">
+                <a:solidFill>
+                  <a:srgbClr val="FFFFFF"/>
+                </a:solidFill>
+                <a:latin typeface="Manrope"/>
+              </a:rPr>
+              <a:t>90%</a:t>
+            </a:r>
+          </a:p>
+          <a:p>
+            <a:pPr algn="ctr"/>
+            <a:r>
+              <a:rPr sz="1200" b="0">
+                <a:solidFill>
+                  <a:srgbClr val="B8B8B8"/>
+                </a:solidFill>
+                <a:latin typeface="Inter"/>
+              </a:rPr>
+              <a:t>покрытие</a:t>
+            </a:r>
+          </a:p>
+        </p:txBody>
+      </p:sp>
+      <p:sp>
+        <p:nvSpPr>
+          <p:cNvPr id="8" name="TextBox 7"/>
+          <p:cNvSpPr txBox="1"/>
+          <p:nvPr/>
+        </p:nvSpPr>
+        <p:spPr>
+          <a:xfrm>
+            <a:off x="8181136" y="3017520"/>
+            <a:ext cx="3439058" cy="914400"/>
+          </a:xfrm>
+          <a:prstGeom prst="rect">
+            <a:avLst/>
+          </a:prstGeom>
+          <a:noFill/>
+        </p:spPr>
+        <p:txBody>
+          <a:bodyPr wrap="square" anchor="t">
+            <a:spAutoFit/>
+          </a:bodyPr>
+          <a:lstStyle/>
+          <a:p>
+            <a:pPr algn="ctr"/>
+            <a:r>
+              <a:rPr sz="3000" b="0">
+                <a:solidFill>
+                  <a:srgbClr val="FFFFFF"/>
+                </a:solidFill>
+                <a:latin typeface="Manrope"/>
+              </a:rPr>
+              <a:t>8</a:t>
+            </a:r>
+          </a:p>
+          <a:p>
+            <a:pPr algn="ctr"/>
+            <a:r>
+              <a:rPr sz="1200" b="0">
+                <a:solidFill>
+                  <a:srgbClr val="B8B8B8"/>
+                </a:solidFill>
+                <a:latin typeface="Inter"/>
+              </a:rPr>
+              <a:t>артефактов в релизе</a:t>
+            </a:r>
+          </a:p>
+        </p:txBody>
+      </p:sp>
+      <p:pic>
+        <p:nvPicPr>
+          <p:cNvPr id="9" name="Picture 8" descr="qr_repo.png"/>
+          <p:cNvPicPr>
+            <a:picLocks noChangeAspect="1"/>
+          </p:cNvPicPr>
+          <p:nvPr/>
+        </p:nvPicPr>
+        <p:blipFill>
+          <a:blip r:embed="rId2"/>
+          <a:stretch>
+            <a:fillRect/>
+          </a:stretch>
+        </p:blipFill>
+        <p:spPr>
+          <a:xfrm>
+            <a:off x="4084167" y="4206240"/>
+            <a:ext cx="1463040" cy="1463040"/>
+          </a:xfrm>
+          <a:prstGeom prst="rect">
+            <a:avLst/>
+          </a:prstGeom>
+        </p:spPr>
+      </p:pic>
+      <p:sp>
+        <p:nvSpPr>
+          <p:cNvPr id="10" name="TextBox 9"/>
+          <p:cNvSpPr txBox="1"/>
+          <p:nvPr/>
+        </p:nvSpPr>
+        <p:spPr>
+          <a:xfrm>
+            <a:off x="3718407" y="5760720"/>
+            <a:ext cx="2194560" cy="320040"/>
+          </a:xfrm>
+          <a:prstGeom prst="rect">
+            <a:avLst/>
+          </a:prstGeom>
+          <a:noFill/>
+        </p:spPr>
+        <p:txBody>
+          <a:bodyPr wrap="square" anchor="t">
+            <a:spAutoFit/>
+          </a:bodyPr>
+          <a:lstStyle/>
+          <a:p>
+            <a:pPr algn="ctr"/>
+            <a:r>
+              <a:rPr sz="1100" b="0">
+                <a:solidFill>
+                  <a:srgbClr val="A6A6A6"/>
+                </a:solidFill>
+                <a:latin typeface="Inter"/>
+              </a:rPr>
+              <a:t>Репозиторий</a:t>
+            </a:r>
+          </a:p>
+        </p:txBody>
+      </p:sp>
+      <p:pic>
+        <p:nvPicPr>
+          <p:cNvPr id="11" name="Picture 10" descr="qr_release.png"/>
+          <p:cNvPicPr>
+            <a:picLocks noChangeAspect="1"/>
+          </p:cNvPicPr>
+          <p:nvPr/>
+        </p:nvPicPr>
+        <p:blipFill>
+          <a:blip r:embed="rId3"/>
+          <a:stretch>
+            <a:fillRect/>
+          </a:stretch>
+        </p:blipFill>
+        <p:spPr>
+          <a:xfrm>
+            <a:off x="6644487" y="4206240"/>
+            <a:ext cx="1463040" cy="1463040"/>
+          </a:xfrm>
+          <a:prstGeom prst="rect">
+            <a:avLst/>
+          </a:prstGeom>
+        </p:spPr>
+      </p:pic>
+      <p:sp>
+        <p:nvSpPr>
+          <p:cNvPr id="12" name="TextBox 11"/>
+          <p:cNvSpPr txBox="1"/>
+          <p:nvPr/>
+        </p:nvSpPr>
+        <p:spPr>
+          <a:xfrm>
+            <a:off x="6278727" y="5760720"/>
+            <a:ext cx="2194560" cy="320040"/>
+          </a:xfrm>
+          <a:prstGeom prst="rect">
+            <a:avLst/>
+          </a:prstGeom>
+          <a:noFill/>
+        </p:spPr>
+        <p:txBody>
+          <a:bodyPr wrap="square" anchor="t">
+            <a:spAutoFit/>
+          </a:bodyPr>
+          <a:lstStyle/>
+          <a:p>
+            <a:pPr algn="ctr"/>
+            <a:r>
+              <a:rPr sz="1100" b="0">
+                <a:solidFill>
+                  <a:srgbClr val="A6A6A6"/>
+                </a:solidFill>
+                <a:latin typeface="Inter"/>
+              </a:rPr>
+              <a:t>Релиз v1.0.0</a:t>
+            </a:r>
+          </a:p>
+        </p:txBody>
+      </p:sp>
+      <p:sp>
+        <p:nvSpPr>
+          <p:cNvPr id="13" name="TextBox 12"/>
+          <p:cNvSpPr txBox="1"/>
+          <p:nvPr/>
+        </p:nvSpPr>
+        <p:spPr>
+          <a:xfrm>
+            <a:off x="571500" y="6400800"/>
+            <a:ext cx="11048695" cy="274320"/>
+          </a:xfrm>
+          <a:prstGeom prst="rect">
+            <a:avLst/>
+          </a:prstGeom>
+          <a:noFill/>
+        </p:spPr>
+        <p:txBody>
+          <a:bodyPr wrap="square" anchor="t">
+            <a:spAutoFit/>
+          </a:bodyPr>
+          <a:lstStyle/>
+          <a:p>
+            <a:pPr algn="ctr"/>
+            <a:r>
               <a:rPr sz="1000">
                 <a:solidFill>
-                  <a:srgbClr val="9A9A9A"/>
+                  <a:srgbClr val="A6A6A6"/>
                 </a:solidFill>
                 <a:latin typeface="Inter"/>
               </a:rPr>
@@ -9185,6 +9554,7 @@
   <p:clrMapOvr>
     <a:masterClrMapping/>
   </p:clrMapOvr>
+  <p:transition spd="med" fade="1"/>
 </p:sld>
 </file>
 
@@ -9256,7 +9626,7 @@
             <a:avLst/>
           </a:prstGeom>
           <a:solidFill>
-            <a:srgbClr val="A2391D"/>
+            <a:srgbClr val="D0603A"/>
           </a:solidFill>
           <a:ln>
             <a:noFill/>
@@ -9348,7 +9718,7 @@
             <a:r>
               <a:rPr sz="1700" b="0">
                 <a:solidFill>
-                  <a:srgbClr val="F0F0F0"/>
+                  <a:srgbClr val="EDEDED"/>
                 </a:solidFill>
                 <a:latin typeface="Inter"/>
               </a:rPr>
@@ -9366,7 +9736,7 @@
             <a:r>
               <a:rPr sz="1700" b="0">
                 <a:solidFill>
-                  <a:srgbClr val="F0F0F0"/>
+                  <a:srgbClr val="EDEDED"/>
                 </a:solidFill>
                 <a:latin typeface="Inter"/>
               </a:rPr>
@@ -9382,7 +9752,7 @@
             <a:r>
               <a:rPr sz="1700" b="0">
                 <a:solidFill>
-                  <a:srgbClr val="F0F0F0"/>
+                  <a:srgbClr val="EDEDED"/>
                 </a:solidFill>
                 <a:latin typeface="Inter"/>
               </a:rPr>
@@ -9400,7 +9770,7 @@
             <a:r>
               <a:rPr sz="1700" b="0">
                 <a:solidFill>
-                  <a:srgbClr val="F0F0F0"/>
+                  <a:srgbClr val="EDEDED"/>
                 </a:solidFill>
                 <a:latin typeface="Inter"/>
               </a:rPr>
@@ -9416,7 +9786,7 @@
             <a:r>
               <a:rPr sz="1700" b="0">
                 <a:solidFill>
-                  <a:srgbClr val="F0F0F0"/>
+                  <a:srgbClr val="EDEDED"/>
                 </a:solidFill>
                 <a:latin typeface="Inter"/>
               </a:rPr>
@@ -9434,7 +9804,7 @@
             <a:r>
               <a:rPr sz="1700" b="0">
                 <a:solidFill>
-                  <a:srgbClr val="F0F0F0"/>
+                  <a:srgbClr val="EDEDED"/>
                 </a:solidFill>
                 <a:latin typeface="Inter"/>
               </a:rPr>
@@ -9473,7 +9843,7 @@
             <a:r>
               <a:rPr sz="1700" b="0">
                 <a:solidFill>
-                  <a:srgbClr val="F0F0F0"/>
+                  <a:srgbClr val="EDEDED"/>
                 </a:solidFill>
                 <a:latin typeface="Inter"/>
               </a:rPr>
@@ -9489,7 +9859,7 @@
             <a:r>
               <a:rPr sz="1700" b="0">
                 <a:solidFill>
-                  <a:srgbClr val="F0F0F0"/>
+                  <a:srgbClr val="EDEDED"/>
                 </a:solidFill>
                 <a:latin typeface="Inter"/>
               </a:rPr>
@@ -9523,7 +9893,7 @@
             <a:r>
               <a:rPr sz="1100" b="0">
                 <a:solidFill>
-                  <a:srgbClr val="9A9A9A"/>
+                  <a:srgbClr val="A6A6A6"/>
                 </a:solidFill>
                 <a:latin typeface="Inter"/>
               </a:rPr>
@@ -9558,7 +9928,7 @@
             <a:r>
               <a:rPr sz="1000">
                 <a:solidFill>
-                  <a:srgbClr val="9A9A9A"/>
+                  <a:srgbClr val="A6A6A6"/>
                 </a:solidFill>
                 <a:latin typeface="Inter"/>
               </a:rPr>
@@ -9572,6 +9942,7 @@
   <p:clrMapOvr>
     <a:masterClrMapping/>
   </p:clrMapOvr>
+  <p:transition spd="med" fade="1"/>
 </p:sld>
 </file>
 
@@ -9643,7 +10014,7 @@
             <a:avLst/>
           </a:prstGeom>
           <a:solidFill>
-            <a:srgbClr val="A2391D"/>
+            <a:srgbClr val="D0603A"/>
           </a:solidFill>
           <a:ln>
             <a:noFill/>
@@ -9754,7 +10125,7 @@
             <a:avLst/>
           </a:prstGeom>
           <a:solidFill>
-            <a:srgbClr val="A2391D"/>
+            <a:srgbClr val="D0603A"/>
           </a:solidFill>
           <a:ln>
             <a:noFill/>
@@ -9808,7 +10179,7 @@
             <a:r>
               <a:rPr sz="1000">
                 <a:solidFill>
-                  <a:srgbClr val="9A9A9A"/>
+                  <a:srgbClr val="A6A6A6"/>
                 </a:solidFill>
                 <a:latin typeface="Inter"/>
               </a:rPr>
@@ -9960,7 +10331,7 @@
             <a:avLst/>
           </a:prstGeom>
           <a:solidFill>
-            <a:srgbClr val="A2391D"/>
+            <a:srgbClr val="D0603A"/>
           </a:solidFill>
           <a:ln>
             <a:noFill/>
@@ -10039,7 +10410,7 @@
         <p:spPr>
           <a:xfrm>
             <a:off x="571500" y="1554480"/>
-            <a:ext cx="8770267" cy="4023359"/>
+            <a:ext cx="11048695" cy="3914394"/>
           </a:xfrm>
           <a:prstGeom prst="rect">
             <a:avLst/>
@@ -10071,11 +10442,11 @@
             <a:r>
               <a:rPr sz="1100" b="0">
                 <a:solidFill>
-                  <a:srgbClr val="9A9A9A"/>
+                  <a:srgbClr val="A6A6A6"/>
                 </a:solidFill>
                 <a:latin typeface="Inter"/>
               </a:rPr>
-              <a:t>capture · protocol + hypothesis · ui. Контракты зафиксированы JSON Schema draft 2020-12.</a:t>
+              <a:t>Контракты зафиксированы JSON Schema (draft 2020-12) и не меняются молча.</a:t>
             </a:r>
           </a:p>
         </p:txBody>
@@ -10106,7 +10477,7 @@
             <a:r>
               <a:rPr sz="1000">
                 <a:solidFill>
-                  <a:srgbClr val="9A9A9A"/>
+                  <a:srgbClr val="A6A6A6"/>
                 </a:solidFill>
                 <a:latin typeface="Inter"/>
               </a:rPr>
@@ -10120,6 +10491,7 @@
   <p:clrMapOvr>
     <a:masterClrMapping/>
   </p:clrMapOvr>
+  <p:transition spd="med" fade="1"/>
 </p:sld>
 </file>
 
@@ -10191,7 +10563,7 @@
             <a:avLst/>
           </a:prstGeom>
           <a:solidFill>
-            <a:srgbClr val="A2391D"/>
+            <a:srgbClr val="D0603A"/>
           </a:solidFill>
           <a:ln>
             <a:noFill/>
@@ -10302,7 +10674,7 @@
             <a:avLst/>
           </a:prstGeom>
           <a:solidFill>
-            <a:srgbClr val="A2391D"/>
+            <a:srgbClr val="D0603A"/>
           </a:solidFill>
           <a:ln>
             <a:noFill/>
@@ -10356,7 +10728,7 @@
             <a:r>
               <a:rPr sz="1000">
                 <a:solidFill>
-                  <a:srgbClr val="9A9A9A"/>
+                  <a:srgbClr val="A6A6A6"/>
                 </a:solidFill>
                 <a:latin typeface="Inter"/>
               </a:rPr>
@@ -10508,7 +10880,7 @@
             <a:avLst/>
           </a:prstGeom>
           <a:solidFill>
-            <a:srgbClr val="A2391D"/>
+            <a:srgbClr val="D0603A"/>
           </a:solidFill>
           <a:ln>
             <a:noFill/>
@@ -10600,7 +10972,7 @@
             <a:r>
               <a:rPr sz="1700" b="0">
                 <a:solidFill>
-                  <a:srgbClr val="F0F0F0"/>
+                  <a:srgbClr val="EDEDED"/>
                 </a:solidFill>
                 <a:latin typeface="Inter"/>
               </a:rPr>
@@ -10616,7 +10988,7 @@
             <a:r>
               <a:rPr sz="1700" b="0">
                 <a:solidFill>
-                  <a:srgbClr val="F0F0F0"/>
+                  <a:srgbClr val="EDEDED"/>
                 </a:solidFill>
                 <a:latin typeface="Inter"/>
               </a:rPr>
@@ -10632,7 +11004,7 @@
             <a:r>
               <a:rPr sz="1700" b="0">
                 <a:solidFill>
-                  <a:srgbClr val="F0F0F0"/>
+                  <a:srgbClr val="EDEDED"/>
                 </a:solidFill>
                 <a:latin typeface="Inter"/>
               </a:rPr>
@@ -10648,7 +11020,7 @@
             <a:r>
               <a:rPr sz="1700" b="0">
                 <a:solidFill>
-                  <a:srgbClr val="F0F0F0"/>
+                  <a:srgbClr val="EDEDED"/>
                 </a:solidFill>
                 <a:latin typeface="Inter"/>
               </a:rPr>
@@ -10706,7 +11078,7 @@
             <a:r>
               <a:rPr sz="1100" b="0">
                 <a:solidFill>
-                  <a:srgbClr val="9A9A9A"/>
+                  <a:srgbClr val="A6A6A6"/>
                 </a:solidFill>
                 <a:latin typeface="Inter"/>
               </a:rPr>
@@ -10741,7 +11113,7 @@
             <a:r>
               <a:rPr sz="1000">
                 <a:solidFill>
-                  <a:srgbClr val="9A9A9A"/>
+                  <a:srgbClr val="A6A6A6"/>
                 </a:solidFill>
                 <a:latin typeface="Inter"/>
               </a:rPr>
@@ -10755,6 +11127,7 @@
   <p:clrMapOvr>
     <a:masterClrMapping/>
   </p:clrMapOvr>
+  <p:transition spd="med" fade="1"/>
 </p:sld>
 </file>
 
@@ -10826,7 +11199,7 @@
             <a:avLst/>
           </a:prstGeom>
           <a:solidFill>
-            <a:srgbClr val="A2391D"/>
+            <a:srgbClr val="D0603A"/>
           </a:solidFill>
           <a:ln>
             <a:noFill/>
@@ -10918,7 +11291,7 @@
             <a:r>
               <a:rPr sz="1700" b="0">
                 <a:solidFill>
-                  <a:srgbClr val="F0F0F0"/>
+                  <a:srgbClr val="EDEDED"/>
                 </a:solidFill>
                 <a:latin typeface="Inter"/>
               </a:rPr>
@@ -10934,7 +11307,7 @@
             <a:r>
               <a:rPr sz="1700" b="0">
                 <a:solidFill>
-                  <a:srgbClr val="F0F0F0"/>
+                  <a:srgbClr val="EDEDED"/>
                 </a:solidFill>
                 <a:latin typeface="Inter"/>
               </a:rPr>
@@ -10950,7 +11323,7 @@
             <a:r>
               <a:rPr sz="1700" b="0">
                 <a:solidFill>
-                  <a:srgbClr val="F0F0F0"/>
+                  <a:srgbClr val="EDEDED"/>
                 </a:solidFill>
                 <a:latin typeface="Inter"/>
               </a:rPr>
@@ -10968,7 +11341,7 @@
             <a:r>
               <a:rPr sz="1700" b="0">
                 <a:solidFill>
-                  <a:srgbClr val="F0F0F0"/>
+                  <a:srgbClr val="EDEDED"/>
                 </a:solidFill>
                 <a:latin typeface="Inter"/>
               </a:rPr>
@@ -10984,7 +11357,7 @@
             <a:r>
               <a:rPr sz="1700" b="0">
                 <a:solidFill>
-                  <a:srgbClr val="F0F0F0"/>
+                  <a:srgbClr val="EDEDED"/>
                 </a:solidFill>
                 <a:latin typeface="Inter"/>
               </a:rPr>
@@ -11023,7 +11396,7 @@
             <a:r>
               <a:rPr sz="1700" b="0">
                 <a:solidFill>
-                  <a:srgbClr val="F0F0F0"/>
+                  <a:srgbClr val="EDEDED"/>
                 </a:solidFill>
                 <a:latin typeface="Inter"/>
               </a:rPr>
@@ -11039,7 +11412,7 @@
             <a:r>
               <a:rPr sz="1700" b="0">
                 <a:solidFill>
-                  <a:srgbClr val="F0F0F0"/>
+                  <a:srgbClr val="EDEDED"/>
                 </a:solidFill>
                 <a:latin typeface="Inter"/>
               </a:rPr>
@@ -11055,7 +11428,7 @@
             <a:r>
               <a:rPr sz="1700" b="0">
                 <a:solidFill>
-                  <a:srgbClr val="F0F0F0"/>
+                  <a:srgbClr val="EDEDED"/>
                 </a:solidFill>
                 <a:latin typeface="Inter"/>
               </a:rPr>
@@ -11089,7 +11462,7 @@
             <a:r>
               <a:rPr sz="1100" b="0">
                 <a:solidFill>
-                  <a:srgbClr val="9A9A9A"/>
+                  <a:srgbClr val="A6A6A6"/>
                 </a:solidFill>
                 <a:latin typeface="Inter"/>
               </a:rPr>
@@ -11124,7 +11497,7 @@
             <a:r>
               <a:rPr sz="1000">
                 <a:solidFill>
-                  <a:srgbClr val="9A9A9A"/>
+                  <a:srgbClr val="A6A6A6"/>
                 </a:solidFill>
                 <a:latin typeface="Inter"/>
               </a:rPr>
@@ -11138,6 +11511,7 @@
   <p:clrMapOvr>
     <a:masterClrMapping/>
   </p:clrMapOvr>
+  <p:transition spd="med" fade="1"/>
 </p:sld>
 </file>
 
@@ -11209,7 +11583,7 @@
             <a:avLst/>
           </a:prstGeom>
           <a:solidFill>
-            <a:srgbClr val="A2391D"/>
+            <a:srgbClr val="D0603A"/>
           </a:solidFill>
           <a:ln>
             <a:noFill/>
@@ -11301,7 +11675,7 @@
             <a:r>
               <a:rPr sz="1700" b="0">
                 <a:solidFill>
-                  <a:srgbClr val="F0F0F0"/>
+                  <a:srgbClr val="EDEDED"/>
                 </a:solidFill>
                 <a:latin typeface="Inter"/>
               </a:rPr>
@@ -11317,7 +11691,7 @@
             <a:r>
               <a:rPr sz="1700" b="0">
                 <a:solidFill>
-                  <a:srgbClr val="F0F0F0"/>
+                  <a:srgbClr val="EDEDED"/>
                 </a:solidFill>
                 <a:latin typeface="Inter"/>
               </a:rPr>
@@ -11335,7 +11709,7 @@
             <a:r>
               <a:rPr sz="1700" b="0">
                 <a:solidFill>
-                  <a:srgbClr val="F0F0F0"/>
+                  <a:srgbClr val="EDEDED"/>
                 </a:solidFill>
                 <a:latin typeface="Inter"/>
               </a:rPr>
@@ -11351,7 +11725,7 @@
             <a:r>
               <a:rPr sz="1700" b="0">
                 <a:solidFill>
-                  <a:srgbClr val="F0F0F0"/>
+                  <a:srgbClr val="EDEDED"/>
                 </a:solidFill>
                 <a:latin typeface="Inter"/>
               </a:rPr>
@@ -11367,7 +11741,7 @@
             <a:r>
               <a:rPr sz="1700" b="0">
                 <a:solidFill>
-                  <a:srgbClr val="F0F0F0"/>
+                  <a:srgbClr val="EDEDED"/>
                 </a:solidFill>
                 <a:latin typeface="Inter"/>
               </a:rPr>
@@ -11426,7 +11800,7 @@
             <a:r>
               <a:rPr sz="1000">
                 <a:solidFill>
-                  <a:srgbClr val="9A9A9A"/>
+                  <a:srgbClr val="A6A6A6"/>
                 </a:solidFill>
                 <a:latin typeface="Inter"/>
               </a:rPr>
@@ -11440,6 +11814,7 @@
   <p:clrMapOvr>
     <a:masterClrMapping/>
   </p:clrMapOvr>
+  <p:transition spd="med" fade="1"/>
 </p:sld>
 </file>
 

--- a/presentation/slides.pptx
+++ b/presentation/slides.pptx
@@ -520,7 +520,7 @@
           <a:lstStyle/>
           <a:p>
             <a:r>
-              <a:t>Восстановление недокументированного протокола поверх TCP.</a:t>
+              <a:t>Приветствие, 20 секунд.</a:t>
             </a:r>
           </a:p>
         </p:txBody>
@@ -590,7 +590,7 @@
           <a:lstStyle/>
           <a:p>
             <a:r>
-              <a:t>Команда HTTP 418.</a:t>
+              <a:t>Два человека, разделение ролей, QR на контакт у каждого.</a:t>
             </a:r>
           </a:p>
         </p:txBody>
@@ -660,7 +660,7 @@
           <a:lstStyle/>
           <a:p>
             <a:r>
-              <a:t>QR ведут на репозиторий и на релиз v1.0.0.</a:t>
+              <a:t>QR ведут на репозиторий, релиз и контакты.</a:t>
             </a:r>
           </a:p>
         </p:txBody>
@@ -3681,11 +3681,12 @@
             <a:avLst/>
           </a:prstGeom>
           <a:solidFill>
-            <a:srgbClr val="0E1011"/>
+            <a:srgbClr val="131516"/>
           </a:solidFill>
           <a:ln>
             <a:noFill/>
           </a:ln>
+          <a:effectLst/>
         </p:spPr>
         <p:style>
           <a:lnRef idx="1">
@@ -3718,17 +3719,29 @@
         <p:spPr>
           <a:xfrm>
             <a:off x="0" y="0"/>
-            <a:ext cx="45720" cy="6858000"/>
-          </a:xfrm>
-          <a:prstGeom prst="rect">
-            <a:avLst/>
-          </a:prstGeom>
-          <a:solidFill>
-            <a:srgbClr val="D0603A"/>
-          </a:solidFill>
+            <a:ext cx="73152" cy="6858000"/>
+          </a:xfrm>
+          <a:prstGeom prst="rect">
+            <a:avLst/>
+          </a:prstGeom>
           <a:ln>
             <a:noFill/>
           </a:ln>
+          <a:effectLst/>
+          <a:gradFill rotWithShape="1">
+            <a:gsLst>
+              <a:gs pos="0">
+                <a:srgbClr val="410913"/>
+              </a:gs>
+              <a:gs pos="50000">
+                <a:srgbClr val="610D1C"/>
+              </a:gs>
+              <a:gs pos="100000">
+                <a:srgbClr val="A2391D"/>
+              </a:gs>
+            </a:gsLst>
+            <a:lin ang="2700000"/>
+          </a:gradFill>
         </p:spPr>
         <p:style>
           <a:lnRef idx="1">
@@ -3754,7 +3767,7 @@
       </p:sp>
       <p:pic>
         <p:nvPicPr>
-          <p:cNvPr id="4" name="Picture 3" descr="team-avatar.png"/>
+          <p:cNvPr id="4" name="Picture 3" descr="logo.png"/>
           <p:cNvPicPr>
             <a:picLocks noChangeAspect="1"/>
           </p:cNvPicPr>
@@ -3768,8 +3781,8 @@
         </p:blipFill>
         <p:spPr>
           <a:xfrm>
-            <a:off x="685800" y="2240280"/>
-            <a:ext cx="2194560" cy="2194560"/>
+            <a:off x="822960" y="1051560"/>
+            <a:ext cx="822960" cy="822960"/>
           </a:xfrm>
           <a:prstGeom prst="rect">
             <a:avLst/>
@@ -3784,8 +3797,8 @@
         </p:nvSpPr>
         <p:spPr>
           <a:xfrm>
-            <a:off x="3337560" y="2377440"/>
-            <a:ext cx="8854135" cy="1188720"/>
+            <a:off x="1828800" y="1207008"/>
+            <a:ext cx="7315200" cy="457200"/>
           </a:xfrm>
           <a:prstGeom prst="rect">
             <a:avLst/>
@@ -3799,13 +3812,13 @@
           <a:lstStyle/>
           <a:p>
             <a:r>
-              <a:rPr sz="4000" b="0">
+              <a:rPr sz="1400" b="0">
                 <a:solidFill>
-                  <a:srgbClr val="E8E6E3"/>
+                  <a:srgbClr val="B8B8B8"/>
                 </a:solidFill>
-                <a:latin typeface="Inter"/>
+                <a:latin typeface="JetBrains Mono"/>
               </a:rPr>
-              <a:t>Лаборатория протоколов</a:t>
+              <a:t>MADRIGAL-PROTOCOL-LAB</a:t>
             </a:r>
           </a:p>
         </p:txBody>
@@ -3818,8 +3831,8 @@
         </p:nvSpPr>
         <p:spPr>
           <a:xfrm>
-            <a:off x="3337560" y="3566160"/>
-            <a:ext cx="8854135" cy="548640"/>
+            <a:off x="822960" y="2148840"/>
+            <a:ext cx="10545775" cy="1371600"/>
           </a:xfrm>
           <a:prstGeom prst="rect">
             <a:avLst/>
@@ -3833,13 +3846,13 @@
           <a:lstStyle/>
           <a:p>
             <a:r>
-              <a:rPr sz="1600" b="0">
+              <a:rPr sz="5600" b="1">
                 <a:solidFill>
-                  <a:srgbClr val="A8A29E"/>
+                  <a:srgbClr val="EDEDED"/>
                 </a:solidFill>
-                <a:latin typeface="Inter"/>
+                <a:latin typeface="Montserrat"/>
               </a:rPr>
-              <a:t>Команда HTTP 418 · UMIRHack 2026 · кейс #02 · Мадригал</a:t>
+              <a:t>Лаборатория протоколов</a:t>
             </a:r>
           </a:p>
         </p:txBody>
@@ -3852,8 +3865,8 @@
         </p:nvSpPr>
         <p:spPr>
           <a:xfrm>
-            <a:off x="685800" y="6446520"/>
-            <a:ext cx="10820095" cy="274320"/>
+            <a:off x="822960" y="3383280"/>
+            <a:ext cx="8686800" cy="914400"/>
           </a:xfrm>
           <a:prstGeom prst="rect">
             <a:avLst/>
@@ -3867,27 +3880,71 @@
           <a:lstStyle/>
           <a:p>
             <a:r>
-              <a:rPr sz="900" b="0">
+              <a:rPr sz="2200" b="0">
                 <a:solidFill>
-                  <a:srgbClr val="A8A29E"/>
+                  <a:srgbClr val="EDEDED"/>
                 </a:solidFill>
-                <a:latin typeface="Inter"/>
+                <a:latin typeface="Montserrat"/>
               </a:rPr>
-              <a:t>Команда HTTP 418 · кейс #02 · Мадригал</a:t>
-            </a:r>
-          </a:p>
-        </p:txBody>
-      </p:sp>
-      <p:sp>
-        <p:nvSpPr>
-          <p:cNvPr id="8" name="TextBox 7"/>
+              <a:t>Восстановление недокументированного бинарного протокола поверх TCP</a:t>
+            </a:r>
+          </a:p>
+        </p:txBody>
+      </p:sp>
+      <p:sp>
+        <p:nvSpPr>
+          <p:cNvPr id="8" name="Rectangle 7"/>
+          <p:cNvSpPr/>
+          <p:nvPr/>
+        </p:nvSpPr>
+        <p:spPr>
+          <a:xfrm>
+            <a:off x="822960" y="4343400"/>
+            <a:ext cx="2194560" cy="64008"/>
+          </a:xfrm>
+          <a:prstGeom prst="rect">
+            <a:avLst/>
+          </a:prstGeom>
+          <a:solidFill>
+            <a:srgbClr val="A2391D"/>
+          </a:solidFill>
+          <a:ln>
+            <a:noFill/>
+          </a:ln>
+          <a:effectLst/>
+        </p:spPr>
+        <p:style>
+          <a:lnRef idx="1">
+            <a:schemeClr val="accent1"/>
+          </a:lnRef>
+          <a:fillRef idx="3">
+            <a:schemeClr val="accent1"/>
+          </a:fillRef>
+          <a:effectRef idx="2">
+            <a:schemeClr val="accent1"/>
+          </a:effectRef>
+          <a:fontRef idx="minor">
+            <a:schemeClr val="lt1"/>
+          </a:fontRef>
+        </p:style>
+        <p:txBody>
+          <a:bodyPr rtlCol="0" anchor="ctr"/>
+          <a:lstStyle/>
+          <a:p>
+            <a:pPr algn="ctr"/>
+          </a:p>
+        </p:txBody>
+      </p:sp>
+      <p:sp>
+        <p:nvSpPr>
+          <p:cNvPr id="9" name="TextBox 8"/>
           <p:cNvSpPr txBox="1"/>
           <p:nvPr/>
         </p:nvSpPr>
         <p:spPr>
           <a:xfrm>
-            <a:off x="685800" y="6446520"/>
-            <a:ext cx="10820095" cy="274320"/>
+            <a:off x="822960" y="4617720"/>
+            <a:ext cx="10545775" cy="457200"/>
           </a:xfrm>
           <a:prstGeom prst="rect">
             <a:avLst/>
@@ -3900,13 +3957,81 @@
           </a:bodyPr>
           <a:lstStyle/>
           <a:p>
+            <a:r>
+              <a:rPr sz="1500" b="0">
+                <a:solidFill>
+                  <a:srgbClr val="B8B8B8"/>
+                </a:solidFill>
+                <a:latin typeface="JetBrains Mono"/>
+              </a:rPr>
+              <a:t>UMIRHack 2026 · кейс #02 · Мадригал · команда HTTP 418</a:t>
+            </a:r>
+          </a:p>
+        </p:txBody>
+      </p:sp>
+      <p:sp>
+        <p:nvSpPr>
+          <p:cNvPr id="10" name="TextBox 9"/>
+          <p:cNvSpPr txBox="1"/>
+          <p:nvPr/>
+        </p:nvSpPr>
+        <p:spPr>
+          <a:xfrm>
+            <a:off x="822960" y="6446520"/>
+            <a:ext cx="10545775" cy="274320"/>
+          </a:xfrm>
+          <a:prstGeom prst="rect">
+            <a:avLst/>
+          </a:prstGeom>
+          <a:noFill/>
+        </p:spPr>
+        <p:txBody>
+          <a:bodyPr wrap="square" anchor="t">
+            <a:spAutoFit/>
+          </a:bodyPr>
+          <a:lstStyle/>
+          <a:p>
+            <a:r>
+              <a:rPr sz="1000" b="0">
+                <a:solidFill>
+                  <a:srgbClr val="B8B8B8"/>
+                </a:solidFill>
+                <a:latin typeface="Montserrat"/>
+              </a:rPr>
+              <a:t>Команда HTTP 418 · кейс #02 · Мадригал</a:t>
+            </a:r>
+          </a:p>
+        </p:txBody>
+      </p:sp>
+      <p:sp>
+        <p:nvSpPr>
+          <p:cNvPr id="11" name="TextBox 10"/>
+          <p:cNvSpPr txBox="1"/>
+          <p:nvPr/>
+        </p:nvSpPr>
+        <p:spPr>
+          <a:xfrm>
+            <a:off x="822960" y="6446520"/>
+            <a:ext cx="10545775" cy="274320"/>
+          </a:xfrm>
+          <a:prstGeom prst="rect">
+            <a:avLst/>
+          </a:prstGeom>
+          <a:noFill/>
+        </p:spPr>
+        <p:txBody>
+          <a:bodyPr wrap="square" anchor="t">
+            <a:spAutoFit/>
+          </a:bodyPr>
+          <a:lstStyle/>
+          <a:p>
             <a:pPr algn="r"/>
             <a:r>
-              <a:rPr sz="900" b="0">
+              <a:rPr sz="1000" b="0">
                 <a:solidFill>
-                  <a:srgbClr val="A8A29E"/>
+                  <a:srgbClr val="B8B8B8"/>
                 </a:solidFill>
-                <a:latin typeface="Inter"/>
+                <a:latin typeface="Montserrat"/>
               </a:rPr>
               <a:t>1 / 19</a:t>
             </a:r>
@@ -3940,7 +4065,7 @@
                               </p:stCondLst>
                             </p:cTn>
                             <p:tgtEl>
-                              <p:spTgt spid="5"/>
+                              <p:spTgt spid="6"/>
                             </p:tgtEl>
                             <p:attrNameLst>
                               <p:attrName>style.visibility</p:attrName>
@@ -3954,7 +4079,7 @@
                           <p:cBhvr additive="base">
                             <p:cTn id="5" dur="500" fill="hold"/>
                             <p:tgtEl>
-                              <p:spTgt spid="5"/>
+                              <p:spTgt spid="6"/>
                             </p:tgtEl>
                             <p:attrNameLst>
                               <p:attrName>style.opacity</p:attrName>
@@ -4013,11 +4138,12 @@
             <a:avLst/>
           </a:prstGeom>
           <a:solidFill>
-            <a:srgbClr val="0E1011"/>
+            <a:srgbClr val="131516"/>
           </a:solidFill>
           <a:ln>
             <a:noFill/>
           </a:ln>
+          <a:effectLst/>
         </p:spPr>
         <p:style>
           <a:lnRef idx="1">
@@ -4050,17 +4176,29 @@
         <p:spPr>
           <a:xfrm>
             <a:off x="0" y="0"/>
-            <a:ext cx="45720" cy="6858000"/>
-          </a:xfrm>
-          <a:prstGeom prst="rect">
-            <a:avLst/>
-          </a:prstGeom>
-          <a:solidFill>
-            <a:srgbClr val="D0603A"/>
-          </a:solidFill>
+            <a:ext cx="73152" cy="6858000"/>
+          </a:xfrm>
+          <a:prstGeom prst="rect">
+            <a:avLst/>
+          </a:prstGeom>
           <a:ln>
             <a:noFill/>
           </a:ln>
+          <a:effectLst/>
+          <a:gradFill rotWithShape="1">
+            <a:gsLst>
+              <a:gs pos="0">
+                <a:srgbClr val="410913"/>
+              </a:gs>
+              <a:gs pos="50000">
+                <a:srgbClr val="610D1C"/>
+              </a:gs>
+              <a:gs pos="100000">
+                <a:srgbClr val="A2391D"/>
+              </a:gs>
+            </a:gsLst>
+            <a:lin ang="2700000"/>
+          </a:gradFill>
         </p:spPr>
         <p:style>
           <a:lnRef idx="1">
@@ -4092,8 +4230,8 @@
         </p:nvSpPr>
         <p:spPr>
           <a:xfrm>
-            <a:off x="685800" y="2286000"/>
-            <a:ext cx="10820095" cy="1005840"/>
+            <a:off x="822960" y="2011680"/>
+            <a:ext cx="10545775" cy="1280160"/>
           </a:xfrm>
           <a:prstGeom prst="rect">
             <a:avLst/>
@@ -4107,11 +4245,11 @@
           <a:lstStyle/>
           <a:p>
             <a:r>
-              <a:rPr sz="6000" b="0">
+              <a:rPr sz="7200" b="1">
                 <a:solidFill>
-                  <a:srgbClr val="D0603A"/>
+                  <a:srgbClr val="A2391D"/>
                 </a:solidFill>
-                <a:latin typeface="JetBrains Mono"/>
+                <a:latin typeface="Montserrat"/>
               </a:rPr>
               <a:t>01</a:t>
             </a:r>
@@ -4126,8 +4264,8 @@
         </p:nvSpPr>
         <p:spPr>
           <a:xfrm>
-            <a:off x="685800" y="3291840"/>
-            <a:ext cx="10820095" cy="914400"/>
+            <a:off x="822960" y="3200400"/>
+            <a:ext cx="10545775" cy="914400"/>
           </a:xfrm>
           <a:prstGeom prst="rect">
             <a:avLst/>
@@ -4141,11 +4279,11 @@
           <a:lstStyle/>
           <a:p>
             <a:r>
-              <a:rPr sz="4000" b="0">
+              <a:rPr sz="4000" b="1">
                 <a:solidFill>
-                  <a:srgbClr val="E8E6E3"/>
+                  <a:srgbClr val="EDEDED"/>
                 </a:solidFill>
-                <a:latin typeface="Inter"/>
+                <a:latin typeface="Montserrat"/>
               </a:rPr>
               <a:t>Что получилось</a:t>
             </a:r>
@@ -4160,18 +4298,30 @@
         </p:nvSpPr>
         <p:spPr>
           <a:xfrm>
-            <a:off x="685800" y="4297680"/>
-            <a:ext cx="2926080" cy="64008"/>
-          </a:xfrm>
-          <a:prstGeom prst="rect">
-            <a:avLst/>
-          </a:prstGeom>
-          <a:solidFill>
-            <a:srgbClr val="D0603A"/>
-          </a:solidFill>
+            <a:off x="822960" y="4206240"/>
+            <a:ext cx="3108960" cy="82296"/>
+          </a:xfrm>
+          <a:prstGeom prst="rect">
+            <a:avLst/>
+          </a:prstGeom>
           <a:ln>
             <a:noFill/>
           </a:ln>
+          <a:effectLst/>
+          <a:gradFill rotWithShape="1">
+            <a:gsLst>
+              <a:gs pos="0">
+                <a:srgbClr val="410913"/>
+              </a:gs>
+              <a:gs pos="50000">
+                <a:srgbClr val="610D1C"/>
+              </a:gs>
+              <a:gs pos="100000">
+                <a:srgbClr val="A2391D"/>
+              </a:gs>
+            </a:gsLst>
+            <a:lin ang="2700000"/>
+          </a:gradFill>
         </p:spPr>
         <p:style>
           <a:lnRef idx="1">
@@ -4203,8 +4353,8 @@
         </p:nvSpPr>
         <p:spPr>
           <a:xfrm>
-            <a:off x="685800" y="6446520"/>
-            <a:ext cx="10820095" cy="274320"/>
+            <a:off x="822960" y="4480560"/>
+            <a:ext cx="10545775" cy="457200"/>
           </a:xfrm>
           <a:prstGeom prst="rect">
             <a:avLst/>
@@ -4218,13 +4368,13 @@
           <a:lstStyle/>
           <a:p>
             <a:r>
-              <a:rPr sz="900" b="0">
+              <a:rPr sz="1600" b="0">
                 <a:solidFill>
-                  <a:srgbClr val="A8A29E"/>
+                  <a:srgbClr val="B8B8B8"/>
                 </a:solidFill>
-                <a:latin typeface="Inter"/>
+                <a:latin typeface="Montserrat"/>
               </a:rPr>
-              <a:t>Команда HTTP 418 · кейс #02 · Мадригал</a:t>
+              <a:t>Точность, покрытие корпуса организаторов, ресурсы</a:t>
             </a:r>
           </a:p>
         </p:txBody>
@@ -4237,8 +4387,8 @@
         </p:nvSpPr>
         <p:spPr>
           <a:xfrm>
-            <a:off x="685800" y="6446520"/>
-            <a:ext cx="10820095" cy="274320"/>
+            <a:off x="822960" y="6446520"/>
+            <a:ext cx="10545775" cy="274320"/>
           </a:xfrm>
           <a:prstGeom prst="rect">
             <a:avLst/>
@@ -4251,13 +4401,47 @@
           </a:bodyPr>
           <a:lstStyle/>
           <a:p>
+            <a:r>
+              <a:rPr sz="1000" b="0">
+                <a:solidFill>
+                  <a:srgbClr val="B8B8B8"/>
+                </a:solidFill>
+                <a:latin typeface="Montserrat"/>
+              </a:rPr>
+              <a:t>Команда HTTP 418 · кейс #02 · Мадригал</a:t>
+            </a:r>
+          </a:p>
+        </p:txBody>
+      </p:sp>
+      <p:sp>
+        <p:nvSpPr>
+          <p:cNvPr id="9" name="TextBox 8"/>
+          <p:cNvSpPr txBox="1"/>
+          <p:nvPr/>
+        </p:nvSpPr>
+        <p:spPr>
+          <a:xfrm>
+            <a:off x="822960" y="6446520"/>
+            <a:ext cx="10545775" cy="274320"/>
+          </a:xfrm>
+          <a:prstGeom prst="rect">
+            <a:avLst/>
+          </a:prstGeom>
+          <a:noFill/>
+        </p:spPr>
+        <p:txBody>
+          <a:bodyPr wrap="square" anchor="t">
+            <a:spAutoFit/>
+          </a:bodyPr>
+          <a:lstStyle/>
+          <a:p>
             <a:pPr algn="r"/>
             <a:r>
-              <a:rPr sz="900" b="0">
+              <a:rPr sz="1000" b="0">
                 <a:solidFill>
-                  <a:srgbClr val="A8A29E"/>
+                  <a:srgbClr val="B8B8B8"/>
                 </a:solidFill>
-                <a:latin typeface="Inter"/>
+                <a:latin typeface="Montserrat"/>
               </a:rPr>
               <a:t>10 / 19</a:t>
             </a:r>
@@ -4364,11 +4548,12 @@
             <a:avLst/>
           </a:prstGeom>
           <a:solidFill>
-            <a:srgbClr val="0E1011"/>
+            <a:srgbClr val="131516"/>
           </a:solidFill>
           <a:ln>
             <a:noFill/>
           </a:ln>
+          <a:effectLst/>
         </p:spPr>
         <p:style>
           <a:lnRef idx="1">
@@ -4401,17 +4586,29 @@
         <p:spPr>
           <a:xfrm>
             <a:off x="0" y="0"/>
-            <a:ext cx="45720" cy="6858000"/>
-          </a:xfrm>
-          <a:prstGeom prst="rect">
-            <a:avLst/>
-          </a:prstGeom>
-          <a:solidFill>
-            <a:srgbClr val="D0603A"/>
-          </a:solidFill>
+            <a:ext cx="73152" cy="6858000"/>
+          </a:xfrm>
+          <a:prstGeom prst="rect">
+            <a:avLst/>
+          </a:prstGeom>
           <a:ln>
             <a:noFill/>
           </a:ln>
+          <a:effectLst/>
+          <a:gradFill rotWithShape="1">
+            <a:gsLst>
+              <a:gs pos="0">
+                <a:srgbClr val="410913"/>
+              </a:gs>
+              <a:gs pos="50000">
+                <a:srgbClr val="610D1C"/>
+              </a:gs>
+              <a:gs pos="100000">
+                <a:srgbClr val="A2391D"/>
+              </a:gs>
+            </a:gsLst>
+            <a:lin ang="2700000"/>
+          </a:gradFill>
         </p:spPr>
         <p:style>
           <a:lnRef idx="1">
@@ -4443,8 +4640,8 @@
         </p:nvSpPr>
         <p:spPr>
           <a:xfrm>
-            <a:off x="685800" y="1463040"/>
-            <a:ext cx="10820095" cy="731520"/>
+            <a:off x="822960" y="1371600"/>
+            <a:ext cx="10545775" cy="731520"/>
           </a:xfrm>
           <a:prstGeom prst="rect">
             <a:avLst/>
@@ -4460,11 +4657,11 @@
             <a:r>
               <a:rPr sz="2600" b="1">
                 <a:solidFill>
-                  <a:srgbClr val="A8A29E"/>
+                  <a:srgbClr val="B8B8B8"/>
                 </a:solidFill>
-                <a:latin typeface="Inter"/>
+                <a:latin typeface="Montserrat"/>
               </a:rPr>
-              <a:t>Точность правила: 0.43 → 1.00</a:t>
+              <a:t>Уточнили правило: 60/140 → 140/140</a:t>
             </a:r>
           </a:p>
         </p:txBody>
@@ -4477,8 +4674,8 @@
         </p:nvSpPr>
         <p:spPr>
           <a:xfrm>
-            <a:off x="685800" y="2286000"/>
-            <a:ext cx="10820095" cy="2011680"/>
+            <a:off x="822960" y="2286000"/>
+            <a:ext cx="4023360" cy="1463040"/>
           </a:xfrm>
           <a:prstGeom prst="rect">
             <a:avLst/>
@@ -4492,11 +4689,11 @@
           <a:lstStyle/>
           <a:p>
             <a:r>
-              <a:rPr sz="9600" b="1">
+              <a:rPr sz="8800" b="1">
                 <a:solidFill>
-                  <a:srgbClr val="D0603A"/>
+                  <a:srgbClr val="A2391D"/>
                 </a:solidFill>
-                <a:latin typeface="Inter"/>
+                <a:latin typeface="Montserrat"/>
               </a:rPr>
               <a:t>1.00</a:t>
             </a:r>
@@ -4511,8 +4708,8 @@
         </p:nvSpPr>
         <p:spPr>
           <a:xfrm>
-            <a:off x="685800" y="4480560"/>
-            <a:ext cx="9601200" cy="914400"/>
+            <a:off x="822960" y="3840480"/>
+            <a:ext cx="4023360" cy="1463040"/>
           </a:xfrm>
           <a:prstGeom prst="rect">
             <a:avLst/>
@@ -4526,13 +4723,13 @@
           <a:lstStyle/>
           <a:p>
             <a:r>
-              <a:rPr sz="1800" b="0">
+              <a:rPr sz="1600" b="0">
                 <a:solidFill>
-                  <a:srgbClr val="E8E6E3"/>
+                  <a:srgbClr val="EDEDED"/>
                 </a:solidFill>
-                <a:latin typeface="Inter"/>
+                <a:latin typeface="Montserrat"/>
               </a:rPr>
-              <a:t>Было 60 matched и 80 mismatched. Стало 140 matched и ноль контрпримеров</a:t>
+              <a:t>Было 60 matched из 140 и 80 контрпримеров. Стало 140 matched из 140 и ноль контрпримеров</a:t>
             </a:r>
           </a:p>
         </p:txBody>
@@ -4545,8 +4742,8 @@
         </p:nvSpPr>
         <p:spPr>
           <a:xfrm>
-            <a:off x="685800" y="6446520"/>
-            <a:ext cx="10820095" cy="274320"/>
+            <a:off x="6400800" y="2560320"/>
+            <a:ext cx="548640" cy="365760"/>
           </a:xfrm>
           <a:prstGeom prst="rect">
             <a:avLst/>
@@ -4560,27 +4757,150 @@
           <a:lstStyle/>
           <a:p>
             <a:r>
-              <a:rPr sz="900" b="0">
+              <a:rPr sz="1600" b="0">
                 <a:solidFill>
-                  <a:srgbClr val="A8A29E"/>
+                  <a:srgbClr val="B8B8B8"/>
                 </a:solidFill>
-                <a:latin typeface="Inter"/>
+                <a:latin typeface="JetBrains Mono"/>
               </a:rPr>
-              <a:t>Команда HTTP 418 · кейс #02 · Мадригал</a:t>
-            </a:r>
-          </a:p>
-        </p:txBody>
-      </p:sp>
-      <p:sp>
-        <p:nvSpPr>
-          <p:cNvPr id="8" name="TextBox 7"/>
+              <a:t>v1</a:t>
+            </a:r>
+          </a:p>
+        </p:txBody>
+      </p:sp>
+      <p:sp>
+        <p:nvSpPr>
+          <p:cNvPr id="8" name="Rectangle 7"/>
+          <p:cNvSpPr/>
+          <p:nvPr/>
+        </p:nvSpPr>
+        <p:spPr>
+          <a:xfrm>
+            <a:off x="7040880" y="2606040"/>
+            <a:ext cx="3230575" cy="292608"/>
+          </a:xfrm>
+          <a:prstGeom prst="rect">
+            <a:avLst/>
+          </a:prstGeom>
+          <a:solidFill>
+            <a:srgbClr val="26262A"/>
+          </a:solidFill>
+          <a:ln>
+            <a:noFill/>
+          </a:ln>
+          <a:effectLst/>
+        </p:spPr>
+        <p:style>
+          <a:lnRef idx="1">
+            <a:schemeClr val="accent1"/>
+          </a:lnRef>
+          <a:fillRef idx="3">
+            <a:schemeClr val="accent1"/>
+          </a:fillRef>
+          <a:effectRef idx="2">
+            <a:schemeClr val="accent1"/>
+          </a:effectRef>
+          <a:fontRef idx="minor">
+            <a:schemeClr val="lt1"/>
+          </a:fontRef>
+        </p:style>
+        <p:txBody>
+          <a:bodyPr rtlCol="0" anchor="ctr"/>
+          <a:lstStyle/>
+          <a:p>
+            <a:pPr algn="ctr"/>
+          </a:p>
+        </p:txBody>
+      </p:sp>
+      <p:sp>
+        <p:nvSpPr>
+          <p:cNvPr id="9" name="Rectangle 8"/>
+          <p:cNvSpPr/>
+          <p:nvPr/>
+        </p:nvSpPr>
+        <p:spPr>
+          <a:xfrm>
+            <a:off x="7040880" y="2606040"/>
+            <a:ext cx="1389147" cy="292608"/>
+          </a:xfrm>
+          <a:prstGeom prst="rect">
+            <a:avLst/>
+          </a:prstGeom>
+          <a:solidFill>
+            <a:srgbClr val="8E2A2A"/>
+          </a:solidFill>
+          <a:ln>
+            <a:noFill/>
+          </a:ln>
+          <a:effectLst/>
+        </p:spPr>
+        <p:style>
+          <a:lnRef idx="1">
+            <a:schemeClr val="accent1"/>
+          </a:lnRef>
+          <a:fillRef idx="3">
+            <a:schemeClr val="accent1"/>
+          </a:fillRef>
+          <a:effectRef idx="2">
+            <a:schemeClr val="accent1"/>
+          </a:effectRef>
+          <a:fontRef idx="minor">
+            <a:schemeClr val="lt1"/>
+          </a:fontRef>
+        </p:style>
+        <p:txBody>
+          <a:bodyPr rtlCol="0" anchor="ctr"/>
+          <a:lstStyle/>
+          <a:p>
+            <a:pPr algn="ctr"/>
+          </a:p>
+        </p:txBody>
+      </p:sp>
+      <p:sp>
+        <p:nvSpPr>
+          <p:cNvPr id="10" name="TextBox 9"/>
           <p:cNvSpPr txBox="1"/>
           <p:nvPr/>
         </p:nvSpPr>
         <p:spPr>
           <a:xfrm>
-            <a:off x="685800" y="6446520"/>
-            <a:ext cx="10820095" cy="274320"/>
+            <a:off x="10362895" y="2560320"/>
+            <a:ext cx="1005840" cy="365760"/>
+          </a:xfrm>
+          <a:prstGeom prst="rect">
+            <a:avLst/>
+          </a:prstGeom>
+          <a:noFill/>
+        </p:spPr>
+        <p:txBody>
+          <a:bodyPr wrap="square" anchor="ctr">
+            <a:spAutoFit/>
+          </a:bodyPr>
+          <a:lstStyle/>
+          <a:p>
+            <a:pPr algn="r"/>
+            <a:r>
+              <a:rPr sz="1800" b="1">
+                <a:solidFill>
+                  <a:srgbClr val="EDEDED"/>
+                </a:solidFill>
+                <a:latin typeface="Montserrat"/>
+              </a:rPr>
+              <a:t>0.43</a:t>
+            </a:r>
+          </a:p>
+        </p:txBody>
+      </p:sp>
+      <p:sp>
+        <p:nvSpPr>
+          <p:cNvPr id="11" name="TextBox 10"/>
+          <p:cNvSpPr txBox="1"/>
+          <p:nvPr/>
+        </p:nvSpPr>
+        <p:spPr>
+          <a:xfrm>
+            <a:off x="6400800" y="3566160"/>
+            <a:ext cx="548640" cy="365760"/>
           </a:xfrm>
           <a:prstGeom prst="rect">
             <a:avLst/>
@@ -4593,13 +4913,204 @@
           </a:bodyPr>
           <a:lstStyle/>
           <a:p>
+            <a:r>
+              <a:rPr sz="1600" b="0">
+                <a:solidFill>
+                  <a:srgbClr val="B8B8B8"/>
+                </a:solidFill>
+                <a:latin typeface="JetBrains Mono"/>
+              </a:rPr>
+              <a:t>v2</a:t>
+            </a:r>
+          </a:p>
+        </p:txBody>
+      </p:sp>
+      <p:sp>
+        <p:nvSpPr>
+          <p:cNvPr id="12" name="Rectangle 11"/>
+          <p:cNvSpPr/>
+          <p:nvPr/>
+        </p:nvSpPr>
+        <p:spPr>
+          <a:xfrm>
+            <a:off x="7040880" y="3611880"/>
+            <a:ext cx="3230575" cy="292608"/>
+          </a:xfrm>
+          <a:prstGeom prst="rect">
+            <a:avLst/>
+          </a:prstGeom>
+          <a:solidFill>
+            <a:srgbClr val="26262A"/>
+          </a:solidFill>
+          <a:ln>
+            <a:noFill/>
+          </a:ln>
+          <a:effectLst/>
+        </p:spPr>
+        <p:style>
+          <a:lnRef idx="1">
+            <a:schemeClr val="accent1"/>
+          </a:lnRef>
+          <a:fillRef idx="3">
+            <a:schemeClr val="accent1"/>
+          </a:fillRef>
+          <a:effectRef idx="2">
+            <a:schemeClr val="accent1"/>
+          </a:effectRef>
+          <a:fontRef idx="minor">
+            <a:schemeClr val="lt1"/>
+          </a:fontRef>
+        </p:style>
+        <p:txBody>
+          <a:bodyPr rtlCol="0" anchor="ctr"/>
+          <a:lstStyle/>
+          <a:p>
+            <a:pPr algn="ctr"/>
+          </a:p>
+        </p:txBody>
+      </p:sp>
+      <p:sp>
+        <p:nvSpPr>
+          <p:cNvPr id="13" name="Rectangle 12"/>
+          <p:cNvSpPr/>
+          <p:nvPr/>
+        </p:nvSpPr>
+        <p:spPr>
+          <a:xfrm>
+            <a:off x="7040880" y="3611880"/>
+            <a:ext cx="3230575" cy="292608"/>
+          </a:xfrm>
+          <a:prstGeom prst="rect">
+            <a:avLst/>
+          </a:prstGeom>
+          <a:solidFill>
+            <a:srgbClr val="2E7D5B"/>
+          </a:solidFill>
+          <a:ln>
+            <a:noFill/>
+          </a:ln>
+          <a:effectLst/>
+        </p:spPr>
+        <p:style>
+          <a:lnRef idx="1">
+            <a:schemeClr val="accent1"/>
+          </a:lnRef>
+          <a:fillRef idx="3">
+            <a:schemeClr val="accent1"/>
+          </a:fillRef>
+          <a:effectRef idx="2">
+            <a:schemeClr val="accent1"/>
+          </a:effectRef>
+          <a:fontRef idx="minor">
+            <a:schemeClr val="lt1"/>
+          </a:fontRef>
+        </p:style>
+        <p:txBody>
+          <a:bodyPr rtlCol="0" anchor="ctr"/>
+          <a:lstStyle/>
+          <a:p>
+            <a:pPr algn="ctr"/>
+          </a:p>
+        </p:txBody>
+      </p:sp>
+      <p:sp>
+        <p:nvSpPr>
+          <p:cNvPr id="14" name="TextBox 13"/>
+          <p:cNvSpPr txBox="1"/>
+          <p:nvPr/>
+        </p:nvSpPr>
+        <p:spPr>
+          <a:xfrm>
+            <a:off x="10362895" y="3566160"/>
+            <a:ext cx="1005840" cy="365760"/>
+          </a:xfrm>
+          <a:prstGeom prst="rect">
+            <a:avLst/>
+          </a:prstGeom>
+          <a:noFill/>
+        </p:spPr>
+        <p:txBody>
+          <a:bodyPr wrap="square" anchor="ctr">
+            <a:spAutoFit/>
+          </a:bodyPr>
+          <a:lstStyle/>
+          <a:p>
             <a:pPr algn="r"/>
             <a:r>
-              <a:rPr sz="900" b="0">
+              <a:rPr sz="1800" b="1">
                 <a:solidFill>
-                  <a:srgbClr val="A8A29E"/>
+                  <a:srgbClr val="EDEDED"/>
                 </a:solidFill>
-                <a:latin typeface="Inter"/>
+                <a:latin typeface="Montserrat"/>
+              </a:rPr>
+              <a:t>1.00</a:t>
+            </a:r>
+          </a:p>
+        </p:txBody>
+      </p:sp>
+      <p:sp>
+        <p:nvSpPr>
+          <p:cNvPr id="15" name="TextBox 14"/>
+          <p:cNvSpPr txBox="1"/>
+          <p:nvPr/>
+        </p:nvSpPr>
+        <p:spPr>
+          <a:xfrm>
+            <a:off x="822960" y="6446520"/>
+            <a:ext cx="10545775" cy="274320"/>
+          </a:xfrm>
+          <a:prstGeom prst="rect">
+            <a:avLst/>
+          </a:prstGeom>
+          <a:noFill/>
+        </p:spPr>
+        <p:txBody>
+          <a:bodyPr wrap="square" anchor="t">
+            <a:spAutoFit/>
+          </a:bodyPr>
+          <a:lstStyle/>
+          <a:p>
+            <a:r>
+              <a:rPr sz="1000" b="0">
+                <a:solidFill>
+                  <a:srgbClr val="B8B8B8"/>
+                </a:solidFill>
+                <a:latin typeface="Montserrat"/>
+              </a:rPr>
+              <a:t>Команда HTTP 418 · кейс #02 · Мадригал</a:t>
+            </a:r>
+          </a:p>
+        </p:txBody>
+      </p:sp>
+      <p:sp>
+        <p:nvSpPr>
+          <p:cNvPr id="16" name="TextBox 15"/>
+          <p:cNvSpPr txBox="1"/>
+          <p:nvPr/>
+        </p:nvSpPr>
+        <p:spPr>
+          <a:xfrm>
+            <a:off x="822960" y="6446520"/>
+            <a:ext cx="10545775" cy="274320"/>
+          </a:xfrm>
+          <a:prstGeom prst="rect">
+            <a:avLst/>
+          </a:prstGeom>
+          <a:noFill/>
+        </p:spPr>
+        <p:txBody>
+          <a:bodyPr wrap="square" anchor="t">
+            <a:spAutoFit/>
+          </a:bodyPr>
+          <a:lstStyle/>
+          <a:p>
+            <a:pPr algn="r"/>
+            <a:r>
+              <a:rPr sz="1000" b="0">
+                <a:solidFill>
+                  <a:srgbClr val="B8B8B8"/>
+                </a:solidFill>
+                <a:latin typeface="Montserrat"/>
               </a:rPr>
               <a:t>11 / 19</a:t>
             </a:r>
@@ -4669,6 +5180,356 @@
                       </p:childTnLst>
                     </p:cTn>
                   </p:par>
+                  <p:par>
+                    <p:cTn id="6" presetID="10" presetClass="entr" presetSubtype="0" fill="hold" grpId="0" nodeType="clickEffect">
+                      <p:stCondLst>
+                        <p:cond delay="0"/>
+                      </p:stCondLst>
+                      <p:childTnLst>
+                        <p:set>
+                          <p:cBhvr>
+                            <p:cTn id="7" dur="1" fill="hold">
+                              <p:stCondLst>
+                                <p:cond delay="0"/>
+                              </p:stCondLst>
+                            </p:cTn>
+                            <p:tgtEl>
+                              <p:spTgt spid="6"/>
+                            </p:tgtEl>
+                            <p:attrNameLst>
+                              <p:attrName>style.visibility</p:attrName>
+                            </p:attrNameLst>
+                          </p:cBhvr>
+                          <p:to>
+                            <p:strVal val="visible"/>
+                          </p:to>
+                        </p:set>
+                        <p:anim calcmode="lin" valueType="num">
+                          <p:cBhvr additive="base">
+                            <p:cTn id="8" dur="500" fill="hold"/>
+                            <p:tgtEl>
+                              <p:spTgt spid="6"/>
+                            </p:tgtEl>
+                            <p:attrNameLst>
+                              <p:attrName>style.opacity</p:attrName>
+                            </p:attrNameLst>
+                          </p:cBhvr>
+                          <p:tavLst>
+                            <p:tav tm="0">
+                              <p:val>
+                                <p:fltVal val="0"/>
+                              </p:val>
+                            </p:tav>
+                            <p:tav tm="100000">
+                              <p:val>
+                                <p:fltVal val="1"/>
+                              </p:val>
+                            </p:tav>
+                          </p:tavLst>
+                        </p:anim>
+                      </p:childTnLst>
+                    </p:cTn>
+                  </p:par>
+                  <p:par>
+                    <p:cTn id="9" presetID="10" presetClass="entr" presetSubtype="0" fill="hold" grpId="0" nodeType="clickEffect">
+                      <p:stCondLst>
+                        <p:cond delay="0"/>
+                      </p:stCondLst>
+                      <p:childTnLst>
+                        <p:set>
+                          <p:cBhvr>
+                            <p:cTn id="10" dur="1" fill="hold">
+                              <p:stCondLst>
+                                <p:cond delay="0"/>
+                              </p:stCondLst>
+                            </p:cTn>
+                            <p:tgtEl>
+                              <p:spTgt spid="8"/>
+                            </p:tgtEl>
+                            <p:attrNameLst>
+                              <p:attrName>style.visibility</p:attrName>
+                            </p:attrNameLst>
+                          </p:cBhvr>
+                          <p:to>
+                            <p:strVal val="visible"/>
+                          </p:to>
+                        </p:set>
+                        <p:anim calcmode="lin" valueType="num">
+                          <p:cBhvr additive="base">
+                            <p:cTn id="11" dur="500" fill="hold"/>
+                            <p:tgtEl>
+                              <p:spTgt spid="8"/>
+                            </p:tgtEl>
+                            <p:attrNameLst>
+                              <p:attrName>style.opacity</p:attrName>
+                            </p:attrNameLst>
+                          </p:cBhvr>
+                          <p:tavLst>
+                            <p:tav tm="0">
+                              <p:val>
+                                <p:fltVal val="0"/>
+                              </p:val>
+                            </p:tav>
+                            <p:tav tm="100000">
+                              <p:val>
+                                <p:fltVal val="1"/>
+                              </p:val>
+                            </p:tav>
+                          </p:tavLst>
+                        </p:anim>
+                      </p:childTnLst>
+                    </p:cTn>
+                  </p:par>
+                  <p:par>
+                    <p:cTn id="12" presetID="10" presetClass="entr" presetSubtype="0" fill="hold" grpId="0" nodeType="clickEffect">
+                      <p:stCondLst>
+                        <p:cond delay="0"/>
+                      </p:stCondLst>
+                      <p:childTnLst>
+                        <p:set>
+                          <p:cBhvr>
+                            <p:cTn id="13" dur="1" fill="hold">
+                              <p:stCondLst>
+                                <p:cond delay="0"/>
+                              </p:stCondLst>
+                            </p:cTn>
+                            <p:tgtEl>
+                              <p:spTgt spid="9"/>
+                            </p:tgtEl>
+                            <p:attrNameLst>
+                              <p:attrName>style.visibility</p:attrName>
+                            </p:attrNameLst>
+                          </p:cBhvr>
+                          <p:to>
+                            <p:strVal val="visible"/>
+                          </p:to>
+                        </p:set>
+                        <p:anim calcmode="lin" valueType="num">
+                          <p:cBhvr additive="base">
+                            <p:cTn id="14" dur="500" fill="hold"/>
+                            <p:tgtEl>
+                              <p:spTgt spid="9"/>
+                            </p:tgtEl>
+                            <p:attrNameLst>
+                              <p:attrName>style.opacity</p:attrName>
+                            </p:attrNameLst>
+                          </p:cBhvr>
+                          <p:tavLst>
+                            <p:tav tm="0">
+                              <p:val>
+                                <p:fltVal val="0"/>
+                              </p:val>
+                            </p:tav>
+                            <p:tav tm="100000">
+                              <p:val>
+                                <p:fltVal val="1"/>
+                              </p:val>
+                            </p:tav>
+                          </p:tavLst>
+                        </p:anim>
+                      </p:childTnLst>
+                    </p:cTn>
+                  </p:par>
+                  <p:par>
+                    <p:cTn id="15" presetID="10" presetClass="entr" presetSubtype="0" fill="hold" grpId="0" nodeType="clickEffect">
+                      <p:stCondLst>
+                        <p:cond delay="0"/>
+                      </p:stCondLst>
+                      <p:childTnLst>
+                        <p:set>
+                          <p:cBhvr>
+                            <p:cTn id="16" dur="1" fill="hold">
+                              <p:stCondLst>
+                                <p:cond delay="0"/>
+                              </p:stCondLst>
+                            </p:cTn>
+                            <p:tgtEl>
+                              <p:spTgt spid="10"/>
+                            </p:tgtEl>
+                            <p:attrNameLst>
+                              <p:attrName>style.visibility</p:attrName>
+                            </p:attrNameLst>
+                          </p:cBhvr>
+                          <p:to>
+                            <p:strVal val="visible"/>
+                          </p:to>
+                        </p:set>
+                        <p:anim calcmode="lin" valueType="num">
+                          <p:cBhvr additive="base">
+                            <p:cTn id="17" dur="500" fill="hold"/>
+                            <p:tgtEl>
+                              <p:spTgt spid="10"/>
+                            </p:tgtEl>
+                            <p:attrNameLst>
+                              <p:attrName>style.opacity</p:attrName>
+                            </p:attrNameLst>
+                          </p:cBhvr>
+                          <p:tavLst>
+                            <p:tav tm="0">
+                              <p:val>
+                                <p:fltVal val="0"/>
+                              </p:val>
+                            </p:tav>
+                            <p:tav tm="100000">
+                              <p:val>
+                                <p:fltVal val="1"/>
+                              </p:val>
+                            </p:tav>
+                          </p:tavLst>
+                        </p:anim>
+                      </p:childTnLst>
+                    </p:cTn>
+                  </p:par>
+                  <p:par>
+                    <p:cTn id="18" presetID="10" presetClass="entr" presetSubtype="0" fill="hold" grpId="0" nodeType="clickEffect">
+                      <p:stCondLst>
+                        <p:cond delay="0"/>
+                      </p:stCondLst>
+                      <p:childTnLst>
+                        <p:set>
+                          <p:cBhvr>
+                            <p:cTn id="19" dur="1" fill="hold">
+                              <p:stCondLst>
+                                <p:cond delay="0"/>
+                              </p:stCondLst>
+                            </p:cTn>
+                            <p:tgtEl>
+                              <p:spTgt spid="12"/>
+                            </p:tgtEl>
+                            <p:attrNameLst>
+                              <p:attrName>style.visibility</p:attrName>
+                            </p:attrNameLst>
+                          </p:cBhvr>
+                          <p:to>
+                            <p:strVal val="visible"/>
+                          </p:to>
+                        </p:set>
+                        <p:anim calcmode="lin" valueType="num">
+                          <p:cBhvr additive="base">
+                            <p:cTn id="20" dur="500" fill="hold"/>
+                            <p:tgtEl>
+                              <p:spTgt spid="12"/>
+                            </p:tgtEl>
+                            <p:attrNameLst>
+                              <p:attrName>style.opacity</p:attrName>
+                            </p:attrNameLst>
+                          </p:cBhvr>
+                          <p:tavLst>
+                            <p:tav tm="0">
+                              <p:val>
+                                <p:fltVal val="0"/>
+                              </p:val>
+                            </p:tav>
+                            <p:tav tm="100000">
+                              <p:val>
+                                <p:fltVal val="1"/>
+                              </p:val>
+                            </p:tav>
+                          </p:tavLst>
+                        </p:anim>
+                      </p:childTnLst>
+                    </p:cTn>
+                  </p:par>
+                  <p:par>
+                    <p:cTn id="21" presetID="10" presetClass="entr" presetSubtype="0" fill="hold" grpId="0" nodeType="clickEffect">
+                      <p:stCondLst>
+                        <p:cond delay="0"/>
+                      </p:stCondLst>
+                      <p:childTnLst>
+                        <p:set>
+                          <p:cBhvr>
+                            <p:cTn id="22" dur="1" fill="hold">
+                              <p:stCondLst>
+                                <p:cond delay="0"/>
+                              </p:stCondLst>
+                            </p:cTn>
+                            <p:tgtEl>
+                              <p:spTgt spid="13"/>
+                            </p:tgtEl>
+                            <p:attrNameLst>
+                              <p:attrName>style.visibility</p:attrName>
+                            </p:attrNameLst>
+                          </p:cBhvr>
+                          <p:to>
+                            <p:strVal val="visible"/>
+                          </p:to>
+                        </p:set>
+                        <p:anim calcmode="lin" valueType="num">
+                          <p:cBhvr additive="base">
+                            <p:cTn id="23" dur="500" fill="hold"/>
+                            <p:tgtEl>
+                              <p:spTgt spid="13"/>
+                            </p:tgtEl>
+                            <p:attrNameLst>
+                              <p:attrName>style.opacity</p:attrName>
+                            </p:attrNameLst>
+                          </p:cBhvr>
+                          <p:tavLst>
+                            <p:tav tm="0">
+                              <p:val>
+                                <p:fltVal val="0"/>
+                              </p:val>
+                            </p:tav>
+                            <p:tav tm="100000">
+                              <p:val>
+                                <p:fltVal val="1"/>
+                              </p:val>
+                            </p:tav>
+                          </p:tavLst>
+                        </p:anim>
+                      </p:childTnLst>
+                    </p:cTn>
+                  </p:par>
+                  <p:par>
+                    <p:cTn id="24" presetID="10" presetClass="entr" presetSubtype="0" fill="hold" grpId="0" nodeType="clickEffect">
+                      <p:stCondLst>
+                        <p:cond delay="0"/>
+                      </p:stCondLst>
+                      <p:childTnLst>
+                        <p:set>
+                          <p:cBhvr>
+                            <p:cTn id="25" dur="1" fill="hold">
+                              <p:stCondLst>
+                                <p:cond delay="0"/>
+                              </p:stCondLst>
+                            </p:cTn>
+                            <p:tgtEl>
+                              <p:spTgt spid="14"/>
+                            </p:tgtEl>
+                            <p:attrNameLst>
+                              <p:attrName>style.visibility</p:attrName>
+                            </p:attrNameLst>
+                          </p:cBhvr>
+                          <p:to>
+                            <p:strVal val="visible"/>
+                          </p:to>
+                        </p:set>
+                        <p:anim calcmode="lin" valueType="num">
+                          <p:cBhvr additive="base">
+                            <p:cTn id="26" dur="500" fill="hold"/>
+                            <p:tgtEl>
+                              <p:spTgt spid="14"/>
+                            </p:tgtEl>
+                            <p:attrNameLst>
+                              <p:attrName>style.opacity</p:attrName>
+                            </p:attrNameLst>
+                          </p:cBhvr>
+                          <p:tavLst>
+                            <p:tav tm="0">
+                              <p:val>
+                                <p:fltVal val="0"/>
+                              </p:val>
+                            </p:tav>
+                            <p:tav tm="100000">
+                              <p:val>
+                                <p:fltVal val="1"/>
+                              </p:val>
+                            </p:tav>
+                          </p:tavLst>
+                        </p:anim>
+                      </p:childTnLst>
+                    </p:cTn>
+                  </p:par>
                 </p:childTnLst>
               </p:cTn>
             </p:seq>
@@ -4706,11 +5567,12 @@
             <a:avLst/>
           </a:prstGeom>
           <a:solidFill>
-            <a:srgbClr val="0E1011"/>
+            <a:srgbClr val="131516"/>
           </a:solidFill>
           <a:ln>
             <a:noFill/>
           </a:ln>
+          <a:effectLst/>
         </p:spPr>
         <p:style>
           <a:lnRef idx="1">
@@ -4743,17 +5605,29 @@
         <p:spPr>
           <a:xfrm>
             <a:off x="0" y="0"/>
-            <a:ext cx="45720" cy="6858000"/>
-          </a:xfrm>
-          <a:prstGeom prst="rect">
-            <a:avLst/>
-          </a:prstGeom>
-          <a:solidFill>
-            <a:srgbClr val="D0603A"/>
-          </a:solidFill>
+            <a:ext cx="73152" cy="6858000"/>
+          </a:xfrm>
+          <a:prstGeom prst="rect">
+            <a:avLst/>
+          </a:prstGeom>
           <a:ln>
             <a:noFill/>
           </a:ln>
+          <a:effectLst/>
+          <a:gradFill rotWithShape="1">
+            <a:gsLst>
+              <a:gs pos="0">
+                <a:srgbClr val="410913"/>
+              </a:gs>
+              <a:gs pos="50000">
+                <a:srgbClr val="610D1C"/>
+              </a:gs>
+              <a:gs pos="100000">
+                <a:srgbClr val="A2391D"/>
+              </a:gs>
+            </a:gsLst>
+            <a:lin ang="2700000"/>
+          </a:gradFill>
         </p:spPr>
         <p:style>
           <a:lnRef idx="1">
@@ -4785,8 +5659,8 @@
         </p:nvSpPr>
         <p:spPr>
           <a:xfrm>
-            <a:off x="685800" y="1463040"/>
-            <a:ext cx="10820095" cy="731520"/>
+            <a:off x="822960" y="1371600"/>
+            <a:ext cx="10545775" cy="731520"/>
           </a:xfrm>
           <a:prstGeom prst="rect">
             <a:avLst/>
@@ -4802,9 +5676,9 @@
             <a:r>
               <a:rPr sz="2600" b="1">
                 <a:solidFill>
-                  <a:srgbClr val="A8A29E"/>
+                  <a:srgbClr val="B8B8B8"/>
                 </a:solidFill>
-                <a:latin typeface="Inter"/>
+                <a:latin typeface="Montserrat"/>
               </a:rPr>
               <a:t>Набор организаторов разобран целиком</a:t>
             </a:r>
@@ -4819,8 +5693,8 @@
         </p:nvSpPr>
         <p:spPr>
           <a:xfrm>
-            <a:off x="685800" y="2286000"/>
-            <a:ext cx="10820095" cy="2011680"/>
+            <a:off x="822960" y="2286000"/>
+            <a:ext cx="5120640" cy="1828800"/>
           </a:xfrm>
           <a:prstGeom prst="rect">
             <a:avLst/>
@@ -4834,11 +5708,11 @@
           <a:lstStyle/>
           <a:p>
             <a:r>
-              <a:rPr sz="9600" b="1">
+              <a:rPr sz="8800" b="1">
                 <a:solidFill>
-                  <a:srgbClr val="D0603A"/>
+                  <a:srgbClr val="A2391D"/>
                 </a:solidFill>
-                <a:latin typeface="Inter"/>
+                <a:latin typeface="Montserrat"/>
               </a:rPr>
               <a:t>90</a:t>
             </a:r>
@@ -4853,8 +5727,8 @@
         </p:nvSpPr>
         <p:spPr>
           <a:xfrm>
-            <a:off x="685800" y="4480560"/>
-            <a:ext cx="9601200" cy="914400"/>
+            <a:off x="822960" y="4206240"/>
+            <a:ext cx="5120640" cy="1097280"/>
           </a:xfrm>
           <a:prstGeom prst="rect">
             <a:avLst/>
@@ -4868,27 +5742,51 @@
           <a:lstStyle/>
           <a:p>
             <a:r>
-              <a:rPr sz="1800" b="0">
+              <a:rPr sz="1600" b="0">
                 <a:solidFill>
-                  <a:srgbClr val="E8E6E3"/>
+                  <a:srgbClr val="EDEDED"/>
                 </a:solidFill>
-                <a:latin typeface="Inter"/>
+                <a:latin typeface="Montserrat"/>
               </a:rPr>
               <a:t>45 запросов и 45 ответов, все matched, покрытие байтов 100 %</a:t>
             </a:r>
           </a:p>
         </p:txBody>
       </p:sp>
-      <p:sp>
-        <p:nvSpPr>
-          <p:cNvPr id="7" name="TextBox 6"/>
+      <p:pic>
+        <p:nvPicPr>
+          <p:cNvPr id="7" name="Picture 6" descr="coverage_donut.png"/>
+          <p:cNvPicPr>
+            <a:picLocks noChangeAspect="1"/>
+          </p:cNvPicPr>
+          <p:nvPr/>
+        </p:nvPicPr>
+        <p:blipFill>
+          <a:blip r:embed="rId2"/>
+          <a:stretch>
+            <a:fillRect/>
+          </a:stretch>
+        </p:blipFill>
+        <p:spPr>
+          <a:xfrm>
+            <a:off x="6400800" y="2194560"/>
+            <a:ext cx="4295038" cy="3291840"/>
+          </a:xfrm>
+          <a:prstGeom prst="rect">
+            <a:avLst/>
+          </a:prstGeom>
+        </p:spPr>
+      </p:pic>
+      <p:sp>
+        <p:nvSpPr>
+          <p:cNvPr id="8" name="TextBox 7"/>
           <p:cNvSpPr txBox="1"/>
           <p:nvPr/>
         </p:nvSpPr>
         <p:spPr>
           <a:xfrm>
-            <a:off x="685800" y="6446520"/>
-            <a:ext cx="10820095" cy="274320"/>
+            <a:off x="822960" y="6446520"/>
+            <a:ext cx="10545775" cy="274320"/>
           </a:xfrm>
           <a:prstGeom prst="rect">
             <a:avLst/>
@@ -4902,11 +5800,11 @@
           <a:lstStyle/>
           <a:p>
             <a:r>
-              <a:rPr sz="900" b="0">
+              <a:rPr sz="1000" b="0">
                 <a:solidFill>
-                  <a:srgbClr val="A8A29E"/>
+                  <a:srgbClr val="B8B8B8"/>
                 </a:solidFill>
-                <a:latin typeface="Inter"/>
+                <a:latin typeface="Montserrat"/>
               </a:rPr>
               <a:t>Команда HTTP 418 · кейс #02 · Мадригал</a:t>
             </a:r>
@@ -4915,14 +5813,14 @@
       </p:sp>
       <p:sp>
         <p:nvSpPr>
-          <p:cNvPr id="8" name="TextBox 7"/>
+          <p:cNvPr id="9" name="TextBox 8"/>
           <p:cNvSpPr txBox="1"/>
           <p:nvPr/>
         </p:nvSpPr>
         <p:spPr>
           <a:xfrm>
-            <a:off x="685800" y="6446520"/>
-            <a:ext cx="10820095" cy="274320"/>
+            <a:off x="822960" y="6446520"/>
+            <a:ext cx="10545775" cy="274320"/>
           </a:xfrm>
           <a:prstGeom prst="rect">
             <a:avLst/>
@@ -4937,11 +5835,11 @@
           <a:p>
             <a:pPr algn="r"/>
             <a:r>
-              <a:rPr sz="900" b="0">
+              <a:rPr sz="1000" b="0">
                 <a:solidFill>
-                  <a:srgbClr val="A8A29E"/>
+                  <a:srgbClr val="B8B8B8"/>
                 </a:solidFill>
-                <a:latin typeface="Inter"/>
+                <a:latin typeface="Montserrat"/>
               </a:rPr>
               <a:t>12 / 19</a:t>
             </a:r>
@@ -5011,6 +5909,56 @@
                       </p:childTnLst>
                     </p:cTn>
                   </p:par>
+                  <p:par>
+                    <p:cTn id="6" presetID="22" presetClass="entr" presetSubtype="8" fill="hold" grpId="0" nodeType="clickEffect">
+                      <p:stCondLst>
+                        <p:cond delay="0"/>
+                      </p:stCondLst>
+                      <p:childTnLst>
+                        <p:set>
+                          <p:cBhvr>
+                            <p:cTn id="7" dur="1" fill="hold">
+                              <p:stCondLst>
+                                <p:cond delay="0"/>
+                              </p:stCondLst>
+                            </p:cTn>
+                            <p:tgtEl>
+                              <p:spTgt spid="7"/>
+                            </p:tgtEl>
+                            <p:attrNameLst>
+                              <p:attrName>style.visibility</p:attrName>
+                            </p:attrNameLst>
+                          </p:cBhvr>
+                          <p:to>
+                            <p:strVal val="visible"/>
+                          </p:to>
+                        </p:set>
+                        <p:anim calcmode="lin" valueType="num">
+                          <p:cBhvr additive="base">
+                            <p:cTn id="8" dur="700" fill="hold"/>
+                            <p:tgtEl>
+                              <p:spTgt spid="7"/>
+                            </p:tgtEl>
+                            <p:attrNameLst>
+                              <p:attrName>ppt_w</p:attrName>
+                            </p:attrNameLst>
+                          </p:cBhvr>
+                          <p:tavLst>
+                            <p:tav tm="0">
+                              <p:val>
+                                <p:fltVal val="0"/>
+                              </p:val>
+                            </p:tav>
+                            <p:tav tm="100000">
+                              <p:val>
+                                <p:fltVal val="1"/>
+                              </p:val>
+                            </p:tav>
+                          </p:tavLst>
+                        </p:anim>
+                      </p:childTnLst>
+                    </p:cTn>
+                  </p:par>
                 </p:childTnLst>
               </p:cTn>
             </p:seq>
@@ -5048,11 +5996,12 @@
             <a:avLst/>
           </a:prstGeom>
           <a:solidFill>
-            <a:srgbClr val="0E1011"/>
+            <a:srgbClr val="131516"/>
           </a:solidFill>
           <a:ln>
             <a:noFill/>
           </a:ln>
+          <a:effectLst/>
         </p:spPr>
         <p:style>
           <a:lnRef idx="1">
@@ -5085,17 +6034,29 @@
         <p:spPr>
           <a:xfrm>
             <a:off x="0" y="0"/>
-            <a:ext cx="45720" cy="6858000"/>
-          </a:xfrm>
-          <a:prstGeom prst="rect">
-            <a:avLst/>
-          </a:prstGeom>
-          <a:solidFill>
-            <a:srgbClr val="D0603A"/>
-          </a:solidFill>
+            <a:ext cx="73152" cy="6858000"/>
+          </a:xfrm>
+          <a:prstGeom prst="rect">
+            <a:avLst/>
+          </a:prstGeom>
           <a:ln>
             <a:noFill/>
           </a:ln>
+          <a:effectLst/>
+          <a:gradFill rotWithShape="1">
+            <a:gsLst>
+              <a:gs pos="0">
+                <a:srgbClr val="410913"/>
+              </a:gs>
+              <a:gs pos="50000">
+                <a:srgbClr val="610D1C"/>
+              </a:gs>
+              <a:gs pos="100000">
+                <a:srgbClr val="A2391D"/>
+              </a:gs>
+            </a:gsLst>
+            <a:lin ang="2700000"/>
+          </a:gradFill>
         </p:spPr>
         <p:style>
           <a:lnRef idx="1">
@@ -5127,8 +6088,8 @@
         </p:nvSpPr>
         <p:spPr>
           <a:xfrm>
-            <a:off x="685800" y="1463040"/>
-            <a:ext cx="10820095" cy="731520"/>
+            <a:off x="822960" y="1371600"/>
+            <a:ext cx="10545775" cy="731520"/>
           </a:xfrm>
           <a:prstGeom prst="rect">
             <a:avLst/>
@@ -5144,9 +6105,9 @@
             <a:r>
               <a:rPr sz="2600" b="1">
                 <a:solidFill>
-                  <a:srgbClr val="A8A29E"/>
+                  <a:srgbClr val="B8B8B8"/>
                 </a:solidFill>
-                <a:latin typeface="Inter"/>
+                <a:latin typeface="Montserrat"/>
               </a:rPr>
               <a:t>95 МиБ разбираются за 12 секунд</a:t>
             </a:r>
@@ -5161,8 +6122,8 @@
         </p:nvSpPr>
         <p:spPr>
           <a:xfrm>
-            <a:off x="685800" y="2286000"/>
-            <a:ext cx="10820095" cy="2011680"/>
+            <a:off x="822960" y="2286000"/>
+            <a:ext cx="5120640" cy="1828800"/>
           </a:xfrm>
           <a:prstGeom prst="rect">
             <a:avLst/>
@@ -5176,11 +6137,11 @@
           <a:lstStyle/>
           <a:p>
             <a:r>
-              <a:rPr sz="9600" b="1">
+              <a:rPr sz="8800" b="1">
                 <a:solidFill>
-                  <a:srgbClr val="D0603A"/>
+                  <a:srgbClr val="A2391D"/>
                 </a:solidFill>
-                <a:latin typeface="Inter"/>
+                <a:latin typeface="Montserrat"/>
               </a:rPr>
               <a:t>12 с</a:t>
             </a:r>
@@ -5195,8 +6156,8 @@
         </p:nvSpPr>
         <p:spPr>
           <a:xfrm>
-            <a:off x="685800" y="4480560"/>
-            <a:ext cx="9601200" cy="914400"/>
+            <a:off x="822960" y="4206240"/>
+            <a:ext cx="5120640" cy="1097280"/>
           </a:xfrm>
           <a:prstGeom prst="rect">
             <a:avLst/>
@@ -5210,27 +6171,51 @@
           <a:lstStyle/>
           <a:p>
             <a:r>
-              <a:rPr sz="1800" b="0">
+              <a:rPr sz="1600" b="0">
                 <a:solidFill>
-                  <a:srgbClr val="E8E6E3"/>
+                  <a:srgbClr val="EDEDED"/>
                 </a:solidFill>
-                <a:latin typeface="Inter"/>
+                <a:latin typeface="Montserrat"/>
               </a:rPr>
-              <a:t>250 000 пакетов, 1000 сессий, 4 vCPU. Пик памяти 350 МиБ</a:t>
-            </a:r>
-          </a:p>
-        </p:txBody>
-      </p:sp>
-      <p:sp>
-        <p:nvSpPr>
-          <p:cNvPr id="7" name="TextBox 6"/>
+              <a:t>Условия замера: 95.66 МиБ, 250 000 пакетов, 1000 сессий, 4 vCPU / 16 ГиБ</a:t>
+            </a:r>
+          </a:p>
+        </p:txBody>
+      </p:sp>
+      <p:pic>
+        <p:nvPicPr>
+          <p:cNvPr id="7" name="Picture 6" descr="memory_sweep.png"/>
+          <p:cNvPicPr>
+            <a:picLocks noChangeAspect="1"/>
+          </p:cNvPicPr>
+          <p:nvPr/>
+        </p:nvPicPr>
+        <p:blipFill>
+          <a:blip r:embed="rId2"/>
+          <a:stretch>
+            <a:fillRect/>
+          </a:stretch>
+        </p:blipFill>
+        <p:spPr>
+          <a:xfrm>
+            <a:off x="6400800" y="2194560"/>
+            <a:ext cx="4967935" cy="3069474"/>
+          </a:xfrm>
+          <a:prstGeom prst="rect">
+            <a:avLst/>
+          </a:prstGeom>
+        </p:spPr>
+      </p:pic>
+      <p:sp>
+        <p:nvSpPr>
+          <p:cNvPr id="8" name="TextBox 7"/>
           <p:cNvSpPr txBox="1"/>
           <p:nvPr/>
         </p:nvSpPr>
         <p:spPr>
           <a:xfrm>
-            <a:off x="685800" y="6446520"/>
-            <a:ext cx="10820095" cy="274320"/>
+            <a:off x="822960" y="6446520"/>
+            <a:ext cx="10545775" cy="274320"/>
           </a:xfrm>
           <a:prstGeom prst="rect">
             <a:avLst/>
@@ -5244,11 +6229,11 @@
           <a:lstStyle/>
           <a:p>
             <a:r>
-              <a:rPr sz="900" b="0">
+              <a:rPr sz="1000" b="0">
                 <a:solidFill>
-                  <a:srgbClr val="A8A29E"/>
+                  <a:srgbClr val="B8B8B8"/>
                 </a:solidFill>
-                <a:latin typeface="Inter"/>
+                <a:latin typeface="Montserrat"/>
               </a:rPr>
               <a:t>Команда HTTP 418 · кейс #02 · Мадригал</a:t>
             </a:r>
@@ -5257,14 +6242,14 @@
       </p:sp>
       <p:sp>
         <p:nvSpPr>
-          <p:cNvPr id="8" name="TextBox 7"/>
+          <p:cNvPr id="9" name="TextBox 8"/>
           <p:cNvSpPr txBox="1"/>
           <p:nvPr/>
         </p:nvSpPr>
         <p:spPr>
           <a:xfrm>
-            <a:off x="685800" y="6446520"/>
-            <a:ext cx="10820095" cy="274320"/>
+            <a:off x="822960" y="6446520"/>
+            <a:ext cx="10545775" cy="274320"/>
           </a:xfrm>
           <a:prstGeom prst="rect">
             <a:avLst/>
@@ -5279,11 +6264,11 @@
           <a:p>
             <a:pPr algn="r"/>
             <a:r>
-              <a:rPr sz="900" b="0">
+              <a:rPr sz="1000" b="0">
                 <a:solidFill>
-                  <a:srgbClr val="A8A29E"/>
+                  <a:srgbClr val="B8B8B8"/>
                 </a:solidFill>
-                <a:latin typeface="Inter"/>
+                <a:latin typeface="Montserrat"/>
               </a:rPr>
               <a:t>13 / 19</a:t>
             </a:r>
@@ -5353,6 +6338,56 @@
                       </p:childTnLst>
                     </p:cTn>
                   </p:par>
+                  <p:par>
+                    <p:cTn id="6" presetID="22" presetClass="entr" presetSubtype="8" fill="hold" grpId="0" nodeType="clickEffect">
+                      <p:stCondLst>
+                        <p:cond delay="0"/>
+                      </p:stCondLst>
+                      <p:childTnLst>
+                        <p:set>
+                          <p:cBhvr>
+                            <p:cTn id="7" dur="1" fill="hold">
+                              <p:stCondLst>
+                                <p:cond delay="0"/>
+                              </p:stCondLst>
+                            </p:cTn>
+                            <p:tgtEl>
+                              <p:spTgt spid="7"/>
+                            </p:tgtEl>
+                            <p:attrNameLst>
+                              <p:attrName>style.visibility</p:attrName>
+                            </p:attrNameLst>
+                          </p:cBhvr>
+                          <p:to>
+                            <p:strVal val="visible"/>
+                          </p:to>
+                        </p:set>
+                        <p:anim calcmode="lin" valueType="num">
+                          <p:cBhvr additive="base">
+                            <p:cTn id="8" dur="700" fill="hold"/>
+                            <p:tgtEl>
+                              <p:spTgt spid="7"/>
+                            </p:tgtEl>
+                            <p:attrNameLst>
+                              <p:attrName>ppt_w</p:attrName>
+                            </p:attrNameLst>
+                          </p:cBhvr>
+                          <p:tavLst>
+                            <p:tav tm="0">
+                              <p:val>
+                                <p:fltVal val="0"/>
+                              </p:val>
+                            </p:tav>
+                            <p:tav tm="100000">
+                              <p:val>
+                                <p:fltVal val="1"/>
+                              </p:val>
+                            </p:tav>
+                          </p:tavLst>
+                        </p:anim>
+                      </p:childTnLst>
+                    </p:cTn>
+                  </p:par>
                 </p:childTnLst>
               </p:cTn>
             </p:seq>
@@ -5390,11 +6425,12 @@
             <a:avLst/>
           </a:prstGeom>
           <a:solidFill>
-            <a:srgbClr val="0E1011"/>
+            <a:srgbClr val="131516"/>
           </a:solidFill>
           <a:ln>
             <a:noFill/>
           </a:ln>
+          <a:effectLst/>
         </p:spPr>
         <p:style>
           <a:lnRef idx="1">
@@ -5427,17 +6463,29 @@
         <p:spPr>
           <a:xfrm>
             <a:off x="0" y="0"/>
-            <a:ext cx="45720" cy="6858000"/>
-          </a:xfrm>
-          <a:prstGeom prst="rect">
-            <a:avLst/>
-          </a:prstGeom>
-          <a:solidFill>
-            <a:srgbClr val="D0603A"/>
-          </a:solidFill>
+            <a:ext cx="73152" cy="6858000"/>
+          </a:xfrm>
+          <a:prstGeom prst="rect">
+            <a:avLst/>
+          </a:prstGeom>
           <a:ln>
             <a:noFill/>
           </a:ln>
+          <a:effectLst/>
+          <a:gradFill rotWithShape="1">
+            <a:gsLst>
+              <a:gs pos="0">
+                <a:srgbClr val="410913"/>
+              </a:gs>
+              <a:gs pos="50000">
+                <a:srgbClr val="610D1C"/>
+              </a:gs>
+              <a:gs pos="100000">
+                <a:srgbClr val="A2391D"/>
+              </a:gs>
+            </a:gsLst>
+            <a:lin ang="2700000"/>
+          </a:gradFill>
         </p:spPr>
         <p:style>
           <a:lnRef idx="1">
@@ -5469,8 +6517,8 @@
         </p:nvSpPr>
         <p:spPr>
           <a:xfrm>
-            <a:off x="685800" y="2286000"/>
-            <a:ext cx="10820095" cy="1005840"/>
+            <a:off x="822960" y="2011680"/>
+            <a:ext cx="10545775" cy="1280160"/>
           </a:xfrm>
           <a:prstGeom prst="rect">
             <a:avLst/>
@@ -5484,11 +6532,11 @@
           <a:lstStyle/>
           <a:p>
             <a:r>
-              <a:rPr sz="6000" b="0">
+              <a:rPr sz="7200" b="1">
                 <a:solidFill>
-                  <a:srgbClr val="D0603A"/>
+                  <a:srgbClr val="A2391D"/>
                 </a:solidFill>
-                <a:latin typeface="JetBrains Mono"/>
+                <a:latin typeface="Montserrat"/>
               </a:rPr>
               <a:t>02</a:t>
             </a:r>
@@ -5503,8 +6551,8 @@
         </p:nvSpPr>
         <p:spPr>
           <a:xfrm>
-            <a:off x="685800" y="3291840"/>
-            <a:ext cx="10820095" cy="914400"/>
+            <a:off x="822960" y="3200400"/>
+            <a:ext cx="10545775" cy="914400"/>
           </a:xfrm>
           <a:prstGeom prst="rect">
             <a:avLst/>
@@ -5518,11 +6566,11 @@
           <a:lstStyle/>
           <a:p>
             <a:r>
-              <a:rPr sz="4000" b="0">
+              <a:rPr sz="4000" b="1">
                 <a:solidFill>
-                  <a:srgbClr val="E8E6E3"/>
+                  <a:srgbClr val="EDEDED"/>
                 </a:solidFill>
-                <a:latin typeface="Inter"/>
+                <a:latin typeface="Montserrat"/>
               </a:rPr>
               <a:t>Демонстрация</a:t>
             </a:r>
@@ -5537,18 +6585,30 @@
         </p:nvSpPr>
         <p:spPr>
           <a:xfrm>
-            <a:off x="685800" y="4297680"/>
-            <a:ext cx="2926080" cy="64008"/>
-          </a:xfrm>
-          <a:prstGeom prst="rect">
-            <a:avLst/>
-          </a:prstGeom>
-          <a:solidFill>
-            <a:srgbClr val="D0603A"/>
-          </a:solidFill>
+            <a:off x="822960" y="4206240"/>
+            <a:ext cx="3108960" cy="82296"/>
+          </a:xfrm>
+          <a:prstGeom prst="rect">
+            <a:avLst/>
+          </a:prstGeom>
           <a:ln>
             <a:noFill/>
           </a:ln>
+          <a:effectLst/>
+          <a:gradFill rotWithShape="1">
+            <a:gsLst>
+              <a:gs pos="0">
+                <a:srgbClr val="410913"/>
+              </a:gs>
+              <a:gs pos="50000">
+                <a:srgbClr val="610D1C"/>
+              </a:gs>
+              <a:gs pos="100000">
+                <a:srgbClr val="A2391D"/>
+              </a:gs>
+            </a:gsLst>
+            <a:lin ang="2700000"/>
+          </a:gradFill>
         </p:spPr>
         <p:style>
           <a:lnRef idx="1">
@@ -5580,8 +6640,8 @@
         </p:nvSpPr>
         <p:spPr>
           <a:xfrm>
-            <a:off x="685800" y="6446520"/>
-            <a:ext cx="10820095" cy="274320"/>
+            <a:off x="822960" y="4480560"/>
+            <a:ext cx="10545775" cy="457200"/>
           </a:xfrm>
           <a:prstGeom prst="rect">
             <a:avLst/>
@@ -5595,13 +6655,13 @@
           <a:lstStyle/>
           <a:p>
             <a:r>
-              <a:rPr sz="900" b="0">
+              <a:rPr sz="1600" b="0">
                 <a:solidFill>
-                  <a:srgbClr val="A8A29E"/>
+                  <a:srgbClr val="B8B8B8"/>
                 </a:solidFill>
-                <a:latin typeface="Inter"/>
+                <a:latin typeface="Montserrat"/>
               </a:rPr>
-              <a:t>Команда HTTP 418 · кейс #02 · Мадригал</a:t>
+              <a:t>Живое окно и запись прогона</a:t>
             </a:r>
           </a:p>
         </p:txBody>
@@ -5614,8 +6674,8 @@
         </p:nvSpPr>
         <p:spPr>
           <a:xfrm>
-            <a:off x="685800" y="6446520"/>
-            <a:ext cx="10820095" cy="274320"/>
+            <a:off x="822960" y="6446520"/>
+            <a:ext cx="10545775" cy="274320"/>
           </a:xfrm>
           <a:prstGeom prst="rect">
             <a:avLst/>
@@ -5628,13 +6688,47 @@
           </a:bodyPr>
           <a:lstStyle/>
           <a:p>
+            <a:r>
+              <a:rPr sz="1000" b="0">
+                <a:solidFill>
+                  <a:srgbClr val="B8B8B8"/>
+                </a:solidFill>
+                <a:latin typeface="Montserrat"/>
+              </a:rPr>
+              <a:t>Команда HTTP 418 · кейс #02 · Мадригал</a:t>
+            </a:r>
+          </a:p>
+        </p:txBody>
+      </p:sp>
+      <p:sp>
+        <p:nvSpPr>
+          <p:cNvPr id="9" name="TextBox 8"/>
+          <p:cNvSpPr txBox="1"/>
+          <p:nvPr/>
+        </p:nvSpPr>
+        <p:spPr>
+          <a:xfrm>
+            <a:off x="822960" y="6446520"/>
+            <a:ext cx="10545775" cy="274320"/>
+          </a:xfrm>
+          <a:prstGeom prst="rect">
+            <a:avLst/>
+          </a:prstGeom>
+          <a:noFill/>
+        </p:spPr>
+        <p:txBody>
+          <a:bodyPr wrap="square" anchor="t">
+            <a:spAutoFit/>
+          </a:bodyPr>
+          <a:lstStyle/>
+          <a:p>
             <a:pPr algn="r"/>
             <a:r>
-              <a:rPr sz="900" b="0">
+              <a:rPr sz="1000" b="0">
                 <a:solidFill>
-                  <a:srgbClr val="A8A29E"/>
+                  <a:srgbClr val="B8B8B8"/>
                 </a:solidFill>
-                <a:latin typeface="Inter"/>
+                <a:latin typeface="Montserrat"/>
               </a:rPr>
               <a:t>14 / 19</a:t>
             </a:r>
@@ -5741,11 +6835,12 @@
             <a:avLst/>
           </a:prstGeom>
           <a:solidFill>
-            <a:srgbClr val="0E1011"/>
+            <a:srgbClr val="131516"/>
           </a:solidFill>
           <a:ln>
             <a:noFill/>
           </a:ln>
+          <a:effectLst/>
         </p:spPr>
         <p:style>
           <a:lnRef idx="1">
@@ -5778,17 +6873,29 @@
         <p:spPr>
           <a:xfrm>
             <a:off x="0" y="0"/>
-            <a:ext cx="45720" cy="6858000"/>
-          </a:xfrm>
-          <a:prstGeom prst="rect">
-            <a:avLst/>
-          </a:prstGeom>
-          <a:solidFill>
-            <a:srgbClr val="D0603A"/>
-          </a:solidFill>
+            <a:ext cx="73152" cy="6858000"/>
+          </a:xfrm>
+          <a:prstGeom prst="rect">
+            <a:avLst/>
+          </a:prstGeom>
           <a:ln>
             <a:noFill/>
           </a:ln>
+          <a:effectLst/>
+          <a:gradFill rotWithShape="1">
+            <a:gsLst>
+              <a:gs pos="0">
+                <a:srgbClr val="410913"/>
+              </a:gs>
+              <a:gs pos="50000">
+                <a:srgbClr val="610D1C"/>
+              </a:gs>
+              <a:gs pos="100000">
+                <a:srgbClr val="A2391D"/>
+              </a:gs>
+            </a:gsLst>
+            <a:lin ang="2700000"/>
+          </a:gradFill>
         </p:spPr>
         <p:style>
           <a:lnRef idx="1">
@@ -5820,8 +6927,8 @@
         </p:nvSpPr>
         <p:spPr>
           <a:xfrm>
-            <a:off x="685800" y="457200"/>
-            <a:ext cx="10820095" cy="960120"/>
+            <a:off x="822960" y="457200"/>
+            <a:ext cx="10545775" cy="1051560"/>
           </a:xfrm>
           <a:prstGeom prst="rect">
             <a:avLst/>
@@ -5835,11 +6942,11 @@
           <a:lstStyle/>
           <a:p>
             <a:r>
-              <a:rPr sz="3000" b="1">
+              <a:rPr sz="3200" b="1">
                 <a:solidFill>
-                  <a:srgbClr val="E8E6E3"/>
+                  <a:srgbClr val="EDEDED"/>
                 </a:solidFill>
-                <a:latin typeface="Inter"/>
+                <a:latin typeface="Montserrat"/>
               </a:rPr>
               <a:t>Живое окно</a:t>
             </a:r>
@@ -5848,7 +6955,7 @@
       </p:sp>
       <p:pic>
         <p:nvPicPr>
-          <p:cNvPr id="5" name="Picture 4" descr="01_main.png"/>
+          <p:cNvPr id="5" name="Picture 4" descr="screenshot-main.png"/>
           <p:cNvPicPr>
             <a:picLocks noChangeAspect="1"/>
           </p:cNvPicPr>
@@ -5862,8 +6969,8 @@
         </p:blipFill>
         <p:spPr>
           <a:xfrm>
-            <a:off x="685800" y="1600200"/>
-            <a:ext cx="6990080" cy="3931920"/>
+            <a:off x="822960" y="1691640"/>
+            <a:ext cx="9240252" cy="3657600"/>
           </a:xfrm>
           <a:prstGeom prst="rect">
             <a:avLst/>
@@ -5878,8 +6985,8 @@
         </p:nvSpPr>
         <p:spPr>
           <a:xfrm>
-            <a:off x="685800" y="5989320"/>
-            <a:ext cx="10820095" cy="365760"/>
+            <a:off x="822960" y="6035040"/>
+            <a:ext cx="10545775" cy="365760"/>
           </a:xfrm>
           <a:prstGeom prst="rect">
             <a:avLst/>
@@ -5893,11 +7000,11 @@
           <a:lstStyle/>
           <a:p>
             <a:r>
-              <a:rPr sz="1100" b="0">
+              <a:rPr sz="1200" b="0">
                 <a:solidFill>
-                  <a:srgbClr val="A8A29E"/>
+                  <a:srgbClr val="B8B8B8"/>
                 </a:solidFill>
-                <a:latin typeface="Inter"/>
+                <a:latin typeface="Montserrat"/>
               </a:rPr>
               <a:t>Сессии, байты, интерпретация, происхождение и диагностика в одном окне</a:t>
             </a:r>
@@ -5912,8 +7019,8 @@
         </p:nvSpPr>
         <p:spPr>
           <a:xfrm>
-            <a:off x="685800" y="6446520"/>
-            <a:ext cx="10820095" cy="274320"/>
+            <a:off x="822960" y="6446520"/>
+            <a:ext cx="10545775" cy="274320"/>
           </a:xfrm>
           <a:prstGeom prst="rect">
             <a:avLst/>
@@ -5927,11 +7034,11 @@
           <a:lstStyle/>
           <a:p>
             <a:r>
-              <a:rPr sz="900" b="0">
+              <a:rPr sz="1000" b="0">
                 <a:solidFill>
-                  <a:srgbClr val="A8A29E"/>
+                  <a:srgbClr val="B8B8B8"/>
                 </a:solidFill>
-                <a:latin typeface="Inter"/>
+                <a:latin typeface="Montserrat"/>
               </a:rPr>
               <a:t>Команда HTTP 418 · кейс #02 · Мадригал</a:t>
             </a:r>
@@ -5946,8 +7053,8 @@
         </p:nvSpPr>
         <p:spPr>
           <a:xfrm>
-            <a:off x="685800" y="6446520"/>
-            <a:ext cx="10820095" cy="274320"/>
+            <a:off x="822960" y="6446520"/>
+            <a:ext cx="10545775" cy="274320"/>
           </a:xfrm>
           <a:prstGeom prst="rect">
             <a:avLst/>
@@ -5962,11 +7069,11 @@
           <a:p>
             <a:pPr algn="r"/>
             <a:r>
-              <a:rPr sz="900" b="0">
+              <a:rPr sz="1000" b="0">
                 <a:solidFill>
-                  <a:srgbClr val="A8A29E"/>
+                  <a:srgbClr val="B8B8B8"/>
                 </a:solidFill>
-                <a:latin typeface="Inter"/>
+                <a:latin typeface="Montserrat"/>
               </a:rPr>
               <a:t>15 / 19</a:t>
             </a:r>
@@ -5978,6 +7085,72 @@
   <p:clrMapOvr>
     <a:masterClrMapping/>
   </p:clrMapOvr>
+  <p:timing>
+    <p:tnLst>
+      <p:par>
+        <p:cTn id="1" dur="indefinite" restart="never" nodeType="tmRoot">
+          <p:childTnLst>
+            <p:seq concurrent="1" nextAc="seek">
+              <p:cTn id="2" dur="indefinite" nodeType="mainSeq">
+                <p:childTnLst>
+                  <p:par>
+                    <p:cTn id="3" presetID="10" presetClass="entr" presetSubtype="0" fill="hold" grpId="0" nodeType="clickEffect">
+                      <p:stCondLst>
+                        <p:cond delay="0"/>
+                      </p:stCondLst>
+                      <p:childTnLst>
+                        <p:set>
+                          <p:cBhvr>
+                            <p:cTn id="4" dur="1" fill="hold">
+                              <p:stCondLst>
+                                <p:cond delay="0"/>
+                              </p:stCondLst>
+                            </p:cTn>
+                            <p:tgtEl>
+                              <p:spTgt spid="5"/>
+                            </p:tgtEl>
+                            <p:attrNameLst>
+                              <p:attrName>style.visibility</p:attrName>
+                            </p:attrNameLst>
+                          </p:cBhvr>
+                          <p:to>
+                            <p:strVal val="visible"/>
+                          </p:to>
+                        </p:set>
+                        <p:anim calcmode="lin" valueType="num">
+                          <p:cBhvr additive="base">
+                            <p:cTn id="5" dur="500" fill="hold"/>
+                            <p:tgtEl>
+                              <p:spTgt spid="5"/>
+                            </p:tgtEl>
+                            <p:attrNameLst>
+                              <p:attrName>style.opacity</p:attrName>
+                            </p:attrNameLst>
+                          </p:cBhvr>
+                          <p:tavLst>
+                            <p:tav tm="0">
+                              <p:val>
+                                <p:fltVal val="0"/>
+                              </p:val>
+                            </p:tav>
+                            <p:tav tm="100000">
+                              <p:val>
+                                <p:fltVal val="1"/>
+                              </p:val>
+                            </p:tav>
+                          </p:tavLst>
+                        </p:anim>
+                      </p:childTnLst>
+                    </p:cTn>
+                  </p:par>
+                </p:childTnLst>
+              </p:cTn>
+            </p:seq>
+          </p:childTnLst>
+        </p:cTn>
+      </p:par>
+    </p:tnLst>
+  </p:timing>
   <p:transition spd="med" fade="1"/>
 </p:sld>
 </file>
@@ -6007,11 +7180,12 @@
             <a:avLst/>
           </a:prstGeom>
           <a:solidFill>
-            <a:srgbClr val="0E1011"/>
+            <a:srgbClr val="131516"/>
           </a:solidFill>
           <a:ln>
             <a:noFill/>
           </a:ln>
+          <a:effectLst/>
         </p:spPr>
         <p:style>
           <a:lnRef idx="1">
@@ -6044,17 +7218,29 @@
         <p:spPr>
           <a:xfrm>
             <a:off x="0" y="0"/>
-            <a:ext cx="45720" cy="6858000"/>
-          </a:xfrm>
-          <a:prstGeom prst="rect">
-            <a:avLst/>
-          </a:prstGeom>
-          <a:solidFill>
-            <a:srgbClr val="D0603A"/>
-          </a:solidFill>
+            <a:ext cx="73152" cy="6858000"/>
+          </a:xfrm>
+          <a:prstGeom prst="rect">
+            <a:avLst/>
+          </a:prstGeom>
           <a:ln>
             <a:noFill/>
           </a:ln>
+          <a:effectLst/>
+          <a:gradFill rotWithShape="1">
+            <a:gsLst>
+              <a:gs pos="0">
+                <a:srgbClr val="410913"/>
+              </a:gs>
+              <a:gs pos="50000">
+                <a:srgbClr val="610D1C"/>
+              </a:gs>
+              <a:gs pos="100000">
+                <a:srgbClr val="A2391D"/>
+              </a:gs>
+            </a:gsLst>
+            <a:lin ang="2700000"/>
+          </a:gradFill>
         </p:spPr>
         <p:style>
           <a:lnRef idx="1">
@@ -6086,8 +7272,8 @@
         </p:nvSpPr>
         <p:spPr>
           <a:xfrm>
-            <a:off x="685800" y="457200"/>
-            <a:ext cx="10820095" cy="960120"/>
+            <a:off x="822960" y="457200"/>
+            <a:ext cx="10545775" cy="1051560"/>
           </a:xfrm>
           <a:prstGeom prst="rect">
             <a:avLst/>
@@ -6101,11 +7287,11 @@
           <a:lstStyle/>
           <a:p>
             <a:r>
-              <a:rPr sz="3000" b="1">
+              <a:rPr sz="3200" b="1">
                 <a:solidFill>
-                  <a:srgbClr val="E8E6E3"/>
+                  <a:srgbClr val="EDEDED"/>
                 </a:solidFill>
-                <a:latin typeface="Inter"/>
+                <a:latin typeface="Montserrat"/>
               </a:rPr>
               <a:t>Запись прогона на случай, если экран не поднимется</a:t>
             </a:r>
@@ -6114,7 +7300,7 @@
       </p:sp>
       <p:pic>
         <p:nvPicPr>
-          <p:cNvPr id="5" name="Picture 4" descr="02_sessions.png"/>
+          <p:cNvPr id="5" name="Picture 4" descr="screenshot-main.png"/>
           <p:cNvPicPr>
             <a:picLocks noChangeAspect="1"/>
           </p:cNvPicPr>
@@ -6128,8 +7314,8 @@
         </p:blipFill>
         <p:spPr>
           <a:xfrm>
-            <a:off x="685800" y="1600200"/>
-            <a:ext cx="6990080" cy="3931920"/>
+            <a:off x="822960" y="1691640"/>
+            <a:ext cx="9240252" cy="3657600"/>
           </a:xfrm>
           <a:prstGeom prst="rect">
             <a:avLst/>
@@ -6144,8 +7330,8 @@
         </p:nvSpPr>
         <p:spPr>
           <a:xfrm>
-            <a:off x="685800" y="5989320"/>
-            <a:ext cx="10820095" cy="365760"/>
+            <a:off x="822960" y="6035040"/>
+            <a:ext cx="10545775" cy="365760"/>
           </a:xfrm>
           <a:prstGeom prst="rect">
             <a:avLst/>
@@ -6159,11 +7345,11 @@
           <a:lstStyle/>
           <a:p>
             <a:r>
-              <a:rPr sz="1100" b="0">
+              <a:rPr sz="1200" b="0">
                 <a:solidFill>
-                  <a:srgbClr val="A8A29E"/>
+                  <a:srgbClr val="B8B8B8"/>
                 </a:solidFill>
-                <a:latin typeface="Inter"/>
+                <a:latin typeface="Montserrat"/>
               </a:rPr>
               <a:t>Четыре минуты: шесть сцен референсного исследования</a:t>
             </a:r>
@@ -6178,8 +7364,8 @@
         </p:nvSpPr>
         <p:spPr>
           <a:xfrm>
-            <a:off x="685800" y="6446520"/>
-            <a:ext cx="10820095" cy="274320"/>
+            <a:off x="822960" y="6446520"/>
+            <a:ext cx="10545775" cy="274320"/>
           </a:xfrm>
           <a:prstGeom prst="rect">
             <a:avLst/>
@@ -6193,11 +7379,11 @@
           <a:lstStyle/>
           <a:p>
             <a:r>
-              <a:rPr sz="900" b="0">
+              <a:rPr sz="1000" b="0">
                 <a:solidFill>
-                  <a:srgbClr val="A8A29E"/>
+                  <a:srgbClr val="B8B8B8"/>
                 </a:solidFill>
-                <a:latin typeface="Inter"/>
+                <a:latin typeface="Montserrat"/>
               </a:rPr>
               <a:t>Команда HTTP 418 · кейс #02 · Мадригал</a:t>
             </a:r>
@@ -6212,8 +7398,8 @@
         </p:nvSpPr>
         <p:spPr>
           <a:xfrm>
-            <a:off x="685800" y="6446520"/>
-            <a:ext cx="10820095" cy="274320"/>
+            <a:off x="822960" y="6446520"/>
+            <a:ext cx="10545775" cy="274320"/>
           </a:xfrm>
           <a:prstGeom prst="rect">
             <a:avLst/>
@@ -6228,11 +7414,11 @@
           <a:p>
             <a:pPr algn="r"/>
             <a:r>
-              <a:rPr sz="900" b="0">
+              <a:rPr sz="1000" b="0">
                 <a:solidFill>
-                  <a:srgbClr val="A8A29E"/>
+                  <a:srgbClr val="B8B8B8"/>
                 </a:solidFill>
-                <a:latin typeface="Inter"/>
+                <a:latin typeface="Montserrat"/>
               </a:rPr>
               <a:t>16 / 19</a:t>
             </a:r>
@@ -6244,6 +7430,72 @@
   <p:clrMapOvr>
     <a:masterClrMapping/>
   </p:clrMapOvr>
+  <p:timing>
+    <p:tnLst>
+      <p:par>
+        <p:cTn id="1" dur="indefinite" restart="never" nodeType="tmRoot">
+          <p:childTnLst>
+            <p:seq concurrent="1" nextAc="seek">
+              <p:cTn id="2" dur="indefinite" nodeType="mainSeq">
+                <p:childTnLst>
+                  <p:par>
+                    <p:cTn id="3" presetID="10" presetClass="entr" presetSubtype="0" fill="hold" grpId="0" nodeType="clickEffect">
+                      <p:stCondLst>
+                        <p:cond delay="0"/>
+                      </p:stCondLst>
+                      <p:childTnLst>
+                        <p:set>
+                          <p:cBhvr>
+                            <p:cTn id="4" dur="1" fill="hold">
+                              <p:stCondLst>
+                                <p:cond delay="0"/>
+                              </p:stCondLst>
+                            </p:cTn>
+                            <p:tgtEl>
+                              <p:spTgt spid="5"/>
+                            </p:tgtEl>
+                            <p:attrNameLst>
+                              <p:attrName>style.visibility</p:attrName>
+                            </p:attrNameLst>
+                          </p:cBhvr>
+                          <p:to>
+                            <p:strVal val="visible"/>
+                          </p:to>
+                        </p:set>
+                        <p:anim calcmode="lin" valueType="num">
+                          <p:cBhvr additive="base">
+                            <p:cTn id="5" dur="500" fill="hold"/>
+                            <p:tgtEl>
+                              <p:spTgt spid="5"/>
+                            </p:tgtEl>
+                            <p:attrNameLst>
+                              <p:attrName>style.opacity</p:attrName>
+                            </p:attrNameLst>
+                          </p:cBhvr>
+                          <p:tavLst>
+                            <p:tav tm="0">
+                              <p:val>
+                                <p:fltVal val="0"/>
+                              </p:val>
+                            </p:tav>
+                            <p:tav tm="100000">
+                              <p:val>
+                                <p:fltVal val="1"/>
+                              </p:val>
+                            </p:tav>
+                          </p:tavLst>
+                        </p:anim>
+                      </p:childTnLst>
+                    </p:cTn>
+                  </p:par>
+                </p:childTnLst>
+              </p:cTn>
+            </p:seq>
+          </p:childTnLst>
+        </p:cTn>
+      </p:par>
+    </p:tnLst>
+  </p:timing>
   <p:transition spd="med" fade="1"/>
 </p:sld>
 </file>
@@ -6273,11 +7525,12 @@
             <a:avLst/>
           </a:prstGeom>
           <a:solidFill>
-            <a:srgbClr val="0E1011"/>
+            <a:srgbClr val="131516"/>
           </a:solidFill>
           <a:ln>
             <a:noFill/>
           </a:ln>
+          <a:effectLst/>
         </p:spPr>
         <p:style>
           <a:lnRef idx="1">
@@ -6310,17 +7563,29 @@
         <p:spPr>
           <a:xfrm>
             <a:off x="0" y="0"/>
-            <a:ext cx="45720" cy="6858000"/>
-          </a:xfrm>
-          <a:prstGeom prst="rect">
-            <a:avLst/>
-          </a:prstGeom>
-          <a:solidFill>
-            <a:srgbClr val="D0603A"/>
-          </a:solidFill>
+            <a:ext cx="73152" cy="6858000"/>
+          </a:xfrm>
+          <a:prstGeom prst="rect">
+            <a:avLst/>
+          </a:prstGeom>
           <a:ln>
             <a:noFill/>
           </a:ln>
+          <a:effectLst/>
+          <a:gradFill rotWithShape="1">
+            <a:gsLst>
+              <a:gs pos="0">
+                <a:srgbClr val="410913"/>
+              </a:gs>
+              <a:gs pos="50000">
+                <a:srgbClr val="610D1C"/>
+              </a:gs>
+              <a:gs pos="100000">
+                <a:srgbClr val="A2391D"/>
+              </a:gs>
+            </a:gsLst>
+            <a:lin ang="2700000"/>
+          </a:gradFill>
         </p:spPr>
         <p:style>
           <a:lnRef idx="1">
@@ -6352,8 +7617,8 @@
         </p:nvSpPr>
         <p:spPr>
           <a:xfrm>
-            <a:off x="685800" y="2286000"/>
-            <a:ext cx="10820095" cy="1005840"/>
+            <a:off x="822960" y="2011680"/>
+            <a:ext cx="10545775" cy="1280160"/>
           </a:xfrm>
           <a:prstGeom prst="rect">
             <a:avLst/>
@@ -6367,11 +7632,11 @@
           <a:lstStyle/>
           <a:p>
             <a:r>
-              <a:rPr sz="6000" b="0">
+              <a:rPr sz="7200" b="1">
                 <a:solidFill>
-                  <a:srgbClr val="D0603A"/>
+                  <a:srgbClr val="A2391D"/>
                 </a:solidFill>
-                <a:latin typeface="JetBrains Mono"/>
+                <a:latin typeface="Montserrat"/>
               </a:rPr>
               <a:t>03</a:t>
             </a:r>
@@ -6386,8 +7651,8 @@
         </p:nvSpPr>
         <p:spPr>
           <a:xfrm>
-            <a:off x="685800" y="3291840"/>
-            <a:ext cx="10820095" cy="914400"/>
+            <a:off x="822960" y="3200400"/>
+            <a:ext cx="10545775" cy="914400"/>
           </a:xfrm>
           <a:prstGeom prst="rect">
             <a:avLst/>
@@ -6401,11 +7666,11 @@
           <a:lstStyle/>
           <a:p>
             <a:r>
-              <a:rPr sz="4000" b="0">
+              <a:rPr sz="4000" b="1">
                 <a:solidFill>
-                  <a:srgbClr val="E8E6E3"/>
+                  <a:srgbClr val="EDEDED"/>
                 </a:solidFill>
-                <a:latin typeface="Inter"/>
+                <a:latin typeface="Montserrat"/>
               </a:rPr>
               <a:t>Границы и итог</a:t>
             </a:r>
@@ -6420,18 +7685,30 @@
         </p:nvSpPr>
         <p:spPr>
           <a:xfrm>
-            <a:off x="685800" y="4297680"/>
-            <a:ext cx="2926080" cy="64008"/>
-          </a:xfrm>
-          <a:prstGeom prst="rect">
-            <a:avLst/>
-          </a:prstGeom>
-          <a:solidFill>
-            <a:srgbClr val="D0603A"/>
-          </a:solidFill>
+            <a:off x="822960" y="4206240"/>
+            <a:ext cx="3108960" cy="82296"/>
+          </a:xfrm>
+          <a:prstGeom prst="rect">
+            <a:avLst/>
+          </a:prstGeom>
           <a:ln>
             <a:noFill/>
           </a:ln>
+          <a:effectLst/>
+          <a:gradFill rotWithShape="1">
+            <a:gsLst>
+              <a:gs pos="0">
+                <a:srgbClr val="410913"/>
+              </a:gs>
+              <a:gs pos="50000">
+                <a:srgbClr val="610D1C"/>
+              </a:gs>
+              <a:gs pos="100000">
+                <a:srgbClr val="A2391D"/>
+              </a:gs>
+            </a:gsLst>
+            <a:lin ang="2700000"/>
+          </a:gradFill>
         </p:spPr>
         <p:style>
           <a:lnRef idx="1">
@@ -6463,8 +7740,8 @@
         </p:nvSpPr>
         <p:spPr>
           <a:xfrm>
-            <a:off x="685800" y="6446520"/>
-            <a:ext cx="10820095" cy="274320"/>
+            <a:off x="822960" y="4480560"/>
+            <a:ext cx="10545775" cy="457200"/>
           </a:xfrm>
           <a:prstGeom prst="rect">
             <a:avLst/>
@@ -6478,13 +7755,13 @@
           <a:lstStyle/>
           <a:p>
             <a:r>
-              <a:rPr sz="900" b="0">
+              <a:rPr sz="1600" b="0">
                 <a:solidFill>
-                  <a:srgbClr val="A8A29E"/>
+                  <a:srgbClr val="B8B8B8"/>
                 </a:solidFill>
-                <a:latin typeface="Inter"/>
+                <a:latin typeface="Montserrat"/>
               </a:rPr>
-              <a:t>Команда HTTP 418 · кейс #02 · Мадригал</a:t>
+              <a:t>Что мы не утверждаем и что осталось за рамками</a:t>
             </a:r>
           </a:p>
         </p:txBody>
@@ -6497,8 +7774,8 @@
         </p:nvSpPr>
         <p:spPr>
           <a:xfrm>
-            <a:off x="685800" y="6446520"/>
-            <a:ext cx="10820095" cy="274320"/>
+            <a:off x="822960" y="6446520"/>
+            <a:ext cx="10545775" cy="274320"/>
           </a:xfrm>
           <a:prstGeom prst="rect">
             <a:avLst/>
@@ -6511,13 +7788,47 @@
           </a:bodyPr>
           <a:lstStyle/>
           <a:p>
+            <a:r>
+              <a:rPr sz="1000" b="0">
+                <a:solidFill>
+                  <a:srgbClr val="B8B8B8"/>
+                </a:solidFill>
+                <a:latin typeface="Montserrat"/>
+              </a:rPr>
+              <a:t>Команда HTTP 418 · кейс #02 · Мадригал</a:t>
+            </a:r>
+          </a:p>
+        </p:txBody>
+      </p:sp>
+      <p:sp>
+        <p:nvSpPr>
+          <p:cNvPr id="9" name="TextBox 8"/>
+          <p:cNvSpPr txBox="1"/>
+          <p:nvPr/>
+        </p:nvSpPr>
+        <p:spPr>
+          <a:xfrm>
+            <a:off x="822960" y="6446520"/>
+            <a:ext cx="10545775" cy="274320"/>
+          </a:xfrm>
+          <a:prstGeom prst="rect">
+            <a:avLst/>
+          </a:prstGeom>
+          <a:noFill/>
+        </p:spPr>
+        <p:txBody>
+          <a:bodyPr wrap="square" anchor="t">
+            <a:spAutoFit/>
+          </a:bodyPr>
+          <a:lstStyle/>
+          <a:p>
             <a:pPr algn="r"/>
             <a:r>
-              <a:rPr sz="900" b="0">
+              <a:rPr sz="1000" b="0">
                 <a:solidFill>
-                  <a:srgbClr val="A8A29E"/>
+                  <a:srgbClr val="B8B8B8"/>
                 </a:solidFill>
-                <a:latin typeface="Inter"/>
+                <a:latin typeface="Montserrat"/>
               </a:rPr>
               <a:t>17 / 19</a:t>
             </a:r>
@@ -6624,11 +7935,12 @@
             <a:avLst/>
           </a:prstGeom>
           <a:solidFill>
-            <a:srgbClr val="0E1011"/>
+            <a:srgbClr val="131516"/>
           </a:solidFill>
           <a:ln>
             <a:noFill/>
           </a:ln>
+          <a:effectLst/>
         </p:spPr>
         <p:style>
           <a:lnRef idx="1">
@@ -6661,17 +7973,29 @@
         <p:spPr>
           <a:xfrm>
             <a:off x="0" y="0"/>
-            <a:ext cx="45720" cy="6858000"/>
-          </a:xfrm>
-          <a:prstGeom prst="rect">
-            <a:avLst/>
-          </a:prstGeom>
-          <a:solidFill>
-            <a:srgbClr val="D0603A"/>
-          </a:solidFill>
+            <a:ext cx="73152" cy="6858000"/>
+          </a:xfrm>
+          <a:prstGeom prst="rect">
+            <a:avLst/>
+          </a:prstGeom>
           <a:ln>
             <a:noFill/>
           </a:ln>
+          <a:effectLst/>
+          <a:gradFill rotWithShape="1">
+            <a:gsLst>
+              <a:gs pos="0">
+                <a:srgbClr val="410913"/>
+              </a:gs>
+              <a:gs pos="50000">
+                <a:srgbClr val="610D1C"/>
+              </a:gs>
+              <a:gs pos="100000">
+                <a:srgbClr val="A2391D"/>
+              </a:gs>
+            </a:gsLst>
+            <a:lin ang="2700000"/>
+          </a:gradFill>
         </p:spPr>
         <p:style>
           <a:lnRef idx="1">
@@ -6703,8 +8027,8 @@
         </p:nvSpPr>
         <p:spPr>
           <a:xfrm>
-            <a:off x="685800" y="457200"/>
-            <a:ext cx="10820095" cy="960120"/>
+            <a:off x="822960" y="457200"/>
+            <a:ext cx="10545775" cy="1051560"/>
           </a:xfrm>
           <a:prstGeom prst="rect">
             <a:avLst/>
@@ -6718,11 +8042,11 @@
           <a:lstStyle/>
           <a:p>
             <a:r>
-              <a:rPr sz="3000" b="1">
+              <a:rPr sz="3200" b="1">
                 <a:solidFill>
-                  <a:srgbClr val="E8E6E3"/>
+                  <a:srgbClr val="EDEDED"/>
                 </a:solidFill>
-                <a:latin typeface="Inter"/>
+                <a:latin typeface="Montserrat"/>
               </a:rPr>
               <a:t>Что мы не утверждаем</a:t>
             </a:r>
@@ -6737,8 +8061,8 @@
         </p:nvSpPr>
         <p:spPr>
           <a:xfrm>
-            <a:off x="685800" y="1600200"/>
-            <a:ext cx="5120640" cy="685800"/>
+            <a:off x="822960" y="1874520"/>
+            <a:ext cx="5044287" cy="914400"/>
           </a:xfrm>
           <a:prstGeom prst="rect">
             <a:avLst/>
@@ -6754,9 +8078,9 @@
             <a:r>
               <a:rPr sz="1700" b="0">
                 <a:solidFill>
-                  <a:srgbClr val="E8E6E3"/>
+                  <a:srgbClr val="EDEDED"/>
                 </a:solidFill>
-                <a:latin typeface="Inter"/>
+                <a:latin typeface="Montserrat"/>
               </a:rPr>
               <a:t>•  Смысл байта флагов не установлен: в корпусе он постоянен</a:t>
             </a:r>
@@ -6771,8 +8095,8 @@
         </p:nvSpPr>
         <p:spPr>
           <a:xfrm>
-            <a:off x="685800" y="2286000"/>
-            <a:ext cx="5120640" cy="685800"/>
+            <a:off x="822960" y="2788920"/>
+            <a:ext cx="5044287" cy="914400"/>
           </a:xfrm>
           <a:prstGeom prst="rect">
             <a:avLst/>
@@ -6788,9 +8112,9 @@
             <a:r>
               <a:rPr sz="1700" b="0">
                 <a:solidFill>
-                  <a:srgbClr val="E8E6E3"/>
+                  <a:srgbClr val="EDEDED"/>
                 </a:solidFill>
-                <a:latin typeface="Inter"/>
+                <a:latin typeface="Montserrat"/>
               </a:rPr>
               <a:t>•  Поле значения остаётся гипотезой, а не фактом</a:t>
             </a:r>
@@ -6805,8 +8129,8 @@
         </p:nvSpPr>
         <p:spPr>
           <a:xfrm>
-            <a:off x="6263640" y="1600200"/>
-            <a:ext cx="5242255" cy="685800"/>
+            <a:off x="6324447" y="1874520"/>
+            <a:ext cx="5044287" cy="914400"/>
           </a:xfrm>
           <a:prstGeom prst="rect">
             <a:avLst/>
@@ -6822,9 +8146,9 @@
             <a:r>
               <a:rPr sz="1700" b="0">
                 <a:solidFill>
-                  <a:srgbClr val="E8E6E3"/>
+                  <a:srgbClr val="EDEDED"/>
                 </a:solidFill>
-                <a:latin typeface="Inter"/>
+                <a:latin typeface="Montserrat"/>
               </a:rPr>
               <a:t>•  Альтернативные чтения берутся из заданного набора</a:t>
             </a:r>
@@ -6839,8 +8163,8 @@
         </p:nvSpPr>
         <p:spPr>
           <a:xfrm>
-            <a:off x="6263640" y="2286000"/>
-            <a:ext cx="5242255" cy="685800"/>
+            <a:off x="6324447" y="2788920"/>
+            <a:ext cx="5044287" cy="914400"/>
           </a:xfrm>
           <a:prstGeom prst="rect">
             <a:avLst/>
@@ -6856,9 +8180,9 @@
             <a:r>
               <a:rPr sz="1700" b="0">
                 <a:solidFill>
-                  <a:srgbClr val="E8E6E3"/>
+                  <a:srgbClr val="EDEDED"/>
                 </a:solidFill>
-                <a:latin typeface="Inter"/>
+                <a:latin typeface="Montserrat"/>
               </a:rPr>
               <a:t>•  Интерпретация верна для проверенных захватов и молчит вне них</a:t>
             </a:r>
@@ -6873,8 +8197,8 @@
         </p:nvSpPr>
         <p:spPr>
           <a:xfrm>
-            <a:off x="685800" y="6446520"/>
-            <a:ext cx="10820095" cy="274320"/>
+            <a:off x="822960" y="6446520"/>
+            <a:ext cx="10545775" cy="274320"/>
           </a:xfrm>
           <a:prstGeom prst="rect">
             <a:avLst/>
@@ -6888,11 +8212,11 @@
           <a:lstStyle/>
           <a:p>
             <a:r>
-              <a:rPr sz="900" b="0">
+              <a:rPr sz="1000" b="0">
                 <a:solidFill>
-                  <a:srgbClr val="A8A29E"/>
+                  <a:srgbClr val="B8B8B8"/>
                 </a:solidFill>
-                <a:latin typeface="Inter"/>
+                <a:latin typeface="Montserrat"/>
               </a:rPr>
               <a:t>Команда HTTP 418 · кейс #02 · Мадригал</a:t>
             </a:r>
@@ -6907,8 +8231,8 @@
         </p:nvSpPr>
         <p:spPr>
           <a:xfrm>
-            <a:off x="685800" y="6446520"/>
-            <a:ext cx="10820095" cy="274320"/>
+            <a:off x="822960" y="6446520"/>
+            <a:ext cx="10545775" cy="274320"/>
           </a:xfrm>
           <a:prstGeom prst="rect">
             <a:avLst/>
@@ -6923,11 +8247,11 @@
           <a:p>
             <a:pPr algn="r"/>
             <a:r>
-              <a:rPr sz="900" b="0">
+              <a:rPr sz="1000" b="0">
                 <a:solidFill>
-                  <a:srgbClr val="A8A29E"/>
+                  <a:srgbClr val="B8B8B8"/>
                 </a:solidFill>
-                <a:latin typeface="Inter"/>
+                <a:latin typeface="Montserrat"/>
               </a:rPr>
               <a:t>18 / 19</a:t>
             </a:r>
@@ -7184,11 +8508,12 @@
             <a:avLst/>
           </a:prstGeom>
           <a:solidFill>
-            <a:srgbClr val="0E1011"/>
+            <a:srgbClr val="131516"/>
           </a:solidFill>
           <a:ln>
             <a:noFill/>
           </a:ln>
+          <a:effectLst/>
         </p:spPr>
         <p:style>
           <a:lnRef idx="1">
@@ -7221,17 +8546,29 @@
         <p:spPr>
           <a:xfrm>
             <a:off x="0" y="0"/>
-            <a:ext cx="45720" cy="6858000"/>
-          </a:xfrm>
-          <a:prstGeom prst="rect">
-            <a:avLst/>
-          </a:prstGeom>
-          <a:solidFill>
-            <a:srgbClr val="D0603A"/>
-          </a:solidFill>
+            <a:ext cx="73152" cy="6858000"/>
+          </a:xfrm>
+          <a:prstGeom prst="rect">
+            <a:avLst/>
+          </a:prstGeom>
           <a:ln>
             <a:noFill/>
           </a:ln>
+          <a:effectLst/>
+          <a:gradFill rotWithShape="1">
+            <a:gsLst>
+              <a:gs pos="0">
+                <a:srgbClr val="410913"/>
+              </a:gs>
+              <a:gs pos="50000">
+                <a:srgbClr val="610D1C"/>
+              </a:gs>
+              <a:gs pos="100000">
+                <a:srgbClr val="A2391D"/>
+              </a:gs>
+            </a:gsLst>
+            <a:lin ang="2700000"/>
+          </a:gradFill>
         </p:spPr>
         <p:style>
           <a:lnRef idx="1">
@@ -7263,8 +8600,8 @@
         </p:nvSpPr>
         <p:spPr>
           <a:xfrm>
-            <a:off x="914400" y="1371600"/>
-            <a:ext cx="10362895" cy="1463040"/>
+            <a:off x="914400" y="1280160"/>
+            <a:ext cx="10362895" cy="1280160"/>
           </a:xfrm>
           <a:prstGeom prst="rect">
             <a:avLst/>
@@ -7279,11 +8616,11 @@
           <a:p>
             <a:pPr algn="ctr"/>
             <a:r>
-              <a:rPr sz="3600" b="1">
+              <a:rPr sz="3400" b="1">
                 <a:solidFill>
-                  <a:srgbClr val="E8E6E3"/>
+                  <a:srgbClr val="EDEDED"/>
                 </a:solidFill>
-                <a:latin typeface="Inter"/>
+                <a:latin typeface="Montserrat"/>
               </a:rPr>
               <a:t>Инструмент превращает байты в проверяемое знание</a:t>
             </a:r>
@@ -7306,8 +8643,8 @@
         </p:blipFill>
         <p:spPr>
           <a:xfrm>
-            <a:off x="3992727" y="3200400"/>
-            <a:ext cx="1463040" cy="1463040"/>
+            <a:off x="2118207" y="2834640"/>
+            <a:ext cx="1371600" cy="1371600"/>
           </a:xfrm>
           <a:prstGeom prst="rect">
             <a:avLst/>
@@ -7322,8 +8659,8 @@
         </p:nvSpPr>
         <p:spPr>
           <a:xfrm>
-            <a:off x="3626967" y="4754880"/>
-            <a:ext cx="2194560" cy="320040"/>
+            <a:off x="1843887" y="4343400"/>
+            <a:ext cx="1920240" cy="320040"/>
           </a:xfrm>
           <a:prstGeom prst="rect">
             <a:avLst/>
@@ -7340,9 +8677,9 @@
             <a:r>
               <a:rPr sz="1100" b="0">
                 <a:solidFill>
-                  <a:srgbClr val="A8A29E"/>
+                  <a:srgbClr val="B8B8B8"/>
                 </a:solidFill>
-                <a:latin typeface="Inter"/>
+                <a:latin typeface="Montserrat"/>
               </a:rPr>
               <a:t>Репозиторий</a:t>
             </a:r>
@@ -7365,8 +8702,8 @@
         </p:blipFill>
         <p:spPr>
           <a:xfrm>
-            <a:off x="6735927" y="3200400"/>
-            <a:ext cx="1463040" cy="1463040"/>
+            <a:off x="4312767" y="2834640"/>
+            <a:ext cx="1371600" cy="1371600"/>
           </a:xfrm>
           <a:prstGeom prst="rect">
             <a:avLst/>
@@ -7381,8 +8718,8 @@
         </p:nvSpPr>
         <p:spPr>
           <a:xfrm>
-            <a:off x="6370167" y="4754880"/>
-            <a:ext cx="2194560" cy="320040"/>
+            <a:off x="4038447" y="4343400"/>
+            <a:ext cx="1920240" cy="320040"/>
           </a:xfrm>
           <a:prstGeom prst="rect">
             <a:avLst/>
@@ -7399,25 +8736,49 @@
             <a:r>
               <a:rPr sz="1100" b="0">
                 <a:solidFill>
-                  <a:srgbClr val="A8A29E"/>
+                  <a:srgbClr val="B8B8B8"/>
                 </a:solidFill>
-                <a:latin typeface="Inter"/>
+                <a:latin typeface="Montserrat"/>
               </a:rPr>
               <a:t>Релиз v1.0.0</a:t>
             </a:r>
           </a:p>
         </p:txBody>
       </p:sp>
-      <p:sp>
-        <p:nvSpPr>
-          <p:cNvPr id="9" name="TextBox 8"/>
+      <p:pic>
+        <p:nvPicPr>
+          <p:cNvPr id="9" name="Picture 8" descr="qr_telegram_pasha.png"/>
+          <p:cNvPicPr>
+            <a:picLocks noChangeAspect="1"/>
+          </p:cNvPicPr>
+          <p:nvPr/>
+        </p:nvPicPr>
+        <p:blipFill>
+          <a:blip r:embed="rId4"/>
+          <a:stretch>
+            <a:fillRect/>
+          </a:stretch>
+        </p:blipFill>
+        <p:spPr>
+          <a:xfrm>
+            <a:off x="6507327" y="2834640"/>
+            <a:ext cx="1371600" cy="1371600"/>
+          </a:xfrm>
+          <a:prstGeom prst="rect">
+            <a:avLst/>
+          </a:prstGeom>
+        </p:spPr>
+      </p:pic>
+      <p:sp>
+        <p:nvSpPr>
+          <p:cNvPr id="10" name="TextBox 9"/>
           <p:cNvSpPr txBox="1"/>
           <p:nvPr/>
         </p:nvSpPr>
         <p:spPr>
           <a:xfrm>
-            <a:off x="914400" y="5394960"/>
-            <a:ext cx="10362895" cy="457200"/>
+            <a:off x="6233007" y="4343400"/>
+            <a:ext cx="1920240" cy="320040"/>
           </a:xfrm>
           <a:prstGeom prst="rect">
             <a:avLst/>
@@ -7432,28 +8793,51 @@
           <a:p>
             <a:pPr algn="ctr"/>
             <a:r>
-              <a:rPr sz="1300">
+              <a:rPr sz="1100" b="0">
                 <a:solidFill>
-                  <a:srgbClr val="A8A29E"/>
+                  <a:srgbClr val="B8B8B8"/>
                 </a:solidFill>
-                <a:latin typeface="JetBrains Mono"/>
-                <a:hlinkClick r:id="rId4"/>
+                <a:latin typeface="Montserrat"/>
               </a:rPr>
-              <a:t>github.com/Pavel1778/madrigal-protocol-lab · @Pasha1778</a:t>
-            </a:r>
-          </a:p>
-        </p:txBody>
-      </p:sp>
-      <p:sp>
-        <p:nvSpPr>
-          <p:cNvPr id="10" name="TextBox 9"/>
+              <a:t>@Pasha1778</a:t>
+            </a:r>
+          </a:p>
+        </p:txBody>
+      </p:sp>
+      <p:pic>
+        <p:nvPicPr>
+          <p:cNvPr id="11" name="Picture 10" descr="qr_telegram_nikita.png"/>
+          <p:cNvPicPr>
+            <a:picLocks noChangeAspect="1"/>
+          </p:cNvPicPr>
+          <p:nvPr/>
+        </p:nvPicPr>
+        <p:blipFill>
+          <a:blip r:embed="rId5"/>
+          <a:stretch>
+            <a:fillRect/>
+          </a:stretch>
+        </p:blipFill>
+        <p:spPr>
+          <a:xfrm>
+            <a:off x="8701887" y="2834640"/>
+            <a:ext cx="1371600" cy="1371600"/>
+          </a:xfrm>
+          <a:prstGeom prst="rect">
+            <a:avLst/>
+          </a:prstGeom>
+        </p:spPr>
+      </p:pic>
+      <p:sp>
+        <p:nvSpPr>
+          <p:cNvPr id="12" name="TextBox 11"/>
           <p:cNvSpPr txBox="1"/>
           <p:nvPr/>
         </p:nvSpPr>
         <p:spPr>
           <a:xfrm>
-            <a:off x="685800" y="6446520"/>
-            <a:ext cx="10820095" cy="274320"/>
+            <a:off x="8427567" y="4343400"/>
+            <a:ext cx="1920240" cy="320040"/>
           </a:xfrm>
           <a:prstGeom prst="rect">
             <a:avLst/>
@@ -7466,28 +8850,29 @@
           </a:bodyPr>
           <a:lstStyle/>
           <a:p>
-            <a:r>
-              <a:rPr sz="900" b="0">
+            <a:pPr algn="ctr"/>
+            <a:r>
+              <a:rPr sz="1100" b="0">
                 <a:solidFill>
-                  <a:srgbClr val="A8A29E"/>
+                  <a:srgbClr val="B8B8B8"/>
                 </a:solidFill>
-                <a:latin typeface="Inter"/>
+                <a:latin typeface="Montserrat"/>
               </a:rPr>
-              <a:t>Команда HTTP 418 · кейс #02 · Мадригал</a:t>
-            </a:r>
-          </a:p>
-        </p:txBody>
-      </p:sp>
-      <p:sp>
-        <p:nvSpPr>
-          <p:cNvPr id="11" name="TextBox 10"/>
+              <a:t>@petruan</a:t>
+            </a:r>
+          </a:p>
+        </p:txBody>
+      </p:sp>
+      <p:sp>
+        <p:nvSpPr>
+          <p:cNvPr id="13" name="TextBox 12"/>
           <p:cNvSpPr txBox="1"/>
           <p:nvPr/>
         </p:nvSpPr>
         <p:spPr>
           <a:xfrm>
-            <a:off x="685800" y="6446520"/>
-            <a:ext cx="10820095" cy="274320"/>
+            <a:off x="914400" y="5029200"/>
+            <a:ext cx="10362895" cy="457200"/>
           </a:xfrm>
           <a:prstGeom prst="rect">
             <a:avLst/>
@@ -7500,13 +8885,83 @@
           </a:bodyPr>
           <a:lstStyle/>
           <a:p>
+            <a:pPr algn="ctr"/>
+            <a:r>
+              <a:rPr sz="1400">
+                <a:solidFill>
+                  <a:srgbClr val="B8B8B8"/>
+                </a:solidFill>
+                <a:latin typeface="JetBrains Mono"/>
+                <a:hlinkClick r:id="rId6"/>
+              </a:rPr>
+              <a:t>github.com/Pavel1778/madrigal-protocol-lab</a:t>
+            </a:r>
+          </a:p>
+        </p:txBody>
+      </p:sp>
+      <p:sp>
+        <p:nvSpPr>
+          <p:cNvPr id="14" name="TextBox 13"/>
+          <p:cNvSpPr txBox="1"/>
+          <p:nvPr/>
+        </p:nvSpPr>
+        <p:spPr>
+          <a:xfrm>
+            <a:off x="822960" y="6446520"/>
+            <a:ext cx="10545775" cy="274320"/>
+          </a:xfrm>
+          <a:prstGeom prst="rect">
+            <a:avLst/>
+          </a:prstGeom>
+          <a:noFill/>
+        </p:spPr>
+        <p:txBody>
+          <a:bodyPr wrap="square" anchor="t">
+            <a:spAutoFit/>
+          </a:bodyPr>
+          <a:lstStyle/>
+          <a:p>
+            <a:r>
+              <a:rPr sz="1000" b="0">
+                <a:solidFill>
+                  <a:srgbClr val="B8B8B8"/>
+                </a:solidFill>
+                <a:latin typeface="Montserrat"/>
+              </a:rPr>
+              <a:t>Команда HTTP 418 · кейс #02 · Мадригал</a:t>
+            </a:r>
+          </a:p>
+        </p:txBody>
+      </p:sp>
+      <p:sp>
+        <p:nvSpPr>
+          <p:cNvPr id="15" name="TextBox 14"/>
+          <p:cNvSpPr txBox="1"/>
+          <p:nvPr/>
+        </p:nvSpPr>
+        <p:spPr>
+          <a:xfrm>
+            <a:off x="822960" y="6446520"/>
+            <a:ext cx="10545775" cy="274320"/>
+          </a:xfrm>
+          <a:prstGeom prst="rect">
+            <a:avLst/>
+          </a:prstGeom>
+          <a:noFill/>
+        </p:spPr>
+        <p:txBody>
+          <a:bodyPr wrap="square" anchor="t">
+            <a:spAutoFit/>
+          </a:bodyPr>
+          <a:lstStyle/>
+          <a:p>
             <a:pPr algn="r"/>
             <a:r>
-              <a:rPr sz="900" b="0">
+              <a:rPr sz="1000" b="0">
                 <a:solidFill>
-                  <a:srgbClr val="A8A29E"/>
+                  <a:srgbClr val="B8B8B8"/>
                 </a:solidFill>
-                <a:latin typeface="Inter"/>
+                <a:latin typeface="Montserrat"/>
               </a:rPr>
               <a:t>19 / 19</a:t>
             </a:r>
@@ -7676,6 +9131,106 @@
                       </p:childTnLst>
                     </p:cTn>
                   </p:par>
+                  <p:par>
+                    <p:cTn id="12" presetID="10" presetClass="entr" presetSubtype="0" fill="hold" grpId="0" nodeType="clickEffect">
+                      <p:stCondLst>
+                        <p:cond delay="0"/>
+                      </p:stCondLst>
+                      <p:childTnLst>
+                        <p:set>
+                          <p:cBhvr>
+                            <p:cTn id="13" dur="1" fill="hold">
+                              <p:stCondLst>
+                                <p:cond delay="0"/>
+                              </p:stCondLst>
+                            </p:cTn>
+                            <p:tgtEl>
+                              <p:spTgt spid="9"/>
+                            </p:tgtEl>
+                            <p:attrNameLst>
+                              <p:attrName>style.visibility</p:attrName>
+                            </p:attrNameLst>
+                          </p:cBhvr>
+                          <p:to>
+                            <p:strVal val="visible"/>
+                          </p:to>
+                        </p:set>
+                        <p:anim calcmode="lin" valueType="num">
+                          <p:cBhvr additive="base">
+                            <p:cTn id="14" dur="500" fill="hold"/>
+                            <p:tgtEl>
+                              <p:spTgt spid="9"/>
+                            </p:tgtEl>
+                            <p:attrNameLst>
+                              <p:attrName>style.opacity</p:attrName>
+                            </p:attrNameLst>
+                          </p:cBhvr>
+                          <p:tavLst>
+                            <p:tav tm="0">
+                              <p:val>
+                                <p:fltVal val="0"/>
+                              </p:val>
+                            </p:tav>
+                            <p:tav tm="100000">
+                              <p:val>
+                                <p:fltVal val="1"/>
+                              </p:val>
+                            </p:tav>
+                          </p:tavLst>
+                        </p:anim>
+                      </p:childTnLst>
+                    </p:cTn>
+                  </p:par>
+                  <p:par>
+                    <p:cTn id="15" presetID="10" presetClass="entr" presetSubtype="0" fill="hold" grpId="0" nodeType="clickEffect">
+                      <p:stCondLst>
+                        <p:cond delay="0"/>
+                      </p:stCondLst>
+                      <p:childTnLst>
+                        <p:set>
+                          <p:cBhvr>
+                            <p:cTn id="16" dur="1" fill="hold">
+                              <p:stCondLst>
+                                <p:cond delay="0"/>
+                              </p:stCondLst>
+                            </p:cTn>
+                            <p:tgtEl>
+                              <p:spTgt spid="11"/>
+                            </p:tgtEl>
+                            <p:attrNameLst>
+                              <p:attrName>style.visibility</p:attrName>
+                            </p:attrNameLst>
+                          </p:cBhvr>
+                          <p:to>
+                            <p:strVal val="visible"/>
+                          </p:to>
+                        </p:set>
+                        <p:anim calcmode="lin" valueType="num">
+                          <p:cBhvr additive="base">
+                            <p:cTn id="17" dur="500" fill="hold"/>
+                            <p:tgtEl>
+                              <p:spTgt spid="11"/>
+                            </p:tgtEl>
+                            <p:attrNameLst>
+                              <p:attrName>style.opacity</p:attrName>
+                            </p:attrNameLst>
+                          </p:cBhvr>
+                          <p:tavLst>
+                            <p:tav tm="0">
+                              <p:val>
+                                <p:fltVal val="0"/>
+                              </p:val>
+                            </p:tav>
+                            <p:tav tm="100000">
+                              <p:val>
+                                <p:fltVal val="1"/>
+                              </p:val>
+                            </p:tav>
+                          </p:tavLst>
+                        </p:anim>
+                      </p:childTnLst>
+                    </p:cTn>
+                  </p:par>
                 </p:childTnLst>
               </p:cTn>
             </p:seq>
@@ -7713,11 +9268,12 @@
             <a:avLst/>
           </a:prstGeom>
           <a:solidFill>
-            <a:srgbClr val="0E1011"/>
+            <a:srgbClr val="131516"/>
           </a:solidFill>
           <a:ln>
             <a:noFill/>
           </a:ln>
+          <a:effectLst/>
         </p:spPr>
         <p:style>
           <a:lnRef idx="1">
@@ -7750,17 +9306,29 @@
         <p:spPr>
           <a:xfrm>
             <a:off x="0" y="0"/>
-            <a:ext cx="45720" cy="6858000"/>
-          </a:xfrm>
-          <a:prstGeom prst="rect">
-            <a:avLst/>
-          </a:prstGeom>
-          <a:solidFill>
-            <a:srgbClr val="D0603A"/>
-          </a:solidFill>
+            <a:ext cx="73152" cy="6858000"/>
+          </a:xfrm>
+          <a:prstGeom prst="rect">
+            <a:avLst/>
+          </a:prstGeom>
           <a:ln>
             <a:noFill/>
           </a:ln>
+          <a:effectLst/>
+          <a:gradFill rotWithShape="1">
+            <a:gsLst>
+              <a:gs pos="0">
+                <a:srgbClr val="410913"/>
+              </a:gs>
+              <a:gs pos="50000">
+                <a:srgbClr val="610D1C"/>
+              </a:gs>
+              <a:gs pos="100000">
+                <a:srgbClr val="A2391D"/>
+              </a:gs>
+            </a:gsLst>
+            <a:lin ang="2700000"/>
+          </a:gradFill>
         </p:spPr>
         <p:style>
           <a:lnRef idx="1">
@@ -7792,8 +9360,8 @@
         </p:nvSpPr>
         <p:spPr>
           <a:xfrm>
-            <a:off x="685800" y="457200"/>
-            <a:ext cx="10820095" cy="960120"/>
+            <a:off x="822960" y="457200"/>
+            <a:ext cx="10545775" cy="1051560"/>
           </a:xfrm>
           <a:prstGeom prst="rect">
             <a:avLst/>
@@ -7807,11 +9375,11 @@
           <a:lstStyle/>
           <a:p>
             <a:r>
-              <a:rPr sz="3000" b="1">
+              <a:rPr sz="3200" b="1">
                 <a:solidFill>
-                  <a:srgbClr val="E8E6E3"/>
+                  <a:srgbClr val="EDEDED"/>
                 </a:solidFill>
-                <a:latin typeface="Inter"/>
+                <a:latin typeface="Montserrat"/>
               </a:rPr>
               <a:t>Нас двое</a:t>
             </a:r>
@@ -7820,98 +9388,51 @@
       </p:sp>
       <p:sp>
         <p:nvSpPr>
-          <p:cNvPr id="5" name="TextBox 4"/>
-          <p:cNvSpPr txBox="1"/>
-          <p:nvPr/>
-        </p:nvSpPr>
-        <p:spPr>
-          <a:xfrm>
-            <a:off x="685800" y="1600200"/>
-            <a:ext cx="5120640" cy="3931920"/>
-          </a:xfrm>
-          <a:prstGeom prst="rect">
-            <a:avLst/>
-          </a:prstGeom>
-          <a:noFill/>
-        </p:spPr>
-        <p:txBody>
-          <a:bodyPr wrap="square" anchor="t">
-            <a:spAutoFit/>
-          </a:bodyPr>
-          <a:lstStyle/>
-          <a:p>
-            <a:pPr>
-              <a:spcAft>
-                <a:spcPts val="1000"/>
-              </a:spcAft>
-            </a:pPr>
-            <a:r>
-              <a:rPr sz="1700" b="0">
-                <a:solidFill>
-                  <a:srgbClr val="E8E6E3"/>
-                </a:solidFill>
-                <a:latin typeface="Inter"/>
-              </a:rPr>
-              <a:t>•  </a:t>
-            </a:r>
-            <a:r>
-              <a:rPr sz="1700" b="1">
-                <a:solidFill>
-                  <a:srgbClr val="FFFFFF"/>
-                </a:solidFill>
-                <a:latin typeface="Inter"/>
-              </a:rPr>
-              <a:t>Сабадаш Павел</a:t>
-            </a:r>
-            <a:r>
-              <a:rPr sz="1700" b="0">
-                <a:solidFill>
-                  <a:srgbClr val="E8E6E3"/>
-                </a:solidFill>
-                <a:latin typeface="Inter"/>
-              </a:rPr>
-              <a:t> — архитектура, захват, интерфейс · @Pasha1778</a:t>
-            </a:r>
-          </a:p>
-          <a:p>
-            <a:pPr>
-              <a:spcAft>
-                <a:spcPts val="1000"/>
-              </a:spcAft>
-            </a:pPr>
-            <a:r>
-              <a:rPr sz="1700" b="0">
-                <a:solidFill>
-                  <a:srgbClr val="E8E6E3"/>
-                </a:solidFill>
-                <a:latin typeface="Inter"/>
-              </a:rPr>
-              <a:t>•  </a:t>
-            </a:r>
-            <a:r>
-              <a:rPr sz="1700" b="1">
-                <a:solidFill>
-                  <a:srgbClr val="FFFFFF"/>
-                </a:solidFill>
-                <a:latin typeface="Inter"/>
-              </a:rPr>
-              <a:t>Предков Никита</a:t>
-            </a:r>
-            <a:r>
-              <a:rPr sz="1700" b="0">
-                <a:solidFill>
-                  <a:srgbClr val="E8E6E3"/>
-                </a:solidFill>
-                <a:latin typeface="Inter"/>
-              </a:rPr>
-              <a:t> — правила, тесты · @petruan</a:t>
-            </a:r>
+          <p:cNvPr id="5" name="Rectangle 4"/>
+          <p:cNvSpPr/>
+          <p:nvPr/>
+        </p:nvSpPr>
+        <p:spPr>
+          <a:xfrm>
+            <a:off x="822960" y="1691640"/>
+            <a:ext cx="5044287" cy="2377440"/>
+          </a:xfrm>
+          <a:prstGeom prst="rect">
+            <a:avLst/>
+          </a:prstGeom>
+          <a:solidFill>
+            <a:srgbClr val="1D1D1D"/>
+          </a:solidFill>
+          <a:ln>
+            <a:noFill/>
+          </a:ln>
+          <a:effectLst/>
+        </p:spPr>
+        <p:style>
+          <a:lnRef idx="1">
+            <a:schemeClr val="accent1"/>
+          </a:lnRef>
+          <a:fillRef idx="3">
+            <a:schemeClr val="accent1"/>
+          </a:fillRef>
+          <a:effectRef idx="2">
+            <a:schemeClr val="accent1"/>
+          </a:effectRef>
+          <a:fontRef idx="minor">
+            <a:schemeClr val="lt1"/>
+          </a:fontRef>
+        </p:style>
+        <p:txBody>
+          <a:bodyPr rtlCol="0" anchor="ctr"/>
+          <a:lstStyle/>
+          <a:p>
+            <a:pPr algn="ctr"/>
           </a:p>
         </p:txBody>
       </p:sp>
       <p:pic>
         <p:nvPicPr>
-          <p:cNvPr id="6" name="Picture 5" descr="team-avatar.png"/>
+          <p:cNvPr id="6" name="Picture 5" descr="team-avatar-round.png"/>
           <p:cNvPicPr>
             <a:picLocks noChangeAspect="1"/>
           </p:cNvPicPr>
@@ -7925,8 +9446,8 @@
         </p:blipFill>
         <p:spPr>
           <a:xfrm>
-            <a:off x="6263640" y="1600200"/>
-            <a:ext cx="3931920" cy="3931920"/>
+            <a:off x="1097280" y="2057400"/>
+            <a:ext cx="1645920" cy="1645920"/>
           </a:xfrm>
           <a:prstGeom prst="rect">
             <a:avLst/>
@@ -7941,8 +9462,8 @@
         </p:nvSpPr>
         <p:spPr>
           <a:xfrm>
-            <a:off x="685800" y="6446520"/>
-            <a:ext cx="10820095" cy="274320"/>
+            <a:off x="2971800" y="2103120"/>
+            <a:ext cx="1752447" cy="548640"/>
           </a:xfrm>
           <a:prstGeom prst="rect">
             <a:avLst/>
@@ -7956,13 +9477,13 @@
           <a:lstStyle/>
           <a:p>
             <a:r>
-              <a:rPr sz="900" b="0">
+              <a:rPr sz="2400" b="1">
                 <a:solidFill>
-                  <a:srgbClr val="A8A29E"/>
+                  <a:srgbClr val="EDEDED"/>
                 </a:solidFill>
-                <a:latin typeface="Inter"/>
+                <a:latin typeface="Montserrat"/>
               </a:rPr>
-              <a:t>Команда HTTP 418 · кейс #02 · Мадригал</a:t>
+              <a:t>Сабадаш Павел</a:t>
             </a:r>
           </a:p>
         </p:txBody>
@@ -7975,8 +9496,8 @@
         </p:nvSpPr>
         <p:spPr>
           <a:xfrm>
-            <a:off x="685800" y="6446520"/>
-            <a:ext cx="10820095" cy="274320"/>
+            <a:off x="2971800" y="2651760"/>
+            <a:ext cx="1752447" cy="457200"/>
           </a:xfrm>
           <a:prstGeom prst="rect">
             <a:avLst/>
@@ -7989,13 +9510,367 @@
           </a:bodyPr>
           <a:lstStyle/>
           <a:p>
+            <a:r>
+              <a:rPr sz="1400" b="0">
+                <a:solidFill>
+                  <a:srgbClr val="B8B8B8"/>
+                </a:solidFill>
+                <a:latin typeface="Montserrat"/>
+              </a:rPr>
+              <a:t>Архитектура · захват · интерфейс</a:t>
+            </a:r>
+          </a:p>
+        </p:txBody>
+      </p:sp>
+      <p:sp>
+        <p:nvSpPr>
+          <p:cNvPr id="9" name="TextBox 8"/>
+          <p:cNvSpPr txBox="1"/>
+          <p:nvPr/>
+        </p:nvSpPr>
+        <p:spPr>
+          <a:xfrm>
+            <a:off x="2971800" y="3108960"/>
+            <a:ext cx="1752447" cy="365760"/>
+          </a:xfrm>
+          <a:prstGeom prst="rect">
+            <a:avLst/>
+          </a:prstGeom>
+          <a:noFill/>
+        </p:spPr>
+        <p:txBody>
+          <a:bodyPr wrap="square" anchor="t">
+            <a:spAutoFit/>
+          </a:bodyPr>
+          <a:lstStyle/>
+          <a:p>
+            <a:r>
+              <a:rPr sz="1400" b="0">
+                <a:solidFill>
+                  <a:srgbClr val="A2391D"/>
+                </a:solidFill>
+                <a:latin typeface="JetBrains Mono"/>
+              </a:rPr>
+              <a:t>@Pasha1778</a:t>
+            </a:r>
+          </a:p>
+        </p:txBody>
+      </p:sp>
+      <p:pic>
+        <p:nvPicPr>
+          <p:cNvPr id="10" name="Picture 9" descr="qr_telegram_pasha.png"/>
+          <p:cNvPicPr>
+            <a:picLocks noChangeAspect="1"/>
+          </p:cNvPicPr>
+          <p:nvPr/>
+        </p:nvPicPr>
+        <p:blipFill>
+          <a:blip r:embed="rId3"/>
+          <a:stretch>
+            <a:fillRect/>
+          </a:stretch>
+        </p:blipFill>
+        <p:spPr>
+          <a:xfrm>
+            <a:off x="4495647" y="2194560"/>
+            <a:ext cx="1097280" cy="1097280"/>
+          </a:xfrm>
+          <a:prstGeom prst="rect">
+            <a:avLst/>
+          </a:prstGeom>
+        </p:spPr>
+      </p:pic>
+      <p:sp>
+        <p:nvSpPr>
+          <p:cNvPr id="11" name="Rectangle 10"/>
+          <p:cNvSpPr/>
+          <p:nvPr/>
+        </p:nvSpPr>
+        <p:spPr>
+          <a:xfrm>
+            <a:off x="6324447" y="1691640"/>
+            <a:ext cx="5044287" cy="2377440"/>
+          </a:xfrm>
+          <a:prstGeom prst="rect">
+            <a:avLst/>
+          </a:prstGeom>
+          <a:solidFill>
+            <a:srgbClr val="1D1D1D"/>
+          </a:solidFill>
+          <a:ln>
+            <a:noFill/>
+          </a:ln>
+          <a:effectLst/>
+        </p:spPr>
+        <p:style>
+          <a:lnRef idx="1">
+            <a:schemeClr val="accent1"/>
+          </a:lnRef>
+          <a:fillRef idx="3">
+            <a:schemeClr val="accent1"/>
+          </a:fillRef>
+          <a:effectRef idx="2">
+            <a:schemeClr val="accent1"/>
+          </a:effectRef>
+          <a:fontRef idx="minor">
+            <a:schemeClr val="lt1"/>
+          </a:fontRef>
+        </p:style>
+        <p:txBody>
+          <a:bodyPr rtlCol="0" anchor="ctr"/>
+          <a:lstStyle/>
+          <a:p>
+            <a:pPr algn="ctr"/>
+          </a:p>
+        </p:txBody>
+      </p:sp>
+      <p:pic>
+        <p:nvPicPr>
+          <p:cNvPr id="12" name="Picture 11" descr="team-avatar-round.png"/>
+          <p:cNvPicPr>
+            <a:picLocks noChangeAspect="1"/>
+          </p:cNvPicPr>
+          <p:nvPr/>
+        </p:nvPicPr>
+        <p:blipFill>
+          <a:blip r:embed="rId2"/>
+          <a:stretch>
+            <a:fillRect/>
+          </a:stretch>
+        </p:blipFill>
+        <p:spPr>
+          <a:xfrm>
+            <a:off x="6598767" y="2057400"/>
+            <a:ext cx="1645920" cy="1645920"/>
+          </a:xfrm>
+          <a:prstGeom prst="rect">
+            <a:avLst/>
+          </a:prstGeom>
+        </p:spPr>
+      </p:pic>
+      <p:sp>
+        <p:nvSpPr>
+          <p:cNvPr id="13" name="TextBox 12"/>
+          <p:cNvSpPr txBox="1"/>
+          <p:nvPr/>
+        </p:nvSpPr>
+        <p:spPr>
+          <a:xfrm>
+            <a:off x="8473287" y="2103120"/>
+            <a:ext cx="1752447" cy="548640"/>
+          </a:xfrm>
+          <a:prstGeom prst="rect">
+            <a:avLst/>
+          </a:prstGeom>
+          <a:noFill/>
+        </p:spPr>
+        <p:txBody>
+          <a:bodyPr wrap="square" anchor="t">
+            <a:spAutoFit/>
+          </a:bodyPr>
+          <a:lstStyle/>
+          <a:p>
+            <a:r>
+              <a:rPr sz="2400" b="1">
+                <a:solidFill>
+                  <a:srgbClr val="EDEDED"/>
+                </a:solidFill>
+                <a:latin typeface="Montserrat"/>
+              </a:rPr>
+              <a:t>Предков Никита</a:t>
+            </a:r>
+          </a:p>
+        </p:txBody>
+      </p:sp>
+      <p:sp>
+        <p:nvSpPr>
+          <p:cNvPr id="14" name="TextBox 13"/>
+          <p:cNvSpPr txBox="1"/>
+          <p:nvPr/>
+        </p:nvSpPr>
+        <p:spPr>
+          <a:xfrm>
+            <a:off x="8473287" y="2651760"/>
+            <a:ext cx="1752447" cy="457200"/>
+          </a:xfrm>
+          <a:prstGeom prst="rect">
+            <a:avLst/>
+          </a:prstGeom>
+          <a:noFill/>
+        </p:spPr>
+        <p:txBody>
+          <a:bodyPr wrap="square" anchor="t">
+            <a:spAutoFit/>
+          </a:bodyPr>
+          <a:lstStyle/>
+          <a:p>
+            <a:r>
+              <a:rPr sz="1400" b="0">
+                <a:solidFill>
+                  <a:srgbClr val="B8B8B8"/>
+                </a:solidFill>
+                <a:latin typeface="Montserrat"/>
+              </a:rPr>
+              <a:t>Правила · тесты · ревью</a:t>
+            </a:r>
+          </a:p>
+        </p:txBody>
+      </p:sp>
+      <p:sp>
+        <p:nvSpPr>
+          <p:cNvPr id="15" name="TextBox 14"/>
+          <p:cNvSpPr txBox="1"/>
+          <p:nvPr/>
+        </p:nvSpPr>
+        <p:spPr>
+          <a:xfrm>
+            <a:off x="8473287" y="3108960"/>
+            <a:ext cx="1752447" cy="365760"/>
+          </a:xfrm>
+          <a:prstGeom prst="rect">
+            <a:avLst/>
+          </a:prstGeom>
+          <a:noFill/>
+        </p:spPr>
+        <p:txBody>
+          <a:bodyPr wrap="square" anchor="t">
+            <a:spAutoFit/>
+          </a:bodyPr>
+          <a:lstStyle/>
+          <a:p>
+            <a:r>
+              <a:rPr sz="1400" b="0">
+                <a:solidFill>
+                  <a:srgbClr val="A2391D"/>
+                </a:solidFill>
+                <a:latin typeface="JetBrains Mono"/>
+              </a:rPr>
+              <a:t>@petruan</a:t>
+            </a:r>
+          </a:p>
+        </p:txBody>
+      </p:sp>
+      <p:pic>
+        <p:nvPicPr>
+          <p:cNvPr id="16" name="Picture 15" descr="qr_telegram_nikita.png"/>
+          <p:cNvPicPr>
+            <a:picLocks noChangeAspect="1"/>
+          </p:cNvPicPr>
+          <p:nvPr/>
+        </p:nvPicPr>
+        <p:blipFill>
+          <a:blip r:embed="rId4"/>
+          <a:stretch>
+            <a:fillRect/>
+          </a:stretch>
+        </p:blipFill>
+        <p:spPr>
+          <a:xfrm>
+            <a:off x="9997135" y="2194560"/>
+            <a:ext cx="1097280" cy="1097280"/>
+          </a:xfrm>
+          <a:prstGeom prst="rect">
+            <a:avLst/>
+          </a:prstGeom>
+        </p:spPr>
+      </p:pic>
+      <p:sp>
+        <p:nvSpPr>
+          <p:cNvPr id="17" name="TextBox 16"/>
+          <p:cNvSpPr txBox="1"/>
+          <p:nvPr/>
+        </p:nvSpPr>
+        <p:spPr>
+          <a:xfrm>
+            <a:off x="822960" y="6035040"/>
+            <a:ext cx="10545775" cy="365760"/>
+          </a:xfrm>
+          <a:prstGeom prst="rect">
+            <a:avLst/>
+          </a:prstGeom>
+          <a:noFill/>
+        </p:spPr>
+        <p:txBody>
+          <a:bodyPr wrap="square" anchor="t">
+            <a:spAutoFit/>
+          </a:bodyPr>
+          <a:lstStyle/>
+          <a:p>
+            <a:r>
+              <a:rPr sz="1200" b="0">
+                <a:solidFill>
+                  <a:srgbClr val="B8B8B8"/>
+                </a:solidFill>
+                <a:latin typeface="Montserrat"/>
+              </a:rPr>
+              <a:t>UMIRHack 2026 · кейс #02 · Мадригал</a:t>
+            </a:r>
+          </a:p>
+        </p:txBody>
+      </p:sp>
+      <p:sp>
+        <p:nvSpPr>
+          <p:cNvPr id="18" name="TextBox 17"/>
+          <p:cNvSpPr txBox="1"/>
+          <p:nvPr/>
+        </p:nvSpPr>
+        <p:spPr>
+          <a:xfrm>
+            <a:off x="822960" y="6446520"/>
+            <a:ext cx="10545775" cy="274320"/>
+          </a:xfrm>
+          <a:prstGeom prst="rect">
+            <a:avLst/>
+          </a:prstGeom>
+          <a:noFill/>
+        </p:spPr>
+        <p:txBody>
+          <a:bodyPr wrap="square" anchor="t">
+            <a:spAutoFit/>
+          </a:bodyPr>
+          <a:lstStyle/>
+          <a:p>
+            <a:r>
+              <a:rPr sz="1000" b="0">
+                <a:solidFill>
+                  <a:srgbClr val="B8B8B8"/>
+                </a:solidFill>
+                <a:latin typeface="Montserrat"/>
+              </a:rPr>
+              <a:t>Команда HTTP 418 · кейс #02 · Мадригал</a:t>
+            </a:r>
+          </a:p>
+        </p:txBody>
+      </p:sp>
+      <p:sp>
+        <p:nvSpPr>
+          <p:cNvPr id="19" name="TextBox 18"/>
+          <p:cNvSpPr txBox="1"/>
+          <p:nvPr/>
+        </p:nvSpPr>
+        <p:spPr>
+          <a:xfrm>
+            <a:off x="822960" y="6446520"/>
+            <a:ext cx="10545775" cy="274320"/>
+          </a:xfrm>
+          <a:prstGeom prst="rect">
+            <a:avLst/>
+          </a:prstGeom>
+          <a:noFill/>
+        </p:spPr>
+        <p:txBody>
+          <a:bodyPr wrap="square" anchor="t">
+            <a:spAutoFit/>
+          </a:bodyPr>
+          <a:lstStyle/>
+          <a:p>
             <a:pPr algn="r"/>
             <a:r>
-              <a:rPr sz="900" b="0">
+              <a:rPr sz="1000" b="0">
                 <a:solidFill>
-                  <a:srgbClr val="A8A29E"/>
+                  <a:srgbClr val="B8B8B8"/>
                 </a:solidFill>
-                <a:latin typeface="Inter"/>
+                <a:latin typeface="Montserrat"/>
               </a:rPr>
               <a:t>2 / 19</a:t>
             </a:r>
@@ -8079,7 +9954,7 @@
                               </p:stCondLst>
                             </p:cTn>
                             <p:tgtEl>
-                              <p:spTgt spid="6"/>
+                              <p:spTgt spid="11"/>
                             </p:tgtEl>
                             <p:attrNameLst>
                               <p:attrName>style.visibility</p:attrName>
@@ -8093,7 +9968,7 @@
                           <p:cBhvr additive="base">
                             <p:cTn id="8" dur="500" fill="hold"/>
                             <p:tgtEl>
-                              <p:spTgt spid="6"/>
+                              <p:spTgt spid="11"/>
                             </p:tgtEl>
                             <p:attrNameLst>
                               <p:attrName>style.opacity</p:attrName>
@@ -8152,11 +10027,12 @@
             <a:avLst/>
           </a:prstGeom>
           <a:solidFill>
-            <a:srgbClr val="0E1011"/>
+            <a:srgbClr val="131516"/>
           </a:solidFill>
           <a:ln>
             <a:noFill/>
           </a:ln>
+          <a:effectLst/>
         </p:spPr>
         <p:style>
           <a:lnRef idx="1">
@@ -8189,17 +10065,29 @@
         <p:spPr>
           <a:xfrm>
             <a:off x="0" y="0"/>
-            <a:ext cx="45720" cy="6858000"/>
-          </a:xfrm>
-          <a:prstGeom prst="rect">
-            <a:avLst/>
-          </a:prstGeom>
-          <a:solidFill>
-            <a:srgbClr val="D0603A"/>
-          </a:solidFill>
+            <a:ext cx="73152" cy="6858000"/>
+          </a:xfrm>
+          <a:prstGeom prst="rect">
+            <a:avLst/>
+          </a:prstGeom>
           <a:ln>
             <a:noFill/>
           </a:ln>
+          <a:effectLst/>
+          <a:gradFill rotWithShape="1">
+            <a:gsLst>
+              <a:gs pos="0">
+                <a:srgbClr val="410913"/>
+              </a:gs>
+              <a:gs pos="50000">
+                <a:srgbClr val="610D1C"/>
+              </a:gs>
+              <a:gs pos="100000">
+                <a:srgbClr val="A2391D"/>
+              </a:gs>
+            </a:gsLst>
+            <a:lin ang="2700000"/>
+          </a:gradFill>
         </p:spPr>
         <p:style>
           <a:lnRef idx="1">
@@ -8231,8 +10119,8 @@
         </p:nvSpPr>
         <p:spPr>
           <a:xfrm>
-            <a:off x="685800" y="2286000"/>
-            <a:ext cx="10820095" cy="1645920"/>
+            <a:off x="822960" y="777240"/>
+            <a:ext cx="10545775" cy="365760"/>
           </a:xfrm>
           <a:prstGeom prst="rect">
             <a:avLst/>
@@ -8246,13 +10134,13 @@
           <a:lstStyle/>
           <a:p>
             <a:r>
-              <a:rPr sz="4600" b="0">
+              <a:rPr sz="1300" b="1">
                 <a:solidFill>
-                  <a:srgbClr val="E8E6E3"/>
+                  <a:srgbClr val="A2391D"/>
                 </a:solidFill>
-                <a:latin typeface="Inter"/>
+                <a:latin typeface="Montserrat"/>
               </a:rPr>
-              <a:t>TCP разрезает сообщения посередине</a:t>
+              <a:t>ПОСТАНОВКА ЗАДАЧИ</a:t>
             </a:r>
           </a:p>
         </p:txBody>
@@ -8265,8 +10153,8 @@
         </p:nvSpPr>
         <p:spPr>
           <a:xfrm>
-            <a:off x="685800" y="3931920"/>
-            <a:ext cx="10820095" cy="731520"/>
+            <a:off x="822960" y="1234440"/>
+            <a:ext cx="10545775" cy="1188720"/>
           </a:xfrm>
           <a:prstGeom prst="rect">
             <a:avLst/>
@@ -8280,13 +10168,13 @@
           <a:lstStyle/>
           <a:p>
             <a:r>
-              <a:rPr sz="2000" b="0">
+              <a:rPr sz="4400" b="1">
                 <a:solidFill>
-                  <a:srgbClr val="A8A29E"/>
+                  <a:srgbClr val="EDEDED"/>
                 </a:solidFill>
-                <a:latin typeface="Inter"/>
+                <a:latin typeface="Montserrat"/>
               </a:rPr>
-              <a:t>Границы пакета и границы сообщения — разные вещи</a:t>
+              <a:t>TCP разрезает сообщения посередине</a:t>
             </a:r>
           </a:p>
         </p:txBody>
@@ -8299,8 +10187,8 @@
         </p:nvSpPr>
         <p:spPr>
           <a:xfrm>
-            <a:off x="685800" y="6446520"/>
-            <a:ext cx="10820095" cy="274320"/>
+            <a:off x="822960" y="2423160"/>
+            <a:ext cx="9601200" cy="640080"/>
           </a:xfrm>
           <a:prstGeom prst="rect">
             <a:avLst/>
@@ -8314,27 +10202,51 @@
           <a:lstStyle/>
           <a:p>
             <a:r>
-              <a:rPr sz="900" b="0">
+              <a:rPr sz="2000" b="0">
                 <a:solidFill>
-                  <a:srgbClr val="A8A29E"/>
+                  <a:srgbClr val="B8B8B8"/>
                 </a:solidFill>
-                <a:latin typeface="Inter"/>
+                <a:latin typeface="Montserrat"/>
               </a:rPr>
-              <a:t>Команда HTTP 418 · кейс #02 · Мадригал</a:t>
-            </a:r>
-          </a:p>
-        </p:txBody>
-      </p:sp>
-      <p:sp>
-        <p:nvSpPr>
-          <p:cNvPr id="7" name="TextBox 6"/>
+              <a:t>Границы пакета и границы сообщения — разные вещи</a:t>
+            </a:r>
+          </a:p>
+        </p:txBody>
+      </p:sp>
+      <p:pic>
+        <p:nvPicPr>
+          <p:cNvPr id="7" name="Picture 6" descr="tcp_framing.png"/>
+          <p:cNvPicPr>
+            <a:picLocks noChangeAspect="1"/>
+          </p:cNvPicPr>
+          <p:nvPr/>
+        </p:nvPicPr>
+        <p:blipFill>
+          <a:blip r:embed="rId2"/>
+          <a:stretch>
+            <a:fillRect/>
+          </a:stretch>
+        </p:blipFill>
+        <p:spPr>
+          <a:xfrm>
+            <a:off x="822960" y="3200400"/>
+            <a:ext cx="6539127" cy="2377440"/>
+          </a:xfrm>
+          <a:prstGeom prst="rect">
+            <a:avLst/>
+          </a:prstGeom>
+        </p:spPr>
+      </p:pic>
+      <p:sp>
+        <p:nvSpPr>
+          <p:cNvPr id="8" name="TextBox 7"/>
           <p:cNvSpPr txBox="1"/>
           <p:nvPr/>
         </p:nvSpPr>
         <p:spPr>
           <a:xfrm>
-            <a:off x="685800" y="6446520"/>
-            <a:ext cx="10820095" cy="274320"/>
+            <a:off x="822960" y="6446520"/>
+            <a:ext cx="10545775" cy="274320"/>
           </a:xfrm>
           <a:prstGeom prst="rect">
             <a:avLst/>
@@ -8347,13 +10259,47 @@
           </a:bodyPr>
           <a:lstStyle/>
           <a:p>
+            <a:r>
+              <a:rPr sz="1000" b="0">
+                <a:solidFill>
+                  <a:srgbClr val="B8B8B8"/>
+                </a:solidFill>
+                <a:latin typeface="Montserrat"/>
+              </a:rPr>
+              <a:t>Команда HTTP 418 · кейс #02 · Мадригал</a:t>
+            </a:r>
+          </a:p>
+        </p:txBody>
+      </p:sp>
+      <p:sp>
+        <p:nvSpPr>
+          <p:cNvPr id="9" name="TextBox 8"/>
+          <p:cNvSpPr txBox="1"/>
+          <p:nvPr/>
+        </p:nvSpPr>
+        <p:spPr>
+          <a:xfrm>
+            <a:off x="822960" y="6446520"/>
+            <a:ext cx="10545775" cy="274320"/>
+          </a:xfrm>
+          <a:prstGeom prst="rect">
+            <a:avLst/>
+          </a:prstGeom>
+          <a:noFill/>
+        </p:spPr>
+        <p:txBody>
+          <a:bodyPr wrap="square" anchor="t">
+            <a:spAutoFit/>
+          </a:bodyPr>
+          <a:lstStyle/>
+          <a:p>
             <a:pPr algn="r"/>
             <a:r>
-              <a:rPr sz="900" b="0">
+              <a:rPr sz="1000" b="0">
                 <a:solidFill>
-                  <a:srgbClr val="A8A29E"/>
+                  <a:srgbClr val="B8B8B8"/>
                 </a:solidFill>
-                <a:latin typeface="Inter"/>
+                <a:latin typeface="Montserrat"/>
               </a:rPr>
               <a:t>3 / 19</a:t>
             </a:r>
@@ -8387,7 +10333,7 @@
                               </p:stCondLst>
                             </p:cTn>
                             <p:tgtEl>
-                              <p:spTgt spid="4"/>
+                              <p:spTgt spid="5"/>
                             </p:tgtEl>
                             <p:attrNameLst>
                               <p:attrName>style.visibility</p:attrName>
@@ -8401,7 +10347,57 @@
                           <p:cBhvr additive="base">
                             <p:cTn id="5" dur="500" fill="hold"/>
                             <p:tgtEl>
-                              <p:spTgt spid="4"/>
+                              <p:spTgt spid="5"/>
+                            </p:tgtEl>
+                            <p:attrNameLst>
+                              <p:attrName>style.opacity</p:attrName>
+                            </p:attrNameLst>
+                          </p:cBhvr>
+                          <p:tavLst>
+                            <p:tav tm="0">
+                              <p:val>
+                                <p:fltVal val="0"/>
+                              </p:val>
+                            </p:tav>
+                            <p:tav tm="100000">
+                              <p:val>
+                                <p:fltVal val="1"/>
+                              </p:val>
+                            </p:tav>
+                          </p:tavLst>
+                        </p:anim>
+                      </p:childTnLst>
+                    </p:cTn>
+                  </p:par>
+                  <p:par>
+                    <p:cTn id="6" presetID="10" presetClass="entr" presetSubtype="0" fill="hold" grpId="0" nodeType="clickEffect">
+                      <p:stCondLst>
+                        <p:cond delay="0"/>
+                      </p:stCondLst>
+                      <p:childTnLst>
+                        <p:set>
+                          <p:cBhvr>
+                            <p:cTn id="7" dur="1" fill="hold">
+                              <p:stCondLst>
+                                <p:cond delay="0"/>
+                              </p:stCondLst>
+                            </p:cTn>
+                            <p:tgtEl>
+                              <p:spTgt spid="7"/>
+                            </p:tgtEl>
+                            <p:attrNameLst>
+                              <p:attrName>style.visibility</p:attrName>
+                            </p:attrNameLst>
+                          </p:cBhvr>
+                          <p:to>
+                            <p:strVal val="visible"/>
+                          </p:to>
+                        </p:set>
+                        <p:anim calcmode="lin" valueType="num">
+                          <p:cBhvr additive="base">
+                            <p:cTn id="8" dur="500" fill="hold"/>
+                            <p:tgtEl>
+                              <p:spTgt spid="7"/>
                             </p:tgtEl>
                             <p:attrNameLst>
                               <p:attrName>style.opacity</p:attrName>
@@ -8460,11 +10456,12 @@
             <a:avLst/>
           </a:prstGeom>
           <a:solidFill>
-            <a:srgbClr val="0E1011"/>
+            <a:srgbClr val="131516"/>
           </a:solidFill>
           <a:ln>
             <a:noFill/>
           </a:ln>
+          <a:effectLst/>
         </p:spPr>
         <p:style>
           <a:lnRef idx="1">
@@ -8497,17 +10494,29 @@
         <p:spPr>
           <a:xfrm>
             <a:off x="0" y="0"/>
-            <a:ext cx="45720" cy="6858000"/>
-          </a:xfrm>
-          <a:prstGeom prst="rect">
-            <a:avLst/>
-          </a:prstGeom>
-          <a:solidFill>
-            <a:srgbClr val="D0603A"/>
-          </a:solidFill>
+            <a:ext cx="73152" cy="6858000"/>
+          </a:xfrm>
+          <a:prstGeom prst="rect">
+            <a:avLst/>
+          </a:prstGeom>
           <a:ln>
             <a:noFill/>
           </a:ln>
+          <a:effectLst/>
+          <a:gradFill rotWithShape="1">
+            <a:gsLst>
+              <a:gs pos="0">
+                <a:srgbClr val="410913"/>
+              </a:gs>
+              <a:gs pos="50000">
+                <a:srgbClr val="610D1C"/>
+              </a:gs>
+              <a:gs pos="100000">
+                <a:srgbClr val="A2391D"/>
+              </a:gs>
+            </a:gsLst>
+            <a:lin ang="2700000"/>
+          </a:gradFill>
         </p:spPr>
         <p:style>
           <a:lnRef idx="1">
@@ -8539,8 +10548,8 @@
         </p:nvSpPr>
         <p:spPr>
           <a:xfrm>
-            <a:off x="685800" y="457200"/>
-            <a:ext cx="10820095" cy="960120"/>
+            <a:off x="822960" y="457200"/>
+            <a:ext cx="10545775" cy="1051560"/>
           </a:xfrm>
           <a:prstGeom prst="rect">
             <a:avLst/>
@@ -8554,11 +10563,11 @@
           <a:lstStyle/>
           <a:p>
             <a:r>
-              <a:rPr sz="3000" b="1">
+              <a:rPr sz="3200" b="1">
                 <a:solidFill>
-                  <a:srgbClr val="E8E6E3"/>
+                  <a:srgbClr val="EDEDED"/>
                 </a:solidFill>
-                <a:latin typeface="Inter"/>
+                <a:latin typeface="Montserrat"/>
               </a:rPr>
               <a:t>Дано и требуется</a:t>
             </a:r>
@@ -8567,14 +10576,102 @@
       </p:sp>
       <p:sp>
         <p:nvSpPr>
-          <p:cNvPr id="5" name="TextBox 4"/>
+          <p:cNvPr id="5" name="Rectangle 4"/>
+          <p:cNvSpPr/>
+          <p:nvPr/>
+        </p:nvSpPr>
+        <p:spPr>
+          <a:xfrm>
+            <a:off x="822960" y="1691640"/>
+            <a:ext cx="5044287" cy="3291840"/>
+          </a:xfrm>
+          <a:prstGeom prst="rect">
+            <a:avLst/>
+          </a:prstGeom>
+          <a:solidFill>
+            <a:srgbClr val="1D1D1D"/>
+          </a:solidFill>
+          <a:ln>
+            <a:noFill/>
+          </a:ln>
+          <a:effectLst/>
+        </p:spPr>
+        <p:style>
+          <a:lnRef idx="1">
+            <a:schemeClr val="accent1"/>
+          </a:lnRef>
+          <a:fillRef idx="3">
+            <a:schemeClr val="accent1"/>
+          </a:fillRef>
+          <a:effectRef idx="2">
+            <a:schemeClr val="accent1"/>
+          </a:effectRef>
+          <a:fontRef idx="minor">
+            <a:schemeClr val="lt1"/>
+          </a:fontRef>
+        </p:style>
+        <p:txBody>
+          <a:bodyPr rtlCol="0" anchor="ctr"/>
+          <a:lstStyle/>
+          <a:p>
+            <a:pPr algn="ctr"/>
+          </a:p>
+        </p:txBody>
+      </p:sp>
+      <p:sp>
+        <p:nvSpPr>
+          <p:cNvPr id="6" name="Rectangle 5"/>
+          <p:cNvSpPr/>
+          <p:nvPr/>
+        </p:nvSpPr>
+        <p:spPr>
+          <a:xfrm>
+            <a:off x="822960" y="1691640"/>
+            <a:ext cx="45720" cy="3291840"/>
+          </a:xfrm>
+          <a:prstGeom prst="rect">
+            <a:avLst/>
+          </a:prstGeom>
+          <a:solidFill>
+            <a:srgbClr val="A2391D"/>
+          </a:solidFill>
+          <a:ln>
+            <a:noFill/>
+          </a:ln>
+          <a:effectLst/>
+        </p:spPr>
+        <p:style>
+          <a:lnRef idx="1">
+            <a:schemeClr val="accent1"/>
+          </a:lnRef>
+          <a:fillRef idx="3">
+            <a:schemeClr val="accent1"/>
+          </a:fillRef>
+          <a:effectRef idx="2">
+            <a:schemeClr val="accent1"/>
+          </a:effectRef>
+          <a:fontRef idx="minor">
+            <a:schemeClr val="lt1"/>
+          </a:fontRef>
+        </p:style>
+        <p:txBody>
+          <a:bodyPr rtlCol="0" anchor="ctr"/>
+          <a:lstStyle/>
+          <a:p>
+            <a:pPr algn="ctr"/>
+          </a:p>
+        </p:txBody>
+      </p:sp>
+      <p:sp>
+        <p:nvSpPr>
+          <p:cNvPr id="7" name="TextBox 6"/>
           <p:cNvSpPr txBox="1"/>
           <p:nvPr/>
         </p:nvSpPr>
         <p:spPr>
           <a:xfrm>
-            <a:off x="685800" y="1600200"/>
-            <a:ext cx="5120640" cy="685800"/>
+            <a:off x="1143000" y="1965960"/>
+            <a:ext cx="4404207" cy="320040"/>
           </a:xfrm>
           <a:prstGeom prst="rect">
             <a:avLst/>
@@ -8588,27 +10685,27 @@
           <a:lstStyle/>
           <a:p>
             <a:r>
-              <a:rPr sz="1700" b="0">
+              <a:rPr sz="1200" b="1">
                 <a:solidFill>
-                  <a:srgbClr val="E8E6E3"/>
+                  <a:srgbClr val="A2391D"/>
                 </a:solidFill>
-                <a:latin typeface="Inter"/>
+                <a:latin typeface="Montserrat"/>
               </a:rPr>
-              <a:t>•  Захваты pcap/pcapng и журнал действий устройства</a:t>
-            </a:r>
-          </a:p>
-        </p:txBody>
-      </p:sp>
-      <p:sp>
-        <p:nvSpPr>
-          <p:cNvPr id="6" name="TextBox 5"/>
+              <a:t>ДАНО</a:t>
+            </a:r>
+          </a:p>
+        </p:txBody>
+      </p:sp>
+      <p:sp>
+        <p:nvSpPr>
+          <p:cNvPr id="8" name="TextBox 7"/>
           <p:cNvSpPr txBox="1"/>
           <p:nvPr/>
         </p:nvSpPr>
         <p:spPr>
           <a:xfrm>
-            <a:off x="685800" y="2286000"/>
-            <a:ext cx="5120640" cy="685800"/>
+            <a:off x="1143000" y="2468880"/>
+            <a:ext cx="4404207" cy="822960"/>
           </a:xfrm>
           <a:prstGeom prst="rect">
             <a:avLst/>
@@ -8624,25 +10721,25 @@
             <a:r>
               <a:rPr sz="1700" b="0">
                 <a:solidFill>
-                  <a:srgbClr val="E8E6E3"/>
+                  <a:srgbClr val="EDEDED"/>
                 </a:solidFill>
-                <a:latin typeface="Inter"/>
+                <a:latin typeface="Montserrat"/>
               </a:rPr>
-              <a:t>•  Спецификации протокола нет</a:t>
-            </a:r>
-          </a:p>
-        </p:txBody>
-      </p:sp>
-      <p:sp>
-        <p:nvSpPr>
-          <p:cNvPr id="7" name="TextBox 6"/>
+              <a:t>•  Захваты pcap/pcapng и журнал действий устройства</a:t>
+            </a:r>
+          </a:p>
+        </p:txBody>
+      </p:sp>
+      <p:sp>
+        <p:nvSpPr>
+          <p:cNvPr id="9" name="TextBox 8"/>
           <p:cNvSpPr txBox="1"/>
           <p:nvPr/>
         </p:nvSpPr>
         <p:spPr>
           <a:xfrm>
-            <a:off x="6263640" y="1600200"/>
-            <a:ext cx="5242255" cy="685800"/>
+            <a:off x="1143000" y="3291840"/>
+            <a:ext cx="4404207" cy="822960"/>
           </a:xfrm>
           <a:prstGeom prst="rect">
             <a:avLst/>
@@ -8658,25 +10755,113 @@
             <a:r>
               <a:rPr sz="1700" b="0">
                 <a:solidFill>
-                  <a:srgbClr val="E8E6E3"/>
+                  <a:srgbClr val="EDEDED"/>
                 </a:solidFill>
-                <a:latin typeface="Inter"/>
+                <a:latin typeface="Montserrat"/>
               </a:rPr>
-              <a:t>•  Проверяемая интерпретация структуры сообщений</a:t>
-            </a:r>
-          </a:p>
-        </p:txBody>
-      </p:sp>
-      <p:sp>
-        <p:nvSpPr>
-          <p:cNvPr id="8" name="TextBox 7"/>
+              <a:t>•  Спецификации протокола нет</a:t>
+            </a:r>
+          </a:p>
+        </p:txBody>
+      </p:sp>
+      <p:sp>
+        <p:nvSpPr>
+          <p:cNvPr id="10" name="Rectangle 9"/>
+          <p:cNvSpPr/>
+          <p:nvPr/>
+        </p:nvSpPr>
+        <p:spPr>
+          <a:xfrm>
+            <a:off x="6324447" y="1691640"/>
+            <a:ext cx="5044287" cy="3291840"/>
+          </a:xfrm>
+          <a:prstGeom prst="rect">
+            <a:avLst/>
+          </a:prstGeom>
+          <a:solidFill>
+            <a:srgbClr val="1D1D1D"/>
+          </a:solidFill>
+          <a:ln>
+            <a:noFill/>
+          </a:ln>
+          <a:effectLst/>
+        </p:spPr>
+        <p:style>
+          <a:lnRef idx="1">
+            <a:schemeClr val="accent1"/>
+          </a:lnRef>
+          <a:fillRef idx="3">
+            <a:schemeClr val="accent1"/>
+          </a:fillRef>
+          <a:effectRef idx="2">
+            <a:schemeClr val="accent1"/>
+          </a:effectRef>
+          <a:fontRef idx="minor">
+            <a:schemeClr val="lt1"/>
+          </a:fontRef>
+        </p:style>
+        <p:txBody>
+          <a:bodyPr rtlCol="0" anchor="ctr"/>
+          <a:lstStyle/>
+          <a:p>
+            <a:pPr algn="ctr"/>
+          </a:p>
+        </p:txBody>
+      </p:sp>
+      <p:sp>
+        <p:nvSpPr>
+          <p:cNvPr id="11" name="Rectangle 10"/>
+          <p:cNvSpPr/>
+          <p:nvPr/>
+        </p:nvSpPr>
+        <p:spPr>
+          <a:xfrm>
+            <a:off x="6324447" y="1691640"/>
+            <a:ext cx="45720" cy="3291840"/>
+          </a:xfrm>
+          <a:prstGeom prst="rect">
+            <a:avLst/>
+          </a:prstGeom>
+          <a:solidFill>
+            <a:srgbClr val="A2391D"/>
+          </a:solidFill>
+          <a:ln>
+            <a:noFill/>
+          </a:ln>
+          <a:effectLst/>
+        </p:spPr>
+        <p:style>
+          <a:lnRef idx="1">
+            <a:schemeClr val="accent1"/>
+          </a:lnRef>
+          <a:fillRef idx="3">
+            <a:schemeClr val="accent1"/>
+          </a:fillRef>
+          <a:effectRef idx="2">
+            <a:schemeClr val="accent1"/>
+          </a:effectRef>
+          <a:fontRef idx="minor">
+            <a:schemeClr val="lt1"/>
+          </a:fontRef>
+        </p:style>
+        <p:txBody>
+          <a:bodyPr rtlCol="0" anchor="ctr"/>
+          <a:lstStyle/>
+          <a:p>
+            <a:pPr algn="ctr"/>
+          </a:p>
+        </p:txBody>
+      </p:sp>
+      <p:sp>
+        <p:nvSpPr>
+          <p:cNvPr id="12" name="TextBox 11"/>
           <p:cNvSpPr txBox="1"/>
           <p:nvPr/>
         </p:nvSpPr>
         <p:spPr>
           <a:xfrm>
-            <a:off x="6263640" y="2286000"/>
-            <a:ext cx="5242255" cy="685800"/>
+            <a:off x="6644487" y="1965960"/>
+            <a:ext cx="4404207" cy="320040"/>
           </a:xfrm>
           <a:prstGeom prst="rect">
             <a:avLst/>
@@ -8690,27 +10875,27 @@
           <a:lstStyle/>
           <a:p>
             <a:r>
-              <a:rPr sz="1700" b="0">
+              <a:rPr sz="1200" b="1">
                 <a:solidFill>
-                  <a:srgbClr val="E8E6E3"/>
+                  <a:srgbClr val="A2391D"/>
                 </a:solidFill>
-                <a:latin typeface="Inter"/>
+                <a:latin typeface="Montserrat"/>
               </a:rPr>
-              <a:t>•  Видно, где чтение верно, а где перестаёт работать</a:t>
-            </a:r>
-          </a:p>
-        </p:txBody>
-      </p:sp>
-      <p:sp>
-        <p:nvSpPr>
-          <p:cNvPr id="9" name="TextBox 8"/>
+              <a:t>ТРЕБУЕТСЯ</a:t>
+            </a:r>
+          </a:p>
+        </p:txBody>
+      </p:sp>
+      <p:sp>
+        <p:nvSpPr>
+          <p:cNvPr id="13" name="TextBox 12"/>
           <p:cNvSpPr txBox="1"/>
           <p:nvPr/>
         </p:nvSpPr>
         <p:spPr>
           <a:xfrm>
-            <a:off x="685800" y="6446520"/>
-            <a:ext cx="10820095" cy="274320"/>
+            <a:off x="6644487" y="2468880"/>
+            <a:ext cx="4404207" cy="822960"/>
           </a:xfrm>
           <a:prstGeom prst="rect">
             <a:avLst/>
@@ -8724,27 +10909,27 @@
           <a:lstStyle/>
           <a:p>
             <a:r>
-              <a:rPr sz="900" b="0">
+              <a:rPr sz="1700" b="0">
                 <a:solidFill>
-                  <a:srgbClr val="A8A29E"/>
+                  <a:srgbClr val="EDEDED"/>
                 </a:solidFill>
-                <a:latin typeface="Inter"/>
+                <a:latin typeface="Montserrat"/>
               </a:rPr>
-              <a:t>Команда HTTP 418 · кейс #02 · Мадригал</a:t>
-            </a:r>
-          </a:p>
-        </p:txBody>
-      </p:sp>
-      <p:sp>
-        <p:nvSpPr>
-          <p:cNvPr id="10" name="TextBox 9"/>
+              <a:t>•  Проверяемая интерпретация структуры сообщений</a:t>
+            </a:r>
+          </a:p>
+        </p:txBody>
+      </p:sp>
+      <p:sp>
+        <p:nvSpPr>
+          <p:cNvPr id="14" name="TextBox 13"/>
           <p:cNvSpPr txBox="1"/>
           <p:nvPr/>
         </p:nvSpPr>
         <p:spPr>
           <a:xfrm>
-            <a:off x="685800" y="6446520"/>
-            <a:ext cx="10820095" cy="274320"/>
+            <a:off x="6644487" y="3291840"/>
+            <a:ext cx="4404207" cy="822960"/>
           </a:xfrm>
           <a:prstGeom prst="rect">
             <a:avLst/>
@@ -8757,15 +10942,2694 @@
           </a:bodyPr>
           <a:lstStyle/>
           <a:p>
+            <a:r>
+              <a:rPr sz="1700" b="0">
+                <a:solidFill>
+                  <a:srgbClr val="EDEDED"/>
+                </a:solidFill>
+                <a:latin typeface="Montserrat"/>
+              </a:rPr>
+              <a:t>•  Видно, где чтение верно, а где перестаёт работать</a:t>
+            </a:r>
+          </a:p>
+        </p:txBody>
+      </p:sp>
+      <p:sp>
+        <p:nvSpPr>
+          <p:cNvPr id="15" name="TextBox 14"/>
+          <p:cNvSpPr txBox="1"/>
+          <p:nvPr/>
+        </p:nvSpPr>
+        <p:spPr>
+          <a:xfrm>
+            <a:off x="822960" y="6446520"/>
+            <a:ext cx="10545775" cy="274320"/>
+          </a:xfrm>
+          <a:prstGeom prst="rect">
+            <a:avLst/>
+          </a:prstGeom>
+          <a:noFill/>
+        </p:spPr>
+        <p:txBody>
+          <a:bodyPr wrap="square" anchor="t">
+            <a:spAutoFit/>
+          </a:bodyPr>
+          <a:lstStyle/>
+          <a:p>
+            <a:r>
+              <a:rPr sz="1000" b="0">
+                <a:solidFill>
+                  <a:srgbClr val="B8B8B8"/>
+                </a:solidFill>
+                <a:latin typeface="Montserrat"/>
+              </a:rPr>
+              <a:t>Команда HTTP 418 · кейс #02 · Мадригал</a:t>
+            </a:r>
+          </a:p>
+        </p:txBody>
+      </p:sp>
+      <p:sp>
+        <p:nvSpPr>
+          <p:cNvPr id="16" name="TextBox 15"/>
+          <p:cNvSpPr txBox="1"/>
+          <p:nvPr/>
+        </p:nvSpPr>
+        <p:spPr>
+          <a:xfrm>
+            <a:off x="822960" y="6446520"/>
+            <a:ext cx="10545775" cy="274320"/>
+          </a:xfrm>
+          <a:prstGeom prst="rect">
+            <a:avLst/>
+          </a:prstGeom>
+          <a:noFill/>
+        </p:spPr>
+        <p:txBody>
+          <a:bodyPr wrap="square" anchor="t">
+            <a:spAutoFit/>
+          </a:bodyPr>
+          <a:lstStyle/>
+          <a:p>
             <a:pPr algn="r"/>
             <a:r>
-              <a:rPr sz="900" b="0">
+              <a:rPr sz="1000" b="0">
                 <a:solidFill>
-                  <a:srgbClr val="A8A29E"/>
+                  <a:srgbClr val="B8B8B8"/>
                 </a:solidFill>
-                <a:latin typeface="Inter"/>
+                <a:latin typeface="Montserrat"/>
               </a:rPr>
               <a:t>4 / 19</a:t>
+            </a:r>
+          </a:p>
+        </p:txBody>
+      </p:sp>
+    </p:spTree>
+  </p:cSld>
+  <p:clrMapOvr>
+    <a:masterClrMapping/>
+  </p:clrMapOvr>
+  <p:timing>
+    <p:tnLst>
+      <p:par>
+        <p:cTn id="1" dur="indefinite" restart="never" nodeType="tmRoot">
+          <p:childTnLst>
+            <p:seq concurrent="1" nextAc="seek">
+              <p:cTn id="2" dur="indefinite" nodeType="mainSeq">
+                <p:childTnLst>
+                  <p:par>
+                    <p:cTn id="3" presetID="10" presetClass="entr" presetSubtype="0" fill="hold" grpId="0" nodeType="clickEffect">
+                      <p:stCondLst>
+                        <p:cond delay="0"/>
+                      </p:stCondLst>
+                      <p:childTnLst>
+                        <p:set>
+                          <p:cBhvr>
+                            <p:cTn id="4" dur="1" fill="hold">
+                              <p:stCondLst>
+                                <p:cond delay="0"/>
+                              </p:stCondLst>
+                            </p:cTn>
+                            <p:tgtEl>
+                              <p:spTgt spid="8"/>
+                            </p:tgtEl>
+                            <p:attrNameLst>
+                              <p:attrName>style.visibility</p:attrName>
+                            </p:attrNameLst>
+                          </p:cBhvr>
+                          <p:to>
+                            <p:strVal val="visible"/>
+                          </p:to>
+                        </p:set>
+                        <p:anim calcmode="lin" valueType="num">
+                          <p:cBhvr additive="base">
+                            <p:cTn id="5" dur="500" fill="hold"/>
+                            <p:tgtEl>
+                              <p:spTgt spid="8"/>
+                            </p:tgtEl>
+                            <p:attrNameLst>
+                              <p:attrName>style.opacity</p:attrName>
+                            </p:attrNameLst>
+                          </p:cBhvr>
+                          <p:tavLst>
+                            <p:tav tm="0">
+                              <p:val>
+                                <p:fltVal val="0"/>
+                              </p:val>
+                            </p:tav>
+                            <p:tav tm="100000">
+                              <p:val>
+                                <p:fltVal val="1"/>
+                              </p:val>
+                            </p:tav>
+                          </p:tavLst>
+                        </p:anim>
+                      </p:childTnLst>
+                    </p:cTn>
+                  </p:par>
+                  <p:par>
+                    <p:cTn id="6" presetID="10" presetClass="entr" presetSubtype="0" fill="hold" grpId="0" nodeType="clickEffect">
+                      <p:stCondLst>
+                        <p:cond delay="0"/>
+                      </p:stCondLst>
+                      <p:childTnLst>
+                        <p:set>
+                          <p:cBhvr>
+                            <p:cTn id="7" dur="1" fill="hold">
+                              <p:stCondLst>
+                                <p:cond delay="0"/>
+                              </p:stCondLst>
+                            </p:cTn>
+                            <p:tgtEl>
+                              <p:spTgt spid="9"/>
+                            </p:tgtEl>
+                            <p:attrNameLst>
+                              <p:attrName>style.visibility</p:attrName>
+                            </p:attrNameLst>
+                          </p:cBhvr>
+                          <p:to>
+                            <p:strVal val="visible"/>
+                          </p:to>
+                        </p:set>
+                        <p:anim calcmode="lin" valueType="num">
+                          <p:cBhvr additive="base">
+                            <p:cTn id="8" dur="500" fill="hold"/>
+                            <p:tgtEl>
+                              <p:spTgt spid="9"/>
+                            </p:tgtEl>
+                            <p:attrNameLst>
+                              <p:attrName>style.opacity</p:attrName>
+                            </p:attrNameLst>
+                          </p:cBhvr>
+                          <p:tavLst>
+                            <p:tav tm="0">
+                              <p:val>
+                                <p:fltVal val="0"/>
+                              </p:val>
+                            </p:tav>
+                            <p:tav tm="100000">
+                              <p:val>
+                                <p:fltVal val="1"/>
+                              </p:val>
+                            </p:tav>
+                          </p:tavLst>
+                        </p:anim>
+                      </p:childTnLst>
+                    </p:cTn>
+                  </p:par>
+                  <p:par>
+                    <p:cTn id="9" presetID="10" presetClass="entr" presetSubtype="0" fill="hold" grpId="0" nodeType="clickEffect">
+                      <p:stCondLst>
+                        <p:cond delay="0"/>
+                      </p:stCondLst>
+                      <p:childTnLst>
+                        <p:set>
+                          <p:cBhvr>
+                            <p:cTn id="10" dur="1" fill="hold">
+                              <p:stCondLst>
+                                <p:cond delay="0"/>
+                              </p:stCondLst>
+                            </p:cTn>
+                            <p:tgtEl>
+                              <p:spTgt spid="13"/>
+                            </p:tgtEl>
+                            <p:attrNameLst>
+                              <p:attrName>style.visibility</p:attrName>
+                            </p:attrNameLst>
+                          </p:cBhvr>
+                          <p:to>
+                            <p:strVal val="visible"/>
+                          </p:to>
+                        </p:set>
+                        <p:anim calcmode="lin" valueType="num">
+                          <p:cBhvr additive="base">
+                            <p:cTn id="11" dur="500" fill="hold"/>
+                            <p:tgtEl>
+                              <p:spTgt spid="13"/>
+                            </p:tgtEl>
+                            <p:attrNameLst>
+                              <p:attrName>style.opacity</p:attrName>
+                            </p:attrNameLst>
+                          </p:cBhvr>
+                          <p:tavLst>
+                            <p:tav tm="0">
+                              <p:val>
+                                <p:fltVal val="0"/>
+                              </p:val>
+                            </p:tav>
+                            <p:tav tm="100000">
+                              <p:val>
+                                <p:fltVal val="1"/>
+                              </p:val>
+                            </p:tav>
+                          </p:tavLst>
+                        </p:anim>
+                      </p:childTnLst>
+                    </p:cTn>
+                  </p:par>
+                  <p:par>
+                    <p:cTn id="12" presetID="10" presetClass="entr" presetSubtype="0" fill="hold" grpId="0" nodeType="clickEffect">
+                      <p:stCondLst>
+                        <p:cond delay="0"/>
+                      </p:stCondLst>
+                      <p:childTnLst>
+                        <p:set>
+                          <p:cBhvr>
+                            <p:cTn id="13" dur="1" fill="hold">
+                              <p:stCondLst>
+                                <p:cond delay="0"/>
+                              </p:stCondLst>
+                            </p:cTn>
+                            <p:tgtEl>
+                              <p:spTgt spid="14"/>
+                            </p:tgtEl>
+                            <p:attrNameLst>
+                              <p:attrName>style.visibility</p:attrName>
+                            </p:attrNameLst>
+                          </p:cBhvr>
+                          <p:to>
+                            <p:strVal val="visible"/>
+                          </p:to>
+                        </p:set>
+                        <p:anim calcmode="lin" valueType="num">
+                          <p:cBhvr additive="base">
+                            <p:cTn id="14" dur="500" fill="hold"/>
+                            <p:tgtEl>
+                              <p:spTgt spid="14"/>
+                            </p:tgtEl>
+                            <p:attrNameLst>
+                              <p:attrName>style.opacity</p:attrName>
+                            </p:attrNameLst>
+                          </p:cBhvr>
+                          <p:tavLst>
+                            <p:tav tm="0">
+                              <p:val>
+                                <p:fltVal val="0"/>
+                              </p:val>
+                            </p:tav>
+                            <p:tav tm="100000">
+                              <p:val>
+                                <p:fltVal val="1"/>
+                              </p:val>
+                            </p:tav>
+                          </p:tavLst>
+                        </p:anim>
+                      </p:childTnLst>
+                    </p:cTn>
+                  </p:par>
+                </p:childTnLst>
+              </p:cTn>
+            </p:seq>
+          </p:childTnLst>
+        </p:cTn>
+      </p:par>
+    </p:tnLst>
+  </p:timing>
+  <p:transition spd="med" fade="1"/>
+</p:sld>
+</file>
+
+<file path=ppt/slides/slide5.xml><?xml version="1.0" encoding="utf-8"?>
+<p:sld xmlns:a="http://schemas.openxmlformats.org/drawingml/2006/main" xmlns:p="http://schemas.openxmlformats.org/presentationml/2006/main" xmlns:r="http://schemas.openxmlformats.org/officeDocument/2006/relationships">
+  <p:cSld>
+    <p:spTree>
+      <p:nvGrpSpPr>
+        <p:cNvPr id="1" name=""/>
+        <p:cNvGrpSpPr/>
+        <p:nvPr/>
+      </p:nvGrpSpPr>
+      <p:grpSpPr/>
+      <p:sp>
+        <p:nvSpPr>
+          <p:cNvPr id="2" name="Rectangle 1"/>
+          <p:cNvSpPr/>
+          <p:nvPr/>
+        </p:nvSpPr>
+        <p:spPr>
+          <a:xfrm>
+            <a:off x="0" y="0"/>
+            <a:ext cx="12191695" cy="6858000"/>
+          </a:xfrm>
+          <a:prstGeom prst="rect">
+            <a:avLst/>
+          </a:prstGeom>
+          <a:solidFill>
+            <a:srgbClr val="131516"/>
+          </a:solidFill>
+          <a:ln>
+            <a:noFill/>
+          </a:ln>
+          <a:effectLst/>
+        </p:spPr>
+        <p:style>
+          <a:lnRef idx="1">
+            <a:schemeClr val="accent1"/>
+          </a:lnRef>
+          <a:fillRef idx="3">
+            <a:schemeClr val="accent1"/>
+          </a:fillRef>
+          <a:effectRef idx="2">
+            <a:schemeClr val="accent1"/>
+          </a:effectRef>
+          <a:fontRef idx="minor">
+            <a:schemeClr val="lt1"/>
+          </a:fontRef>
+        </p:style>
+        <p:txBody>
+          <a:bodyPr rtlCol="0" anchor="ctr"/>
+          <a:lstStyle/>
+          <a:p>
+            <a:pPr algn="ctr"/>
+          </a:p>
+        </p:txBody>
+      </p:sp>
+      <p:sp>
+        <p:nvSpPr>
+          <p:cNvPr id="3" name="Rectangle 2"/>
+          <p:cNvSpPr/>
+          <p:nvPr/>
+        </p:nvSpPr>
+        <p:spPr>
+          <a:xfrm>
+            <a:off x="0" y="0"/>
+            <a:ext cx="73152" cy="6858000"/>
+          </a:xfrm>
+          <a:prstGeom prst="rect">
+            <a:avLst/>
+          </a:prstGeom>
+          <a:ln>
+            <a:noFill/>
+          </a:ln>
+          <a:effectLst/>
+          <a:gradFill rotWithShape="1">
+            <a:gsLst>
+              <a:gs pos="0">
+                <a:srgbClr val="410913"/>
+              </a:gs>
+              <a:gs pos="50000">
+                <a:srgbClr val="610D1C"/>
+              </a:gs>
+              <a:gs pos="100000">
+                <a:srgbClr val="A2391D"/>
+              </a:gs>
+            </a:gsLst>
+            <a:lin ang="2700000"/>
+          </a:gradFill>
+        </p:spPr>
+        <p:style>
+          <a:lnRef idx="1">
+            <a:schemeClr val="accent1"/>
+          </a:lnRef>
+          <a:fillRef idx="3">
+            <a:schemeClr val="accent1"/>
+          </a:fillRef>
+          <a:effectRef idx="2">
+            <a:schemeClr val="accent1"/>
+          </a:effectRef>
+          <a:fontRef idx="minor">
+            <a:schemeClr val="lt1"/>
+          </a:fontRef>
+        </p:style>
+        <p:txBody>
+          <a:bodyPr rtlCol="0" anchor="ctr"/>
+          <a:lstStyle/>
+          <a:p>
+            <a:pPr algn="ctr"/>
+          </a:p>
+        </p:txBody>
+      </p:sp>
+      <p:sp>
+        <p:nvSpPr>
+          <p:cNvPr id="4" name="TextBox 3"/>
+          <p:cNvSpPr txBox="1"/>
+          <p:nvPr/>
+        </p:nvSpPr>
+        <p:spPr>
+          <a:xfrm>
+            <a:off x="822960" y="777240"/>
+            <a:ext cx="10545775" cy="365760"/>
+          </a:xfrm>
+          <a:prstGeom prst="rect">
+            <a:avLst/>
+          </a:prstGeom>
+          <a:noFill/>
+        </p:spPr>
+        <p:txBody>
+          <a:bodyPr wrap="square" anchor="t">
+            <a:spAutoFit/>
+          </a:bodyPr>
+          <a:lstStyle/>
+          <a:p>
+            <a:r>
+              <a:rPr sz="1300" b="1">
+                <a:solidFill>
+                  <a:srgbClr val="A2391D"/>
+                </a:solidFill>
+                <a:latin typeface="Montserrat"/>
+              </a:rPr>
+              <a:t>ХОД РАБОТЫ</a:t>
+            </a:r>
+          </a:p>
+        </p:txBody>
+      </p:sp>
+      <p:sp>
+        <p:nvSpPr>
+          <p:cNvPr id="5" name="TextBox 4"/>
+          <p:cNvSpPr txBox="1"/>
+          <p:nvPr/>
+        </p:nvSpPr>
+        <p:spPr>
+          <a:xfrm>
+            <a:off x="822960" y="1188720"/>
+            <a:ext cx="10545775" cy="1005840"/>
+          </a:xfrm>
+          <a:prstGeom prst="rect">
+            <a:avLst/>
+          </a:prstGeom>
+          <a:noFill/>
+        </p:spPr>
+        <p:txBody>
+          <a:bodyPr wrap="square" anchor="t">
+            <a:spAutoFit/>
+          </a:bodyPr>
+          <a:lstStyle/>
+          <a:p>
+            <a:r>
+              <a:rPr sz="3400" b="1">
+                <a:solidFill>
+                  <a:srgbClr val="EDEDED"/>
+                </a:solidFill>
+                <a:latin typeface="Montserrat"/>
+              </a:rPr>
+              <a:t>Смещение поля длины оказалось на четыре байта позже, чем мы считали</a:t>
+            </a:r>
+          </a:p>
+        </p:txBody>
+      </p:sp>
+      <p:sp>
+        <p:nvSpPr>
+          <p:cNvPr id="6" name="TextBox 5"/>
+          <p:cNvSpPr txBox="1"/>
+          <p:nvPr/>
+        </p:nvSpPr>
+        <p:spPr>
+          <a:xfrm>
+            <a:off x="822960" y="2148840"/>
+            <a:ext cx="9601200" cy="457200"/>
+          </a:xfrm>
+          <a:prstGeom prst="rect">
+            <a:avLst/>
+          </a:prstGeom>
+          <a:noFill/>
+        </p:spPr>
+        <p:txBody>
+          <a:bodyPr wrap="square" anchor="t">
+            <a:spAutoFit/>
+          </a:bodyPr>
+          <a:lstStyle/>
+          <a:p>
+            <a:r>
+              <a:rPr sz="1700" b="0">
+                <a:solidFill>
+                  <a:srgbClr val="B8B8B8"/>
+                </a:solidFill>
+                <a:latin typeface="Montserrat"/>
+              </a:rPr>
+              <a:t>Одно правило, два чтения: поле длины остаётся на offset 2</a:t>
+            </a:r>
+          </a:p>
+        </p:txBody>
+      </p:sp>
+      <p:pic>
+        <p:nvPicPr>
+          <p:cNvPr id="7" name="Picture 6" descr="length_offset.png"/>
+          <p:cNvPicPr>
+            <a:picLocks noChangeAspect="1"/>
+          </p:cNvPicPr>
+          <p:nvPr/>
+        </p:nvPicPr>
+        <p:blipFill>
+          <a:blip r:embed="rId2"/>
+          <a:stretch>
+            <a:fillRect/>
+          </a:stretch>
+        </p:blipFill>
+        <p:spPr>
+          <a:xfrm>
+            <a:off x="822960" y="2743200"/>
+            <a:ext cx="5264209" cy="2011680"/>
+          </a:xfrm>
+          <a:prstGeom prst="rect">
+            <a:avLst/>
+          </a:prstGeom>
+        </p:spPr>
+      </p:pic>
+      <p:sp>
+        <p:nvSpPr>
+          <p:cNvPr id="8" name="Rounded Rectangle 7"/>
+          <p:cNvSpPr/>
+          <p:nvPr/>
+        </p:nvSpPr>
+        <p:spPr>
+          <a:xfrm>
+            <a:off x="822960" y="5029200"/>
+            <a:ext cx="1554480" cy="384048"/>
+          </a:xfrm>
+          <a:prstGeom prst="roundRect">
+            <a:avLst/>
+          </a:prstGeom>
+          <a:solidFill>
+            <a:srgbClr val="A2391D"/>
+          </a:solidFill>
+          <a:ln>
+            <a:noFill/>
+          </a:ln>
+          <a:effectLst/>
+        </p:spPr>
+        <p:style>
+          <a:lnRef idx="1">
+            <a:schemeClr val="accent1"/>
+          </a:lnRef>
+          <a:fillRef idx="3">
+            <a:schemeClr val="accent1"/>
+          </a:fillRef>
+          <a:effectRef idx="2">
+            <a:schemeClr val="accent1"/>
+          </a:effectRef>
+          <a:fontRef idx="minor">
+            <a:schemeClr val="lt1"/>
+          </a:fontRef>
+        </p:style>
+        <p:txBody>
+          <a:bodyPr rtlCol="0" anchor="ctr"/>
+          <a:lstStyle/>
+          <a:p>
+            <a:pPr algn="ctr"/>
+          </a:p>
+        </p:txBody>
+      </p:sp>
+      <p:sp>
+        <p:nvSpPr>
+          <p:cNvPr id="9" name="TextBox 8"/>
+          <p:cNvSpPr txBox="1"/>
+          <p:nvPr/>
+        </p:nvSpPr>
+        <p:spPr>
+          <a:xfrm>
+            <a:off x="822960" y="5074920"/>
+            <a:ext cx="1554480" cy="320040"/>
+          </a:xfrm>
+          <a:prstGeom prst="rect">
+            <a:avLst/>
+          </a:prstGeom>
+          <a:noFill/>
+        </p:spPr>
+        <p:txBody>
+          <a:bodyPr wrap="square" anchor="t">
+            <a:spAutoFit/>
+          </a:bodyPr>
+          <a:lstStyle/>
+          <a:p>
+            <a:pPr algn="ctr"/>
+            <a:r>
+              <a:rPr sz="1200" b="0">
+                <a:solidFill>
+                  <a:srgbClr val="FFFFFF"/>
+                </a:solidFill>
+                <a:latin typeface="JetBrains Mono"/>
+              </a:rPr>
+              <a:t>наблюдение</a:t>
+            </a:r>
+          </a:p>
+        </p:txBody>
+      </p:sp>
+      <p:sp>
+        <p:nvSpPr>
+          <p:cNvPr id="10" name="Rounded Rectangle 9"/>
+          <p:cNvSpPr/>
+          <p:nvPr/>
+        </p:nvSpPr>
+        <p:spPr>
+          <a:xfrm>
+            <a:off x="2560320" y="5029200"/>
+            <a:ext cx="1554480" cy="384048"/>
+          </a:xfrm>
+          <a:prstGeom prst="roundRect">
+            <a:avLst/>
+          </a:prstGeom>
+          <a:solidFill>
+            <a:srgbClr val="A2391D"/>
+          </a:solidFill>
+          <a:ln>
+            <a:noFill/>
+          </a:ln>
+          <a:effectLst/>
+        </p:spPr>
+        <p:style>
+          <a:lnRef idx="1">
+            <a:schemeClr val="accent1"/>
+          </a:lnRef>
+          <a:fillRef idx="3">
+            <a:schemeClr val="accent1"/>
+          </a:fillRef>
+          <a:effectRef idx="2">
+            <a:schemeClr val="accent1"/>
+          </a:effectRef>
+          <a:fontRef idx="minor">
+            <a:schemeClr val="lt1"/>
+          </a:fontRef>
+        </p:style>
+        <p:txBody>
+          <a:bodyPr rtlCol="0" anchor="ctr"/>
+          <a:lstStyle/>
+          <a:p>
+            <a:pPr algn="ctr"/>
+          </a:p>
+        </p:txBody>
+      </p:sp>
+      <p:sp>
+        <p:nvSpPr>
+          <p:cNvPr id="11" name="TextBox 10"/>
+          <p:cNvSpPr txBox="1"/>
+          <p:nvPr/>
+        </p:nvSpPr>
+        <p:spPr>
+          <a:xfrm>
+            <a:off x="2560320" y="5074920"/>
+            <a:ext cx="1554480" cy="320040"/>
+          </a:xfrm>
+          <a:prstGeom prst="rect">
+            <a:avLst/>
+          </a:prstGeom>
+          <a:noFill/>
+        </p:spPr>
+        <p:txBody>
+          <a:bodyPr wrap="square" anchor="t">
+            <a:spAutoFit/>
+          </a:bodyPr>
+          <a:lstStyle/>
+          <a:p>
+            <a:pPr algn="ctr"/>
+            <a:r>
+              <a:rPr sz="1200" b="0">
+                <a:solidFill>
+                  <a:srgbClr val="FFFFFF"/>
+                </a:solidFill>
+                <a:latin typeface="JetBrains Mono"/>
+              </a:rPr>
+              <a:t>гипотеза</a:t>
+            </a:r>
+          </a:p>
+        </p:txBody>
+      </p:sp>
+      <p:sp>
+        <p:nvSpPr>
+          <p:cNvPr id="12" name="Rounded Rectangle 11"/>
+          <p:cNvSpPr/>
+          <p:nvPr/>
+        </p:nvSpPr>
+        <p:spPr>
+          <a:xfrm>
+            <a:off x="4297680" y="5029200"/>
+            <a:ext cx="1554480" cy="384048"/>
+          </a:xfrm>
+          <a:prstGeom prst="roundRect">
+            <a:avLst/>
+          </a:prstGeom>
+          <a:solidFill>
+            <a:srgbClr val="A2391D"/>
+          </a:solidFill>
+          <a:ln>
+            <a:noFill/>
+          </a:ln>
+          <a:effectLst/>
+        </p:spPr>
+        <p:style>
+          <a:lnRef idx="1">
+            <a:schemeClr val="accent1"/>
+          </a:lnRef>
+          <a:fillRef idx="3">
+            <a:schemeClr val="accent1"/>
+          </a:fillRef>
+          <a:effectRef idx="2">
+            <a:schemeClr val="accent1"/>
+          </a:effectRef>
+          <a:fontRef idx="minor">
+            <a:schemeClr val="lt1"/>
+          </a:fontRef>
+        </p:style>
+        <p:txBody>
+          <a:bodyPr rtlCol="0" anchor="ctr"/>
+          <a:lstStyle/>
+          <a:p>
+            <a:pPr algn="ctr"/>
+          </a:p>
+        </p:txBody>
+      </p:sp>
+      <p:sp>
+        <p:nvSpPr>
+          <p:cNvPr id="13" name="TextBox 12"/>
+          <p:cNvSpPr txBox="1"/>
+          <p:nvPr/>
+        </p:nvSpPr>
+        <p:spPr>
+          <a:xfrm>
+            <a:off x="4297680" y="5074920"/>
+            <a:ext cx="1554480" cy="320040"/>
+          </a:xfrm>
+          <a:prstGeom prst="rect">
+            <a:avLst/>
+          </a:prstGeom>
+          <a:noFill/>
+        </p:spPr>
+        <p:txBody>
+          <a:bodyPr wrap="square" anchor="t">
+            <a:spAutoFit/>
+          </a:bodyPr>
+          <a:lstStyle/>
+          <a:p>
+            <a:pPr algn="ctr"/>
+            <a:r>
+              <a:rPr sz="1200" b="0">
+                <a:solidFill>
+                  <a:srgbClr val="FFFFFF"/>
+                </a:solidFill>
+                <a:latin typeface="JetBrains Mono"/>
+              </a:rPr>
+              <a:t>проверка</a:t>
+            </a:r>
+          </a:p>
+        </p:txBody>
+      </p:sp>
+      <p:sp>
+        <p:nvSpPr>
+          <p:cNvPr id="14" name="Rounded Rectangle 13"/>
+          <p:cNvSpPr/>
+          <p:nvPr/>
+        </p:nvSpPr>
+        <p:spPr>
+          <a:xfrm>
+            <a:off x="6035040" y="5029200"/>
+            <a:ext cx="1554480" cy="384048"/>
+          </a:xfrm>
+          <a:prstGeom prst="roundRect">
+            <a:avLst/>
+          </a:prstGeom>
+          <a:solidFill>
+            <a:srgbClr val="A2391D"/>
+          </a:solidFill>
+          <a:ln>
+            <a:noFill/>
+          </a:ln>
+          <a:effectLst/>
+        </p:spPr>
+        <p:style>
+          <a:lnRef idx="1">
+            <a:schemeClr val="accent1"/>
+          </a:lnRef>
+          <a:fillRef idx="3">
+            <a:schemeClr val="accent1"/>
+          </a:fillRef>
+          <a:effectRef idx="2">
+            <a:schemeClr val="accent1"/>
+          </a:effectRef>
+          <a:fontRef idx="minor">
+            <a:schemeClr val="lt1"/>
+          </a:fontRef>
+        </p:style>
+        <p:txBody>
+          <a:bodyPr rtlCol="0" anchor="ctr"/>
+          <a:lstStyle/>
+          <a:p>
+            <a:pPr algn="ctr"/>
+          </a:p>
+        </p:txBody>
+      </p:sp>
+      <p:sp>
+        <p:nvSpPr>
+          <p:cNvPr id="15" name="TextBox 14"/>
+          <p:cNvSpPr txBox="1"/>
+          <p:nvPr/>
+        </p:nvSpPr>
+        <p:spPr>
+          <a:xfrm>
+            <a:off x="6035040" y="5074920"/>
+            <a:ext cx="1554480" cy="320040"/>
+          </a:xfrm>
+          <a:prstGeom prst="rect">
+            <a:avLst/>
+          </a:prstGeom>
+          <a:noFill/>
+        </p:spPr>
+        <p:txBody>
+          <a:bodyPr wrap="square" anchor="t">
+            <a:spAutoFit/>
+          </a:bodyPr>
+          <a:lstStyle/>
+          <a:p>
+            <a:pPr algn="ctr"/>
+            <a:r>
+              <a:rPr sz="1200" b="0">
+                <a:solidFill>
+                  <a:srgbClr val="FFFFFF"/>
+                </a:solidFill>
+                <a:latin typeface="JetBrains Mono"/>
+              </a:rPr>
+              <a:t>контрпример</a:t>
+            </a:r>
+          </a:p>
+        </p:txBody>
+      </p:sp>
+      <p:sp>
+        <p:nvSpPr>
+          <p:cNvPr id="16" name="Rounded Rectangle 15"/>
+          <p:cNvSpPr/>
+          <p:nvPr/>
+        </p:nvSpPr>
+        <p:spPr>
+          <a:xfrm>
+            <a:off x="7772400" y="5029200"/>
+            <a:ext cx="1554480" cy="384048"/>
+          </a:xfrm>
+          <a:prstGeom prst="roundRect">
+            <a:avLst/>
+          </a:prstGeom>
+          <a:solidFill>
+            <a:srgbClr val="A2391D"/>
+          </a:solidFill>
+          <a:ln>
+            <a:noFill/>
+          </a:ln>
+          <a:effectLst/>
+        </p:spPr>
+        <p:style>
+          <a:lnRef idx="1">
+            <a:schemeClr val="accent1"/>
+          </a:lnRef>
+          <a:fillRef idx="3">
+            <a:schemeClr val="accent1"/>
+          </a:fillRef>
+          <a:effectRef idx="2">
+            <a:schemeClr val="accent1"/>
+          </a:effectRef>
+          <a:fontRef idx="minor">
+            <a:schemeClr val="lt1"/>
+          </a:fontRef>
+        </p:style>
+        <p:txBody>
+          <a:bodyPr rtlCol="0" anchor="ctr"/>
+          <a:lstStyle/>
+          <a:p>
+            <a:pPr algn="ctr"/>
+          </a:p>
+        </p:txBody>
+      </p:sp>
+      <p:sp>
+        <p:nvSpPr>
+          <p:cNvPr id="17" name="TextBox 16"/>
+          <p:cNvSpPr txBox="1"/>
+          <p:nvPr/>
+        </p:nvSpPr>
+        <p:spPr>
+          <a:xfrm>
+            <a:off x="7772400" y="5074920"/>
+            <a:ext cx="1554480" cy="320040"/>
+          </a:xfrm>
+          <a:prstGeom prst="rect">
+            <a:avLst/>
+          </a:prstGeom>
+          <a:noFill/>
+        </p:spPr>
+        <p:txBody>
+          <a:bodyPr wrap="square" anchor="t">
+            <a:spAutoFit/>
+          </a:bodyPr>
+          <a:lstStyle/>
+          <a:p>
+            <a:pPr algn="ctr"/>
+            <a:r>
+              <a:rPr sz="1200" b="0">
+                <a:solidFill>
+                  <a:srgbClr val="FFFFFF"/>
+                </a:solidFill>
+                <a:latin typeface="JetBrains Mono"/>
+              </a:rPr>
+              <a:t>уточнение</a:t>
+            </a:r>
+          </a:p>
+        </p:txBody>
+      </p:sp>
+      <p:sp>
+        <p:nvSpPr>
+          <p:cNvPr id="18" name="TextBox 17"/>
+          <p:cNvSpPr txBox="1"/>
+          <p:nvPr/>
+        </p:nvSpPr>
+        <p:spPr>
+          <a:xfrm>
+            <a:off x="822960" y="6446520"/>
+            <a:ext cx="10545775" cy="274320"/>
+          </a:xfrm>
+          <a:prstGeom prst="rect">
+            <a:avLst/>
+          </a:prstGeom>
+          <a:noFill/>
+        </p:spPr>
+        <p:txBody>
+          <a:bodyPr wrap="square" anchor="t">
+            <a:spAutoFit/>
+          </a:bodyPr>
+          <a:lstStyle/>
+          <a:p>
+            <a:r>
+              <a:rPr sz="1000" b="0">
+                <a:solidFill>
+                  <a:srgbClr val="B8B8B8"/>
+                </a:solidFill>
+                <a:latin typeface="Montserrat"/>
+              </a:rPr>
+              <a:t>Команда HTTP 418 · кейс #02 · Мадригал</a:t>
+            </a:r>
+          </a:p>
+        </p:txBody>
+      </p:sp>
+      <p:sp>
+        <p:nvSpPr>
+          <p:cNvPr id="19" name="TextBox 18"/>
+          <p:cNvSpPr txBox="1"/>
+          <p:nvPr/>
+        </p:nvSpPr>
+        <p:spPr>
+          <a:xfrm>
+            <a:off x="822960" y="6446520"/>
+            <a:ext cx="10545775" cy="274320"/>
+          </a:xfrm>
+          <a:prstGeom prst="rect">
+            <a:avLst/>
+          </a:prstGeom>
+          <a:noFill/>
+        </p:spPr>
+        <p:txBody>
+          <a:bodyPr wrap="square" anchor="t">
+            <a:spAutoFit/>
+          </a:bodyPr>
+          <a:lstStyle/>
+          <a:p>
+            <a:pPr algn="r"/>
+            <a:r>
+              <a:rPr sz="1000" b="0">
+                <a:solidFill>
+                  <a:srgbClr val="B8B8B8"/>
+                </a:solidFill>
+                <a:latin typeface="Montserrat"/>
+              </a:rPr>
+              <a:t>5 / 19</a:t>
+            </a:r>
+          </a:p>
+        </p:txBody>
+      </p:sp>
+    </p:spTree>
+  </p:cSld>
+  <p:clrMapOvr>
+    <a:masterClrMapping/>
+  </p:clrMapOvr>
+  <p:timing>
+    <p:tnLst>
+      <p:par>
+        <p:cTn id="1" dur="indefinite" restart="never" nodeType="tmRoot">
+          <p:childTnLst>
+            <p:seq concurrent="1" nextAc="seek">
+              <p:cTn id="2" dur="indefinite" nodeType="mainSeq">
+                <p:childTnLst>
+                  <p:par>
+                    <p:cTn id="3" presetID="10" presetClass="entr" presetSubtype="0" fill="hold" grpId="0" nodeType="clickEffect">
+                      <p:stCondLst>
+                        <p:cond delay="0"/>
+                      </p:stCondLst>
+                      <p:childTnLst>
+                        <p:set>
+                          <p:cBhvr>
+                            <p:cTn id="4" dur="1" fill="hold">
+                              <p:stCondLst>
+                                <p:cond delay="0"/>
+                              </p:stCondLst>
+                            </p:cTn>
+                            <p:tgtEl>
+                              <p:spTgt spid="5"/>
+                            </p:tgtEl>
+                            <p:attrNameLst>
+                              <p:attrName>style.visibility</p:attrName>
+                            </p:attrNameLst>
+                          </p:cBhvr>
+                          <p:to>
+                            <p:strVal val="visible"/>
+                          </p:to>
+                        </p:set>
+                        <p:anim calcmode="lin" valueType="num">
+                          <p:cBhvr additive="base">
+                            <p:cTn id="5" dur="500" fill="hold"/>
+                            <p:tgtEl>
+                              <p:spTgt spid="5"/>
+                            </p:tgtEl>
+                            <p:attrNameLst>
+                              <p:attrName>style.opacity</p:attrName>
+                            </p:attrNameLst>
+                          </p:cBhvr>
+                          <p:tavLst>
+                            <p:tav tm="0">
+                              <p:val>
+                                <p:fltVal val="0"/>
+                              </p:val>
+                            </p:tav>
+                            <p:tav tm="100000">
+                              <p:val>
+                                <p:fltVal val="1"/>
+                              </p:val>
+                            </p:tav>
+                          </p:tavLst>
+                        </p:anim>
+                      </p:childTnLst>
+                    </p:cTn>
+                  </p:par>
+                  <p:par>
+                    <p:cTn id="6" presetID="10" presetClass="entr" presetSubtype="0" fill="hold" grpId="0" nodeType="clickEffect">
+                      <p:stCondLst>
+                        <p:cond delay="0"/>
+                      </p:stCondLst>
+                      <p:childTnLst>
+                        <p:set>
+                          <p:cBhvr>
+                            <p:cTn id="7" dur="1" fill="hold">
+                              <p:stCondLst>
+                                <p:cond delay="0"/>
+                              </p:stCondLst>
+                            </p:cTn>
+                            <p:tgtEl>
+                              <p:spTgt spid="7"/>
+                            </p:tgtEl>
+                            <p:attrNameLst>
+                              <p:attrName>style.visibility</p:attrName>
+                            </p:attrNameLst>
+                          </p:cBhvr>
+                          <p:to>
+                            <p:strVal val="visible"/>
+                          </p:to>
+                        </p:set>
+                        <p:anim calcmode="lin" valueType="num">
+                          <p:cBhvr additive="base">
+                            <p:cTn id="8" dur="500" fill="hold"/>
+                            <p:tgtEl>
+                              <p:spTgt spid="7"/>
+                            </p:tgtEl>
+                            <p:attrNameLst>
+                              <p:attrName>style.opacity</p:attrName>
+                            </p:attrNameLst>
+                          </p:cBhvr>
+                          <p:tavLst>
+                            <p:tav tm="0">
+                              <p:val>
+                                <p:fltVal val="0"/>
+                              </p:val>
+                            </p:tav>
+                            <p:tav tm="100000">
+                              <p:val>
+                                <p:fltVal val="1"/>
+                              </p:val>
+                            </p:tav>
+                          </p:tavLst>
+                        </p:anim>
+                      </p:childTnLst>
+                    </p:cTn>
+                  </p:par>
+                </p:childTnLst>
+              </p:cTn>
+            </p:seq>
+          </p:childTnLst>
+        </p:cTn>
+      </p:par>
+    </p:tnLst>
+  </p:timing>
+  <p:transition spd="med" fade="1"/>
+</p:sld>
+</file>
+
+<file path=ppt/slides/slide6.xml><?xml version="1.0" encoding="utf-8"?>
+<p:sld xmlns:a="http://schemas.openxmlformats.org/drawingml/2006/main" xmlns:p="http://schemas.openxmlformats.org/presentationml/2006/main" xmlns:r="http://schemas.openxmlformats.org/officeDocument/2006/relationships">
+  <p:cSld>
+    <p:spTree>
+      <p:nvGrpSpPr>
+        <p:cNvPr id="1" name=""/>
+        <p:cNvGrpSpPr/>
+        <p:nvPr/>
+      </p:nvGrpSpPr>
+      <p:grpSpPr/>
+      <p:sp>
+        <p:nvSpPr>
+          <p:cNvPr id="2" name="Rectangle 1"/>
+          <p:cNvSpPr/>
+          <p:nvPr/>
+        </p:nvSpPr>
+        <p:spPr>
+          <a:xfrm>
+            <a:off x="0" y="0"/>
+            <a:ext cx="12191695" cy="6858000"/>
+          </a:xfrm>
+          <a:prstGeom prst="rect">
+            <a:avLst/>
+          </a:prstGeom>
+          <a:solidFill>
+            <a:srgbClr val="131516"/>
+          </a:solidFill>
+          <a:ln>
+            <a:noFill/>
+          </a:ln>
+          <a:effectLst/>
+        </p:spPr>
+        <p:style>
+          <a:lnRef idx="1">
+            <a:schemeClr val="accent1"/>
+          </a:lnRef>
+          <a:fillRef idx="3">
+            <a:schemeClr val="accent1"/>
+          </a:fillRef>
+          <a:effectRef idx="2">
+            <a:schemeClr val="accent1"/>
+          </a:effectRef>
+          <a:fontRef idx="minor">
+            <a:schemeClr val="lt1"/>
+          </a:fontRef>
+        </p:style>
+        <p:txBody>
+          <a:bodyPr rtlCol="0" anchor="ctr"/>
+          <a:lstStyle/>
+          <a:p>
+            <a:pPr algn="ctr"/>
+          </a:p>
+        </p:txBody>
+      </p:sp>
+      <p:sp>
+        <p:nvSpPr>
+          <p:cNvPr id="3" name="Rectangle 2"/>
+          <p:cNvSpPr/>
+          <p:nvPr/>
+        </p:nvSpPr>
+        <p:spPr>
+          <a:xfrm>
+            <a:off x="0" y="0"/>
+            <a:ext cx="73152" cy="6858000"/>
+          </a:xfrm>
+          <a:prstGeom prst="rect">
+            <a:avLst/>
+          </a:prstGeom>
+          <a:ln>
+            <a:noFill/>
+          </a:ln>
+          <a:effectLst/>
+          <a:gradFill rotWithShape="1">
+            <a:gsLst>
+              <a:gs pos="0">
+                <a:srgbClr val="410913"/>
+              </a:gs>
+              <a:gs pos="50000">
+                <a:srgbClr val="610D1C"/>
+              </a:gs>
+              <a:gs pos="100000">
+                <a:srgbClr val="A2391D"/>
+              </a:gs>
+            </a:gsLst>
+            <a:lin ang="2700000"/>
+          </a:gradFill>
+        </p:spPr>
+        <p:style>
+          <a:lnRef idx="1">
+            <a:schemeClr val="accent1"/>
+          </a:lnRef>
+          <a:fillRef idx="3">
+            <a:schemeClr val="accent1"/>
+          </a:fillRef>
+          <a:effectRef idx="2">
+            <a:schemeClr val="accent1"/>
+          </a:effectRef>
+          <a:fontRef idx="minor">
+            <a:schemeClr val="lt1"/>
+          </a:fontRef>
+        </p:style>
+        <p:txBody>
+          <a:bodyPr rtlCol="0" anchor="ctr"/>
+          <a:lstStyle/>
+          <a:p>
+            <a:pPr algn="ctr"/>
+          </a:p>
+        </p:txBody>
+      </p:sp>
+      <p:sp>
+        <p:nvSpPr>
+          <p:cNvPr id="4" name="TextBox 3"/>
+          <p:cNvSpPr txBox="1"/>
+          <p:nvPr/>
+        </p:nvSpPr>
+        <p:spPr>
+          <a:xfrm>
+            <a:off x="822960" y="457200"/>
+            <a:ext cx="10545775" cy="1051560"/>
+          </a:xfrm>
+          <a:prstGeom prst="rect">
+            <a:avLst/>
+          </a:prstGeom>
+          <a:noFill/>
+        </p:spPr>
+        <p:txBody>
+          <a:bodyPr wrap="square" anchor="t">
+            <a:spAutoFit/>
+          </a:bodyPr>
+          <a:lstStyle/>
+          <a:p>
+            <a:r>
+              <a:rPr sz="3200" b="1">
+                <a:solidFill>
+                  <a:srgbClr val="EDEDED"/>
+                </a:solidFill>
+                <a:latin typeface="Montserrat"/>
+              </a:rPr>
+              <a:t>Три модуля связаны форматами, а не вызовами</a:t>
+            </a:r>
+          </a:p>
+        </p:txBody>
+      </p:sp>
+      <p:sp>
+        <p:nvSpPr>
+          <p:cNvPr id="5" name="Rectangle 4"/>
+          <p:cNvSpPr/>
+          <p:nvPr/>
+        </p:nvSpPr>
+        <p:spPr>
+          <a:xfrm>
+            <a:off x="655167" y="1965960"/>
+            <a:ext cx="3200400" cy="2011680"/>
+          </a:xfrm>
+          <a:prstGeom prst="rect">
+            <a:avLst/>
+          </a:prstGeom>
+          <a:solidFill>
+            <a:srgbClr val="1D1D1D"/>
+          </a:solidFill>
+          <a:ln>
+            <a:noFill/>
+          </a:ln>
+          <a:effectLst/>
+        </p:spPr>
+        <p:style>
+          <a:lnRef idx="1">
+            <a:schemeClr val="accent1"/>
+          </a:lnRef>
+          <a:fillRef idx="3">
+            <a:schemeClr val="accent1"/>
+          </a:fillRef>
+          <a:effectRef idx="2">
+            <a:schemeClr val="accent1"/>
+          </a:effectRef>
+          <a:fontRef idx="minor">
+            <a:schemeClr val="lt1"/>
+          </a:fontRef>
+        </p:style>
+        <p:txBody>
+          <a:bodyPr rtlCol="0" anchor="ctr"/>
+          <a:lstStyle/>
+          <a:p>
+            <a:pPr algn="ctr"/>
+          </a:p>
+        </p:txBody>
+      </p:sp>
+      <p:sp>
+        <p:nvSpPr>
+          <p:cNvPr id="6" name="Rectangle 5"/>
+          <p:cNvSpPr/>
+          <p:nvPr/>
+        </p:nvSpPr>
+        <p:spPr>
+          <a:xfrm>
+            <a:off x="655167" y="1965960"/>
+            <a:ext cx="45720" cy="2011680"/>
+          </a:xfrm>
+          <a:prstGeom prst="rect">
+            <a:avLst/>
+          </a:prstGeom>
+          <a:solidFill>
+            <a:srgbClr val="A2391D"/>
+          </a:solidFill>
+          <a:ln>
+            <a:noFill/>
+          </a:ln>
+          <a:effectLst/>
+        </p:spPr>
+        <p:style>
+          <a:lnRef idx="1">
+            <a:schemeClr val="accent1"/>
+          </a:lnRef>
+          <a:fillRef idx="3">
+            <a:schemeClr val="accent1"/>
+          </a:fillRef>
+          <a:effectRef idx="2">
+            <a:schemeClr val="accent1"/>
+          </a:effectRef>
+          <a:fontRef idx="minor">
+            <a:schemeClr val="lt1"/>
+          </a:fontRef>
+        </p:style>
+        <p:txBody>
+          <a:bodyPr rtlCol="0" anchor="ctr"/>
+          <a:lstStyle/>
+          <a:p>
+            <a:pPr algn="ctr"/>
+          </a:p>
+        </p:txBody>
+      </p:sp>
+      <p:sp>
+        <p:nvSpPr>
+          <p:cNvPr id="7" name="TextBox 6"/>
+          <p:cNvSpPr txBox="1"/>
+          <p:nvPr/>
+        </p:nvSpPr>
+        <p:spPr>
+          <a:xfrm>
+            <a:off x="883767" y="2286000"/>
+            <a:ext cx="2743200" cy="548640"/>
+          </a:xfrm>
+          <a:prstGeom prst="rect">
+            <a:avLst/>
+          </a:prstGeom>
+          <a:noFill/>
+        </p:spPr>
+        <p:txBody>
+          <a:bodyPr wrap="square" anchor="t">
+            <a:spAutoFit/>
+          </a:bodyPr>
+          <a:lstStyle/>
+          <a:p>
+            <a:r>
+              <a:rPr sz="2000" b="1">
+                <a:solidFill>
+                  <a:srgbClr val="EDEDED"/>
+                </a:solidFill>
+                <a:latin typeface="Montserrat"/>
+              </a:rPr>
+              <a:t>capture</a:t>
+            </a:r>
+          </a:p>
+        </p:txBody>
+      </p:sp>
+      <p:sp>
+        <p:nvSpPr>
+          <p:cNvPr id="8" name="TextBox 7"/>
+          <p:cNvSpPr txBox="1"/>
+          <p:nvPr/>
+        </p:nvSpPr>
+        <p:spPr>
+          <a:xfrm>
+            <a:off x="883767" y="2926080"/>
+            <a:ext cx="2743200" cy="822960"/>
+          </a:xfrm>
+          <a:prstGeom prst="rect">
+            <a:avLst/>
+          </a:prstGeom>
+          <a:noFill/>
+        </p:spPr>
+        <p:txBody>
+          <a:bodyPr wrap="square" anchor="t">
+            <a:spAutoFit/>
+          </a:bodyPr>
+          <a:lstStyle/>
+          <a:p>
+            <a:r>
+              <a:rPr sz="1400" b="0">
+                <a:solidFill>
+                  <a:srgbClr val="B8B8B8"/>
+                </a:solidFill>
+                <a:latin typeface="Montserrat"/>
+              </a:rPr>
+              <a:t>pcap/pcapng → сессии</a:t>
+            </a:r>
+          </a:p>
+          <a:p>
+            <a:r>
+              <a:rPr sz="1400" b="0">
+                <a:solidFill>
+                  <a:srgbClr val="B8B8B8"/>
+                </a:solidFill>
+                <a:latin typeface="Montserrat"/>
+              </a:rPr>
+              <a:t>reassembly, provenance</a:t>
+            </a:r>
+          </a:p>
+        </p:txBody>
+      </p:sp>
+      <p:sp>
+        <p:nvSpPr>
+          <p:cNvPr id="9" name="TextBox 8"/>
+          <p:cNvSpPr txBox="1"/>
+          <p:nvPr/>
+        </p:nvSpPr>
+        <p:spPr>
+          <a:xfrm>
+            <a:off x="3855567" y="2743200"/>
+            <a:ext cx="640080" cy="548640"/>
+          </a:xfrm>
+          <a:prstGeom prst="rect">
+            <a:avLst/>
+          </a:prstGeom>
+          <a:noFill/>
+        </p:spPr>
+        <p:txBody>
+          <a:bodyPr wrap="square" anchor="ctr">
+            <a:spAutoFit/>
+          </a:bodyPr>
+          <a:lstStyle/>
+          <a:p>
+            <a:pPr algn="ctr"/>
+            <a:r>
+              <a:rPr sz="1200" b="0">
+                <a:solidFill>
+                  <a:srgbClr val="A2391D"/>
+                </a:solidFill>
+                <a:latin typeface="JetBrains Mono"/>
+              </a:rPr>
+              <a:t>JSON →</a:t>
+            </a:r>
+          </a:p>
+        </p:txBody>
+      </p:sp>
+      <p:sp>
+        <p:nvSpPr>
+          <p:cNvPr id="10" name="Rectangle 9"/>
+          <p:cNvSpPr/>
+          <p:nvPr/>
+        </p:nvSpPr>
+        <p:spPr>
+          <a:xfrm>
+            <a:off x="4495647" y="1965960"/>
+            <a:ext cx="3200400" cy="2011680"/>
+          </a:xfrm>
+          <a:prstGeom prst="rect">
+            <a:avLst/>
+          </a:prstGeom>
+          <a:solidFill>
+            <a:srgbClr val="1D1D1D"/>
+          </a:solidFill>
+          <a:ln>
+            <a:noFill/>
+          </a:ln>
+          <a:effectLst/>
+        </p:spPr>
+        <p:style>
+          <a:lnRef idx="1">
+            <a:schemeClr val="accent1"/>
+          </a:lnRef>
+          <a:fillRef idx="3">
+            <a:schemeClr val="accent1"/>
+          </a:fillRef>
+          <a:effectRef idx="2">
+            <a:schemeClr val="accent1"/>
+          </a:effectRef>
+          <a:fontRef idx="minor">
+            <a:schemeClr val="lt1"/>
+          </a:fontRef>
+        </p:style>
+        <p:txBody>
+          <a:bodyPr rtlCol="0" anchor="ctr"/>
+          <a:lstStyle/>
+          <a:p>
+            <a:pPr algn="ctr"/>
+          </a:p>
+        </p:txBody>
+      </p:sp>
+      <p:sp>
+        <p:nvSpPr>
+          <p:cNvPr id="11" name="Rectangle 10"/>
+          <p:cNvSpPr/>
+          <p:nvPr/>
+        </p:nvSpPr>
+        <p:spPr>
+          <a:xfrm>
+            <a:off x="4495647" y="1965960"/>
+            <a:ext cx="45720" cy="2011680"/>
+          </a:xfrm>
+          <a:prstGeom prst="rect">
+            <a:avLst/>
+          </a:prstGeom>
+          <a:solidFill>
+            <a:srgbClr val="A2391D"/>
+          </a:solidFill>
+          <a:ln>
+            <a:noFill/>
+          </a:ln>
+          <a:effectLst/>
+        </p:spPr>
+        <p:style>
+          <a:lnRef idx="1">
+            <a:schemeClr val="accent1"/>
+          </a:lnRef>
+          <a:fillRef idx="3">
+            <a:schemeClr val="accent1"/>
+          </a:fillRef>
+          <a:effectRef idx="2">
+            <a:schemeClr val="accent1"/>
+          </a:effectRef>
+          <a:fontRef idx="minor">
+            <a:schemeClr val="lt1"/>
+          </a:fontRef>
+        </p:style>
+        <p:txBody>
+          <a:bodyPr rtlCol="0" anchor="ctr"/>
+          <a:lstStyle/>
+          <a:p>
+            <a:pPr algn="ctr"/>
+          </a:p>
+        </p:txBody>
+      </p:sp>
+      <p:sp>
+        <p:nvSpPr>
+          <p:cNvPr id="12" name="TextBox 11"/>
+          <p:cNvSpPr txBox="1"/>
+          <p:nvPr/>
+        </p:nvSpPr>
+        <p:spPr>
+          <a:xfrm>
+            <a:off x="4724247" y="2286000"/>
+            <a:ext cx="2743200" cy="548640"/>
+          </a:xfrm>
+          <a:prstGeom prst="rect">
+            <a:avLst/>
+          </a:prstGeom>
+          <a:noFill/>
+        </p:spPr>
+        <p:txBody>
+          <a:bodyPr wrap="square" anchor="t">
+            <a:spAutoFit/>
+          </a:bodyPr>
+          <a:lstStyle/>
+          <a:p>
+            <a:r>
+              <a:rPr sz="2000" b="1">
+                <a:solidFill>
+                  <a:srgbClr val="EDEDED"/>
+                </a:solidFill>
+                <a:latin typeface="Montserrat"/>
+              </a:rPr>
+              <a:t>protocol + hypothesis</a:t>
+            </a:r>
+          </a:p>
+        </p:txBody>
+      </p:sp>
+      <p:sp>
+        <p:nvSpPr>
+          <p:cNvPr id="13" name="TextBox 12"/>
+          <p:cNvSpPr txBox="1"/>
+          <p:nvPr/>
+        </p:nvSpPr>
+        <p:spPr>
+          <a:xfrm>
+            <a:off x="4724247" y="2926080"/>
+            <a:ext cx="2743200" cy="822960"/>
+          </a:xfrm>
+          <a:prstGeom prst="rect">
+            <a:avLst/>
+          </a:prstGeom>
+          <a:noFill/>
+        </p:spPr>
+        <p:txBody>
+          <a:bodyPr wrap="square" anchor="t">
+            <a:spAutoFit/>
+          </a:bodyPr>
+          <a:lstStyle/>
+          <a:p>
+            <a:r>
+              <a:rPr sz="1400" b="0">
+                <a:solidFill>
+                  <a:srgbClr val="B8B8B8"/>
+                </a:solidFill>
+                <a:latin typeface="Montserrat"/>
+              </a:rPr>
+              <a:t>правила, фрейминг</a:t>
+            </a:r>
+          </a:p>
+          <a:p>
+            <a:r>
+              <a:rPr sz="1400" b="0">
+                <a:solidFill>
+                  <a:srgbClr val="B8B8B8"/>
+                </a:solidFill>
+                <a:latin typeface="Montserrat"/>
+              </a:rPr>
+              <a:t>контрпримеры, версии</a:t>
+            </a:r>
+          </a:p>
+        </p:txBody>
+      </p:sp>
+      <p:sp>
+        <p:nvSpPr>
+          <p:cNvPr id="14" name="TextBox 13"/>
+          <p:cNvSpPr txBox="1"/>
+          <p:nvPr/>
+        </p:nvSpPr>
+        <p:spPr>
+          <a:xfrm>
+            <a:off x="7696047" y="2743200"/>
+            <a:ext cx="640080" cy="548640"/>
+          </a:xfrm>
+          <a:prstGeom prst="rect">
+            <a:avLst/>
+          </a:prstGeom>
+          <a:noFill/>
+        </p:spPr>
+        <p:txBody>
+          <a:bodyPr wrap="square" anchor="ctr">
+            <a:spAutoFit/>
+          </a:bodyPr>
+          <a:lstStyle/>
+          <a:p>
+            <a:pPr algn="ctr"/>
+            <a:r>
+              <a:rPr sz="1200" b="0">
+                <a:solidFill>
+                  <a:srgbClr val="A2391D"/>
+                </a:solidFill>
+                <a:latin typeface="JetBrains Mono"/>
+              </a:rPr>
+              <a:t>JSON →</a:t>
+            </a:r>
+          </a:p>
+        </p:txBody>
+      </p:sp>
+      <p:sp>
+        <p:nvSpPr>
+          <p:cNvPr id="15" name="Rectangle 14"/>
+          <p:cNvSpPr/>
+          <p:nvPr/>
+        </p:nvSpPr>
+        <p:spPr>
+          <a:xfrm>
+            <a:off x="8336127" y="1965960"/>
+            <a:ext cx="3200400" cy="2011680"/>
+          </a:xfrm>
+          <a:prstGeom prst="rect">
+            <a:avLst/>
+          </a:prstGeom>
+          <a:solidFill>
+            <a:srgbClr val="1D1D1D"/>
+          </a:solidFill>
+          <a:ln>
+            <a:noFill/>
+          </a:ln>
+          <a:effectLst/>
+        </p:spPr>
+        <p:style>
+          <a:lnRef idx="1">
+            <a:schemeClr val="accent1"/>
+          </a:lnRef>
+          <a:fillRef idx="3">
+            <a:schemeClr val="accent1"/>
+          </a:fillRef>
+          <a:effectRef idx="2">
+            <a:schemeClr val="accent1"/>
+          </a:effectRef>
+          <a:fontRef idx="minor">
+            <a:schemeClr val="lt1"/>
+          </a:fontRef>
+        </p:style>
+        <p:txBody>
+          <a:bodyPr rtlCol="0" anchor="ctr"/>
+          <a:lstStyle/>
+          <a:p>
+            <a:pPr algn="ctr"/>
+          </a:p>
+        </p:txBody>
+      </p:sp>
+      <p:sp>
+        <p:nvSpPr>
+          <p:cNvPr id="16" name="Rectangle 15"/>
+          <p:cNvSpPr/>
+          <p:nvPr/>
+        </p:nvSpPr>
+        <p:spPr>
+          <a:xfrm>
+            <a:off x="8336127" y="1965960"/>
+            <a:ext cx="45720" cy="2011680"/>
+          </a:xfrm>
+          <a:prstGeom prst="rect">
+            <a:avLst/>
+          </a:prstGeom>
+          <a:solidFill>
+            <a:srgbClr val="A2391D"/>
+          </a:solidFill>
+          <a:ln>
+            <a:noFill/>
+          </a:ln>
+          <a:effectLst/>
+        </p:spPr>
+        <p:style>
+          <a:lnRef idx="1">
+            <a:schemeClr val="accent1"/>
+          </a:lnRef>
+          <a:fillRef idx="3">
+            <a:schemeClr val="accent1"/>
+          </a:fillRef>
+          <a:effectRef idx="2">
+            <a:schemeClr val="accent1"/>
+          </a:effectRef>
+          <a:fontRef idx="minor">
+            <a:schemeClr val="lt1"/>
+          </a:fontRef>
+        </p:style>
+        <p:txBody>
+          <a:bodyPr rtlCol="0" anchor="ctr"/>
+          <a:lstStyle/>
+          <a:p>
+            <a:pPr algn="ctr"/>
+          </a:p>
+        </p:txBody>
+      </p:sp>
+      <p:sp>
+        <p:nvSpPr>
+          <p:cNvPr id="17" name="TextBox 16"/>
+          <p:cNvSpPr txBox="1"/>
+          <p:nvPr/>
+        </p:nvSpPr>
+        <p:spPr>
+          <a:xfrm>
+            <a:off x="8564727" y="2286000"/>
+            <a:ext cx="2743200" cy="548640"/>
+          </a:xfrm>
+          <a:prstGeom prst="rect">
+            <a:avLst/>
+          </a:prstGeom>
+          <a:noFill/>
+        </p:spPr>
+        <p:txBody>
+          <a:bodyPr wrap="square" anchor="t">
+            <a:spAutoFit/>
+          </a:bodyPr>
+          <a:lstStyle/>
+          <a:p>
+            <a:r>
+              <a:rPr sz="2000" b="1">
+                <a:solidFill>
+                  <a:srgbClr val="EDEDED"/>
+                </a:solidFill>
+                <a:latin typeface="Montserrat"/>
+              </a:rPr>
+              <a:t>ui</a:t>
+            </a:r>
+          </a:p>
+        </p:txBody>
+      </p:sp>
+      <p:sp>
+        <p:nvSpPr>
+          <p:cNvPr id="18" name="TextBox 17"/>
+          <p:cNvSpPr txBox="1"/>
+          <p:nvPr/>
+        </p:nvSpPr>
+        <p:spPr>
+          <a:xfrm>
+            <a:off x="8564727" y="2926080"/>
+            <a:ext cx="2743200" cy="822960"/>
+          </a:xfrm>
+          <a:prstGeom prst="rect">
+            <a:avLst/>
+          </a:prstGeom>
+          <a:noFill/>
+        </p:spPr>
+        <p:txBody>
+          <a:bodyPr wrap="square" anchor="t">
+            <a:spAutoFit/>
+          </a:bodyPr>
+          <a:lstStyle/>
+          <a:p>
+            <a:r>
+              <a:rPr sz="1400" b="0">
+                <a:solidFill>
+                  <a:srgbClr val="B8B8B8"/>
+                </a:solidFill>
+                <a:latin typeface="Montserrat"/>
+              </a:rPr>
+              <a:t>окно PySide6</a:t>
+            </a:r>
+          </a:p>
+          <a:p>
+            <a:r>
+              <a:rPr sz="1400" b="0">
+                <a:solidFill>
+                  <a:srgbClr val="B8B8B8"/>
+                </a:solidFill>
+                <a:latin typeface="Montserrat"/>
+              </a:rPr>
+              <a:t>исследование и просмотр</a:t>
+            </a:r>
+          </a:p>
+        </p:txBody>
+      </p:sp>
+      <p:sp>
+        <p:nvSpPr>
+          <p:cNvPr id="19" name="TextBox 18"/>
+          <p:cNvSpPr txBox="1"/>
+          <p:nvPr/>
+        </p:nvSpPr>
+        <p:spPr>
+          <a:xfrm>
+            <a:off x="822960" y="6035040"/>
+            <a:ext cx="10545775" cy="365760"/>
+          </a:xfrm>
+          <a:prstGeom prst="rect">
+            <a:avLst/>
+          </a:prstGeom>
+          <a:noFill/>
+        </p:spPr>
+        <p:txBody>
+          <a:bodyPr wrap="square" anchor="t">
+            <a:spAutoFit/>
+          </a:bodyPr>
+          <a:lstStyle/>
+          <a:p>
+            <a:r>
+              <a:rPr sz="1200" b="0">
+                <a:solidFill>
+                  <a:srgbClr val="B8B8B8"/>
+                </a:solidFill>
+                <a:latin typeface="Montserrat"/>
+              </a:rPr>
+              <a:t>Контракты между модулями зафиксированы схемами JSON; порядок вызовов не важен</a:t>
+            </a:r>
+          </a:p>
+        </p:txBody>
+      </p:sp>
+      <p:sp>
+        <p:nvSpPr>
+          <p:cNvPr id="20" name="TextBox 19"/>
+          <p:cNvSpPr txBox="1"/>
+          <p:nvPr/>
+        </p:nvSpPr>
+        <p:spPr>
+          <a:xfrm>
+            <a:off x="822960" y="6446520"/>
+            <a:ext cx="10545775" cy="274320"/>
+          </a:xfrm>
+          <a:prstGeom prst="rect">
+            <a:avLst/>
+          </a:prstGeom>
+          <a:noFill/>
+        </p:spPr>
+        <p:txBody>
+          <a:bodyPr wrap="square" anchor="t">
+            <a:spAutoFit/>
+          </a:bodyPr>
+          <a:lstStyle/>
+          <a:p>
+            <a:r>
+              <a:rPr sz="1000" b="0">
+                <a:solidFill>
+                  <a:srgbClr val="B8B8B8"/>
+                </a:solidFill>
+                <a:latin typeface="Montserrat"/>
+              </a:rPr>
+              <a:t>Команда HTTP 418 · кейс #02 · Мадригал</a:t>
+            </a:r>
+          </a:p>
+        </p:txBody>
+      </p:sp>
+      <p:sp>
+        <p:nvSpPr>
+          <p:cNvPr id="21" name="TextBox 20"/>
+          <p:cNvSpPr txBox="1"/>
+          <p:nvPr/>
+        </p:nvSpPr>
+        <p:spPr>
+          <a:xfrm>
+            <a:off x="822960" y="6446520"/>
+            <a:ext cx="10545775" cy="274320"/>
+          </a:xfrm>
+          <a:prstGeom prst="rect">
+            <a:avLst/>
+          </a:prstGeom>
+          <a:noFill/>
+        </p:spPr>
+        <p:txBody>
+          <a:bodyPr wrap="square" anchor="t">
+            <a:spAutoFit/>
+          </a:bodyPr>
+          <a:lstStyle/>
+          <a:p>
+            <a:pPr algn="r"/>
+            <a:r>
+              <a:rPr sz="1000" b="0">
+                <a:solidFill>
+                  <a:srgbClr val="B8B8B8"/>
+                </a:solidFill>
+                <a:latin typeface="Montserrat"/>
+              </a:rPr>
+              <a:t>6 / 19</a:t>
+            </a:r>
+          </a:p>
+        </p:txBody>
+      </p:sp>
+    </p:spTree>
+  </p:cSld>
+  <p:clrMapOvr>
+    <a:masterClrMapping/>
+  </p:clrMapOvr>
+  <p:timing>
+    <p:tnLst>
+      <p:par>
+        <p:cTn id="1" dur="indefinite" restart="never" nodeType="tmRoot">
+          <p:childTnLst>
+            <p:seq concurrent="1" nextAc="seek">
+              <p:cTn id="2" dur="indefinite" nodeType="mainSeq">
+                <p:childTnLst>
+                  <p:par>
+                    <p:cTn id="3" presetID="10" presetClass="entr" presetSubtype="0" fill="hold" grpId="0" nodeType="clickEffect">
+                      <p:stCondLst>
+                        <p:cond delay="0"/>
+                      </p:stCondLst>
+                      <p:childTnLst>
+                        <p:set>
+                          <p:cBhvr>
+                            <p:cTn id="4" dur="1" fill="hold">
+                              <p:stCondLst>
+                                <p:cond delay="0"/>
+                              </p:stCondLst>
+                            </p:cTn>
+                            <p:tgtEl>
+                              <p:spTgt spid="6"/>
+                            </p:tgtEl>
+                            <p:attrNameLst>
+                              <p:attrName>style.visibility</p:attrName>
+                            </p:attrNameLst>
+                          </p:cBhvr>
+                          <p:to>
+                            <p:strVal val="visible"/>
+                          </p:to>
+                        </p:set>
+                        <p:anim calcmode="lin" valueType="num">
+                          <p:cBhvr additive="base">
+                            <p:cTn id="5" dur="500" fill="hold"/>
+                            <p:tgtEl>
+                              <p:spTgt spid="6"/>
+                            </p:tgtEl>
+                            <p:attrNameLst>
+                              <p:attrName>style.opacity</p:attrName>
+                            </p:attrNameLst>
+                          </p:cBhvr>
+                          <p:tavLst>
+                            <p:tav tm="0">
+                              <p:val>
+                                <p:fltVal val="0"/>
+                              </p:val>
+                            </p:tav>
+                            <p:tav tm="100000">
+                              <p:val>
+                                <p:fltVal val="1"/>
+                              </p:val>
+                            </p:tav>
+                          </p:tavLst>
+                        </p:anim>
+                      </p:childTnLst>
+                    </p:cTn>
+                  </p:par>
+                  <p:par>
+                    <p:cTn id="6" presetID="10" presetClass="entr" presetSubtype="0" fill="hold" grpId="0" nodeType="clickEffect">
+                      <p:stCondLst>
+                        <p:cond delay="0"/>
+                      </p:stCondLst>
+                      <p:childTnLst>
+                        <p:set>
+                          <p:cBhvr>
+                            <p:cTn id="7" dur="1" fill="hold">
+                              <p:stCondLst>
+                                <p:cond delay="0"/>
+                              </p:stCondLst>
+                            </p:cTn>
+                            <p:tgtEl>
+                              <p:spTgt spid="9"/>
+                            </p:tgtEl>
+                            <p:attrNameLst>
+                              <p:attrName>style.visibility</p:attrName>
+                            </p:attrNameLst>
+                          </p:cBhvr>
+                          <p:to>
+                            <p:strVal val="visible"/>
+                          </p:to>
+                        </p:set>
+                        <p:anim calcmode="lin" valueType="num">
+                          <p:cBhvr additive="base">
+                            <p:cTn id="8" dur="500" fill="hold"/>
+                            <p:tgtEl>
+                              <p:spTgt spid="9"/>
+                            </p:tgtEl>
+                            <p:attrNameLst>
+                              <p:attrName>style.opacity</p:attrName>
+                            </p:attrNameLst>
+                          </p:cBhvr>
+                          <p:tavLst>
+                            <p:tav tm="0">
+                              <p:val>
+                                <p:fltVal val="0"/>
+                              </p:val>
+                            </p:tav>
+                            <p:tav tm="100000">
+                              <p:val>
+                                <p:fltVal val="1"/>
+                              </p:val>
+                            </p:tav>
+                          </p:tavLst>
+                        </p:anim>
+                      </p:childTnLst>
+                    </p:cTn>
+                  </p:par>
+                  <p:par>
+                    <p:cTn id="9" presetID="10" presetClass="entr" presetSubtype="0" fill="hold" grpId="0" nodeType="clickEffect">
+                      <p:stCondLst>
+                        <p:cond delay="0"/>
+                      </p:stCondLst>
+                      <p:childTnLst>
+                        <p:set>
+                          <p:cBhvr>
+                            <p:cTn id="10" dur="1" fill="hold">
+                              <p:stCondLst>
+                                <p:cond delay="0"/>
+                              </p:stCondLst>
+                            </p:cTn>
+                            <p:tgtEl>
+                              <p:spTgt spid="11"/>
+                            </p:tgtEl>
+                            <p:attrNameLst>
+                              <p:attrName>style.visibility</p:attrName>
+                            </p:attrNameLst>
+                          </p:cBhvr>
+                          <p:to>
+                            <p:strVal val="visible"/>
+                          </p:to>
+                        </p:set>
+                        <p:anim calcmode="lin" valueType="num">
+                          <p:cBhvr additive="base">
+                            <p:cTn id="11" dur="500" fill="hold"/>
+                            <p:tgtEl>
+                              <p:spTgt spid="11"/>
+                            </p:tgtEl>
+                            <p:attrNameLst>
+                              <p:attrName>style.opacity</p:attrName>
+                            </p:attrNameLst>
+                          </p:cBhvr>
+                          <p:tavLst>
+                            <p:tav tm="0">
+                              <p:val>
+                                <p:fltVal val="0"/>
+                              </p:val>
+                            </p:tav>
+                            <p:tav tm="100000">
+                              <p:val>
+                                <p:fltVal val="1"/>
+                              </p:val>
+                            </p:tav>
+                          </p:tavLst>
+                        </p:anim>
+                      </p:childTnLst>
+                    </p:cTn>
+                  </p:par>
+                  <p:par>
+                    <p:cTn id="12" presetID="10" presetClass="entr" presetSubtype="0" fill="hold" grpId="0" nodeType="clickEffect">
+                      <p:stCondLst>
+                        <p:cond delay="0"/>
+                      </p:stCondLst>
+                      <p:childTnLst>
+                        <p:set>
+                          <p:cBhvr>
+                            <p:cTn id="13" dur="1" fill="hold">
+                              <p:stCondLst>
+                                <p:cond delay="0"/>
+                              </p:stCondLst>
+                            </p:cTn>
+                            <p:tgtEl>
+                              <p:spTgt spid="14"/>
+                            </p:tgtEl>
+                            <p:attrNameLst>
+                              <p:attrName>style.visibility</p:attrName>
+                            </p:attrNameLst>
+                          </p:cBhvr>
+                          <p:to>
+                            <p:strVal val="visible"/>
+                          </p:to>
+                        </p:set>
+                        <p:anim calcmode="lin" valueType="num">
+                          <p:cBhvr additive="base">
+                            <p:cTn id="14" dur="500" fill="hold"/>
+                            <p:tgtEl>
+                              <p:spTgt spid="14"/>
+                            </p:tgtEl>
+                            <p:attrNameLst>
+                              <p:attrName>style.opacity</p:attrName>
+                            </p:attrNameLst>
+                          </p:cBhvr>
+                          <p:tavLst>
+                            <p:tav tm="0">
+                              <p:val>
+                                <p:fltVal val="0"/>
+                              </p:val>
+                            </p:tav>
+                            <p:tav tm="100000">
+                              <p:val>
+                                <p:fltVal val="1"/>
+                              </p:val>
+                            </p:tav>
+                          </p:tavLst>
+                        </p:anim>
+                      </p:childTnLst>
+                    </p:cTn>
+                  </p:par>
+                  <p:par>
+                    <p:cTn id="15" presetID="10" presetClass="entr" presetSubtype="0" fill="hold" grpId="0" nodeType="clickEffect">
+                      <p:stCondLst>
+                        <p:cond delay="0"/>
+                      </p:stCondLst>
+                      <p:childTnLst>
+                        <p:set>
+                          <p:cBhvr>
+                            <p:cTn id="16" dur="1" fill="hold">
+                              <p:stCondLst>
+                                <p:cond delay="0"/>
+                              </p:stCondLst>
+                            </p:cTn>
+                            <p:tgtEl>
+                              <p:spTgt spid="16"/>
+                            </p:tgtEl>
+                            <p:attrNameLst>
+                              <p:attrName>style.visibility</p:attrName>
+                            </p:attrNameLst>
+                          </p:cBhvr>
+                          <p:to>
+                            <p:strVal val="visible"/>
+                          </p:to>
+                        </p:set>
+                        <p:anim calcmode="lin" valueType="num">
+                          <p:cBhvr additive="base">
+                            <p:cTn id="17" dur="500" fill="hold"/>
+                            <p:tgtEl>
+                              <p:spTgt spid="16"/>
+                            </p:tgtEl>
+                            <p:attrNameLst>
+                              <p:attrName>style.opacity</p:attrName>
+                            </p:attrNameLst>
+                          </p:cBhvr>
+                          <p:tavLst>
+                            <p:tav tm="0">
+                              <p:val>
+                                <p:fltVal val="0"/>
+                              </p:val>
+                            </p:tav>
+                            <p:tav tm="100000">
+                              <p:val>
+                                <p:fltVal val="1"/>
+                              </p:val>
+                            </p:tav>
+                          </p:tavLst>
+                        </p:anim>
+                      </p:childTnLst>
+                    </p:cTn>
+                  </p:par>
+                </p:childTnLst>
+              </p:cTn>
+            </p:seq>
+          </p:childTnLst>
+        </p:cTn>
+      </p:par>
+    </p:tnLst>
+  </p:timing>
+  <p:transition spd="med" fade="1"/>
+</p:sld>
+</file>
+
+<file path=ppt/slides/slide7.xml><?xml version="1.0" encoding="utf-8"?>
+<p:sld xmlns:a="http://schemas.openxmlformats.org/drawingml/2006/main" xmlns:p="http://schemas.openxmlformats.org/presentationml/2006/main" xmlns:r="http://schemas.openxmlformats.org/officeDocument/2006/relationships">
+  <p:cSld>
+    <p:spTree>
+      <p:nvGrpSpPr>
+        <p:cNvPr id="1" name=""/>
+        <p:cNvGrpSpPr/>
+        <p:nvPr/>
+      </p:nvGrpSpPr>
+      <p:grpSpPr/>
+      <p:sp>
+        <p:nvSpPr>
+          <p:cNvPr id="2" name="Rectangle 1"/>
+          <p:cNvSpPr/>
+          <p:nvPr/>
+        </p:nvSpPr>
+        <p:spPr>
+          <a:xfrm>
+            <a:off x="0" y="0"/>
+            <a:ext cx="12191695" cy="6858000"/>
+          </a:xfrm>
+          <a:prstGeom prst="rect">
+            <a:avLst/>
+          </a:prstGeom>
+          <a:solidFill>
+            <a:srgbClr val="131516"/>
+          </a:solidFill>
+          <a:ln>
+            <a:noFill/>
+          </a:ln>
+          <a:effectLst/>
+        </p:spPr>
+        <p:style>
+          <a:lnRef idx="1">
+            <a:schemeClr val="accent1"/>
+          </a:lnRef>
+          <a:fillRef idx="3">
+            <a:schemeClr val="accent1"/>
+          </a:fillRef>
+          <a:effectRef idx="2">
+            <a:schemeClr val="accent1"/>
+          </a:effectRef>
+          <a:fontRef idx="minor">
+            <a:schemeClr val="lt1"/>
+          </a:fontRef>
+        </p:style>
+        <p:txBody>
+          <a:bodyPr rtlCol="0" anchor="ctr"/>
+          <a:lstStyle/>
+          <a:p>
+            <a:pPr algn="ctr"/>
+          </a:p>
+        </p:txBody>
+      </p:sp>
+      <p:sp>
+        <p:nvSpPr>
+          <p:cNvPr id="3" name="Rectangle 2"/>
+          <p:cNvSpPr/>
+          <p:nvPr/>
+        </p:nvSpPr>
+        <p:spPr>
+          <a:xfrm>
+            <a:off x="0" y="0"/>
+            <a:ext cx="73152" cy="6858000"/>
+          </a:xfrm>
+          <a:prstGeom prst="rect">
+            <a:avLst/>
+          </a:prstGeom>
+          <a:ln>
+            <a:noFill/>
+          </a:ln>
+          <a:effectLst/>
+          <a:gradFill rotWithShape="1">
+            <a:gsLst>
+              <a:gs pos="0">
+                <a:srgbClr val="410913"/>
+              </a:gs>
+              <a:gs pos="50000">
+                <a:srgbClr val="610D1C"/>
+              </a:gs>
+              <a:gs pos="100000">
+                <a:srgbClr val="A2391D"/>
+              </a:gs>
+            </a:gsLst>
+            <a:lin ang="2700000"/>
+          </a:gradFill>
+        </p:spPr>
+        <p:style>
+          <a:lnRef idx="1">
+            <a:schemeClr val="accent1"/>
+          </a:lnRef>
+          <a:fillRef idx="3">
+            <a:schemeClr val="accent1"/>
+          </a:fillRef>
+          <a:effectRef idx="2">
+            <a:schemeClr val="accent1"/>
+          </a:effectRef>
+          <a:fontRef idx="minor">
+            <a:schemeClr val="lt1"/>
+          </a:fontRef>
+        </p:style>
+        <p:txBody>
+          <a:bodyPr rtlCol="0" anchor="ctr"/>
+          <a:lstStyle/>
+          <a:p>
+            <a:pPr algn="ctr"/>
+          </a:p>
+        </p:txBody>
+      </p:sp>
+      <p:sp>
+        <p:nvSpPr>
+          <p:cNvPr id="4" name="TextBox 3"/>
+          <p:cNvSpPr txBox="1"/>
+          <p:nvPr/>
+        </p:nvSpPr>
+        <p:spPr>
+          <a:xfrm>
+            <a:off x="822960" y="457200"/>
+            <a:ext cx="10545775" cy="1051560"/>
+          </a:xfrm>
+          <a:prstGeom prst="rect">
+            <a:avLst/>
+          </a:prstGeom>
+          <a:noFill/>
+        </p:spPr>
+        <p:txBody>
+          <a:bodyPr wrap="square" anchor="t">
+            <a:spAutoFit/>
+          </a:bodyPr>
+          <a:lstStyle/>
+          <a:p>
+            <a:r>
+              <a:rPr sz="3200" b="1">
+                <a:solidFill>
+                  <a:srgbClr val="EDEDED"/>
+                </a:solidFill>
+                <a:latin typeface="Montserrat"/>
+              </a:rPr>
+              <a:t>Каждый байт знает свой пакет</a:t>
+            </a:r>
+          </a:p>
+        </p:txBody>
+      </p:sp>
+      <p:pic>
+        <p:nvPicPr>
+          <p:cNvPr id="5" name="Picture 4" descr="screenshot-provenance.png"/>
+          <p:cNvPicPr>
+            <a:picLocks noChangeAspect="1"/>
+          </p:cNvPicPr>
+          <p:nvPr/>
+        </p:nvPicPr>
+        <p:blipFill>
+          <a:blip r:embed="rId2"/>
+          <a:stretch>
+            <a:fillRect/>
+          </a:stretch>
+        </p:blipFill>
+        <p:spPr>
+          <a:xfrm>
+            <a:off x="822960" y="1691640"/>
+            <a:ext cx="5852160" cy="3840480"/>
+          </a:xfrm>
+          <a:prstGeom prst="rect">
+            <a:avLst/>
+          </a:prstGeom>
+        </p:spPr>
+      </p:pic>
+      <p:sp>
+        <p:nvSpPr>
+          <p:cNvPr id="6" name="Rectangle 5"/>
+          <p:cNvSpPr/>
+          <p:nvPr/>
+        </p:nvSpPr>
+        <p:spPr>
+          <a:xfrm>
+            <a:off x="8046720" y="1691640"/>
+            <a:ext cx="3322015" cy="1234440"/>
+          </a:xfrm>
+          <a:prstGeom prst="rect">
+            <a:avLst/>
+          </a:prstGeom>
+          <a:solidFill>
+            <a:srgbClr val="1D1D1D"/>
+          </a:solidFill>
+          <a:ln>
+            <a:noFill/>
+          </a:ln>
+          <a:effectLst/>
+        </p:spPr>
+        <p:style>
+          <a:lnRef idx="1">
+            <a:schemeClr val="accent1"/>
+          </a:lnRef>
+          <a:fillRef idx="3">
+            <a:schemeClr val="accent1"/>
+          </a:fillRef>
+          <a:effectRef idx="2">
+            <a:schemeClr val="accent1"/>
+          </a:effectRef>
+          <a:fontRef idx="minor">
+            <a:schemeClr val="lt1"/>
+          </a:fontRef>
+        </p:style>
+        <p:txBody>
+          <a:bodyPr rtlCol="0" anchor="ctr"/>
+          <a:lstStyle/>
+          <a:p>
+            <a:pPr algn="ctr"/>
+          </a:p>
+        </p:txBody>
+      </p:sp>
+      <p:sp>
+        <p:nvSpPr>
+          <p:cNvPr id="7" name="TextBox 6"/>
+          <p:cNvSpPr txBox="1"/>
+          <p:nvPr/>
+        </p:nvSpPr>
+        <p:spPr>
+          <a:xfrm>
+            <a:off x="8275320" y="1856232"/>
+            <a:ext cx="2864815" cy="320040"/>
+          </a:xfrm>
+          <a:prstGeom prst="rect">
+            <a:avLst/>
+          </a:prstGeom>
+          <a:noFill/>
+        </p:spPr>
+        <p:txBody>
+          <a:bodyPr wrap="square" anchor="t">
+            <a:spAutoFit/>
+          </a:bodyPr>
+          <a:lstStyle/>
+          <a:p>
+            <a:r>
+              <a:rPr sz="1200" b="1">
+                <a:solidFill>
+                  <a:srgbClr val="A2391D"/>
+                </a:solidFill>
+                <a:latin typeface="Montserrat"/>
+              </a:rPr>
+              <a:t>ПРОИСХОЖДЕНИЕ</a:t>
+            </a:r>
+          </a:p>
+        </p:txBody>
+      </p:sp>
+      <p:sp>
+        <p:nvSpPr>
+          <p:cNvPr id="8" name="TextBox 7"/>
+          <p:cNvSpPr txBox="1"/>
+          <p:nvPr/>
+        </p:nvSpPr>
+        <p:spPr>
+          <a:xfrm>
+            <a:off x="8275320" y="2194560"/>
+            <a:ext cx="2864815" cy="822960"/>
+          </a:xfrm>
+          <a:prstGeom prst="rect">
+            <a:avLst/>
+          </a:prstGeom>
+          <a:noFill/>
+        </p:spPr>
+        <p:txBody>
+          <a:bodyPr wrap="square" anchor="t">
+            <a:spAutoFit/>
+          </a:bodyPr>
+          <a:lstStyle/>
+          <a:p>
+            <a:r>
+              <a:rPr sz="1400" b="0">
+                <a:solidFill>
+                  <a:srgbClr val="EDEDED"/>
+                </a:solidFill>
+                <a:latin typeface="Montserrat"/>
+              </a:rPr>
+              <a:t>Клик по байту связывает его с пакетом, номером последовательности и временем.</a:t>
+            </a:r>
+          </a:p>
+        </p:txBody>
+      </p:sp>
+      <p:sp>
+        <p:nvSpPr>
+          <p:cNvPr id="9" name="Rectangle 8"/>
+          <p:cNvSpPr/>
+          <p:nvPr/>
+        </p:nvSpPr>
+        <p:spPr>
+          <a:xfrm>
+            <a:off x="8046720" y="3063240"/>
+            <a:ext cx="3322015" cy="1234440"/>
+          </a:xfrm>
+          <a:prstGeom prst="rect">
+            <a:avLst/>
+          </a:prstGeom>
+          <a:solidFill>
+            <a:srgbClr val="1D1D1D"/>
+          </a:solidFill>
+          <a:ln>
+            <a:noFill/>
+          </a:ln>
+          <a:effectLst/>
+        </p:spPr>
+        <p:style>
+          <a:lnRef idx="1">
+            <a:schemeClr val="accent1"/>
+          </a:lnRef>
+          <a:fillRef idx="3">
+            <a:schemeClr val="accent1"/>
+          </a:fillRef>
+          <a:effectRef idx="2">
+            <a:schemeClr val="accent1"/>
+          </a:effectRef>
+          <a:fontRef idx="minor">
+            <a:schemeClr val="lt1"/>
+          </a:fontRef>
+        </p:style>
+        <p:txBody>
+          <a:bodyPr rtlCol="0" anchor="ctr"/>
+          <a:lstStyle/>
+          <a:p>
+            <a:pPr algn="ctr"/>
+          </a:p>
+        </p:txBody>
+      </p:sp>
+      <p:sp>
+        <p:nvSpPr>
+          <p:cNvPr id="10" name="Rectangle 9"/>
+          <p:cNvSpPr/>
+          <p:nvPr/>
+        </p:nvSpPr>
+        <p:spPr>
+          <a:xfrm>
+            <a:off x="8046720" y="3063240"/>
+            <a:ext cx="45720" cy="1234440"/>
+          </a:xfrm>
+          <a:prstGeom prst="rect">
+            <a:avLst/>
+          </a:prstGeom>
+          <a:solidFill>
+            <a:srgbClr val="A2391D"/>
+          </a:solidFill>
+          <a:ln>
+            <a:noFill/>
+          </a:ln>
+          <a:effectLst/>
+        </p:spPr>
+        <p:style>
+          <a:lnRef idx="1">
+            <a:schemeClr val="accent1"/>
+          </a:lnRef>
+          <a:fillRef idx="3">
+            <a:schemeClr val="accent1"/>
+          </a:fillRef>
+          <a:effectRef idx="2">
+            <a:schemeClr val="accent1"/>
+          </a:effectRef>
+          <a:fontRef idx="minor">
+            <a:schemeClr val="lt1"/>
+          </a:fontRef>
+        </p:style>
+        <p:txBody>
+          <a:bodyPr rtlCol="0" anchor="ctr"/>
+          <a:lstStyle/>
+          <a:p>
+            <a:pPr algn="ctr"/>
+          </a:p>
+        </p:txBody>
+      </p:sp>
+      <p:sp>
+        <p:nvSpPr>
+          <p:cNvPr id="11" name="TextBox 10"/>
+          <p:cNvSpPr txBox="1"/>
+          <p:nvPr/>
+        </p:nvSpPr>
+        <p:spPr>
+          <a:xfrm>
+            <a:off x="8275320" y="3291840"/>
+            <a:ext cx="2864815" cy="822960"/>
+          </a:xfrm>
+          <a:prstGeom prst="rect">
+            <a:avLst/>
+          </a:prstGeom>
+          <a:noFill/>
+        </p:spPr>
+        <p:txBody>
+          <a:bodyPr wrap="square" anchor="t">
+            <a:spAutoFit/>
+          </a:bodyPr>
+          <a:lstStyle/>
+          <a:p>
+            <a:r>
+              <a:rPr sz="1400" b="0">
+                <a:solidFill>
+                  <a:srgbClr val="EDEDED"/>
+                </a:solidFill>
+                <a:latin typeface="Montserrat"/>
+              </a:rPr>
+              <a:t>packet 3 · seq 1001 · ts 1700000000.004, сессия s1</a:t>
+            </a:r>
+          </a:p>
+        </p:txBody>
+      </p:sp>
+      <p:sp>
+        <p:nvSpPr>
+          <p:cNvPr id="12" name="TextBox 11"/>
+          <p:cNvSpPr txBox="1"/>
+          <p:nvPr/>
+        </p:nvSpPr>
+        <p:spPr>
+          <a:xfrm>
+            <a:off x="822960" y="6446520"/>
+            <a:ext cx="10545775" cy="274320"/>
+          </a:xfrm>
+          <a:prstGeom prst="rect">
+            <a:avLst/>
+          </a:prstGeom>
+          <a:noFill/>
+        </p:spPr>
+        <p:txBody>
+          <a:bodyPr wrap="square" anchor="t">
+            <a:spAutoFit/>
+          </a:bodyPr>
+          <a:lstStyle/>
+          <a:p>
+            <a:r>
+              <a:rPr sz="1000" b="0">
+                <a:solidFill>
+                  <a:srgbClr val="B8B8B8"/>
+                </a:solidFill>
+                <a:latin typeface="Montserrat"/>
+              </a:rPr>
+              <a:t>Команда HTTP 418 · кейс #02 · Мадригал</a:t>
+            </a:r>
+          </a:p>
+        </p:txBody>
+      </p:sp>
+      <p:sp>
+        <p:nvSpPr>
+          <p:cNvPr id="13" name="TextBox 12"/>
+          <p:cNvSpPr txBox="1"/>
+          <p:nvPr/>
+        </p:nvSpPr>
+        <p:spPr>
+          <a:xfrm>
+            <a:off x="822960" y="6446520"/>
+            <a:ext cx="10545775" cy="274320"/>
+          </a:xfrm>
+          <a:prstGeom prst="rect">
+            <a:avLst/>
+          </a:prstGeom>
+          <a:noFill/>
+        </p:spPr>
+        <p:txBody>
+          <a:bodyPr wrap="square" anchor="t">
+            <a:spAutoFit/>
+          </a:bodyPr>
+          <a:lstStyle/>
+          <a:p>
+            <a:pPr algn="r"/>
+            <a:r>
+              <a:rPr sz="1000" b="0">
+                <a:solidFill>
+                  <a:srgbClr val="B8B8B8"/>
+                </a:solidFill>
+                <a:latin typeface="Montserrat"/>
+              </a:rPr>
+              <a:t>7 / 19</a:t>
             </a:r>
           </a:p>
         </p:txBody>
@@ -8897,7 +13761,7 @@
                               </p:stCondLst>
                             </p:cTn>
                             <p:tgtEl>
-                              <p:spTgt spid="7"/>
+                              <p:spTgt spid="10"/>
                             </p:tgtEl>
                             <p:attrNameLst>
                               <p:attrName>style.visibility</p:attrName>
@@ -8911,57 +13775,7 @@
                           <p:cBhvr additive="base">
                             <p:cTn id="11" dur="500" fill="hold"/>
                             <p:tgtEl>
-                              <p:spTgt spid="7"/>
-                            </p:tgtEl>
-                            <p:attrNameLst>
-                              <p:attrName>style.opacity</p:attrName>
-                            </p:attrNameLst>
-                          </p:cBhvr>
-                          <p:tavLst>
-                            <p:tav tm="0">
-                              <p:val>
-                                <p:fltVal val="0"/>
-                              </p:val>
-                            </p:tav>
-                            <p:tav tm="100000">
-                              <p:val>
-                                <p:fltVal val="1"/>
-                              </p:val>
-                            </p:tav>
-                          </p:tavLst>
-                        </p:anim>
-                      </p:childTnLst>
-                    </p:cTn>
-                  </p:par>
-                  <p:par>
-                    <p:cTn id="12" presetID="10" presetClass="entr" presetSubtype="0" fill="hold" grpId="0" nodeType="clickEffect">
-                      <p:stCondLst>
-                        <p:cond delay="0"/>
-                      </p:stCondLst>
-                      <p:childTnLst>
-                        <p:set>
-                          <p:cBhvr>
-                            <p:cTn id="13" dur="1" fill="hold">
-                              <p:stCondLst>
-                                <p:cond delay="0"/>
-                              </p:stCondLst>
-                            </p:cTn>
-                            <p:tgtEl>
-                              <p:spTgt spid="8"/>
-                            </p:tgtEl>
-                            <p:attrNameLst>
-                              <p:attrName>style.visibility</p:attrName>
-                            </p:attrNameLst>
-                          </p:cBhvr>
-                          <p:to>
-                            <p:strVal val="visible"/>
-                          </p:to>
-                        </p:set>
-                        <p:anim calcmode="lin" valueType="num">
-                          <p:cBhvr additive="base">
-                            <p:cTn id="14" dur="500" fill="hold"/>
-                            <p:tgtEl>
-                              <p:spTgt spid="8"/>
+                              <p:spTgt spid="10"/>
                             </p:tgtEl>
                             <p:attrNameLst>
                               <p:attrName>style.opacity</p:attrName>
@@ -8995,921 +13809,6 @@
 </p:sld>
 </file>
 
-<file path=ppt/slides/slide5.xml><?xml version="1.0" encoding="utf-8"?>
-<p:sld xmlns:a="http://schemas.openxmlformats.org/drawingml/2006/main" xmlns:p="http://schemas.openxmlformats.org/presentationml/2006/main" xmlns:r="http://schemas.openxmlformats.org/officeDocument/2006/relationships">
-  <p:cSld>
-    <p:spTree>
-      <p:nvGrpSpPr>
-        <p:cNvPr id="1" name=""/>
-        <p:cNvGrpSpPr/>
-        <p:nvPr/>
-      </p:nvGrpSpPr>
-      <p:grpSpPr/>
-      <p:sp>
-        <p:nvSpPr>
-          <p:cNvPr id="2" name="Rectangle 1"/>
-          <p:cNvSpPr/>
-          <p:nvPr/>
-        </p:nvSpPr>
-        <p:spPr>
-          <a:xfrm>
-            <a:off x="0" y="0"/>
-            <a:ext cx="12191695" cy="6858000"/>
-          </a:xfrm>
-          <a:prstGeom prst="rect">
-            <a:avLst/>
-          </a:prstGeom>
-          <a:solidFill>
-            <a:srgbClr val="0E1011"/>
-          </a:solidFill>
-          <a:ln>
-            <a:noFill/>
-          </a:ln>
-        </p:spPr>
-        <p:style>
-          <a:lnRef idx="1">
-            <a:schemeClr val="accent1"/>
-          </a:lnRef>
-          <a:fillRef idx="3">
-            <a:schemeClr val="accent1"/>
-          </a:fillRef>
-          <a:effectRef idx="2">
-            <a:schemeClr val="accent1"/>
-          </a:effectRef>
-          <a:fontRef idx="minor">
-            <a:schemeClr val="lt1"/>
-          </a:fontRef>
-        </p:style>
-        <p:txBody>
-          <a:bodyPr rtlCol="0" anchor="ctr"/>
-          <a:lstStyle/>
-          <a:p>
-            <a:pPr algn="ctr"/>
-          </a:p>
-        </p:txBody>
-      </p:sp>
-      <p:sp>
-        <p:nvSpPr>
-          <p:cNvPr id="3" name="Rectangle 2"/>
-          <p:cNvSpPr/>
-          <p:nvPr/>
-        </p:nvSpPr>
-        <p:spPr>
-          <a:xfrm>
-            <a:off x="0" y="0"/>
-            <a:ext cx="45720" cy="6858000"/>
-          </a:xfrm>
-          <a:prstGeom prst="rect">
-            <a:avLst/>
-          </a:prstGeom>
-          <a:solidFill>
-            <a:srgbClr val="D0603A"/>
-          </a:solidFill>
-          <a:ln>
-            <a:noFill/>
-          </a:ln>
-        </p:spPr>
-        <p:style>
-          <a:lnRef idx="1">
-            <a:schemeClr val="accent1"/>
-          </a:lnRef>
-          <a:fillRef idx="3">
-            <a:schemeClr val="accent1"/>
-          </a:fillRef>
-          <a:effectRef idx="2">
-            <a:schemeClr val="accent1"/>
-          </a:effectRef>
-          <a:fontRef idx="minor">
-            <a:schemeClr val="lt1"/>
-          </a:fontRef>
-        </p:style>
-        <p:txBody>
-          <a:bodyPr rtlCol="0" anchor="ctr"/>
-          <a:lstStyle/>
-          <a:p>
-            <a:pPr algn="ctr"/>
-          </a:p>
-        </p:txBody>
-      </p:sp>
-      <p:sp>
-        <p:nvSpPr>
-          <p:cNvPr id="4" name="Rectangle 3"/>
-          <p:cNvSpPr/>
-          <p:nvPr/>
-        </p:nvSpPr>
-        <p:spPr>
-          <a:xfrm>
-            <a:off x="685800" y="2194560"/>
-            <a:ext cx="54864" cy="2194560"/>
-          </a:xfrm>
-          <a:prstGeom prst="rect">
-            <a:avLst/>
-          </a:prstGeom>
-          <a:solidFill>
-            <a:srgbClr val="D0603A"/>
-          </a:solidFill>
-          <a:ln>
-            <a:noFill/>
-          </a:ln>
-        </p:spPr>
-        <p:style>
-          <a:lnRef idx="1">
-            <a:schemeClr val="accent1"/>
-          </a:lnRef>
-          <a:fillRef idx="3">
-            <a:schemeClr val="accent1"/>
-          </a:fillRef>
-          <a:effectRef idx="2">
-            <a:schemeClr val="accent1"/>
-          </a:effectRef>
-          <a:fontRef idx="minor">
-            <a:schemeClr val="lt1"/>
-          </a:fontRef>
-        </p:style>
-        <p:txBody>
-          <a:bodyPr rtlCol="0" anchor="ctr"/>
-          <a:lstStyle/>
-          <a:p>
-            <a:pPr algn="ctr"/>
-          </a:p>
-        </p:txBody>
-      </p:sp>
-      <p:sp>
-        <p:nvSpPr>
-          <p:cNvPr id="5" name="TextBox 4"/>
-          <p:cNvSpPr txBox="1"/>
-          <p:nvPr/>
-        </p:nvSpPr>
-        <p:spPr>
-          <a:xfrm>
-            <a:off x="1051560" y="2286000"/>
-            <a:ext cx="11140135" cy="1371600"/>
-          </a:xfrm>
-          <a:prstGeom prst="rect">
-            <a:avLst/>
-          </a:prstGeom>
-          <a:noFill/>
-        </p:spPr>
-        <p:txBody>
-          <a:bodyPr wrap="square" anchor="t">
-            <a:spAutoFit/>
-          </a:bodyPr>
-          <a:lstStyle/>
-          <a:p>
-            <a:r>
-              <a:rPr sz="3400" b="0">
-                <a:solidFill>
-                  <a:srgbClr val="E8E6E3"/>
-                </a:solidFill>
-                <a:latin typeface="Inter"/>
-              </a:rPr>
-              <a:t>Первые дни мы не понимали, где у протокола длина</a:t>
-            </a:r>
-          </a:p>
-        </p:txBody>
-      </p:sp>
-      <p:sp>
-        <p:nvSpPr>
-          <p:cNvPr id="6" name="TextBox 5"/>
-          <p:cNvSpPr txBox="1"/>
-          <p:nvPr/>
-        </p:nvSpPr>
-        <p:spPr>
-          <a:xfrm>
-            <a:off x="1051560" y="3566160"/>
-            <a:ext cx="11140135" cy="822960"/>
-          </a:xfrm>
-          <a:prstGeom prst="rect">
-            <a:avLst/>
-          </a:prstGeom>
-          <a:noFill/>
-        </p:spPr>
-        <p:txBody>
-          <a:bodyPr wrap="square" anchor="t">
-            <a:spAutoFit/>
-          </a:bodyPr>
-          <a:lstStyle/>
-          <a:p>
-            <a:r>
-              <a:rPr sz="1800" b="0">
-                <a:solidFill>
-                  <a:srgbClr val="A8A29E"/>
-                </a:solidFill>
-                <a:latin typeface="Inter"/>
-              </a:rPr>
-              <a:t>Смещение поля длины оказалось на четыре байта позже, чем мы считали</a:t>
-            </a:r>
-          </a:p>
-        </p:txBody>
-      </p:sp>
-      <p:sp>
-        <p:nvSpPr>
-          <p:cNvPr id="7" name="TextBox 6"/>
-          <p:cNvSpPr txBox="1"/>
-          <p:nvPr/>
-        </p:nvSpPr>
-        <p:spPr>
-          <a:xfrm>
-            <a:off x="685800" y="6446520"/>
-            <a:ext cx="10820095" cy="274320"/>
-          </a:xfrm>
-          <a:prstGeom prst="rect">
-            <a:avLst/>
-          </a:prstGeom>
-          <a:noFill/>
-        </p:spPr>
-        <p:txBody>
-          <a:bodyPr wrap="square" anchor="t">
-            <a:spAutoFit/>
-          </a:bodyPr>
-          <a:lstStyle/>
-          <a:p>
-            <a:r>
-              <a:rPr sz="900" b="0">
-                <a:solidFill>
-                  <a:srgbClr val="A8A29E"/>
-                </a:solidFill>
-                <a:latin typeface="Inter"/>
-              </a:rPr>
-              <a:t>Команда HTTP 418 · кейс #02 · Мадригал</a:t>
-            </a:r>
-          </a:p>
-        </p:txBody>
-      </p:sp>
-      <p:sp>
-        <p:nvSpPr>
-          <p:cNvPr id="8" name="TextBox 7"/>
-          <p:cNvSpPr txBox="1"/>
-          <p:nvPr/>
-        </p:nvSpPr>
-        <p:spPr>
-          <a:xfrm>
-            <a:off x="685800" y="6446520"/>
-            <a:ext cx="10820095" cy="274320"/>
-          </a:xfrm>
-          <a:prstGeom prst="rect">
-            <a:avLst/>
-          </a:prstGeom>
-          <a:noFill/>
-        </p:spPr>
-        <p:txBody>
-          <a:bodyPr wrap="square" anchor="t">
-            <a:spAutoFit/>
-          </a:bodyPr>
-          <a:lstStyle/>
-          <a:p>
-            <a:pPr algn="r"/>
-            <a:r>
-              <a:rPr sz="900" b="0">
-                <a:solidFill>
-                  <a:srgbClr val="A8A29E"/>
-                </a:solidFill>
-                <a:latin typeface="Inter"/>
-              </a:rPr>
-              <a:t>5 / 19</a:t>
-            </a:r>
-          </a:p>
-        </p:txBody>
-      </p:sp>
-    </p:spTree>
-  </p:cSld>
-  <p:clrMapOvr>
-    <a:masterClrMapping/>
-  </p:clrMapOvr>
-  <p:timing>
-    <p:tnLst>
-      <p:par>
-        <p:cTn id="1" dur="indefinite" restart="never" nodeType="tmRoot">
-          <p:childTnLst>
-            <p:seq concurrent="1" nextAc="seek">
-              <p:cTn id="2" dur="indefinite" nodeType="mainSeq">
-                <p:childTnLst>
-                  <p:par>
-                    <p:cTn id="3" presetID="10" presetClass="entr" presetSubtype="0" fill="hold" grpId="0" nodeType="clickEffect">
-                      <p:stCondLst>
-                        <p:cond delay="0"/>
-                      </p:stCondLst>
-                      <p:childTnLst>
-                        <p:set>
-                          <p:cBhvr>
-                            <p:cTn id="4" dur="1" fill="hold">
-                              <p:stCondLst>
-                                <p:cond delay="0"/>
-                              </p:stCondLst>
-                            </p:cTn>
-                            <p:tgtEl>
-                              <p:spTgt spid="5"/>
-                            </p:tgtEl>
-                            <p:attrNameLst>
-                              <p:attrName>style.visibility</p:attrName>
-                            </p:attrNameLst>
-                          </p:cBhvr>
-                          <p:to>
-                            <p:strVal val="visible"/>
-                          </p:to>
-                        </p:set>
-                        <p:anim calcmode="lin" valueType="num">
-                          <p:cBhvr additive="base">
-                            <p:cTn id="5" dur="500" fill="hold"/>
-                            <p:tgtEl>
-                              <p:spTgt spid="5"/>
-                            </p:tgtEl>
-                            <p:attrNameLst>
-                              <p:attrName>style.opacity</p:attrName>
-                            </p:attrNameLst>
-                          </p:cBhvr>
-                          <p:tavLst>
-                            <p:tav tm="0">
-                              <p:val>
-                                <p:fltVal val="0"/>
-                              </p:val>
-                            </p:tav>
-                            <p:tav tm="100000">
-                              <p:val>
-                                <p:fltVal val="1"/>
-                              </p:val>
-                            </p:tav>
-                          </p:tavLst>
-                        </p:anim>
-                      </p:childTnLst>
-                    </p:cTn>
-                  </p:par>
-                </p:childTnLst>
-              </p:cTn>
-            </p:seq>
-          </p:childTnLst>
-        </p:cTn>
-      </p:par>
-    </p:tnLst>
-  </p:timing>
-  <p:transition spd="med" fade="1"/>
-</p:sld>
-</file>
-
-<file path=ppt/slides/slide6.xml><?xml version="1.0" encoding="utf-8"?>
-<p:sld xmlns:a="http://schemas.openxmlformats.org/drawingml/2006/main" xmlns:p="http://schemas.openxmlformats.org/presentationml/2006/main" xmlns:r="http://schemas.openxmlformats.org/officeDocument/2006/relationships">
-  <p:cSld>
-    <p:spTree>
-      <p:nvGrpSpPr>
-        <p:cNvPr id="1" name=""/>
-        <p:cNvGrpSpPr/>
-        <p:nvPr/>
-      </p:nvGrpSpPr>
-      <p:grpSpPr/>
-      <p:sp>
-        <p:nvSpPr>
-          <p:cNvPr id="2" name="Rectangle 1"/>
-          <p:cNvSpPr/>
-          <p:nvPr/>
-        </p:nvSpPr>
-        <p:spPr>
-          <a:xfrm>
-            <a:off x="0" y="0"/>
-            <a:ext cx="12191695" cy="6858000"/>
-          </a:xfrm>
-          <a:prstGeom prst="rect">
-            <a:avLst/>
-          </a:prstGeom>
-          <a:solidFill>
-            <a:srgbClr val="0E1011"/>
-          </a:solidFill>
-          <a:ln>
-            <a:noFill/>
-          </a:ln>
-        </p:spPr>
-        <p:style>
-          <a:lnRef idx="1">
-            <a:schemeClr val="accent1"/>
-          </a:lnRef>
-          <a:fillRef idx="3">
-            <a:schemeClr val="accent1"/>
-          </a:fillRef>
-          <a:effectRef idx="2">
-            <a:schemeClr val="accent1"/>
-          </a:effectRef>
-          <a:fontRef idx="minor">
-            <a:schemeClr val="lt1"/>
-          </a:fontRef>
-        </p:style>
-        <p:txBody>
-          <a:bodyPr rtlCol="0" anchor="ctr"/>
-          <a:lstStyle/>
-          <a:p>
-            <a:pPr algn="ctr"/>
-          </a:p>
-        </p:txBody>
-      </p:sp>
-      <p:sp>
-        <p:nvSpPr>
-          <p:cNvPr id="3" name="Rectangle 2"/>
-          <p:cNvSpPr/>
-          <p:nvPr/>
-        </p:nvSpPr>
-        <p:spPr>
-          <a:xfrm>
-            <a:off x="0" y="0"/>
-            <a:ext cx="45720" cy="6858000"/>
-          </a:xfrm>
-          <a:prstGeom prst="rect">
-            <a:avLst/>
-          </a:prstGeom>
-          <a:solidFill>
-            <a:srgbClr val="D0603A"/>
-          </a:solidFill>
-          <a:ln>
-            <a:noFill/>
-          </a:ln>
-        </p:spPr>
-        <p:style>
-          <a:lnRef idx="1">
-            <a:schemeClr val="accent1"/>
-          </a:lnRef>
-          <a:fillRef idx="3">
-            <a:schemeClr val="accent1"/>
-          </a:fillRef>
-          <a:effectRef idx="2">
-            <a:schemeClr val="accent1"/>
-          </a:effectRef>
-          <a:fontRef idx="minor">
-            <a:schemeClr val="lt1"/>
-          </a:fontRef>
-        </p:style>
-        <p:txBody>
-          <a:bodyPr rtlCol="0" anchor="ctr"/>
-          <a:lstStyle/>
-          <a:p>
-            <a:pPr algn="ctr"/>
-          </a:p>
-        </p:txBody>
-      </p:sp>
-      <p:sp>
-        <p:nvSpPr>
-          <p:cNvPr id="4" name="TextBox 3"/>
-          <p:cNvSpPr txBox="1"/>
-          <p:nvPr/>
-        </p:nvSpPr>
-        <p:spPr>
-          <a:xfrm>
-            <a:off x="685800" y="457200"/>
-            <a:ext cx="10820095" cy="960120"/>
-          </a:xfrm>
-          <a:prstGeom prst="rect">
-            <a:avLst/>
-          </a:prstGeom>
-          <a:noFill/>
-        </p:spPr>
-        <p:txBody>
-          <a:bodyPr wrap="square" anchor="t">
-            <a:spAutoFit/>
-          </a:bodyPr>
-          <a:lstStyle/>
-          <a:p>
-            <a:r>
-              <a:rPr sz="3000" b="1">
-                <a:solidFill>
-                  <a:srgbClr val="E8E6E3"/>
-                </a:solidFill>
-                <a:latin typeface="Inter"/>
-              </a:rPr>
-              <a:t>Три модуля связаны форматами, а не вызовами</a:t>
-            </a:r>
-          </a:p>
-        </p:txBody>
-      </p:sp>
-      <p:pic>
-        <p:nvPicPr>
-          <p:cNvPr id="5" name="Picture 4" descr="architecture.png"/>
-          <p:cNvPicPr>
-            <a:picLocks noChangeAspect="1"/>
-          </p:cNvPicPr>
-          <p:nvPr/>
-        </p:nvPicPr>
-        <p:blipFill>
-          <a:blip r:embed="rId2"/>
-          <a:stretch>
-            <a:fillRect/>
-          </a:stretch>
-        </p:blipFill>
-        <p:spPr>
-          <a:xfrm>
-            <a:off x="685800" y="1600200"/>
-            <a:ext cx="10820095" cy="3833405"/>
-          </a:xfrm>
-          <a:prstGeom prst="rect">
-            <a:avLst/>
-          </a:prstGeom>
-        </p:spPr>
-      </p:pic>
-      <p:sp>
-        <p:nvSpPr>
-          <p:cNvPr id="6" name="TextBox 5"/>
-          <p:cNvSpPr txBox="1"/>
-          <p:nvPr/>
-        </p:nvSpPr>
-        <p:spPr>
-          <a:xfrm>
-            <a:off x="685800" y="6446520"/>
-            <a:ext cx="10820095" cy="274320"/>
-          </a:xfrm>
-          <a:prstGeom prst="rect">
-            <a:avLst/>
-          </a:prstGeom>
-          <a:noFill/>
-        </p:spPr>
-        <p:txBody>
-          <a:bodyPr wrap="square" anchor="t">
-            <a:spAutoFit/>
-          </a:bodyPr>
-          <a:lstStyle/>
-          <a:p>
-            <a:r>
-              <a:rPr sz="900" b="0">
-                <a:solidFill>
-                  <a:srgbClr val="A8A29E"/>
-                </a:solidFill>
-                <a:latin typeface="Inter"/>
-              </a:rPr>
-              <a:t>Команда HTTP 418 · кейс #02 · Мадригал</a:t>
-            </a:r>
-          </a:p>
-        </p:txBody>
-      </p:sp>
-      <p:sp>
-        <p:nvSpPr>
-          <p:cNvPr id="7" name="TextBox 6"/>
-          <p:cNvSpPr txBox="1"/>
-          <p:nvPr/>
-        </p:nvSpPr>
-        <p:spPr>
-          <a:xfrm>
-            <a:off x="685800" y="6446520"/>
-            <a:ext cx="10820095" cy="274320"/>
-          </a:xfrm>
-          <a:prstGeom prst="rect">
-            <a:avLst/>
-          </a:prstGeom>
-          <a:noFill/>
-        </p:spPr>
-        <p:txBody>
-          <a:bodyPr wrap="square" anchor="t">
-            <a:spAutoFit/>
-          </a:bodyPr>
-          <a:lstStyle/>
-          <a:p>
-            <a:pPr algn="r"/>
-            <a:r>
-              <a:rPr sz="900" b="0">
-                <a:solidFill>
-                  <a:srgbClr val="A8A29E"/>
-                </a:solidFill>
-                <a:latin typeface="Inter"/>
-              </a:rPr>
-              <a:t>6 / 19</a:t>
-            </a:r>
-          </a:p>
-        </p:txBody>
-      </p:sp>
-    </p:spTree>
-  </p:cSld>
-  <p:clrMapOvr>
-    <a:masterClrMapping/>
-  </p:clrMapOvr>
-  <p:timing>
-    <p:tnLst>
-      <p:par>
-        <p:cTn id="1" dur="indefinite" restart="never" nodeType="tmRoot">
-          <p:childTnLst>
-            <p:seq concurrent="1" nextAc="seek">
-              <p:cTn id="2" dur="indefinite" nodeType="mainSeq">
-                <p:childTnLst>
-                  <p:par>
-                    <p:cTn id="3" presetID="22" presetClass="entr" presetSubtype="8" fill="hold" grpId="0" nodeType="clickEffect">
-                      <p:stCondLst>
-                        <p:cond delay="0"/>
-                      </p:stCondLst>
-                      <p:childTnLst>
-                        <p:set>
-                          <p:cBhvr>
-                            <p:cTn id="4" dur="1" fill="hold">
-                              <p:stCondLst>
-                                <p:cond delay="0"/>
-                              </p:stCondLst>
-                            </p:cTn>
-                            <p:tgtEl>
-                              <p:spTgt spid="5"/>
-                            </p:tgtEl>
-                            <p:attrNameLst>
-                              <p:attrName>style.visibility</p:attrName>
-                            </p:attrNameLst>
-                          </p:cBhvr>
-                          <p:to>
-                            <p:strVal val="visible"/>
-                          </p:to>
-                        </p:set>
-                        <p:anim calcmode="lin" valueType="num">
-                          <p:cBhvr additive="base">
-                            <p:cTn id="5" dur="700" fill="hold"/>
-                            <p:tgtEl>
-                              <p:spTgt spid="5"/>
-                            </p:tgtEl>
-                            <p:attrNameLst>
-                              <p:attrName>ppt_w</p:attrName>
-                            </p:attrNameLst>
-                          </p:cBhvr>
-                          <p:tavLst>
-                            <p:tav tm="0">
-                              <p:val>
-                                <p:fltVal val="0"/>
-                              </p:val>
-                            </p:tav>
-                            <p:tav tm="100000">
-                              <p:val>
-                                <p:fltVal val="1"/>
-                              </p:val>
-                            </p:tav>
-                          </p:tavLst>
-                        </p:anim>
-                      </p:childTnLst>
-                    </p:cTn>
-                  </p:par>
-                </p:childTnLst>
-              </p:cTn>
-            </p:seq>
-          </p:childTnLst>
-        </p:cTn>
-      </p:par>
-    </p:tnLst>
-  </p:timing>
-  <p:transition spd="med" fade="1"/>
-</p:sld>
-</file>
-
-<file path=ppt/slides/slide7.xml><?xml version="1.0" encoding="utf-8"?>
-<p:sld xmlns:a="http://schemas.openxmlformats.org/drawingml/2006/main" xmlns:p="http://schemas.openxmlformats.org/presentationml/2006/main" xmlns:r="http://schemas.openxmlformats.org/officeDocument/2006/relationships">
-  <p:cSld>
-    <p:spTree>
-      <p:nvGrpSpPr>
-        <p:cNvPr id="1" name=""/>
-        <p:cNvGrpSpPr/>
-        <p:nvPr/>
-      </p:nvGrpSpPr>
-      <p:grpSpPr/>
-      <p:sp>
-        <p:nvSpPr>
-          <p:cNvPr id="2" name="Rectangle 1"/>
-          <p:cNvSpPr/>
-          <p:nvPr/>
-        </p:nvSpPr>
-        <p:spPr>
-          <a:xfrm>
-            <a:off x="0" y="0"/>
-            <a:ext cx="12191695" cy="6858000"/>
-          </a:xfrm>
-          <a:prstGeom prst="rect">
-            <a:avLst/>
-          </a:prstGeom>
-          <a:solidFill>
-            <a:srgbClr val="0E1011"/>
-          </a:solidFill>
-          <a:ln>
-            <a:noFill/>
-          </a:ln>
-        </p:spPr>
-        <p:style>
-          <a:lnRef idx="1">
-            <a:schemeClr val="accent1"/>
-          </a:lnRef>
-          <a:fillRef idx="3">
-            <a:schemeClr val="accent1"/>
-          </a:fillRef>
-          <a:effectRef idx="2">
-            <a:schemeClr val="accent1"/>
-          </a:effectRef>
-          <a:fontRef idx="minor">
-            <a:schemeClr val="lt1"/>
-          </a:fontRef>
-        </p:style>
-        <p:txBody>
-          <a:bodyPr rtlCol="0" anchor="ctr"/>
-          <a:lstStyle/>
-          <a:p>
-            <a:pPr algn="ctr"/>
-          </a:p>
-        </p:txBody>
-      </p:sp>
-      <p:sp>
-        <p:nvSpPr>
-          <p:cNvPr id="3" name="Rectangle 2"/>
-          <p:cNvSpPr/>
-          <p:nvPr/>
-        </p:nvSpPr>
-        <p:spPr>
-          <a:xfrm>
-            <a:off x="0" y="0"/>
-            <a:ext cx="45720" cy="6858000"/>
-          </a:xfrm>
-          <a:prstGeom prst="rect">
-            <a:avLst/>
-          </a:prstGeom>
-          <a:solidFill>
-            <a:srgbClr val="D0603A"/>
-          </a:solidFill>
-          <a:ln>
-            <a:noFill/>
-          </a:ln>
-        </p:spPr>
-        <p:style>
-          <a:lnRef idx="1">
-            <a:schemeClr val="accent1"/>
-          </a:lnRef>
-          <a:fillRef idx="3">
-            <a:schemeClr val="accent1"/>
-          </a:fillRef>
-          <a:effectRef idx="2">
-            <a:schemeClr val="accent1"/>
-          </a:effectRef>
-          <a:fontRef idx="minor">
-            <a:schemeClr val="lt1"/>
-          </a:fontRef>
-        </p:style>
-        <p:txBody>
-          <a:bodyPr rtlCol="0" anchor="ctr"/>
-          <a:lstStyle/>
-          <a:p>
-            <a:pPr algn="ctr"/>
-          </a:p>
-        </p:txBody>
-      </p:sp>
-      <p:sp>
-        <p:nvSpPr>
-          <p:cNvPr id="4" name="TextBox 3"/>
-          <p:cNvSpPr txBox="1"/>
-          <p:nvPr/>
-        </p:nvSpPr>
-        <p:spPr>
-          <a:xfrm>
-            <a:off x="685800" y="457200"/>
-            <a:ext cx="10820095" cy="960120"/>
-          </a:xfrm>
-          <a:prstGeom prst="rect">
-            <a:avLst/>
-          </a:prstGeom>
-          <a:noFill/>
-        </p:spPr>
-        <p:txBody>
-          <a:bodyPr wrap="square" anchor="t">
-            <a:spAutoFit/>
-          </a:bodyPr>
-          <a:lstStyle/>
-          <a:p>
-            <a:r>
-              <a:rPr sz="3000" b="1">
-                <a:solidFill>
-                  <a:srgbClr val="E8E6E3"/>
-                </a:solidFill>
-                <a:latin typeface="Inter"/>
-              </a:rPr>
-              <a:t>Каждый байт знает свой пакет</a:t>
-            </a:r>
-          </a:p>
-        </p:txBody>
-      </p:sp>
-      <p:pic>
-        <p:nvPicPr>
-          <p:cNvPr id="5" name="Picture 4" descr="09_provenance.png"/>
-          <p:cNvPicPr>
-            <a:picLocks noChangeAspect="1"/>
-          </p:cNvPicPr>
-          <p:nvPr/>
-        </p:nvPicPr>
-        <p:blipFill>
-          <a:blip r:embed="rId2"/>
-          <a:stretch>
-            <a:fillRect/>
-          </a:stretch>
-        </p:blipFill>
-        <p:spPr>
-          <a:xfrm>
-            <a:off x="685800" y="1600200"/>
-            <a:ext cx="6990080" cy="3931920"/>
-          </a:xfrm>
-          <a:prstGeom prst="rect">
-            <a:avLst/>
-          </a:prstGeom>
-        </p:spPr>
-      </p:pic>
-      <p:sp>
-        <p:nvSpPr>
-          <p:cNvPr id="6" name="TextBox 5"/>
-          <p:cNvSpPr txBox="1"/>
-          <p:nvPr/>
-        </p:nvSpPr>
-        <p:spPr>
-          <a:xfrm>
-            <a:off x="685800" y="5989320"/>
-            <a:ext cx="10820095" cy="365760"/>
-          </a:xfrm>
-          <a:prstGeom prst="rect">
-            <a:avLst/>
-          </a:prstGeom>
-          <a:noFill/>
-        </p:spPr>
-        <p:txBody>
-          <a:bodyPr wrap="square" anchor="t">
-            <a:spAutoFit/>
-          </a:bodyPr>
-          <a:lstStyle/>
-          <a:p>
-            <a:r>
-              <a:rPr sz="1100" b="0">
-                <a:solidFill>
-                  <a:srgbClr val="A8A29E"/>
-                </a:solidFill>
-                <a:latin typeface="Inter"/>
-              </a:rPr>
-              <a:t>Клик по байту: packet 3 · seq 1001 · ts 1700000000.004</a:t>
-            </a:r>
-          </a:p>
-        </p:txBody>
-      </p:sp>
-      <p:sp>
-        <p:nvSpPr>
-          <p:cNvPr id="7" name="TextBox 6"/>
-          <p:cNvSpPr txBox="1"/>
-          <p:nvPr/>
-        </p:nvSpPr>
-        <p:spPr>
-          <a:xfrm>
-            <a:off x="685800" y="6446520"/>
-            <a:ext cx="10820095" cy="274320"/>
-          </a:xfrm>
-          <a:prstGeom prst="rect">
-            <a:avLst/>
-          </a:prstGeom>
-          <a:noFill/>
-        </p:spPr>
-        <p:txBody>
-          <a:bodyPr wrap="square" anchor="t">
-            <a:spAutoFit/>
-          </a:bodyPr>
-          <a:lstStyle/>
-          <a:p>
-            <a:r>
-              <a:rPr sz="900" b="0">
-                <a:solidFill>
-                  <a:srgbClr val="A8A29E"/>
-                </a:solidFill>
-                <a:latin typeface="Inter"/>
-              </a:rPr>
-              <a:t>Команда HTTP 418 · кейс #02 · Мадригал</a:t>
-            </a:r>
-          </a:p>
-        </p:txBody>
-      </p:sp>
-      <p:sp>
-        <p:nvSpPr>
-          <p:cNvPr id="8" name="TextBox 7"/>
-          <p:cNvSpPr txBox="1"/>
-          <p:nvPr/>
-        </p:nvSpPr>
-        <p:spPr>
-          <a:xfrm>
-            <a:off x="685800" y="6446520"/>
-            <a:ext cx="10820095" cy="274320"/>
-          </a:xfrm>
-          <a:prstGeom prst="rect">
-            <a:avLst/>
-          </a:prstGeom>
-          <a:noFill/>
-        </p:spPr>
-        <p:txBody>
-          <a:bodyPr wrap="square" anchor="t">
-            <a:spAutoFit/>
-          </a:bodyPr>
-          <a:lstStyle/>
-          <a:p>
-            <a:pPr algn="r"/>
-            <a:r>
-              <a:rPr sz="900" b="0">
-                <a:solidFill>
-                  <a:srgbClr val="A8A29E"/>
-                </a:solidFill>
-                <a:latin typeface="Inter"/>
-              </a:rPr>
-              <a:t>7 / 19</a:t>
-            </a:r>
-          </a:p>
-        </p:txBody>
-      </p:sp>
-    </p:spTree>
-  </p:cSld>
-  <p:clrMapOvr>
-    <a:masterClrMapping/>
-  </p:clrMapOvr>
-  <p:transition spd="med" fade="1"/>
-</p:sld>
-</file>
-
 <file path=ppt/slides/slide8.xml><?xml version="1.0" encoding="utf-8"?>
 <p:sld xmlns:a="http://schemas.openxmlformats.org/drawingml/2006/main" xmlns:p="http://schemas.openxmlformats.org/presentationml/2006/main" xmlns:r="http://schemas.openxmlformats.org/officeDocument/2006/relationships">
   <p:cSld>
@@ -9935,11 +13834,12 @@
             <a:avLst/>
           </a:prstGeom>
           <a:solidFill>
-            <a:srgbClr val="0E1011"/>
+            <a:srgbClr val="131516"/>
           </a:solidFill>
           <a:ln>
             <a:noFill/>
           </a:ln>
+          <a:effectLst/>
         </p:spPr>
         <p:style>
           <a:lnRef idx="1">
@@ -9972,17 +13872,29 @@
         <p:spPr>
           <a:xfrm>
             <a:off x="0" y="0"/>
-            <a:ext cx="45720" cy="6858000"/>
-          </a:xfrm>
-          <a:prstGeom prst="rect">
-            <a:avLst/>
-          </a:prstGeom>
-          <a:solidFill>
-            <a:srgbClr val="D0603A"/>
-          </a:solidFill>
+            <a:ext cx="73152" cy="6858000"/>
+          </a:xfrm>
+          <a:prstGeom prst="rect">
+            <a:avLst/>
+          </a:prstGeom>
           <a:ln>
             <a:noFill/>
           </a:ln>
+          <a:effectLst/>
+          <a:gradFill rotWithShape="1">
+            <a:gsLst>
+              <a:gs pos="0">
+                <a:srgbClr val="410913"/>
+              </a:gs>
+              <a:gs pos="50000">
+                <a:srgbClr val="610D1C"/>
+              </a:gs>
+              <a:gs pos="100000">
+                <a:srgbClr val="A2391D"/>
+              </a:gs>
+            </a:gsLst>
+            <a:lin ang="2700000"/>
+          </a:gradFill>
         </p:spPr>
         <p:style>
           <a:lnRef idx="1">
@@ -10014,8 +13926,8 @@
         </p:nvSpPr>
         <p:spPr>
           <a:xfrm>
-            <a:off x="685800" y="457200"/>
-            <a:ext cx="10820095" cy="960120"/>
+            <a:off x="822960" y="457200"/>
+            <a:ext cx="10545775" cy="1051560"/>
           </a:xfrm>
           <a:prstGeom prst="rect">
             <a:avLst/>
@@ -10029,11 +13941,11 @@
           <a:lstStyle/>
           <a:p>
             <a:r>
-              <a:rPr sz="3000" b="1">
+              <a:rPr sz="3200" b="1">
                 <a:solidFill>
-                  <a:srgbClr val="E8E6E3"/>
+                  <a:srgbClr val="EDEDED"/>
                 </a:solidFill>
-                <a:latin typeface="Inter"/>
+                <a:latin typeface="Montserrat"/>
               </a:rPr>
               <a:t>Правило проверяется на всём корпусе сразу</a:t>
             </a:r>
@@ -10042,7 +13954,7 @@
       </p:sp>
       <p:pic>
         <p:nvPicPr>
-          <p:cNvPr id="5" name="Picture 4" descr="07_rule_editor.png"/>
+          <p:cNvPr id="5" name="Picture 4" descr="screenshot-rule.png"/>
           <p:cNvPicPr>
             <a:picLocks noChangeAspect="1"/>
           </p:cNvPicPr>
@@ -10056,8 +13968,8 @@
         </p:blipFill>
         <p:spPr>
           <a:xfrm>
-            <a:off x="685800" y="1600200"/>
-            <a:ext cx="5227167" cy="2940281"/>
+            <a:off x="822960" y="1691640"/>
+            <a:ext cx="2122714" cy="3566160"/>
           </a:xfrm>
           <a:prstGeom prst="rect">
             <a:avLst/>
@@ -10066,7 +13978,7 @@
       </p:pic>
       <p:pic>
         <p:nvPicPr>
-          <p:cNvPr id="6" name="Picture 5" descr="05_validation.png"/>
+          <p:cNvPr id="6" name="Picture 5" descr="screenshot-validation.png"/>
           <p:cNvPicPr>
             <a:picLocks noChangeAspect="1"/>
           </p:cNvPicPr>
@@ -10080,8 +13992,8 @@
         </p:blipFill>
         <p:spPr>
           <a:xfrm>
-            <a:off x="6278727" y="1600200"/>
-            <a:ext cx="5227167" cy="2940281"/>
+            <a:off x="6324447" y="1691640"/>
+            <a:ext cx="1643829" cy="3566160"/>
           </a:xfrm>
           <a:prstGeom prst="rect">
             <a:avLst/>
@@ -10096,8 +14008,8 @@
         </p:nvSpPr>
         <p:spPr>
           <a:xfrm>
-            <a:off x="685800" y="5989320"/>
-            <a:ext cx="10820095" cy="365760"/>
+            <a:off x="822960" y="6035040"/>
+            <a:ext cx="10545775" cy="365760"/>
           </a:xfrm>
           <a:prstGeom prst="rect">
             <a:avLst/>
@@ -10111,11 +14023,11 @@
           <a:lstStyle/>
           <a:p>
             <a:r>
-              <a:rPr sz="1100" b="0">
+              <a:rPr sz="1200" b="0">
                 <a:solidFill>
-                  <a:srgbClr val="A8A29E"/>
+                  <a:srgbClr val="B8B8B8"/>
                 </a:solidFill>
-                <a:latin typeface="Inter"/>
+                <a:latin typeface="Montserrat"/>
               </a:rPr>
               <a:t>Одно правило описывает весь поток; сообщения не перечисляют вручную</a:t>
             </a:r>
@@ -10130,8 +14042,8 @@
         </p:nvSpPr>
         <p:spPr>
           <a:xfrm>
-            <a:off x="685800" y="6446520"/>
-            <a:ext cx="10820095" cy="274320"/>
+            <a:off x="822960" y="6446520"/>
+            <a:ext cx="10545775" cy="274320"/>
           </a:xfrm>
           <a:prstGeom prst="rect">
             <a:avLst/>
@@ -10145,11 +14057,11 @@
           <a:lstStyle/>
           <a:p>
             <a:r>
-              <a:rPr sz="900" b="0">
+              <a:rPr sz="1000" b="0">
                 <a:solidFill>
-                  <a:srgbClr val="A8A29E"/>
+                  <a:srgbClr val="B8B8B8"/>
                 </a:solidFill>
-                <a:latin typeface="Inter"/>
+                <a:latin typeface="Montserrat"/>
               </a:rPr>
               <a:t>Команда HTTP 418 · кейс #02 · Мадригал</a:t>
             </a:r>
@@ -10164,8 +14076,8 @@
         </p:nvSpPr>
         <p:spPr>
           <a:xfrm>
-            <a:off x="685800" y="6446520"/>
-            <a:ext cx="10820095" cy="274320"/>
+            <a:off x="822960" y="6446520"/>
+            <a:ext cx="10545775" cy="274320"/>
           </a:xfrm>
           <a:prstGeom prst="rect">
             <a:avLst/>
@@ -10180,11 +14092,11 @@
           <a:p>
             <a:pPr algn="r"/>
             <a:r>
-              <a:rPr sz="900" b="0">
+              <a:rPr sz="1000" b="0">
                 <a:solidFill>
-                  <a:srgbClr val="A8A29E"/>
+                  <a:srgbClr val="B8B8B8"/>
                 </a:solidFill>
-                <a:latin typeface="Inter"/>
+                <a:latin typeface="Montserrat"/>
               </a:rPr>
               <a:t>8 / 19</a:t>
             </a:r>
@@ -10341,11 +14253,12 @@
             <a:avLst/>
           </a:prstGeom>
           <a:solidFill>
-            <a:srgbClr val="0E1011"/>
+            <a:srgbClr val="131516"/>
           </a:solidFill>
           <a:ln>
             <a:noFill/>
           </a:ln>
+          <a:effectLst/>
         </p:spPr>
         <p:style>
           <a:lnRef idx="1">
@@ -10378,17 +14291,29 @@
         <p:spPr>
           <a:xfrm>
             <a:off x="0" y="0"/>
-            <a:ext cx="45720" cy="6858000"/>
-          </a:xfrm>
-          <a:prstGeom prst="rect">
-            <a:avLst/>
-          </a:prstGeom>
-          <a:solidFill>
-            <a:srgbClr val="D0603A"/>
-          </a:solidFill>
+            <a:ext cx="73152" cy="6858000"/>
+          </a:xfrm>
+          <a:prstGeom prst="rect">
+            <a:avLst/>
+          </a:prstGeom>
           <a:ln>
             <a:noFill/>
           </a:ln>
+          <a:effectLst/>
+          <a:gradFill rotWithShape="1">
+            <a:gsLst>
+              <a:gs pos="0">
+                <a:srgbClr val="410913"/>
+              </a:gs>
+              <a:gs pos="50000">
+                <a:srgbClr val="610D1C"/>
+              </a:gs>
+              <a:gs pos="100000">
+                <a:srgbClr val="A2391D"/>
+              </a:gs>
+            </a:gsLst>
+            <a:lin ang="2700000"/>
+          </a:gradFill>
         </p:spPr>
         <p:style>
           <a:lnRef idx="1">
@@ -10420,8 +14345,8 @@
         </p:nvSpPr>
         <p:spPr>
           <a:xfrm>
-            <a:off x="685800" y="457200"/>
-            <a:ext cx="10820095" cy="960120"/>
+            <a:off x="822960" y="457200"/>
+            <a:ext cx="10545775" cy="1051560"/>
           </a:xfrm>
           <a:prstGeom prst="rect">
             <a:avLst/>
@@ -10435,11 +14360,11 @@
           <a:lstStyle/>
           <a:p>
             <a:r>
-              <a:rPr sz="3000" b="1">
+              <a:rPr sz="3200" b="1">
                 <a:solidFill>
-                  <a:srgbClr val="E8E6E3"/>
+                  <a:srgbClr val="EDEDED"/>
                 </a:solidFill>
-                <a:latin typeface="Inter"/>
+                <a:latin typeface="Montserrat"/>
               </a:rPr>
               <a:t>Контрпример важнее метрики</a:t>
             </a:r>
@@ -10448,7 +14373,7 @@
       </p:sp>
       <p:pic>
         <p:nvPicPr>
-          <p:cNvPr id="5" name="Picture 4" descr="05_validation.png"/>
+          <p:cNvPr id="5" name="Picture 4" descr="screenshot-counterexamples.png"/>
           <p:cNvPicPr>
             <a:picLocks noChangeAspect="1"/>
           </p:cNvPicPr>
@@ -10462,8 +14387,8 @@
         </p:blipFill>
         <p:spPr>
           <a:xfrm>
-            <a:off x="685800" y="1600200"/>
-            <a:ext cx="5303520" cy="2983230"/>
+            <a:off x="822960" y="1691640"/>
+            <a:ext cx="1770278" cy="3840480"/>
           </a:xfrm>
           <a:prstGeom prst="rect">
             <a:avLst/>
@@ -10478,18 +14403,19 @@
         </p:nvSpPr>
         <p:spPr>
           <a:xfrm>
-            <a:off x="6720840" y="1965960"/>
-            <a:ext cx="4785055" cy="1828800"/>
+            <a:off x="8046720" y="1691640"/>
+            <a:ext cx="3322015" cy="1234440"/>
           </a:xfrm>
           <a:prstGeom prst="rect">
             <a:avLst/>
           </a:prstGeom>
           <a:solidFill>
-            <a:srgbClr val="17181A"/>
+            <a:srgbClr val="1D1D1D"/>
           </a:solidFill>
           <a:ln>
             <a:noFill/>
           </a:ln>
+          <a:effectLst/>
         </p:spPr>
         <p:style>
           <a:lnRef idx="1">
@@ -10515,14 +14441,58 @@
       </p:sp>
       <p:sp>
         <p:nvSpPr>
-          <p:cNvPr id="7" name="TextBox 6"/>
+          <p:cNvPr id="7" name="Rectangle 6"/>
+          <p:cNvSpPr/>
+          <p:nvPr/>
+        </p:nvSpPr>
+        <p:spPr>
+          <a:xfrm>
+            <a:off x="8046720" y="1691640"/>
+            <a:ext cx="45720" cy="1234440"/>
+          </a:xfrm>
+          <a:prstGeom prst="rect">
+            <a:avLst/>
+          </a:prstGeom>
+          <a:solidFill>
+            <a:srgbClr val="A2391D"/>
+          </a:solidFill>
+          <a:ln>
+            <a:noFill/>
+          </a:ln>
+          <a:effectLst/>
+        </p:spPr>
+        <p:style>
+          <a:lnRef idx="1">
+            <a:schemeClr val="accent1"/>
+          </a:lnRef>
+          <a:fillRef idx="3">
+            <a:schemeClr val="accent1"/>
+          </a:fillRef>
+          <a:effectRef idx="2">
+            <a:schemeClr val="accent1"/>
+          </a:effectRef>
+          <a:fontRef idx="minor">
+            <a:schemeClr val="lt1"/>
+          </a:fontRef>
+        </p:style>
+        <p:txBody>
+          <a:bodyPr rtlCol="0" anchor="ctr"/>
+          <a:lstStyle/>
+          <a:p>
+            <a:pPr algn="ctr"/>
+          </a:p>
+        </p:txBody>
+      </p:sp>
+      <p:sp>
+        <p:nvSpPr>
+          <p:cNvPr id="8" name="TextBox 7"/>
           <p:cNvSpPr txBox="1"/>
           <p:nvPr/>
         </p:nvSpPr>
         <p:spPr>
           <a:xfrm>
-            <a:off x="6949440" y="2148840"/>
-            <a:ext cx="4327855" cy="1463040"/>
+            <a:off x="8275320" y="1920240"/>
+            <a:ext cx="2864815" cy="822960"/>
           </a:xfrm>
           <a:prstGeom prst="rect">
             <a:avLst/>
@@ -10536,38 +14506,71 @@
           <a:lstStyle/>
           <a:p>
             <a:r>
-              <a:rPr sz="2200" b="0">
-                <a:solidFill>
-                  <a:srgbClr val="D0603A"/>
-                </a:solidFill>
-                <a:latin typeface="JetBrains Mono"/>
-              </a:rPr>
-              <a:t>02 00 00 03 13 00 55</a:t>
-            </a:r>
-          </a:p>
-          <a:p>
-            <a:r>
               <a:rPr sz="1400" b="0">
                 <a:solidFill>
-                  <a:srgbClr val="A8A29E"/>
+                  <a:srgbClr val="EDEDED"/>
                 </a:solidFill>
-                <a:latin typeface="Inter"/>
+                <a:latin typeface="Montserrat"/>
               </a:rPr>
-              <a:t>Команда 2 не входила в ожидаемый набор [1]</a:t>
-            </a:r>
-          </a:p>
-        </p:txBody>
-      </p:sp>
-      <p:sp>
-        <p:nvSpPr>
-          <p:cNvPr id="8" name="TextBox 7"/>
+              <a:t>02 00 00 03 13 00 55  —  команда 2 вне ожидаемого набора [1]</a:t>
+            </a:r>
+          </a:p>
+        </p:txBody>
+      </p:sp>
+      <p:sp>
+        <p:nvSpPr>
+          <p:cNvPr id="9" name="Rectangle 8"/>
+          <p:cNvSpPr/>
+          <p:nvPr/>
+        </p:nvSpPr>
+        <p:spPr>
+          <a:xfrm>
+            <a:off x="8046720" y="3063240"/>
+            <a:ext cx="3322015" cy="1234440"/>
+          </a:xfrm>
+          <a:prstGeom prst="rect">
+            <a:avLst/>
+          </a:prstGeom>
+          <a:solidFill>
+            <a:srgbClr val="1D1D1D"/>
+          </a:solidFill>
+          <a:ln>
+            <a:noFill/>
+          </a:ln>
+          <a:effectLst/>
+        </p:spPr>
+        <p:style>
+          <a:lnRef idx="1">
+            <a:schemeClr val="accent1"/>
+          </a:lnRef>
+          <a:fillRef idx="3">
+            <a:schemeClr val="accent1"/>
+          </a:fillRef>
+          <a:effectRef idx="2">
+            <a:schemeClr val="accent1"/>
+          </a:effectRef>
+          <a:fontRef idx="minor">
+            <a:schemeClr val="lt1"/>
+          </a:fontRef>
+        </p:style>
+        <p:txBody>
+          <a:bodyPr rtlCol="0" anchor="ctr"/>
+          <a:lstStyle/>
+          <a:p>
+            <a:pPr algn="ctr"/>
+          </a:p>
+        </p:txBody>
+      </p:sp>
+      <p:sp>
+        <p:nvSpPr>
+          <p:cNvPr id="10" name="TextBox 9"/>
           <p:cNvSpPr txBox="1"/>
           <p:nvPr/>
         </p:nvSpPr>
         <p:spPr>
           <a:xfrm>
-            <a:off x="685800" y="5989320"/>
-            <a:ext cx="10820095" cy="365760"/>
+            <a:off x="8275320" y="3227832"/>
+            <a:ext cx="2864815" cy="320040"/>
           </a:xfrm>
           <a:prstGeom prst="rect">
             <a:avLst/>
@@ -10581,27 +14584,27 @@
           <a:lstStyle/>
           <a:p>
             <a:r>
-              <a:rPr sz="1100" b="0">
+              <a:rPr sz="1200" b="1">
                 <a:solidFill>
-                  <a:srgbClr val="A8A29E"/>
+                  <a:srgbClr val="A2391D"/>
                 </a:solidFill>
-                <a:latin typeface="Inter"/>
+                <a:latin typeface="Montserrat"/>
               </a:rPr>
-              <a:t>Один такой байт превратил 80 контрпримеров в ноль</a:t>
-            </a:r>
-          </a:p>
-        </p:txBody>
-      </p:sp>
-      <p:sp>
-        <p:nvSpPr>
-          <p:cNvPr id="9" name="TextBox 8"/>
+              <a:t>ОДИН БАЙТ — 80 КОНТРПРИМЕРОВ</a:t>
+            </a:r>
+          </a:p>
+        </p:txBody>
+      </p:sp>
+      <p:sp>
+        <p:nvSpPr>
+          <p:cNvPr id="11" name="TextBox 10"/>
           <p:cNvSpPr txBox="1"/>
           <p:nvPr/>
         </p:nvSpPr>
         <p:spPr>
           <a:xfrm>
-            <a:off x="685800" y="6446520"/>
-            <a:ext cx="10820095" cy="274320"/>
+            <a:off x="8275320" y="3566160"/>
+            <a:ext cx="2864815" cy="822960"/>
           </a:xfrm>
           <a:prstGeom prst="rect">
             <a:avLst/>
@@ -10615,27 +14618,27 @@
           <a:lstStyle/>
           <a:p>
             <a:r>
-              <a:rPr sz="900" b="0">
+              <a:rPr sz="1400" b="0">
                 <a:solidFill>
-                  <a:srgbClr val="A8A29E"/>
+                  <a:srgbClr val="EDEDED"/>
                 </a:solidFill>
-                <a:latin typeface="Inter"/>
+                <a:latin typeface="Montserrat"/>
               </a:rPr>
-              <a:t>Команда HTTP 418 · кейс #02 · Мадригал</a:t>
-            </a:r>
-          </a:p>
-        </p:txBody>
-      </p:sp>
-      <p:sp>
-        <p:nvSpPr>
-          <p:cNvPr id="10" name="TextBox 9"/>
+              <a:t>Все 80 несоответствий v1 сидели на offset 0 в сессиях s2 и s3.</a:t>
+            </a:r>
+          </a:p>
+        </p:txBody>
+      </p:sp>
+      <p:sp>
+        <p:nvSpPr>
+          <p:cNvPr id="12" name="TextBox 11"/>
           <p:cNvSpPr txBox="1"/>
           <p:nvPr/>
         </p:nvSpPr>
         <p:spPr>
           <a:xfrm>
-            <a:off x="685800" y="6446520"/>
-            <a:ext cx="10820095" cy="274320"/>
+            <a:off x="822960" y="6446520"/>
+            <a:ext cx="10545775" cy="274320"/>
           </a:xfrm>
           <a:prstGeom prst="rect">
             <a:avLst/>
@@ -10648,13 +14651,47 @@
           </a:bodyPr>
           <a:lstStyle/>
           <a:p>
+            <a:r>
+              <a:rPr sz="1000" b="0">
+                <a:solidFill>
+                  <a:srgbClr val="B8B8B8"/>
+                </a:solidFill>
+                <a:latin typeface="Montserrat"/>
+              </a:rPr>
+              <a:t>Команда HTTP 418 · кейс #02 · Мадригал</a:t>
+            </a:r>
+          </a:p>
+        </p:txBody>
+      </p:sp>
+      <p:sp>
+        <p:nvSpPr>
+          <p:cNvPr id="13" name="TextBox 12"/>
+          <p:cNvSpPr txBox="1"/>
+          <p:nvPr/>
+        </p:nvSpPr>
+        <p:spPr>
+          <a:xfrm>
+            <a:off x="822960" y="6446520"/>
+            <a:ext cx="10545775" cy="274320"/>
+          </a:xfrm>
+          <a:prstGeom prst="rect">
+            <a:avLst/>
+          </a:prstGeom>
+          <a:noFill/>
+        </p:spPr>
+        <p:txBody>
+          <a:bodyPr wrap="square" anchor="t">
+            <a:spAutoFit/>
+          </a:bodyPr>
+          <a:lstStyle/>
+          <a:p>
             <a:pPr algn="r"/>
             <a:r>
-              <a:rPr sz="900" b="0">
+              <a:rPr sz="1000" b="0">
                 <a:solidFill>
-                  <a:srgbClr val="A8A29E"/>
+                  <a:srgbClr val="B8B8B8"/>
                 </a:solidFill>
-                <a:latin typeface="Inter"/>
+                <a:latin typeface="Montserrat"/>
               </a:rPr>
               <a:t>9 / 19</a:t>
             </a:r>
@@ -10688,7 +14725,7 @@
                               </p:stCondLst>
                             </p:cTn>
                             <p:tgtEl>
-                              <p:spTgt spid="6"/>
+                              <p:spTgt spid="5"/>
                             </p:tgtEl>
                             <p:attrNameLst>
                               <p:attrName>style.visibility</p:attrName>
@@ -10702,7 +14739,107 @@
                           <p:cBhvr additive="base">
                             <p:cTn id="5" dur="500" fill="hold"/>
                             <p:tgtEl>
-                              <p:spTgt spid="6"/>
+                              <p:spTgt spid="5"/>
+                            </p:tgtEl>
+                            <p:attrNameLst>
+                              <p:attrName>style.opacity</p:attrName>
+                            </p:attrNameLst>
+                          </p:cBhvr>
+                          <p:tavLst>
+                            <p:tav tm="0">
+                              <p:val>
+                                <p:fltVal val="0"/>
+                              </p:val>
+                            </p:tav>
+                            <p:tav tm="100000">
+                              <p:val>
+                                <p:fltVal val="1"/>
+                              </p:val>
+                            </p:tav>
+                          </p:tavLst>
+                        </p:anim>
+                      </p:childTnLst>
+                    </p:cTn>
+                  </p:par>
+                  <p:par>
+                    <p:cTn id="6" presetID="10" presetClass="entr" presetSubtype="0" fill="hold" grpId="0" nodeType="clickEffect">
+                      <p:stCondLst>
+                        <p:cond delay="0"/>
+                      </p:stCondLst>
+                      <p:childTnLst>
+                        <p:set>
+                          <p:cBhvr>
+                            <p:cTn id="7" dur="1" fill="hold">
+                              <p:stCondLst>
+                                <p:cond delay="0"/>
+                              </p:stCondLst>
+                            </p:cTn>
+                            <p:tgtEl>
+                              <p:spTgt spid="7"/>
+                            </p:tgtEl>
+                            <p:attrNameLst>
+                              <p:attrName>style.visibility</p:attrName>
+                            </p:attrNameLst>
+                          </p:cBhvr>
+                          <p:to>
+                            <p:strVal val="visible"/>
+                          </p:to>
+                        </p:set>
+                        <p:anim calcmode="lin" valueType="num">
+                          <p:cBhvr additive="base">
+                            <p:cTn id="8" dur="500" fill="hold"/>
+                            <p:tgtEl>
+                              <p:spTgt spid="7"/>
+                            </p:tgtEl>
+                            <p:attrNameLst>
+                              <p:attrName>style.opacity</p:attrName>
+                            </p:attrNameLst>
+                          </p:cBhvr>
+                          <p:tavLst>
+                            <p:tav tm="0">
+                              <p:val>
+                                <p:fltVal val="0"/>
+                              </p:val>
+                            </p:tav>
+                            <p:tav tm="100000">
+                              <p:val>
+                                <p:fltVal val="1"/>
+                              </p:val>
+                            </p:tav>
+                          </p:tavLst>
+                        </p:anim>
+                      </p:childTnLst>
+                    </p:cTn>
+                  </p:par>
+                  <p:par>
+                    <p:cTn id="9" presetID="10" presetClass="entr" presetSubtype="0" fill="hold" grpId="0" nodeType="clickEffect">
+                      <p:stCondLst>
+                        <p:cond delay="0"/>
+                      </p:stCondLst>
+                      <p:childTnLst>
+                        <p:set>
+                          <p:cBhvr>
+                            <p:cTn id="10" dur="1" fill="hold">
+                              <p:stCondLst>
+                                <p:cond delay="0"/>
+                              </p:stCondLst>
+                            </p:cTn>
+                            <p:tgtEl>
+                              <p:spTgt spid="9"/>
+                            </p:tgtEl>
+                            <p:attrNameLst>
+                              <p:attrName>style.visibility</p:attrName>
+                            </p:attrNameLst>
+                          </p:cBhvr>
+                          <p:to>
+                            <p:strVal val="visible"/>
+                          </p:to>
+                        </p:set>
+                        <p:anim calcmode="lin" valueType="num">
+                          <p:cBhvr additive="base">
+                            <p:cTn id="11" dur="500" fill="hold"/>
+                            <p:tgtEl>
+                              <p:spTgt spid="9"/>
                             </p:tgtEl>
                             <p:attrNameLst>
                               <p:attrName>style.opacity</p:attrName>

--- a/presentation/slides.pptx
+++ b/presentation/slides.pptx
@@ -3681,7 +3681,7 @@
             <a:avLst/>
           </a:prstGeom>
           <a:solidFill>
-            <a:srgbClr val="131516"/>
+            <a:srgbClr val="0E1011"/>
           </a:solidFill>
           <a:ln>
             <a:noFill/>
@@ -3814,7 +3814,7 @@
             <a:r>
               <a:rPr sz="1400" b="0">
                 <a:solidFill>
-                  <a:srgbClr val="B8B8B8"/>
+                  <a:srgbClr val="A8A29E"/>
                 </a:solidFill>
                 <a:latin typeface="JetBrains Mono"/>
               </a:rPr>
@@ -3848,9 +3848,9 @@
             <a:r>
               <a:rPr sz="5600" b="1">
                 <a:solidFill>
-                  <a:srgbClr val="EDEDED"/>
-                </a:solidFill>
-                <a:latin typeface="Montserrat"/>
+                  <a:srgbClr val="F4F1EC"/>
+                </a:solidFill>
+                <a:latin typeface="Tektur"/>
               </a:rPr>
               <a:t>Лаборатория протоколов</a:t>
             </a:r>
@@ -3882,7 +3882,7 @@
             <a:r>
               <a:rPr sz="2200" b="0">
                 <a:solidFill>
-                  <a:srgbClr val="EDEDED"/>
+                  <a:srgbClr val="F4F1EC"/>
                 </a:solidFill>
                 <a:latin typeface="Montserrat"/>
               </a:rPr>
@@ -3906,7 +3906,7 @@
             <a:avLst/>
           </a:prstGeom>
           <a:solidFill>
-            <a:srgbClr val="A2391D"/>
+            <a:srgbClr val="D0603A"/>
           </a:solidFill>
           <a:ln>
             <a:noFill/>
@@ -3960,7 +3960,7 @@
             <a:r>
               <a:rPr sz="1500" b="0">
                 <a:solidFill>
-                  <a:srgbClr val="B8B8B8"/>
+                  <a:srgbClr val="A8A29E"/>
                 </a:solidFill>
                 <a:latin typeface="JetBrains Mono"/>
               </a:rPr>
@@ -4069,7 +4069,7 @@
             <a:avLst/>
           </a:prstGeom>
           <a:solidFill>
-            <a:srgbClr val="131516"/>
+            <a:srgbClr val="0E1011"/>
           </a:solidFill>
           <a:ln>
             <a:noFill/>
@@ -4178,9 +4178,9 @@
             <a:r>
               <a:rPr sz="7200" b="1">
                 <a:solidFill>
-                  <a:srgbClr val="A2391D"/>
-                </a:solidFill>
-                <a:latin typeface="Montserrat"/>
+                  <a:srgbClr val="D0603A"/>
+                </a:solidFill>
+                <a:latin typeface="Tektur"/>
               </a:rPr>
               <a:t>01</a:t>
             </a:r>
@@ -4212,9 +4212,9 @@
             <a:r>
               <a:rPr sz="4000" b="1">
                 <a:solidFill>
-                  <a:srgbClr val="EDEDED"/>
-                </a:solidFill>
-                <a:latin typeface="Montserrat"/>
+                  <a:srgbClr val="F4F1EC"/>
+                </a:solidFill>
+                <a:latin typeface="Tektur"/>
               </a:rPr>
               <a:t>Что получилось</a:t>
             </a:r>
@@ -4301,7 +4301,7 @@
             <a:r>
               <a:rPr sz="1600" b="0">
                 <a:solidFill>
-                  <a:srgbClr val="B8B8B8"/>
+                  <a:srgbClr val="A8A29E"/>
                 </a:solidFill>
                 <a:latin typeface="Montserrat"/>
               </a:rPr>
@@ -4319,7 +4319,7 @@
         <p:spPr>
           <a:xfrm>
             <a:off x="822960" y="6446520"/>
-            <a:ext cx="10545775" cy="274320"/>
+            <a:ext cx="3840480" cy="274320"/>
           </a:xfrm>
           <a:prstGeom prst="rect">
             <a:avLst/>
@@ -4335,7 +4335,7 @@
             <a:r>
               <a:rPr sz="1000" b="0">
                 <a:solidFill>
-                  <a:srgbClr val="B8B8B8"/>
+                  <a:srgbClr val="A8A29E"/>
                 </a:solidFill>
                 <a:latin typeface="Montserrat"/>
               </a:rPr>
@@ -4352,8 +4352,8 @@
         </p:nvSpPr>
         <p:spPr>
           <a:xfrm>
-            <a:off x="822960" y="6446520"/>
-            <a:ext cx="10545775" cy="274320"/>
+            <a:off x="4389120" y="6446520"/>
+            <a:ext cx="3383280" cy="274320"/>
           </a:xfrm>
           <a:prstGeom prst="rect">
             <a:avLst/>
@@ -4370,7 +4370,7 @@
             <a:r>
               <a:rPr sz="1000" b="0">
                 <a:solidFill>
-                  <a:srgbClr val="B8B8B8"/>
+                  <a:srgbClr val="A8A29E"/>
                 </a:solidFill>
                 <a:latin typeface="Montserrat"/>
               </a:rPr>
@@ -4387,8 +4387,8 @@
         </p:nvSpPr>
         <p:spPr>
           <a:xfrm>
-            <a:off x="822960" y="6446520"/>
-            <a:ext cx="10545775" cy="274320"/>
+            <a:off x="8138160" y="6446520"/>
+            <a:ext cx="3200400" cy="274320"/>
           </a:xfrm>
           <a:prstGeom prst="rect">
             <a:avLst/>
@@ -4405,7 +4405,7 @@
             <a:r>
               <a:rPr sz="1000" b="0">
                 <a:solidFill>
-                  <a:srgbClr val="B8B8B8"/>
+                  <a:srgbClr val="A8A29E"/>
                 </a:solidFill>
                 <a:latin typeface="Montserrat"/>
               </a:rPr>
@@ -4514,7 +4514,7 @@
             <a:avLst/>
           </a:prstGeom>
           <a:solidFill>
-            <a:srgbClr val="131516"/>
+            <a:srgbClr val="0E1011"/>
           </a:solidFill>
           <a:ln>
             <a:noFill/>
@@ -4606,8 +4606,8 @@
         </p:nvSpPr>
         <p:spPr>
           <a:xfrm>
-            <a:off x="822960" y="1371600"/>
-            <a:ext cx="10545775" cy="731520"/>
+            <a:off x="822960" y="1188720"/>
+            <a:ext cx="10545775" cy="822960"/>
           </a:xfrm>
           <a:prstGeom prst="rect">
             <a:avLst/>
@@ -4621,11 +4621,11 @@
           <a:lstStyle/>
           <a:p>
             <a:r>
-              <a:rPr sz="2600" b="1">
-                <a:solidFill>
-                  <a:srgbClr val="B8B8B8"/>
-                </a:solidFill>
-                <a:latin typeface="Montserrat"/>
+              <a:rPr sz="3000" b="1">
+                <a:solidFill>
+                  <a:srgbClr val="F4F1EC"/>
+                </a:solidFill>
+                <a:latin typeface="Tektur"/>
               </a:rPr>
               <a:t>Уточнили правило: 60 из 140 → 140 из 140</a:t>
             </a:r>
@@ -4640,7 +4640,7 @@
         </p:nvSpPr>
         <p:spPr>
           <a:xfrm>
-            <a:off x="822960" y="1874519"/>
+            <a:off x="822960" y="1965960"/>
             <a:ext cx="10545775" cy="457200"/>
           </a:xfrm>
           <a:prstGeom prst="rect">
@@ -4657,7 +4657,7 @@
             <a:r>
               <a:rPr sz="1400" b="0">
                 <a:solidFill>
-                  <a:srgbClr val="B8B8B8"/>
+                  <a:srgbClr val="A8A29E"/>
                 </a:solidFill>
                 <a:latin typeface="Montserrat"/>
               </a:rPr>
@@ -4674,8 +4674,8 @@
         </p:nvSpPr>
         <p:spPr>
           <a:xfrm>
-            <a:off x="822960" y="2286000"/>
-            <a:ext cx="4023360" cy="1463040"/>
+            <a:off x="822960" y="5394960"/>
+            <a:ext cx="10545775" cy="548640"/>
           </a:xfrm>
           <a:prstGeom prst="rect">
             <a:avLst/>
@@ -4689,43 +4689,9 @@
           <a:lstStyle/>
           <a:p>
             <a:r>
-              <a:rPr sz="8800" b="1">
-                <a:solidFill>
-                  <a:srgbClr val="A2391D"/>
-                </a:solidFill>
-                <a:latin typeface="Montserrat"/>
-              </a:rPr>
-              <a:t>1.00</a:t>
-            </a:r>
-          </a:p>
-        </p:txBody>
-      </p:sp>
-      <p:sp>
-        <p:nvSpPr>
-          <p:cNvPr id="7" name="TextBox 6"/>
-          <p:cNvSpPr txBox="1"/>
-          <p:nvPr/>
-        </p:nvSpPr>
-        <p:spPr>
-          <a:xfrm>
-            <a:off x="822960" y="3840480"/>
-            <a:ext cx="4023360" cy="1463040"/>
-          </a:xfrm>
-          <a:prstGeom prst="rect">
-            <a:avLst/>
-          </a:prstGeom>
-          <a:noFill/>
-        </p:spPr>
-        <p:txBody>
-          <a:bodyPr wrap="square" anchor="t">
-            <a:spAutoFit/>
-          </a:bodyPr>
-          <a:lstStyle/>
-          <a:p>
-            <a:r>
               <a:rPr sz="1600" b="0">
                 <a:solidFill>
-                  <a:srgbClr val="EDEDED"/>
+                  <a:srgbClr val="F4F1EC"/>
                 </a:solidFill>
                 <a:latin typeface="Montserrat"/>
               </a:rPr>
@@ -4736,14 +4702,14 @@
       </p:sp>
       <p:sp>
         <p:nvSpPr>
-          <p:cNvPr id="8" name="TextBox 7"/>
+          <p:cNvPr id="7" name="TextBox 6"/>
           <p:cNvSpPr txBox="1"/>
           <p:nvPr/>
         </p:nvSpPr>
         <p:spPr>
           <a:xfrm>
-            <a:off x="6400800" y="2560320"/>
-            <a:ext cx="548640" cy="365760"/>
+            <a:off x="822960" y="2788920"/>
+            <a:ext cx="914400" cy="640080"/>
           </a:xfrm>
           <a:prstGeom prst="rect">
             <a:avLst/>
@@ -4751,15 +4717,15 @@
           <a:noFill/>
         </p:spPr>
         <p:txBody>
-          <a:bodyPr wrap="square" anchor="t">
+          <a:bodyPr wrap="square" anchor="ctr">
             <a:spAutoFit/>
           </a:bodyPr>
           <a:lstStyle/>
           <a:p>
             <a:r>
-              <a:rPr sz="1600" b="0">
-                <a:solidFill>
-                  <a:srgbClr val="B8B8B8"/>
+              <a:rPr sz="2200" b="0">
+                <a:solidFill>
+                  <a:srgbClr val="A8A29E"/>
                 </a:solidFill>
                 <a:latin typeface="JetBrains Mono"/>
               </a:rPr>
@@ -4770,20 +4736,20 @@
       </p:sp>
       <p:sp>
         <p:nvSpPr>
-          <p:cNvPr id="9" name="Rectangle 8"/>
+          <p:cNvPr id="8" name="Rectangle 7"/>
           <p:cNvSpPr/>
           <p:nvPr/>
         </p:nvSpPr>
         <p:spPr>
           <a:xfrm>
-            <a:off x="7040880" y="2606040"/>
-            <a:ext cx="3230575" cy="292608"/>
+            <a:off x="1828800" y="2834640"/>
+            <a:ext cx="7436815" cy="548640"/>
           </a:xfrm>
           <a:prstGeom prst="rect">
             <a:avLst/>
           </a:prstGeom>
           <a:solidFill>
-            <a:srgbClr val="26262A"/>
+            <a:srgbClr val="26282B"/>
           </a:solidFill>
           <a:ln>
             <a:noFill/>
@@ -4814,20 +4780,20 @@
       </p:sp>
       <p:sp>
         <p:nvSpPr>
-          <p:cNvPr id="10" name="Rectangle 9"/>
+          <p:cNvPr id="9" name="Rectangle 8"/>
           <p:cNvSpPr/>
           <p:nvPr/>
         </p:nvSpPr>
         <p:spPr>
           <a:xfrm>
-            <a:off x="7040880" y="2606040"/>
-            <a:ext cx="1389147" cy="292608"/>
+            <a:off x="1828800" y="2834640"/>
+            <a:ext cx="3197830" cy="548640"/>
           </a:xfrm>
           <a:prstGeom prst="rect">
             <a:avLst/>
           </a:prstGeom>
           <a:solidFill>
-            <a:srgbClr val="8E2A2A"/>
+            <a:srgbClr val="DC2626"/>
           </a:solidFill>
           <a:ln>
             <a:noFill/>
@@ -4858,14 +4824,14 @@
       </p:sp>
       <p:sp>
         <p:nvSpPr>
-          <p:cNvPr id="11" name="TextBox 10"/>
+          <p:cNvPr id="10" name="TextBox 9"/>
           <p:cNvSpPr txBox="1"/>
           <p:nvPr/>
         </p:nvSpPr>
         <p:spPr>
           <a:xfrm>
-            <a:off x="10362895" y="2560320"/>
-            <a:ext cx="1005840" cy="365760"/>
+            <a:off x="9357055" y="2788920"/>
+            <a:ext cx="2011680" cy="640080"/>
           </a:xfrm>
           <a:prstGeom prst="rect">
             <a:avLst/>
@@ -4880,11 +4846,11 @@
           <a:p>
             <a:pPr algn="r"/>
             <a:r>
-              <a:rPr sz="1800" b="1">
-                <a:solidFill>
-                  <a:srgbClr val="EDEDED"/>
-                </a:solidFill>
-                <a:latin typeface="Montserrat"/>
+              <a:rPr sz="4000" b="1">
+                <a:solidFill>
+                  <a:srgbClr val="F4F1EC"/>
+                </a:solidFill>
+                <a:latin typeface="Tektur"/>
               </a:rPr>
               <a:t>0.43</a:t>
             </a:r>
@@ -4893,14 +4859,14 @@
       </p:sp>
       <p:sp>
         <p:nvSpPr>
-          <p:cNvPr id="12" name="TextBox 11"/>
+          <p:cNvPr id="11" name="TextBox 10"/>
           <p:cNvSpPr txBox="1"/>
           <p:nvPr/>
         </p:nvSpPr>
         <p:spPr>
           <a:xfrm>
-            <a:off x="6400800" y="3566160"/>
-            <a:ext cx="548640" cy="365760"/>
+            <a:off x="822960" y="3977640"/>
+            <a:ext cx="914400" cy="640080"/>
           </a:xfrm>
           <a:prstGeom prst="rect">
             <a:avLst/>
@@ -4908,15 +4874,15 @@
           <a:noFill/>
         </p:spPr>
         <p:txBody>
-          <a:bodyPr wrap="square" anchor="t">
+          <a:bodyPr wrap="square" anchor="ctr">
             <a:spAutoFit/>
           </a:bodyPr>
           <a:lstStyle/>
           <a:p>
             <a:r>
-              <a:rPr sz="1600" b="0">
-                <a:solidFill>
-                  <a:srgbClr val="B8B8B8"/>
+              <a:rPr sz="2200" b="0">
+                <a:solidFill>
+                  <a:srgbClr val="A8A29E"/>
                 </a:solidFill>
                 <a:latin typeface="JetBrains Mono"/>
               </a:rPr>
@@ -4927,20 +4893,20 @@
       </p:sp>
       <p:sp>
         <p:nvSpPr>
-          <p:cNvPr id="13" name="Rectangle 12"/>
+          <p:cNvPr id="12" name="Rectangle 11"/>
           <p:cNvSpPr/>
           <p:nvPr/>
         </p:nvSpPr>
         <p:spPr>
           <a:xfrm>
-            <a:off x="7040880" y="3611880"/>
-            <a:ext cx="3230575" cy="292608"/>
+            <a:off x="1828800" y="4023360"/>
+            <a:ext cx="7436815" cy="548640"/>
           </a:xfrm>
           <a:prstGeom prst="rect">
             <a:avLst/>
           </a:prstGeom>
           <a:solidFill>
-            <a:srgbClr val="26262A"/>
+            <a:srgbClr val="26282B"/>
           </a:solidFill>
           <a:ln>
             <a:noFill/>
@@ -4971,20 +4937,20 @@
       </p:sp>
       <p:sp>
         <p:nvSpPr>
-          <p:cNvPr id="14" name="Rectangle 13"/>
+          <p:cNvPr id="13" name="Rectangle 12"/>
           <p:cNvSpPr/>
           <p:nvPr/>
         </p:nvSpPr>
         <p:spPr>
           <a:xfrm>
-            <a:off x="7040880" y="3611880"/>
-            <a:ext cx="3230575" cy="292608"/>
+            <a:off x="1828800" y="4023360"/>
+            <a:ext cx="7436815" cy="548640"/>
           </a:xfrm>
           <a:prstGeom prst="rect">
             <a:avLst/>
           </a:prstGeom>
           <a:solidFill>
-            <a:srgbClr val="2E7D5B"/>
+            <a:srgbClr val="16A34A"/>
           </a:solidFill>
           <a:ln>
             <a:noFill/>
@@ -5015,14 +4981,14 @@
       </p:sp>
       <p:sp>
         <p:nvSpPr>
-          <p:cNvPr id="15" name="TextBox 14"/>
+          <p:cNvPr id="14" name="TextBox 13"/>
           <p:cNvSpPr txBox="1"/>
           <p:nvPr/>
         </p:nvSpPr>
         <p:spPr>
           <a:xfrm>
-            <a:off x="10362895" y="3566160"/>
-            <a:ext cx="1005840" cy="365760"/>
+            <a:off x="9357055" y="3977640"/>
+            <a:ext cx="2011680" cy="640080"/>
           </a:xfrm>
           <a:prstGeom prst="rect">
             <a:avLst/>
@@ -5037,11 +5003,11 @@
           <a:p>
             <a:pPr algn="r"/>
             <a:r>
-              <a:rPr sz="1800" b="1">
-                <a:solidFill>
-                  <a:srgbClr val="EDEDED"/>
-                </a:solidFill>
-                <a:latin typeface="Montserrat"/>
+              <a:rPr sz="4000" b="1">
+                <a:solidFill>
+                  <a:srgbClr val="F4F1EC"/>
+                </a:solidFill>
+                <a:latin typeface="Tektur"/>
               </a:rPr>
               <a:t>1.00</a:t>
             </a:r>
@@ -5050,14 +5016,14 @@
       </p:sp>
       <p:sp>
         <p:nvSpPr>
-          <p:cNvPr id="16" name="TextBox 15"/>
+          <p:cNvPr id="15" name="TextBox 14"/>
           <p:cNvSpPr txBox="1"/>
           <p:nvPr/>
         </p:nvSpPr>
         <p:spPr>
           <a:xfrm>
             <a:off x="822960" y="6446520"/>
-            <a:ext cx="10545775" cy="274320"/>
+            <a:ext cx="3840480" cy="274320"/>
           </a:xfrm>
           <a:prstGeom prst="rect">
             <a:avLst/>
@@ -5073,7 +5039,7 @@
             <a:r>
               <a:rPr sz="1000" b="0">
                 <a:solidFill>
-                  <a:srgbClr val="B8B8B8"/>
+                  <a:srgbClr val="A8A29E"/>
                 </a:solidFill>
                 <a:latin typeface="Montserrat"/>
               </a:rPr>
@@ -5084,14 +5050,14 @@
       </p:sp>
       <p:sp>
         <p:nvSpPr>
-          <p:cNvPr id="17" name="TextBox 16"/>
+          <p:cNvPr id="16" name="TextBox 15"/>
           <p:cNvSpPr txBox="1"/>
           <p:nvPr/>
         </p:nvSpPr>
         <p:spPr>
           <a:xfrm>
-            <a:off x="822960" y="6446520"/>
-            <a:ext cx="10545775" cy="274320"/>
+            <a:off x="4389120" y="6446520"/>
+            <a:ext cx="3383280" cy="274320"/>
           </a:xfrm>
           <a:prstGeom prst="rect">
             <a:avLst/>
@@ -5108,7 +5074,7 @@
             <a:r>
               <a:rPr sz="1000" b="0">
                 <a:solidFill>
-                  <a:srgbClr val="B8B8B8"/>
+                  <a:srgbClr val="A8A29E"/>
                 </a:solidFill>
                 <a:latin typeface="Montserrat"/>
               </a:rPr>
@@ -5119,14 +5085,14 @@
       </p:sp>
       <p:sp>
         <p:nvSpPr>
-          <p:cNvPr id="18" name="TextBox 17"/>
+          <p:cNvPr id="17" name="TextBox 16"/>
           <p:cNvSpPr txBox="1"/>
           <p:nvPr/>
         </p:nvSpPr>
         <p:spPr>
           <a:xfrm>
-            <a:off x="822960" y="6446520"/>
-            <a:ext cx="10545775" cy="274320"/>
+            <a:off x="8138160" y="6446520"/>
+            <a:ext cx="3200400" cy="274320"/>
           </a:xfrm>
           <a:prstGeom prst="rect">
             <a:avLst/>
@@ -5143,7 +5109,7 @@
             <a:r>
               <a:rPr sz="1000" b="0">
                 <a:solidFill>
-                  <a:srgbClr val="B8B8B8"/>
+                  <a:srgbClr val="A8A29E"/>
                 </a:solidFill>
                 <a:latin typeface="Montserrat"/>
               </a:rPr>
@@ -5229,7 +5195,7 @@
                               </p:stCondLst>
                             </p:cTn>
                             <p:tgtEl>
-                              <p:spTgt spid="7"/>
+                              <p:spTgt spid="8"/>
                             </p:tgtEl>
                             <p:attrNameLst>
                               <p:attrName>style.visibility</p:attrName>
@@ -5243,7 +5209,7 @@
                           <p:cBhvr additive="base">
                             <p:cTn id="8" dur="500" fill="hold"/>
                             <p:tgtEl>
-                              <p:spTgt spid="7"/>
+                              <p:spTgt spid="8"/>
                             </p:tgtEl>
                             <p:attrNameLst>
                               <p:attrName>style.opacity</p:attrName>
@@ -5379,7 +5345,7 @@
                               </p:stCondLst>
                             </p:cTn>
                             <p:tgtEl>
-                              <p:spTgt spid="11"/>
+                              <p:spTgt spid="12"/>
                             </p:tgtEl>
                             <p:attrNameLst>
                               <p:attrName>style.visibility</p:attrName>
@@ -5393,7 +5359,7 @@
                           <p:cBhvr additive="base">
                             <p:cTn id="17" dur="500" fill="hold"/>
                             <p:tgtEl>
-                              <p:spTgt spid="11"/>
+                              <p:spTgt spid="12"/>
                             </p:tgtEl>
                             <p:attrNameLst>
                               <p:attrName>style.opacity</p:attrName>
@@ -5515,56 +5481,6 @@
                       </p:childTnLst>
                     </p:cTn>
                   </p:par>
-                  <p:par>
-                    <p:cTn id="24" presetID="10" presetClass="entr" presetSubtype="0" fill="hold" grpId="0" nodeType="clickEffect">
-                      <p:stCondLst>
-                        <p:cond delay="0"/>
-                      </p:stCondLst>
-                      <p:childTnLst>
-                        <p:set>
-                          <p:cBhvr>
-                            <p:cTn id="25" dur="1" fill="hold">
-                              <p:stCondLst>
-                                <p:cond delay="0"/>
-                              </p:stCondLst>
-                            </p:cTn>
-                            <p:tgtEl>
-                              <p:spTgt spid="15"/>
-                            </p:tgtEl>
-                            <p:attrNameLst>
-                              <p:attrName>style.visibility</p:attrName>
-                            </p:attrNameLst>
-                          </p:cBhvr>
-                          <p:to>
-                            <p:strVal val="visible"/>
-                          </p:to>
-                        </p:set>
-                        <p:anim calcmode="lin" valueType="num">
-                          <p:cBhvr additive="base">
-                            <p:cTn id="26" dur="500" fill="hold"/>
-                            <p:tgtEl>
-                              <p:spTgt spid="15"/>
-                            </p:tgtEl>
-                            <p:attrNameLst>
-                              <p:attrName>style.opacity</p:attrName>
-                            </p:attrNameLst>
-                          </p:cBhvr>
-                          <p:tavLst>
-                            <p:tav tm="0">
-                              <p:val>
-                                <p:fltVal val="0"/>
-                              </p:val>
-                            </p:tav>
-                            <p:tav tm="100000">
-                              <p:val>
-                                <p:fltVal val="1"/>
-                              </p:val>
-                            </p:tav>
-                          </p:tavLst>
-                        </p:anim>
-                      </p:childTnLst>
-                    </p:cTn>
-                  </p:par>
                 </p:childTnLst>
               </p:cTn>
             </p:seq>
@@ -5602,7 +5518,7 @@
             <a:avLst/>
           </a:prstGeom>
           <a:solidFill>
-            <a:srgbClr val="131516"/>
+            <a:srgbClr val="0E1011"/>
           </a:solidFill>
           <a:ln>
             <a:noFill/>
@@ -5694,8 +5610,8 @@
         </p:nvSpPr>
         <p:spPr>
           <a:xfrm>
-            <a:off x="822960" y="1371600"/>
-            <a:ext cx="10545775" cy="731520"/>
+            <a:off x="822960" y="1188720"/>
+            <a:ext cx="10545775" cy="822960"/>
           </a:xfrm>
           <a:prstGeom prst="rect">
             <a:avLst/>
@@ -5709,11 +5625,11 @@
           <a:lstStyle/>
           <a:p>
             <a:r>
-              <a:rPr sz="2600" b="1">
-                <a:solidFill>
-                  <a:srgbClr val="B8B8B8"/>
-                </a:solidFill>
-                <a:latin typeface="Montserrat"/>
+              <a:rPr sz="3000" b="1">
+                <a:solidFill>
+                  <a:srgbClr val="F4F1EC"/>
+                </a:solidFill>
+                <a:latin typeface="Tektur"/>
               </a:rPr>
               <a:t>Набор организаторов разобран целиком</a:t>
             </a:r>
@@ -5743,11 +5659,11 @@
           <a:lstStyle/>
           <a:p>
             <a:r>
-              <a:rPr sz="8800" b="1">
-                <a:solidFill>
-                  <a:srgbClr val="A2391D"/>
-                </a:solidFill>
-                <a:latin typeface="Montserrat"/>
+              <a:rPr sz="12000" b="1">
+                <a:solidFill>
+                  <a:srgbClr val="D0603A"/>
+                </a:solidFill>
+                <a:latin typeface="Tektur"/>
               </a:rPr>
               <a:t>90</a:t>
             </a:r>
@@ -5779,7 +5695,7 @@
             <a:r>
               <a:rPr sz="1600" b="0">
                 <a:solidFill>
-                  <a:srgbClr val="EDEDED"/>
+                  <a:srgbClr val="F4F1EC"/>
                 </a:solidFill>
                 <a:latin typeface="Montserrat"/>
               </a:rPr>
@@ -5804,8 +5720,8 @@
         </p:blipFill>
         <p:spPr>
           <a:xfrm>
-            <a:off x="6400800" y="2194560"/>
-            <a:ext cx="4295038" cy="3291840"/>
+            <a:off x="6035040" y="2011680"/>
+            <a:ext cx="4772264" cy="3657600"/>
           </a:xfrm>
           <a:prstGeom prst="rect">
             <a:avLst/>
@@ -5837,7 +5753,7 @@
             <a:r>
               <a:rPr sz="1200" b="0">
                 <a:solidFill>
-                  <a:srgbClr val="B8B8B8"/>
+                  <a:srgbClr val="A8A29E"/>
                 </a:solidFill>
                 <a:latin typeface="Montserrat"/>
               </a:rPr>
@@ -5855,7 +5771,7 @@
         <p:spPr>
           <a:xfrm>
             <a:off x="822960" y="6446520"/>
-            <a:ext cx="10545775" cy="274320"/>
+            <a:ext cx="3840480" cy="274320"/>
           </a:xfrm>
           <a:prstGeom prst="rect">
             <a:avLst/>
@@ -5871,7 +5787,7 @@
             <a:r>
               <a:rPr sz="1000" b="0">
                 <a:solidFill>
-                  <a:srgbClr val="B8B8B8"/>
+                  <a:srgbClr val="A8A29E"/>
                 </a:solidFill>
                 <a:latin typeface="Montserrat"/>
               </a:rPr>
@@ -5888,8 +5804,8 @@
         </p:nvSpPr>
         <p:spPr>
           <a:xfrm>
-            <a:off x="822960" y="6446520"/>
-            <a:ext cx="10545775" cy="274320"/>
+            <a:off x="4389120" y="6446520"/>
+            <a:ext cx="3383280" cy="274320"/>
           </a:xfrm>
           <a:prstGeom prst="rect">
             <a:avLst/>
@@ -5906,7 +5822,7 @@
             <a:r>
               <a:rPr sz="1000" b="0">
                 <a:solidFill>
-                  <a:srgbClr val="B8B8B8"/>
+                  <a:srgbClr val="A8A29E"/>
                 </a:solidFill>
                 <a:latin typeface="Montserrat"/>
               </a:rPr>
@@ -5923,8 +5839,8 @@
         </p:nvSpPr>
         <p:spPr>
           <a:xfrm>
-            <a:off x="822960" y="6446520"/>
-            <a:ext cx="10545775" cy="274320"/>
+            <a:off x="8138160" y="6446520"/>
+            <a:ext cx="3200400" cy="274320"/>
           </a:xfrm>
           <a:prstGeom prst="rect">
             <a:avLst/>
@@ -5941,7 +5857,7 @@
             <a:r>
               <a:rPr sz="1000" b="0">
                 <a:solidFill>
-                  <a:srgbClr val="B8B8B8"/>
+                  <a:srgbClr val="A8A29E"/>
                 </a:solidFill>
                 <a:latin typeface="Montserrat"/>
               </a:rPr>
@@ -6100,7 +6016,7 @@
             <a:avLst/>
           </a:prstGeom>
           <a:solidFill>
-            <a:srgbClr val="131516"/>
+            <a:srgbClr val="0E1011"/>
           </a:solidFill>
           <a:ln>
             <a:noFill/>
@@ -6192,8 +6108,8 @@
         </p:nvSpPr>
         <p:spPr>
           <a:xfrm>
-            <a:off x="822960" y="1371600"/>
-            <a:ext cx="10545775" cy="731520"/>
+            <a:off x="822960" y="1188720"/>
+            <a:ext cx="10545775" cy="822960"/>
           </a:xfrm>
           <a:prstGeom prst="rect">
             <a:avLst/>
@@ -6207,11 +6123,11 @@
           <a:lstStyle/>
           <a:p>
             <a:r>
-              <a:rPr sz="2600" b="1">
-                <a:solidFill>
-                  <a:srgbClr val="B8B8B8"/>
-                </a:solidFill>
-                <a:latin typeface="Montserrat"/>
+              <a:rPr sz="3000" b="1">
+                <a:solidFill>
+                  <a:srgbClr val="F4F1EC"/>
+                </a:solidFill>
+                <a:latin typeface="Tektur"/>
               </a:rPr>
               <a:t>95 МиБ разбираются за 12 секунд</a:t>
             </a:r>
@@ -6243,9 +6159,9 @@
             <a:r>
               <a:rPr sz="8800" b="1">
                 <a:solidFill>
-                  <a:srgbClr val="A2391D"/>
-                </a:solidFill>
-                <a:latin typeface="Montserrat"/>
+                  <a:srgbClr val="D0603A"/>
+                </a:solidFill>
+                <a:latin typeface="Tektur"/>
               </a:rPr>
               <a:t>12 с</a:t>
             </a:r>
@@ -6277,7 +6193,7 @@
             <a:r>
               <a:rPr sz="1600" b="0">
                 <a:solidFill>
-                  <a:srgbClr val="EDEDED"/>
+                  <a:srgbClr val="F4F1EC"/>
                 </a:solidFill>
                 <a:latin typeface="Montserrat"/>
               </a:rPr>
@@ -6302,8 +6218,8 @@
         </p:blipFill>
         <p:spPr>
           <a:xfrm>
-            <a:off x="6400800" y="2194560"/>
-            <a:ext cx="4144402" cy="3291840"/>
+            <a:off x="6035040" y="2011680"/>
+            <a:ext cx="4604892" cy="3657600"/>
           </a:xfrm>
           <a:prstGeom prst="rect">
             <a:avLst/>
@@ -6325,11 +6241,11 @@
             <a:avLst/>
           </a:prstGeom>
           <a:solidFill>
-            <a:srgbClr val="26262A"/>
+            <a:srgbClr val="26282B"/>
           </a:solidFill>
           <a:ln w="12700">
             <a:solidFill>
-              <a:srgbClr val="26262A"/>
+              <a:srgbClr val="26282B"/>
             </a:solidFill>
           </a:ln>
           <a:effectLst/>
@@ -6382,7 +6298,7 @@
             <a:r>
               <a:rPr sz="1100" b="0">
                 <a:solidFill>
-                  <a:srgbClr val="EDEDED"/>
+                  <a:srgbClr val="F4F1EC"/>
                 </a:solidFill>
                 <a:latin typeface="Montserrat"/>
               </a:rPr>
@@ -6406,11 +6322,11 @@
             <a:avLst/>
           </a:prstGeom>
           <a:solidFill>
-            <a:srgbClr val="26262A"/>
+            <a:srgbClr val="26282B"/>
           </a:solidFill>
           <a:ln w="12700">
             <a:solidFill>
-              <a:srgbClr val="26262A"/>
+              <a:srgbClr val="26282B"/>
             </a:solidFill>
           </a:ln>
           <a:effectLst/>
@@ -6463,7 +6379,7 @@
             <a:r>
               <a:rPr sz="1100" b="0">
                 <a:solidFill>
-                  <a:srgbClr val="EDEDED"/>
+                  <a:srgbClr val="F4F1EC"/>
                 </a:solidFill>
                 <a:latin typeface="Montserrat"/>
               </a:rPr>
@@ -6487,11 +6403,11 @@
             <a:avLst/>
           </a:prstGeom>
           <a:solidFill>
-            <a:srgbClr val="26262A"/>
+            <a:srgbClr val="26282B"/>
           </a:solidFill>
           <a:ln w="12700">
             <a:solidFill>
-              <a:srgbClr val="26262A"/>
+              <a:srgbClr val="26282B"/>
             </a:solidFill>
           </a:ln>
           <a:effectLst/>
@@ -6544,7 +6460,7 @@
             <a:r>
               <a:rPr sz="1100" b="0">
                 <a:solidFill>
-                  <a:srgbClr val="EDEDED"/>
+                  <a:srgbClr val="F4F1EC"/>
                 </a:solidFill>
                 <a:latin typeface="Montserrat"/>
               </a:rPr>
@@ -6578,7 +6494,7 @@
             <a:r>
               <a:rPr sz="1200" b="0">
                 <a:solidFill>
-                  <a:srgbClr val="B8B8B8"/>
+                  <a:srgbClr val="A8A29E"/>
                 </a:solidFill>
                 <a:latin typeface="Montserrat"/>
               </a:rPr>
@@ -6596,7 +6512,7 @@
         <p:spPr>
           <a:xfrm>
             <a:off x="822960" y="6446520"/>
-            <a:ext cx="10545775" cy="274320"/>
+            <a:ext cx="3840480" cy="274320"/>
           </a:xfrm>
           <a:prstGeom prst="rect">
             <a:avLst/>
@@ -6612,7 +6528,7 @@
             <a:r>
               <a:rPr sz="1000" b="0">
                 <a:solidFill>
-                  <a:srgbClr val="B8B8B8"/>
+                  <a:srgbClr val="A8A29E"/>
                 </a:solidFill>
                 <a:latin typeface="Montserrat"/>
               </a:rPr>
@@ -6629,8 +6545,8 @@
         </p:nvSpPr>
         <p:spPr>
           <a:xfrm>
-            <a:off x="822960" y="6446520"/>
-            <a:ext cx="10545775" cy="274320"/>
+            <a:off x="4389120" y="6446520"/>
+            <a:ext cx="3383280" cy="274320"/>
           </a:xfrm>
           <a:prstGeom prst="rect">
             <a:avLst/>
@@ -6647,7 +6563,7 @@
             <a:r>
               <a:rPr sz="1000" b="0">
                 <a:solidFill>
-                  <a:srgbClr val="B8B8B8"/>
+                  <a:srgbClr val="A8A29E"/>
                 </a:solidFill>
                 <a:latin typeface="Montserrat"/>
               </a:rPr>
@@ -6664,8 +6580,8 @@
         </p:nvSpPr>
         <p:spPr>
           <a:xfrm>
-            <a:off x="822960" y="6446520"/>
-            <a:ext cx="10545775" cy="274320"/>
+            <a:off x="8138160" y="6446520"/>
+            <a:ext cx="3200400" cy="274320"/>
           </a:xfrm>
           <a:prstGeom prst="rect">
             <a:avLst/>
@@ -6682,7 +6598,7 @@
             <a:r>
               <a:rPr sz="1000" b="0">
                 <a:solidFill>
-                  <a:srgbClr val="B8B8B8"/>
+                  <a:srgbClr val="A8A29E"/>
                 </a:solidFill>
                 <a:latin typeface="Montserrat"/>
               </a:rPr>
@@ -6991,7 +6907,7 @@
             <a:avLst/>
           </a:prstGeom>
           <a:solidFill>
-            <a:srgbClr val="131516"/>
+            <a:srgbClr val="0E1011"/>
           </a:solidFill>
           <a:ln>
             <a:noFill/>
@@ -7100,9 +7016,9 @@
             <a:r>
               <a:rPr sz="7200" b="1">
                 <a:solidFill>
-                  <a:srgbClr val="A2391D"/>
-                </a:solidFill>
-                <a:latin typeface="Montserrat"/>
+                  <a:srgbClr val="D0603A"/>
+                </a:solidFill>
+                <a:latin typeface="Tektur"/>
               </a:rPr>
               <a:t>02</a:t>
             </a:r>
@@ -7134,9 +7050,9 @@
             <a:r>
               <a:rPr sz="4000" b="1">
                 <a:solidFill>
-                  <a:srgbClr val="EDEDED"/>
-                </a:solidFill>
-                <a:latin typeface="Montserrat"/>
+                  <a:srgbClr val="F4F1EC"/>
+                </a:solidFill>
+                <a:latin typeface="Tektur"/>
               </a:rPr>
               <a:t>Демонстрация</a:t>
             </a:r>
@@ -7223,7 +7139,7 @@
             <a:r>
               <a:rPr sz="1600" b="0">
                 <a:solidFill>
-                  <a:srgbClr val="B8B8B8"/>
+                  <a:srgbClr val="A8A29E"/>
                 </a:solidFill>
                 <a:latin typeface="Montserrat"/>
               </a:rPr>
@@ -7241,7 +7157,7 @@
         <p:spPr>
           <a:xfrm>
             <a:off x="822960" y="6446520"/>
-            <a:ext cx="10545775" cy="274320"/>
+            <a:ext cx="3840480" cy="274320"/>
           </a:xfrm>
           <a:prstGeom prst="rect">
             <a:avLst/>
@@ -7257,7 +7173,7 @@
             <a:r>
               <a:rPr sz="1000" b="0">
                 <a:solidFill>
-                  <a:srgbClr val="B8B8B8"/>
+                  <a:srgbClr val="A8A29E"/>
                 </a:solidFill>
                 <a:latin typeface="Montserrat"/>
               </a:rPr>
@@ -7274,8 +7190,8 @@
         </p:nvSpPr>
         <p:spPr>
           <a:xfrm>
-            <a:off x="822960" y="6446520"/>
-            <a:ext cx="10545775" cy="274320"/>
+            <a:off x="4389120" y="6446520"/>
+            <a:ext cx="3383280" cy="274320"/>
           </a:xfrm>
           <a:prstGeom prst="rect">
             <a:avLst/>
@@ -7292,7 +7208,7 @@
             <a:r>
               <a:rPr sz="1000" b="0">
                 <a:solidFill>
-                  <a:srgbClr val="B8B8B8"/>
+                  <a:srgbClr val="A8A29E"/>
                 </a:solidFill>
                 <a:latin typeface="Montserrat"/>
               </a:rPr>
@@ -7309,8 +7225,8 @@
         </p:nvSpPr>
         <p:spPr>
           <a:xfrm>
-            <a:off x="822960" y="6446520"/>
-            <a:ext cx="10545775" cy="274320"/>
+            <a:off x="8138160" y="6446520"/>
+            <a:ext cx="3200400" cy="274320"/>
           </a:xfrm>
           <a:prstGeom prst="rect">
             <a:avLst/>
@@ -7327,7 +7243,7 @@
             <a:r>
               <a:rPr sz="1000" b="0">
                 <a:solidFill>
-                  <a:srgbClr val="B8B8B8"/>
+                  <a:srgbClr val="A8A29E"/>
                 </a:solidFill>
                 <a:latin typeface="Montserrat"/>
               </a:rPr>
@@ -7436,7 +7352,7 @@
             <a:avLst/>
           </a:prstGeom>
           <a:solidFill>
-            <a:srgbClr val="131516"/>
+            <a:srgbClr val="0E1011"/>
           </a:solidFill>
           <a:ln>
             <a:noFill/>
@@ -7543,11 +7459,11 @@
           <a:lstStyle/>
           <a:p>
             <a:r>
-              <a:rPr sz="3200" b="1">
-                <a:solidFill>
-                  <a:srgbClr val="EDEDED"/>
-                </a:solidFill>
-                <a:latin typeface="Montserrat"/>
+              <a:rPr sz="4000" b="1">
+                <a:solidFill>
+                  <a:srgbClr val="F4F1EC"/>
+                </a:solidFill>
+                <a:latin typeface="Tektur"/>
               </a:rPr>
               <a:t>Живое окно</a:t>
             </a:r>
@@ -7603,7 +7519,7 @@
             <a:r>
               <a:rPr sz="1200" b="0">
                 <a:solidFill>
-                  <a:srgbClr val="B8B8B8"/>
+                  <a:srgbClr val="A8A29E"/>
                 </a:solidFill>
                 <a:latin typeface="Montserrat"/>
               </a:rPr>
@@ -7621,7 +7537,7 @@
         <p:spPr>
           <a:xfrm>
             <a:off x="822960" y="6446520"/>
-            <a:ext cx="10545775" cy="274320"/>
+            <a:ext cx="3840480" cy="274320"/>
           </a:xfrm>
           <a:prstGeom prst="rect">
             <a:avLst/>
@@ -7637,7 +7553,7 @@
             <a:r>
               <a:rPr sz="1000" b="0">
                 <a:solidFill>
-                  <a:srgbClr val="B8B8B8"/>
+                  <a:srgbClr val="A8A29E"/>
                 </a:solidFill>
                 <a:latin typeface="Montserrat"/>
               </a:rPr>
@@ -7654,8 +7570,8 @@
         </p:nvSpPr>
         <p:spPr>
           <a:xfrm>
-            <a:off x="822960" y="6446520"/>
-            <a:ext cx="10545775" cy="274320"/>
+            <a:off x="4389120" y="6446520"/>
+            <a:ext cx="3383280" cy="274320"/>
           </a:xfrm>
           <a:prstGeom prst="rect">
             <a:avLst/>
@@ -7672,7 +7588,7 @@
             <a:r>
               <a:rPr sz="1000" b="0">
                 <a:solidFill>
-                  <a:srgbClr val="B8B8B8"/>
+                  <a:srgbClr val="A8A29E"/>
                 </a:solidFill>
                 <a:latin typeface="Montserrat"/>
               </a:rPr>
@@ -7689,8 +7605,8 @@
         </p:nvSpPr>
         <p:spPr>
           <a:xfrm>
-            <a:off x="822960" y="6446520"/>
-            <a:ext cx="10545775" cy="274320"/>
+            <a:off x="8138160" y="6446520"/>
+            <a:ext cx="3200400" cy="274320"/>
           </a:xfrm>
           <a:prstGeom prst="rect">
             <a:avLst/>
@@ -7707,7 +7623,7 @@
             <a:r>
               <a:rPr sz="1000" b="0">
                 <a:solidFill>
-                  <a:srgbClr val="B8B8B8"/>
+                  <a:srgbClr val="A8A29E"/>
                 </a:solidFill>
                 <a:latin typeface="Montserrat"/>
               </a:rPr>
@@ -7816,7 +7732,7 @@
             <a:avLst/>
           </a:prstGeom>
           <a:solidFill>
-            <a:srgbClr val="131516"/>
+            <a:srgbClr val="0E1011"/>
           </a:solidFill>
           <a:ln>
             <a:noFill/>
@@ -7923,20 +7839,20 @@
           <a:lstStyle/>
           <a:p>
             <a:r>
-              <a:rPr sz="3200" b="1">
-                <a:solidFill>
-                  <a:srgbClr val="EDEDED"/>
-                </a:solidFill>
-                <a:latin typeface="Montserrat"/>
+              <a:rPr sz="4000" b="1">
+                <a:solidFill>
+                  <a:srgbClr val="F4F1EC"/>
+                </a:solidFill>
+                <a:latin typeface="Tektur"/>
               </a:rPr>
-              <a:t>Резерв: 2 минуты записи прогона</a:t>
+              <a:t>Резерв: запись прогона</a:t>
             </a:r>
           </a:p>
         </p:txBody>
       </p:sp>
       <p:pic>
         <p:nvPicPr>
-          <p:cNvPr id="5" name="Picture 4" descr="screenshot-main.png"/>
+          <p:cNvPr id="5" name="Picture 4" descr="screencast-poster.png"/>
           <p:cNvPicPr>
             <a:picLocks noChangeAspect="1"/>
           </p:cNvPicPr>
@@ -7951,7 +7867,7 @@
         <p:spPr>
           <a:xfrm>
             <a:off x="822960" y="1691640"/>
-            <a:ext cx="10545775" cy="2708050"/>
+            <a:ext cx="5852160" cy="3291840"/>
           </a:xfrm>
           <a:prstGeom prst="rect">
             <a:avLst/>
@@ -7960,13 +7876,101 @@
       </p:pic>
       <p:sp>
         <p:nvSpPr>
-          <p:cNvPr id="6" name="TextBox 5"/>
+          <p:cNvPr id="6" name="Oval 5"/>
+          <p:cNvSpPr/>
+          <p:nvPr/>
+        </p:nvSpPr>
+        <p:spPr>
+          <a:xfrm>
+            <a:off x="3182112" y="2770632"/>
+            <a:ext cx="1133856" cy="1133856"/>
+          </a:xfrm>
+          <a:prstGeom prst="ellipse">
+            <a:avLst/>
+          </a:prstGeom>
+          <a:noFill/>
+          <a:ln w="38100">
+            <a:solidFill>
+              <a:srgbClr val="D0603A"/>
+            </a:solidFill>
+          </a:ln>
+          <a:effectLst/>
+        </p:spPr>
+        <p:style>
+          <a:lnRef idx="1">
+            <a:schemeClr val="accent1"/>
+          </a:lnRef>
+          <a:fillRef idx="3">
+            <a:schemeClr val="accent1"/>
+          </a:fillRef>
+          <a:effectRef idx="2">
+            <a:schemeClr val="accent1"/>
+          </a:effectRef>
+          <a:fontRef idx="minor">
+            <a:schemeClr val="lt1"/>
+          </a:fontRef>
+        </p:style>
+        <p:txBody>
+          <a:bodyPr rtlCol="0" anchor="ctr"/>
+          <a:lstStyle/>
+          <a:p>
+            <a:pPr algn="ctr"/>
+          </a:p>
+        </p:txBody>
+      </p:sp>
+      <p:sp>
+        <p:nvSpPr>
+          <p:cNvPr id="7" name="Isosceles Triangle 6"/>
+          <p:cNvSpPr/>
+          <p:nvPr/>
+        </p:nvSpPr>
+        <p:spPr>
+          <a:xfrm rot="5400000">
+            <a:off x="3602736" y="3118104"/>
+            <a:ext cx="457200" cy="438912"/>
+          </a:xfrm>
+          <a:prstGeom prst="triangle">
+            <a:avLst/>
+          </a:prstGeom>
+          <a:solidFill>
+            <a:srgbClr val="D0603A"/>
+          </a:solidFill>
+          <a:ln>
+            <a:noFill/>
+          </a:ln>
+          <a:effectLst/>
+        </p:spPr>
+        <p:style>
+          <a:lnRef idx="1">
+            <a:schemeClr val="accent1"/>
+          </a:lnRef>
+          <a:fillRef idx="3">
+            <a:schemeClr val="accent1"/>
+          </a:fillRef>
+          <a:effectRef idx="2">
+            <a:schemeClr val="accent1"/>
+          </a:effectRef>
+          <a:fontRef idx="minor">
+            <a:schemeClr val="lt1"/>
+          </a:fontRef>
+        </p:style>
+        <p:txBody>
+          <a:bodyPr rtlCol="0" anchor="ctr"/>
+          <a:lstStyle/>
+          <a:p>
+            <a:pPr algn="ctr"/>
+          </a:p>
+        </p:txBody>
+      </p:sp>
+      <p:sp>
+        <p:nvSpPr>
+          <p:cNvPr id="8" name="TextBox 7"/>
           <p:cNvSpPr txBox="1"/>
           <p:nvPr/>
         </p:nvSpPr>
         <p:spPr>
           <a:xfrm>
-            <a:off x="822960" y="6035040"/>
+            <a:off x="822960" y="5394960"/>
             <a:ext cx="10545775" cy="365760"/>
           </a:xfrm>
           <a:prstGeom prst="rect">
@@ -7981,27 +7985,27 @@
           <a:lstStyle/>
           <a:p>
             <a:r>
-              <a:rPr sz="1200" b="0">
-                <a:solidFill>
-                  <a:srgbClr val="B8B8B8"/>
-                </a:solidFill>
-                <a:latin typeface="Montserrat"/>
+              <a:rPr sz="1400" b="0">
+                <a:solidFill>
+                  <a:srgbClr val="A8A29E"/>
+                </a:solidFill>
+                <a:latin typeface="JetBrains Mono"/>
               </a:rPr>
-              <a:t>Полный прогон референсного исследования, если экран не поднимется</a:t>
-            </a:r>
-          </a:p>
-        </p:txBody>
-      </p:sp>
-      <p:sp>
-        <p:nvSpPr>
-          <p:cNvPr id="7" name="TextBox 6"/>
+              <a:t>Полный прогон референсного исследования · 2:22 · без звука</a:t>
+            </a:r>
+          </a:p>
+        </p:txBody>
+      </p:sp>
+      <p:sp>
+        <p:nvSpPr>
+          <p:cNvPr id="9" name="TextBox 8"/>
           <p:cNvSpPr txBox="1"/>
           <p:nvPr/>
         </p:nvSpPr>
         <p:spPr>
           <a:xfrm>
-            <a:off x="822960" y="6446520"/>
-            <a:ext cx="10545775" cy="274320"/>
+            <a:off x="822960" y="6035040"/>
+            <a:ext cx="10545775" cy="365760"/>
           </a:xfrm>
           <a:prstGeom prst="rect">
             <a:avLst/>
@@ -8015,9 +8019,43 @@
           <a:lstStyle/>
           <a:p>
             <a:r>
+              <a:rPr sz="1200" b="0">
+                <a:solidFill>
+                  <a:srgbClr val="A8A29E"/>
+                </a:solidFill>
+                <a:latin typeface="Montserrat"/>
+              </a:rPr>
+              <a:t>Играется, если живое окно не поднимется на защите</a:t>
+            </a:r>
+          </a:p>
+        </p:txBody>
+      </p:sp>
+      <p:sp>
+        <p:nvSpPr>
+          <p:cNvPr id="10" name="TextBox 9"/>
+          <p:cNvSpPr txBox="1"/>
+          <p:nvPr/>
+        </p:nvSpPr>
+        <p:spPr>
+          <a:xfrm>
+            <a:off x="822960" y="6446520"/>
+            <a:ext cx="3840480" cy="274320"/>
+          </a:xfrm>
+          <a:prstGeom prst="rect">
+            <a:avLst/>
+          </a:prstGeom>
+          <a:noFill/>
+        </p:spPr>
+        <p:txBody>
+          <a:bodyPr wrap="square" anchor="t">
+            <a:spAutoFit/>
+          </a:bodyPr>
+          <a:lstStyle/>
+          <a:p>
+            <a:r>
               <a:rPr sz="1000" b="0">
                 <a:solidFill>
-                  <a:srgbClr val="B8B8B8"/>
+                  <a:srgbClr val="A8A29E"/>
                 </a:solidFill>
                 <a:latin typeface="Montserrat"/>
               </a:rPr>
@@ -8028,14 +8066,14 @@
       </p:sp>
       <p:sp>
         <p:nvSpPr>
-          <p:cNvPr id="8" name="TextBox 7"/>
+          <p:cNvPr id="11" name="TextBox 10"/>
           <p:cNvSpPr txBox="1"/>
           <p:nvPr/>
         </p:nvSpPr>
         <p:spPr>
           <a:xfrm>
-            <a:off x="822960" y="6446520"/>
-            <a:ext cx="10545775" cy="274320"/>
+            <a:off x="4389120" y="6446520"/>
+            <a:ext cx="3383280" cy="274320"/>
           </a:xfrm>
           <a:prstGeom prst="rect">
             <a:avLst/>
@@ -8052,7 +8090,7 @@
             <a:r>
               <a:rPr sz="1000" b="0">
                 <a:solidFill>
-                  <a:srgbClr val="B8B8B8"/>
+                  <a:srgbClr val="A8A29E"/>
                 </a:solidFill>
                 <a:latin typeface="Montserrat"/>
               </a:rPr>
@@ -8063,14 +8101,14 @@
       </p:sp>
       <p:sp>
         <p:nvSpPr>
-          <p:cNvPr id="9" name="TextBox 8"/>
+          <p:cNvPr id="12" name="TextBox 11"/>
           <p:cNvSpPr txBox="1"/>
           <p:nvPr/>
         </p:nvSpPr>
         <p:spPr>
           <a:xfrm>
-            <a:off x="822960" y="6446520"/>
-            <a:ext cx="10545775" cy="274320"/>
+            <a:off x="8138160" y="6446520"/>
+            <a:ext cx="3200400" cy="274320"/>
           </a:xfrm>
           <a:prstGeom prst="rect">
             <a:avLst/>
@@ -8087,7 +8125,7 @@
             <a:r>
               <a:rPr sz="1000" b="0">
                 <a:solidFill>
-                  <a:srgbClr val="B8B8B8"/>
+                  <a:srgbClr val="A8A29E"/>
                 </a:solidFill>
                 <a:latin typeface="Montserrat"/>
               </a:rPr>
@@ -8196,7 +8234,7 @@
             <a:avLst/>
           </a:prstGeom>
           <a:solidFill>
-            <a:srgbClr val="131516"/>
+            <a:srgbClr val="0E1011"/>
           </a:solidFill>
           <a:ln>
             <a:noFill/>
@@ -8305,9 +8343,9 @@
             <a:r>
               <a:rPr sz="7200" b="1">
                 <a:solidFill>
-                  <a:srgbClr val="A2391D"/>
-                </a:solidFill>
-                <a:latin typeface="Montserrat"/>
+                  <a:srgbClr val="D0603A"/>
+                </a:solidFill>
+                <a:latin typeface="Tektur"/>
               </a:rPr>
               <a:t>03</a:t>
             </a:r>
@@ -8339,9 +8377,9 @@
             <a:r>
               <a:rPr sz="4000" b="1">
                 <a:solidFill>
-                  <a:srgbClr val="EDEDED"/>
-                </a:solidFill>
-                <a:latin typeface="Montserrat"/>
+                  <a:srgbClr val="F4F1EC"/>
+                </a:solidFill>
+                <a:latin typeface="Tektur"/>
               </a:rPr>
               <a:t>Границы и итог</a:t>
             </a:r>
@@ -8428,7 +8466,7 @@
             <a:r>
               <a:rPr sz="1600" b="0">
                 <a:solidFill>
-                  <a:srgbClr val="B8B8B8"/>
+                  <a:srgbClr val="A8A29E"/>
                 </a:solidFill>
                 <a:latin typeface="Montserrat"/>
               </a:rPr>
@@ -8446,7 +8484,7 @@
         <p:spPr>
           <a:xfrm>
             <a:off x="822960" y="6446520"/>
-            <a:ext cx="10545775" cy="274320"/>
+            <a:ext cx="3840480" cy="274320"/>
           </a:xfrm>
           <a:prstGeom prst="rect">
             <a:avLst/>
@@ -8462,7 +8500,7 @@
             <a:r>
               <a:rPr sz="1000" b="0">
                 <a:solidFill>
-                  <a:srgbClr val="B8B8B8"/>
+                  <a:srgbClr val="A8A29E"/>
                 </a:solidFill>
                 <a:latin typeface="Montserrat"/>
               </a:rPr>
@@ -8479,8 +8517,8 @@
         </p:nvSpPr>
         <p:spPr>
           <a:xfrm>
-            <a:off x="822960" y="6446520"/>
-            <a:ext cx="10545775" cy="274320"/>
+            <a:off x="4389120" y="6446520"/>
+            <a:ext cx="3383280" cy="274320"/>
           </a:xfrm>
           <a:prstGeom prst="rect">
             <a:avLst/>
@@ -8497,7 +8535,7 @@
             <a:r>
               <a:rPr sz="1000" b="0">
                 <a:solidFill>
-                  <a:srgbClr val="B8B8B8"/>
+                  <a:srgbClr val="A8A29E"/>
                 </a:solidFill>
                 <a:latin typeface="Montserrat"/>
               </a:rPr>
@@ -8514,8 +8552,8 @@
         </p:nvSpPr>
         <p:spPr>
           <a:xfrm>
-            <a:off x="822960" y="6446520"/>
-            <a:ext cx="10545775" cy="274320"/>
+            <a:off x="8138160" y="6446520"/>
+            <a:ext cx="3200400" cy="274320"/>
           </a:xfrm>
           <a:prstGeom prst="rect">
             <a:avLst/>
@@ -8532,7 +8570,7 @@
             <a:r>
               <a:rPr sz="1000" b="0">
                 <a:solidFill>
-                  <a:srgbClr val="B8B8B8"/>
+                  <a:srgbClr val="A8A29E"/>
                 </a:solidFill>
                 <a:latin typeface="Montserrat"/>
               </a:rPr>
@@ -8641,7 +8679,7 @@
             <a:avLst/>
           </a:prstGeom>
           <a:solidFill>
-            <a:srgbClr val="131516"/>
+            <a:srgbClr val="0E1011"/>
           </a:solidFill>
           <a:ln>
             <a:noFill/>
@@ -8748,11 +8786,11 @@
           <a:lstStyle/>
           <a:p>
             <a:r>
-              <a:rPr sz="3200" b="1">
-                <a:solidFill>
-                  <a:srgbClr val="EDEDED"/>
-                </a:solidFill>
-                <a:latin typeface="Montserrat"/>
+              <a:rPr sz="4000" b="1">
+                <a:solidFill>
+                  <a:srgbClr val="F4F1EC"/>
+                </a:solidFill>
+                <a:latin typeface="Tektur"/>
               </a:rPr>
               <a:t>Что мы не утверждаем</a:t>
             </a:r>
@@ -8784,7 +8822,7 @@
             <a:r>
               <a:rPr sz="1700" b="0">
                 <a:solidFill>
-                  <a:srgbClr val="EDEDED"/>
+                  <a:srgbClr val="F4F1EC"/>
                 </a:solidFill>
                 <a:latin typeface="Montserrat"/>
               </a:rPr>
@@ -8818,7 +8856,7 @@
             <a:r>
               <a:rPr sz="1700" b="0">
                 <a:solidFill>
-                  <a:srgbClr val="EDEDED"/>
+                  <a:srgbClr val="F4F1EC"/>
                 </a:solidFill>
                 <a:latin typeface="Montserrat"/>
               </a:rPr>
@@ -8852,7 +8890,7 @@
             <a:r>
               <a:rPr sz="1700" b="0">
                 <a:solidFill>
-                  <a:srgbClr val="EDEDED"/>
+                  <a:srgbClr val="F4F1EC"/>
                 </a:solidFill>
                 <a:latin typeface="Montserrat"/>
               </a:rPr>
@@ -8886,7 +8924,7 @@
             <a:r>
               <a:rPr sz="1700" b="0">
                 <a:solidFill>
-                  <a:srgbClr val="EDEDED"/>
+                  <a:srgbClr val="F4F1EC"/>
                 </a:solidFill>
                 <a:latin typeface="Montserrat"/>
               </a:rPr>
@@ -8904,7 +8942,7 @@
         <p:spPr>
           <a:xfrm>
             <a:off x="822960" y="6446520"/>
-            <a:ext cx="10545775" cy="274320"/>
+            <a:ext cx="3840480" cy="274320"/>
           </a:xfrm>
           <a:prstGeom prst="rect">
             <a:avLst/>
@@ -8920,7 +8958,7 @@
             <a:r>
               <a:rPr sz="1000" b="0">
                 <a:solidFill>
-                  <a:srgbClr val="B8B8B8"/>
+                  <a:srgbClr val="A8A29E"/>
                 </a:solidFill>
                 <a:latin typeface="Montserrat"/>
               </a:rPr>
@@ -8937,8 +8975,8 @@
         </p:nvSpPr>
         <p:spPr>
           <a:xfrm>
-            <a:off x="822960" y="6446520"/>
-            <a:ext cx="10545775" cy="274320"/>
+            <a:off x="4389120" y="6446520"/>
+            <a:ext cx="3383280" cy="274320"/>
           </a:xfrm>
           <a:prstGeom prst="rect">
             <a:avLst/>
@@ -8955,7 +8993,7 @@
             <a:r>
               <a:rPr sz="1000" b="0">
                 <a:solidFill>
-                  <a:srgbClr val="B8B8B8"/>
+                  <a:srgbClr val="A8A29E"/>
                 </a:solidFill>
                 <a:latin typeface="Montserrat"/>
               </a:rPr>
@@ -8972,8 +9010,8 @@
         </p:nvSpPr>
         <p:spPr>
           <a:xfrm>
-            <a:off x="822960" y="6446520"/>
-            <a:ext cx="10545775" cy="274320"/>
+            <a:off x="8138160" y="6446520"/>
+            <a:ext cx="3200400" cy="274320"/>
           </a:xfrm>
           <a:prstGeom prst="rect">
             <a:avLst/>
@@ -8990,7 +9028,7 @@
             <a:r>
               <a:rPr sz="1000" b="0">
                 <a:solidFill>
-                  <a:srgbClr val="B8B8B8"/>
+                  <a:srgbClr val="A8A29E"/>
                 </a:solidFill>
                 <a:latin typeface="Montserrat"/>
               </a:rPr>
@@ -9249,7 +9287,7 @@
             <a:avLst/>
           </a:prstGeom>
           <a:solidFill>
-            <a:srgbClr val="131516"/>
+            <a:srgbClr val="0E1011"/>
           </a:solidFill>
           <a:ln>
             <a:noFill/>
@@ -9359,9 +9397,9 @@
             <a:r>
               <a:rPr sz="3400" b="1">
                 <a:solidFill>
-                  <a:srgbClr val="EDEDED"/>
-                </a:solidFill>
-                <a:latin typeface="Montserrat"/>
+                  <a:srgbClr val="F4F1EC"/>
+                </a:solidFill>
+                <a:latin typeface="Tektur"/>
               </a:rPr>
               <a:t>Инструмент превращает байты в проверяемое знание</a:t>
             </a:r>
@@ -9418,7 +9456,7 @@
             <a:r>
               <a:rPr sz="1100" b="0">
                 <a:solidFill>
-                  <a:srgbClr val="B8B8B8"/>
+                  <a:srgbClr val="A8A29E"/>
                 </a:solidFill>
                 <a:latin typeface="Montserrat"/>
               </a:rPr>
@@ -9477,7 +9515,7 @@
             <a:r>
               <a:rPr sz="1100" b="0">
                 <a:solidFill>
-                  <a:srgbClr val="B8B8B8"/>
+                  <a:srgbClr val="A8A29E"/>
                 </a:solidFill>
                 <a:latin typeface="Montserrat"/>
               </a:rPr>
@@ -9536,7 +9574,7 @@
             <a:r>
               <a:rPr sz="1100" b="0">
                 <a:solidFill>
-                  <a:srgbClr val="B8B8B8"/>
+                  <a:srgbClr val="A8A29E"/>
                 </a:solidFill>
                 <a:latin typeface="Montserrat"/>
               </a:rPr>
@@ -9595,7 +9633,7 @@
             <a:r>
               <a:rPr sz="1100" b="0">
                 <a:solidFill>
-                  <a:srgbClr val="B8B8B8"/>
+                  <a:srgbClr val="A8A29E"/>
                 </a:solidFill>
                 <a:latin typeface="Montserrat"/>
               </a:rPr>
@@ -9630,7 +9668,7 @@
             <a:r>
               <a:rPr sz="1400">
                 <a:solidFill>
-                  <a:srgbClr val="B8B8B8"/>
+                  <a:srgbClr val="A8A29E"/>
                 </a:solidFill>
                 <a:latin typeface="JetBrains Mono"/>
                 <a:hlinkClick r:id="rId6"/>
@@ -9940,7 +9978,7 @@
             <a:avLst/>
           </a:prstGeom>
           <a:solidFill>
-            <a:srgbClr val="131516"/>
+            <a:srgbClr val="0E1011"/>
           </a:solidFill>
           <a:ln>
             <a:noFill/>
@@ -10047,11 +10085,11 @@
           <a:lstStyle/>
           <a:p>
             <a:r>
-              <a:rPr sz="3200" b="1">
-                <a:solidFill>
-                  <a:srgbClr val="EDEDED"/>
-                </a:solidFill>
-                <a:latin typeface="Montserrat"/>
+              <a:rPr sz="4000" b="1">
+                <a:solidFill>
+                  <a:srgbClr val="F4F1EC"/>
+                </a:solidFill>
+                <a:latin typeface="Tektur"/>
               </a:rPr>
               <a:t>Нас двое</a:t>
             </a:r>
@@ -10073,7 +10111,7 @@
             <a:avLst/>
           </a:prstGeom>
           <a:solidFill>
-            <a:srgbClr val="1D1D1D"/>
+            <a:srgbClr val="1F2124"/>
           </a:solidFill>
           <a:ln>
             <a:noFill/>
@@ -10151,9 +10189,9 @@
             <a:r>
               <a:rPr sz="2400" b="1">
                 <a:solidFill>
-                  <a:srgbClr val="EDEDED"/>
-                </a:solidFill>
-                <a:latin typeface="Montserrat"/>
+                  <a:srgbClr val="F4F1EC"/>
+                </a:solidFill>
+                <a:latin typeface="Tektur"/>
               </a:rPr>
               <a:t>Сабадаш Павел</a:t>
             </a:r>
@@ -10185,7 +10223,7 @@
             <a:r>
               <a:rPr sz="1400" b="0">
                 <a:solidFill>
-                  <a:srgbClr val="B8B8B8"/>
+                  <a:srgbClr val="A8A29E"/>
                 </a:solidFill>
                 <a:latin typeface="Montserrat"/>
               </a:rPr>
@@ -10219,7 +10257,7 @@
             <a:r>
               <a:rPr sz="1400" b="0">
                 <a:solidFill>
-                  <a:srgbClr val="A2391D"/>
+                  <a:srgbClr val="D0603A"/>
                 </a:solidFill>
                 <a:latin typeface="JetBrains Mono"/>
               </a:rPr>
@@ -10267,7 +10305,7 @@
             <a:avLst/>
           </a:prstGeom>
           <a:solidFill>
-            <a:srgbClr val="1D1D1D"/>
+            <a:srgbClr val="1F2124"/>
           </a:solidFill>
           <a:ln>
             <a:noFill/>
@@ -10345,9 +10383,9 @@
             <a:r>
               <a:rPr sz="2400" b="1">
                 <a:solidFill>
-                  <a:srgbClr val="EDEDED"/>
-                </a:solidFill>
-                <a:latin typeface="Montserrat"/>
+                  <a:srgbClr val="F4F1EC"/>
+                </a:solidFill>
+                <a:latin typeface="Tektur"/>
               </a:rPr>
               <a:t>Предков Никита</a:t>
             </a:r>
@@ -10379,7 +10417,7 @@
             <a:r>
               <a:rPr sz="1400" b="0">
                 <a:solidFill>
-                  <a:srgbClr val="B8B8B8"/>
+                  <a:srgbClr val="A8A29E"/>
                 </a:solidFill>
                 <a:latin typeface="Montserrat"/>
               </a:rPr>
@@ -10413,7 +10451,7 @@
             <a:r>
               <a:rPr sz="1400" b="0">
                 <a:solidFill>
-                  <a:srgbClr val="A2391D"/>
+                  <a:srgbClr val="D0603A"/>
                 </a:solidFill>
                 <a:latin typeface="JetBrains Mono"/>
               </a:rPr>
@@ -10455,7 +10493,7 @@
         <p:spPr>
           <a:xfrm>
             <a:off x="822960" y="6446520"/>
-            <a:ext cx="10545775" cy="274320"/>
+            <a:ext cx="3840480" cy="274320"/>
           </a:xfrm>
           <a:prstGeom prst="rect">
             <a:avLst/>
@@ -10471,7 +10509,7 @@
             <a:r>
               <a:rPr sz="1000" b="0">
                 <a:solidFill>
-                  <a:srgbClr val="B8B8B8"/>
+                  <a:srgbClr val="A8A29E"/>
                 </a:solidFill>
                 <a:latin typeface="Montserrat"/>
               </a:rPr>
@@ -10488,8 +10526,8 @@
         </p:nvSpPr>
         <p:spPr>
           <a:xfrm>
-            <a:off x="822960" y="6446520"/>
-            <a:ext cx="10545775" cy="274320"/>
+            <a:off x="4389120" y="6446520"/>
+            <a:ext cx="3383280" cy="274320"/>
           </a:xfrm>
           <a:prstGeom prst="rect">
             <a:avLst/>
@@ -10506,7 +10544,7 @@
             <a:r>
               <a:rPr sz="1000" b="0">
                 <a:solidFill>
-                  <a:srgbClr val="B8B8B8"/>
+                  <a:srgbClr val="A8A29E"/>
                 </a:solidFill>
                 <a:latin typeface="Montserrat"/>
               </a:rPr>
@@ -10523,8 +10561,8 @@
         </p:nvSpPr>
         <p:spPr>
           <a:xfrm>
-            <a:off x="822960" y="6446520"/>
-            <a:ext cx="10545775" cy="274320"/>
+            <a:off x="8138160" y="6446520"/>
+            <a:ext cx="3200400" cy="274320"/>
           </a:xfrm>
           <a:prstGeom prst="rect">
             <a:avLst/>
@@ -10541,7 +10579,7 @@
             <a:r>
               <a:rPr sz="1000" b="0">
                 <a:solidFill>
-                  <a:srgbClr val="B8B8B8"/>
+                  <a:srgbClr val="A8A29E"/>
                 </a:solidFill>
                 <a:latin typeface="Montserrat"/>
               </a:rPr>
@@ -10700,7 +10738,7 @@
             <a:avLst/>
           </a:prstGeom>
           <a:solidFill>
-            <a:srgbClr val="131516"/>
+            <a:srgbClr val="0E1011"/>
           </a:solidFill>
           <a:ln>
             <a:noFill/>
@@ -10809,7 +10847,7 @@
             <a:r>
               <a:rPr sz="1300" b="1">
                 <a:solidFill>
-                  <a:srgbClr val="A2391D"/>
+                  <a:srgbClr val="D0603A"/>
                 </a:solidFill>
                 <a:latin typeface="Montserrat"/>
               </a:rPr>
@@ -10843,9 +10881,9 @@
             <a:r>
               <a:rPr sz="4400" b="1">
                 <a:solidFill>
-                  <a:srgbClr val="EDEDED"/>
-                </a:solidFill>
-                <a:latin typeface="Montserrat"/>
+                  <a:srgbClr val="F4F1EC"/>
+                </a:solidFill>
+                <a:latin typeface="Tektur"/>
               </a:rPr>
               <a:t>TCP разрезает сообщения посередине</a:t>
             </a:r>
@@ -10877,7 +10915,7 @@
             <a:r>
               <a:rPr sz="2000" b="0">
                 <a:solidFill>
-                  <a:srgbClr val="B8B8B8"/>
+                  <a:srgbClr val="A8A29E"/>
                 </a:solidFill>
                 <a:latin typeface="Montserrat"/>
               </a:rPr>
@@ -10919,7 +10957,7 @@
         <p:spPr>
           <a:xfrm>
             <a:off x="822960" y="6446520"/>
-            <a:ext cx="10545775" cy="274320"/>
+            <a:ext cx="3840480" cy="274320"/>
           </a:xfrm>
           <a:prstGeom prst="rect">
             <a:avLst/>
@@ -10935,7 +10973,7 @@
             <a:r>
               <a:rPr sz="1000" b="0">
                 <a:solidFill>
-                  <a:srgbClr val="B8B8B8"/>
+                  <a:srgbClr val="A8A29E"/>
                 </a:solidFill>
                 <a:latin typeface="Montserrat"/>
               </a:rPr>
@@ -10952,8 +10990,8 @@
         </p:nvSpPr>
         <p:spPr>
           <a:xfrm>
-            <a:off x="822960" y="6446520"/>
-            <a:ext cx="10545775" cy="274320"/>
+            <a:off x="4389120" y="6446520"/>
+            <a:ext cx="3383280" cy="274320"/>
           </a:xfrm>
           <a:prstGeom prst="rect">
             <a:avLst/>
@@ -10970,7 +11008,7 @@
             <a:r>
               <a:rPr sz="1000" b="0">
                 <a:solidFill>
-                  <a:srgbClr val="B8B8B8"/>
+                  <a:srgbClr val="A8A29E"/>
                 </a:solidFill>
                 <a:latin typeface="Montserrat"/>
               </a:rPr>
@@ -10987,8 +11025,8 @@
         </p:nvSpPr>
         <p:spPr>
           <a:xfrm>
-            <a:off x="822960" y="6446520"/>
-            <a:ext cx="10545775" cy="274320"/>
+            <a:off x="8138160" y="6446520"/>
+            <a:ext cx="3200400" cy="274320"/>
           </a:xfrm>
           <a:prstGeom prst="rect">
             <a:avLst/>
@@ -11005,7 +11043,7 @@
             <a:r>
               <a:rPr sz="1000" b="0">
                 <a:solidFill>
-                  <a:srgbClr val="B8B8B8"/>
+                  <a:srgbClr val="A8A29E"/>
                 </a:solidFill>
                 <a:latin typeface="Montserrat"/>
               </a:rPr>
@@ -11164,7 +11202,7 @@
             <a:avLst/>
           </a:prstGeom>
           <a:solidFill>
-            <a:srgbClr val="131516"/>
+            <a:srgbClr val="0E1011"/>
           </a:solidFill>
           <a:ln>
             <a:noFill/>
@@ -11271,11 +11309,11 @@
           <a:lstStyle/>
           <a:p>
             <a:r>
-              <a:rPr sz="3200" b="1">
-                <a:solidFill>
-                  <a:srgbClr val="EDEDED"/>
-                </a:solidFill>
-                <a:latin typeface="Montserrat"/>
+              <a:rPr sz="4000" b="1">
+                <a:solidFill>
+                  <a:srgbClr val="F4F1EC"/>
+                </a:solidFill>
+                <a:latin typeface="Tektur"/>
               </a:rPr>
               <a:t>Дано и требуется</a:t>
             </a:r>
@@ -11297,7 +11335,7 @@
             <a:avLst/>
           </a:prstGeom>
           <a:solidFill>
-            <a:srgbClr val="1D1D1D"/>
+            <a:srgbClr val="1F2124"/>
           </a:solidFill>
           <a:ln>
             <a:noFill/>
@@ -11341,7 +11379,7 @@
             <a:avLst/>
           </a:prstGeom>
           <a:solidFill>
-            <a:srgbClr val="A2391D"/>
+            <a:srgbClr val="D0603A"/>
           </a:solidFill>
           <a:ln>
             <a:noFill/>
@@ -11395,7 +11433,7 @@
             <a:r>
               <a:rPr sz="1200" b="1">
                 <a:solidFill>
-                  <a:srgbClr val="A2391D"/>
+                  <a:srgbClr val="D0603A"/>
                 </a:solidFill>
                 <a:latin typeface="Montserrat"/>
               </a:rPr>
@@ -11429,7 +11467,7 @@
             <a:r>
               <a:rPr sz="1700" b="0">
                 <a:solidFill>
-                  <a:srgbClr val="EDEDED"/>
+                  <a:srgbClr val="F4F1EC"/>
                 </a:solidFill>
                 <a:latin typeface="Montserrat"/>
               </a:rPr>
@@ -11438,7 +11476,7 @@
             <a:r>
               <a:rPr sz="1500">
                 <a:solidFill>
-                  <a:srgbClr val="A2391D"/>
+                  <a:srgbClr val="D0603A"/>
                 </a:solidFill>
                 <a:latin typeface="JetBrains Mono"/>
               </a:rPr>
@@ -11447,7 +11485,7 @@
             <a:r>
               <a:rPr sz="1700" b="0">
                 <a:solidFill>
-                  <a:srgbClr val="EDEDED"/>
+                  <a:srgbClr val="F4F1EC"/>
                 </a:solidFill>
                 <a:latin typeface="Montserrat"/>
               </a:rPr>
@@ -11456,7 +11494,7 @@
             <a:r>
               <a:rPr sz="1500">
                 <a:solidFill>
-                  <a:srgbClr val="A2391D"/>
+                  <a:srgbClr val="D0603A"/>
                 </a:solidFill>
                 <a:latin typeface="JetBrains Mono"/>
               </a:rPr>
@@ -11465,7 +11503,7 @@
             <a:r>
               <a:rPr sz="1700" b="0">
                 <a:solidFill>
-                  <a:srgbClr val="EDEDED"/>
+                  <a:srgbClr val="F4F1EC"/>
                 </a:solidFill>
                 <a:latin typeface="Montserrat"/>
               </a:rPr>
@@ -11499,7 +11537,7 @@
             <a:r>
               <a:rPr sz="1700" b="0">
                 <a:solidFill>
-                  <a:srgbClr val="EDEDED"/>
+                  <a:srgbClr val="F4F1EC"/>
                 </a:solidFill>
                 <a:latin typeface="Montserrat"/>
               </a:rPr>
@@ -11523,7 +11561,7 @@
             <a:avLst/>
           </a:prstGeom>
           <a:solidFill>
-            <a:srgbClr val="1D1D1D"/>
+            <a:srgbClr val="1F2124"/>
           </a:solidFill>
           <a:ln>
             <a:noFill/>
@@ -11567,7 +11605,7 @@
             <a:avLst/>
           </a:prstGeom>
           <a:solidFill>
-            <a:srgbClr val="A2391D"/>
+            <a:srgbClr val="D0603A"/>
           </a:solidFill>
           <a:ln>
             <a:noFill/>
@@ -11621,7 +11659,7 @@
             <a:r>
               <a:rPr sz="1200" b="1">
                 <a:solidFill>
-                  <a:srgbClr val="A2391D"/>
+                  <a:srgbClr val="D0603A"/>
                 </a:solidFill>
                 <a:latin typeface="Montserrat"/>
               </a:rPr>
@@ -11655,7 +11693,7 @@
             <a:r>
               <a:rPr sz="1700" b="0">
                 <a:solidFill>
-                  <a:srgbClr val="EDEDED"/>
+                  <a:srgbClr val="F4F1EC"/>
                 </a:solidFill>
                 <a:latin typeface="Montserrat"/>
               </a:rPr>
@@ -11689,7 +11727,7 @@
             <a:r>
               <a:rPr sz="1700" b="0">
                 <a:solidFill>
-                  <a:srgbClr val="EDEDED"/>
+                  <a:srgbClr val="F4F1EC"/>
                 </a:solidFill>
                 <a:latin typeface="Montserrat"/>
               </a:rPr>
@@ -11707,7 +11745,7 @@
         <p:spPr>
           <a:xfrm>
             <a:off x="822960" y="6446520"/>
-            <a:ext cx="10545775" cy="274320"/>
+            <a:ext cx="3840480" cy="274320"/>
           </a:xfrm>
           <a:prstGeom prst="rect">
             <a:avLst/>
@@ -11723,7 +11761,7 @@
             <a:r>
               <a:rPr sz="1000" b="0">
                 <a:solidFill>
-                  <a:srgbClr val="B8B8B8"/>
+                  <a:srgbClr val="A8A29E"/>
                 </a:solidFill>
                 <a:latin typeface="Montserrat"/>
               </a:rPr>
@@ -11740,8 +11778,8 @@
         </p:nvSpPr>
         <p:spPr>
           <a:xfrm>
-            <a:off x="822960" y="6446520"/>
-            <a:ext cx="10545775" cy="274320"/>
+            <a:off x="4389120" y="6446520"/>
+            <a:ext cx="3383280" cy="274320"/>
           </a:xfrm>
           <a:prstGeom prst="rect">
             <a:avLst/>
@@ -11758,7 +11796,7 @@
             <a:r>
               <a:rPr sz="1000" b="0">
                 <a:solidFill>
-                  <a:srgbClr val="B8B8B8"/>
+                  <a:srgbClr val="A8A29E"/>
                 </a:solidFill>
                 <a:latin typeface="Montserrat"/>
               </a:rPr>
@@ -11775,8 +11813,8 @@
         </p:nvSpPr>
         <p:spPr>
           <a:xfrm>
-            <a:off x="822960" y="6446520"/>
-            <a:ext cx="10545775" cy="274320"/>
+            <a:off x="8138160" y="6446520"/>
+            <a:ext cx="3200400" cy="274320"/>
           </a:xfrm>
           <a:prstGeom prst="rect">
             <a:avLst/>
@@ -11793,7 +11831,7 @@
             <a:r>
               <a:rPr sz="1000" b="0">
                 <a:solidFill>
-                  <a:srgbClr val="B8B8B8"/>
+                  <a:srgbClr val="A8A29E"/>
                 </a:solidFill>
                 <a:latin typeface="Montserrat"/>
               </a:rPr>
@@ -12052,7 +12090,7 @@
             <a:avLst/>
           </a:prstGeom>
           <a:solidFill>
-            <a:srgbClr val="131516"/>
+            <a:srgbClr val="0E1011"/>
           </a:solidFill>
           <a:ln>
             <a:noFill/>
@@ -12161,7 +12199,7 @@
             <a:r>
               <a:rPr sz="1300" b="1">
                 <a:solidFill>
-                  <a:srgbClr val="A2391D"/>
+                  <a:srgbClr val="D0603A"/>
                 </a:solidFill>
                 <a:latin typeface="Montserrat"/>
               </a:rPr>
@@ -12195,9 +12233,9 @@
             <a:r>
               <a:rPr sz="3400" b="1">
                 <a:solidFill>
-                  <a:srgbClr val="EDEDED"/>
-                </a:solidFill>
-                <a:latin typeface="Montserrat"/>
+                  <a:srgbClr val="F4F1EC"/>
+                </a:solidFill>
+                <a:latin typeface="Tektur"/>
               </a:rPr>
               <a:t>Смещение поля длины оказалось на четыре байта позже, чем мы считали</a:t>
             </a:r>
@@ -12229,7 +12267,7 @@
             <a:r>
               <a:rPr sz="1700" b="0">
                 <a:solidFill>
-                  <a:srgbClr val="B8B8B8"/>
+                  <a:srgbClr val="A8A29E"/>
                 </a:solidFill>
                 <a:latin typeface="Montserrat"/>
               </a:rPr>
@@ -12277,7 +12315,7 @@
             <a:avLst/>
           </a:prstGeom>
           <a:solidFill>
-            <a:srgbClr val="A2391D"/>
+            <a:srgbClr val="D0603A"/>
           </a:solidFill>
           <a:ln>
             <a:noFill/>
@@ -12356,7 +12394,7 @@
             <a:avLst/>
           </a:prstGeom>
           <a:solidFill>
-            <a:srgbClr val="A2391D"/>
+            <a:srgbClr val="D0603A"/>
           </a:solidFill>
           <a:ln>
             <a:noFill/>
@@ -12435,7 +12473,7 @@
             <a:avLst/>
           </a:prstGeom>
           <a:solidFill>
-            <a:srgbClr val="A2391D"/>
+            <a:srgbClr val="D0603A"/>
           </a:solidFill>
           <a:ln>
             <a:noFill/>
@@ -12514,7 +12552,7 @@
             <a:avLst/>
           </a:prstGeom>
           <a:solidFill>
-            <a:srgbClr val="A2391D"/>
+            <a:srgbClr val="D0603A"/>
           </a:solidFill>
           <a:ln>
             <a:noFill/>
@@ -12593,7 +12631,7 @@
             <a:avLst/>
           </a:prstGeom>
           <a:solidFill>
-            <a:srgbClr val="A2391D"/>
+            <a:srgbClr val="D0603A"/>
           </a:solidFill>
           <a:ln>
             <a:noFill/>
@@ -12672,7 +12710,7 @@
             <a:avLst/>
           </a:prstGeom>
           <a:solidFill>
-            <a:srgbClr val="A2391D"/>
+            <a:srgbClr val="D0603A"/>
           </a:solidFill>
           <a:ln>
             <a:noFill/>
@@ -12745,7 +12783,7 @@
         <p:spPr>
           <a:xfrm>
             <a:off x="822960" y="6446520"/>
-            <a:ext cx="10545775" cy="274320"/>
+            <a:ext cx="3840480" cy="274320"/>
           </a:xfrm>
           <a:prstGeom prst="rect">
             <a:avLst/>
@@ -12761,7 +12799,7 @@
             <a:r>
               <a:rPr sz="1000" b="0">
                 <a:solidFill>
-                  <a:srgbClr val="B8B8B8"/>
+                  <a:srgbClr val="A8A29E"/>
                 </a:solidFill>
                 <a:latin typeface="Montserrat"/>
               </a:rPr>
@@ -12778,8 +12816,8 @@
         </p:nvSpPr>
         <p:spPr>
           <a:xfrm>
-            <a:off x="822960" y="6446520"/>
-            <a:ext cx="10545775" cy="274320"/>
+            <a:off x="4389120" y="6446520"/>
+            <a:ext cx="3383280" cy="274320"/>
           </a:xfrm>
           <a:prstGeom prst="rect">
             <a:avLst/>
@@ -12796,7 +12834,7 @@
             <a:r>
               <a:rPr sz="1000" b="0">
                 <a:solidFill>
-                  <a:srgbClr val="B8B8B8"/>
+                  <a:srgbClr val="A8A29E"/>
                 </a:solidFill>
                 <a:latin typeface="Montserrat"/>
               </a:rPr>
@@ -12813,8 +12851,8 @@
         </p:nvSpPr>
         <p:spPr>
           <a:xfrm>
-            <a:off x="822960" y="6446520"/>
-            <a:ext cx="10545775" cy="274320"/>
+            <a:off x="8138160" y="6446520"/>
+            <a:ext cx="3200400" cy="274320"/>
           </a:xfrm>
           <a:prstGeom prst="rect">
             <a:avLst/>
@@ -12831,7 +12869,7 @@
             <a:r>
               <a:rPr sz="1000" b="0">
                 <a:solidFill>
-                  <a:srgbClr val="B8B8B8"/>
+                  <a:srgbClr val="A8A29E"/>
                 </a:solidFill>
                 <a:latin typeface="Montserrat"/>
               </a:rPr>
@@ -12990,7 +13028,7 @@
             <a:avLst/>
           </a:prstGeom>
           <a:solidFill>
-            <a:srgbClr val="131516"/>
+            <a:srgbClr val="0E1011"/>
           </a:solidFill>
           <a:ln>
             <a:noFill/>
@@ -13097,11 +13135,11 @@
           <a:lstStyle/>
           <a:p>
             <a:r>
-              <a:rPr sz="3200" b="1">
-                <a:solidFill>
-                  <a:srgbClr val="EDEDED"/>
-                </a:solidFill>
-                <a:latin typeface="Montserrat"/>
+              <a:rPr sz="4000" b="1">
+                <a:solidFill>
+                  <a:srgbClr val="F4F1EC"/>
+                </a:solidFill>
+                <a:latin typeface="Tektur"/>
               </a:rPr>
               <a:t>Три модуля связаны форматами, а не вызовами</a:t>
             </a:r>
@@ -13123,7 +13161,7 @@
             <a:avLst/>
           </a:prstGeom>
           <a:solidFill>
-            <a:srgbClr val="1D1D1D"/>
+            <a:srgbClr val="1F2124"/>
           </a:solidFill>
           <a:ln>
             <a:noFill/>
@@ -13167,7 +13205,7 @@
             <a:avLst/>
           </a:prstGeom>
           <a:solidFill>
-            <a:srgbClr val="A2391D"/>
+            <a:srgbClr val="D0603A"/>
           </a:solidFill>
           <a:ln>
             <a:noFill/>
@@ -13221,9 +13259,9 @@
             <a:r>
               <a:rPr sz="2000" b="1">
                 <a:solidFill>
-                  <a:srgbClr val="EDEDED"/>
-                </a:solidFill>
-                <a:latin typeface="Montserrat"/>
+                  <a:srgbClr val="F4F1EC"/>
+                </a:solidFill>
+                <a:latin typeface="Tektur"/>
               </a:rPr>
               <a:t>capture</a:t>
             </a:r>
@@ -13255,7 +13293,7 @@
             <a:r>
               <a:rPr sz="1400" b="0">
                 <a:solidFill>
-                  <a:srgbClr val="B8B8B8"/>
+                  <a:srgbClr val="A8A29E"/>
                 </a:solidFill>
                 <a:latin typeface="Montserrat"/>
               </a:rPr>
@@ -13266,7 +13304,7 @@
             <a:r>
               <a:rPr sz="1400" b="0">
                 <a:solidFill>
-                  <a:srgbClr val="B8B8B8"/>
+                  <a:srgbClr val="A8A29E"/>
                 </a:solidFill>
                 <a:latin typeface="Montserrat"/>
               </a:rPr>
@@ -13301,7 +13339,7 @@
             <a:r>
               <a:rPr sz="1200" b="0">
                 <a:solidFill>
-                  <a:srgbClr val="A2391D"/>
+                  <a:srgbClr val="D0603A"/>
                 </a:solidFill>
                 <a:latin typeface="JetBrains Mono"/>
               </a:rPr>
@@ -13325,7 +13363,7 @@
             <a:avLst/>
           </a:prstGeom>
           <a:solidFill>
-            <a:srgbClr val="1D1D1D"/>
+            <a:srgbClr val="1F2124"/>
           </a:solidFill>
           <a:ln>
             <a:noFill/>
@@ -13369,7 +13407,7 @@
             <a:avLst/>
           </a:prstGeom>
           <a:solidFill>
-            <a:srgbClr val="A2391D"/>
+            <a:srgbClr val="D0603A"/>
           </a:solidFill>
           <a:ln>
             <a:noFill/>
@@ -13423,9 +13461,9 @@
             <a:r>
               <a:rPr sz="2000" b="1">
                 <a:solidFill>
-                  <a:srgbClr val="EDEDED"/>
-                </a:solidFill>
-                <a:latin typeface="Montserrat"/>
+                  <a:srgbClr val="F4F1EC"/>
+                </a:solidFill>
+                <a:latin typeface="Tektur"/>
               </a:rPr>
               <a:t>protocol + hypothesis</a:t>
             </a:r>
@@ -13457,7 +13495,7 @@
             <a:r>
               <a:rPr sz="1400" b="0">
                 <a:solidFill>
-                  <a:srgbClr val="B8B8B8"/>
+                  <a:srgbClr val="A8A29E"/>
                 </a:solidFill>
                 <a:latin typeface="Montserrat"/>
               </a:rPr>
@@ -13468,7 +13506,7 @@
             <a:r>
               <a:rPr sz="1400" b="0">
                 <a:solidFill>
-                  <a:srgbClr val="B8B8B8"/>
+                  <a:srgbClr val="A8A29E"/>
                 </a:solidFill>
                 <a:latin typeface="Montserrat"/>
               </a:rPr>
@@ -13503,7 +13541,7 @@
             <a:r>
               <a:rPr sz="1200" b="0">
                 <a:solidFill>
-                  <a:srgbClr val="A2391D"/>
+                  <a:srgbClr val="D0603A"/>
                 </a:solidFill>
                 <a:latin typeface="JetBrains Mono"/>
               </a:rPr>
@@ -13527,7 +13565,7 @@
             <a:avLst/>
           </a:prstGeom>
           <a:solidFill>
-            <a:srgbClr val="1D1D1D"/>
+            <a:srgbClr val="1F2124"/>
           </a:solidFill>
           <a:ln>
             <a:noFill/>
@@ -13571,7 +13609,7 @@
             <a:avLst/>
           </a:prstGeom>
           <a:solidFill>
-            <a:srgbClr val="A2391D"/>
+            <a:srgbClr val="D0603A"/>
           </a:solidFill>
           <a:ln>
             <a:noFill/>
@@ -13625,9 +13663,9 @@
             <a:r>
               <a:rPr sz="2000" b="1">
                 <a:solidFill>
-                  <a:srgbClr val="EDEDED"/>
-                </a:solidFill>
-                <a:latin typeface="Montserrat"/>
+                  <a:srgbClr val="F4F1EC"/>
+                </a:solidFill>
+                <a:latin typeface="Tektur"/>
               </a:rPr>
               <a:t>ui</a:t>
             </a:r>
@@ -13659,7 +13697,7 @@
             <a:r>
               <a:rPr sz="1400" b="0">
                 <a:solidFill>
-                  <a:srgbClr val="B8B8B8"/>
+                  <a:srgbClr val="A8A29E"/>
                 </a:solidFill>
                 <a:latin typeface="Montserrat"/>
               </a:rPr>
@@ -13670,7 +13708,7 @@
             <a:r>
               <a:rPr sz="1400" b="0">
                 <a:solidFill>
-                  <a:srgbClr val="B8B8B8"/>
+                  <a:srgbClr val="A8A29E"/>
                 </a:solidFill>
                 <a:latin typeface="Montserrat"/>
               </a:rPr>
@@ -13704,7 +13742,7 @@
             <a:r>
               <a:rPr sz="1200" b="0">
                 <a:solidFill>
-                  <a:srgbClr val="B8B8B8"/>
+                  <a:srgbClr val="A8A29E"/>
                 </a:solidFill>
                 <a:latin typeface="Montserrat"/>
               </a:rPr>
@@ -13722,7 +13760,7 @@
         <p:spPr>
           <a:xfrm>
             <a:off x="822960" y="6446520"/>
-            <a:ext cx="10545775" cy="274320"/>
+            <a:ext cx="3840480" cy="274320"/>
           </a:xfrm>
           <a:prstGeom prst="rect">
             <a:avLst/>
@@ -13738,7 +13776,7 @@
             <a:r>
               <a:rPr sz="1000" b="0">
                 <a:solidFill>
-                  <a:srgbClr val="B8B8B8"/>
+                  <a:srgbClr val="A8A29E"/>
                 </a:solidFill>
                 <a:latin typeface="Montserrat"/>
               </a:rPr>
@@ -13755,8 +13793,8 @@
         </p:nvSpPr>
         <p:spPr>
           <a:xfrm>
-            <a:off x="822960" y="6446520"/>
-            <a:ext cx="10545775" cy="274320"/>
+            <a:off x="4389120" y="6446520"/>
+            <a:ext cx="3383280" cy="274320"/>
           </a:xfrm>
           <a:prstGeom prst="rect">
             <a:avLst/>
@@ -13773,7 +13811,7 @@
             <a:r>
               <a:rPr sz="1000" b="0">
                 <a:solidFill>
-                  <a:srgbClr val="B8B8B8"/>
+                  <a:srgbClr val="A8A29E"/>
                 </a:solidFill>
                 <a:latin typeface="Montserrat"/>
               </a:rPr>
@@ -13790,8 +13828,8 @@
         </p:nvSpPr>
         <p:spPr>
           <a:xfrm>
-            <a:off x="822960" y="6446520"/>
-            <a:ext cx="10545775" cy="274320"/>
+            <a:off x="8138160" y="6446520"/>
+            <a:ext cx="3200400" cy="274320"/>
           </a:xfrm>
           <a:prstGeom prst="rect">
             <a:avLst/>
@@ -13808,7 +13846,7 @@
             <a:r>
               <a:rPr sz="1000" b="0">
                 <a:solidFill>
-                  <a:srgbClr val="B8B8B8"/>
+                  <a:srgbClr val="A8A29E"/>
                 </a:solidFill>
                 <a:latin typeface="Montserrat"/>
               </a:rPr>
@@ -14117,7 +14155,7 @@
             <a:avLst/>
           </a:prstGeom>
           <a:solidFill>
-            <a:srgbClr val="131516"/>
+            <a:srgbClr val="0E1011"/>
           </a:solidFill>
           <a:ln>
             <a:noFill/>
@@ -14210,7 +14248,7 @@
         <p:spPr>
           <a:xfrm>
             <a:off x="822960" y="457200"/>
-            <a:ext cx="10545775" cy="1051560"/>
+            <a:ext cx="10545775" cy="731520"/>
           </a:xfrm>
           <a:prstGeom prst="rect">
             <a:avLst/>
@@ -14224,11 +14262,11 @@
           <a:lstStyle/>
           <a:p>
             <a:r>
-              <a:rPr sz="3200" b="1">
-                <a:solidFill>
-                  <a:srgbClr val="EDEDED"/>
-                </a:solidFill>
-                <a:latin typeface="Montserrat"/>
+              <a:rPr sz="4000" b="1">
+                <a:solidFill>
+                  <a:srgbClr val="F4F1EC"/>
+                </a:solidFill>
+                <a:latin typeface="Tektur"/>
               </a:rPr>
               <a:t>От интерпретации можно вернуться к исходным данным</a:t>
             </a:r>
@@ -14252,7 +14290,7 @@
         <p:spPr>
           <a:xfrm>
             <a:off x="822960" y="1691640"/>
-            <a:ext cx="6766560" cy="3351058"/>
+            <a:ext cx="6766560" cy="2751950"/>
           </a:xfrm>
           <a:prstGeom prst="rect">
             <a:avLst/>
@@ -14274,7 +14312,7 @@
             <a:avLst/>
           </a:prstGeom>
           <a:solidFill>
-            <a:srgbClr val="1D1D1D"/>
+            <a:srgbClr val="1F2124"/>
           </a:solidFill>
           <a:ln>
             <a:noFill/>
@@ -14318,7 +14356,7 @@
             <a:avLst/>
           </a:prstGeom>
           <a:solidFill>
-            <a:srgbClr val="A2391D"/>
+            <a:srgbClr val="D0603A"/>
           </a:solidFill>
           <a:ln>
             <a:noFill/>
@@ -14372,7 +14410,7 @@
             <a:r>
               <a:rPr sz="1400" b="0">
                 <a:solidFill>
-                  <a:srgbClr val="EDEDED"/>
+                  <a:srgbClr val="F4F1EC"/>
                 </a:solidFill>
                 <a:latin typeface="Montserrat"/>
               </a:rPr>
@@ -14390,7 +14428,7 @@
         <p:spPr>
           <a:xfrm>
             <a:off x="822960" y="6446520"/>
-            <a:ext cx="10545775" cy="274320"/>
+            <a:ext cx="3840480" cy="274320"/>
           </a:xfrm>
           <a:prstGeom prst="rect">
             <a:avLst/>
@@ -14406,7 +14444,7 @@
             <a:r>
               <a:rPr sz="1000" b="0">
                 <a:solidFill>
-                  <a:srgbClr val="B8B8B8"/>
+                  <a:srgbClr val="A8A29E"/>
                 </a:solidFill>
                 <a:latin typeface="Montserrat"/>
               </a:rPr>
@@ -14423,8 +14461,8 @@
         </p:nvSpPr>
         <p:spPr>
           <a:xfrm>
-            <a:off x="822960" y="6446520"/>
-            <a:ext cx="10545775" cy="274320"/>
+            <a:off x="4389120" y="6446520"/>
+            <a:ext cx="3383280" cy="274320"/>
           </a:xfrm>
           <a:prstGeom prst="rect">
             <a:avLst/>
@@ -14441,7 +14479,7 @@
             <a:r>
               <a:rPr sz="1000" b="0">
                 <a:solidFill>
-                  <a:srgbClr val="B8B8B8"/>
+                  <a:srgbClr val="A8A29E"/>
                 </a:solidFill>
                 <a:latin typeface="Montserrat"/>
               </a:rPr>
@@ -14458,8 +14496,8 @@
         </p:nvSpPr>
         <p:spPr>
           <a:xfrm>
-            <a:off x="822960" y="6446520"/>
-            <a:ext cx="10545775" cy="274320"/>
+            <a:off x="8138160" y="6446520"/>
+            <a:ext cx="3200400" cy="274320"/>
           </a:xfrm>
           <a:prstGeom prst="rect">
             <a:avLst/>
@@ -14476,7 +14514,7 @@
             <a:r>
               <a:rPr sz="1000" b="0">
                 <a:solidFill>
-                  <a:srgbClr val="B8B8B8"/>
+                  <a:srgbClr val="A8A29E"/>
                 </a:solidFill>
                 <a:latin typeface="Montserrat"/>
               </a:rPr>
@@ -14635,7 +14673,7 @@
             <a:avLst/>
           </a:prstGeom>
           <a:solidFill>
-            <a:srgbClr val="131516"/>
+            <a:srgbClr val="0E1011"/>
           </a:solidFill>
           <a:ln>
             <a:noFill/>
@@ -14742,11 +14780,11 @@
           <a:lstStyle/>
           <a:p>
             <a:r>
-              <a:rPr sz="3200" b="1">
-                <a:solidFill>
-                  <a:srgbClr val="EDEDED"/>
-                </a:solidFill>
-                <a:latin typeface="Montserrat"/>
+              <a:rPr sz="4000" b="1">
+                <a:solidFill>
+                  <a:srgbClr val="F4F1EC"/>
+                </a:solidFill>
+                <a:latin typeface="Tektur"/>
               </a:rPr>
               <a:t>Правило проверяется на всём корпусе сразу</a:t>
             </a:r>
@@ -14794,7 +14832,7 @@
         <p:spPr>
           <a:xfrm>
             <a:off x="6324447" y="1691640"/>
-            <a:ext cx="5044287" cy="2603503"/>
+            <a:ext cx="5044287" cy="2668052"/>
           </a:xfrm>
           <a:prstGeom prst="rect">
             <a:avLst/>
@@ -14810,7 +14848,7 @@
         <p:spPr>
           <a:xfrm>
             <a:off x="822960" y="6446520"/>
-            <a:ext cx="10545775" cy="274320"/>
+            <a:ext cx="3840480" cy="274320"/>
           </a:xfrm>
           <a:prstGeom prst="rect">
             <a:avLst/>
@@ -14826,7 +14864,7 @@
             <a:r>
               <a:rPr sz="1000" b="0">
                 <a:solidFill>
-                  <a:srgbClr val="B8B8B8"/>
+                  <a:srgbClr val="A8A29E"/>
                 </a:solidFill>
                 <a:latin typeface="Montserrat"/>
               </a:rPr>
@@ -14843,8 +14881,8 @@
         </p:nvSpPr>
         <p:spPr>
           <a:xfrm>
-            <a:off x="822960" y="6446520"/>
-            <a:ext cx="10545775" cy="274320"/>
+            <a:off x="4389120" y="6446520"/>
+            <a:ext cx="3383280" cy="274320"/>
           </a:xfrm>
           <a:prstGeom prst="rect">
             <a:avLst/>
@@ -14861,7 +14899,7 @@
             <a:r>
               <a:rPr sz="1000" b="0">
                 <a:solidFill>
-                  <a:srgbClr val="B8B8B8"/>
+                  <a:srgbClr val="A8A29E"/>
                 </a:solidFill>
                 <a:latin typeface="Montserrat"/>
               </a:rPr>
@@ -14878,8 +14916,8 @@
         </p:nvSpPr>
         <p:spPr>
           <a:xfrm>
-            <a:off x="822960" y="6446520"/>
-            <a:ext cx="10545775" cy="274320"/>
+            <a:off x="8138160" y="6446520"/>
+            <a:ext cx="3200400" cy="274320"/>
           </a:xfrm>
           <a:prstGeom prst="rect">
             <a:avLst/>
@@ -14896,7 +14934,7 @@
             <a:r>
               <a:rPr sz="1000" b="0">
                 <a:solidFill>
-                  <a:srgbClr val="B8B8B8"/>
+                  <a:srgbClr val="A8A29E"/>
                 </a:solidFill>
                 <a:latin typeface="Montserrat"/>
               </a:rPr>
@@ -15055,7 +15093,7 @@
             <a:avLst/>
           </a:prstGeom>
           <a:solidFill>
-            <a:srgbClr val="131516"/>
+            <a:srgbClr val="0E1011"/>
           </a:solidFill>
           <a:ln>
             <a:noFill/>
@@ -15148,7 +15186,7 @@
         <p:spPr>
           <a:xfrm>
             <a:off x="822960" y="457200"/>
-            <a:ext cx="10545775" cy="1051560"/>
+            <a:ext cx="10545775" cy="731520"/>
           </a:xfrm>
           <a:prstGeom prst="rect">
             <a:avLst/>
@@ -15162,11 +15200,11 @@
           <a:lstStyle/>
           <a:p>
             <a:r>
-              <a:rPr sz="3200" b="1">
-                <a:solidFill>
-                  <a:srgbClr val="EDEDED"/>
-                </a:solidFill>
-                <a:latin typeface="Montserrat"/>
+              <a:rPr sz="4000" b="1">
+                <a:solidFill>
+                  <a:srgbClr val="F4F1EC"/>
+                </a:solidFill>
+                <a:latin typeface="Tektur"/>
               </a:rPr>
               <a:t>Контрпример важнее метрики</a:t>
             </a:r>
@@ -15198,7 +15236,7 @@
             <a:r>
               <a:rPr sz="1200" b="1">
                 <a:solidFill>
-                  <a:srgbClr val="A2391D"/>
+                  <a:srgbClr val="D0603A"/>
                 </a:solidFill>
                 <a:latin typeface="Montserrat"/>
               </a:rPr>
@@ -15224,7 +15262,7 @@
         <p:spPr>
           <a:xfrm>
             <a:off x="822960" y="1691640"/>
-            <a:ext cx="1707350" cy="3566160"/>
+            <a:ext cx="6766560" cy="2852021"/>
           </a:xfrm>
           <a:prstGeom prst="rect">
             <a:avLst/>
@@ -15246,7 +15284,7 @@
             <a:avLst/>
           </a:prstGeom>
           <a:solidFill>
-            <a:srgbClr val="1D1D1D"/>
+            <a:srgbClr val="1F2124"/>
           </a:solidFill>
           <a:ln>
             <a:noFill/>
@@ -15290,7 +15328,7 @@
             <a:avLst/>
           </a:prstGeom>
           <a:solidFill>
-            <a:srgbClr val="A2391D"/>
+            <a:srgbClr val="D0603A"/>
           </a:solidFill>
           <a:ln>
             <a:noFill/>
@@ -15344,7 +15382,7 @@
             <a:r>
               <a:rPr sz="1400" b="0">
                 <a:solidFill>
-                  <a:srgbClr val="EDEDED"/>
+                  <a:srgbClr val="F4F1EC"/>
                 </a:solidFill>
                 <a:latin typeface="Montserrat"/>
               </a:rPr>
@@ -15368,7 +15406,7 @@
             <a:avLst/>
           </a:prstGeom>
           <a:solidFill>
-            <a:srgbClr val="1D1D1D"/>
+            <a:srgbClr val="1F2124"/>
           </a:solidFill>
           <a:ln>
             <a:noFill/>
@@ -15422,7 +15460,7 @@
             <a:r>
               <a:rPr sz="1200" b="1">
                 <a:solidFill>
-                  <a:srgbClr val="A2391D"/>
+                  <a:srgbClr val="D0603A"/>
                 </a:solidFill>
                 <a:latin typeface="Montserrat"/>
               </a:rPr>
@@ -15456,11 +15494,11 @@
             <a:r>
               <a:rPr sz="1400" b="0">
                 <a:solidFill>
-                  <a:srgbClr val="EDEDED"/>
+                  <a:srgbClr val="F4F1EC"/>
                 </a:solidFill>
                 <a:latin typeface="Montserrat"/>
               </a:rPr>
-              <a:t>Все 80 несоответствий v1 сидели на offset 0 в сессиях s2 и s3.</a:t>
+              <a:t>80 несоответствий v1 — на offset 0 в сессиях s2 и s3.</a:t>
             </a:r>
           </a:p>
         </p:txBody>
@@ -15490,7 +15528,7 @@
             <a:r>
               <a:rPr sz="1200" b="0">
                 <a:solidFill>
-                  <a:srgbClr val="B8B8B8"/>
+                  <a:srgbClr val="A8A29E"/>
                 </a:solidFill>
                 <a:latin typeface="Montserrat"/>
               </a:rPr>
@@ -15508,7 +15546,7 @@
         <p:spPr>
           <a:xfrm>
             <a:off x="822960" y="6446520"/>
-            <a:ext cx="10545775" cy="274320"/>
+            <a:ext cx="3840480" cy="274320"/>
           </a:xfrm>
           <a:prstGeom prst="rect">
             <a:avLst/>
@@ -15524,7 +15562,7 @@
             <a:r>
               <a:rPr sz="1000" b="0">
                 <a:solidFill>
-                  <a:srgbClr val="B8B8B8"/>
+                  <a:srgbClr val="A8A29E"/>
                 </a:solidFill>
                 <a:latin typeface="Montserrat"/>
               </a:rPr>
@@ -15541,8 +15579,8 @@
         </p:nvSpPr>
         <p:spPr>
           <a:xfrm>
-            <a:off x="822960" y="6446520"/>
-            <a:ext cx="10545775" cy="274320"/>
+            <a:off x="4389120" y="6446520"/>
+            <a:ext cx="3383280" cy="274320"/>
           </a:xfrm>
           <a:prstGeom prst="rect">
             <a:avLst/>
@@ -15559,7 +15597,7 @@
             <a:r>
               <a:rPr sz="1000" b="0">
                 <a:solidFill>
-                  <a:srgbClr val="B8B8B8"/>
+                  <a:srgbClr val="A8A29E"/>
                 </a:solidFill>
                 <a:latin typeface="Montserrat"/>
               </a:rPr>
@@ -15576,8 +15614,8 @@
         </p:nvSpPr>
         <p:spPr>
           <a:xfrm>
-            <a:off x="822960" y="6446520"/>
-            <a:ext cx="10545775" cy="274320"/>
+            <a:off x="8138160" y="6446520"/>
+            <a:ext cx="3200400" cy="274320"/>
           </a:xfrm>
           <a:prstGeom prst="rect">
             <a:avLst/>
@@ -15594,7 +15632,7 @@
             <a:r>
               <a:rPr sz="1000" b="0">
                 <a:solidFill>
-                  <a:srgbClr val="B8B8B8"/>
+                  <a:srgbClr val="A8A29E"/>
                 </a:solidFill>
                 <a:latin typeface="Montserrat"/>
               </a:rPr>

--- a/presentation/slides.pptx
+++ b/presentation/slides.pptx
@@ -1,6 +1,6 @@
 
 <file path=ppt/presentation.xml><?xml version="1.0" encoding="utf-8"?>
-<p:presentation xmlns:a="http://schemas.openxmlformats.org/drawingml/2006/main" xmlns:r="http://schemas.openxmlformats.org/officeDocument/2006/relationships" xmlns:p="http://schemas.openxmlformats.org/presentationml/2006/main" saveSubsetFonts="1" autoCompressPictures="0">
+<p:presentation xmlns:a="http://schemas.openxmlformats.org/drawingml/2006/main" xmlns:r="http://schemas.openxmlformats.org/officeDocument/2006/relationships" xmlns:p="http://schemas.openxmlformats.org/presentationml/2006/main" saveSubsetFonts="1" autoCompressPictures="0" embedTrueTypeFonts="1">
   <p:sldMasterIdLst>
     <p:sldMasterId id="2147483648" r:id="rId1"/>
   </p:sldMasterIdLst>
@@ -122,6 +122,22 @@
       </a:defRPr>
     </a:lvl9pPr>
   </p:defaultTextStyle>
+  <p:embeddedFontLst>
+    <p:embeddedFont>
+      <p:font typeface="Tektur"/>
+      <p:regular r:id="rId27" fontKey="{27E04CAF-4F9E-C315-3E78-7ADC5AE0D597}"/>
+      <p:bold r:id="rId28" fontKey="{A12660F0-7690-25AC-9BE9-6509C0A8B2A5}"/>
+    </p:embeddedFont>
+    <p:embeddedFont>
+      <p:font typeface="Montserrat"/>
+      <p:regular r:id="rId29" fontKey="{3547397D-CEC3-B89A-5FB5-020C9CB6E4DD}"/>
+      <p:bold r:id="rId30" fontKey="{0CB8D5B1-66EF-C706-0E19-6341EC3D8E46}"/>
+    </p:embeddedFont>
+    <p:embeddedFont>
+      <p:font typeface="JetBrains Mono"/>
+      <p:regular r:id="rId31" fontKey="{C6EB8399-2A56-D694-A331-105094B34A55}"/>
+    </p:embeddedFont>
+  </p:embeddedFontLst>
 </p:presentation>
 </file>
 
@@ -6197,7 +6213,7 @@
                 </a:solidFill>
                 <a:latin typeface="Montserrat"/>
               </a:rPr>
-              <a:t>Пик памяти 350 МиБ при бюджете 4 ГиБ</a:t>
+              <a:t>Пик памяти 350 МиБ — около 9% бюджета 4 ГиБ</a:t>
             </a:r>
           </a:p>
         </p:txBody>
@@ -6498,7 +6514,7 @@
                 </a:solidFill>
                 <a:latin typeface="Montserrat"/>
               </a:rPr>
-              <a:t>Условия замера: 95.66 МиБ, 250 000 пакетов, 1000 сессий, 4 vCPU / 16 ГиБ</a:t>
+              <a:t>Условия замера: 95.66 МиБ, 250 000 пакетов, 1000 сессий, 4 vCPU / 16 ГиБ. Бюджет памяти — 4 ГиБ</a:t>
             </a:r>
           </a:p>
         </p:txBody>
@@ -8197,6 +8213,206 @@
                       </p:childTnLst>
                     </p:cTn>
                   </p:par>
+                  <p:par>
+                    <p:cTn id="6" presetID="10" presetClass="entr" presetSubtype="0" fill="hold" grpId="0" nodeType="clickEffect">
+                      <p:stCondLst>
+                        <p:cond delay="0"/>
+                      </p:stCondLst>
+                      <p:childTnLst>
+                        <p:set>
+                          <p:cBhvr>
+                            <p:cTn id="7" dur="1" fill="hold">
+                              <p:stCondLst>
+                                <p:cond delay="0"/>
+                              </p:stCondLst>
+                            </p:cTn>
+                            <p:tgtEl>
+                              <p:spTgt spid="6"/>
+                            </p:tgtEl>
+                            <p:attrNameLst>
+                              <p:attrName>style.visibility</p:attrName>
+                            </p:attrNameLst>
+                          </p:cBhvr>
+                          <p:to>
+                            <p:strVal val="visible"/>
+                          </p:to>
+                        </p:set>
+                        <p:anim calcmode="lin" valueType="num">
+                          <p:cBhvr additive="base">
+                            <p:cTn id="8" dur="500" fill="hold"/>
+                            <p:tgtEl>
+                              <p:spTgt spid="6"/>
+                            </p:tgtEl>
+                            <p:attrNameLst>
+                              <p:attrName>style.opacity</p:attrName>
+                            </p:attrNameLst>
+                          </p:cBhvr>
+                          <p:tavLst>
+                            <p:tav tm="0">
+                              <p:val>
+                                <p:fltVal val="0"/>
+                              </p:val>
+                            </p:tav>
+                            <p:tav tm="100000">
+                              <p:val>
+                                <p:fltVal val="1"/>
+                              </p:val>
+                            </p:tav>
+                          </p:tavLst>
+                        </p:anim>
+                      </p:childTnLst>
+                    </p:cTn>
+                  </p:par>
+                  <p:par>
+                    <p:cTn id="9" presetID="10" presetClass="entr" presetSubtype="0" fill="hold" grpId="0" nodeType="clickEffect">
+                      <p:stCondLst>
+                        <p:cond delay="0"/>
+                      </p:stCondLst>
+                      <p:childTnLst>
+                        <p:set>
+                          <p:cBhvr>
+                            <p:cTn id="10" dur="1" fill="hold">
+                              <p:stCondLst>
+                                <p:cond delay="0"/>
+                              </p:stCondLst>
+                            </p:cTn>
+                            <p:tgtEl>
+                              <p:spTgt spid="7"/>
+                            </p:tgtEl>
+                            <p:attrNameLst>
+                              <p:attrName>style.visibility</p:attrName>
+                            </p:attrNameLst>
+                          </p:cBhvr>
+                          <p:to>
+                            <p:strVal val="visible"/>
+                          </p:to>
+                        </p:set>
+                        <p:anim calcmode="lin" valueType="num">
+                          <p:cBhvr additive="base">
+                            <p:cTn id="11" dur="500" fill="hold"/>
+                            <p:tgtEl>
+                              <p:spTgt spid="7"/>
+                            </p:tgtEl>
+                            <p:attrNameLst>
+                              <p:attrName>style.opacity</p:attrName>
+                            </p:attrNameLst>
+                          </p:cBhvr>
+                          <p:tavLst>
+                            <p:tav tm="0">
+                              <p:val>
+                                <p:fltVal val="0"/>
+                              </p:val>
+                            </p:tav>
+                            <p:tav tm="100000">
+                              <p:val>
+                                <p:fltVal val="1"/>
+                              </p:val>
+                            </p:tav>
+                          </p:tavLst>
+                        </p:anim>
+                      </p:childTnLst>
+                    </p:cTn>
+                  </p:par>
+                  <p:par>
+                    <p:cTn id="12" presetID="10" presetClass="entr" presetSubtype="0" fill="hold" grpId="0" nodeType="clickEffect">
+                      <p:stCondLst>
+                        <p:cond delay="0"/>
+                      </p:stCondLst>
+                      <p:childTnLst>
+                        <p:set>
+                          <p:cBhvr>
+                            <p:cTn id="13" dur="1" fill="hold">
+                              <p:stCondLst>
+                                <p:cond delay="0"/>
+                              </p:stCondLst>
+                            </p:cTn>
+                            <p:tgtEl>
+                              <p:spTgt spid="8"/>
+                            </p:tgtEl>
+                            <p:attrNameLst>
+                              <p:attrName>style.visibility</p:attrName>
+                            </p:attrNameLst>
+                          </p:cBhvr>
+                          <p:to>
+                            <p:strVal val="visible"/>
+                          </p:to>
+                        </p:set>
+                        <p:anim calcmode="lin" valueType="num">
+                          <p:cBhvr additive="base">
+                            <p:cTn id="14" dur="500" fill="hold"/>
+                            <p:tgtEl>
+                              <p:spTgt spid="8"/>
+                            </p:tgtEl>
+                            <p:attrNameLst>
+                              <p:attrName>style.opacity</p:attrName>
+                            </p:attrNameLst>
+                          </p:cBhvr>
+                          <p:tavLst>
+                            <p:tav tm="0">
+                              <p:val>
+                                <p:fltVal val="0"/>
+                              </p:val>
+                            </p:tav>
+                            <p:tav tm="100000">
+                              <p:val>
+                                <p:fltVal val="1"/>
+                              </p:val>
+                            </p:tav>
+                          </p:tavLst>
+                        </p:anim>
+                      </p:childTnLst>
+                    </p:cTn>
+                  </p:par>
+                  <p:par>
+                    <p:cTn id="15" presetID="10" presetClass="entr" presetSubtype="0" fill="hold" grpId="0" nodeType="clickEffect">
+                      <p:stCondLst>
+                        <p:cond delay="0"/>
+                      </p:stCondLst>
+                      <p:childTnLst>
+                        <p:set>
+                          <p:cBhvr>
+                            <p:cTn id="16" dur="1" fill="hold">
+                              <p:stCondLst>
+                                <p:cond delay="0"/>
+                              </p:stCondLst>
+                            </p:cTn>
+                            <p:tgtEl>
+                              <p:spTgt spid="9"/>
+                            </p:tgtEl>
+                            <p:attrNameLst>
+                              <p:attrName>style.visibility</p:attrName>
+                            </p:attrNameLst>
+                          </p:cBhvr>
+                          <p:to>
+                            <p:strVal val="visible"/>
+                          </p:to>
+                        </p:set>
+                        <p:anim calcmode="lin" valueType="num">
+                          <p:cBhvr additive="base">
+                            <p:cTn id="17" dur="500" fill="hold"/>
+                            <p:tgtEl>
+                              <p:spTgt spid="9"/>
+                            </p:tgtEl>
+                            <p:attrNameLst>
+                              <p:attrName>style.opacity</p:attrName>
+                            </p:attrNameLst>
+                          </p:cBhvr>
+                          <p:tavLst>
+                            <p:tav tm="0">
+                              <p:val>
+                                <p:fltVal val="0"/>
+                              </p:val>
+                            </p:tav>
+                            <p:tav tm="100000">
+                              <p:val>
+                                <p:fltVal val="1"/>
+                              </p:val>
+                            </p:tav>
+                          </p:tavLst>
+                        </p:anim>
+                      </p:childTnLst>
+                    </p:cTn>
+                  </p:par>
                 </p:childTnLst>
               </p:cTn>
             </p:seq>
@@ -9805,7 +10021,7 @@
                               </p:stCondLst>
                             </p:cTn>
                             <p:tgtEl>
-                              <p:spTgt spid="7"/>
+                              <p:spTgt spid="6"/>
                             </p:tgtEl>
                             <p:attrNameLst>
                               <p:attrName>style.visibility</p:attrName>
@@ -9819,7 +10035,7 @@
                           <p:cBhvr additive="base">
                             <p:cTn id="11" dur="500" fill="hold"/>
                             <p:tgtEl>
-                              <p:spTgt spid="7"/>
+                              <p:spTgt spid="6"/>
                             </p:tgtEl>
                             <p:attrNameLst>
                               <p:attrName>style.opacity</p:attrName>
@@ -9855,7 +10071,7 @@
                               </p:stCondLst>
                             </p:cTn>
                             <p:tgtEl>
-                              <p:spTgt spid="9"/>
+                              <p:spTgt spid="7"/>
                             </p:tgtEl>
                             <p:attrNameLst>
                               <p:attrName>style.visibility</p:attrName>
@@ -9869,7 +10085,7 @@
                           <p:cBhvr additive="base">
                             <p:cTn id="14" dur="500" fill="hold"/>
                             <p:tgtEl>
-                              <p:spTgt spid="9"/>
+                              <p:spTgt spid="7"/>
                             </p:tgtEl>
                             <p:attrNameLst>
                               <p:attrName>style.opacity</p:attrName>
@@ -9905,7 +10121,7 @@
                               </p:stCondLst>
                             </p:cTn>
                             <p:tgtEl>
-                              <p:spTgt spid="11"/>
+                              <p:spTgt spid="8"/>
                             </p:tgtEl>
                             <p:attrNameLst>
                               <p:attrName>style.visibility</p:attrName>
@@ -9919,7 +10135,207 @@
                           <p:cBhvr additive="base">
                             <p:cTn id="17" dur="500" fill="hold"/>
                             <p:tgtEl>
+                              <p:spTgt spid="8"/>
+                            </p:tgtEl>
+                            <p:attrNameLst>
+                              <p:attrName>style.opacity</p:attrName>
+                            </p:attrNameLst>
+                          </p:cBhvr>
+                          <p:tavLst>
+                            <p:tav tm="0">
+                              <p:val>
+                                <p:fltVal val="0"/>
+                              </p:val>
+                            </p:tav>
+                            <p:tav tm="100000">
+                              <p:val>
+                                <p:fltVal val="1"/>
+                              </p:val>
+                            </p:tav>
+                          </p:tavLst>
+                        </p:anim>
+                      </p:childTnLst>
+                    </p:cTn>
+                  </p:par>
+                  <p:par>
+                    <p:cTn id="18" presetID="10" presetClass="entr" presetSubtype="0" fill="hold" grpId="0" nodeType="clickEffect">
+                      <p:stCondLst>
+                        <p:cond delay="0"/>
+                      </p:stCondLst>
+                      <p:childTnLst>
+                        <p:set>
+                          <p:cBhvr>
+                            <p:cTn id="19" dur="1" fill="hold">
+                              <p:stCondLst>
+                                <p:cond delay="0"/>
+                              </p:stCondLst>
+                            </p:cTn>
+                            <p:tgtEl>
+                              <p:spTgt spid="9"/>
+                            </p:tgtEl>
+                            <p:attrNameLst>
+                              <p:attrName>style.visibility</p:attrName>
+                            </p:attrNameLst>
+                          </p:cBhvr>
+                          <p:to>
+                            <p:strVal val="visible"/>
+                          </p:to>
+                        </p:set>
+                        <p:anim calcmode="lin" valueType="num">
+                          <p:cBhvr additive="base">
+                            <p:cTn id="20" dur="500" fill="hold"/>
+                            <p:tgtEl>
+                              <p:spTgt spid="9"/>
+                            </p:tgtEl>
+                            <p:attrNameLst>
+                              <p:attrName>style.opacity</p:attrName>
+                            </p:attrNameLst>
+                          </p:cBhvr>
+                          <p:tavLst>
+                            <p:tav tm="0">
+                              <p:val>
+                                <p:fltVal val="0"/>
+                              </p:val>
+                            </p:tav>
+                            <p:tav tm="100000">
+                              <p:val>
+                                <p:fltVal val="1"/>
+                              </p:val>
+                            </p:tav>
+                          </p:tavLst>
+                        </p:anim>
+                      </p:childTnLst>
+                    </p:cTn>
+                  </p:par>
+                  <p:par>
+                    <p:cTn id="21" presetID="10" presetClass="entr" presetSubtype="0" fill="hold" grpId="0" nodeType="clickEffect">
+                      <p:stCondLst>
+                        <p:cond delay="0"/>
+                      </p:stCondLst>
+                      <p:childTnLst>
+                        <p:set>
+                          <p:cBhvr>
+                            <p:cTn id="22" dur="1" fill="hold">
+                              <p:stCondLst>
+                                <p:cond delay="0"/>
+                              </p:stCondLst>
+                            </p:cTn>
+                            <p:tgtEl>
+                              <p:spTgt spid="10"/>
+                            </p:tgtEl>
+                            <p:attrNameLst>
+                              <p:attrName>style.visibility</p:attrName>
+                            </p:attrNameLst>
+                          </p:cBhvr>
+                          <p:to>
+                            <p:strVal val="visible"/>
+                          </p:to>
+                        </p:set>
+                        <p:anim calcmode="lin" valueType="num">
+                          <p:cBhvr additive="base">
+                            <p:cTn id="23" dur="500" fill="hold"/>
+                            <p:tgtEl>
+                              <p:spTgt spid="10"/>
+                            </p:tgtEl>
+                            <p:attrNameLst>
+                              <p:attrName>style.opacity</p:attrName>
+                            </p:attrNameLst>
+                          </p:cBhvr>
+                          <p:tavLst>
+                            <p:tav tm="0">
+                              <p:val>
+                                <p:fltVal val="0"/>
+                              </p:val>
+                            </p:tav>
+                            <p:tav tm="100000">
+                              <p:val>
+                                <p:fltVal val="1"/>
+                              </p:val>
+                            </p:tav>
+                          </p:tavLst>
+                        </p:anim>
+                      </p:childTnLst>
+                    </p:cTn>
+                  </p:par>
+                  <p:par>
+                    <p:cTn id="24" presetID="10" presetClass="entr" presetSubtype="0" fill="hold" grpId="0" nodeType="clickEffect">
+                      <p:stCondLst>
+                        <p:cond delay="0"/>
+                      </p:stCondLst>
+                      <p:childTnLst>
+                        <p:set>
+                          <p:cBhvr>
+                            <p:cTn id="25" dur="1" fill="hold">
+                              <p:stCondLst>
+                                <p:cond delay="0"/>
+                              </p:stCondLst>
+                            </p:cTn>
+                            <p:tgtEl>
                               <p:spTgt spid="11"/>
+                            </p:tgtEl>
+                            <p:attrNameLst>
+                              <p:attrName>style.visibility</p:attrName>
+                            </p:attrNameLst>
+                          </p:cBhvr>
+                          <p:to>
+                            <p:strVal val="visible"/>
+                          </p:to>
+                        </p:set>
+                        <p:anim calcmode="lin" valueType="num">
+                          <p:cBhvr additive="base">
+                            <p:cTn id="26" dur="500" fill="hold"/>
+                            <p:tgtEl>
+                              <p:spTgt spid="11"/>
+                            </p:tgtEl>
+                            <p:attrNameLst>
+                              <p:attrName>style.opacity</p:attrName>
+                            </p:attrNameLst>
+                          </p:cBhvr>
+                          <p:tavLst>
+                            <p:tav tm="0">
+                              <p:val>
+                                <p:fltVal val="0"/>
+                              </p:val>
+                            </p:tav>
+                            <p:tav tm="100000">
+                              <p:val>
+                                <p:fltVal val="1"/>
+                              </p:val>
+                            </p:tav>
+                          </p:tavLst>
+                        </p:anim>
+                      </p:childTnLst>
+                    </p:cTn>
+                  </p:par>
+                  <p:par>
+                    <p:cTn id="27" presetID="10" presetClass="entr" presetSubtype="0" fill="hold" grpId="0" nodeType="clickEffect">
+                      <p:stCondLst>
+                        <p:cond delay="0"/>
+                      </p:stCondLst>
+                      <p:childTnLst>
+                        <p:set>
+                          <p:cBhvr>
+                            <p:cTn id="28" dur="1" fill="hold">
+                              <p:stCondLst>
+                                <p:cond delay="0"/>
+                              </p:stCondLst>
+                            </p:cTn>
+                            <p:tgtEl>
+                              <p:spTgt spid="12"/>
+                            </p:tgtEl>
+                            <p:attrNameLst>
+                              <p:attrName>style.visibility</p:attrName>
+                            </p:attrNameLst>
+                          </p:cBhvr>
+                          <p:to>
+                            <p:strVal val="visible"/>
+                          </p:to>
+                        </p:set>
+                        <p:anim calcmode="lin" valueType="num">
+                          <p:cBhvr additive="base">
+                            <p:cTn id="29" dur="500" fill="hold"/>
+                            <p:tgtEl>
+                              <p:spTgt spid="12"/>
                             </p:tgtEl>
                             <p:attrNameLst>
                               <p:attrName>style.opacity</p:attrName>
@@ -10105,7 +10521,7 @@
         <p:spPr>
           <a:xfrm>
             <a:off x="822960" y="1691640"/>
-            <a:ext cx="5044287" cy="2377440"/>
+            <a:ext cx="5044287" cy="2468880"/>
           </a:xfrm>
           <a:prstGeom prst="rect">
             <a:avLst/>
@@ -10172,7 +10588,7 @@
         </p:nvSpPr>
         <p:spPr>
           <a:xfrm>
-            <a:off x="2971800" y="2103120"/>
+            <a:off x="2971800" y="2148840"/>
             <a:ext cx="1752447" cy="548640"/>
           </a:xfrm>
           <a:prstGeom prst="rect">
@@ -10187,7 +10603,7 @@
           <a:lstStyle/>
           <a:p>
             <a:r>
-              <a:rPr sz="2400" b="1">
+              <a:rPr sz="2100" b="1">
                 <a:solidFill>
                   <a:srgbClr val="F4F1EC"/>
                 </a:solidFill>
@@ -10206,7 +10622,7 @@
         </p:nvSpPr>
         <p:spPr>
           <a:xfrm>
-            <a:off x="2971800" y="2651760"/>
+            <a:off x="2971800" y="2697480"/>
             <a:ext cx="1752447" cy="457200"/>
           </a:xfrm>
           <a:prstGeom prst="rect">
@@ -10240,7 +10656,7 @@
         </p:nvSpPr>
         <p:spPr>
           <a:xfrm>
-            <a:off x="2971800" y="3108960"/>
+            <a:off x="2971800" y="3154680"/>
             <a:ext cx="1752447" cy="365760"/>
           </a:xfrm>
           <a:prstGeom prst="rect">
@@ -10282,8 +10698,8 @@
         </p:blipFill>
         <p:spPr>
           <a:xfrm>
-            <a:off x="4495647" y="2194560"/>
-            <a:ext cx="1097280" cy="1097280"/>
+            <a:off x="4815687" y="2148840"/>
+            <a:ext cx="758952" cy="758952"/>
           </a:xfrm>
           <a:prstGeom prst="rect">
             <a:avLst/>
@@ -10299,7 +10715,7 @@
         <p:spPr>
           <a:xfrm>
             <a:off x="6324447" y="1691640"/>
-            <a:ext cx="5044287" cy="2377440"/>
+            <a:ext cx="5044287" cy="2468880"/>
           </a:xfrm>
           <a:prstGeom prst="rect">
             <a:avLst/>
@@ -10366,7 +10782,7 @@
         </p:nvSpPr>
         <p:spPr>
           <a:xfrm>
-            <a:off x="8473287" y="2103120"/>
+            <a:off x="8473287" y="2148840"/>
             <a:ext cx="1752447" cy="548640"/>
           </a:xfrm>
           <a:prstGeom prst="rect">
@@ -10381,7 +10797,7 @@
           <a:lstStyle/>
           <a:p>
             <a:r>
-              <a:rPr sz="2400" b="1">
+              <a:rPr sz="2100" b="1">
                 <a:solidFill>
                   <a:srgbClr val="F4F1EC"/>
                 </a:solidFill>
@@ -10400,7 +10816,7 @@
         </p:nvSpPr>
         <p:spPr>
           <a:xfrm>
-            <a:off x="8473287" y="2651760"/>
+            <a:off x="8473287" y="2697480"/>
             <a:ext cx="1752447" cy="457200"/>
           </a:xfrm>
           <a:prstGeom prst="rect">
@@ -10434,7 +10850,7 @@
         </p:nvSpPr>
         <p:spPr>
           <a:xfrm>
-            <a:off x="8473287" y="3108960"/>
+            <a:off x="8473287" y="3154680"/>
             <a:ext cx="1752447" cy="365760"/>
           </a:xfrm>
           <a:prstGeom prst="rect">
@@ -10476,8 +10892,8 @@
         </p:blipFill>
         <p:spPr>
           <a:xfrm>
-            <a:off x="9997135" y="2194560"/>
-            <a:ext cx="1097280" cy="1097280"/>
+            <a:off x="10317175" y="2148840"/>
+            <a:ext cx="758952" cy="758952"/>
           </a:xfrm>
           <a:prstGeom prst="rect">
             <a:avLst/>
@@ -15240,7 +15656,7 @@
                 </a:solidFill>
                 <a:latin typeface="Montserrat"/>
               </a:rPr>
-              <a:t>4 НЕЗАВИСИМЫХ СЕССИИ + ЖУРНАЛ ДЕЙСТВИЙ УСТРОЙСТВА</a:t>
+              <a:t>4 НЕЗАВИСИМЫЕ СЕССИИ В КОРПУСЕ + ЖУРНАЛ ДЕЙСТВИЙ УСТРОЙСТВА</a:t>
             </a:r>
           </a:p>
         </p:txBody>
@@ -15532,7 +15948,7 @@
                 </a:solidFill>
                 <a:latin typeface="Montserrat"/>
               </a:rPr>
-              <a:t>Значение 2 повторяется в 4 независимых сессиях и связано с действием «изменить настройку» в журнале</a:t>
+              <a:t>Значение 2 повторяется в 4 независимых сессиях корпуса и связано с действием «изменить настройку» в журнале</a:t>
             </a:r>
           </a:p>
         </p:txBody>
@@ -15909,7 +16325,7 @@
     </a:clrScheme>
     <a:fontScheme name="Office">
       <a:majorFont>
-        <a:latin typeface="Calibri"/>
+        <a:latin typeface="Montserrat"/>
         <a:ea typeface=""/>
         <a:cs typeface=""/>
         <a:font script="Jpan" typeface="ＭＳ Ｐゴシック"/>
@@ -15944,7 +16360,7 @@
         <a:font script="Geor" typeface="Sylfaen"/>
       </a:majorFont>
       <a:minorFont>
-        <a:latin typeface="Calibri"/>
+        <a:latin typeface="Montserrat"/>
         <a:ea typeface=""/>
         <a:cs typeface=""/>
         <a:font script="Jpan" typeface="ＭＳ Ｐゴシック"/>

--- a/presentation/slides.pptx
+++ b/presentation/slides.pptx
@@ -19,11 +19,6 @@
     <p:sldId id="267" r:id="rId19"/>
     <p:sldId id="268" r:id="rId20"/>
     <p:sldId id="269" r:id="rId21"/>
-    <p:sldId id="270" r:id="rId22"/>
-    <p:sldId id="271" r:id="rId23"/>
-    <p:sldId id="272" r:id="rId24"/>
-    <p:sldId id="273" r:id="rId25"/>
-    <p:sldId id="274" r:id="rId26"/>
   </p:sldIdLst>
   <p:sldSz cx="12191695" cy="6858000" type="screen4x3"/>
   <p:notesSz cx="6858000" cy="9144000"/>
@@ -125,17 +120,17 @@
   <p:embeddedFontLst>
     <p:embeddedFont>
       <p:font typeface="Tektur"/>
-      <p:regular r:id="rId27" fontKey="{27E04CAF-4F9E-C315-3E78-7ADC5AE0D597}"/>
-      <p:bold r:id="rId28" fontKey="{A12660F0-7690-25AC-9BE9-6509C0A8B2A5}"/>
+      <p:regular r:id="rId22" fontKey="{27E04CAF-4F9E-C315-3E78-7ADC5AE0D597}"/>
+      <p:bold r:id="rId23" fontKey="{A12660F0-7690-25AC-9BE9-6509C0A8B2A5}"/>
     </p:embeddedFont>
     <p:embeddedFont>
       <p:font typeface="Montserrat"/>
-      <p:regular r:id="rId29" fontKey="{3547397D-CEC3-B89A-5FB5-020C9CB6E4DD}"/>
-      <p:bold r:id="rId30" fontKey="{0CB8D5B1-66EF-C706-0E19-6341EC3D8E46}"/>
+      <p:regular r:id="rId24" fontKey="{3547397D-CEC3-B89A-5FB5-020C9CB6E4DD}"/>
+      <p:bold r:id="rId25" fontKey="{0CB8D5B1-66EF-C706-0E19-6341EC3D8E46}"/>
     </p:embeddedFont>
     <p:embeddedFont>
       <p:font typeface="JetBrains Mono"/>
-      <p:regular r:id="rId31" fontKey="{C6EB8399-2A56-D694-A331-105094B34A55}"/>
+      <p:regular r:id="rId26" fontKey="{C6EB8399-2A56-D694-A331-105094B34A55}"/>
     </p:embeddedFont>
   </p:embeddedFontLst>
 </p:presentation>
@@ -632,6 +627,76 @@
 </file>
 
 <file path=ppt/notesSlides/notesSlide3.xml><?xml version="1.0" encoding="utf-8"?>
+<p:notes xmlns:a="http://schemas.openxmlformats.org/drawingml/2006/main" xmlns:p="http://schemas.openxmlformats.org/presentationml/2006/main" xmlns:r="http://schemas.openxmlformats.org/officeDocument/2006/relationships">
+  <p:cSld>
+    <p:spTree>
+      <p:nvGrpSpPr>
+        <p:cNvPr id="1" name=""/>
+        <p:cNvGrpSpPr/>
+        <p:nvPr/>
+      </p:nvGrpSpPr>
+      <p:grpSpPr>
+        <a:xfrm>
+          <a:off x="0" y="0"/>
+          <a:ext cx="0" cy="0"/>
+          <a:chOff x="0" y="0"/>
+          <a:chExt cx="0" cy="0"/>
+        </a:xfrm>
+      </p:grpSpPr>
+      <p:sp>
+        <p:nvSpPr>
+          <p:cNvPr id="2" name="Slide Image Placeholder 1"/>
+          <p:cNvSpPr>
+            <a:spLocks noGrp="1"/>
+          </p:cNvSpPr>
+          <p:nvPr>
+            <p:ph type="sldImg" idx="2"/>
+          </p:nvPr>
+        </p:nvSpPr>
+        <p:spPr/>
+      </p:sp>
+      <p:sp>
+        <p:nvSpPr>
+          <p:cNvPr id="3" name="Notes Placeholder 2"/>
+          <p:cNvSpPr>
+            <a:spLocks noGrp="1"/>
+          </p:cNvSpPr>
+          <p:nvPr>
+            <p:ph type="body" idx="3" sz="quarter"/>
+          </p:nvPr>
+        </p:nvSpPr>
+        <p:spPr/>
+        <p:txBody>
+          <a:bodyPr/>
+          <a:lstStyle/>
+          <a:p>
+            <a:r>
+              <a:t>Постановка задачи и наша первая гипотеза о смещении поля длины.</a:t>
+            </a:r>
+          </a:p>
+        </p:txBody>
+      </p:sp>
+      <p:sp>
+        <p:nvSpPr>
+          <p:cNvPr id="4" name="Slide Number Placeholder 3"/>
+          <p:cNvSpPr>
+            <a:spLocks noGrp="1"/>
+          </p:cNvSpPr>
+          <p:nvPr>
+            <p:ph type="sldNum" idx="5" sz="quarter"/>
+          </p:nvPr>
+        </p:nvSpPr>
+        <p:spPr/>
+      </p:sp>
+    </p:spTree>
+  </p:cSld>
+  <p:clrMapOvr>
+    <a:masterClrMapping/>
+  </p:clrMapOvr>
+</p:notes>
+</file>
+
+<file path=ppt/notesSlides/notesSlide4.xml><?xml version="1.0" encoding="utf-8"?>
 <p:notes xmlns:a="http://schemas.openxmlformats.org/drawingml/2006/main" xmlns:p="http://schemas.openxmlformats.org/presentationml/2006/main" xmlns:r="http://schemas.openxmlformats.org/officeDocument/2006/relationships">
   <p:cSld>
     <p:spTree>
@@ -3814,7 +3879,7 @@
         <p:spPr>
           <a:xfrm>
             <a:off x="1828800" y="1207008"/>
-            <a:ext cx="7315200" cy="457200"/>
+            <a:ext cx="6766560" cy="457200"/>
           </a:xfrm>
           <a:prstGeom prst="rect">
             <a:avLst/>
@@ -3847,8 +3912,8 @@
         </p:nvSpPr>
         <p:spPr>
           <a:xfrm>
-            <a:off x="822960" y="2148840"/>
-            <a:ext cx="10545775" cy="1371600"/>
+            <a:off x="8991295" y="969264"/>
+            <a:ext cx="2377440" cy="274320"/>
           </a:xfrm>
           <a:prstGeom prst="rect">
             <a:avLst/>
@@ -3861,6 +3926,109 @@
           </a:bodyPr>
           <a:lstStyle/>
           <a:p>
+            <a:pPr algn="r"/>
+            <a:r>
+              <a:rPr sz="1100" b="0">
+                <a:solidFill>
+                  <a:srgbClr val="A8A29E"/>
+                </a:solidFill>
+                <a:latin typeface="JetBrains Mono"/>
+              </a:rPr>
+              <a:t>КЕЙС ЗАКАЗЧИКА</a:t>
+            </a:r>
+          </a:p>
+        </p:txBody>
+      </p:sp>
+      <p:sp>
+        <p:nvSpPr>
+          <p:cNvPr id="7" name="Rectangle 6"/>
+          <p:cNvSpPr/>
+          <p:nvPr/>
+        </p:nvSpPr>
+        <p:spPr>
+          <a:xfrm>
+            <a:off x="8826703" y="1280160"/>
+            <a:ext cx="2706624" cy="804672"/>
+          </a:xfrm>
+          <a:prstGeom prst="rect">
+            <a:avLst/>
+          </a:prstGeom>
+          <a:solidFill>
+            <a:srgbClr val="FFFFFF"/>
+          </a:solidFill>
+          <a:ln>
+            <a:noFill/>
+          </a:ln>
+          <a:effectLst/>
+        </p:spPr>
+        <p:style>
+          <a:lnRef idx="1">
+            <a:schemeClr val="accent1"/>
+          </a:lnRef>
+          <a:fillRef idx="3">
+            <a:schemeClr val="accent1"/>
+          </a:fillRef>
+          <a:effectRef idx="2">
+            <a:schemeClr val="accent1"/>
+          </a:effectRef>
+          <a:fontRef idx="minor">
+            <a:schemeClr val="lt1"/>
+          </a:fontRef>
+        </p:style>
+        <p:txBody>
+          <a:bodyPr rtlCol="0" anchor="ctr"/>
+          <a:lstStyle/>
+          <a:p>
+            <a:pPr algn="ctr"/>
+          </a:p>
+        </p:txBody>
+      </p:sp>
+      <p:pic>
+        <p:nvPicPr>
+          <p:cNvPr id="8" name="Picture 7" descr="madrigal-logo.png"/>
+          <p:cNvPicPr>
+            <a:picLocks noChangeAspect="1"/>
+          </p:cNvPicPr>
+          <p:nvPr/>
+        </p:nvPicPr>
+        <p:blipFill>
+          <a:blip r:embed="rId3"/>
+          <a:stretch>
+            <a:fillRect/>
+          </a:stretch>
+        </p:blipFill>
+        <p:spPr>
+          <a:xfrm>
+            <a:off x="8991295" y="1426464"/>
+            <a:ext cx="2377440" cy="497677"/>
+          </a:xfrm>
+          <a:prstGeom prst="rect">
+            <a:avLst/>
+          </a:prstGeom>
+        </p:spPr>
+      </p:pic>
+      <p:sp>
+        <p:nvSpPr>
+          <p:cNvPr id="9" name="TextBox 8"/>
+          <p:cNvSpPr txBox="1"/>
+          <p:nvPr/>
+        </p:nvSpPr>
+        <p:spPr>
+          <a:xfrm>
+            <a:off x="822960" y="2148840"/>
+            <a:ext cx="10545775" cy="1371600"/>
+          </a:xfrm>
+          <a:prstGeom prst="rect">
+            <a:avLst/>
+          </a:prstGeom>
+          <a:noFill/>
+        </p:spPr>
+        <p:txBody>
+          <a:bodyPr wrap="square" anchor="t">
+            <a:spAutoFit/>
+          </a:bodyPr>
+          <a:lstStyle/>
+          <a:p>
             <a:r>
               <a:rPr sz="5600" b="1">
                 <a:solidFill>
@@ -3875,7 +4043,7 @@
       </p:sp>
       <p:sp>
         <p:nvSpPr>
-          <p:cNvPr id="7" name="TextBox 6"/>
+          <p:cNvPr id="10" name="TextBox 9"/>
           <p:cNvSpPr txBox="1"/>
           <p:nvPr/>
         </p:nvSpPr>
@@ -3909,7 +4077,7 @@
       </p:sp>
       <p:sp>
         <p:nvSpPr>
-          <p:cNvPr id="8" name="Rectangle 7"/>
+          <p:cNvPr id="11" name="Rectangle 10"/>
           <p:cNvSpPr/>
           <p:nvPr/>
         </p:nvSpPr>
@@ -3953,7 +4121,7 @@
       </p:sp>
       <p:sp>
         <p:nvSpPr>
-          <p:cNvPr id="9" name="TextBox 8"/>
+          <p:cNvPr id="12" name="TextBox 11"/>
           <p:cNvSpPr txBox="1"/>
           <p:nvPr/>
         </p:nvSpPr>
@@ -3981,6 +4149,40 @@
                 <a:latin typeface="JetBrains Mono"/>
               </a:rPr>
               <a:t>UMIRHack 2026 · кейс #02 · Мадригал · команда HTTP 418</a:t>
+            </a:r>
+          </a:p>
+        </p:txBody>
+      </p:sp>
+      <p:sp>
+        <p:nvSpPr>
+          <p:cNvPr id="13" name="TextBox 12"/>
+          <p:cNvSpPr txBox="1"/>
+          <p:nvPr/>
+        </p:nvSpPr>
+        <p:spPr>
+          <a:xfrm>
+            <a:off x="822960" y="5029200"/>
+            <a:ext cx="10545775" cy="457200"/>
+          </a:xfrm>
+          <a:prstGeom prst="rect">
+            <a:avLst/>
+          </a:prstGeom>
+          <a:noFill/>
+        </p:spPr>
+        <p:txBody>
+          <a:bodyPr wrap="square" anchor="t">
+            <a:spAutoFit/>
+          </a:bodyPr>
+          <a:lstStyle/>
+          <a:p>
+            <a:r>
+              <a:rPr sz="1500" b="0">
+                <a:solidFill>
+                  <a:srgbClr val="D0603A"/>
+                </a:solidFill>
+                <a:latin typeface="JetBrains Mono"/>
+              </a:rPr>
+              <a:t>Python 3.12 · PySide6 · dpkt · pytest · Docker</a:t>
             </a:r>
           </a:p>
         </p:txBody>
@@ -4111,8 +4313,8 @@
         </p:nvSpPr>
         <p:spPr>
           <a:xfrm>
-            <a:off x="822960" y="2011680"/>
-            <a:ext cx="10545775" cy="1280160"/>
+            <a:off x="822960" y="457200"/>
+            <a:ext cx="10545775" cy="1051560"/>
           </a:xfrm>
           <a:prstGeom prst="rect">
             <a:avLst/>
@@ -4126,13 +4328,13 @@
           <a:lstStyle/>
           <a:p>
             <a:r>
-              <a:rPr sz="7200" b="1">
-                <a:solidFill>
-                  <a:srgbClr val="D0603A"/>
+              <a:rPr sz="3000" b="1">
+                <a:solidFill>
+                  <a:srgbClr val="F4F1EC"/>
                 </a:solidFill>
                 <a:latin typeface="Tektur"/>
               </a:rPr>
-              <a:t>01</a:t>
+              <a:t>Осколки IP собираются в одно сообщение</a:t>
             </a:r>
           </a:p>
         </p:txBody>
@@ -4145,8 +4347,8 @@
         </p:nvSpPr>
         <p:spPr>
           <a:xfrm>
-            <a:off x="822960" y="3200400"/>
-            <a:ext cx="10545775" cy="914400"/>
+            <a:off x="822960" y="1417320"/>
+            <a:ext cx="10545775" cy="457200"/>
           </a:xfrm>
           <a:prstGeom prst="rect">
             <a:avLst/>
@@ -4160,13 +4362,13 @@
           <a:lstStyle/>
           <a:p>
             <a:r>
-              <a:rPr sz="4000" b="1">
-                <a:solidFill>
-                  <a:srgbClr val="F4F1EC"/>
-                </a:solidFill>
-                <a:latin typeface="Tektur"/>
+              <a:rPr sz="1400" b="0">
+                <a:solidFill>
+                  <a:srgbClr val="A8A29E"/>
+                </a:solidFill>
+                <a:latin typeface="Montserrat"/>
               </a:rPr>
-              <a:t>Что получилось</a:t>
+              <a:t>IPv4 и IPv6 по своим правилам. Сессия знает, из каких пакетов собрана: статус reassembled_from</a:t>
             </a:r>
           </a:p>
         </p:txBody>
@@ -4179,30 +4381,19 @@
         </p:nvSpPr>
         <p:spPr>
           <a:xfrm>
-            <a:off x="822960" y="4206240"/>
-            <a:ext cx="3108960" cy="82296"/>
-          </a:xfrm>
-          <a:prstGeom prst="rect">
-            <a:avLst/>
-          </a:prstGeom>
+            <a:off x="822960" y="1783080"/>
+            <a:ext cx="5394960" cy="1188720"/>
+          </a:xfrm>
+          <a:prstGeom prst="rect">
+            <a:avLst/>
+          </a:prstGeom>
+          <a:solidFill>
+            <a:srgbClr val="1F2124"/>
+          </a:solidFill>
           <a:ln>
             <a:noFill/>
           </a:ln>
           <a:effectLst/>
-          <a:gradFill rotWithShape="1">
-            <a:gsLst>
-              <a:gs pos="0">
-                <a:srgbClr val="410913"/>
-              </a:gs>
-              <a:gs pos="50000">
-                <a:srgbClr val="610D1C"/>
-              </a:gs>
-              <a:gs pos="100000">
-                <a:srgbClr val="A2391D"/>
-              </a:gs>
-            </a:gsLst>
-            <a:lin ang="2700000"/>
-          </a:gradFill>
         </p:spPr>
         <p:style>
           <a:lnRef idx="1">
@@ -4234,8 +4425,8 @@
         </p:nvSpPr>
         <p:spPr>
           <a:xfrm>
-            <a:off x="822960" y="4480560"/>
-            <a:ext cx="10545775" cy="457200"/>
+            <a:off x="1097280" y="1965960"/>
+            <a:ext cx="4846320" cy="822960"/>
           </a:xfrm>
           <a:prstGeom prst="rect">
             <a:avLst/>
@@ -4249,156 +4440,33 @@
           <a:lstStyle/>
           <a:p>
             <a:r>
-              <a:rPr sz="1600" b="0">
-                <a:solidFill>
-                  <a:srgbClr val="A8A29E"/>
+              <a:rPr sz="1500" b="0">
+                <a:solidFill>
+                  <a:srgbClr val="F4F1EC"/>
                 </a:solidFill>
                 <a:latin typeface="Montserrat"/>
               </a:rPr>
-              <a:t>Точность, покрытие корпуса организаторов, ресурсы</a:t>
-            </a:r>
-          </a:p>
-        </p:txBody>
-      </p:sp>
-      <p:sp>
-        <p:nvSpPr>
-          <p:cNvPr id="8" name="TextBox 7"/>
-          <p:cNvSpPr txBox="1"/>
-          <p:nvPr/>
-        </p:nvSpPr>
-        <p:spPr>
-          <a:xfrm>
-            <a:off x="822960" y="6446520"/>
-            <a:ext cx="3840480" cy="274320"/>
-          </a:xfrm>
-          <a:prstGeom prst="rect">
-            <a:avLst/>
-          </a:prstGeom>
-          <a:noFill/>
-        </p:spPr>
-        <p:txBody>
-          <a:bodyPr wrap="square" anchor="t">
-            <a:spAutoFit/>
-          </a:bodyPr>
-          <a:lstStyle/>
-          <a:p>
-            <a:r>
-              <a:rPr sz="1000" b="0">
-                <a:solidFill>
-                  <a:srgbClr val="A8A29E"/>
-                </a:solidFill>
-                <a:latin typeface="Montserrat"/>
-              </a:rPr>
-              <a:t>Команда HTTP 418 · кейс #02 · Мадригал</a:t>
-            </a:r>
-          </a:p>
-        </p:txBody>
-      </p:sp>
-      <p:sp>
-        <p:nvSpPr>
-          <p:cNvPr id="9" name="TextBox 8"/>
-          <p:cNvSpPr txBox="1"/>
-          <p:nvPr/>
-        </p:nvSpPr>
-        <p:spPr>
-          <a:xfrm>
-            <a:off x="4389120" y="6446520"/>
-            <a:ext cx="3383280" cy="274320"/>
-          </a:xfrm>
-          <a:prstGeom prst="rect">
-            <a:avLst/>
-          </a:prstGeom>
-          <a:noFill/>
-        </p:spPr>
-        <p:txBody>
-          <a:bodyPr wrap="square" anchor="t">
-            <a:spAutoFit/>
-          </a:bodyPr>
-          <a:lstStyle/>
-          <a:p>
-            <a:pPr algn="ctr"/>
-            <a:r>
-              <a:rPr sz="1000" b="0">
-                <a:solidFill>
-                  <a:srgbClr val="A8A29E"/>
-                </a:solidFill>
-                <a:latin typeface="Montserrat"/>
-              </a:rPr>
-              <a:t>Результаты</a:t>
-            </a:r>
-          </a:p>
-        </p:txBody>
-      </p:sp>
-      <p:sp>
-        <p:nvSpPr>
-          <p:cNvPr id="10" name="TextBox 9"/>
-          <p:cNvSpPr txBox="1"/>
-          <p:nvPr/>
-        </p:nvSpPr>
-        <p:spPr>
-          <a:xfrm>
-            <a:off x="8138160" y="6446520"/>
-            <a:ext cx="3200400" cy="274320"/>
-          </a:xfrm>
-          <a:prstGeom prst="rect">
-            <a:avLst/>
-          </a:prstGeom>
-          <a:noFill/>
-        </p:spPr>
-        <p:txBody>
-          <a:bodyPr wrap="square" anchor="t">
-            <a:spAutoFit/>
-          </a:bodyPr>
-          <a:lstStyle/>
-          <a:p>
-            <a:pPr algn="r"/>
-            <a:r>
-              <a:rPr sz="1000" b="0">
-                <a:solidFill>
-                  <a:srgbClr val="A8A29E"/>
-                </a:solidFill>
-                <a:latin typeface="Montserrat"/>
-              </a:rPr>
-              <a:t>10 / 19</a:t>
-            </a:r>
-          </a:p>
-        </p:txBody>
-      </p:sp>
-    </p:spTree>
-  </p:cSld>
-  <p:clrMapOvr>
-    <a:masterClrMapping/>
-  </p:clrMapOvr>
-  <p:transition spd="med" fade="1"/>
-</p:sld>
-</file>
-
-<file path=ppt/slides/slide11.xml><?xml version="1.0" encoding="utf-8"?>
-<p:sld xmlns:a="http://schemas.openxmlformats.org/drawingml/2006/main" xmlns:p="http://schemas.openxmlformats.org/presentationml/2006/main" xmlns:r="http://schemas.openxmlformats.org/officeDocument/2006/relationships">
-  <p:cSld>
-    <p:spTree>
-      <p:nvGrpSpPr>
-        <p:cNvPr id="1" name=""/>
-        <p:cNvGrpSpPr/>
-        <p:nvPr/>
-      </p:nvGrpSpPr>
-      <p:grpSpPr/>
-      <p:sp>
-        <p:nvSpPr>
-          <p:cNvPr id="2" name="Rectangle 1"/>
+              <a:t>IPv4 группирует по id и protocol, offset в единицах по 8 байт; неполный фрагмент не собирается.</a:t>
+            </a:r>
+          </a:p>
+        </p:txBody>
+      </p:sp>
+      <p:sp>
+        <p:nvSpPr>
+          <p:cNvPr id="8" name="Rectangle 7"/>
           <p:cNvSpPr/>
           <p:nvPr/>
         </p:nvSpPr>
         <p:spPr>
           <a:xfrm>
-            <a:off x="0" y="0"/>
-            <a:ext cx="12191695" cy="6858000"/>
+            <a:off x="822960" y="3154680"/>
+            <a:ext cx="5394960" cy="1188720"/>
           </a:xfrm>
           <a:prstGeom prst="rect">
             <a:avLst/>
           </a:prstGeom>
           <a:solidFill>
-            <a:srgbClr val="0E1011"/>
+            <a:srgbClr val="1F2124"/>
           </a:solidFill>
           <a:ln>
             <a:noFill/>
@@ -4429,69 +4497,14 @@
       </p:sp>
       <p:sp>
         <p:nvSpPr>
-          <p:cNvPr id="3" name="Rectangle 2"/>
-          <p:cNvSpPr/>
-          <p:nvPr/>
-        </p:nvSpPr>
-        <p:spPr>
-          <a:xfrm>
-            <a:off x="0" y="0"/>
-            <a:ext cx="73152" cy="6858000"/>
-          </a:xfrm>
-          <a:prstGeom prst="rect">
-            <a:avLst/>
-          </a:prstGeom>
-          <a:ln>
-            <a:noFill/>
-          </a:ln>
-          <a:effectLst/>
-          <a:gradFill rotWithShape="1">
-            <a:gsLst>
-              <a:gs pos="0">
-                <a:srgbClr val="410913"/>
-              </a:gs>
-              <a:gs pos="50000">
-                <a:srgbClr val="610D1C"/>
-              </a:gs>
-              <a:gs pos="100000">
-                <a:srgbClr val="A2391D"/>
-              </a:gs>
-            </a:gsLst>
-            <a:lin ang="2700000"/>
-          </a:gradFill>
-        </p:spPr>
-        <p:style>
-          <a:lnRef idx="1">
-            <a:schemeClr val="accent1"/>
-          </a:lnRef>
-          <a:fillRef idx="3">
-            <a:schemeClr val="accent1"/>
-          </a:fillRef>
-          <a:effectRef idx="2">
-            <a:schemeClr val="accent1"/>
-          </a:effectRef>
-          <a:fontRef idx="minor">
-            <a:schemeClr val="lt1"/>
-          </a:fontRef>
-        </p:style>
-        <p:txBody>
-          <a:bodyPr rtlCol="0" anchor="ctr"/>
-          <a:lstStyle/>
-          <a:p>
-            <a:pPr algn="ctr"/>
-          </a:p>
-        </p:txBody>
-      </p:sp>
-      <p:sp>
-        <p:nvSpPr>
-          <p:cNvPr id="4" name="TextBox 3"/>
+          <p:cNvPr id="9" name="TextBox 8"/>
           <p:cNvSpPr txBox="1"/>
           <p:nvPr/>
         </p:nvSpPr>
         <p:spPr>
           <a:xfrm>
-            <a:off x="822960" y="1188720"/>
-            <a:ext cx="10545775" cy="822960"/>
+            <a:off x="1097280" y="3337560"/>
+            <a:ext cx="4846320" cy="822960"/>
           </a:xfrm>
           <a:prstGeom prst="rect">
             <a:avLst/>
@@ -4505,27 +4518,27 @@
           <a:lstStyle/>
           <a:p>
             <a:r>
-              <a:rPr sz="3000" b="1">
+              <a:rPr sz="1500" b="0">
                 <a:solidFill>
                   <a:srgbClr val="F4F1EC"/>
                 </a:solidFill>
-                <a:latin typeface="Tektur"/>
+                <a:latin typeface="Montserrat"/>
               </a:rPr>
-              <a:t>Уточнили правило: 60 из 140 → 140 из 140</a:t>
-            </a:r>
-          </a:p>
-        </p:txBody>
-      </p:sp>
-      <p:sp>
-        <p:nvSpPr>
-          <p:cNvPr id="5" name="TextBox 4"/>
+              <a:t>IPv6 группирует по id; перекрытие не допускается — датаграмма отбрасывается.</a:t>
+            </a:r>
+          </a:p>
+        </p:txBody>
+      </p:sp>
+      <p:sp>
+        <p:nvSpPr>
+          <p:cNvPr id="10" name="TextBox 9"/>
           <p:cNvSpPr txBox="1"/>
           <p:nvPr/>
         </p:nvSpPr>
         <p:spPr>
           <a:xfrm>
-            <a:off x="822960" y="1965960"/>
-            <a:ext cx="10545775" cy="457200"/>
+            <a:off x="6126480" y="2194560"/>
+            <a:ext cx="5242255" cy="731520"/>
           </a:xfrm>
           <a:prstGeom prst="rect">
             <a:avLst/>
@@ -4538,1222 +4551,29 @@
           </a:bodyPr>
           <a:lstStyle/>
           <a:p>
-            <a:r>
-              <a:rPr sz="1400" b="0">
-                <a:solidFill>
-                  <a:srgbClr val="A8A29E"/>
-                </a:solidFill>
-                <a:latin typeface="Montserrat"/>
-              </a:rPr>
-              <a:t>На корпусе уточнения. Отдельно проверено на реальном датасете: 45 + 45, precision 1.00</a:t>
-            </a:r>
-          </a:p>
-        </p:txBody>
-      </p:sp>
-      <p:sp>
-        <p:nvSpPr>
-          <p:cNvPr id="6" name="TextBox 5"/>
-          <p:cNvSpPr txBox="1"/>
-          <p:nvPr/>
-        </p:nvSpPr>
-        <p:spPr>
-          <a:xfrm>
-            <a:off x="822960" y="5394960"/>
-            <a:ext cx="10545775" cy="548640"/>
-          </a:xfrm>
-          <a:prstGeom prst="rect">
-            <a:avLst/>
-          </a:prstGeom>
-          <a:noFill/>
-        </p:spPr>
-        <p:txBody>
-          <a:bodyPr wrap="square" anchor="t">
-            <a:spAutoFit/>
-          </a:bodyPr>
-          <a:lstStyle/>
-          <a:p>
-            <a:r>
-              <a:rPr sz="1600" b="0">
-                <a:solidFill>
-                  <a:srgbClr val="F4F1EC"/>
-                </a:solidFill>
-                <a:latin typeface="Montserrat"/>
-              </a:rPr>
-              <a:t>Было 60 matched из 140 и 80 контрпримеров. Стало 140 matched из 140 и ноль контрпримеров</a:t>
-            </a:r>
-          </a:p>
-        </p:txBody>
-      </p:sp>
-      <p:sp>
-        <p:nvSpPr>
-          <p:cNvPr id="7" name="TextBox 6"/>
-          <p:cNvSpPr txBox="1"/>
-          <p:nvPr/>
-        </p:nvSpPr>
-        <p:spPr>
-          <a:xfrm>
-            <a:off x="822960" y="2788920"/>
-            <a:ext cx="914400" cy="640080"/>
-          </a:xfrm>
-          <a:prstGeom prst="rect">
-            <a:avLst/>
-          </a:prstGeom>
-          <a:noFill/>
-        </p:spPr>
-        <p:txBody>
-          <a:bodyPr wrap="square" anchor="ctr">
-            <a:spAutoFit/>
-          </a:bodyPr>
-          <a:lstStyle/>
-          <a:p>
-            <a:r>
-              <a:rPr sz="2200" b="0">
-                <a:solidFill>
-                  <a:srgbClr val="A8A29E"/>
+            <a:pPr algn="ctr"/>
+            <a:r>
+              <a:rPr sz="2000" b="0">
+                <a:solidFill>
+                  <a:srgbClr val="D0603A"/>
                 </a:solidFill>
                 <a:latin typeface="JetBrains Mono"/>
               </a:rPr>
-              <a:t>v1</a:t>
-            </a:r>
-          </a:p>
-        </p:txBody>
-      </p:sp>
-      <p:sp>
-        <p:nvSpPr>
-          <p:cNvPr id="8" name="Rectangle 7"/>
+              <a:t>01 00 00 03 13 00 55 …  ▸ ▸ ▸ ▸ ▸ ▸ ▸</a:t>
+            </a:r>
+          </a:p>
+        </p:txBody>
+      </p:sp>
+      <p:sp>
+        <p:nvSpPr>
+          <p:cNvPr id="11" name="Rounded Rectangle 10"/>
           <p:cNvSpPr/>
           <p:nvPr/>
         </p:nvSpPr>
         <p:spPr>
           <a:xfrm>
-            <a:off x="1828800" y="2834640"/>
-            <a:ext cx="7436815" cy="548640"/>
-          </a:xfrm>
-          <a:prstGeom prst="rect">
-            <a:avLst/>
-          </a:prstGeom>
-          <a:solidFill>
-            <a:srgbClr val="26282B"/>
-          </a:solidFill>
-          <a:ln>
-            <a:noFill/>
-          </a:ln>
-          <a:effectLst/>
-        </p:spPr>
-        <p:style>
-          <a:lnRef idx="1">
-            <a:schemeClr val="accent1"/>
-          </a:lnRef>
-          <a:fillRef idx="3">
-            <a:schemeClr val="accent1"/>
-          </a:fillRef>
-          <a:effectRef idx="2">
-            <a:schemeClr val="accent1"/>
-          </a:effectRef>
-          <a:fontRef idx="minor">
-            <a:schemeClr val="lt1"/>
-          </a:fontRef>
-        </p:style>
-        <p:txBody>
-          <a:bodyPr rtlCol="0" anchor="ctr"/>
-          <a:lstStyle/>
-          <a:p>
-            <a:pPr algn="ctr"/>
-          </a:p>
-        </p:txBody>
-      </p:sp>
-      <p:sp>
-        <p:nvSpPr>
-          <p:cNvPr id="9" name="Rectangle 8"/>
-          <p:cNvSpPr/>
-          <p:nvPr/>
-        </p:nvSpPr>
-        <p:spPr>
-          <a:xfrm>
-            <a:off x="1828800" y="2834640"/>
-            <a:ext cx="3197830" cy="548640"/>
-          </a:xfrm>
-          <a:prstGeom prst="rect">
-            <a:avLst/>
-          </a:prstGeom>
-          <a:solidFill>
-            <a:srgbClr val="DC2626"/>
-          </a:solidFill>
-          <a:ln>
-            <a:noFill/>
-          </a:ln>
-          <a:effectLst/>
-        </p:spPr>
-        <p:style>
-          <a:lnRef idx="1">
-            <a:schemeClr val="accent1"/>
-          </a:lnRef>
-          <a:fillRef idx="3">
-            <a:schemeClr val="accent1"/>
-          </a:fillRef>
-          <a:effectRef idx="2">
-            <a:schemeClr val="accent1"/>
-          </a:effectRef>
-          <a:fontRef idx="minor">
-            <a:schemeClr val="lt1"/>
-          </a:fontRef>
-        </p:style>
-        <p:txBody>
-          <a:bodyPr rtlCol="0" anchor="ctr"/>
-          <a:lstStyle/>
-          <a:p>
-            <a:pPr algn="ctr"/>
-          </a:p>
-        </p:txBody>
-      </p:sp>
-      <p:sp>
-        <p:nvSpPr>
-          <p:cNvPr id="10" name="TextBox 9"/>
-          <p:cNvSpPr txBox="1"/>
-          <p:nvPr/>
-        </p:nvSpPr>
-        <p:spPr>
-          <a:xfrm>
-            <a:off x="9357055" y="2788920"/>
-            <a:ext cx="2011680" cy="640080"/>
-          </a:xfrm>
-          <a:prstGeom prst="rect">
-            <a:avLst/>
-          </a:prstGeom>
-          <a:noFill/>
-        </p:spPr>
-        <p:txBody>
-          <a:bodyPr wrap="square" anchor="ctr">
-            <a:spAutoFit/>
-          </a:bodyPr>
-          <a:lstStyle/>
-          <a:p>
-            <a:pPr algn="r"/>
-            <a:r>
-              <a:rPr sz="4000" b="1">
-                <a:solidFill>
-                  <a:srgbClr val="F4F1EC"/>
-                </a:solidFill>
-                <a:latin typeface="Tektur"/>
-              </a:rPr>
-              <a:t>0.43</a:t>
-            </a:r>
-          </a:p>
-        </p:txBody>
-      </p:sp>
-      <p:sp>
-        <p:nvSpPr>
-          <p:cNvPr id="11" name="TextBox 10"/>
-          <p:cNvSpPr txBox="1"/>
-          <p:nvPr/>
-        </p:nvSpPr>
-        <p:spPr>
-          <a:xfrm>
-            <a:off x="822960" y="3977640"/>
-            <a:ext cx="914400" cy="640080"/>
-          </a:xfrm>
-          <a:prstGeom prst="rect">
-            <a:avLst/>
-          </a:prstGeom>
-          <a:noFill/>
-        </p:spPr>
-        <p:txBody>
-          <a:bodyPr wrap="square" anchor="ctr">
-            <a:spAutoFit/>
-          </a:bodyPr>
-          <a:lstStyle/>
-          <a:p>
-            <a:r>
-              <a:rPr sz="2200" b="0">
-                <a:solidFill>
-                  <a:srgbClr val="A8A29E"/>
-                </a:solidFill>
-                <a:latin typeface="JetBrains Mono"/>
-              </a:rPr>
-              <a:t>v2</a:t>
-            </a:r>
-          </a:p>
-        </p:txBody>
-      </p:sp>
-      <p:sp>
-        <p:nvSpPr>
-          <p:cNvPr id="12" name="Rectangle 11"/>
-          <p:cNvSpPr/>
-          <p:nvPr/>
-        </p:nvSpPr>
-        <p:spPr>
-          <a:xfrm>
-            <a:off x="1828800" y="4023360"/>
-            <a:ext cx="7436815" cy="548640"/>
-          </a:xfrm>
-          <a:prstGeom prst="rect">
-            <a:avLst/>
-          </a:prstGeom>
-          <a:solidFill>
-            <a:srgbClr val="26282B"/>
-          </a:solidFill>
-          <a:ln>
-            <a:noFill/>
-          </a:ln>
-          <a:effectLst/>
-        </p:spPr>
-        <p:style>
-          <a:lnRef idx="1">
-            <a:schemeClr val="accent1"/>
-          </a:lnRef>
-          <a:fillRef idx="3">
-            <a:schemeClr val="accent1"/>
-          </a:fillRef>
-          <a:effectRef idx="2">
-            <a:schemeClr val="accent1"/>
-          </a:effectRef>
-          <a:fontRef idx="minor">
-            <a:schemeClr val="lt1"/>
-          </a:fontRef>
-        </p:style>
-        <p:txBody>
-          <a:bodyPr rtlCol="0" anchor="ctr"/>
-          <a:lstStyle/>
-          <a:p>
-            <a:pPr algn="ctr"/>
-          </a:p>
-        </p:txBody>
-      </p:sp>
-      <p:sp>
-        <p:nvSpPr>
-          <p:cNvPr id="13" name="Rectangle 12"/>
-          <p:cNvSpPr/>
-          <p:nvPr/>
-        </p:nvSpPr>
-        <p:spPr>
-          <a:xfrm>
-            <a:off x="1828800" y="4023360"/>
-            <a:ext cx="7436815" cy="548640"/>
-          </a:xfrm>
-          <a:prstGeom prst="rect">
-            <a:avLst/>
-          </a:prstGeom>
-          <a:solidFill>
-            <a:srgbClr val="16A34A"/>
-          </a:solidFill>
-          <a:ln>
-            <a:noFill/>
-          </a:ln>
-          <a:effectLst/>
-        </p:spPr>
-        <p:style>
-          <a:lnRef idx="1">
-            <a:schemeClr val="accent1"/>
-          </a:lnRef>
-          <a:fillRef idx="3">
-            <a:schemeClr val="accent1"/>
-          </a:fillRef>
-          <a:effectRef idx="2">
-            <a:schemeClr val="accent1"/>
-          </a:effectRef>
-          <a:fontRef idx="minor">
-            <a:schemeClr val="lt1"/>
-          </a:fontRef>
-        </p:style>
-        <p:txBody>
-          <a:bodyPr rtlCol="0" anchor="ctr"/>
-          <a:lstStyle/>
-          <a:p>
-            <a:pPr algn="ctr"/>
-          </a:p>
-        </p:txBody>
-      </p:sp>
-      <p:sp>
-        <p:nvSpPr>
-          <p:cNvPr id="14" name="TextBox 13"/>
-          <p:cNvSpPr txBox="1"/>
-          <p:nvPr/>
-        </p:nvSpPr>
-        <p:spPr>
-          <a:xfrm>
-            <a:off x="9357055" y="3977640"/>
-            <a:ext cx="2011680" cy="640080"/>
-          </a:xfrm>
-          <a:prstGeom prst="rect">
-            <a:avLst/>
-          </a:prstGeom>
-          <a:noFill/>
-        </p:spPr>
-        <p:txBody>
-          <a:bodyPr wrap="square" anchor="ctr">
-            <a:spAutoFit/>
-          </a:bodyPr>
-          <a:lstStyle/>
-          <a:p>
-            <a:pPr algn="r"/>
-            <a:r>
-              <a:rPr sz="4000" b="1">
-                <a:solidFill>
-                  <a:srgbClr val="F4F1EC"/>
-                </a:solidFill>
-                <a:latin typeface="Tektur"/>
-              </a:rPr>
-              <a:t>1.00</a:t>
-            </a:r>
-          </a:p>
-        </p:txBody>
-      </p:sp>
-      <p:sp>
-        <p:nvSpPr>
-          <p:cNvPr id="15" name="TextBox 14"/>
-          <p:cNvSpPr txBox="1"/>
-          <p:nvPr/>
-        </p:nvSpPr>
-        <p:spPr>
-          <a:xfrm>
-            <a:off x="822960" y="6446520"/>
-            <a:ext cx="3840480" cy="274320"/>
-          </a:xfrm>
-          <a:prstGeom prst="rect">
-            <a:avLst/>
-          </a:prstGeom>
-          <a:noFill/>
-        </p:spPr>
-        <p:txBody>
-          <a:bodyPr wrap="square" anchor="t">
-            <a:spAutoFit/>
-          </a:bodyPr>
-          <a:lstStyle/>
-          <a:p>
-            <a:r>
-              <a:rPr sz="1000" b="0">
-                <a:solidFill>
-                  <a:srgbClr val="A8A29E"/>
-                </a:solidFill>
-                <a:latin typeface="Montserrat"/>
-              </a:rPr>
-              <a:t>Команда HTTP 418 · кейс #02 · Мадригал</a:t>
-            </a:r>
-          </a:p>
-        </p:txBody>
-      </p:sp>
-      <p:sp>
-        <p:nvSpPr>
-          <p:cNvPr id="16" name="TextBox 15"/>
-          <p:cNvSpPr txBox="1"/>
-          <p:nvPr/>
-        </p:nvSpPr>
-        <p:spPr>
-          <a:xfrm>
-            <a:off x="4389120" y="6446520"/>
-            <a:ext cx="3383280" cy="274320"/>
-          </a:xfrm>
-          <a:prstGeom prst="rect">
-            <a:avLst/>
-          </a:prstGeom>
-          <a:noFill/>
-        </p:spPr>
-        <p:txBody>
-          <a:bodyPr wrap="square" anchor="t">
-            <a:spAutoFit/>
-          </a:bodyPr>
-          <a:lstStyle/>
-          <a:p>
-            <a:pPr algn="ctr"/>
-            <a:r>
-              <a:rPr sz="1000" b="0">
-                <a:solidFill>
-                  <a:srgbClr val="A8A29E"/>
-                </a:solidFill>
-                <a:latin typeface="Montserrat"/>
-              </a:rPr>
-              <a:t>Результаты</a:t>
-            </a:r>
-          </a:p>
-        </p:txBody>
-      </p:sp>
-      <p:sp>
-        <p:nvSpPr>
-          <p:cNvPr id="17" name="TextBox 16"/>
-          <p:cNvSpPr txBox="1"/>
-          <p:nvPr/>
-        </p:nvSpPr>
-        <p:spPr>
-          <a:xfrm>
-            <a:off x="8138160" y="6446520"/>
-            <a:ext cx="3200400" cy="274320"/>
-          </a:xfrm>
-          <a:prstGeom prst="rect">
-            <a:avLst/>
-          </a:prstGeom>
-          <a:noFill/>
-        </p:spPr>
-        <p:txBody>
-          <a:bodyPr wrap="square" anchor="t">
-            <a:spAutoFit/>
-          </a:bodyPr>
-          <a:lstStyle/>
-          <a:p>
-            <a:pPr algn="r"/>
-            <a:r>
-              <a:rPr sz="1000" b="0">
-                <a:solidFill>
-                  <a:srgbClr val="A8A29E"/>
-                </a:solidFill>
-                <a:latin typeface="Montserrat"/>
-              </a:rPr>
-              <a:t>11 / 19</a:t>
-            </a:r>
-          </a:p>
-        </p:txBody>
-      </p:sp>
-    </p:spTree>
-  </p:cSld>
-  <p:clrMapOvr>
-    <a:masterClrMapping/>
-  </p:clrMapOvr>
-  <p:timing>
-    <p:tnLst>
-      <p:par>
-        <p:cTn id="1" dur="indefinite" restart="never" nodeType="tmRoot">
-          <p:childTnLst>
-            <p:seq concurrent="1" nextAc="seek">
-              <p:cTn id="2" dur="indefinite" nodeType="mainSeq">
-                <p:childTnLst>
-                  <p:par>
-                    <p:cTn id="3" presetID="10" presetClass="entr" presetSubtype="0" fill="hold" grpId="0" nodeType="clickEffect">
-                      <p:stCondLst>
-                        <p:cond delay="0"/>
-                      </p:stCondLst>
-                      <p:childTnLst>
-                        <p:set>
-                          <p:cBhvr>
-                            <p:cTn id="4" dur="1" fill="hold">
-                              <p:stCondLst>
-                                <p:cond delay="0"/>
-                              </p:stCondLst>
-                            </p:cTn>
-                            <p:tgtEl>
-                              <p:spTgt spid="9"/>
-                            </p:tgtEl>
-                            <p:attrNameLst>
-                              <p:attrName>style.visibility</p:attrName>
-                            </p:attrNameLst>
-                          </p:cBhvr>
-                          <p:to>
-                            <p:strVal val="visible"/>
-                          </p:to>
-                        </p:set>
-                        <p:anim calcmode="lin" valueType="num">
-                          <p:cBhvr additive="base">
-                            <p:cTn id="5" dur="300" fill="hold"/>
-                            <p:tgtEl>
-                              <p:spTgt spid="9"/>
-                            </p:tgtEl>
-                            <p:attrNameLst>
-                              <p:attrName>style.opacity</p:attrName>
-                            </p:attrNameLst>
-                          </p:cBhvr>
-                          <p:tavLst>
-                            <p:tav tm="0">
-                              <p:val>
-                                <p:fltVal val="0"/>
-                              </p:val>
-                            </p:tav>
-                            <p:tav tm="100000">
-                              <p:val>
-                                <p:fltVal val="1"/>
-                              </p:val>
-                            </p:tav>
-                          </p:tavLst>
-                        </p:anim>
-                      </p:childTnLst>
-                    </p:cTn>
-                  </p:par>
-                  <p:par>
-                    <p:cTn id="6" presetID="10" presetClass="entr" presetSubtype="0" fill="hold" grpId="0" nodeType="clickEffect">
-                      <p:stCondLst>
-                        <p:cond delay="0"/>
-                      </p:stCondLst>
-                      <p:childTnLst>
-                        <p:set>
-                          <p:cBhvr>
-                            <p:cTn id="7" dur="1" fill="hold">
-                              <p:stCondLst>
-                                <p:cond delay="0"/>
-                              </p:stCondLst>
-                            </p:cTn>
-                            <p:tgtEl>
-                              <p:spTgt spid="13"/>
-                            </p:tgtEl>
-                            <p:attrNameLst>
-                              <p:attrName>style.visibility</p:attrName>
-                            </p:attrNameLst>
-                          </p:cBhvr>
-                          <p:to>
-                            <p:strVal val="visible"/>
-                          </p:to>
-                        </p:set>
-                        <p:anim calcmode="lin" valueType="num">
-                          <p:cBhvr additive="base">
-                            <p:cTn id="8" dur="300" fill="hold"/>
-                            <p:tgtEl>
-                              <p:spTgt spid="13"/>
-                            </p:tgtEl>
-                            <p:attrNameLst>
-                              <p:attrName>style.opacity</p:attrName>
-                            </p:attrNameLst>
-                          </p:cBhvr>
-                          <p:tavLst>
-                            <p:tav tm="0">
-                              <p:val>
-                                <p:fltVal val="0"/>
-                              </p:val>
-                            </p:tav>
-                            <p:tav tm="100000">
-                              <p:val>
-                                <p:fltVal val="1"/>
-                              </p:val>
-                            </p:tav>
-                          </p:tavLst>
-                        </p:anim>
-                      </p:childTnLst>
-                    </p:cTn>
-                  </p:par>
-                </p:childTnLst>
-              </p:cTn>
-            </p:seq>
-          </p:childTnLst>
-        </p:cTn>
-      </p:par>
-    </p:tnLst>
-  </p:timing>
-  <p:transition spd="med" fade="1"/>
-</p:sld>
-</file>
-
-<file path=ppt/slides/slide12.xml><?xml version="1.0" encoding="utf-8"?>
-<p:sld xmlns:a="http://schemas.openxmlformats.org/drawingml/2006/main" xmlns:p="http://schemas.openxmlformats.org/presentationml/2006/main" xmlns:r="http://schemas.openxmlformats.org/officeDocument/2006/relationships">
-  <p:cSld>
-    <p:spTree>
-      <p:nvGrpSpPr>
-        <p:cNvPr id="1" name=""/>
-        <p:cNvGrpSpPr/>
-        <p:nvPr/>
-      </p:nvGrpSpPr>
-      <p:grpSpPr/>
-      <p:sp>
-        <p:nvSpPr>
-          <p:cNvPr id="2" name="Rectangle 1"/>
-          <p:cNvSpPr/>
-          <p:nvPr/>
-        </p:nvSpPr>
-        <p:spPr>
-          <a:xfrm>
-            <a:off x="0" y="0"/>
-            <a:ext cx="12191695" cy="6858000"/>
-          </a:xfrm>
-          <a:prstGeom prst="rect">
-            <a:avLst/>
-          </a:prstGeom>
-          <a:solidFill>
-            <a:srgbClr val="0E1011"/>
-          </a:solidFill>
-          <a:ln>
-            <a:noFill/>
-          </a:ln>
-          <a:effectLst/>
-        </p:spPr>
-        <p:style>
-          <a:lnRef idx="1">
-            <a:schemeClr val="accent1"/>
-          </a:lnRef>
-          <a:fillRef idx="3">
-            <a:schemeClr val="accent1"/>
-          </a:fillRef>
-          <a:effectRef idx="2">
-            <a:schemeClr val="accent1"/>
-          </a:effectRef>
-          <a:fontRef idx="minor">
-            <a:schemeClr val="lt1"/>
-          </a:fontRef>
-        </p:style>
-        <p:txBody>
-          <a:bodyPr rtlCol="0" anchor="ctr"/>
-          <a:lstStyle/>
-          <a:p>
-            <a:pPr algn="ctr"/>
-          </a:p>
-        </p:txBody>
-      </p:sp>
-      <p:sp>
-        <p:nvSpPr>
-          <p:cNvPr id="3" name="Rectangle 2"/>
-          <p:cNvSpPr/>
-          <p:nvPr/>
-        </p:nvSpPr>
-        <p:spPr>
-          <a:xfrm>
-            <a:off x="0" y="0"/>
-            <a:ext cx="73152" cy="6858000"/>
-          </a:xfrm>
-          <a:prstGeom prst="rect">
-            <a:avLst/>
-          </a:prstGeom>
-          <a:ln>
-            <a:noFill/>
-          </a:ln>
-          <a:effectLst/>
-          <a:gradFill rotWithShape="1">
-            <a:gsLst>
-              <a:gs pos="0">
-                <a:srgbClr val="410913"/>
-              </a:gs>
-              <a:gs pos="50000">
-                <a:srgbClr val="610D1C"/>
-              </a:gs>
-              <a:gs pos="100000">
-                <a:srgbClr val="A2391D"/>
-              </a:gs>
-            </a:gsLst>
-            <a:lin ang="2700000"/>
-          </a:gradFill>
-        </p:spPr>
-        <p:style>
-          <a:lnRef idx="1">
-            <a:schemeClr val="accent1"/>
-          </a:lnRef>
-          <a:fillRef idx="3">
-            <a:schemeClr val="accent1"/>
-          </a:fillRef>
-          <a:effectRef idx="2">
-            <a:schemeClr val="accent1"/>
-          </a:effectRef>
-          <a:fontRef idx="minor">
-            <a:schemeClr val="lt1"/>
-          </a:fontRef>
-        </p:style>
-        <p:txBody>
-          <a:bodyPr rtlCol="0" anchor="ctr"/>
-          <a:lstStyle/>
-          <a:p>
-            <a:pPr algn="ctr"/>
-          </a:p>
-        </p:txBody>
-      </p:sp>
-      <p:sp>
-        <p:nvSpPr>
-          <p:cNvPr id="4" name="TextBox 3"/>
-          <p:cNvSpPr txBox="1"/>
-          <p:nvPr/>
-        </p:nvSpPr>
-        <p:spPr>
-          <a:xfrm>
-            <a:off x="822960" y="1188720"/>
-            <a:ext cx="10545775" cy="822960"/>
-          </a:xfrm>
-          <a:prstGeom prst="rect">
-            <a:avLst/>
-          </a:prstGeom>
-          <a:noFill/>
-        </p:spPr>
-        <p:txBody>
-          <a:bodyPr wrap="square" anchor="t">
-            <a:spAutoFit/>
-          </a:bodyPr>
-          <a:lstStyle/>
-          <a:p>
-            <a:r>
-              <a:rPr sz="3000" b="1">
-                <a:solidFill>
-                  <a:srgbClr val="F4F1EC"/>
-                </a:solidFill>
-                <a:latin typeface="Tektur"/>
-              </a:rPr>
-              <a:t>Набор организаторов разобран целиком</a:t>
-            </a:r>
-          </a:p>
-        </p:txBody>
-      </p:sp>
-      <p:sp>
-        <p:nvSpPr>
-          <p:cNvPr id="5" name="TextBox 4"/>
-          <p:cNvSpPr txBox="1"/>
-          <p:nvPr/>
-        </p:nvSpPr>
-        <p:spPr>
-          <a:xfrm>
-            <a:off x="822960" y="2286000"/>
-            <a:ext cx="5120640" cy="1828800"/>
-          </a:xfrm>
-          <a:prstGeom prst="rect">
-            <a:avLst/>
-          </a:prstGeom>
-          <a:noFill/>
-        </p:spPr>
-        <p:txBody>
-          <a:bodyPr wrap="square" anchor="t">
-            <a:spAutoFit/>
-          </a:bodyPr>
-          <a:lstStyle/>
-          <a:p>
-            <a:r>
-              <a:rPr sz="12000" b="1">
-                <a:solidFill>
-                  <a:srgbClr val="D0603A"/>
-                </a:solidFill>
-                <a:latin typeface="Tektur"/>
-              </a:rPr>
-              <a:t>90</a:t>
-            </a:r>
-          </a:p>
-        </p:txBody>
-      </p:sp>
-      <p:sp>
-        <p:nvSpPr>
-          <p:cNvPr id="6" name="TextBox 5"/>
-          <p:cNvSpPr txBox="1"/>
-          <p:nvPr/>
-        </p:nvSpPr>
-        <p:spPr>
-          <a:xfrm>
-            <a:off x="822960" y="4206240"/>
-            <a:ext cx="5120640" cy="1097280"/>
-          </a:xfrm>
-          <a:prstGeom prst="rect">
-            <a:avLst/>
-          </a:prstGeom>
-          <a:noFill/>
-        </p:spPr>
-        <p:txBody>
-          <a:bodyPr wrap="square" anchor="t">
-            <a:spAutoFit/>
-          </a:bodyPr>
-          <a:lstStyle/>
-          <a:p>
-            <a:r>
-              <a:rPr sz="1600" b="0">
-                <a:solidFill>
-                  <a:srgbClr val="F4F1EC"/>
-                </a:solidFill>
-                <a:latin typeface="Montserrat"/>
-              </a:rPr>
-              <a:t>45 запросов + 45 ответов. Все matched.</a:t>
-            </a:r>
-          </a:p>
-        </p:txBody>
-      </p:sp>
-      <p:pic>
-        <p:nvPicPr>
-          <p:cNvPr id="7" name="Picture 6" descr="coverage_donut.png"/>
-          <p:cNvPicPr>
-            <a:picLocks noChangeAspect="1"/>
-          </p:cNvPicPr>
-          <p:nvPr/>
-        </p:nvPicPr>
-        <p:blipFill>
-          <a:blip r:embed="rId2"/>
-          <a:stretch>
-            <a:fillRect/>
-          </a:stretch>
-        </p:blipFill>
-        <p:spPr>
-          <a:xfrm>
-            <a:off x="6035040" y="2011680"/>
-            <a:ext cx="4772264" cy="3657600"/>
-          </a:xfrm>
-          <a:prstGeom prst="rect">
-            <a:avLst/>
-          </a:prstGeom>
-        </p:spPr>
-      </p:pic>
-      <p:sp>
-        <p:nvSpPr>
-          <p:cNvPr id="8" name="TextBox 7"/>
-          <p:cNvSpPr txBox="1"/>
-          <p:nvPr/>
-        </p:nvSpPr>
-        <p:spPr>
-          <a:xfrm>
-            <a:off x="822960" y="6035040"/>
-            <a:ext cx="10545775" cy="365760"/>
-          </a:xfrm>
-          <a:prstGeom prst="rect">
-            <a:avLst/>
-          </a:prstGeom>
-          <a:noFill/>
-        </p:spPr>
-        <p:txBody>
-          <a:bodyPr wrap="square" anchor="t">
-            <a:spAutoFit/>
-          </a:bodyPr>
-          <a:lstStyle/>
-          <a:p>
-            <a:r>
-              <a:rPr sz="1400" b="0">
-                <a:solidFill>
-                  <a:srgbClr val="A8A29E"/>
-                </a:solidFill>
-                <a:latin typeface="Montserrat"/>
-              </a:rPr>
-              <a:t>Данные не использовались при уточнении правила</a:t>
-            </a:r>
-          </a:p>
-        </p:txBody>
-      </p:sp>
-      <p:sp>
-        <p:nvSpPr>
-          <p:cNvPr id="9" name="TextBox 8"/>
-          <p:cNvSpPr txBox="1"/>
-          <p:nvPr/>
-        </p:nvSpPr>
-        <p:spPr>
-          <a:xfrm>
-            <a:off x="822960" y="6446520"/>
-            <a:ext cx="3840480" cy="274320"/>
-          </a:xfrm>
-          <a:prstGeom prst="rect">
-            <a:avLst/>
-          </a:prstGeom>
-          <a:noFill/>
-        </p:spPr>
-        <p:txBody>
-          <a:bodyPr wrap="square" anchor="t">
-            <a:spAutoFit/>
-          </a:bodyPr>
-          <a:lstStyle/>
-          <a:p>
-            <a:r>
-              <a:rPr sz="1000" b="0">
-                <a:solidFill>
-                  <a:srgbClr val="A8A29E"/>
-                </a:solidFill>
-                <a:latin typeface="Montserrat"/>
-              </a:rPr>
-              <a:t>Команда HTTP 418 · кейс #02 · Мадригал</a:t>
-            </a:r>
-          </a:p>
-        </p:txBody>
-      </p:sp>
-      <p:sp>
-        <p:nvSpPr>
-          <p:cNvPr id="10" name="TextBox 9"/>
-          <p:cNvSpPr txBox="1"/>
-          <p:nvPr/>
-        </p:nvSpPr>
-        <p:spPr>
-          <a:xfrm>
-            <a:off x="4389120" y="6446520"/>
-            <a:ext cx="3383280" cy="274320"/>
-          </a:xfrm>
-          <a:prstGeom prst="rect">
-            <a:avLst/>
-          </a:prstGeom>
-          <a:noFill/>
-        </p:spPr>
-        <p:txBody>
-          <a:bodyPr wrap="square" anchor="t">
-            <a:spAutoFit/>
-          </a:bodyPr>
-          <a:lstStyle/>
-          <a:p>
-            <a:pPr algn="ctr"/>
-            <a:r>
-              <a:rPr sz="1000" b="0">
-                <a:solidFill>
-                  <a:srgbClr val="A8A29E"/>
-                </a:solidFill>
-                <a:latin typeface="Montserrat"/>
-              </a:rPr>
-              <a:t>Результаты</a:t>
-            </a:r>
-          </a:p>
-        </p:txBody>
-      </p:sp>
-      <p:sp>
-        <p:nvSpPr>
-          <p:cNvPr id="11" name="TextBox 10"/>
-          <p:cNvSpPr txBox="1"/>
-          <p:nvPr/>
-        </p:nvSpPr>
-        <p:spPr>
-          <a:xfrm>
-            <a:off x="8138160" y="6446520"/>
-            <a:ext cx="3200400" cy="274320"/>
-          </a:xfrm>
-          <a:prstGeom prst="rect">
-            <a:avLst/>
-          </a:prstGeom>
-          <a:noFill/>
-        </p:spPr>
-        <p:txBody>
-          <a:bodyPr wrap="square" anchor="t">
-            <a:spAutoFit/>
-          </a:bodyPr>
-          <a:lstStyle/>
-          <a:p>
-            <a:pPr algn="r"/>
-            <a:r>
-              <a:rPr sz="1000" b="0">
-                <a:solidFill>
-                  <a:srgbClr val="A8A29E"/>
-                </a:solidFill>
-                <a:latin typeface="Montserrat"/>
-              </a:rPr>
-              <a:t>12 / 19</a:t>
-            </a:r>
-          </a:p>
-        </p:txBody>
-      </p:sp>
-    </p:spTree>
-  </p:cSld>
-  <p:clrMapOvr>
-    <a:masterClrMapping/>
-  </p:clrMapOvr>
-  <p:transition spd="med" fade="1"/>
-</p:sld>
-</file>
-
-<file path=ppt/slides/slide13.xml><?xml version="1.0" encoding="utf-8"?>
-<p:sld xmlns:a="http://schemas.openxmlformats.org/drawingml/2006/main" xmlns:p="http://schemas.openxmlformats.org/presentationml/2006/main" xmlns:r="http://schemas.openxmlformats.org/officeDocument/2006/relationships">
-  <p:cSld>
-    <p:spTree>
-      <p:nvGrpSpPr>
-        <p:cNvPr id="1" name=""/>
-        <p:cNvGrpSpPr/>
-        <p:nvPr/>
-      </p:nvGrpSpPr>
-      <p:grpSpPr/>
-      <p:sp>
-        <p:nvSpPr>
-          <p:cNvPr id="2" name="Rectangle 1"/>
-          <p:cNvSpPr/>
-          <p:nvPr/>
-        </p:nvSpPr>
-        <p:spPr>
-          <a:xfrm>
-            <a:off x="0" y="0"/>
-            <a:ext cx="12191695" cy="6858000"/>
-          </a:xfrm>
-          <a:prstGeom prst="rect">
-            <a:avLst/>
-          </a:prstGeom>
-          <a:solidFill>
-            <a:srgbClr val="0E1011"/>
-          </a:solidFill>
-          <a:ln>
-            <a:noFill/>
-          </a:ln>
-          <a:effectLst/>
-        </p:spPr>
-        <p:style>
-          <a:lnRef idx="1">
-            <a:schemeClr val="accent1"/>
-          </a:lnRef>
-          <a:fillRef idx="3">
-            <a:schemeClr val="accent1"/>
-          </a:fillRef>
-          <a:effectRef idx="2">
-            <a:schemeClr val="accent1"/>
-          </a:effectRef>
-          <a:fontRef idx="minor">
-            <a:schemeClr val="lt1"/>
-          </a:fontRef>
-        </p:style>
-        <p:txBody>
-          <a:bodyPr rtlCol="0" anchor="ctr"/>
-          <a:lstStyle/>
-          <a:p>
-            <a:pPr algn="ctr"/>
-          </a:p>
-        </p:txBody>
-      </p:sp>
-      <p:sp>
-        <p:nvSpPr>
-          <p:cNvPr id="3" name="Rectangle 2"/>
-          <p:cNvSpPr/>
-          <p:nvPr/>
-        </p:nvSpPr>
-        <p:spPr>
-          <a:xfrm>
-            <a:off x="0" y="0"/>
-            <a:ext cx="73152" cy="6858000"/>
-          </a:xfrm>
-          <a:prstGeom prst="rect">
-            <a:avLst/>
-          </a:prstGeom>
-          <a:ln>
-            <a:noFill/>
-          </a:ln>
-          <a:effectLst/>
-          <a:gradFill rotWithShape="1">
-            <a:gsLst>
-              <a:gs pos="0">
-                <a:srgbClr val="410913"/>
-              </a:gs>
-              <a:gs pos="50000">
-                <a:srgbClr val="610D1C"/>
-              </a:gs>
-              <a:gs pos="100000">
-                <a:srgbClr val="A2391D"/>
-              </a:gs>
-            </a:gsLst>
-            <a:lin ang="2700000"/>
-          </a:gradFill>
-        </p:spPr>
-        <p:style>
-          <a:lnRef idx="1">
-            <a:schemeClr val="accent1"/>
-          </a:lnRef>
-          <a:fillRef idx="3">
-            <a:schemeClr val="accent1"/>
-          </a:fillRef>
-          <a:effectRef idx="2">
-            <a:schemeClr val="accent1"/>
-          </a:effectRef>
-          <a:fontRef idx="minor">
-            <a:schemeClr val="lt1"/>
-          </a:fontRef>
-        </p:style>
-        <p:txBody>
-          <a:bodyPr rtlCol="0" anchor="ctr"/>
-          <a:lstStyle/>
-          <a:p>
-            <a:pPr algn="ctr"/>
-          </a:p>
-        </p:txBody>
-      </p:sp>
-      <p:sp>
-        <p:nvSpPr>
-          <p:cNvPr id="4" name="TextBox 3"/>
-          <p:cNvSpPr txBox="1"/>
-          <p:nvPr/>
-        </p:nvSpPr>
-        <p:spPr>
-          <a:xfrm>
-            <a:off x="822960" y="1188720"/>
-            <a:ext cx="10545775" cy="822960"/>
-          </a:xfrm>
-          <a:prstGeom prst="rect">
-            <a:avLst/>
-          </a:prstGeom>
-          <a:noFill/>
-        </p:spPr>
-        <p:txBody>
-          <a:bodyPr wrap="square" anchor="t">
-            <a:spAutoFit/>
-          </a:bodyPr>
-          <a:lstStyle/>
-          <a:p>
-            <a:r>
-              <a:rPr sz="3000" b="1">
-                <a:solidFill>
-                  <a:srgbClr val="F4F1EC"/>
-                </a:solidFill>
-                <a:latin typeface="Tektur"/>
-              </a:rPr>
-              <a:t>95 МиБ разбираются за 12 секунд</a:t>
-            </a:r>
-          </a:p>
-        </p:txBody>
-      </p:sp>
-      <p:sp>
-        <p:nvSpPr>
-          <p:cNvPr id="5" name="TextBox 4"/>
-          <p:cNvSpPr txBox="1"/>
-          <p:nvPr/>
-        </p:nvSpPr>
-        <p:spPr>
-          <a:xfrm>
-            <a:off x="822960" y="2286000"/>
-            <a:ext cx="5120640" cy="1828800"/>
-          </a:xfrm>
-          <a:prstGeom prst="rect">
-            <a:avLst/>
-          </a:prstGeom>
-          <a:noFill/>
-        </p:spPr>
-        <p:txBody>
-          <a:bodyPr wrap="square" anchor="t">
-            <a:spAutoFit/>
-          </a:bodyPr>
-          <a:lstStyle/>
-          <a:p>
-            <a:r>
-              <a:rPr sz="8800" b="1">
-                <a:solidFill>
-                  <a:srgbClr val="D0603A"/>
-                </a:solidFill>
-                <a:latin typeface="Tektur"/>
-              </a:rPr>
-              <a:t>12 с</a:t>
-            </a:r>
-          </a:p>
-        </p:txBody>
-      </p:sp>
-      <p:sp>
-        <p:nvSpPr>
-          <p:cNvPr id="6" name="TextBox 5"/>
-          <p:cNvSpPr txBox="1"/>
-          <p:nvPr/>
-        </p:nvSpPr>
-        <p:spPr>
-          <a:xfrm>
-            <a:off x="822960" y="4206240"/>
-            <a:ext cx="5120640" cy="1097280"/>
-          </a:xfrm>
-          <a:prstGeom prst="rect">
-            <a:avLst/>
-          </a:prstGeom>
-          <a:noFill/>
-        </p:spPr>
-        <p:txBody>
-          <a:bodyPr wrap="square" anchor="t">
-            <a:spAutoFit/>
-          </a:bodyPr>
-          <a:lstStyle/>
-          <a:p>
-            <a:r>
-              <a:rPr sz="1600" b="0">
-                <a:solidFill>
-                  <a:srgbClr val="F4F1EC"/>
-                </a:solidFill>
-                <a:latin typeface="Montserrat"/>
-              </a:rPr>
-              <a:t>Пик памяти 350 МиБ — 9% бюджета 4 ГиБ на машине 16 ГиБ</a:t>
-            </a:r>
-          </a:p>
-        </p:txBody>
-      </p:sp>
-      <p:pic>
-        <p:nvPicPr>
-          <p:cNvPr id="7" name="Picture 6" descr="memory_sweep.png"/>
-          <p:cNvPicPr>
-            <a:picLocks noChangeAspect="1"/>
-          </p:cNvPicPr>
-          <p:nvPr/>
-        </p:nvPicPr>
-        <p:blipFill>
-          <a:blip r:embed="rId2"/>
-          <a:stretch>
-            <a:fillRect/>
-          </a:stretch>
-        </p:blipFill>
-        <p:spPr>
-          <a:xfrm>
-            <a:off x="6035040" y="2011680"/>
-            <a:ext cx="4604892" cy="3657600"/>
-          </a:xfrm>
-          <a:prstGeom prst="rect">
-            <a:avLst/>
-          </a:prstGeom>
-        </p:spPr>
-      </p:pic>
-      <p:sp>
-        <p:nvSpPr>
-          <p:cNvPr id="8" name="Rounded Rectangle 7"/>
-          <p:cNvSpPr/>
-          <p:nvPr/>
-        </p:nvSpPr>
-        <p:spPr>
-          <a:xfrm>
-            <a:off x="822960" y="5349240"/>
-            <a:ext cx="1444752" cy="365760"/>
+            <a:off x="822960" y="4892040"/>
+            <a:ext cx="2455164" cy="384048"/>
           </a:xfrm>
           <a:prstGeom prst="roundRect">
             <a:avLst/>
@@ -5792,14 +4612,14 @@
       </p:sp>
       <p:sp>
         <p:nvSpPr>
-          <p:cNvPr id="9" name="TextBox 8"/>
+          <p:cNvPr id="12" name="TextBox 11"/>
           <p:cNvSpPr txBox="1"/>
           <p:nvPr/>
         </p:nvSpPr>
         <p:spPr>
           <a:xfrm>
-            <a:off x="822960" y="5394960"/>
-            <a:ext cx="1444752" cy="292608"/>
+            <a:off x="822960" y="4937760"/>
+            <a:ext cx="2455164" cy="310896"/>
           </a:xfrm>
           <a:prstGeom prst="rect">
             <a:avLst/>
@@ -5814,27 +4634,27 @@
           <a:p>
             <a:pPr algn="ctr"/>
             <a:r>
-              <a:rPr sz="1400" b="0">
+              <a:rPr sz="1300" b="0">
                 <a:solidFill>
                   <a:srgbClr val="F4F1EC"/>
                 </a:solidFill>
                 <a:latin typeface="Montserrat"/>
               </a:rPr>
-              <a:t>12 с общее время</a:t>
-            </a:r>
-          </a:p>
-        </p:txBody>
-      </p:sp>
-      <p:sp>
-        <p:nvSpPr>
-          <p:cNvPr id="10" name="Rounded Rectangle 9"/>
+              <a:t>IPv4 id + protocol, offset ×8</a:t>
+            </a:r>
+          </a:p>
+        </p:txBody>
+      </p:sp>
+      <p:sp>
+        <p:nvSpPr>
+          <p:cNvPr id="13" name="Rounded Rectangle 12"/>
           <p:cNvSpPr/>
           <p:nvPr/>
         </p:nvSpPr>
         <p:spPr>
           <a:xfrm>
-            <a:off x="2496312" y="5349240"/>
-            <a:ext cx="1600200" cy="365760"/>
+            <a:off x="3479292" y="4892040"/>
+            <a:ext cx="2455164" cy="384048"/>
           </a:xfrm>
           <a:prstGeom prst="roundRect">
             <a:avLst/>
@@ -5873,14 +4693,14 @@
       </p:sp>
       <p:sp>
         <p:nvSpPr>
-          <p:cNvPr id="11" name="TextBox 10"/>
+          <p:cNvPr id="14" name="TextBox 13"/>
           <p:cNvSpPr txBox="1"/>
           <p:nvPr/>
         </p:nvSpPr>
         <p:spPr>
           <a:xfrm>
-            <a:off x="2496312" y="5394960"/>
-            <a:ext cx="1600200" cy="292608"/>
+            <a:off x="3479292" y="4937760"/>
+            <a:ext cx="2455164" cy="310896"/>
           </a:xfrm>
           <a:prstGeom prst="rect">
             <a:avLst/>
@@ -5895,27 +4715,27 @@
           <a:p>
             <a:pPr algn="ctr"/>
             <a:r>
-              <a:rPr sz="1400" b="0">
+              <a:rPr sz="1300" b="0">
                 <a:solidFill>
                   <a:srgbClr val="F4F1EC"/>
                 </a:solidFill>
                 <a:latin typeface="Montserrat"/>
               </a:rPr>
-              <a:t>350 МиБ пик памяти</a:t>
-            </a:r>
-          </a:p>
-        </p:txBody>
-      </p:sp>
-      <p:sp>
-        <p:nvSpPr>
-          <p:cNvPr id="12" name="Rounded Rectangle 11"/>
+              <a:t>IPv6 id, перекрытие отклонено</a:t>
+            </a:r>
+          </a:p>
+        </p:txBody>
+      </p:sp>
+      <p:sp>
+        <p:nvSpPr>
+          <p:cNvPr id="15" name="Rounded Rectangle 14"/>
           <p:cNvSpPr/>
           <p:nvPr/>
         </p:nvSpPr>
         <p:spPr>
           <a:xfrm>
-            <a:off x="4325112" y="5349240"/>
-            <a:ext cx="1133856" cy="365760"/>
+            <a:off x="6135624" y="4892040"/>
+            <a:ext cx="1911096" cy="384048"/>
           </a:xfrm>
           <a:prstGeom prst="roundRect">
             <a:avLst/>
@@ -5954,14 +4774,14 @@
       </p:sp>
       <p:sp>
         <p:nvSpPr>
-          <p:cNvPr id="13" name="TextBox 12"/>
+          <p:cNvPr id="16" name="TextBox 15"/>
           <p:cNvSpPr txBox="1"/>
           <p:nvPr/>
         </p:nvSpPr>
         <p:spPr>
           <a:xfrm>
-            <a:off x="4325112" y="5394960"/>
-            <a:ext cx="1133856" cy="292608"/>
+            <a:off x="6135624" y="4937760"/>
+            <a:ext cx="1911096" cy="310896"/>
           </a:xfrm>
           <a:prstGeom prst="rect">
             <a:avLst/>
@@ -5976,26 +4796,26 @@
           <a:p>
             <a:pPr algn="ctr"/>
             <a:r>
-              <a:rPr sz="1400" b="0">
+              <a:rPr sz="1300" b="0">
                 <a:solidFill>
                   <a:srgbClr val="F4F1EC"/>
                 </a:solidFill>
                 <a:latin typeface="Montserrat"/>
               </a:rPr>
-              <a:t>250k пакетов</a:t>
-            </a:r>
-          </a:p>
-        </p:txBody>
-      </p:sp>
-      <p:sp>
-        <p:nvSpPr>
-          <p:cNvPr id="14" name="TextBox 13"/>
+              <a:t>12 тестов фрагментации</a:t>
+            </a:r>
+          </a:p>
+        </p:txBody>
+      </p:sp>
+      <p:sp>
+        <p:nvSpPr>
+          <p:cNvPr id="17" name="TextBox 16"/>
           <p:cNvSpPr txBox="1"/>
           <p:nvPr/>
         </p:nvSpPr>
         <p:spPr>
           <a:xfrm>
-            <a:off x="822960" y="6035040"/>
+            <a:off x="822960" y="5532120"/>
             <a:ext cx="10545775" cy="365760"/>
           </a:xfrm>
           <a:prstGeom prst="rect">
@@ -6016,14 +4836,14 @@
                 </a:solidFill>
                 <a:latin typeface="Montserrat"/>
               </a:rPr>
-              <a:t>Условия замера: 95.66 МиБ, 250 000 пакетов, 1000 сессий, 4 vCPU / 16 ГиБ</a:t>
-            </a:r>
-          </a:p>
-        </p:txBody>
-      </p:sp>
-      <p:sp>
-        <p:nvSpPr>
-          <p:cNvPr id="15" name="TextBox 14"/>
+              <a:t>Дырка — это incomplete, а не ноль: байты не угадываются, пока не покрыт каждый байт до конца и не увиден последний фрагмент</a:t>
+            </a:r>
+          </a:p>
+        </p:txBody>
+      </p:sp>
+      <p:sp>
+        <p:nvSpPr>
+          <p:cNvPr id="18" name="TextBox 17"/>
           <p:cNvSpPr txBox="1"/>
           <p:nvPr/>
         </p:nvSpPr>
@@ -6057,7 +4877,7 @@
       </p:sp>
       <p:sp>
         <p:nvSpPr>
-          <p:cNvPr id="16" name="TextBox 15"/>
+          <p:cNvPr id="19" name="TextBox 18"/>
           <p:cNvSpPr txBox="1"/>
           <p:nvPr/>
         </p:nvSpPr>
@@ -6092,7 +4912,7 @@
       </p:sp>
       <p:sp>
         <p:nvSpPr>
-          <p:cNvPr id="17" name="TextBox 16"/>
+          <p:cNvPr id="20" name="TextBox 19"/>
           <p:cNvSpPr txBox="1"/>
           <p:nvPr/>
         </p:nvSpPr>
@@ -6120,7 +4940,7 @@
                 </a:solidFill>
                 <a:latin typeface="Montserrat"/>
               </a:rPr>
-              <a:t>13 / 19</a:t>
+              <a:t>10 / 14</a:t>
             </a:r>
           </a:p>
         </p:txBody>
@@ -6189,7 +5009,7 @@
                     </p:cTn>
                   </p:par>
                   <p:par>
-                    <p:cTn id="6" presetID="22" presetClass="entr" presetSubtype="8" fill="hold" grpId="0" nodeType="clickEffect">
+                    <p:cTn id="6" presetID="10" presetClass="entr" presetSubtype="0" fill="hold" grpId="0" nodeType="clickEffect">
                       <p:stCondLst>
                         <p:cond delay="0"/>
                       </p:stCondLst>
@@ -6202,7 +5022,7 @@
                               </p:stCondLst>
                             </p:cTn>
                             <p:tgtEl>
-                              <p:spTgt spid="7"/>
+                              <p:spTgt spid="8"/>
                             </p:tgtEl>
                             <p:attrNameLst>
                               <p:attrName>style.visibility</p:attrName>
@@ -6214,12 +5034,12 @@
                         </p:set>
                         <p:anim calcmode="lin" valueType="num">
                           <p:cBhvr additive="base">
-                            <p:cTn id="8" dur="400" fill="hold"/>
+                            <p:cTn id="8" dur="300" fill="hold"/>
                             <p:tgtEl>
-                              <p:spTgt spid="7"/>
+                              <p:spTgt spid="8"/>
                             </p:tgtEl>
                             <p:attrNameLst>
-                              <p:attrName>ppt_w</p:attrName>
+                              <p:attrName>style.opacity</p:attrName>
                             </p:attrNameLst>
                           </p:cBhvr>
                           <p:tavLst>
@@ -6252,7 +5072,7 @@
                               </p:stCondLst>
                             </p:cTn>
                             <p:tgtEl>
-                              <p:spTgt spid="8"/>
+                              <p:spTgt spid="10"/>
                             </p:tgtEl>
                             <p:attrNameLst>
                               <p:attrName>style.visibility</p:attrName>
@@ -6266,7 +5086,7 @@
                           <p:cBhvr additive="base">
                             <p:cTn id="11" dur="300" fill="hold"/>
                             <p:tgtEl>
-                              <p:spTgt spid="8"/>
+                              <p:spTgt spid="10"/>
                             </p:tgtEl>
                             <p:attrNameLst>
                               <p:attrName>style.opacity</p:attrName>
@@ -6300,7 +5120,7 @@
 </p:sld>
 </file>
 
-<file path=ppt/slides/slide14.xml><?xml version="1.0" encoding="utf-8"?>
+<file path=ppt/slides/slide11.xml><?xml version="1.0" encoding="utf-8"?>
 <p:sld xmlns:a="http://schemas.openxmlformats.org/drawingml/2006/main" xmlns:p="http://schemas.openxmlformats.org/presentationml/2006/main" xmlns:r="http://schemas.openxmlformats.org/officeDocument/2006/relationships">
   <p:cSld>
     <p:spTree>
@@ -6417,8 +5237,8 @@
         </p:nvSpPr>
         <p:spPr>
           <a:xfrm>
-            <a:off x="822960" y="2011680"/>
-            <a:ext cx="10545775" cy="1280160"/>
+            <a:off x="822960" y="1188720"/>
+            <a:ext cx="10545775" cy="822960"/>
           </a:xfrm>
           <a:prstGeom prst="rect">
             <a:avLst/>
@@ -6432,13 +5252,13 @@
           <a:lstStyle/>
           <a:p>
             <a:r>
-              <a:rPr sz="7200" b="1">
-                <a:solidFill>
-                  <a:srgbClr val="D0603A"/>
+              <a:rPr sz="3000" b="1">
+                <a:solidFill>
+                  <a:srgbClr val="F4F1EC"/>
                 </a:solidFill>
                 <a:latin typeface="Tektur"/>
               </a:rPr>
-              <a:t>02</a:t>
+              <a:t>Набор организаторов разобран целиком</a:t>
             </a:r>
           </a:p>
         </p:txBody>
@@ -6451,8 +5271,8 @@
         </p:nvSpPr>
         <p:spPr>
           <a:xfrm>
-            <a:off x="822960" y="3200400"/>
-            <a:ext cx="10545775" cy="914400"/>
+            <a:off x="822960" y="2286000"/>
+            <a:ext cx="5120640" cy="1828800"/>
           </a:xfrm>
           <a:prstGeom prst="rect">
             <a:avLst/>
@@ -6466,27 +5286,679 @@
           <a:lstStyle/>
           <a:p>
             <a:r>
-              <a:rPr sz="4000" b="1">
-                <a:solidFill>
-                  <a:srgbClr val="F4F1EC"/>
+              <a:rPr sz="12000" b="1">
+                <a:solidFill>
+                  <a:srgbClr val="D0603A"/>
                 </a:solidFill>
                 <a:latin typeface="Tektur"/>
               </a:rPr>
-              <a:t>Демонстрация</a:t>
-            </a:r>
-          </a:p>
-        </p:txBody>
-      </p:sp>
-      <p:sp>
-        <p:nvSpPr>
-          <p:cNvPr id="6" name="Rectangle 5"/>
+              <a:t>90</a:t>
+            </a:r>
+          </a:p>
+        </p:txBody>
+      </p:sp>
+      <p:sp>
+        <p:nvSpPr>
+          <p:cNvPr id="6" name="TextBox 5"/>
+          <p:cNvSpPr txBox="1"/>
+          <p:nvPr/>
+        </p:nvSpPr>
+        <p:spPr>
+          <a:xfrm>
+            <a:off x="822960" y="4206240"/>
+            <a:ext cx="5120640" cy="1097280"/>
+          </a:xfrm>
+          <a:prstGeom prst="rect">
+            <a:avLst/>
+          </a:prstGeom>
+          <a:noFill/>
+        </p:spPr>
+        <p:txBody>
+          <a:bodyPr wrap="square" anchor="t">
+            <a:spAutoFit/>
+          </a:bodyPr>
+          <a:lstStyle/>
+          <a:p>
+            <a:r>
+              <a:rPr sz="1600" b="0">
+                <a:solidFill>
+                  <a:srgbClr val="F4F1EC"/>
+                </a:solidFill>
+                <a:latin typeface="Montserrat"/>
+              </a:rPr>
+              <a:t>45 запросов + 45 ответов. Все matched.</a:t>
+            </a:r>
+          </a:p>
+        </p:txBody>
+      </p:sp>
+      <p:sp>
+        <p:nvSpPr>
+          <p:cNvPr id="7" name="TextBox 6"/>
+          <p:cNvSpPr txBox="1"/>
+          <p:nvPr/>
+        </p:nvSpPr>
+        <p:spPr>
+          <a:xfrm>
+            <a:off x="822960" y="4800600"/>
+            <a:ext cx="5120640" cy="548640"/>
+          </a:xfrm>
+          <a:prstGeom prst="rect">
+            <a:avLst/>
+          </a:prstGeom>
+          <a:noFill/>
+        </p:spPr>
+        <p:txBody>
+          <a:bodyPr wrap="square" anchor="t">
+            <a:spAutoFit/>
+          </a:bodyPr>
+          <a:lstStyle/>
+          <a:p>
+            <a:r>
+              <a:rPr sz="1500" b="0">
+                <a:solidFill>
+                  <a:srgbClr val="A8A29E"/>
+                </a:solidFill>
+                <a:latin typeface="Montserrat"/>
+              </a:rPr>
+              <a:t>12 с на 95 МиБ — пик памяти 350 МиБ, 9% бюджета 4 ГиБ</a:t>
+            </a:r>
+          </a:p>
+        </p:txBody>
+      </p:sp>
+      <p:pic>
+        <p:nvPicPr>
+          <p:cNvPr id="8" name="Picture 7" descr="coverage_donut.png"/>
+          <p:cNvPicPr>
+            <a:picLocks noChangeAspect="1"/>
+          </p:cNvPicPr>
+          <p:nvPr/>
+        </p:nvPicPr>
+        <p:blipFill>
+          <a:blip r:embed="rId2"/>
+          <a:stretch>
+            <a:fillRect/>
+          </a:stretch>
+        </p:blipFill>
+        <p:spPr>
+          <a:xfrm>
+            <a:off x="6035040" y="2011680"/>
+            <a:ext cx="4772264" cy="3657600"/>
+          </a:xfrm>
+          <a:prstGeom prst="rect">
+            <a:avLst/>
+          </a:prstGeom>
+        </p:spPr>
+      </p:pic>
+      <p:sp>
+        <p:nvSpPr>
+          <p:cNvPr id="9" name="Rounded Rectangle 8"/>
           <p:cNvSpPr/>
           <p:nvPr/>
         </p:nvSpPr>
         <p:spPr>
           <a:xfrm>
-            <a:off x="822960" y="4206240"/>
-            <a:ext cx="3108960" cy="82296"/>
+            <a:off x="822960" y="4937760"/>
+            <a:ext cx="1444752" cy="365760"/>
+          </a:xfrm>
+          <a:prstGeom prst="roundRect">
+            <a:avLst/>
+          </a:prstGeom>
+          <a:solidFill>
+            <a:srgbClr val="26282B"/>
+          </a:solidFill>
+          <a:ln w="12700">
+            <a:solidFill>
+              <a:srgbClr val="26282B"/>
+            </a:solidFill>
+          </a:ln>
+          <a:effectLst/>
+        </p:spPr>
+        <p:style>
+          <a:lnRef idx="1">
+            <a:schemeClr val="accent1"/>
+          </a:lnRef>
+          <a:fillRef idx="3">
+            <a:schemeClr val="accent1"/>
+          </a:fillRef>
+          <a:effectRef idx="2">
+            <a:schemeClr val="accent1"/>
+          </a:effectRef>
+          <a:fontRef idx="minor">
+            <a:schemeClr val="lt1"/>
+          </a:fontRef>
+        </p:style>
+        <p:txBody>
+          <a:bodyPr rtlCol="0" anchor="ctr"/>
+          <a:lstStyle/>
+          <a:p>
+            <a:pPr algn="ctr"/>
+          </a:p>
+        </p:txBody>
+      </p:sp>
+      <p:sp>
+        <p:nvSpPr>
+          <p:cNvPr id="10" name="TextBox 9"/>
+          <p:cNvSpPr txBox="1"/>
+          <p:nvPr/>
+        </p:nvSpPr>
+        <p:spPr>
+          <a:xfrm>
+            <a:off x="822960" y="4983480"/>
+            <a:ext cx="1444752" cy="292608"/>
+          </a:xfrm>
+          <a:prstGeom prst="rect">
+            <a:avLst/>
+          </a:prstGeom>
+          <a:noFill/>
+        </p:spPr>
+        <p:txBody>
+          <a:bodyPr wrap="square" anchor="t">
+            <a:spAutoFit/>
+          </a:bodyPr>
+          <a:lstStyle/>
+          <a:p>
+            <a:pPr algn="ctr"/>
+            <a:r>
+              <a:rPr sz="1400" b="0">
+                <a:solidFill>
+                  <a:srgbClr val="F4F1EC"/>
+                </a:solidFill>
+                <a:latin typeface="Montserrat"/>
+              </a:rPr>
+              <a:t>12 с общее время</a:t>
+            </a:r>
+          </a:p>
+        </p:txBody>
+      </p:sp>
+      <p:sp>
+        <p:nvSpPr>
+          <p:cNvPr id="11" name="Rounded Rectangle 10"/>
+          <p:cNvSpPr/>
+          <p:nvPr/>
+        </p:nvSpPr>
+        <p:spPr>
+          <a:xfrm>
+            <a:off x="2496312" y="4937760"/>
+            <a:ext cx="1600200" cy="365760"/>
+          </a:xfrm>
+          <a:prstGeom prst="roundRect">
+            <a:avLst/>
+          </a:prstGeom>
+          <a:solidFill>
+            <a:srgbClr val="26282B"/>
+          </a:solidFill>
+          <a:ln w="12700">
+            <a:solidFill>
+              <a:srgbClr val="26282B"/>
+            </a:solidFill>
+          </a:ln>
+          <a:effectLst/>
+        </p:spPr>
+        <p:style>
+          <a:lnRef idx="1">
+            <a:schemeClr val="accent1"/>
+          </a:lnRef>
+          <a:fillRef idx="3">
+            <a:schemeClr val="accent1"/>
+          </a:fillRef>
+          <a:effectRef idx="2">
+            <a:schemeClr val="accent1"/>
+          </a:effectRef>
+          <a:fontRef idx="minor">
+            <a:schemeClr val="lt1"/>
+          </a:fontRef>
+        </p:style>
+        <p:txBody>
+          <a:bodyPr rtlCol="0" anchor="ctr"/>
+          <a:lstStyle/>
+          <a:p>
+            <a:pPr algn="ctr"/>
+          </a:p>
+        </p:txBody>
+      </p:sp>
+      <p:sp>
+        <p:nvSpPr>
+          <p:cNvPr id="12" name="TextBox 11"/>
+          <p:cNvSpPr txBox="1"/>
+          <p:nvPr/>
+        </p:nvSpPr>
+        <p:spPr>
+          <a:xfrm>
+            <a:off x="2496312" y="4983480"/>
+            <a:ext cx="1600200" cy="292608"/>
+          </a:xfrm>
+          <a:prstGeom prst="rect">
+            <a:avLst/>
+          </a:prstGeom>
+          <a:noFill/>
+        </p:spPr>
+        <p:txBody>
+          <a:bodyPr wrap="square" anchor="t">
+            <a:spAutoFit/>
+          </a:bodyPr>
+          <a:lstStyle/>
+          <a:p>
+            <a:pPr algn="ctr"/>
+            <a:r>
+              <a:rPr sz="1400" b="0">
+                <a:solidFill>
+                  <a:srgbClr val="F4F1EC"/>
+                </a:solidFill>
+                <a:latin typeface="Montserrat"/>
+              </a:rPr>
+              <a:t>350 МиБ пик памяти</a:t>
+            </a:r>
+          </a:p>
+        </p:txBody>
+      </p:sp>
+      <p:sp>
+        <p:nvSpPr>
+          <p:cNvPr id="13" name="Rounded Rectangle 12"/>
+          <p:cNvSpPr/>
+          <p:nvPr/>
+        </p:nvSpPr>
+        <p:spPr>
+          <a:xfrm>
+            <a:off x="4325112" y="4937760"/>
+            <a:ext cx="1133856" cy="365760"/>
+          </a:xfrm>
+          <a:prstGeom prst="roundRect">
+            <a:avLst/>
+          </a:prstGeom>
+          <a:solidFill>
+            <a:srgbClr val="26282B"/>
+          </a:solidFill>
+          <a:ln w="12700">
+            <a:solidFill>
+              <a:srgbClr val="26282B"/>
+            </a:solidFill>
+          </a:ln>
+          <a:effectLst/>
+        </p:spPr>
+        <p:style>
+          <a:lnRef idx="1">
+            <a:schemeClr val="accent1"/>
+          </a:lnRef>
+          <a:fillRef idx="3">
+            <a:schemeClr val="accent1"/>
+          </a:fillRef>
+          <a:effectRef idx="2">
+            <a:schemeClr val="accent1"/>
+          </a:effectRef>
+          <a:fontRef idx="minor">
+            <a:schemeClr val="lt1"/>
+          </a:fontRef>
+        </p:style>
+        <p:txBody>
+          <a:bodyPr rtlCol="0" anchor="ctr"/>
+          <a:lstStyle/>
+          <a:p>
+            <a:pPr algn="ctr"/>
+          </a:p>
+        </p:txBody>
+      </p:sp>
+      <p:sp>
+        <p:nvSpPr>
+          <p:cNvPr id="14" name="TextBox 13"/>
+          <p:cNvSpPr txBox="1"/>
+          <p:nvPr/>
+        </p:nvSpPr>
+        <p:spPr>
+          <a:xfrm>
+            <a:off x="4325112" y="4983480"/>
+            <a:ext cx="1133856" cy="292608"/>
+          </a:xfrm>
+          <a:prstGeom prst="rect">
+            <a:avLst/>
+          </a:prstGeom>
+          <a:noFill/>
+        </p:spPr>
+        <p:txBody>
+          <a:bodyPr wrap="square" anchor="t">
+            <a:spAutoFit/>
+          </a:bodyPr>
+          <a:lstStyle/>
+          <a:p>
+            <a:pPr algn="ctr"/>
+            <a:r>
+              <a:rPr sz="1400" b="0">
+                <a:solidFill>
+                  <a:srgbClr val="F4F1EC"/>
+                </a:solidFill>
+                <a:latin typeface="Montserrat"/>
+              </a:rPr>
+              <a:t>250k пакетов</a:t>
+            </a:r>
+          </a:p>
+        </p:txBody>
+      </p:sp>
+      <p:sp>
+        <p:nvSpPr>
+          <p:cNvPr id="15" name="TextBox 14"/>
+          <p:cNvSpPr txBox="1"/>
+          <p:nvPr/>
+        </p:nvSpPr>
+        <p:spPr>
+          <a:xfrm>
+            <a:off x="822960" y="6035040"/>
+            <a:ext cx="10545775" cy="365760"/>
+          </a:xfrm>
+          <a:prstGeom prst="rect">
+            <a:avLst/>
+          </a:prstGeom>
+          <a:noFill/>
+        </p:spPr>
+        <p:txBody>
+          <a:bodyPr wrap="square" anchor="t">
+            <a:spAutoFit/>
+          </a:bodyPr>
+          <a:lstStyle/>
+          <a:p>
+            <a:r>
+              <a:rPr sz="1400" b="0">
+                <a:solidFill>
+                  <a:srgbClr val="A8A29E"/>
+                </a:solidFill>
+                <a:latin typeface="Montserrat"/>
+              </a:rPr>
+              <a:t>Данные не использовались при уточнении правила; условия замера: 95.66 МиБ, 250 000 пакетов, 1000 сессий, 4 vCPU / 16 ГиБ</a:t>
+            </a:r>
+          </a:p>
+        </p:txBody>
+      </p:sp>
+      <p:sp>
+        <p:nvSpPr>
+          <p:cNvPr id="16" name="TextBox 15"/>
+          <p:cNvSpPr txBox="1"/>
+          <p:nvPr/>
+        </p:nvSpPr>
+        <p:spPr>
+          <a:xfrm>
+            <a:off x="822960" y="6446520"/>
+            <a:ext cx="3840480" cy="274320"/>
+          </a:xfrm>
+          <a:prstGeom prst="rect">
+            <a:avLst/>
+          </a:prstGeom>
+          <a:noFill/>
+        </p:spPr>
+        <p:txBody>
+          <a:bodyPr wrap="square" anchor="t">
+            <a:spAutoFit/>
+          </a:bodyPr>
+          <a:lstStyle/>
+          <a:p>
+            <a:r>
+              <a:rPr sz="1000" b="0">
+                <a:solidFill>
+                  <a:srgbClr val="A8A29E"/>
+                </a:solidFill>
+                <a:latin typeface="Montserrat"/>
+              </a:rPr>
+              <a:t>Команда HTTP 418 · кейс #02 · Мадригал</a:t>
+            </a:r>
+          </a:p>
+        </p:txBody>
+      </p:sp>
+      <p:sp>
+        <p:nvSpPr>
+          <p:cNvPr id="17" name="TextBox 16"/>
+          <p:cNvSpPr txBox="1"/>
+          <p:nvPr/>
+        </p:nvSpPr>
+        <p:spPr>
+          <a:xfrm>
+            <a:off x="4389120" y="6446520"/>
+            <a:ext cx="3383280" cy="274320"/>
+          </a:xfrm>
+          <a:prstGeom prst="rect">
+            <a:avLst/>
+          </a:prstGeom>
+          <a:noFill/>
+        </p:spPr>
+        <p:txBody>
+          <a:bodyPr wrap="square" anchor="t">
+            <a:spAutoFit/>
+          </a:bodyPr>
+          <a:lstStyle/>
+          <a:p>
+            <a:pPr algn="ctr"/>
+            <a:r>
+              <a:rPr sz="1000" b="0">
+                <a:solidFill>
+                  <a:srgbClr val="A8A29E"/>
+                </a:solidFill>
+                <a:latin typeface="Montserrat"/>
+              </a:rPr>
+              <a:t>Результаты</a:t>
+            </a:r>
+          </a:p>
+        </p:txBody>
+      </p:sp>
+      <p:sp>
+        <p:nvSpPr>
+          <p:cNvPr id="18" name="TextBox 17"/>
+          <p:cNvSpPr txBox="1"/>
+          <p:nvPr/>
+        </p:nvSpPr>
+        <p:spPr>
+          <a:xfrm>
+            <a:off x="8138160" y="6446520"/>
+            <a:ext cx="3200400" cy="274320"/>
+          </a:xfrm>
+          <a:prstGeom prst="rect">
+            <a:avLst/>
+          </a:prstGeom>
+          <a:noFill/>
+        </p:spPr>
+        <p:txBody>
+          <a:bodyPr wrap="square" anchor="t">
+            <a:spAutoFit/>
+          </a:bodyPr>
+          <a:lstStyle/>
+          <a:p>
+            <a:pPr algn="r"/>
+            <a:r>
+              <a:rPr sz="1000" b="0">
+                <a:solidFill>
+                  <a:srgbClr val="A8A29E"/>
+                </a:solidFill>
+                <a:latin typeface="Montserrat"/>
+              </a:rPr>
+              <a:t>11 / 14</a:t>
+            </a:r>
+          </a:p>
+        </p:txBody>
+      </p:sp>
+    </p:spTree>
+  </p:cSld>
+  <p:clrMapOvr>
+    <a:masterClrMapping/>
+  </p:clrMapOvr>
+  <p:timing>
+    <p:tnLst>
+      <p:par>
+        <p:cTn id="1" dur="indefinite" restart="never" nodeType="tmRoot">
+          <p:childTnLst>
+            <p:seq concurrent="1" nextAc="seek">
+              <p:cTn id="2" dur="indefinite" nodeType="mainSeq">
+                <p:childTnLst>
+                  <p:par>
+                    <p:cTn id="3" presetID="10" presetClass="entr" presetSubtype="0" fill="hold" grpId="0" nodeType="clickEffect">
+                      <p:stCondLst>
+                        <p:cond delay="0"/>
+                      </p:stCondLst>
+                      <p:childTnLst>
+                        <p:set>
+                          <p:cBhvr>
+                            <p:cTn id="4" dur="1" fill="hold">
+                              <p:stCondLst>
+                                <p:cond delay="0"/>
+                              </p:stCondLst>
+                            </p:cTn>
+                            <p:tgtEl>
+                              <p:spTgt spid="7"/>
+                            </p:tgtEl>
+                            <p:attrNameLst>
+                              <p:attrName>style.visibility</p:attrName>
+                            </p:attrNameLst>
+                          </p:cBhvr>
+                          <p:to>
+                            <p:strVal val="visible"/>
+                          </p:to>
+                        </p:set>
+                        <p:anim calcmode="lin" valueType="num">
+                          <p:cBhvr additive="base">
+                            <p:cTn id="5" dur="300" fill="hold"/>
+                            <p:tgtEl>
+                              <p:spTgt spid="7"/>
+                            </p:tgtEl>
+                            <p:attrNameLst>
+                              <p:attrName>style.opacity</p:attrName>
+                            </p:attrNameLst>
+                          </p:cBhvr>
+                          <p:tavLst>
+                            <p:tav tm="0">
+                              <p:val>
+                                <p:fltVal val="0"/>
+                              </p:val>
+                            </p:tav>
+                            <p:tav tm="100000">
+                              <p:val>
+                                <p:fltVal val="1"/>
+                              </p:val>
+                            </p:tav>
+                          </p:tavLst>
+                        </p:anim>
+                      </p:childTnLst>
+                    </p:cTn>
+                  </p:par>
+                  <p:par>
+                    <p:cTn id="6" presetID="22" presetClass="entr" presetSubtype="8" fill="hold" grpId="0" nodeType="clickEffect">
+                      <p:stCondLst>
+                        <p:cond delay="0"/>
+                      </p:stCondLst>
+                      <p:childTnLst>
+                        <p:set>
+                          <p:cBhvr>
+                            <p:cTn id="7" dur="1" fill="hold">
+                              <p:stCondLst>
+                                <p:cond delay="0"/>
+                              </p:stCondLst>
+                            </p:cTn>
+                            <p:tgtEl>
+                              <p:spTgt spid="8"/>
+                            </p:tgtEl>
+                            <p:attrNameLst>
+                              <p:attrName>style.visibility</p:attrName>
+                            </p:attrNameLst>
+                          </p:cBhvr>
+                          <p:to>
+                            <p:strVal val="visible"/>
+                          </p:to>
+                        </p:set>
+                        <p:anim calcmode="lin" valueType="num">
+                          <p:cBhvr additive="base">
+                            <p:cTn id="8" dur="400" fill="hold"/>
+                            <p:tgtEl>
+                              <p:spTgt spid="8"/>
+                            </p:tgtEl>
+                            <p:attrNameLst>
+                              <p:attrName>ppt_w</p:attrName>
+                            </p:attrNameLst>
+                          </p:cBhvr>
+                          <p:tavLst>
+                            <p:tav tm="0">
+                              <p:val>
+                                <p:fltVal val="0"/>
+                              </p:val>
+                            </p:tav>
+                            <p:tav tm="100000">
+                              <p:val>
+                                <p:fltVal val="1"/>
+                              </p:val>
+                            </p:tav>
+                          </p:tavLst>
+                        </p:anim>
+                      </p:childTnLst>
+                    </p:cTn>
+                  </p:par>
+                </p:childTnLst>
+              </p:cTn>
+            </p:seq>
+          </p:childTnLst>
+        </p:cTn>
+      </p:par>
+    </p:tnLst>
+  </p:timing>
+  <p:transition spd="med" fade="1"/>
+</p:sld>
+</file>
+
+<file path=ppt/slides/slide12.xml><?xml version="1.0" encoding="utf-8"?>
+<p:sld xmlns:a="http://schemas.openxmlformats.org/drawingml/2006/main" xmlns:p="http://schemas.openxmlformats.org/presentationml/2006/main" xmlns:r="http://schemas.openxmlformats.org/officeDocument/2006/relationships">
+  <p:cSld>
+    <p:spTree>
+      <p:nvGrpSpPr>
+        <p:cNvPr id="1" name=""/>
+        <p:cNvGrpSpPr/>
+        <p:nvPr/>
+      </p:nvGrpSpPr>
+      <p:grpSpPr/>
+      <p:sp>
+        <p:nvSpPr>
+          <p:cNvPr id="2" name="Rectangle 1"/>
+          <p:cNvSpPr/>
+          <p:nvPr/>
+        </p:nvSpPr>
+        <p:spPr>
+          <a:xfrm>
+            <a:off x="0" y="0"/>
+            <a:ext cx="12191695" cy="6858000"/>
+          </a:xfrm>
+          <a:prstGeom prst="rect">
+            <a:avLst/>
+          </a:prstGeom>
+          <a:solidFill>
+            <a:srgbClr val="0E1011"/>
+          </a:solidFill>
+          <a:ln>
+            <a:noFill/>
+          </a:ln>
+          <a:effectLst/>
+        </p:spPr>
+        <p:style>
+          <a:lnRef idx="1">
+            <a:schemeClr val="accent1"/>
+          </a:lnRef>
+          <a:fillRef idx="3">
+            <a:schemeClr val="accent1"/>
+          </a:fillRef>
+          <a:effectRef idx="2">
+            <a:schemeClr val="accent1"/>
+          </a:effectRef>
+          <a:fontRef idx="minor">
+            <a:schemeClr val="lt1"/>
+          </a:fontRef>
+        </p:style>
+        <p:txBody>
+          <a:bodyPr rtlCol="0" anchor="ctr"/>
+          <a:lstStyle/>
+          <a:p>
+            <a:pPr algn="ctr"/>
+          </a:p>
+        </p:txBody>
+      </p:sp>
+      <p:sp>
+        <p:nvSpPr>
+          <p:cNvPr id="3" name="Rectangle 2"/>
+          <p:cNvSpPr/>
+          <p:nvPr/>
+        </p:nvSpPr>
+        <p:spPr>
+          <a:xfrm>
+            <a:off x="0" y="0"/>
+            <a:ext cx="73152" cy="6858000"/>
           </a:xfrm>
           <a:prstGeom prst="rect">
             <a:avLst/>
@@ -6534,14 +6006,14 @@
       </p:sp>
       <p:sp>
         <p:nvSpPr>
-          <p:cNvPr id="7" name="TextBox 6"/>
+          <p:cNvPr id="4" name="TextBox 3"/>
           <p:cNvSpPr txBox="1"/>
           <p:nvPr/>
         </p:nvSpPr>
         <p:spPr>
           <a:xfrm>
-            <a:off x="822960" y="4480560"/>
-            <a:ext cx="10545775" cy="457200"/>
+            <a:off x="822960" y="457200"/>
+            <a:ext cx="10545775" cy="1051560"/>
           </a:xfrm>
           <a:prstGeom prst="rect">
             <a:avLst/>
@@ -6555,27 +6027,51 @@
           <a:lstStyle/>
           <a:p>
             <a:r>
-              <a:rPr sz="1600" b="0">
-                <a:solidFill>
-                  <a:srgbClr val="A8A29E"/>
-                </a:solidFill>
-                <a:latin typeface="Montserrat"/>
+              <a:rPr sz="4000" b="1">
+                <a:solidFill>
+                  <a:srgbClr val="F4F1EC"/>
+                </a:solidFill>
+                <a:latin typeface="Tektur"/>
               </a:rPr>
-              <a:t>Живое окно и запись прогона</a:t>
-            </a:r>
-          </a:p>
-        </p:txBody>
-      </p:sp>
-      <p:sp>
-        <p:nvSpPr>
-          <p:cNvPr id="8" name="TextBox 7"/>
+              <a:t>Демонстрация: живое окно и запись прогона</a:t>
+            </a:r>
+          </a:p>
+        </p:txBody>
+      </p:sp>
+      <p:pic>
+        <p:nvPicPr>
+          <p:cNvPr id="5" name="Picture 4" descr="screenshot-main.png"/>
+          <p:cNvPicPr>
+            <a:picLocks noChangeAspect="1"/>
+          </p:cNvPicPr>
+          <p:nvPr/>
+        </p:nvPicPr>
+        <p:blipFill>
+          <a:blip r:embed="rId2"/>
+          <a:stretch>
+            <a:fillRect/>
+          </a:stretch>
+        </p:blipFill>
+        <p:spPr>
+          <a:xfrm>
+            <a:off x="822960" y="1691640"/>
+            <a:ext cx="10545775" cy="2708050"/>
+          </a:xfrm>
+          <a:prstGeom prst="rect">
+            <a:avLst/>
+          </a:prstGeom>
+        </p:spPr>
+      </p:pic>
+      <p:sp>
+        <p:nvSpPr>
+          <p:cNvPr id="6" name="TextBox 5"/>
           <p:cNvSpPr txBox="1"/>
           <p:nvPr/>
         </p:nvSpPr>
         <p:spPr>
           <a:xfrm>
-            <a:off x="822960" y="6446520"/>
-            <a:ext cx="3840480" cy="274320"/>
+            <a:off x="822960" y="6035040"/>
+            <a:ext cx="10545775" cy="365760"/>
           </a:xfrm>
           <a:prstGeom prst="rect">
             <a:avLst/>
@@ -6589,6 +6085,40 @@
           <a:lstStyle/>
           <a:p>
             <a:r>
+              <a:rPr sz="1400" b="0">
+                <a:solidFill>
+                  <a:srgbClr val="A8A29E"/>
+                </a:solidFill>
+                <a:latin typeface="Montserrat"/>
+              </a:rPr>
+              <a:t>Сессии, байты, интерпретация, происхождение и диагностика в одном окне. Резерв — запись полного прогона, 2:22, без звука; играется, если живое окно не поднимется</a:t>
+            </a:r>
+          </a:p>
+        </p:txBody>
+      </p:sp>
+      <p:sp>
+        <p:nvSpPr>
+          <p:cNvPr id="7" name="TextBox 6"/>
+          <p:cNvSpPr txBox="1"/>
+          <p:nvPr/>
+        </p:nvSpPr>
+        <p:spPr>
+          <a:xfrm>
+            <a:off x="822960" y="6446520"/>
+            <a:ext cx="3840480" cy="274320"/>
+          </a:xfrm>
+          <a:prstGeom prst="rect">
+            <a:avLst/>
+          </a:prstGeom>
+          <a:noFill/>
+        </p:spPr>
+        <p:txBody>
+          <a:bodyPr wrap="square" anchor="t">
+            <a:spAutoFit/>
+          </a:bodyPr>
+          <a:lstStyle/>
+          <a:p>
+            <a:r>
               <a:rPr sz="1000" b="0">
                 <a:solidFill>
                   <a:srgbClr val="A8A29E"/>
@@ -6602,7 +6132,7 @@
       </p:sp>
       <p:sp>
         <p:nvSpPr>
-          <p:cNvPr id="9" name="TextBox 8"/>
+          <p:cNvPr id="8" name="TextBox 7"/>
           <p:cNvSpPr txBox="1"/>
           <p:nvPr/>
         </p:nvSpPr>
@@ -6637,7 +6167,7 @@
       </p:sp>
       <p:sp>
         <p:nvSpPr>
-          <p:cNvPr id="10" name="TextBox 9"/>
+          <p:cNvPr id="9" name="TextBox 8"/>
           <p:cNvSpPr txBox="1"/>
           <p:nvPr/>
         </p:nvSpPr>
@@ -6665,7 +6195,7 @@
                 </a:solidFill>
                 <a:latin typeface="Montserrat"/>
               </a:rPr>
-              <a:t>14 / 19</a:t>
+              <a:t>12 / 14</a:t>
             </a:r>
           </a:p>
         </p:txBody>
@@ -6679,7 +6209,7 @@
 </p:sld>
 </file>
 
-<file path=ppt/slides/slide15.xml><?xml version="1.0" encoding="utf-8"?>
+<file path=ppt/slides/slide13.xml><?xml version="1.0" encoding="utf-8"?>
 <p:sld xmlns:a="http://schemas.openxmlformats.org/drawingml/2006/main" xmlns:p="http://schemas.openxmlformats.org/presentationml/2006/main" xmlns:r="http://schemas.openxmlformats.org/officeDocument/2006/relationships">
   <p:cSld>
     <p:spTree>
@@ -6817,45 +6347,21 @@
                 </a:solidFill>
                 <a:latin typeface="Tektur"/>
               </a:rPr>
-              <a:t>Живое окно</a:t>
-            </a:r>
-          </a:p>
-        </p:txBody>
-      </p:sp>
-      <p:pic>
-        <p:nvPicPr>
-          <p:cNvPr id="5" name="Picture 4" descr="screenshot-main.png"/>
-          <p:cNvPicPr>
-            <a:picLocks noChangeAspect="1"/>
-          </p:cNvPicPr>
-          <p:nvPr/>
-        </p:nvPicPr>
-        <p:blipFill>
-          <a:blip r:embed="rId2"/>
-          <a:stretch>
-            <a:fillRect/>
-          </a:stretch>
-        </p:blipFill>
+              <a:t>Границы и итог</a:t>
+            </a:r>
+          </a:p>
+        </p:txBody>
+      </p:sp>
+      <p:sp>
+        <p:nvSpPr>
+          <p:cNvPr id="5" name="TextBox 4"/>
+          <p:cNvSpPr txBox="1"/>
+          <p:nvPr/>
+        </p:nvSpPr>
         <p:spPr>
           <a:xfrm>
             <a:off x="822960" y="1691640"/>
-            <a:ext cx="10545775" cy="2708050"/>
-          </a:xfrm>
-          <a:prstGeom prst="rect">
-            <a:avLst/>
-          </a:prstGeom>
-        </p:spPr>
-      </p:pic>
-      <p:sp>
-        <p:nvSpPr>
-          <p:cNvPr id="6" name="TextBox 5"/>
-          <p:cNvSpPr txBox="1"/>
-          <p:nvPr/>
-        </p:nvSpPr>
-        <p:spPr>
-          <a:xfrm>
-            <a:off x="822960" y="6035040"/>
-            <a:ext cx="10545775" cy="365760"/>
+            <a:ext cx="5044287" cy="320040"/>
           </a:xfrm>
           <a:prstGeom prst="rect">
             <a:avLst/>
@@ -6869,27 +6375,27 @@
           <a:lstStyle/>
           <a:p>
             <a:r>
-              <a:rPr sz="1400" b="0">
-                <a:solidFill>
-                  <a:srgbClr val="A8A29E"/>
+              <a:rPr sz="1400" b="1">
+                <a:solidFill>
+                  <a:srgbClr val="D0603A"/>
                 </a:solidFill>
                 <a:latin typeface="Montserrat"/>
               </a:rPr>
-              <a:t>Сессии, байты, интерпретация, происхождение и диагностика в одном окне</a:t>
-            </a:r>
-          </a:p>
-        </p:txBody>
-      </p:sp>
-      <p:sp>
-        <p:nvSpPr>
-          <p:cNvPr id="7" name="TextBox 6"/>
+              <a:t>ЧТО МЫ НЕ УТВЕРЖДАЕМ</a:t>
+            </a:r>
+          </a:p>
+        </p:txBody>
+      </p:sp>
+      <p:sp>
+        <p:nvSpPr>
+          <p:cNvPr id="6" name="TextBox 5"/>
           <p:cNvSpPr txBox="1"/>
           <p:nvPr/>
         </p:nvSpPr>
         <p:spPr>
           <a:xfrm>
-            <a:off x="822960" y="6446520"/>
-            <a:ext cx="3840480" cy="274320"/>
+            <a:off x="822960" y="2194560"/>
+            <a:ext cx="5044287" cy="914400"/>
           </a:xfrm>
           <a:prstGeom prst="rect">
             <a:avLst/>
@@ -6903,6 +6409,176 @@
           <a:lstStyle/>
           <a:p>
             <a:r>
+              <a:rPr sz="1700" b="0">
+                <a:solidFill>
+                  <a:srgbClr val="F4F1EC"/>
+                </a:solidFill>
+                <a:latin typeface="Montserrat"/>
+              </a:rPr>
+              <a:t>•  Смысл байта флагов не установлен: в корпусе он постоянен</a:t>
+            </a:r>
+          </a:p>
+        </p:txBody>
+      </p:sp>
+      <p:sp>
+        <p:nvSpPr>
+          <p:cNvPr id="7" name="TextBox 6"/>
+          <p:cNvSpPr txBox="1"/>
+          <p:nvPr/>
+        </p:nvSpPr>
+        <p:spPr>
+          <a:xfrm>
+            <a:off x="822960" y="3108960"/>
+            <a:ext cx="5044287" cy="914400"/>
+          </a:xfrm>
+          <a:prstGeom prst="rect">
+            <a:avLst/>
+          </a:prstGeom>
+          <a:noFill/>
+        </p:spPr>
+        <p:txBody>
+          <a:bodyPr wrap="square" anchor="t">
+            <a:spAutoFit/>
+          </a:bodyPr>
+          <a:lstStyle/>
+          <a:p>
+            <a:r>
+              <a:rPr sz="1700" b="0">
+                <a:solidFill>
+                  <a:srgbClr val="F4F1EC"/>
+                </a:solidFill>
+                <a:latin typeface="Montserrat"/>
+              </a:rPr>
+              <a:t>•  Поле значения остаётся гипотезой, а не фактом</a:t>
+            </a:r>
+          </a:p>
+        </p:txBody>
+      </p:sp>
+      <p:sp>
+        <p:nvSpPr>
+          <p:cNvPr id="8" name="TextBox 7"/>
+          <p:cNvSpPr txBox="1"/>
+          <p:nvPr/>
+        </p:nvSpPr>
+        <p:spPr>
+          <a:xfrm>
+            <a:off x="6324447" y="1691640"/>
+            <a:ext cx="5044287" cy="320040"/>
+          </a:xfrm>
+          <a:prstGeom prst="rect">
+            <a:avLst/>
+          </a:prstGeom>
+          <a:noFill/>
+        </p:spPr>
+        <p:txBody>
+          <a:bodyPr wrap="square" anchor="t">
+            <a:spAutoFit/>
+          </a:bodyPr>
+          <a:lstStyle/>
+          <a:p>
+            <a:r>
+              <a:rPr sz="1400" b="1">
+                <a:solidFill>
+                  <a:srgbClr val="D0603A"/>
+                </a:solidFill>
+                <a:latin typeface="Montserrat"/>
+              </a:rPr>
+              <a:t>ЧТО ОСТАЛОСЬ ЗА РАМКАМИ</a:t>
+            </a:r>
+          </a:p>
+        </p:txBody>
+      </p:sp>
+      <p:sp>
+        <p:nvSpPr>
+          <p:cNvPr id="9" name="TextBox 8"/>
+          <p:cNvSpPr txBox="1"/>
+          <p:nvPr/>
+        </p:nvSpPr>
+        <p:spPr>
+          <a:xfrm>
+            <a:off x="6324447" y="2194560"/>
+            <a:ext cx="5044287" cy="914400"/>
+          </a:xfrm>
+          <a:prstGeom prst="rect">
+            <a:avLst/>
+          </a:prstGeom>
+          <a:noFill/>
+        </p:spPr>
+        <p:txBody>
+          <a:bodyPr wrap="square" anchor="t">
+            <a:spAutoFit/>
+          </a:bodyPr>
+          <a:lstStyle/>
+          <a:p>
+            <a:r>
+              <a:rPr sz="1700" b="0">
+                <a:solidFill>
+                  <a:srgbClr val="F4F1EC"/>
+                </a:solidFill>
+                <a:latin typeface="Montserrat"/>
+              </a:rPr>
+              <a:t>•  Альтернативные чтения берутся из заданного набора</a:t>
+            </a:r>
+          </a:p>
+        </p:txBody>
+      </p:sp>
+      <p:sp>
+        <p:nvSpPr>
+          <p:cNvPr id="10" name="TextBox 9"/>
+          <p:cNvSpPr txBox="1"/>
+          <p:nvPr/>
+        </p:nvSpPr>
+        <p:spPr>
+          <a:xfrm>
+            <a:off x="6324447" y="3108960"/>
+            <a:ext cx="5044287" cy="914400"/>
+          </a:xfrm>
+          <a:prstGeom prst="rect">
+            <a:avLst/>
+          </a:prstGeom>
+          <a:noFill/>
+        </p:spPr>
+        <p:txBody>
+          <a:bodyPr wrap="square" anchor="t">
+            <a:spAutoFit/>
+          </a:bodyPr>
+          <a:lstStyle/>
+          <a:p>
+            <a:r>
+              <a:rPr sz="1700" b="0">
+                <a:solidFill>
+                  <a:srgbClr val="F4F1EC"/>
+                </a:solidFill>
+                <a:latin typeface="Montserrat"/>
+              </a:rPr>
+              <a:t>•  Интерпретация верна для проверенных захватов и молчит вне них</a:t>
+            </a:r>
+          </a:p>
+        </p:txBody>
+      </p:sp>
+      <p:sp>
+        <p:nvSpPr>
+          <p:cNvPr id="11" name="TextBox 10"/>
+          <p:cNvSpPr txBox="1"/>
+          <p:nvPr/>
+        </p:nvSpPr>
+        <p:spPr>
+          <a:xfrm>
+            <a:off x="822960" y="6446520"/>
+            <a:ext cx="3840480" cy="274320"/>
+          </a:xfrm>
+          <a:prstGeom prst="rect">
+            <a:avLst/>
+          </a:prstGeom>
+          <a:noFill/>
+        </p:spPr>
+        <p:txBody>
+          <a:bodyPr wrap="square" anchor="t">
+            <a:spAutoFit/>
+          </a:bodyPr>
+          <a:lstStyle/>
+          <a:p>
+            <a:r>
               <a:rPr sz="1000" b="0">
                 <a:solidFill>
                   <a:srgbClr val="A8A29E"/>
@@ -6916,7 +6592,7 @@
       </p:sp>
       <p:sp>
         <p:nvSpPr>
-          <p:cNvPr id="8" name="TextBox 7"/>
+          <p:cNvPr id="12" name="TextBox 11"/>
           <p:cNvSpPr txBox="1"/>
           <p:nvPr/>
         </p:nvSpPr>
@@ -6944,14 +6620,14 @@
                 </a:solidFill>
                 <a:latin typeface="Montserrat"/>
               </a:rPr>
-              <a:t>Демонстрация</a:t>
-            </a:r>
-          </a:p>
-        </p:txBody>
-      </p:sp>
-      <p:sp>
-        <p:nvSpPr>
-          <p:cNvPr id="9" name="TextBox 8"/>
+              <a:t>Границы и итог</a:t>
+            </a:r>
+          </a:p>
+        </p:txBody>
+      </p:sp>
+      <p:sp>
+        <p:nvSpPr>
+          <p:cNvPr id="13" name="TextBox 12"/>
           <p:cNvSpPr txBox="1"/>
           <p:nvPr/>
         </p:nvSpPr>
@@ -6979,7 +6655,7 @@
                 </a:solidFill>
                 <a:latin typeface="Montserrat"/>
               </a:rPr>
-              <a:t>15 / 19</a:t>
+              <a:t>13 / 14</a:t>
             </a:r>
           </a:p>
         </p:txBody>
@@ -6993,7 +6669,7 @@
 </p:sld>
 </file>
 
-<file path=ppt/slides/slide16.xml><?xml version="1.0" encoding="utf-8"?>
+<file path=ppt/slides/slide14.xml><?xml version="1.0" encoding="utf-8"?>
 <p:sld xmlns:a="http://schemas.openxmlformats.org/drawingml/2006/main" xmlns:p="http://schemas.openxmlformats.org/presentationml/2006/main" xmlns:r="http://schemas.openxmlformats.org/officeDocument/2006/relationships">
   <p:cSld>
     <p:spTree>
@@ -7110,8 +6786,8 @@
         </p:nvSpPr>
         <p:spPr>
           <a:xfrm>
-            <a:off x="822960" y="457200"/>
-            <a:ext cx="10545775" cy="1051560"/>
+            <a:off x="914400" y="1280160"/>
+            <a:ext cx="10362895" cy="1280160"/>
           </a:xfrm>
           <a:prstGeom prst="rect">
             <a:avLst/>
@@ -7124,21 +6800,22 @@
           </a:bodyPr>
           <a:lstStyle/>
           <a:p>
-            <a:r>
-              <a:rPr sz="4000" b="1">
+            <a:pPr algn="ctr"/>
+            <a:r>
+              <a:rPr sz="3400" b="1">
                 <a:solidFill>
                   <a:srgbClr val="F4F1EC"/>
                 </a:solidFill>
                 <a:latin typeface="Tektur"/>
               </a:rPr>
-              <a:t>Резерв: запись прогона</a:t>
+              <a:t>Инструмент превращает байты в проверяемое знание</a:t>
             </a:r>
           </a:p>
         </p:txBody>
       </p:sp>
       <p:pic>
         <p:nvPicPr>
-          <p:cNvPr id="5" name="Picture 4" descr="screencast-poster.png"/>
+          <p:cNvPr id="5" name="Picture 4" descr="qr_repo.png"/>
           <p:cNvPicPr>
             <a:picLocks noChangeAspect="1"/>
           </p:cNvPicPr>
@@ -7152,1216 +6829,6 @@
         </p:blipFill>
         <p:spPr>
           <a:xfrm>
-            <a:off x="822960" y="1691640"/>
-            <a:ext cx="5852160" cy="3291840"/>
-          </a:xfrm>
-          <a:prstGeom prst="rect">
-            <a:avLst/>
-          </a:prstGeom>
-        </p:spPr>
-      </p:pic>
-      <p:sp>
-        <p:nvSpPr>
-          <p:cNvPr id="6" name="Oval 5"/>
-          <p:cNvSpPr/>
-          <p:nvPr/>
-        </p:nvSpPr>
-        <p:spPr>
-          <a:xfrm>
-            <a:off x="6080760" y="4389120"/>
-            <a:ext cx="365760" cy="365760"/>
-          </a:xfrm>
-          <a:prstGeom prst="ellipse">
-            <a:avLst/>
-          </a:prstGeom>
-          <a:solidFill>
-            <a:srgbClr val="0E1011"/>
-          </a:solidFill>
-          <a:ln w="12700">
-            <a:solidFill>
-              <a:srgbClr val="D0603A"/>
-            </a:solidFill>
-          </a:ln>
-          <a:effectLst/>
-        </p:spPr>
-        <p:style>
-          <a:lnRef idx="1">
-            <a:schemeClr val="accent1"/>
-          </a:lnRef>
-          <a:fillRef idx="3">
-            <a:schemeClr val="accent1"/>
-          </a:fillRef>
-          <a:effectRef idx="2">
-            <a:schemeClr val="accent1"/>
-          </a:effectRef>
-          <a:fontRef idx="minor">
-            <a:schemeClr val="lt1"/>
-          </a:fontRef>
-        </p:style>
-        <p:txBody>
-          <a:bodyPr rtlCol="0" anchor="ctr"/>
-          <a:lstStyle/>
-          <a:p>
-            <a:pPr algn="ctr"/>
-          </a:p>
-        </p:txBody>
-      </p:sp>
-      <p:sp>
-        <p:nvSpPr>
-          <p:cNvPr id="7" name="Isosceles Triangle 6"/>
-          <p:cNvSpPr/>
-          <p:nvPr/>
-        </p:nvSpPr>
-        <p:spPr>
-          <a:xfrm rot="5400000">
-            <a:off x="6199632" y="4462272"/>
-            <a:ext cx="128016" cy="219456"/>
-          </a:xfrm>
-          <a:prstGeom prst="triangle">
-            <a:avLst/>
-          </a:prstGeom>
-          <a:solidFill>
-            <a:srgbClr val="D0603A"/>
-          </a:solidFill>
-          <a:ln>
-            <a:noFill/>
-          </a:ln>
-          <a:effectLst/>
-        </p:spPr>
-        <p:style>
-          <a:lnRef idx="1">
-            <a:schemeClr val="accent1"/>
-          </a:lnRef>
-          <a:fillRef idx="3">
-            <a:schemeClr val="accent1"/>
-          </a:fillRef>
-          <a:effectRef idx="2">
-            <a:schemeClr val="accent1"/>
-          </a:effectRef>
-          <a:fontRef idx="minor">
-            <a:schemeClr val="lt1"/>
-          </a:fontRef>
-        </p:style>
-        <p:txBody>
-          <a:bodyPr rtlCol="0" anchor="ctr"/>
-          <a:lstStyle/>
-          <a:p>
-            <a:pPr algn="ctr"/>
-          </a:p>
-        </p:txBody>
-      </p:sp>
-      <p:sp>
-        <p:nvSpPr>
-          <p:cNvPr id="8" name="TextBox 7"/>
-          <p:cNvSpPr txBox="1"/>
-          <p:nvPr/>
-        </p:nvSpPr>
-        <p:spPr>
-          <a:xfrm>
-            <a:off x="822960" y="5394960"/>
-            <a:ext cx="10545775" cy="365760"/>
-          </a:xfrm>
-          <a:prstGeom prst="rect">
-            <a:avLst/>
-          </a:prstGeom>
-          <a:noFill/>
-        </p:spPr>
-        <p:txBody>
-          <a:bodyPr wrap="square" anchor="t">
-            <a:spAutoFit/>
-          </a:bodyPr>
-          <a:lstStyle/>
-          <a:p>
-            <a:r>
-              <a:rPr sz="1400" b="0">
-                <a:solidFill>
-                  <a:srgbClr val="A8A29E"/>
-                </a:solidFill>
-                <a:latin typeface="JetBrains Mono"/>
-              </a:rPr>
-              <a:t>Полный прогон референсного исследования · 2:22 · без звука</a:t>
-            </a:r>
-          </a:p>
-        </p:txBody>
-      </p:sp>
-      <p:sp>
-        <p:nvSpPr>
-          <p:cNvPr id="9" name="TextBox 8"/>
-          <p:cNvSpPr txBox="1"/>
-          <p:nvPr/>
-        </p:nvSpPr>
-        <p:spPr>
-          <a:xfrm>
-            <a:off x="822960" y="6035040"/>
-            <a:ext cx="10545775" cy="365760"/>
-          </a:xfrm>
-          <a:prstGeom prst="rect">
-            <a:avLst/>
-          </a:prstGeom>
-          <a:noFill/>
-        </p:spPr>
-        <p:txBody>
-          <a:bodyPr wrap="square" anchor="t">
-            <a:spAutoFit/>
-          </a:bodyPr>
-          <a:lstStyle/>
-          <a:p>
-            <a:r>
-              <a:rPr sz="1400" b="0">
-                <a:solidFill>
-                  <a:srgbClr val="A8A29E"/>
-                </a:solidFill>
-                <a:latin typeface="Montserrat"/>
-              </a:rPr>
-              <a:t>Играется, если живое окно не поднимется на защите</a:t>
-            </a:r>
-          </a:p>
-        </p:txBody>
-      </p:sp>
-      <p:sp>
-        <p:nvSpPr>
-          <p:cNvPr id="10" name="TextBox 9"/>
-          <p:cNvSpPr txBox="1"/>
-          <p:nvPr/>
-        </p:nvSpPr>
-        <p:spPr>
-          <a:xfrm>
-            <a:off x="822960" y="6446520"/>
-            <a:ext cx="3840480" cy="274320"/>
-          </a:xfrm>
-          <a:prstGeom prst="rect">
-            <a:avLst/>
-          </a:prstGeom>
-          <a:noFill/>
-        </p:spPr>
-        <p:txBody>
-          <a:bodyPr wrap="square" anchor="t">
-            <a:spAutoFit/>
-          </a:bodyPr>
-          <a:lstStyle/>
-          <a:p>
-            <a:r>
-              <a:rPr sz="1000" b="0">
-                <a:solidFill>
-                  <a:srgbClr val="A8A29E"/>
-                </a:solidFill>
-                <a:latin typeface="Montserrat"/>
-              </a:rPr>
-              <a:t>Команда HTTP 418 · кейс #02 · Мадригал</a:t>
-            </a:r>
-          </a:p>
-        </p:txBody>
-      </p:sp>
-      <p:sp>
-        <p:nvSpPr>
-          <p:cNvPr id="11" name="TextBox 10"/>
-          <p:cNvSpPr txBox="1"/>
-          <p:nvPr/>
-        </p:nvSpPr>
-        <p:spPr>
-          <a:xfrm>
-            <a:off x="4389120" y="6446520"/>
-            <a:ext cx="3383280" cy="274320"/>
-          </a:xfrm>
-          <a:prstGeom prst="rect">
-            <a:avLst/>
-          </a:prstGeom>
-          <a:noFill/>
-        </p:spPr>
-        <p:txBody>
-          <a:bodyPr wrap="square" anchor="t">
-            <a:spAutoFit/>
-          </a:bodyPr>
-          <a:lstStyle/>
-          <a:p>
-            <a:pPr algn="ctr"/>
-            <a:r>
-              <a:rPr sz="1000" b="0">
-                <a:solidFill>
-                  <a:srgbClr val="A8A29E"/>
-                </a:solidFill>
-                <a:latin typeface="Montserrat"/>
-              </a:rPr>
-              <a:t>Демонстрация</a:t>
-            </a:r>
-          </a:p>
-        </p:txBody>
-      </p:sp>
-      <p:sp>
-        <p:nvSpPr>
-          <p:cNvPr id="12" name="TextBox 11"/>
-          <p:cNvSpPr txBox="1"/>
-          <p:nvPr/>
-        </p:nvSpPr>
-        <p:spPr>
-          <a:xfrm>
-            <a:off x="8138160" y="6446520"/>
-            <a:ext cx="3200400" cy="274320"/>
-          </a:xfrm>
-          <a:prstGeom prst="rect">
-            <a:avLst/>
-          </a:prstGeom>
-          <a:noFill/>
-        </p:spPr>
-        <p:txBody>
-          <a:bodyPr wrap="square" anchor="t">
-            <a:spAutoFit/>
-          </a:bodyPr>
-          <a:lstStyle/>
-          <a:p>
-            <a:pPr algn="r"/>
-            <a:r>
-              <a:rPr sz="1000" b="0">
-                <a:solidFill>
-                  <a:srgbClr val="A8A29E"/>
-                </a:solidFill>
-                <a:latin typeface="Montserrat"/>
-              </a:rPr>
-              <a:t>16 / 19</a:t>
-            </a:r>
-          </a:p>
-        </p:txBody>
-      </p:sp>
-    </p:spTree>
-  </p:cSld>
-  <p:clrMapOvr>
-    <a:masterClrMapping/>
-  </p:clrMapOvr>
-  <p:transition spd="med" fade="1"/>
-</p:sld>
-</file>
-
-<file path=ppt/slides/slide17.xml><?xml version="1.0" encoding="utf-8"?>
-<p:sld xmlns:a="http://schemas.openxmlformats.org/drawingml/2006/main" xmlns:p="http://schemas.openxmlformats.org/presentationml/2006/main" xmlns:r="http://schemas.openxmlformats.org/officeDocument/2006/relationships">
-  <p:cSld>
-    <p:spTree>
-      <p:nvGrpSpPr>
-        <p:cNvPr id="1" name=""/>
-        <p:cNvGrpSpPr/>
-        <p:nvPr/>
-      </p:nvGrpSpPr>
-      <p:grpSpPr/>
-      <p:sp>
-        <p:nvSpPr>
-          <p:cNvPr id="2" name="Rectangle 1"/>
-          <p:cNvSpPr/>
-          <p:nvPr/>
-        </p:nvSpPr>
-        <p:spPr>
-          <a:xfrm>
-            <a:off x="0" y="0"/>
-            <a:ext cx="12191695" cy="6858000"/>
-          </a:xfrm>
-          <a:prstGeom prst="rect">
-            <a:avLst/>
-          </a:prstGeom>
-          <a:solidFill>
-            <a:srgbClr val="0E1011"/>
-          </a:solidFill>
-          <a:ln>
-            <a:noFill/>
-          </a:ln>
-          <a:effectLst/>
-        </p:spPr>
-        <p:style>
-          <a:lnRef idx="1">
-            <a:schemeClr val="accent1"/>
-          </a:lnRef>
-          <a:fillRef idx="3">
-            <a:schemeClr val="accent1"/>
-          </a:fillRef>
-          <a:effectRef idx="2">
-            <a:schemeClr val="accent1"/>
-          </a:effectRef>
-          <a:fontRef idx="minor">
-            <a:schemeClr val="lt1"/>
-          </a:fontRef>
-        </p:style>
-        <p:txBody>
-          <a:bodyPr rtlCol="0" anchor="ctr"/>
-          <a:lstStyle/>
-          <a:p>
-            <a:pPr algn="ctr"/>
-          </a:p>
-        </p:txBody>
-      </p:sp>
-      <p:sp>
-        <p:nvSpPr>
-          <p:cNvPr id="3" name="Rectangle 2"/>
-          <p:cNvSpPr/>
-          <p:nvPr/>
-        </p:nvSpPr>
-        <p:spPr>
-          <a:xfrm>
-            <a:off x="0" y="0"/>
-            <a:ext cx="73152" cy="6858000"/>
-          </a:xfrm>
-          <a:prstGeom prst="rect">
-            <a:avLst/>
-          </a:prstGeom>
-          <a:ln>
-            <a:noFill/>
-          </a:ln>
-          <a:effectLst/>
-          <a:gradFill rotWithShape="1">
-            <a:gsLst>
-              <a:gs pos="0">
-                <a:srgbClr val="410913"/>
-              </a:gs>
-              <a:gs pos="50000">
-                <a:srgbClr val="610D1C"/>
-              </a:gs>
-              <a:gs pos="100000">
-                <a:srgbClr val="A2391D"/>
-              </a:gs>
-            </a:gsLst>
-            <a:lin ang="2700000"/>
-          </a:gradFill>
-        </p:spPr>
-        <p:style>
-          <a:lnRef idx="1">
-            <a:schemeClr val="accent1"/>
-          </a:lnRef>
-          <a:fillRef idx="3">
-            <a:schemeClr val="accent1"/>
-          </a:fillRef>
-          <a:effectRef idx="2">
-            <a:schemeClr val="accent1"/>
-          </a:effectRef>
-          <a:fontRef idx="minor">
-            <a:schemeClr val="lt1"/>
-          </a:fontRef>
-        </p:style>
-        <p:txBody>
-          <a:bodyPr rtlCol="0" anchor="ctr"/>
-          <a:lstStyle/>
-          <a:p>
-            <a:pPr algn="ctr"/>
-          </a:p>
-        </p:txBody>
-      </p:sp>
-      <p:sp>
-        <p:nvSpPr>
-          <p:cNvPr id="4" name="TextBox 3"/>
-          <p:cNvSpPr txBox="1"/>
-          <p:nvPr/>
-        </p:nvSpPr>
-        <p:spPr>
-          <a:xfrm>
-            <a:off x="822960" y="2011680"/>
-            <a:ext cx="10545775" cy="1280160"/>
-          </a:xfrm>
-          <a:prstGeom prst="rect">
-            <a:avLst/>
-          </a:prstGeom>
-          <a:noFill/>
-        </p:spPr>
-        <p:txBody>
-          <a:bodyPr wrap="square" anchor="t">
-            <a:spAutoFit/>
-          </a:bodyPr>
-          <a:lstStyle/>
-          <a:p>
-            <a:r>
-              <a:rPr sz="7200" b="1">
-                <a:solidFill>
-                  <a:srgbClr val="D0603A"/>
-                </a:solidFill>
-                <a:latin typeface="Tektur"/>
-              </a:rPr>
-              <a:t>03</a:t>
-            </a:r>
-          </a:p>
-        </p:txBody>
-      </p:sp>
-      <p:sp>
-        <p:nvSpPr>
-          <p:cNvPr id="5" name="TextBox 4"/>
-          <p:cNvSpPr txBox="1"/>
-          <p:nvPr/>
-        </p:nvSpPr>
-        <p:spPr>
-          <a:xfrm>
-            <a:off x="822960" y="3200400"/>
-            <a:ext cx="10545775" cy="914400"/>
-          </a:xfrm>
-          <a:prstGeom prst="rect">
-            <a:avLst/>
-          </a:prstGeom>
-          <a:noFill/>
-        </p:spPr>
-        <p:txBody>
-          <a:bodyPr wrap="square" anchor="t">
-            <a:spAutoFit/>
-          </a:bodyPr>
-          <a:lstStyle/>
-          <a:p>
-            <a:r>
-              <a:rPr sz="4000" b="1">
-                <a:solidFill>
-                  <a:srgbClr val="F4F1EC"/>
-                </a:solidFill>
-                <a:latin typeface="Tektur"/>
-              </a:rPr>
-              <a:t>Границы и итог</a:t>
-            </a:r>
-          </a:p>
-        </p:txBody>
-      </p:sp>
-      <p:sp>
-        <p:nvSpPr>
-          <p:cNvPr id="6" name="Rectangle 5"/>
-          <p:cNvSpPr/>
-          <p:nvPr/>
-        </p:nvSpPr>
-        <p:spPr>
-          <a:xfrm>
-            <a:off x="822960" y="4206240"/>
-            <a:ext cx="3108960" cy="82296"/>
-          </a:xfrm>
-          <a:prstGeom prst="rect">
-            <a:avLst/>
-          </a:prstGeom>
-          <a:ln>
-            <a:noFill/>
-          </a:ln>
-          <a:effectLst/>
-          <a:gradFill rotWithShape="1">
-            <a:gsLst>
-              <a:gs pos="0">
-                <a:srgbClr val="410913"/>
-              </a:gs>
-              <a:gs pos="50000">
-                <a:srgbClr val="610D1C"/>
-              </a:gs>
-              <a:gs pos="100000">
-                <a:srgbClr val="A2391D"/>
-              </a:gs>
-            </a:gsLst>
-            <a:lin ang="2700000"/>
-          </a:gradFill>
-        </p:spPr>
-        <p:style>
-          <a:lnRef idx="1">
-            <a:schemeClr val="accent1"/>
-          </a:lnRef>
-          <a:fillRef idx="3">
-            <a:schemeClr val="accent1"/>
-          </a:fillRef>
-          <a:effectRef idx="2">
-            <a:schemeClr val="accent1"/>
-          </a:effectRef>
-          <a:fontRef idx="minor">
-            <a:schemeClr val="lt1"/>
-          </a:fontRef>
-        </p:style>
-        <p:txBody>
-          <a:bodyPr rtlCol="0" anchor="ctr"/>
-          <a:lstStyle/>
-          <a:p>
-            <a:pPr algn="ctr"/>
-          </a:p>
-        </p:txBody>
-      </p:sp>
-      <p:sp>
-        <p:nvSpPr>
-          <p:cNvPr id="7" name="TextBox 6"/>
-          <p:cNvSpPr txBox="1"/>
-          <p:nvPr/>
-        </p:nvSpPr>
-        <p:spPr>
-          <a:xfrm>
-            <a:off x="822960" y="4480560"/>
-            <a:ext cx="10545775" cy="457200"/>
-          </a:xfrm>
-          <a:prstGeom prst="rect">
-            <a:avLst/>
-          </a:prstGeom>
-          <a:noFill/>
-        </p:spPr>
-        <p:txBody>
-          <a:bodyPr wrap="square" anchor="t">
-            <a:spAutoFit/>
-          </a:bodyPr>
-          <a:lstStyle/>
-          <a:p>
-            <a:r>
-              <a:rPr sz="1600" b="0">
-                <a:solidFill>
-                  <a:srgbClr val="A8A29E"/>
-                </a:solidFill>
-                <a:latin typeface="Montserrat"/>
-              </a:rPr>
-              <a:t>Что мы не утверждаем и что осталось за рамками</a:t>
-            </a:r>
-          </a:p>
-        </p:txBody>
-      </p:sp>
-      <p:sp>
-        <p:nvSpPr>
-          <p:cNvPr id="8" name="TextBox 7"/>
-          <p:cNvSpPr txBox="1"/>
-          <p:nvPr/>
-        </p:nvSpPr>
-        <p:spPr>
-          <a:xfrm>
-            <a:off x="822960" y="6446520"/>
-            <a:ext cx="3840480" cy="274320"/>
-          </a:xfrm>
-          <a:prstGeom prst="rect">
-            <a:avLst/>
-          </a:prstGeom>
-          <a:noFill/>
-        </p:spPr>
-        <p:txBody>
-          <a:bodyPr wrap="square" anchor="t">
-            <a:spAutoFit/>
-          </a:bodyPr>
-          <a:lstStyle/>
-          <a:p>
-            <a:r>
-              <a:rPr sz="1000" b="0">
-                <a:solidFill>
-                  <a:srgbClr val="A8A29E"/>
-                </a:solidFill>
-                <a:latin typeface="Montserrat"/>
-              </a:rPr>
-              <a:t>Команда HTTP 418 · кейс #02 · Мадригал</a:t>
-            </a:r>
-          </a:p>
-        </p:txBody>
-      </p:sp>
-      <p:sp>
-        <p:nvSpPr>
-          <p:cNvPr id="9" name="TextBox 8"/>
-          <p:cNvSpPr txBox="1"/>
-          <p:nvPr/>
-        </p:nvSpPr>
-        <p:spPr>
-          <a:xfrm>
-            <a:off x="4389120" y="6446520"/>
-            <a:ext cx="3383280" cy="274320"/>
-          </a:xfrm>
-          <a:prstGeom prst="rect">
-            <a:avLst/>
-          </a:prstGeom>
-          <a:noFill/>
-        </p:spPr>
-        <p:txBody>
-          <a:bodyPr wrap="square" anchor="t">
-            <a:spAutoFit/>
-          </a:bodyPr>
-          <a:lstStyle/>
-          <a:p>
-            <a:pPr algn="ctr"/>
-            <a:r>
-              <a:rPr sz="1000" b="0">
-                <a:solidFill>
-                  <a:srgbClr val="A8A29E"/>
-                </a:solidFill>
-                <a:latin typeface="Montserrat"/>
-              </a:rPr>
-              <a:t>Границы и итог</a:t>
-            </a:r>
-          </a:p>
-        </p:txBody>
-      </p:sp>
-      <p:sp>
-        <p:nvSpPr>
-          <p:cNvPr id="10" name="TextBox 9"/>
-          <p:cNvSpPr txBox="1"/>
-          <p:nvPr/>
-        </p:nvSpPr>
-        <p:spPr>
-          <a:xfrm>
-            <a:off x="8138160" y="6446520"/>
-            <a:ext cx="3200400" cy="274320"/>
-          </a:xfrm>
-          <a:prstGeom prst="rect">
-            <a:avLst/>
-          </a:prstGeom>
-          <a:noFill/>
-        </p:spPr>
-        <p:txBody>
-          <a:bodyPr wrap="square" anchor="t">
-            <a:spAutoFit/>
-          </a:bodyPr>
-          <a:lstStyle/>
-          <a:p>
-            <a:pPr algn="r"/>
-            <a:r>
-              <a:rPr sz="1000" b="0">
-                <a:solidFill>
-                  <a:srgbClr val="A8A29E"/>
-                </a:solidFill>
-                <a:latin typeface="Montserrat"/>
-              </a:rPr>
-              <a:t>17 / 19</a:t>
-            </a:r>
-          </a:p>
-        </p:txBody>
-      </p:sp>
-    </p:spTree>
-  </p:cSld>
-  <p:clrMapOvr>
-    <a:masterClrMapping/>
-  </p:clrMapOvr>
-  <p:transition spd="med" fade="1"/>
-</p:sld>
-</file>
-
-<file path=ppt/slides/slide18.xml><?xml version="1.0" encoding="utf-8"?>
-<p:sld xmlns:a="http://schemas.openxmlformats.org/drawingml/2006/main" xmlns:p="http://schemas.openxmlformats.org/presentationml/2006/main" xmlns:r="http://schemas.openxmlformats.org/officeDocument/2006/relationships">
-  <p:cSld>
-    <p:spTree>
-      <p:nvGrpSpPr>
-        <p:cNvPr id="1" name=""/>
-        <p:cNvGrpSpPr/>
-        <p:nvPr/>
-      </p:nvGrpSpPr>
-      <p:grpSpPr/>
-      <p:sp>
-        <p:nvSpPr>
-          <p:cNvPr id="2" name="Rectangle 1"/>
-          <p:cNvSpPr/>
-          <p:nvPr/>
-        </p:nvSpPr>
-        <p:spPr>
-          <a:xfrm>
-            <a:off x="0" y="0"/>
-            <a:ext cx="12191695" cy="6858000"/>
-          </a:xfrm>
-          <a:prstGeom prst="rect">
-            <a:avLst/>
-          </a:prstGeom>
-          <a:solidFill>
-            <a:srgbClr val="0E1011"/>
-          </a:solidFill>
-          <a:ln>
-            <a:noFill/>
-          </a:ln>
-          <a:effectLst/>
-        </p:spPr>
-        <p:style>
-          <a:lnRef idx="1">
-            <a:schemeClr val="accent1"/>
-          </a:lnRef>
-          <a:fillRef idx="3">
-            <a:schemeClr val="accent1"/>
-          </a:fillRef>
-          <a:effectRef idx="2">
-            <a:schemeClr val="accent1"/>
-          </a:effectRef>
-          <a:fontRef idx="minor">
-            <a:schemeClr val="lt1"/>
-          </a:fontRef>
-        </p:style>
-        <p:txBody>
-          <a:bodyPr rtlCol="0" anchor="ctr"/>
-          <a:lstStyle/>
-          <a:p>
-            <a:pPr algn="ctr"/>
-          </a:p>
-        </p:txBody>
-      </p:sp>
-      <p:sp>
-        <p:nvSpPr>
-          <p:cNvPr id="3" name="Rectangle 2"/>
-          <p:cNvSpPr/>
-          <p:nvPr/>
-        </p:nvSpPr>
-        <p:spPr>
-          <a:xfrm>
-            <a:off x="0" y="0"/>
-            <a:ext cx="73152" cy="6858000"/>
-          </a:xfrm>
-          <a:prstGeom prst="rect">
-            <a:avLst/>
-          </a:prstGeom>
-          <a:ln>
-            <a:noFill/>
-          </a:ln>
-          <a:effectLst/>
-          <a:gradFill rotWithShape="1">
-            <a:gsLst>
-              <a:gs pos="0">
-                <a:srgbClr val="410913"/>
-              </a:gs>
-              <a:gs pos="50000">
-                <a:srgbClr val="610D1C"/>
-              </a:gs>
-              <a:gs pos="100000">
-                <a:srgbClr val="A2391D"/>
-              </a:gs>
-            </a:gsLst>
-            <a:lin ang="2700000"/>
-          </a:gradFill>
-        </p:spPr>
-        <p:style>
-          <a:lnRef idx="1">
-            <a:schemeClr val="accent1"/>
-          </a:lnRef>
-          <a:fillRef idx="3">
-            <a:schemeClr val="accent1"/>
-          </a:fillRef>
-          <a:effectRef idx="2">
-            <a:schemeClr val="accent1"/>
-          </a:effectRef>
-          <a:fontRef idx="minor">
-            <a:schemeClr val="lt1"/>
-          </a:fontRef>
-        </p:style>
-        <p:txBody>
-          <a:bodyPr rtlCol="0" anchor="ctr"/>
-          <a:lstStyle/>
-          <a:p>
-            <a:pPr algn="ctr"/>
-          </a:p>
-        </p:txBody>
-      </p:sp>
-      <p:sp>
-        <p:nvSpPr>
-          <p:cNvPr id="4" name="TextBox 3"/>
-          <p:cNvSpPr txBox="1"/>
-          <p:nvPr/>
-        </p:nvSpPr>
-        <p:spPr>
-          <a:xfrm>
-            <a:off x="822960" y="457200"/>
-            <a:ext cx="10545775" cy="1051560"/>
-          </a:xfrm>
-          <a:prstGeom prst="rect">
-            <a:avLst/>
-          </a:prstGeom>
-          <a:noFill/>
-        </p:spPr>
-        <p:txBody>
-          <a:bodyPr wrap="square" anchor="t">
-            <a:spAutoFit/>
-          </a:bodyPr>
-          <a:lstStyle/>
-          <a:p>
-            <a:r>
-              <a:rPr sz="4000" b="1">
-                <a:solidFill>
-                  <a:srgbClr val="F4F1EC"/>
-                </a:solidFill>
-                <a:latin typeface="Tektur"/>
-              </a:rPr>
-              <a:t>Что мы не утверждаем</a:t>
-            </a:r>
-          </a:p>
-        </p:txBody>
-      </p:sp>
-      <p:sp>
-        <p:nvSpPr>
-          <p:cNvPr id="5" name="TextBox 4"/>
-          <p:cNvSpPr txBox="1"/>
-          <p:nvPr/>
-        </p:nvSpPr>
-        <p:spPr>
-          <a:xfrm>
-            <a:off x="822960" y="1874520"/>
-            <a:ext cx="5044287" cy="914400"/>
-          </a:xfrm>
-          <a:prstGeom prst="rect">
-            <a:avLst/>
-          </a:prstGeom>
-          <a:noFill/>
-        </p:spPr>
-        <p:txBody>
-          <a:bodyPr wrap="square" anchor="t">
-            <a:spAutoFit/>
-          </a:bodyPr>
-          <a:lstStyle/>
-          <a:p>
-            <a:r>
-              <a:rPr sz="1700" b="0">
-                <a:solidFill>
-                  <a:srgbClr val="F4F1EC"/>
-                </a:solidFill>
-                <a:latin typeface="Montserrat"/>
-              </a:rPr>
-              <a:t>•  Смысл байта флагов не установлен: в корпусе он постоянен</a:t>
-            </a:r>
-          </a:p>
-        </p:txBody>
-      </p:sp>
-      <p:sp>
-        <p:nvSpPr>
-          <p:cNvPr id="6" name="TextBox 5"/>
-          <p:cNvSpPr txBox="1"/>
-          <p:nvPr/>
-        </p:nvSpPr>
-        <p:spPr>
-          <a:xfrm>
-            <a:off x="822960" y="2788920"/>
-            <a:ext cx="5044287" cy="914400"/>
-          </a:xfrm>
-          <a:prstGeom prst="rect">
-            <a:avLst/>
-          </a:prstGeom>
-          <a:noFill/>
-        </p:spPr>
-        <p:txBody>
-          <a:bodyPr wrap="square" anchor="t">
-            <a:spAutoFit/>
-          </a:bodyPr>
-          <a:lstStyle/>
-          <a:p>
-            <a:r>
-              <a:rPr sz="1700" b="0">
-                <a:solidFill>
-                  <a:srgbClr val="F4F1EC"/>
-                </a:solidFill>
-                <a:latin typeface="Montserrat"/>
-              </a:rPr>
-              <a:t>•  Поле значения остаётся гипотезой, а не фактом</a:t>
-            </a:r>
-          </a:p>
-        </p:txBody>
-      </p:sp>
-      <p:sp>
-        <p:nvSpPr>
-          <p:cNvPr id="7" name="TextBox 6"/>
-          <p:cNvSpPr txBox="1"/>
-          <p:nvPr/>
-        </p:nvSpPr>
-        <p:spPr>
-          <a:xfrm>
-            <a:off x="6324447" y="1874520"/>
-            <a:ext cx="5044287" cy="914400"/>
-          </a:xfrm>
-          <a:prstGeom prst="rect">
-            <a:avLst/>
-          </a:prstGeom>
-          <a:noFill/>
-        </p:spPr>
-        <p:txBody>
-          <a:bodyPr wrap="square" anchor="t">
-            <a:spAutoFit/>
-          </a:bodyPr>
-          <a:lstStyle/>
-          <a:p>
-            <a:r>
-              <a:rPr sz="1700" b="0">
-                <a:solidFill>
-                  <a:srgbClr val="F4F1EC"/>
-                </a:solidFill>
-                <a:latin typeface="Montserrat"/>
-              </a:rPr>
-              <a:t>•  Альтернативные чтения берутся из заданного набора</a:t>
-            </a:r>
-          </a:p>
-        </p:txBody>
-      </p:sp>
-      <p:sp>
-        <p:nvSpPr>
-          <p:cNvPr id="8" name="TextBox 7"/>
-          <p:cNvSpPr txBox="1"/>
-          <p:nvPr/>
-        </p:nvSpPr>
-        <p:spPr>
-          <a:xfrm>
-            <a:off x="6324447" y="2788920"/>
-            <a:ext cx="5044287" cy="914400"/>
-          </a:xfrm>
-          <a:prstGeom prst="rect">
-            <a:avLst/>
-          </a:prstGeom>
-          <a:noFill/>
-        </p:spPr>
-        <p:txBody>
-          <a:bodyPr wrap="square" anchor="t">
-            <a:spAutoFit/>
-          </a:bodyPr>
-          <a:lstStyle/>
-          <a:p>
-            <a:r>
-              <a:rPr sz="1700" b="0">
-                <a:solidFill>
-                  <a:srgbClr val="F4F1EC"/>
-                </a:solidFill>
-                <a:latin typeface="Montserrat"/>
-              </a:rPr>
-              <a:t>•  Интерпретация верна для проверенных захватов и молчит вне них</a:t>
-            </a:r>
-          </a:p>
-        </p:txBody>
-      </p:sp>
-      <p:sp>
-        <p:nvSpPr>
-          <p:cNvPr id="9" name="TextBox 8"/>
-          <p:cNvSpPr txBox="1"/>
-          <p:nvPr/>
-        </p:nvSpPr>
-        <p:spPr>
-          <a:xfrm>
-            <a:off x="822960" y="6446520"/>
-            <a:ext cx="3840480" cy="274320"/>
-          </a:xfrm>
-          <a:prstGeom prst="rect">
-            <a:avLst/>
-          </a:prstGeom>
-          <a:noFill/>
-        </p:spPr>
-        <p:txBody>
-          <a:bodyPr wrap="square" anchor="t">
-            <a:spAutoFit/>
-          </a:bodyPr>
-          <a:lstStyle/>
-          <a:p>
-            <a:r>
-              <a:rPr sz="1000" b="0">
-                <a:solidFill>
-                  <a:srgbClr val="A8A29E"/>
-                </a:solidFill>
-                <a:latin typeface="Montserrat"/>
-              </a:rPr>
-              <a:t>Команда HTTP 418 · кейс #02 · Мадригал</a:t>
-            </a:r>
-          </a:p>
-        </p:txBody>
-      </p:sp>
-      <p:sp>
-        <p:nvSpPr>
-          <p:cNvPr id="10" name="TextBox 9"/>
-          <p:cNvSpPr txBox="1"/>
-          <p:nvPr/>
-        </p:nvSpPr>
-        <p:spPr>
-          <a:xfrm>
-            <a:off x="4389120" y="6446520"/>
-            <a:ext cx="3383280" cy="274320"/>
-          </a:xfrm>
-          <a:prstGeom prst="rect">
-            <a:avLst/>
-          </a:prstGeom>
-          <a:noFill/>
-        </p:spPr>
-        <p:txBody>
-          <a:bodyPr wrap="square" anchor="t">
-            <a:spAutoFit/>
-          </a:bodyPr>
-          <a:lstStyle/>
-          <a:p>
-            <a:pPr algn="ctr"/>
-            <a:r>
-              <a:rPr sz="1000" b="0">
-                <a:solidFill>
-                  <a:srgbClr val="A8A29E"/>
-                </a:solidFill>
-                <a:latin typeface="Montserrat"/>
-              </a:rPr>
-              <a:t>Границы и итог</a:t>
-            </a:r>
-          </a:p>
-        </p:txBody>
-      </p:sp>
-      <p:sp>
-        <p:nvSpPr>
-          <p:cNvPr id="11" name="TextBox 10"/>
-          <p:cNvSpPr txBox="1"/>
-          <p:nvPr/>
-        </p:nvSpPr>
-        <p:spPr>
-          <a:xfrm>
-            <a:off x="8138160" y="6446520"/>
-            <a:ext cx="3200400" cy="274320"/>
-          </a:xfrm>
-          <a:prstGeom prst="rect">
-            <a:avLst/>
-          </a:prstGeom>
-          <a:noFill/>
-        </p:spPr>
-        <p:txBody>
-          <a:bodyPr wrap="square" anchor="t">
-            <a:spAutoFit/>
-          </a:bodyPr>
-          <a:lstStyle/>
-          <a:p>
-            <a:pPr algn="r"/>
-            <a:r>
-              <a:rPr sz="1000" b="0">
-                <a:solidFill>
-                  <a:srgbClr val="A8A29E"/>
-                </a:solidFill>
-                <a:latin typeface="Montserrat"/>
-              </a:rPr>
-              <a:t>18 / 19</a:t>
-            </a:r>
-          </a:p>
-        </p:txBody>
-      </p:sp>
-    </p:spTree>
-  </p:cSld>
-  <p:clrMapOvr>
-    <a:masterClrMapping/>
-  </p:clrMapOvr>
-  <p:transition spd="med" fade="1"/>
-</p:sld>
-</file>
-
-<file path=ppt/slides/slide19.xml><?xml version="1.0" encoding="utf-8"?>
-<p:sld xmlns:a="http://schemas.openxmlformats.org/drawingml/2006/main" xmlns:p="http://schemas.openxmlformats.org/presentationml/2006/main" xmlns:r="http://schemas.openxmlformats.org/officeDocument/2006/relationships">
-  <p:cSld>
-    <p:spTree>
-      <p:nvGrpSpPr>
-        <p:cNvPr id="1" name=""/>
-        <p:cNvGrpSpPr/>
-        <p:nvPr/>
-      </p:nvGrpSpPr>
-      <p:grpSpPr/>
-      <p:sp>
-        <p:nvSpPr>
-          <p:cNvPr id="2" name="Rectangle 1"/>
-          <p:cNvSpPr/>
-          <p:nvPr/>
-        </p:nvSpPr>
-        <p:spPr>
-          <a:xfrm>
-            <a:off x="0" y="0"/>
-            <a:ext cx="12191695" cy="6858000"/>
-          </a:xfrm>
-          <a:prstGeom prst="rect">
-            <a:avLst/>
-          </a:prstGeom>
-          <a:solidFill>
-            <a:srgbClr val="0E1011"/>
-          </a:solidFill>
-          <a:ln>
-            <a:noFill/>
-          </a:ln>
-          <a:effectLst/>
-        </p:spPr>
-        <p:style>
-          <a:lnRef idx="1">
-            <a:schemeClr val="accent1"/>
-          </a:lnRef>
-          <a:fillRef idx="3">
-            <a:schemeClr val="accent1"/>
-          </a:fillRef>
-          <a:effectRef idx="2">
-            <a:schemeClr val="accent1"/>
-          </a:effectRef>
-          <a:fontRef idx="minor">
-            <a:schemeClr val="lt1"/>
-          </a:fontRef>
-        </p:style>
-        <p:txBody>
-          <a:bodyPr rtlCol="0" anchor="ctr"/>
-          <a:lstStyle/>
-          <a:p>
-            <a:pPr algn="ctr"/>
-          </a:p>
-        </p:txBody>
-      </p:sp>
-      <p:sp>
-        <p:nvSpPr>
-          <p:cNvPr id="3" name="Rectangle 2"/>
-          <p:cNvSpPr/>
-          <p:nvPr/>
-        </p:nvSpPr>
-        <p:spPr>
-          <a:xfrm>
-            <a:off x="0" y="0"/>
-            <a:ext cx="73152" cy="6858000"/>
-          </a:xfrm>
-          <a:prstGeom prst="rect">
-            <a:avLst/>
-          </a:prstGeom>
-          <a:ln>
-            <a:noFill/>
-          </a:ln>
-          <a:effectLst/>
-          <a:gradFill rotWithShape="1">
-            <a:gsLst>
-              <a:gs pos="0">
-                <a:srgbClr val="410913"/>
-              </a:gs>
-              <a:gs pos="50000">
-                <a:srgbClr val="610D1C"/>
-              </a:gs>
-              <a:gs pos="100000">
-                <a:srgbClr val="A2391D"/>
-              </a:gs>
-            </a:gsLst>
-            <a:lin ang="2700000"/>
-          </a:gradFill>
-        </p:spPr>
-        <p:style>
-          <a:lnRef idx="1">
-            <a:schemeClr val="accent1"/>
-          </a:lnRef>
-          <a:fillRef idx="3">
-            <a:schemeClr val="accent1"/>
-          </a:fillRef>
-          <a:effectRef idx="2">
-            <a:schemeClr val="accent1"/>
-          </a:effectRef>
-          <a:fontRef idx="minor">
-            <a:schemeClr val="lt1"/>
-          </a:fontRef>
-        </p:style>
-        <p:txBody>
-          <a:bodyPr rtlCol="0" anchor="ctr"/>
-          <a:lstStyle/>
-          <a:p>
-            <a:pPr algn="ctr"/>
-          </a:p>
-        </p:txBody>
-      </p:sp>
-      <p:sp>
-        <p:nvSpPr>
-          <p:cNvPr id="4" name="TextBox 3"/>
-          <p:cNvSpPr txBox="1"/>
-          <p:nvPr/>
-        </p:nvSpPr>
-        <p:spPr>
-          <a:xfrm>
-            <a:off x="914400" y="1280160"/>
-            <a:ext cx="10362895" cy="1280160"/>
-          </a:xfrm>
-          <a:prstGeom prst="rect">
-            <a:avLst/>
-          </a:prstGeom>
-          <a:noFill/>
-        </p:spPr>
-        <p:txBody>
-          <a:bodyPr wrap="square" anchor="t">
-            <a:spAutoFit/>
-          </a:bodyPr>
-          <a:lstStyle/>
-          <a:p>
-            <a:pPr algn="ctr"/>
-            <a:r>
-              <a:rPr sz="3400" b="1">
-                <a:solidFill>
-                  <a:srgbClr val="F4F1EC"/>
-                </a:solidFill>
-                <a:latin typeface="Tektur"/>
-              </a:rPr>
-              <a:t>Инструмент превращает байты в проверяемое знание</a:t>
-            </a:r>
-          </a:p>
-        </p:txBody>
-      </p:sp>
-      <p:pic>
-        <p:nvPicPr>
-          <p:cNvPr id="5" name="Picture 4" descr="qr_repo.png"/>
-          <p:cNvPicPr>
-            <a:picLocks noChangeAspect="1"/>
-          </p:cNvPicPr>
-          <p:nvPr/>
-        </p:nvPicPr>
-        <p:blipFill>
-          <a:blip r:embed="rId2"/>
-          <a:stretch>
-            <a:fillRect/>
-          </a:stretch>
-        </p:blipFill>
-        <p:spPr>
-          <a:xfrm>
             <a:off x="2118207" y="2834640"/>
             <a:ext cx="1371600" cy="1371600"/>
           </a:xfrm>
@@ -8614,6 +7081,109 @@
                 <a:hlinkClick r:id="rId6"/>
               </a:rPr>
               <a:t>github.com/Pavel1778/madrigal-protocol-lab</a:t>
+            </a:r>
+          </a:p>
+        </p:txBody>
+      </p:sp>
+      <p:sp>
+        <p:nvSpPr>
+          <p:cNvPr id="14" name="Rectangle 13"/>
+          <p:cNvSpPr/>
+          <p:nvPr/>
+        </p:nvSpPr>
+        <p:spPr>
+          <a:xfrm>
+            <a:off x="4727448" y="5532120"/>
+            <a:ext cx="2743200" cy="658368"/>
+          </a:xfrm>
+          <a:prstGeom prst="rect">
+            <a:avLst/>
+          </a:prstGeom>
+          <a:solidFill>
+            <a:srgbClr val="FFFFFF"/>
+          </a:solidFill>
+          <a:ln>
+            <a:noFill/>
+          </a:ln>
+          <a:effectLst/>
+        </p:spPr>
+        <p:style>
+          <a:lnRef idx="1">
+            <a:schemeClr val="accent1"/>
+          </a:lnRef>
+          <a:fillRef idx="3">
+            <a:schemeClr val="accent1"/>
+          </a:fillRef>
+          <a:effectRef idx="2">
+            <a:schemeClr val="accent1"/>
+          </a:effectRef>
+          <a:fontRef idx="minor">
+            <a:schemeClr val="lt1"/>
+          </a:fontRef>
+        </p:style>
+        <p:txBody>
+          <a:bodyPr rtlCol="0" anchor="ctr"/>
+          <a:lstStyle/>
+          <a:p>
+            <a:pPr algn="ctr"/>
+          </a:p>
+        </p:txBody>
+      </p:sp>
+      <p:pic>
+        <p:nvPicPr>
+          <p:cNvPr id="15" name="Picture 14" descr="madrigal-logo.png"/>
+          <p:cNvPicPr>
+            <a:picLocks noChangeAspect="1"/>
+          </p:cNvPicPr>
+          <p:nvPr/>
+        </p:nvPicPr>
+        <p:blipFill>
+          <a:blip r:embed="rId7"/>
+          <a:stretch>
+            <a:fillRect/>
+          </a:stretch>
+        </p:blipFill>
+        <p:spPr>
+          <a:xfrm>
+            <a:off x="4910328" y="5660136"/>
+            <a:ext cx="2377440" cy="497677"/>
+          </a:xfrm>
+          <a:prstGeom prst="rect">
+            <a:avLst/>
+          </a:prstGeom>
+        </p:spPr>
+      </p:pic>
+      <p:sp>
+        <p:nvSpPr>
+          <p:cNvPr id="16" name="TextBox 15"/>
+          <p:cNvSpPr txBox="1"/>
+          <p:nvPr/>
+        </p:nvSpPr>
+        <p:spPr>
+          <a:xfrm>
+            <a:off x="914400" y="6263640"/>
+            <a:ext cx="10362895" cy="320040"/>
+          </a:xfrm>
+          <a:prstGeom prst="rect">
+            <a:avLst/>
+          </a:prstGeom>
+          <a:noFill/>
+        </p:spPr>
+        <p:txBody>
+          <a:bodyPr wrap="square" anchor="t">
+            <a:spAutoFit/>
+          </a:bodyPr>
+          <a:lstStyle/>
+          <a:p>
+            <a:pPr algn="ctr"/>
+            <a:r>
+              <a:rPr sz="1200" b="0">
+                <a:solidFill>
+                  <a:srgbClr val="A8A29E"/>
+                </a:solidFill>
+                <a:latin typeface="JetBrains Mono"/>
+              </a:rPr>
+              <a:t>Кейс #02 · UMIRHack 2026</a:t>
             </a:r>
           </a:p>
         </p:txBody>
@@ -8779,7 +7349,7 @@
         <p:spPr>
           <a:xfrm>
             <a:off x="822960" y="1691640"/>
-            <a:ext cx="5044287" cy="2468880"/>
+            <a:ext cx="5044287" cy="2240280"/>
           </a:xfrm>
           <a:prstGeom prst="rect">
             <a:avLst/>
@@ -8830,7 +7400,7 @@
         </p:blipFill>
         <p:spPr>
           <a:xfrm>
-            <a:off x="1097280" y="2057400"/>
+            <a:off x="1097280" y="1965960"/>
             <a:ext cx="1645920" cy="1645920"/>
           </a:xfrm>
           <a:prstGeom prst="rect">
@@ -8846,8 +7416,8 @@
         </p:nvSpPr>
         <p:spPr>
           <a:xfrm>
-            <a:off x="2971800" y="2148840"/>
-            <a:ext cx="1752447" cy="548640"/>
+            <a:off x="2971800" y="2057400"/>
+            <a:ext cx="2301087" cy="548640"/>
           </a:xfrm>
           <a:prstGeom prst="rect">
             <a:avLst/>
@@ -8880,8 +7450,8 @@
         </p:nvSpPr>
         <p:spPr>
           <a:xfrm>
-            <a:off x="2971800" y="2697480"/>
-            <a:ext cx="1752447" cy="457200"/>
+            <a:off x="2971800" y="2606040"/>
+            <a:ext cx="2301087" cy="457200"/>
           </a:xfrm>
           <a:prstGeom prst="rect">
             <a:avLst/>
@@ -8914,8 +7484,8 @@
         </p:nvSpPr>
         <p:spPr>
           <a:xfrm>
-            <a:off x="2971800" y="3154680"/>
-            <a:ext cx="1752447" cy="365760"/>
+            <a:off x="2971800" y="3017520"/>
+            <a:ext cx="2301087" cy="365760"/>
           </a:xfrm>
           <a:prstGeom prst="rect">
             <a:avLst/>
@@ -8956,7 +7526,7 @@
         </p:blipFill>
         <p:spPr>
           <a:xfrm>
-            <a:off x="4815687" y="2148840"/>
+            <a:off x="4833976" y="2057400"/>
             <a:ext cx="758952" cy="758952"/>
           </a:xfrm>
           <a:prstGeom prst="rect">
@@ -8973,7 +7543,7 @@
         <p:spPr>
           <a:xfrm>
             <a:off x="6324447" y="1691640"/>
-            <a:ext cx="5044287" cy="2468880"/>
+            <a:ext cx="5044287" cy="2240280"/>
           </a:xfrm>
           <a:prstGeom prst="rect">
             <a:avLst/>
@@ -9024,7 +7594,7 @@
         </p:blipFill>
         <p:spPr>
           <a:xfrm>
-            <a:off x="6598767" y="2057400"/>
+            <a:off x="6598767" y="1965960"/>
             <a:ext cx="1645920" cy="1645920"/>
           </a:xfrm>
           <a:prstGeom prst="rect">
@@ -9040,8 +7610,8 @@
         </p:nvSpPr>
         <p:spPr>
           <a:xfrm>
-            <a:off x="8473287" y="2148840"/>
-            <a:ext cx="1752447" cy="548640"/>
+            <a:off x="8473287" y="2057400"/>
+            <a:ext cx="2301087" cy="548640"/>
           </a:xfrm>
           <a:prstGeom prst="rect">
             <a:avLst/>
@@ -9074,8 +7644,8 @@
         </p:nvSpPr>
         <p:spPr>
           <a:xfrm>
-            <a:off x="8473287" y="2697480"/>
-            <a:ext cx="1752447" cy="457200"/>
+            <a:off x="8473287" y="2606040"/>
+            <a:ext cx="2301087" cy="457200"/>
           </a:xfrm>
           <a:prstGeom prst="rect">
             <a:avLst/>
@@ -9108,8 +7678,8 @@
         </p:nvSpPr>
         <p:spPr>
           <a:xfrm>
-            <a:off x="8473287" y="3154680"/>
-            <a:ext cx="1752447" cy="365760"/>
+            <a:off x="8473287" y="3017520"/>
+            <a:ext cx="2301087" cy="365760"/>
           </a:xfrm>
           <a:prstGeom prst="rect">
             <a:avLst/>
@@ -9150,7 +7720,7 @@
         </p:blipFill>
         <p:spPr>
           <a:xfrm>
-            <a:off x="10317175" y="2148840"/>
+            <a:off x="10335464" y="2057400"/>
             <a:ext cx="758952" cy="758952"/>
           </a:xfrm>
           <a:prstGeom prst="rect">
@@ -9257,7 +7827,7 @@
                 </a:solidFill>
                 <a:latin typeface="Montserrat"/>
               </a:rPr>
-              <a:t>2 / 19</a:t>
+              <a:t>2 / 14</a:t>
             </a:r>
           </a:p>
         </p:txBody>
@@ -9721,7 +8291,7 @@
                 </a:solidFill>
                 <a:latin typeface="Montserrat"/>
               </a:rPr>
-              <a:t>3 / 19</a:t>
+              <a:t>3 / 14</a:t>
             </a:r>
           </a:p>
         </p:txBody>
@@ -9983,7 +8553,7 @@
           <a:lstStyle/>
           <a:p>
             <a:r>
-              <a:rPr sz="4000" b="1">
+              <a:rPr sz="3400" b="1">
                 <a:solidFill>
                   <a:srgbClr val="F4F1EC"/>
                 </a:solidFill>
@@ -10003,7 +8573,7 @@
         <p:spPr>
           <a:xfrm>
             <a:off x="822960" y="1691640"/>
-            <a:ext cx="5044287" cy="3291840"/>
+            <a:ext cx="5044287" cy="1600200"/>
           </a:xfrm>
           <a:prstGeom prst="rect">
             <a:avLst/>
@@ -10047,7 +8617,7 @@
         <p:spPr>
           <a:xfrm>
             <a:off x="822960" y="1691640"/>
-            <a:ext cx="45720" cy="3291840"/>
+            <a:ext cx="45720" cy="1600200"/>
           </a:xfrm>
           <a:prstGeom prst="rect">
             <a:avLst/>
@@ -10090,8 +8660,8 @@
         </p:nvSpPr>
         <p:spPr>
           <a:xfrm>
-            <a:off x="1143000" y="1965960"/>
-            <a:ext cx="4404207" cy="320040"/>
+            <a:off x="1097280" y="1856232"/>
+            <a:ext cx="4495647" cy="320040"/>
           </a:xfrm>
           <a:prstGeom prst="rect">
             <a:avLst/>
@@ -10124,8 +8694,8 @@
         </p:nvSpPr>
         <p:spPr>
           <a:xfrm>
-            <a:off x="1143000" y="2468880"/>
-            <a:ext cx="4404207" cy="822960"/>
+            <a:off x="1097280" y="2221992"/>
+            <a:ext cx="4495647" cy="457200"/>
           </a:xfrm>
           <a:prstGeom prst="rect">
             <a:avLst/>
@@ -10139,7 +8709,7 @@
           <a:lstStyle/>
           <a:p>
             <a:r>
-              <a:rPr sz="1700" b="0">
+              <a:rPr sz="1500" b="0">
                 <a:solidFill>
                   <a:srgbClr val="F4F1EC"/>
                 </a:solidFill>
@@ -10148,7 +8718,7 @@
               <a:t>•  Захваты </a:t>
             </a:r>
             <a:r>
-              <a:rPr sz="1500">
+              <a:rPr sz="1300">
                 <a:solidFill>
                   <a:srgbClr val="D0603A"/>
                 </a:solidFill>
@@ -10157,7 +8727,7 @@
               <a:t>pcap</a:t>
             </a:r>
             <a:r>
-              <a:rPr sz="1700" b="0">
+              <a:rPr sz="1500" b="0">
                 <a:solidFill>
                   <a:srgbClr val="F4F1EC"/>
                 </a:solidFill>
@@ -10166,7 +8736,7 @@
               <a:t>/</a:t>
             </a:r>
             <a:r>
-              <a:rPr sz="1500">
+              <a:rPr sz="1300">
                 <a:solidFill>
                   <a:srgbClr val="D0603A"/>
                 </a:solidFill>
@@ -10175,7 +8745,7 @@
               <a:t>pcapng</a:t>
             </a:r>
             <a:r>
-              <a:rPr sz="1700" b="0">
+              <a:rPr sz="1500" b="0">
                 <a:solidFill>
                   <a:srgbClr val="F4F1EC"/>
                 </a:solidFill>
@@ -10194,8 +8764,8 @@
         </p:nvSpPr>
         <p:spPr>
           <a:xfrm>
-            <a:off x="1143000" y="3291840"/>
-            <a:ext cx="4404207" cy="822960"/>
+            <a:off x="1097280" y="2679192"/>
+            <a:ext cx="4495647" cy="457200"/>
           </a:xfrm>
           <a:prstGeom prst="rect">
             <a:avLst/>
@@ -10209,7 +8779,7 @@
           <a:lstStyle/>
           <a:p>
             <a:r>
-              <a:rPr sz="1700" b="0">
+              <a:rPr sz="1500" b="0">
                 <a:solidFill>
                   <a:srgbClr val="F4F1EC"/>
                 </a:solidFill>
@@ -10229,7 +8799,7 @@
         <p:spPr>
           <a:xfrm>
             <a:off x="6324447" y="1691640"/>
-            <a:ext cx="5044287" cy="3291840"/>
+            <a:ext cx="5044287" cy="1600200"/>
           </a:xfrm>
           <a:prstGeom prst="rect">
             <a:avLst/>
@@ -10273,7 +8843,7 @@
         <p:spPr>
           <a:xfrm>
             <a:off x="6324447" y="1691640"/>
-            <a:ext cx="45720" cy="3291840"/>
+            <a:ext cx="45720" cy="1600200"/>
           </a:xfrm>
           <a:prstGeom prst="rect">
             <a:avLst/>
@@ -10316,8 +8886,8 @@
         </p:nvSpPr>
         <p:spPr>
           <a:xfrm>
-            <a:off x="6644487" y="1965960"/>
-            <a:ext cx="4404207" cy="320040"/>
+            <a:off x="6598767" y="1856232"/>
+            <a:ext cx="4495647" cy="320040"/>
           </a:xfrm>
           <a:prstGeom prst="rect">
             <a:avLst/>
@@ -10350,8 +8920,8 @@
         </p:nvSpPr>
         <p:spPr>
           <a:xfrm>
-            <a:off x="6644487" y="2468880"/>
-            <a:ext cx="4404207" cy="822960"/>
+            <a:off x="6598767" y="2221992"/>
+            <a:ext cx="4495647" cy="457200"/>
           </a:xfrm>
           <a:prstGeom prst="rect">
             <a:avLst/>
@@ -10365,7 +8935,7 @@
           <a:lstStyle/>
           <a:p>
             <a:r>
-              <a:rPr sz="1700" b="0">
+              <a:rPr sz="1500" b="0">
                 <a:solidFill>
                   <a:srgbClr val="F4F1EC"/>
                 </a:solidFill>
@@ -10384,8 +8954,8 @@
         </p:nvSpPr>
         <p:spPr>
           <a:xfrm>
-            <a:off x="6644487" y="3291840"/>
-            <a:ext cx="4404207" cy="822960"/>
+            <a:off x="6598767" y="2679192"/>
+            <a:ext cx="4495647" cy="457200"/>
           </a:xfrm>
           <a:prstGeom prst="rect">
             <a:avLst/>
@@ -10399,7 +8969,7 @@
           <a:lstStyle/>
           <a:p>
             <a:r>
-              <a:rPr sz="1700" b="0">
+              <a:rPr sz="1500" b="0">
                 <a:solidFill>
                   <a:srgbClr val="F4F1EC"/>
                 </a:solidFill>
@@ -10418,8 +8988,8 @@
         </p:nvSpPr>
         <p:spPr>
           <a:xfrm>
-            <a:off x="822960" y="6446520"/>
-            <a:ext cx="3840480" cy="274320"/>
+            <a:off x="822960" y="3520440"/>
+            <a:ext cx="10545775" cy="548640"/>
           </a:xfrm>
           <a:prstGeom prst="rect">
             <a:avLst/>
@@ -10433,426 +9003,20 @@
           <a:lstStyle/>
           <a:p>
             <a:r>
-              <a:rPr sz="1000" b="0">
+              <a:rPr sz="1500" b="0">
                 <a:solidFill>
                   <a:srgbClr val="A8A29E"/>
                 </a:solidFill>
                 <a:latin typeface="Montserrat"/>
               </a:rPr>
-              <a:t>Команда HTTP 418 · кейс #02 · Мадригал</a:t>
-            </a:r>
-          </a:p>
-        </p:txBody>
-      </p:sp>
-      <p:sp>
-        <p:nvSpPr>
-          <p:cNvPr id="16" name="TextBox 15"/>
-          <p:cNvSpPr txBox="1"/>
-          <p:nvPr/>
-        </p:nvSpPr>
-        <p:spPr>
-          <a:xfrm>
-            <a:off x="4389120" y="6446520"/>
-            <a:ext cx="3383280" cy="274320"/>
-          </a:xfrm>
-          <a:prstGeom prst="rect">
-            <a:avLst/>
-          </a:prstGeom>
-          <a:noFill/>
-        </p:spPr>
-        <p:txBody>
-          <a:bodyPr wrap="square" anchor="t">
-            <a:spAutoFit/>
-          </a:bodyPr>
-          <a:lstStyle/>
-          <a:p>
-            <a:pPr algn="ctr"/>
-            <a:r>
-              <a:rPr sz="1000" b="0">
-                <a:solidFill>
-                  <a:srgbClr val="A8A29E"/>
-                </a:solidFill>
-                <a:latin typeface="Montserrat"/>
-              </a:rPr>
-              <a:t>Постановка и метод</a:t>
-            </a:r>
-          </a:p>
-        </p:txBody>
-      </p:sp>
-      <p:sp>
-        <p:nvSpPr>
-          <p:cNvPr id="17" name="TextBox 16"/>
-          <p:cNvSpPr txBox="1"/>
-          <p:nvPr/>
-        </p:nvSpPr>
-        <p:spPr>
-          <a:xfrm>
-            <a:off x="8138160" y="6446520"/>
-            <a:ext cx="3200400" cy="274320"/>
-          </a:xfrm>
-          <a:prstGeom prst="rect">
-            <a:avLst/>
-          </a:prstGeom>
-          <a:noFill/>
-        </p:spPr>
-        <p:txBody>
-          <a:bodyPr wrap="square" anchor="t">
-            <a:spAutoFit/>
-          </a:bodyPr>
-          <a:lstStyle/>
-          <a:p>
-            <a:pPr algn="r"/>
-            <a:r>
-              <a:rPr sz="1000" b="0">
-                <a:solidFill>
-                  <a:srgbClr val="A8A29E"/>
-                </a:solidFill>
-                <a:latin typeface="Montserrat"/>
-              </a:rPr>
-              <a:t>4 / 19</a:t>
-            </a:r>
-          </a:p>
-        </p:txBody>
-      </p:sp>
-    </p:spTree>
-  </p:cSld>
-  <p:clrMapOvr>
-    <a:masterClrMapping/>
-  </p:clrMapOvr>
-  <p:timing>
-    <p:tnLst>
-      <p:par>
-        <p:cTn id="1" dur="indefinite" restart="never" nodeType="tmRoot">
-          <p:childTnLst>
-            <p:seq concurrent="1" nextAc="seek">
-              <p:cTn id="2" dur="indefinite" nodeType="mainSeq">
-                <p:childTnLst>
-                  <p:par>
-                    <p:cTn id="3" presetID="10" presetClass="entr" presetSubtype="0" fill="hold" grpId="0" nodeType="clickEffect">
-                      <p:stCondLst>
-                        <p:cond delay="0"/>
-                      </p:stCondLst>
-                      <p:childTnLst>
-                        <p:set>
-                          <p:cBhvr>
-                            <p:cTn id="4" dur="1" fill="hold">
-                              <p:stCondLst>
-                                <p:cond delay="0"/>
-                              </p:stCondLst>
-                            </p:cTn>
-                            <p:tgtEl>
-                              <p:spTgt spid="6"/>
-                            </p:tgtEl>
-                            <p:attrNameLst>
-                              <p:attrName>style.visibility</p:attrName>
-                            </p:attrNameLst>
-                          </p:cBhvr>
-                          <p:to>
-                            <p:strVal val="visible"/>
-                          </p:to>
-                        </p:set>
-                        <p:anim calcmode="lin" valueType="num">
-                          <p:cBhvr additive="base">
-                            <p:cTn id="5" dur="300" fill="hold"/>
-                            <p:tgtEl>
-                              <p:spTgt spid="6"/>
-                            </p:tgtEl>
-                            <p:attrNameLst>
-                              <p:attrName>style.opacity</p:attrName>
-                            </p:attrNameLst>
-                          </p:cBhvr>
-                          <p:tavLst>
-                            <p:tav tm="0">
-                              <p:val>
-                                <p:fltVal val="0"/>
-                              </p:val>
-                            </p:tav>
-                            <p:tav tm="100000">
-                              <p:val>
-                                <p:fltVal val="1"/>
-                              </p:val>
-                            </p:tav>
-                          </p:tavLst>
-                        </p:anim>
-                      </p:childTnLst>
-                    </p:cTn>
-                  </p:par>
-                  <p:par>
-                    <p:cTn id="6" presetID="10" presetClass="entr" presetSubtype="0" fill="hold" grpId="0" nodeType="clickEffect">
-                      <p:stCondLst>
-                        <p:cond delay="0"/>
-                      </p:stCondLst>
-                      <p:childTnLst>
-                        <p:set>
-                          <p:cBhvr>
-                            <p:cTn id="7" dur="1" fill="hold">
-                              <p:stCondLst>
-                                <p:cond delay="0"/>
-                              </p:stCondLst>
-                            </p:cTn>
-                            <p:tgtEl>
-                              <p:spTgt spid="11"/>
-                            </p:tgtEl>
-                            <p:attrNameLst>
-                              <p:attrName>style.visibility</p:attrName>
-                            </p:attrNameLst>
-                          </p:cBhvr>
-                          <p:to>
-                            <p:strVal val="visible"/>
-                          </p:to>
-                        </p:set>
-                        <p:anim calcmode="lin" valueType="num">
-                          <p:cBhvr additive="base">
-                            <p:cTn id="8" dur="300" fill="hold"/>
-                            <p:tgtEl>
-                              <p:spTgt spid="11"/>
-                            </p:tgtEl>
-                            <p:attrNameLst>
-                              <p:attrName>style.opacity</p:attrName>
-                            </p:attrNameLst>
-                          </p:cBhvr>
-                          <p:tavLst>
-                            <p:tav tm="0">
-                              <p:val>
-                                <p:fltVal val="0"/>
-                              </p:val>
-                            </p:tav>
-                            <p:tav tm="100000">
-                              <p:val>
-                                <p:fltVal val="1"/>
-                              </p:val>
-                            </p:tav>
-                          </p:tavLst>
-                        </p:anim>
-                      </p:childTnLst>
-                    </p:cTn>
-                  </p:par>
-                </p:childTnLst>
-              </p:cTn>
-            </p:seq>
-          </p:childTnLst>
-        </p:cTn>
-      </p:par>
-    </p:tnLst>
-  </p:timing>
-  <p:transition spd="med" fade="1"/>
-</p:sld>
-</file>
-
-<file path=ppt/slides/slide5.xml><?xml version="1.0" encoding="utf-8"?>
-<p:sld xmlns:a="http://schemas.openxmlformats.org/drawingml/2006/main" xmlns:p="http://schemas.openxmlformats.org/presentationml/2006/main" xmlns:r="http://schemas.openxmlformats.org/officeDocument/2006/relationships">
-  <p:cSld>
-    <p:spTree>
-      <p:nvGrpSpPr>
-        <p:cNvPr id="1" name=""/>
-        <p:cNvGrpSpPr/>
-        <p:nvPr/>
-      </p:nvGrpSpPr>
-      <p:grpSpPr/>
-      <p:sp>
-        <p:nvSpPr>
-          <p:cNvPr id="2" name="Rectangle 1"/>
-          <p:cNvSpPr/>
-          <p:nvPr/>
-        </p:nvSpPr>
-        <p:spPr>
-          <a:xfrm>
-            <a:off x="0" y="0"/>
-            <a:ext cx="12191695" cy="6858000"/>
-          </a:xfrm>
-          <a:prstGeom prst="rect">
-            <a:avLst/>
-          </a:prstGeom>
-          <a:solidFill>
-            <a:srgbClr val="0E1011"/>
-          </a:solidFill>
-          <a:ln>
-            <a:noFill/>
-          </a:ln>
-          <a:effectLst/>
-        </p:spPr>
-        <p:style>
-          <a:lnRef idx="1">
-            <a:schemeClr val="accent1"/>
-          </a:lnRef>
-          <a:fillRef idx="3">
-            <a:schemeClr val="accent1"/>
-          </a:fillRef>
-          <a:effectRef idx="2">
-            <a:schemeClr val="accent1"/>
-          </a:effectRef>
-          <a:fontRef idx="minor">
-            <a:schemeClr val="lt1"/>
-          </a:fontRef>
-        </p:style>
-        <p:txBody>
-          <a:bodyPr rtlCol="0" anchor="ctr"/>
-          <a:lstStyle/>
-          <a:p>
-            <a:pPr algn="ctr"/>
-          </a:p>
-        </p:txBody>
-      </p:sp>
-      <p:sp>
-        <p:nvSpPr>
-          <p:cNvPr id="3" name="Rectangle 2"/>
-          <p:cNvSpPr/>
-          <p:nvPr/>
-        </p:nvSpPr>
-        <p:spPr>
-          <a:xfrm>
-            <a:off x="0" y="0"/>
-            <a:ext cx="73152" cy="6858000"/>
-          </a:xfrm>
-          <a:prstGeom prst="rect">
-            <a:avLst/>
-          </a:prstGeom>
-          <a:ln>
-            <a:noFill/>
-          </a:ln>
-          <a:effectLst/>
-          <a:gradFill rotWithShape="1">
-            <a:gsLst>
-              <a:gs pos="0">
-                <a:srgbClr val="410913"/>
-              </a:gs>
-              <a:gs pos="50000">
-                <a:srgbClr val="610D1C"/>
-              </a:gs>
-              <a:gs pos="100000">
-                <a:srgbClr val="A2391D"/>
-              </a:gs>
-            </a:gsLst>
-            <a:lin ang="2700000"/>
-          </a:gradFill>
-        </p:spPr>
-        <p:style>
-          <a:lnRef idx="1">
-            <a:schemeClr val="accent1"/>
-          </a:lnRef>
-          <a:fillRef idx="3">
-            <a:schemeClr val="accent1"/>
-          </a:fillRef>
-          <a:effectRef idx="2">
-            <a:schemeClr val="accent1"/>
-          </a:effectRef>
-          <a:fontRef idx="minor">
-            <a:schemeClr val="lt1"/>
-          </a:fontRef>
-        </p:style>
-        <p:txBody>
-          <a:bodyPr rtlCol="0" anchor="ctr"/>
-          <a:lstStyle/>
-          <a:p>
-            <a:pPr algn="ctr"/>
-          </a:p>
-        </p:txBody>
-      </p:sp>
-      <p:sp>
-        <p:nvSpPr>
-          <p:cNvPr id="4" name="TextBox 3"/>
-          <p:cNvSpPr txBox="1"/>
-          <p:nvPr/>
-        </p:nvSpPr>
-        <p:spPr>
-          <a:xfrm>
-            <a:off x="822960" y="777240"/>
-            <a:ext cx="10545775" cy="365760"/>
-          </a:xfrm>
-          <a:prstGeom prst="rect">
-            <a:avLst/>
-          </a:prstGeom>
-          <a:noFill/>
-        </p:spPr>
-        <p:txBody>
-          <a:bodyPr wrap="square" anchor="t">
-            <a:spAutoFit/>
-          </a:bodyPr>
-          <a:lstStyle/>
-          <a:p>
-            <a:r>
-              <a:rPr sz="1400" b="1">
-                <a:solidFill>
-                  <a:srgbClr val="D0603A"/>
-                </a:solidFill>
-                <a:latin typeface="Montserrat"/>
-              </a:rPr>
-              <a:t>ХОД РАБОТЫ</a:t>
-            </a:r>
-          </a:p>
-        </p:txBody>
-      </p:sp>
-      <p:sp>
-        <p:nvSpPr>
-          <p:cNvPr id="5" name="TextBox 4"/>
-          <p:cNvSpPr txBox="1"/>
-          <p:nvPr/>
-        </p:nvSpPr>
-        <p:spPr>
-          <a:xfrm>
-            <a:off x="822960" y="1188720"/>
-            <a:ext cx="10545775" cy="1005840"/>
-          </a:xfrm>
-          <a:prstGeom prst="rect">
-            <a:avLst/>
-          </a:prstGeom>
-          <a:noFill/>
-        </p:spPr>
-        <p:txBody>
-          <a:bodyPr wrap="square" anchor="t">
-            <a:spAutoFit/>
-          </a:bodyPr>
-          <a:lstStyle/>
-          <a:p>
-            <a:r>
-              <a:rPr sz="3400" b="1">
-                <a:solidFill>
-                  <a:srgbClr val="F4F1EC"/>
-                </a:solidFill>
-                <a:latin typeface="Tektur"/>
-              </a:rPr>
-              <a:t>Смещение поля длины оказалось на четыре байта позже, чем мы считали</a:t>
-            </a:r>
-          </a:p>
-        </p:txBody>
-      </p:sp>
-      <p:sp>
-        <p:nvSpPr>
-          <p:cNvPr id="6" name="TextBox 5"/>
-          <p:cNvSpPr txBox="1"/>
-          <p:nvPr/>
-        </p:nvSpPr>
-        <p:spPr>
-          <a:xfrm>
-            <a:off x="822960" y="2148840"/>
-            <a:ext cx="9601200" cy="457200"/>
-          </a:xfrm>
-          <a:prstGeom prst="rect">
-            <a:avLst/>
-          </a:prstGeom>
-          <a:noFill/>
-        </p:spPr>
-        <p:txBody>
-          <a:bodyPr wrap="square" anchor="t">
-            <a:spAutoFit/>
-          </a:bodyPr>
-          <a:lstStyle/>
-          <a:p>
-            <a:r>
-              <a:rPr sz="1700" b="0">
-                <a:solidFill>
-                  <a:srgbClr val="A8A29E"/>
-                </a:solidFill>
-                <a:latin typeface="Montserrat"/>
-              </a:rPr>
-              <a:t>Одно правило, два чтения: поле длины остаётся на offset 2</a:t>
+              <a:t>Смещение поля длины оказалось на четыре байта позже, чем мы считали: одно правило, два чтения, поле длины остаётся на offset 2.</a:t>
             </a:r>
           </a:p>
         </p:txBody>
       </p:sp>
       <p:pic>
         <p:nvPicPr>
-          <p:cNvPr id="7" name="Picture 6" descr="length_offset.png"/>
+          <p:cNvPr id="16" name="Picture 15" descr="length_offset.png"/>
           <p:cNvPicPr>
             <a:picLocks noChangeAspect="1"/>
           </p:cNvPicPr>
@@ -10866,8 +9030,8 @@
         </p:blipFill>
         <p:spPr>
           <a:xfrm>
-            <a:off x="822960" y="2743200"/>
-            <a:ext cx="5264209" cy="2011680"/>
+            <a:off x="822960" y="4206240"/>
+            <a:ext cx="3349951" cy="1280160"/>
           </a:xfrm>
           <a:prstGeom prst="rect">
             <a:avLst/>
@@ -10876,58 +9040,14 @@
       </p:pic>
       <p:sp>
         <p:nvSpPr>
-          <p:cNvPr id="8" name="Rounded Rectangle 7"/>
-          <p:cNvSpPr/>
-          <p:nvPr/>
-        </p:nvSpPr>
-        <p:spPr>
-          <a:xfrm>
-            <a:off x="822960" y="5029200"/>
-            <a:ext cx="1643329" cy="384048"/>
-          </a:xfrm>
-          <a:prstGeom prst="roundRect">
-            <a:avLst/>
-          </a:prstGeom>
-          <a:solidFill>
-            <a:srgbClr val="D0603A"/>
-          </a:solidFill>
-          <a:ln>
-            <a:noFill/>
-          </a:ln>
-          <a:effectLst/>
-        </p:spPr>
-        <p:style>
-          <a:lnRef idx="1">
-            <a:schemeClr val="accent1"/>
-          </a:lnRef>
-          <a:fillRef idx="3">
-            <a:schemeClr val="accent1"/>
-          </a:fillRef>
-          <a:effectRef idx="2">
-            <a:schemeClr val="accent1"/>
-          </a:effectRef>
-          <a:fontRef idx="minor">
-            <a:schemeClr val="lt1"/>
-          </a:fontRef>
-        </p:style>
-        <p:txBody>
-          <a:bodyPr rtlCol="0" anchor="ctr"/>
-          <a:lstStyle/>
-          <a:p>
-            <a:pPr algn="ctr"/>
-          </a:p>
-        </p:txBody>
-      </p:sp>
-      <p:sp>
-        <p:nvSpPr>
-          <p:cNvPr id="9" name="TextBox 8"/>
+          <p:cNvPr id="17" name="TextBox 16"/>
           <p:cNvSpPr txBox="1"/>
           <p:nvPr/>
         </p:nvSpPr>
         <p:spPr>
           <a:xfrm>
-            <a:off x="822960" y="5074920"/>
-            <a:ext cx="1643329" cy="320040"/>
+            <a:off x="822960" y="6446520"/>
+            <a:ext cx="3840480" cy="274320"/>
           </a:xfrm>
           <a:prstGeom prst="rect">
             <a:avLst/>
@@ -10940,73 +9060,28 @@
           </a:bodyPr>
           <a:lstStyle/>
           <a:p>
-            <a:pPr algn="ctr"/>
-            <a:r>
-              <a:rPr sz="1400" b="0">
-                <a:solidFill>
-                  <a:srgbClr val="FFFFFF"/>
-                </a:solidFill>
-                <a:latin typeface="JetBrains Mono"/>
+            <a:r>
+              <a:rPr sz="1000" b="0">
+                <a:solidFill>
+                  <a:srgbClr val="A8A29E"/>
+                </a:solidFill>
+                <a:latin typeface="Montserrat"/>
               </a:rPr>
-              <a:t>наблюдение</a:t>
-            </a:r>
-          </a:p>
-        </p:txBody>
-      </p:sp>
-      <p:sp>
-        <p:nvSpPr>
-          <p:cNvPr id="10" name="Rounded Rectangle 9"/>
-          <p:cNvSpPr/>
-          <p:nvPr/>
-        </p:nvSpPr>
-        <p:spPr>
-          <a:xfrm>
-            <a:off x="2603449" y="5029200"/>
-            <a:ext cx="1643329" cy="384048"/>
-          </a:xfrm>
-          <a:prstGeom prst="roundRect">
-            <a:avLst/>
-          </a:prstGeom>
-          <a:solidFill>
-            <a:srgbClr val="D0603A"/>
-          </a:solidFill>
-          <a:ln>
-            <a:noFill/>
-          </a:ln>
-          <a:effectLst/>
-        </p:spPr>
-        <p:style>
-          <a:lnRef idx="1">
-            <a:schemeClr val="accent1"/>
-          </a:lnRef>
-          <a:fillRef idx="3">
-            <a:schemeClr val="accent1"/>
-          </a:fillRef>
-          <a:effectRef idx="2">
-            <a:schemeClr val="accent1"/>
-          </a:effectRef>
-          <a:fontRef idx="minor">
-            <a:schemeClr val="lt1"/>
-          </a:fontRef>
-        </p:style>
-        <p:txBody>
-          <a:bodyPr rtlCol="0" anchor="ctr"/>
-          <a:lstStyle/>
-          <a:p>
-            <a:pPr algn="ctr"/>
-          </a:p>
-        </p:txBody>
-      </p:sp>
-      <p:sp>
-        <p:nvSpPr>
-          <p:cNvPr id="11" name="TextBox 10"/>
+              <a:t>Команда HTTP 418 · кейс #02 · Мадригал</a:t>
+            </a:r>
+          </a:p>
+        </p:txBody>
+      </p:sp>
+      <p:sp>
+        <p:nvSpPr>
+          <p:cNvPr id="18" name="TextBox 17"/>
           <p:cNvSpPr txBox="1"/>
           <p:nvPr/>
         </p:nvSpPr>
         <p:spPr>
           <a:xfrm>
-            <a:off x="2603449" y="5074920"/>
-            <a:ext cx="1643329" cy="320040"/>
+            <a:off x="4389120" y="6446520"/>
+            <a:ext cx="3383280" cy="274320"/>
           </a:xfrm>
           <a:prstGeom prst="rect">
             <a:avLst/>
@@ -11021,71 +9096,27 @@
           <a:p>
             <a:pPr algn="ctr"/>
             <a:r>
-              <a:rPr sz="1400" b="0">
-                <a:solidFill>
-                  <a:srgbClr val="FFFFFF"/>
-                </a:solidFill>
-                <a:latin typeface="JetBrains Mono"/>
+              <a:rPr sz="1000" b="0">
+                <a:solidFill>
+                  <a:srgbClr val="A8A29E"/>
+                </a:solidFill>
+                <a:latin typeface="Montserrat"/>
               </a:rPr>
-              <a:t>гипотеза</a:t>
-            </a:r>
-          </a:p>
-        </p:txBody>
-      </p:sp>
-      <p:sp>
-        <p:nvSpPr>
-          <p:cNvPr id="12" name="Rounded Rectangle 11"/>
-          <p:cNvSpPr/>
-          <p:nvPr/>
-        </p:nvSpPr>
-        <p:spPr>
-          <a:xfrm>
-            <a:off x="4383938" y="5029200"/>
-            <a:ext cx="1643329" cy="384048"/>
-          </a:xfrm>
-          <a:prstGeom prst="roundRect">
-            <a:avLst/>
-          </a:prstGeom>
-          <a:solidFill>
-            <a:srgbClr val="D0603A"/>
-          </a:solidFill>
-          <a:ln>
-            <a:noFill/>
-          </a:ln>
-          <a:effectLst/>
-        </p:spPr>
-        <p:style>
-          <a:lnRef idx="1">
-            <a:schemeClr val="accent1"/>
-          </a:lnRef>
-          <a:fillRef idx="3">
-            <a:schemeClr val="accent1"/>
-          </a:fillRef>
-          <a:effectRef idx="2">
-            <a:schemeClr val="accent1"/>
-          </a:effectRef>
-          <a:fontRef idx="minor">
-            <a:schemeClr val="lt1"/>
-          </a:fontRef>
-        </p:style>
-        <p:txBody>
-          <a:bodyPr rtlCol="0" anchor="ctr"/>
-          <a:lstStyle/>
-          <a:p>
-            <a:pPr algn="ctr"/>
-          </a:p>
-        </p:txBody>
-      </p:sp>
-      <p:sp>
-        <p:nvSpPr>
-          <p:cNvPr id="13" name="TextBox 12"/>
+              <a:t>Постановка и метод</a:t>
+            </a:r>
+          </a:p>
+        </p:txBody>
+      </p:sp>
+      <p:sp>
+        <p:nvSpPr>
+          <p:cNvPr id="19" name="TextBox 18"/>
           <p:cNvSpPr txBox="1"/>
           <p:nvPr/>
         </p:nvSpPr>
         <p:spPr>
           <a:xfrm>
-            <a:off x="4383938" y="5074920"/>
-            <a:ext cx="1643329" cy="320040"/>
+            <a:off x="8138160" y="6446520"/>
+            <a:ext cx="3200400" cy="274320"/>
           </a:xfrm>
           <a:prstGeom prst="rect">
             <a:avLst/>
@@ -11098,278 +9129,7 @@
           </a:bodyPr>
           <a:lstStyle/>
           <a:p>
-            <a:pPr algn="ctr"/>
-            <a:r>
-              <a:rPr sz="1400" b="0">
-                <a:solidFill>
-                  <a:srgbClr val="FFFFFF"/>
-                </a:solidFill>
-                <a:latin typeface="JetBrains Mono"/>
-              </a:rPr>
-              <a:t>проверка</a:t>
-            </a:r>
-          </a:p>
-        </p:txBody>
-      </p:sp>
-      <p:sp>
-        <p:nvSpPr>
-          <p:cNvPr id="14" name="Rounded Rectangle 13"/>
-          <p:cNvSpPr/>
-          <p:nvPr/>
-        </p:nvSpPr>
-        <p:spPr>
-          <a:xfrm>
-            <a:off x="6164427" y="5029200"/>
-            <a:ext cx="1643329" cy="384048"/>
-          </a:xfrm>
-          <a:prstGeom prst="roundRect">
-            <a:avLst/>
-          </a:prstGeom>
-          <a:solidFill>
-            <a:srgbClr val="D0603A"/>
-          </a:solidFill>
-          <a:ln>
-            <a:noFill/>
-          </a:ln>
-          <a:effectLst/>
-        </p:spPr>
-        <p:style>
-          <a:lnRef idx="1">
-            <a:schemeClr val="accent1"/>
-          </a:lnRef>
-          <a:fillRef idx="3">
-            <a:schemeClr val="accent1"/>
-          </a:fillRef>
-          <a:effectRef idx="2">
-            <a:schemeClr val="accent1"/>
-          </a:effectRef>
-          <a:fontRef idx="minor">
-            <a:schemeClr val="lt1"/>
-          </a:fontRef>
-        </p:style>
-        <p:txBody>
-          <a:bodyPr rtlCol="0" anchor="ctr"/>
-          <a:lstStyle/>
-          <a:p>
-            <a:pPr algn="ctr"/>
-          </a:p>
-        </p:txBody>
-      </p:sp>
-      <p:sp>
-        <p:nvSpPr>
-          <p:cNvPr id="15" name="TextBox 14"/>
-          <p:cNvSpPr txBox="1"/>
-          <p:nvPr/>
-        </p:nvSpPr>
-        <p:spPr>
-          <a:xfrm>
-            <a:off x="6164427" y="5074920"/>
-            <a:ext cx="1643329" cy="320040"/>
-          </a:xfrm>
-          <a:prstGeom prst="rect">
-            <a:avLst/>
-          </a:prstGeom>
-          <a:noFill/>
-        </p:spPr>
-        <p:txBody>
-          <a:bodyPr wrap="square" anchor="t">
-            <a:spAutoFit/>
-          </a:bodyPr>
-          <a:lstStyle/>
-          <a:p>
-            <a:pPr algn="ctr"/>
-            <a:r>
-              <a:rPr sz="1400" b="0">
-                <a:solidFill>
-                  <a:srgbClr val="FFFFFF"/>
-                </a:solidFill>
-                <a:latin typeface="JetBrains Mono"/>
-              </a:rPr>
-              <a:t>контрпример</a:t>
-            </a:r>
-          </a:p>
-        </p:txBody>
-      </p:sp>
-      <p:sp>
-        <p:nvSpPr>
-          <p:cNvPr id="16" name="Rounded Rectangle 15"/>
-          <p:cNvSpPr/>
-          <p:nvPr/>
-        </p:nvSpPr>
-        <p:spPr>
-          <a:xfrm>
-            <a:off x="7944916" y="5029200"/>
-            <a:ext cx="1643329" cy="384048"/>
-          </a:xfrm>
-          <a:prstGeom prst="roundRect">
-            <a:avLst/>
-          </a:prstGeom>
-          <a:solidFill>
-            <a:srgbClr val="D0603A"/>
-          </a:solidFill>
-          <a:ln>
-            <a:noFill/>
-          </a:ln>
-          <a:effectLst/>
-        </p:spPr>
-        <p:style>
-          <a:lnRef idx="1">
-            <a:schemeClr val="accent1"/>
-          </a:lnRef>
-          <a:fillRef idx="3">
-            <a:schemeClr val="accent1"/>
-          </a:fillRef>
-          <a:effectRef idx="2">
-            <a:schemeClr val="accent1"/>
-          </a:effectRef>
-          <a:fontRef idx="minor">
-            <a:schemeClr val="lt1"/>
-          </a:fontRef>
-        </p:style>
-        <p:txBody>
-          <a:bodyPr rtlCol="0" anchor="ctr"/>
-          <a:lstStyle/>
-          <a:p>
-            <a:pPr algn="ctr"/>
-          </a:p>
-        </p:txBody>
-      </p:sp>
-      <p:sp>
-        <p:nvSpPr>
-          <p:cNvPr id="17" name="TextBox 16"/>
-          <p:cNvSpPr txBox="1"/>
-          <p:nvPr/>
-        </p:nvSpPr>
-        <p:spPr>
-          <a:xfrm>
-            <a:off x="7944916" y="5074920"/>
-            <a:ext cx="1643329" cy="320040"/>
-          </a:xfrm>
-          <a:prstGeom prst="rect">
-            <a:avLst/>
-          </a:prstGeom>
-          <a:noFill/>
-        </p:spPr>
-        <p:txBody>
-          <a:bodyPr wrap="square" anchor="t">
-            <a:spAutoFit/>
-          </a:bodyPr>
-          <a:lstStyle/>
-          <a:p>
-            <a:pPr algn="ctr"/>
-            <a:r>
-              <a:rPr sz="1400" b="0">
-                <a:solidFill>
-                  <a:srgbClr val="FFFFFF"/>
-                </a:solidFill>
-                <a:latin typeface="JetBrains Mono"/>
-              </a:rPr>
-              <a:t>уточнение</a:t>
-            </a:r>
-          </a:p>
-        </p:txBody>
-      </p:sp>
-      <p:sp>
-        <p:nvSpPr>
-          <p:cNvPr id="18" name="Rounded Rectangle 17"/>
-          <p:cNvSpPr/>
-          <p:nvPr/>
-        </p:nvSpPr>
-        <p:spPr>
-          <a:xfrm>
-            <a:off x="9725405" y="5029200"/>
-            <a:ext cx="1643329" cy="384048"/>
-          </a:xfrm>
-          <a:prstGeom prst="roundRect">
-            <a:avLst/>
-          </a:prstGeom>
-          <a:solidFill>
-            <a:srgbClr val="D0603A"/>
-          </a:solidFill>
-          <a:ln>
-            <a:noFill/>
-          </a:ln>
-          <a:effectLst/>
-        </p:spPr>
-        <p:style>
-          <a:lnRef idx="1">
-            <a:schemeClr val="accent1"/>
-          </a:lnRef>
-          <a:fillRef idx="3">
-            <a:schemeClr val="accent1"/>
-          </a:fillRef>
-          <a:effectRef idx="2">
-            <a:schemeClr val="accent1"/>
-          </a:effectRef>
-          <a:fontRef idx="minor">
-            <a:schemeClr val="lt1"/>
-          </a:fontRef>
-        </p:style>
-        <p:txBody>
-          <a:bodyPr rtlCol="0" anchor="ctr"/>
-          <a:lstStyle/>
-          <a:p>
-            <a:pPr algn="ctr"/>
-          </a:p>
-        </p:txBody>
-      </p:sp>
-      <p:sp>
-        <p:nvSpPr>
-          <p:cNvPr id="19" name="TextBox 18"/>
-          <p:cNvSpPr txBox="1"/>
-          <p:nvPr/>
-        </p:nvSpPr>
-        <p:spPr>
-          <a:xfrm>
-            <a:off x="9725405" y="5074920"/>
-            <a:ext cx="1643329" cy="320040"/>
-          </a:xfrm>
-          <a:prstGeom prst="rect">
-            <a:avLst/>
-          </a:prstGeom>
-          <a:noFill/>
-        </p:spPr>
-        <p:txBody>
-          <a:bodyPr wrap="square" anchor="t">
-            <a:spAutoFit/>
-          </a:bodyPr>
-          <a:lstStyle/>
-          <a:p>
-            <a:pPr algn="ctr"/>
-            <a:r>
-              <a:rPr sz="1400" b="0">
-                <a:solidFill>
-                  <a:srgbClr val="FFFFFF"/>
-                </a:solidFill>
-                <a:latin typeface="JetBrains Mono"/>
-              </a:rPr>
-              <a:t>повторная проверка</a:t>
-            </a:r>
-          </a:p>
-        </p:txBody>
-      </p:sp>
-      <p:sp>
-        <p:nvSpPr>
-          <p:cNvPr id="20" name="TextBox 19"/>
-          <p:cNvSpPr txBox="1"/>
-          <p:nvPr/>
-        </p:nvSpPr>
-        <p:spPr>
-          <a:xfrm>
-            <a:off x="822960" y="6446520"/>
-            <a:ext cx="3840480" cy="274320"/>
-          </a:xfrm>
-          <a:prstGeom prst="rect">
-            <a:avLst/>
-          </a:prstGeom>
-          <a:noFill/>
-        </p:spPr>
-        <p:txBody>
-          <a:bodyPr wrap="square" anchor="t">
-            <a:spAutoFit/>
-          </a:bodyPr>
-          <a:lstStyle/>
-          <a:p>
+            <a:pPr algn="r"/>
             <a:r>
               <a:rPr sz="1000" b="0">
                 <a:solidFill>
@@ -11377,1054 +9137,7 @@
                 </a:solidFill>
                 <a:latin typeface="Montserrat"/>
               </a:rPr>
-              <a:t>Команда HTTP 418 · кейс #02 · Мадригал</a:t>
-            </a:r>
-          </a:p>
-        </p:txBody>
-      </p:sp>
-      <p:sp>
-        <p:nvSpPr>
-          <p:cNvPr id="21" name="TextBox 20"/>
-          <p:cNvSpPr txBox="1"/>
-          <p:nvPr/>
-        </p:nvSpPr>
-        <p:spPr>
-          <a:xfrm>
-            <a:off x="4389120" y="6446520"/>
-            <a:ext cx="3383280" cy="274320"/>
-          </a:xfrm>
-          <a:prstGeom prst="rect">
-            <a:avLst/>
-          </a:prstGeom>
-          <a:noFill/>
-        </p:spPr>
-        <p:txBody>
-          <a:bodyPr wrap="square" anchor="t">
-            <a:spAutoFit/>
-          </a:bodyPr>
-          <a:lstStyle/>
-          <a:p>
-            <a:pPr algn="ctr"/>
-            <a:r>
-              <a:rPr sz="1000" b="0">
-                <a:solidFill>
-                  <a:srgbClr val="A8A29E"/>
-                </a:solidFill>
-                <a:latin typeface="Montserrat"/>
-              </a:rPr>
-              <a:t>Постановка и метод</a:t>
-            </a:r>
-          </a:p>
-        </p:txBody>
-      </p:sp>
-      <p:sp>
-        <p:nvSpPr>
-          <p:cNvPr id="22" name="TextBox 21"/>
-          <p:cNvSpPr txBox="1"/>
-          <p:nvPr/>
-        </p:nvSpPr>
-        <p:spPr>
-          <a:xfrm>
-            <a:off x="8138160" y="6446520"/>
-            <a:ext cx="3200400" cy="274320"/>
-          </a:xfrm>
-          <a:prstGeom prst="rect">
-            <a:avLst/>
-          </a:prstGeom>
-          <a:noFill/>
-        </p:spPr>
-        <p:txBody>
-          <a:bodyPr wrap="square" anchor="t">
-            <a:spAutoFit/>
-          </a:bodyPr>
-          <a:lstStyle/>
-          <a:p>
-            <a:pPr algn="r"/>
-            <a:r>
-              <a:rPr sz="1000" b="0">
-                <a:solidFill>
-                  <a:srgbClr val="A8A29E"/>
-                </a:solidFill>
-                <a:latin typeface="Montserrat"/>
-              </a:rPr>
-              <a:t>5 / 19</a:t>
-            </a:r>
-          </a:p>
-        </p:txBody>
-      </p:sp>
-    </p:spTree>
-  </p:cSld>
-  <p:clrMapOvr>
-    <a:masterClrMapping/>
-  </p:clrMapOvr>
-  <p:timing>
-    <p:tnLst>
-      <p:par>
-        <p:cTn id="1" dur="indefinite" restart="never" nodeType="tmRoot">
-          <p:childTnLst>
-            <p:seq concurrent="1" nextAc="seek">
-              <p:cTn id="2" dur="indefinite" nodeType="mainSeq">
-                <p:childTnLst>
-                  <p:par>
-                    <p:cTn id="3" presetID="10" presetClass="entr" presetSubtype="0" fill="hold" grpId="0" nodeType="clickEffect">
-                      <p:stCondLst>
-                        <p:cond delay="0"/>
-                      </p:stCondLst>
-                      <p:childTnLst>
-                        <p:set>
-                          <p:cBhvr>
-                            <p:cTn id="4" dur="1" fill="hold">
-                              <p:stCondLst>
-                                <p:cond delay="0"/>
-                              </p:stCondLst>
-                            </p:cTn>
-                            <p:tgtEl>
-                              <p:spTgt spid="5"/>
-                            </p:tgtEl>
-                            <p:attrNameLst>
-                              <p:attrName>style.visibility</p:attrName>
-                            </p:attrNameLst>
-                          </p:cBhvr>
-                          <p:to>
-                            <p:strVal val="visible"/>
-                          </p:to>
-                        </p:set>
-                        <p:anim calcmode="lin" valueType="num">
-                          <p:cBhvr additive="base">
-                            <p:cTn id="5" dur="300" fill="hold"/>
-                            <p:tgtEl>
-                              <p:spTgt spid="5"/>
-                            </p:tgtEl>
-                            <p:attrNameLst>
-                              <p:attrName>style.opacity</p:attrName>
-                            </p:attrNameLst>
-                          </p:cBhvr>
-                          <p:tavLst>
-                            <p:tav tm="0">
-                              <p:val>
-                                <p:fltVal val="0"/>
-                              </p:val>
-                            </p:tav>
-                            <p:tav tm="100000">
-                              <p:val>
-                                <p:fltVal val="1"/>
-                              </p:val>
-                            </p:tav>
-                          </p:tavLst>
-                        </p:anim>
-                      </p:childTnLst>
-                    </p:cTn>
-                  </p:par>
-                  <p:par>
-                    <p:cTn id="6" presetID="10" presetClass="entr" presetSubtype="0" fill="hold" grpId="0" nodeType="clickEffect">
-                      <p:stCondLst>
-                        <p:cond delay="0"/>
-                      </p:stCondLst>
-                      <p:childTnLst>
-                        <p:set>
-                          <p:cBhvr>
-                            <p:cTn id="7" dur="1" fill="hold">
-                              <p:stCondLst>
-                                <p:cond delay="0"/>
-                              </p:stCondLst>
-                            </p:cTn>
-                            <p:tgtEl>
-                              <p:spTgt spid="7"/>
-                            </p:tgtEl>
-                            <p:attrNameLst>
-                              <p:attrName>style.visibility</p:attrName>
-                            </p:attrNameLst>
-                          </p:cBhvr>
-                          <p:to>
-                            <p:strVal val="visible"/>
-                          </p:to>
-                        </p:set>
-                        <p:anim calcmode="lin" valueType="num">
-                          <p:cBhvr additive="base">
-                            <p:cTn id="8" dur="300" fill="hold"/>
-                            <p:tgtEl>
-                              <p:spTgt spid="7"/>
-                            </p:tgtEl>
-                            <p:attrNameLst>
-                              <p:attrName>style.opacity</p:attrName>
-                            </p:attrNameLst>
-                          </p:cBhvr>
-                          <p:tavLst>
-                            <p:tav tm="0">
-                              <p:val>
-                                <p:fltVal val="0"/>
-                              </p:val>
-                            </p:tav>
-                            <p:tav tm="100000">
-                              <p:val>
-                                <p:fltVal val="1"/>
-                              </p:val>
-                            </p:tav>
-                          </p:tavLst>
-                        </p:anim>
-                      </p:childTnLst>
-                    </p:cTn>
-                  </p:par>
-                </p:childTnLst>
-              </p:cTn>
-            </p:seq>
-          </p:childTnLst>
-        </p:cTn>
-      </p:par>
-    </p:tnLst>
-  </p:timing>
-  <p:transition spd="med" fade="1"/>
-</p:sld>
-</file>
-
-<file path=ppt/slides/slide6.xml><?xml version="1.0" encoding="utf-8"?>
-<p:sld xmlns:a="http://schemas.openxmlformats.org/drawingml/2006/main" xmlns:p="http://schemas.openxmlformats.org/presentationml/2006/main" xmlns:r="http://schemas.openxmlformats.org/officeDocument/2006/relationships">
-  <p:cSld>
-    <p:spTree>
-      <p:nvGrpSpPr>
-        <p:cNvPr id="1" name=""/>
-        <p:cNvGrpSpPr/>
-        <p:nvPr/>
-      </p:nvGrpSpPr>
-      <p:grpSpPr/>
-      <p:sp>
-        <p:nvSpPr>
-          <p:cNvPr id="2" name="Rectangle 1"/>
-          <p:cNvSpPr/>
-          <p:nvPr/>
-        </p:nvSpPr>
-        <p:spPr>
-          <a:xfrm>
-            <a:off x="0" y="0"/>
-            <a:ext cx="12191695" cy="6858000"/>
-          </a:xfrm>
-          <a:prstGeom prst="rect">
-            <a:avLst/>
-          </a:prstGeom>
-          <a:solidFill>
-            <a:srgbClr val="0E1011"/>
-          </a:solidFill>
-          <a:ln>
-            <a:noFill/>
-          </a:ln>
-          <a:effectLst/>
-        </p:spPr>
-        <p:style>
-          <a:lnRef idx="1">
-            <a:schemeClr val="accent1"/>
-          </a:lnRef>
-          <a:fillRef idx="3">
-            <a:schemeClr val="accent1"/>
-          </a:fillRef>
-          <a:effectRef idx="2">
-            <a:schemeClr val="accent1"/>
-          </a:effectRef>
-          <a:fontRef idx="minor">
-            <a:schemeClr val="lt1"/>
-          </a:fontRef>
-        </p:style>
-        <p:txBody>
-          <a:bodyPr rtlCol="0" anchor="ctr"/>
-          <a:lstStyle/>
-          <a:p>
-            <a:pPr algn="ctr"/>
-          </a:p>
-        </p:txBody>
-      </p:sp>
-      <p:sp>
-        <p:nvSpPr>
-          <p:cNvPr id="3" name="Rectangle 2"/>
-          <p:cNvSpPr/>
-          <p:nvPr/>
-        </p:nvSpPr>
-        <p:spPr>
-          <a:xfrm>
-            <a:off x="0" y="0"/>
-            <a:ext cx="73152" cy="6858000"/>
-          </a:xfrm>
-          <a:prstGeom prst="rect">
-            <a:avLst/>
-          </a:prstGeom>
-          <a:ln>
-            <a:noFill/>
-          </a:ln>
-          <a:effectLst/>
-          <a:gradFill rotWithShape="1">
-            <a:gsLst>
-              <a:gs pos="0">
-                <a:srgbClr val="410913"/>
-              </a:gs>
-              <a:gs pos="50000">
-                <a:srgbClr val="610D1C"/>
-              </a:gs>
-              <a:gs pos="100000">
-                <a:srgbClr val="A2391D"/>
-              </a:gs>
-            </a:gsLst>
-            <a:lin ang="2700000"/>
-          </a:gradFill>
-        </p:spPr>
-        <p:style>
-          <a:lnRef idx="1">
-            <a:schemeClr val="accent1"/>
-          </a:lnRef>
-          <a:fillRef idx="3">
-            <a:schemeClr val="accent1"/>
-          </a:fillRef>
-          <a:effectRef idx="2">
-            <a:schemeClr val="accent1"/>
-          </a:effectRef>
-          <a:fontRef idx="minor">
-            <a:schemeClr val="lt1"/>
-          </a:fontRef>
-        </p:style>
-        <p:txBody>
-          <a:bodyPr rtlCol="0" anchor="ctr"/>
-          <a:lstStyle/>
-          <a:p>
-            <a:pPr algn="ctr"/>
-          </a:p>
-        </p:txBody>
-      </p:sp>
-      <p:sp>
-        <p:nvSpPr>
-          <p:cNvPr id="4" name="TextBox 3"/>
-          <p:cNvSpPr txBox="1"/>
-          <p:nvPr/>
-        </p:nvSpPr>
-        <p:spPr>
-          <a:xfrm>
-            <a:off x="822960" y="457200"/>
-            <a:ext cx="10545775" cy="1051560"/>
-          </a:xfrm>
-          <a:prstGeom prst="rect">
-            <a:avLst/>
-          </a:prstGeom>
-          <a:noFill/>
-        </p:spPr>
-        <p:txBody>
-          <a:bodyPr wrap="square" anchor="t">
-            <a:spAutoFit/>
-          </a:bodyPr>
-          <a:lstStyle/>
-          <a:p>
-            <a:r>
-              <a:rPr sz="4000" b="1">
-                <a:solidFill>
-                  <a:srgbClr val="F4F1EC"/>
-                </a:solidFill>
-                <a:latin typeface="Tektur"/>
-              </a:rPr>
-              <a:t>Три модуля связаны форматами, а не вызовами</a:t>
-            </a:r>
-          </a:p>
-        </p:txBody>
-      </p:sp>
-      <p:sp>
-        <p:nvSpPr>
-          <p:cNvPr id="5" name="Rectangle 4"/>
-          <p:cNvSpPr/>
-          <p:nvPr/>
-        </p:nvSpPr>
-        <p:spPr>
-          <a:xfrm>
-            <a:off x="655167" y="1965960"/>
-            <a:ext cx="3200400" cy="2011680"/>
-          </a:xfrm>
-          <a:prstGeom prst="rect">
-            <a:avLst/>
-          </a:prstGeom>
-          <a:solidFill>
-            <a:srgbClr val="1F2124"/>
-          </a:solidFill>
-          <a:ln>
-            <a:noFill/>
-          </a:ln>
-          <a:effectLst/>
-        </p:spPr>
-        <p:style>
-          <a:lnRef idx="1">
-            <a:schemeClr val="accent1"/>
-          </a:lnRef>
-          <a:fillRef idx="3">
-            <a:schemeClr val="accent1"/>
-          </a:fillRef>
-          <a:effectRef idx="2">
-            <a:schemeClr val="accent1"/>
-          </a:effectRef>
-          <a:fontRef idx="minor">
-            <a:schemeClr val="lt1"/>
-          </a:fontRef>
-        </p:style>
-        <p:txBody>
-          <a:bodyPr rtlCol="0" anchor="ctr"/>
-          <a:lstStyle/>
-          <a:p>
-            <a:pPr algn="ctr"/>
-          </a:p>
-        </p:txBody>
-      </p:sp>
-      <p:sp>
-        <p:nvSpPr>
-          <p:cNvPr id="6" name="Rectangle 5"/>
-          <p:cNvSpPr/>
-          <p:nvPr/>
-        </p:nvSpPr>
-        <p:spPr>
-          <a:xfrm>
-            <a:off x="655167" y="1965960"/>
-            <a:ext cx="45720" cy="2011680"/>
-          </a:xfrm>
-          <a:prstGeom prst="rect">
-            <a:avLst/>
-          </a:prstGeom>
-          <a:solidFill>
-            <a:srgbClr val="D0603A"/>
-          </a:solidFill>
-          <a:ln>
-            <a:noFill/>
-          </a:ln>
-          <a:effectLst/>
-        </p:spPr>
-        <p:style>
-          <a:lnRef idx="1">
-            <a:schemeClr val="accent1"/>
-          </a:lnRef>
-          <a:fillRef idx="3">
-            <a:schemeClr val="accent1"/>
-          </a:fillRef>
-          <a:effectRef idx="2">
-            <a:schemeClr val="accent1"/>
-          </a:effectRef>
-          <a:fontRef idx="minor">
-            <a:schemeClr val="lt1"/>
-          </a:fontRef>
-        </p:style>
-        <p:txBody>
-          <a:bodyPr rtlCol="0" anchor="ctr"/>
-          <a:lstStyle/>
-          <a:p>
-            <a:pPr algn="ctr"/>
-          </a:p>
-        </p:txBody>
-      </p:sp>
-      <p:sp>
-        <p:nvSpPr>
-          <p:cNvPr id="7" name="TextBox 6"/>
-          <p:cNvSpPr txBox="1"/>
-          <p:nvPr/>
-        </p:nvSpPr>
-        <p:spPr>
-          <a:xfrm>
-            <a:off x="883767" y="2286000"/>
-            <a:ext cx="2743200" cy="548640"/>
-          </a:xfrm>
-          <a:prstGeom prst="rect">
-            <a:avLst/>
-          </a:prstGeom>
-          <a:noFill/>
-        </p:spPr>
-        <p:txBody>
-          <a:bodyPr wrap="square" anchor="t">
-            <a:spAutoFit/>
-          </a:bodyPr>
-          <a:lstStyle/>
-          <a:p>
-            <a:r>
-              <a:rPr sz="2000" b="1">
-                <a:solidFill>
-                  <a:srgbClr val="F4F1EC"/>
-                </a:solidFill>
-                <a:latin typeface="Tektur"/>
-              </a:rPr>
-              <a:t>capture</a:t>
-            </a:r>
-          </a:p>
-        </p:txBody>
-      </p:sp>
-      <p:sp>
-        <p:nvSpPr>
-          <p:cNvPr id="8" name="TextBox 7"/>
-          <p:cNvSpPr txBox="1"/>
-          <p:nvPr/>
-        </p:nvSpPr>
-        <p:spPr>
-          <a:xfrm>
-            <a:off x="883767" y="2926080"/>
-            <a:ext cx="2743200" cy="822960"/>
-          </a:xfrm>
-          <a:prstGeom prst="rect">
-            <a:avLst/>
-          </a:prstGeom>
-          <a:noFill/>
-        </p:spPr>
-        <p:txBody>
-          <a:bodyPr wrap="square" anchor="t">
-            <a:spAutoFit/>
-          </a:bodyPr>
-          <a:lstStyle/>
-          <a:p>
-            <a:r>
-              <a:rPr sz="1400" b="0">
-                <a:solidFill>
-                  <a:srgbClr val="A8A29E"/>
-                </a:solidFill>
-                <a:latin typeface="Montserrat"/>
-              </a:rPr>
-              <a:t>pcap/pcapng → сессии</a:t>
-            </a:r>
-          </a:p>
-          <a:p>
-            <a:r>
-              <a:rPr sz="1400" b="0">
-                <a:solidFill>
-                  <a:srgbClr val="A8A29E"/>
-                </a:solidFill>
-                <a:latin typeface="Montserrat"/>
-              </a:rPr>
-              <a:t>reassembly, provenance</a:t>
-            </a:r>
-          </a:p>
-        </p:txBody>
-      </p:sp>
-      <p:sp>
-        <p:nvSpPr>
-          <p:cNvPr id="9" name="TextBox 8"/>
-          <p:cNvSpPr txBox="1"/>
-          <p:nvPr/>
-        </p:nvSpPr>
-        <p:spPr>
-          <a:xfrm>
-            <a:off x="3855567" y="2743200"/>
-            <a:ext cx="640080" cy="548640"/>
-          </a:xfrm>
-          <a:prstGeom prst="rect">
-            <a:avLst/>
-          </a:prstGeom>
-          <a:noFill/>
-        </p:spPr>
-        <p:txBody>
-          <a:bodyPr wrap="square" anchor="ctr">
-            <a:spAutoFit/>
-          </a:bodyPr>
-          <a:lstStyle/>
-          <a:p>
-            <a:pPr algn="ctr"/>
-            <a:r>
-              <a:rPr sz="1400" b="0">
-                <a:solidFill>
-                  <a:srgbClr val="D0603A"/>
-                </a:solidFill>
-                <a:latin typeface="JetBrains Mono"/>
-              </a:rPr>
-              <a:t>JSON →</a:t>
-            </a:r>
-          </a:p>
-        </p:txBody>
-      </p:sp>
-      <p:sp>
-        <p:nvSpPr>
-          <p:cNvPr id="10" name="Rectangle 9"/>
-          <p:cNvSpPr/>
-          <p:nvPr/>
-        </p:nvSpPr>
-        <p:spPr>
-          <a:xfrm>
-            <a:off x="4495647" y="1965960"/>
-            <a:ext cx="3200400" cy="2011680"/>
-          </a:xfrm>
-          <a:prstGeom prst="rect">
-            <a:avLst/>
-          </a:prstGeom>
-          <a:solidFill>
-            <a:srgbClr val="1F2124"/>
-          </a:solidFill>
-          <a:ln>
-            <a:noFill/>
-          </a:ln>
-          <a:effectLst/>
-        </p:spPr>
-        <p:style>
-          <a:lnRef idx="1">
-            <a:schemeClr val="accent1"/>
-          </a:lnRef>
-          <a:fillRef idx="3">
-            <a:schemeClr val="accent1"/>
-          </a:fillRef>
-          <a:effectRef idx="2">
-            <a:schemeClr val="accent1"/>
-          </a:effectRef>
-          <a:fontRef idx="minor">
-            <a:schemeClr val="lt1"/>
-          </a:fontRef>
-        </p:style>
-        <p:txBody>
-          <a:bodyPr rtlCol="0" anchor="ctr"/>
-          <a:lstStyle/>
-          <a:p>
-            <a:pPr algn="ctr"/>
-          </a:p>
-        </p:txBody>
-      </p:sp>
-      <p:sp>
-        <p:nvSpPr>
-          <p:cNvPr id="11" name="Rectangle 10"/>
-          <p:cNvSpPr/>
-          <p:nvPr/>
-        </p:nvSpPr>
-        <p:spPr>
-          <a:xfrm>
-            <a:off x="4495647" y="1965960"/>
-            <a:ext cx="45720" cy="2011680"/>
-          </a:xfrm>
-          <a:prstGeom prst="rect">
-            <a:avLst/>
-          </a:prstGeom>
-          <a:solidFill>
-            <a:srgbClr val="D0603A"/>
-          </a:solidFill>
-          <a:ln>
-            <a:noFill/>
-          </a:ln>
-          <a:effectLst/>
-        </p:spPr>
-        <p:style>
-          <a:lnRef idx="1">
-            <a:schemeClr val="accent1"/>
-          </a:lnRef>
-          <a:fillRef idx="3">
-            <a:schemeClr val="accent1"/>
-          </a:fillRef>
-          <a:effectRef idx="2">
-            <a:schemeClr val="accent1"/>
-          </a:effectRef>
-          <a:fontRef idx="minor">
-            <a:schemeClr val="lt1"/>
-          </a:fontRef>
-        </p:style>
-        <p:txBody>
-          <a:bodyPr rtlCol="0" anchor="ctr"/>
-          <a:lstStyle/>
-          <a:p>
-            <a:pPr algn="ctr"/>
-          </a:p>
-        </p:txBody>
-      </p:sp>
-      <p:sp>
-        <p:nvSpPr>
-          <p:cNvPr id="12" name="TextBox 11"/>
-          <p:cNvSpPr txBox="1"/>
-          <p:nvPr/>
-        </p:nvSpPr>
-        <p:spPr>
-          <a:xfrm>
-            <a:off x="4724247" y="2286000"/>
-            <a:ext cx="2743200" cy="548640"/>
-          </a:xfrm>
-          <a:prstGeom prst="rect">
-            <a:avLst/>
-          </a:prstGeom>
-          <a:noFill/>
-        </p:spPr>
-        <p:txBody>
-          <a:bodyPr wrap="square" anchor="t">
-            <a:spAutoFit/>
-          </a:bodyPr>
-          <a:lstStyle/>
-          <a:p>
-            <a:r>
-              <a:rPr sz="2000" b="1">
-                <a:solidFill>
-                  <a:srgbClr val="F4F1EC"/>
-                </a:solidFill>
-                <a:latin typeface="Tektur"/>
-              </a:rPr>
-              <a:t>protocol + hypothesis</a:t>
-            </a:r>
-          </a:p>
-        </p:txBody>
-      </p:sp>
-      <p:sp>
-        <p:nvSpPr>
-          <p:cNvPr id="13" name="TextBox 12"/>
-          <p:cNvSpPr txBox="1"/>
-          <p:nvPr/>
-        </p:nvSpPr>
-        <p:spPr>
-          <a:xfrm>
-            <a:off x="4724247" y="2926080"/>
-            <a:ext cx="2743200" cy="822960"/>
-          </a:xfrm>
-          <a:prstGeom prst="rect">
-            <a:avLst/>
-          </a:prstGeom>
-          <a:noFill/>
-        </p:spPr>
-        <p:txBody>
-          <a:bodyPr wrap="square" anchor="t">
-            <a:spAutoFit/>
-          </a:bodyPr>
-          <a:lstStyle/>
-          <a:p>
-            <a:r>
-              <a:rPr sz="1400" b="0">
-                <a:solidFill>
-                  <a:srgbClr val="A8A29E"/>
-                </a:solidFill>
-                <a:latin typeface="Montserrat"/>
-              </a:rPr>
-              <a:t>правила, фрейминг</a:t>
-            </a:r>
-          </a:p>
-          <a:p>
-            <a:r>
-              <a:rPr sz="1400" b="0">
-                <a:solidFill>
-                  <a:srgbClr val="A8A29E"/>
-                </a:solidFill>
-                <a:latin typeface="Montserrat"/>
-              </a:rPr>
-              <a:t>контрпримеры, версии</a:t>
-            </a:r>
-          </a:p>
-        </p:txBody>
-      </p:sp>
-      <p:sp>
-        <p:nvSpPr>
-          <p:cNvPr id="14" name="TextBox 13"/>
-          <p:cNvSpPr txBox="1"/>
-          <p:nvPr/>
-        </p:nvSpPr>
-        <p:spPr>
-          <a:xfrm>
-            <a:off x="7696047" y="2743200"/>
-            <a:ext cx="640080" cy="548640"/>
-          </a:xfrm>
-          <a:prstGeom prst="rect">
-            <a:avLst/>
-          </a:prstGeom>
-          <a:noFill/>
-        </p:spPr>
-        <p:txBody>
-          <a:bodyPr wrap="square" anchor="ctr">
-            <a:spAutoFit/>
-          </a:bodyPr>
-          <a:lstStyle/>
-          <a:p>
-            <a:pPr algn="ctr"/>
-            <a:r>
-              <a:rPr sz="1400" b="0">
-                <a:solidFill>
-                  <a:srgbClr val="D0603A"/>
-                </a:solidFill>
-                <a:latin typeface="JetBrains Mono"/>
-              </a:rPr>
-              <a:t>JSON →</a:t>
-            </a:r>
-          </a:p>
-        </p:txBody>
-      </p:sp>
-      <p:sp>
-        <p:nvSpPr>
-          <p:cNvPr id="15" name="Rectangle 14"/>
-          <p:cNvSpPr/>
-          <p:nvPr/>
-        </p:nvSpPr>
-        <p:spPr>
-          <a:xfrm>
-            <a:off x="8336127" y="1965960"/>
-            <a:ext cx="3200400" cy="2011680"/>
-          </a:xfrm>
-          <a:prstGeom prst="rect">
-            <a:avLst/>
-          </a:prstGeom>
-          <a:solidFill>
-            <a:srgbClr val="1F2124"/>
-          </a:solidFill>
-          <a:ln>
-            <a:noFill/>
-          </a:ln>
-          <a:effectLst/>
-        </p:spPr>
-        <p:style>
-          <a:lnRef idx="1">
-            <a:schemeClr val="accent1"/>
-          </a:lnRef>
-          <a:fillRef idx="3">
-            <a:schemeClr val="accent1"/>
-          </a:fillRef>
-          <a:effectRef idx="2">
-            <a:schemeClr val="accent1"/>
-          </a:effectRef>
-          <a:fontRef idx="minor">
-            <a:schemeClr val="lt1"/>
-          </a:fontRef>
-        </p:style>
-        <p:txBody>
-          <a:bodyPr rtlCol="0" anchor="ctr"/>
-          <a:lstStyle/>
-          <a:p>
-            <a:pPr algn="ctr"/>
-          </a:p>
-        </p:txBody>
-      </p:sp>
-      <p:sp>
-        <p:nvSpPr>
-          <p:cNvPr id="16" name="Rectangle 15"/>
-          <p:cNvSpPr/>
-          <p:nvPr/>
-        </p:nvSpPr>
-        <p:spPr>
-          <a:xfrm>
-            <a:off x="8336127" y="1965960"/>
-            <a:ext cx="45720" cy="2011680"/>
-          </a:xfrm>
-          <a:prstGeom prst="rect">
-            <a:avLst/>
-          </a:prstGeom>
-          <a:solidFill>
-            <a:srgbClr val="D0603A"/>
-          </a:solidFill>
-          <a:ln>
-            <a:noFill/>
-          </a:ln>
-          <a:effectLst/>
-        </p:spPr>
-        <p:style>
-          <a:lnRef idx="1">
-            <a:schemeClr val="accent1"/>
-          </a:lnRef>
-          <a:fillRef idx="3">
-            <a:schemeClr val="accent1"/>
-          </a:fillRef>
-          <a:effectRef idx="2">
-            <a:schemeClr val="accent1"/>
-          </a:effectRef>
-          <a:fontRef idx="minor">
-            <a:schemeClr val="lt1"/>
-          </a:fontRef>
-        </p:style>
-        <p:txBody>
-          <a:bodyPr rtlCol="0" anchor="ctr"/>
-          <a:lstStyle/>
-          <a:p>
-            <a:pPr algn="ctr"/>
-          </a:p>
-        </p:txBody>
-      </p:sp>
-      <p:sp>
-        <p:nvSpPr>
-          <p:cNvPr id="17" name="TextBox 16"/>
-          <p:cNvSpPr txBox="1"/>
-          <p:nvPr/>
-        </p:nvSpPr>
-        <p:spPr>
-          <a:xfrm>
-            <a:off x="8564727" y="2286000"/>
-            <a:ext cx="2743200" cy="548640"/>
-          </a:xfrm>
-          <a:prstGeom prst="rect">
-            <a:avLst/>
-          </a:prstGeom>
-          <a:noFill/>
-        </p:spPr>
-        <p:txBody>
-          <a:bodyPr wrap="square" anchor="t">
-            <a:spAutoFit/>
-          </a:bodyPr>
-          <a:lstStyle/>
-          <a:p>
-            <a:r>
-              <a:rPr sz="2000" b="1">
-                <a:solidFill>
-                  <a:srgbClr val="F4F1EC"/>
-                </a:solidFill>
-                <a:latin typeface="Tektur"/>
-              </a:rPr>
-              <a:t>ui</a:t>
-            </a:r>
-          </a:p>
-        </p:txBody>
-      </p:sp>
-      <p:sp>
-        <p:nvSpPr>
-          <p:cNvPr id="18" name="TextBox 17"/>
-          <p:cNvSpPr txBox="1"/>
-          <p:nvPr/>
-        </p:nvSpPr>
-        <p:spPr>
-          <a:xfrm>
-            <a:off x="8564727" y="2926080"/>
-            <a:ext cx="2743200" cy="822960"/>
-          </a:xfrm>
-          <a:prstGeom prst="rect">
-            <a:avLst/>
-          </a:prstGeom>
-          <a:noFill/>
-        </p:spPr>
-        <p:txBody>
-          <a:bodyPr wrap="square" anchor="t">
-            <a:spAutoFit/>
-          </a:bodyPr>
-          <a:lstStyle/>
-          <a:p>
-            <a:r>
-              <a:rPr sz="1400" b="0">
-                <a:solidFill>
-                  <a:srgbClr val="A8A29E"/>
-                </a:solidFill>
-                <a:latin typeface="Montserrat"/>
-              </a:rPr>
-              <a:t>окно PySide6</a:t>
-            </a:r>
-          </a:p>
-          <a:p>
-            <a:r>
-              <a:rPr sz="1400" b="0">
-                <a:solidFill>
-                  <a:srgbClr val="A8A29E"/>
-                </a:solidFill>
-                <a:latin typeface="Montserrat"/>
-              </a:rPr>
-              <a:t>исследование и просмотр</a:t>
-            </a:r>
-          </a:p>
-        </p:txBody>
-      </p:sp>
-      <p:sp>
-        <p:nvSpPr>
-          <p:cNvPr id="19" name="TextBox 18"/>
-          <p:cNvSpPr txBox="1"/>
-          <p:nvPr/>
-        </p:nvSpPr>
-        <p:spPr>
-          <a:xfrm>
-            <a:off x="822960" y="6035040"/>
-            <a:ext cx="10545775" cy="365760"/>
-          </a:xfrm>
-          <a:prstGeom prst="rect">
-            <a:avLst/>
-          </a:prstGeom>
-          <a:noFill/>
-        </p:spPr>
-        <p:txBody>
-          <a:bodyPr wrap="square" anchor="t">
-            <a:spAutoFit/>
-          </a:bodyPr>
-          <a:lstStyle/>
-          <a:p>
-            <a:r>
-              <a:rPr sz="1400" b="0">
-                <a:solidFill>
-                  <a:srgbClr val="A8A29E"/>
-                </a:solidFill>
-                <a:latin typeface="Montserrat"/>
-              </a:rPr>
-              <a:t>Контракты между модулями зафиксированы схемами JSON; порядок вызовов не важен</a:t>
-            </a:r>
-          </a:p>
-        </p:txBody>
-      </p:sp>
-      <p:sp>
-        <p:nvSpPr>
-          <p:cNvPr id="20" name="TextBox 19"/>
-          <p:cNvSpPr txBox="1"/>
-          <p:nvPr/>
-        </p:nvSpPr>
-        <p:spPr>
-          <a:xfrm>
-            <a:off x="822960" y="6446520"/>
-            <a:ext cx="3840480" cy="274320"/>
-          </a:xfrm>
-          <a:prstGeom prst="rect">
-            <a:avLst/>
-          </a:prstGeom>
-          <a:noFill/>
-        </p:spPr>
-        <p:txBody>
-          <a:bodyPr wrap="square" anchor="t">
-            <a:spAutoFit/>
-          </a:bodyPr>
-          <a:lstStyle/>
-          <a:p>
-            <a:r>
-              <a:rPr sz="1000" b="0">
-                <a:solidFill>
-                  <a:srgbClr val="A8A29E"/>
-                </a:solidFill>
-                <a:latin typeface="Montserrat"/>
-              </a:rPr>
-              <a:t>Команда HTTP 418 · кейс #02 · Мадригал</a:t>
-            </a:r>
-          </a:p>
-        </p:txBody>
-      </p:sp>
-      <p:sp>
-        <p:nvSpPr>
-          <p:cNvPr id="21" name="TextBox 20"/>
-          <p:cNvSpPr txBox="1"/>
-          <p:nvPr/>
-        </p:nvSpPr>
-        <p:spPr>
-          <a:xfrm>
-            <a:off x="4389120" y="6446520"/>
-            <a:ext cx="3383280" cy="274320"/>
-          </a:xfrm>
-          <a:prstGeom prst="rect">
-            <a:avLst/>
-          </a:prstGeom>
-          <a:noFill/>
-        </p:spPr>
-        <p:txBody>
-          <a:bodyPr wrap="square" anchor="t">
-            <a:spAutoFit/>
-          </a:bodyPr>
-          <a:lstStyle/>
-          <a:p>
-            <a:pPr algn="ctr"/>
-            <a:r>
-              <a:rPr sz="1000" b="0">
-                <a:solidFill>
-                  <a:srgbClr val="A8A29E"/>
-                </a:solidFill>
-                <a:latin typeface="Montserrat"/>
-              </a:rPr>
-              <a:t>Постановка и метод</a:t>
-            </a:r>
-          </a:p>
-        </p:txBody>
-      </p:sp>
-      <p:sp>
-        <p:nvSpPr>
-          <p:cNvPr id="22" name="TextBox 21"/>
-          <p:cNvSpPr txBox="1"/>
-          <p:nvPr/>
-        </p:nvSpPr>
-        <p:spPr>
-          <a:xfrm>
-            <a:off x="8138160" y="6446520"/>
-            <a:ext cx="3200400" cy="274320"/>
-          </a:xfrm>
-          <a:prstGeom prst="rect">
-            <a:avLst/>
-          </a:prstGeom>
-          <a:noFill/>
-        </p:spPr>
-        <p:txBody>
-          <a:bodyPr wrap="square" anchor="t">
-            <a:spAutoFit/>
-          </a:bodyPr>
-          <a:lstStyle/>
-          <a:p>
-            <a:pPr algn="r"/>
-            <a:r>
-              <a:rPr sz="1000" b="0">
-                <a:solidFill>
-                  <a:srgbClr val="A8A29E"/>
-                </a:solidFill>
-                <a:latin typeface="Montserrat"/>
-              </a:rPr>
-              <a:t>6 / 19</a:t>
+              <a:t>4 / 14</a:t>
             </a:r>
           </a:p>
         </p:txBody>
@@ -12604,7 +9317,7 @@
 </p:sld>
 </file>
 
-<file path=ppt/slides/slide7.xml><?xml version="1.0" encoding="utf-8"?>
+<file path=ppt/slides/slide5.xml><?xml version="1.0" encoding="utf-8"?>
 <p:sld xmlns:a="http://schemas.openxmlformats.org/drawingml/2006/main" xmlns:p="http://schemas.openxmlformats.org/presentationml/2006/main" xmlns:r="http://schemas.openxmlformats.org/officeDocument/2006/relationships">
   <p:cSld>
     <p:spTree>
@@ -12722,6 +9435,1033 @@
         <p:spPr>
           <a:xfrm>
             <a:off x="822960" y="457200"/>
+            <a:ext cx="10545775" cy="1051560"/>
+          </a:xfrm>
+          <a:prstGeom prst="rect">
+            <a:avLst/>
+          </a:prstGeom>
+          <a:noFill/>
+        </p:spPr>
+        <p:txBody>
+          <a:bodyPr wrap="square" anchor="t">
+            <a:spAutoFit/>
+          </a:bodyPr>
+          <a:lstStyle/>
+          <a:p>
+            <a:r>
+              <a:rPr sz="4000" b="1">
+                <a:solidFill>
+                  <a:srgbClr val="F4F1EC"/>
+                </a:solidFill>
+                <a:latin typeface="Tektur"/>
+              </a:rPr>
+              <a:t>Три модуля связаны форматами, а не вызовами</a:t>
+            </a:r>
+          </a:p>
+        </p:txBody>
+      </p:sp>
+      <p:sp>
+        <p:nvSpPr>
+          <p:cNvPr id="5" name="Rectangle 4"/>
+          <p:cNvSpPr/>
+          <p:nvPr/>
+        </p:nvSpPr>
+        <p:spPr>
+          <a:xfrm>
+            <a:off x="655167" y="1965960"/>
+            <a:ext cx="3200400" cy="2011680"/>
+          </a:xfrm>
+          <a:prstGeom prst="rect">
+            <a:avLst/>
+          </a:prstGeom>
+          <a:solidFill>
+            <a:srgbClr val="1F2124"/>
+          </a:solidFill>
+          <a:ln>
+            <a:noFill/>
+          </a:ln>
+          <a:effectLst/>
+        </p:spPr>
+        <p:style>
+          <a:lnRef idx="1">
+            <a:schemeClr val="accent1"/>
+          </a:lnRef>
+          <a:fillRef idx="3">
+            <a:schemeClr val="accent1"/>
+          </a:fillRef>
+          <a:effectRef idx="2">
+            <a:schemeClr val="accent1"/>
+          </a:effectRef>
+          <a:fontRef idx="minor">
+            <a:schemeClr val="lt1"/>
+          </a:fontRef>
+        </p:style>
+        <p:txBody>
+          <a:bodyPr rtlCol="0" anchor="ctr"/>
+          <a:lstStyle/>
+          <a:p>
+            <a:pPr algn="ctr"/>
+          </a:p>
+        </p:txBody>
+      </p:sp>
+      <p:sp>
+        <p:nvSpPr>
+          <p:cNvPr id="6" name="Rectangle 5"/>
+          <p:cNvSpPr/>
+          <p:nvPr/>
+        </p:nvSpPr>
+        <p:spPr>
+          <a:xfrm>
+            <a:off x="655167" y="1965960"/>
+            <a:ext cx="45720" cy="2011680"/>
+          </a:xfrm>
+          <a:prstGeom prst="rect">
+            <a:avLst/>
+          </a:prstGeom>
+          <a:solidFill>
+            <a:srgbClr val="D0603A"/>
+          </a:solidFill>
+          <a:ln>
+            <a:noFill/>
+          </a:ln>
+          <a:effectLst/>
+        </p:spPr>
+        <p:style>
+          <a:lnRef idx="1">
+            <a:schemeClr val="accent1"/>
+          </a:lnRef>
+          <a:fillRef idx="3">
+            <a:schemeClr val="accent1"/>
+          </a:fillRef>
+          <a:effectRef idx="2">
+            <a:schemeClr val="accent1"/>
+          </a:effectRef>
+          <a:fontRef idx="minor">
+            <a:schemeClr val="lt1"/>
+          </a:fontRef>
+        </p:style>
+        <p:txBody>
+          <a:bodyPr rtlCol="0" anchor="ctr"/>
+          <a:lstStyle/>
+          <a:p>
+            <a:pPr algn="ctr"/>
+          </a:p>
+        </p:txBody>
+      </p:sp>
+      <p:sp>
+        <p:nvSpPr>
+          <p:cNvPr id="7" name="TextBox 6"/>
+          <p:cNvSpPr txBox="1"/>
+          <p:nvPr/>
+        </p:nvSpPr>
+        <p:spPr>
+          <a:xfrm>
+            <a:off x="883767" y="2286000"/>
+            <a:ext cx="2743200" cy="548640"/>
+          </a:xfrm>
+          <a:prstGeom prst="rect">
+            <a:avLst/>
+          </a:prstGeom>
+          <a:noFill/>
+        </p:spPr>
+        <p:txBody>
+          <a:bodyPr wrap="square" anchor="t">
+            <a:spAutoFit/>
+          </a:bodyPr>
+          <a:lstStyle/>
+          <a:p>
+            <a:r>
+              <a:rPr sz="2000" b="1">
+                <a:solidFill>
+                  <a:srgbClr val="F4F1EC"/>
+                </a:solidFill>
+                <a:latin typeface="Tektur"/>
+              </a:rPr>
+              <a:t>capture</a:t>
+            </a:r>
+          </a:p>
+        </p:txBody>
+      </p:sp>
+      <p:sp>
+        <p:nvSpPr>
+          <p:cNvPr id="8" name="TextBox 7"/>
+          <p:cNvSpPr txBox="1"/>
+          <p:nvPr/>
+        </p:nvSpPr>
+        <p:spPr>
+          <a:xfrm>
+            <a:off x="883767" y="2926080"/>
+            <a:ext cx="2743200" cy="822960"/>
+          </a:xfrm>
+          <a:prstGeom prst="rect">
+            <a:avLst/>
+          </a:prstGeom>
+          <a:noFill/>
+        </p:spPr>
+        <p:txBody>
+          <a:bodyPr wrap="square" anchor="t">
+            <a:spAutoFit/>
+          </a:bodyPr>
+          <a:lstStyle/>
+          <a:p>
+            <a:r>
+              <a:rPr sz="1400" b="0">
+                <a:solidFill>
+                  <a:srgbClr val="A8A29E"/>
+                </a:solidFill>
+                <a:latin typeface="Montserrat"/>
+              </a:rPr>
+              <a:t>pcap/pcapng → сессии</a:t>
+            </a:r>
+          </a:p>
+          <a:p>
+            <a:r>
+              <a:rPr sz="1400" b="0">
+                <a:solidFill>
+                  <a:srgbClr val="A8A29E"/>
+                </a:solidFill>
+                <a:latin typeface="Montserrat"/>
+              </a:rPr>
+              <a:t>reassembly, provenance</a:t>
+            </a:r>
+          </a:p>
+        </p:txBody>
+      </p:sp>
+      <p:sp>
+        <p:nvSpPr>
+          <p:cNvPr id="9" name="TextBox 8"/>
+          <p:cNvSpPr txBox="1"/>
+          <p:nvPr/>
+        </p:nvSpPr>
+        <p:spPr>
+          <a:xfrm>
+            <a:off x="3855567" y="2743200"/>
+            <a:ext cx="640080" cy="548640"/>
+          </a:xfrm>
+          <a:prstGeom prst="rect">
+            <a:avLst/>
+          </a:prstGeom>
+          <a:noFill/>
+        </p:spPr>
+        <p:txBody>
+          <a:bodyPr wrap="square" anchor="ctr">
+            <a:spAutoFit/>
+          </a:bodyPr>
+          <a:lstStyle/>
+          <a:p>
+            <a:pPr algn="ctr"/>
+            <a:r>
+              <a:rPr sz="1400" b="0">
+                <a:solidFill>
+                  <a:srgbClr val="D0603A"/>
+                </a:solidFill>
+                <a:latin typeface="JetBrains Mono"/>
+              </a:rPr>
+              <a:t>JSON →</a:t>
+            </a:r>
+          </a:p>
+        </p:txBody>
+      </p:sp>
+      <p:sp>
+        <p:nvSpPr>
+          <p:cNvPr id="10" name="Rectangle 9"/>
+          <p:cNvSpPr/>
+          <p:nvPr/>
+        </p:nvSpPr>
+        <p:spPr>
+          <a:xfrm>
+            <a:off x="4495647" y="1965960"/>
+            <a:ext cx="3200400" cy="2011680"/>
+          </a:xfrm>
+          <a:prstGeom prst="rect">
+            <a:avLst/>
+          </a:prstGeom>
+          <a:solidFill>
+            <a:srgbClr val="1F2124"/>
+          </a:solidFill>
+          <a:ln>
+            <a:noFill/>
+          </a:ln>
+          <a:effectLst/>
+        </p:spPr>
+        <p:style>
+          <a:lnRef idx="1">
+            <a:schemeClr val="accent1"/>
+          </a:lnRef>
+          <a:fillRef idx="3">
+            <a:schemeClr val="accent1"/>
+          </a:fillRef>
+          <a:effectRef idx="2">
+            <a:schemeClr val="accent1"/>
+          </a:effectRef>
+          <a:fontRef idx="minor">
+            <a:schemeClr val="lt1"/>
+          </a:fontRef>
+        </p:style>
+        <p:txBody>
+          <a:bodyPr rtlCol="0" anchor="ctr"/>
+          <a:lstStyle/>
+          <a:p>
+            <a:pPr algn="ctr"/>
+          </a:p>
+        </p:txBody>
+      </p:sp>
+      <p:sp>
+        <p:nvSpPr>
+          <p:cNvPr id="11" name="Rectangle 10"/>
+          <p:cNvSpPr/>
+          <p:nvPr/>
+        </p:nvSpPr>
+        <p:spPr>
+          <a:xfrm>
+            <a:off x="4495647" y="1965960"/>
+            <a:ext cx="45720" cy="2011680"/>
+          </a:xfrm>
+          <a:prstGeom prst="rect">
+            <a:avLst/>
+          </a:prstGeom>
+          <a:solidFill>
+            <a:srgbClr val="D0603A"/>
+          </a:solidFill>
+          <a:ln>
+            <a:noFill/>
+          </a:ln>
+          <a:effectLst/>
+        </p:spPr>
+        <p:style>
+          <a:lnRef idx="1">
+            <a:schemeClr val="accent1"/>
+          </a:lnRef>
+          <a:fillRef idx="3">
+            <a:schemeClr val="accent1"/>
+          </a:fillRef>
+          <a:effectRef idx="2">
+            <a:schemeClr val="accent1"/>
+          </a:effectRef>
+          <a:fontRef idx="minor">
+            <a:schemeClr val="lt1"/>
+          </a:fontRef>
+        </p:style>
+        <p:txBody>
+          <a:bodyPr rtlCol="0" anchor="ctr"/>
+          <a:lstStyle/>
+          <a:p>
+            <a:pPr algn="ctr"/>
+          </a:p>
+        </p:txBody>
+      </p:sp>
+      <p:sp>
+        <p:nvSpPr>
+          <p:cNvPr id="12" name="TextBox 11"/>
+          <p:cNvSpPr txBox="1"/>
+          <p:nvPr/>
+        </p:nvSpPr>
+        <p:spPr>
+          <a:xfrm>
+            <a:off x="4724247" y="2286000"/>
+            <a:ext cx="2743200" cy="548640"/>
+          </a:xfrm>
+          <a:prstGeom prst="rect">
+            <a:avLst/>
+          </a:prstGeom>
+          <a:noFill/>
+        </p:spPr>
+        <p:txBody>
+          <a:bodyPr wrap="square" anchor="t">
+            <a:spAutoFit/>
+          </a:bodyPr>
+          <a:lstStyle/>
+          <a:p>
+            <a:r>
+              <a:rPr sz="2000" b="1">
+                <a:solidFill>
+                  <a:srgbClr val="F4F1EC"/>
+                </a:solidFill>
+                <a:latin typeface="Tektur"/>
+              </a:rPr>
+              <a:t>protocol + hypothesis</a:t>
+            </a:r>
+          </a:p>
+        </p:txBody>
+      </p:sp>
+      <p:sp>
+        <p:nvSpPr>
+          <p:cNvPr id="13" name="TextBox 12"/>
+          <p:cNvSpPr txBox="1"/>
+          <p:nvPr/>
+        </p:nvSpPr>
+        <p:spPr>
+          <a:xfrm>
+            <a:off x="4724247" y="2926080"/>
+            <a:ext cx="2743200" cy="822960"/>
+          </a:xfrm>
+          <a:prstGeom prst="rect">
+            <a:avLst/>
+          </a:prstGeom>
+          <a:noFill/>
+        </p:spPr>
+        <p:txBody>
+          <a:bodyPr wrap="square" anchor="t">
+            <a:spAutoFit/>
+          </a:bodyPr>
+          <a:lstStyle/>
+          <a:p>
+            <a:r>
+              <a:rPr sz="1400" b="0">
+                <a:solidFill>
+                  <a:srgbClr val="A8A29E"/>
+                </a:solidFill>
+                <a:latin typeface="Montserrat"/>
+              </a:rPr>
+              <a:t>правила, фрейминг</a:t>
+            </a:r>
+          </a:p>
+          <a:p>
+            <a:r>
+              <a:rPr sz="1400" b="0">
+                <a:solidFill>
+                  <a:srgbClr val="A8A29E"/>
+                </a:solidFill>
+                <a:latin typeface="Montserrat"/>
+              </a:rPr>
+              <a:t>контрпримеры, версии</a:t>
+            </a:r>
+          </a:p>
+        </p:txBody>
+      </p:sp>
+      <p:sp>
+        <p:nvSpPr>
+          <p:cNvPr id="14" name="TextBox 13"/>
+          <p:cNvSpPr txBox="1"/>
+          <p:nvPr/>
+        </p:nvSpPr>
+        <p:spPr>
+          <a:xfrm>
+            <a:off x="7696047" y="2743200"/>
+            <a:ext cx="640080" cy="548640"/>
+          </a:xfrm>
+          <a:prstGeom prst="rect">
+            <a:avLst/>
+          </a:prstGeom>
+          <a:noFill/>
+        </p:spPr>
+        <p:txBody>
+          <a:bodyPr wrap="square" anchor="ctr">
+            <a:spAutoFit/>
+          </a:bodyPr>
+          <a:lstStyle/>
+          <a:p>
+            <a:pPr algn="ctr"/>
+            <a:r>
+              <a:rPr sz="1400" b="0">
+                <a:solidFill>
+                  <a:srgbClr val="D0603A"/>
+                </a:solidFill>
+                <a:latin typeface="JetBrains Mono"/>
+              </a:rPr>
+              <a:t>JSON →</a:t>
+            </a:r>
+          </a:p>
+        </p:txBody>
+      </p:sp>
+      <p:sp>
+        <p:nvSpPr>
+          <p:cNvPr id="15" name="Rectangle 14"/>
+          <p:cNvSpPr/>
+          <p:nvPr/>
+        </p:nvSpPr>
+        <p:spPr>
+          <a:xfrm>
+            <a:off x="8336127" y="1965960"/>
+            <a:ext cx="3200400" cy="2011680"/>
+          </a:xfrm>
+          <a:prstGeom prst="rect">
+            <a:avLst/>
+          </a:prstGeom>
+          <a:solidFill>
+            <a:srgbClr val="1F2124"/>
+          </a:solidFill>
+          <a:ln>
+            <a:noFill/>
+          </a:ln>
+          <a:effectLst/>
+        </p:spPr>
+        <p:style>
+          <a:lnRef idx="1">
+            <a:schemeClr val="accent1"/>
+          </a:lnRef>
+          <a:fillRef idx="3">
+            <a:schemeClr val="accent1"/>
+          </a:fillRef>
+          <a:effectRef idx="2">
+            <a:schemeClr val="accent1"/>
+          </a:effectRef>
+          <a:fontRef idx="minor">
+            <a:schemeClr val="lt1"/>
+          </a:fontRef>
+        </p:style>
+        <p:txBody>
+          <a:bodyPr rtlCol="0" anchor="ctr"/>
+          <a:lstStyle/>
+          <a:p>
+            <a:pPr algn="ctr"/>
+          </a:p>
+        </p:txBody>
+      </p:sp>
+      <p:sp>
+        <p:nvSpPr>
+          <p:cNvPr id="16" name="Rectangle 15"/>
+          <p:cNvSpPr/>
+          <p:nvPr/>
+        </p:nvSpPr>
+        <p:spPr>
+          <a:xfrm>
+            <a:off x="8336127" y="1965960"/>
+            <a:ext cx="45720" cy="2011680"/>
+          </a:xfrm>
+          <a:prstGeom prst="rect">
+            <a:avLst/>
+          </a:prstGeom>
+          <a:solidFill>
+            <a:srgbClr val="D0603A"/>
+          </a:solidFill>
+          <a:ln>
+            <a:noFill/>
+          </a:ln>
+          <a:effectLst/>
+        </p:spPr>
+        <p:style>
+          <a:lnRef idx="1">
+            <a:schemeClr val="accent1"/>
+          </a:lnRef>
+          <a:fillRef idx="3">
+            <a:schemeClr val="accent1"/>
+          </a:fillRef>
+          <a:effectRef idx="2">
+            <a:schemeClr val="accent1"/>
+          </a:effectRef>
+          <a:fontRef idx="minor">
+            <a:schemeClr val="lt1"/>
+          </a:fontRef>
+        </p:style>
+        <p:txBody>
+          <a:bodyPr rtlCol="0" anchor="ctr"/>
+          <a:lstStyle/>
+          <a:p>
+            <a:pPr algn="ctr"/>
+          </a:p>
+        </p:txBody>
+      </p:sp>
+      <p:sp>
+        <p:nvSpPr>
+          <p:cNvPr id="17" name="TextBox 16"/>
+          <p:cNvSpPr txBox="1"/>
+          <p:nvPr/>
+        </p:nvSpPr>
+        <p:spPr>
+          <a:xfrm>
+            <a:off x="8564727" y="2286000"/>
+            <a:ext cx="2743200" cy="548640"/>
+          </a:xfrm>
+          <a:prstGeom prst="rect">
+            <a:avLst/>
+          </a:prstGeom>
+          <a:noFill/>
+        </p:spPr>
+        <p:txBody>
+          <a:bodyPr wrap="square" anchor="t">
+            <a:spAutoFit/>
+          </a:bodyPr>
+          <a:lstStyle/>
+          <a:p>
+            <a:r>
+              <a:rPr sz="2000" b="1">
+                <a:solidFill>
+                  <a:srgbClr val="F4F1EC"/>
+                </a:solidFill>
+                <a:latin typeface="Tektur"/>
+              </a:rPr>
+              <a:t>ui</a:t>
+            </a:r>
+          </a:p>
+        </p:txBody>
+      </p:sp>
+      <p:sp>
+        <p:nvSpPr>
+          <p:cNvPr id="18" name="TextBox 17"/>
+          <p:cNvSpPr txBox="1"/>
+          <p:nvPr/>
+        </p:nvSpPr>
+        <p:spPr>
+          <a:xfrm>
+            <a:off x="8564727" y="2926080"/>
+            <a:ext cx="2743200" cy="822960"/>
+          </a:xfrm>
+          <a:prstGeom prst="rect">
+            <a:avLst/>
+          </a:prstGeom>
+          <a:noFill/>
+        </p:spPr>
+        <p:txBody>
+          <a:bodyPr wrap="square" anchor="t">
+            <a:spAutoFit/>
+          </a:bodyPr>
+          <a:lstStyle/>
+          <a:p>
+            <a:r>
+              <a:rPr sz="1400" b="0">
+                <a:solidFill>
+                  <a:srgbClr val="A8A29E"/>
+                </a:solidFill>
+                <a:latin typeface="Montserrat"/>
+              </a:rPr>
+              <a:t>окно PySide6</a:t>
+            </a:r>
+          </a:p>
+          <a:p>
+            <a:r>
+              <a:rPr sz="1400" b="0">
+                <a:solidFill>
+                  <a:srgbClr val="A8A29E"/>
+                </a:solidFill>
+                <a:latin typeface="Montserrat"/>
+              </a:rPr>
+              <a:t>исследование и просмотр</a:t>
+            </a:r>
+          </a:p>
+        </p:txBody>
+      </p:sp>
+      <p:sp>
+        <p:nvSpPr>
+          <p:cNvPr id="19" name="TextBox 18"/>
+          <p:cNvSpPr txBox="1"/>
+          <p:nvPr/>
+        </p:nvSpPr>
+        <p:spPr>
+          <a:xfrm>
+            <a:off x="822960" y="6035040"/>
+            <a:ext cx="10545775" cy="365760"/>
+          </a:xfrm>
+          <a:prstGeom prst="rect">
+            <a:avLst/>
+          </a:prstGeom>
+          <a:noFill/>
+        </p:spPr>
+        <p:txBody>
+          <a:bodyPr wrap="square" anchor="t">
+            <a:spAutoFit/>
+          </a:bodyPr>
+          <a:lstStyle/>
+          <a:p>
+            <a:r>
+              <a:rPr sz="1400" b="0">
+                <a:solidFill>
+                  <a:srgbClr val="A8A29E"/>
+                </a:solidFill>
+                <a:latin typeface="Montserrat"/>
+              </a:rPr>
+              <a:t>Контракты между модулями зафиксированы схемами JSON; порядок вызовов не важен</a:t>
+            </a:r>
+          </a:p>
+        </p:txBody>
+      </p:sp>
+      <p:sp>
+        <p:nvSpPr>
+          <p:cNvPr id="20" name="TextBox 19"/>
+          <p:cNvSpPr txBox="1"/>
+          <p:nvPr/>
+        </p:nvSpPr>
+        <p:spPr>
+          <a:xfrm>
+            <a:off x="822960" y="6446520"/>
+            <a:ext cx="3840480" cy="274320"/>
+          </a:xfrm>
+          <a:prstGeom prst="rect">
+            <a:avLst/>
+          </a:prstGeom>
+          <a:noFill/>
+        </p:spPr>
+        <p:txBody>
+          <a:bodyPr wrap="square" anchor="t">
+            <a:spAutoFit/>
+          </a:bodyPr>
+          <a:lstStyle/>
+          <a:p>
+            <a:r>
+              <a:rPr sz="1000" b="0">
+                <a:solidFill>
+                  <a:srgbClr val="A8A29E"/>
+                </a:solidFill>
+                <a:latin typeface="Montserrat"/>
+              </a:rPr>
+              <a:t>Команда HTTP 418 · кейс #02 · Мадригал</a:t>
+            </a:r>
+          </a:p>
+        </p:txBody>
+      </p:sp>
+      <p:sp>
+        <p:nvSpPr>
+          <p:cNvPr id="21" name="TextBox 20"/>
+          <p:cNvSpPr txBox="1"/>
+          <p:nvPr/>
+        </p:nvSpPr>
+        <p:spPr>
+          <a:xfrm>
+            <a:off x="4389120" y="6446520"/>
+            <a:ext cx="3383280" cy="274320"/>
+          </a:xfrm>
+          <a:prstGeom prst="rect">
+            <a:avLst/>
+          </a:prstGeom>
+          <a:noFill/>
+        </p:spPr>
+        <p:txBody>
+          <a:bodyPr wrap="square" anchor="t">
+            <a:spAutoFit/>
+          </a:bodyPr>
+          <a:lstStyle/>
+          <a:p>
+            <a:pPr algn="ctr"/>
+            <a:r>
+              <a:rPr sz="1000" b="0">
+                <a:solidFill>
+                  <a:srgbClr val="A8A29E"/>
+                </a:solidFill>
+                <a:latin typeface="Montserrat"/>
+              </a:rPr>
+              <a:t>Постановка и метод</a:t>
+            </a:r>
+          </a:p>
+        </p:txBody>
+      </p:sp>
+      <p:sp>
+        <p:nvSpPr>
+          <p:cNvPr id="22" name="TextBox 21"/>
+          <p:cNvSpPr txBox="1"/>
+          <p:nvPr/>
+        </p:nvSpPr>
+        <p:spPr>
+          <a:xfrm>
+            <a:off x="8138160" y="6446520"/>
+            <a:ext cx="3200400" cy="274320"/>
+          </a:xfrm>
+          <a:prstGeom prst="rect">
+            <a:avLst/>
+          </a:prstGeom>
+          <a:noFill/>
+        </p:spPr>
+        <p:txBody>
+          <a:bodyPr wrap="square" anchor="t">
+            <a:spAutoFit/>
+          </a:bodyPr>
+          <a:lstStyle/>
+          <a:p>
+            <a:pPr algn="r"/>
+            <a:r>
+              <a:rPr sz="1000" b="0">
+                <a:solidFill>
+                  <a:srgbClr val="A8A29E"/>
+                </a:solidFill>
+                <a:latin typeface="Montserrat"/>
+              </a:rPr>
+              <a:t>5 / 14</a:t>
+            </a:r>
+          </a:p>
+        </p:txBody>
+      </p:sp>
+    </p:spTree>
+  </p:cSld>
+  <p:clrMapOvr>
+    <a:masterClrMapping/>
+  </p:clrMapOvr>
+  <p:timing>
+    <p:tnLst>
+      <p:par>
+        <p:cTn id="1" dur="indefinite" restart="never" nodeType="tmRoot">
+          <p:childTnLst>
+            <p:seq concurrent="1" nextAc="seek">
+              <p:cTn id="2" dur="indefinite" nodeType="mainSeq">
+                <p:childTnLst>
+                  <p:par>
+                    <p:cTn id="3" presetID="10" presetClass="entr" presetSubtype="0" fill="hold" grpId="0" nodeType="clickEffect">
+                      <p:stCondLst>
+                        <p:cond delay="0"/>
+                      </p:stCondLst>
+                      <p:childTnLst>
+                        <p:set>
+                          <p:cBhvr>
+                            <p:cTn id="4" dur="1" fill="hold">
+                              <p:stCondLst>
+                                <p:cond delay="0"/>
+                              </p:stCondLst>
+                            </p:cTn>
+                            <p:tgtEl>
+                              <p:spTgt spid="6"/>
+                            </p:tgtEl>
+                            <p:attrNameLst>
+                              <p:attrName>style.visibility</p:attrName>
+                            </p:attrNameLst>
+                          </p:cBhvr>
+                          <p:to>
+                            <p:strVal val="visible"/>
+                          </p:to>
+                        </p:set>
+                        <p:anim calcmode="lin" valueType="num">
+                          <p:cBhvr additive="base">
+                            <p:cTn id="5" dur="300" fill="hold"/>
+                            <p:tgtEl>
+                              <p:spTgt spid="6"/>
+                            </p:tgtEl>
+                            <p:attrNameLst>
+                              <p:attrName>style.opacity</p:attrName>
+                            </p:attrNameLst>
+                          </p:cBhvr>
+                          <p:tavLst>
+                            <p:tav tm="0">
+                              <p:val>
+                                <p:fltVal val="0"/>
+                              </p:val>
+                            </p:tav>
+                            <p:tav tm="100000">
+                              <p:val>
+                                <p:fltVal val="1"/>
+                              </p:val>
+                            </p:tav>
+                          </p:tavLst>
+                        </p:anim>
+                      </p:childTnLst>
+                    </p:cTn>
+                  </p:par>
+                  <p:par>
+                    <p:cTn id="6" presetID="10" presetClass="entr" presetSubtype="0" fill="hold" grpId="0" nodeType="clickEffect">
+                      <p:stCondLst>
+                        <p:cond delay="0"/>
+                      </p:stCondLst>
+                      <p:childTnLst>
+                        <p:set>
+                          <p:cBhvr>
+                            <p:cTn id="7" dur="1" fill="hold">
+                              <p:stCondLst>
+                                <p:cond delay="0"/>
+                              </p:stCondLst>
+                            </p:cTn>
+                            <p:tgtEl>
+                              <p:spTgt spid="11"/>
+                            </p:tgtEl>
+                            <p:attrNameLst>
+                              <p:attrName>style.visibility</p:attrName>
+                            </p:attrNameLst>
+                          </p:cBhvr>
+                          <p:to>
+                            <p:strVal val="visible"/>
+                          </p:to>
+                        </p:set>
+                        <p:anim calcmode="lin" valueType="num">
+                          <p:cBhvr additive="base">
+                            <p:cTn id="8" dur="300" fill="hold"/>
+                            <p:tgtEl>
+                              <p:spTgt spid="11"/>
+                            </p:tgtEl>
+                            <p:attrNameLst>
+                              <p:attrName>style.opacity</p:attrName>
+                            </p:attrNameLst>
+                          </p:cBhvr>
+                          <p:tavLst>
+                            <p:tav tm="0">
+                              <p:val>
+                                <p:fltVal val="0"/>
+                              </p:val>
+                            </p:tav>
+                            <p:tav tm="100000">
+                              <p:val>
+                                <p:fltVal val="1"/>
+                              </p:val>
+                            </p:tav>
+                          </p:tavLst>
+                        </p:anim>
+                      </p:childTnLst>
+                    </p:cTn>
+                  </p:par>
+                  <p:par>
+                    <p:cTn id="9" presetID="10" presetClass="entr" presetSubtype="0" fill="hold" grpId="0" nodeType="clickEffect">
+                      <p:stCondLst>
+                        <p:cond delay="0"/>
+                      </p:stCondLst>
+                      <p:childTnLst>
+                        <p:set>
+                          <p:cBhvr>
+                            <p:cTn id="10" dur="1" fill="hold">
+                              <p:stCondLst>
+                                <p:cond delay="0"/>
+                              </p:stCondLst>
+                            </p:cTn>
+                            <p:tgtEl>
+                              <p:spTgt spid="16"/>
+                            </p:tgtEl>
+                            <p:attrNameLst>
+                              <p:attrName>style.visibility</p:attrName>
+                            </p:attrNameLst>
+                          </p:cBhvr>
+                          <p:to>
+                            <p:strVal val="visible"/>
+                          </p:to>
+                        </p:set>
+                        <p:anim calcmode="lin" valueType="num">
+                          <p:cBhvr additive="base">
+                            <p:cTn id="11" dur="300" fill="hold"/>
+                            <p:tgtEl>
+                              <p:spTgt spid="16"/>
+                            </p:tgtEl>
+                            <p:attrNameLst>
+                              <p:attrName>style.opacity</p:attrName>
+                            </p:attrNameLst>
+                          </p:cBhvr>
+                          <p:tavLst>
+                            <p:tav tm="0">
+                              <p:val>
+                                <p:fltVal val="0"/>
+                              </p:val>
+                            </p:tav>
+                            <p:tav tm="100000">
+                              <p:val>
+                                <p:fltVal val="1"/>
+                              </p:val>
+                            </p:tav>
+                          </p:tavLst>
+                        </p:anim>
+                      </p:childTnLst>
+                    </p:cTn>
+                  </p:par>
+                </p:childTnLst>
+              </p:cTn>
+            </p:seq>
+          </p:childTnLst>
+        </p:cTn>
+      </p:par>
+    </p:tnLst>
+  </p:timing>
+  <p:transition spd="med" fade="1"/>
+</p:sld>
+</file>
+
+<file path=ppt/slides/slide6.xml><?xml version="1.0" encoding="utf-8"?>
+<p:sld xmlns:a="http://schemas.openxmlformats.org/drawingml/2006/main" xmlns:p="http://schemas.openxmlformats.org/presentationml/2006/main" xmlns:r="http://schemas.openxmlformats.org/officeDocument/2006/relationships">
+  <p:cSld>
+    <p:spTree>
+      <p:nvGrpSpPr>
+        <p:cNvPr id="1" name=""/>
+        <p:cNvGrpSpPr/>
+        <p:nvPr/>
+      </p:nvGrpSpPr>
+      <p:grpSpPr/>
+      <p:sp>
+        <p:nvSpPr>
+          <p:cNvPr id="2" name="Rectangle 1"/>
+          <p:cNvSpPr/>
+          <p:nvPr/>
+        </p:nvSpPr>
+        <p:spPr>
+          <a:xfrm>
+            <a:off x="0" y="0"/>
+            <a:ext cx="12191695" cy="6858000"/>
+          </a:xfrm>
+          <a:prstGeom prst="rect">
+            <a:avLst/>
+          </a:prstGeom>
+          <a:solidFill>
+            <a:srgbClr val="0E1011"/>
+          </a:solidFill>
+          <a:ln>
+            <a:noFill/>
+          </a:ln>
+          <a:effectLst/>
+        </p:spPr>
+        <p:style>
+          <a:lnRef idx="1">
+            <a:schemeClr val="accent1"/>
+          </a:lnRef>
+          <a:fillRef idx="3">
+            <a:schemeClr val="accent1"/>
+          </a:fillRef>
+          <a:effectRef idx="2">
+            <a:schemeClr val="accent1"/>
+          </a:effectRef>
+          <a:fontRef idx="minor">
+            <a:schemeClr val="lt1"/>
+          </a:fontRef>
+        </p:style>
+        <p:txBody>
+          <a:bodyPr rtlCol="0" anchor="ctr"/>
+          <a:lstStyle/>
+          <a:p>
+            <a:pPr algn="ctr"/>
+          </a:p>
+        </p:txBody>
+      </p:sp>
+      <p:sp>
+        <p:nvSpPr>
+          <p:cNvPr id="3" name="Rectangle 2"/>
+          <p:cNvSpPr/>
+          <p:nvPr/>
+        </p:nvSpPr>
+        <p:spPr>
+          <a:xfrm>
+            <a:off x="0" y="0"/>
+            <a:ext cx="73152" cy="6858000"/>
+          </a:xfrm>
+          <a:prstGeom prst="rect">
+            <a:avLst/>
+          </a:prstGeom>
+          <a:ln>
+            <a:noFill/>
+          </a:ln>
+          <a:effectLst/>
+          <a:gradFill rotWithShape="1">
+            <a:gsLst>
+              <a:gs pos="0">
+                <a:srgbClr val="410913"/>
+              </a:gs>
+              <a:gs pos="50000">
+                <a:srgbClr val="610D1C"/>
+              </a:gs>
+              <a:gs pos="100000">
+                <a:srgbClr val="A2391D"/>
+              </a:gs>
+            </a:gsLst>
+            <a:lin ang="2700000"/>
+          </a:gradFill>
+        </p:spPr>
+        <p:style>
+          <a:lnRef idx="1">
+            <a:schemeClr val="accent1"/>
+          </a:lnRef>
+          <a:fillRef idx="3">
+            <a:schemeClr val="accent1"/>
+          </a:fillRef>
+          <a:effectRef idx="2">
+            <a:schemeClr val="accent1"/>
+          </a:effectRef>
+          <a:fontRef idx="minor">
+            <a:schemeClr val="lt1"/>
+          </a:fontRef>
+        </p:style>
+        <p:txBody>
+          <a:bodyPr rtlCol="0" anchor="ctr"/>
+          <a:lstStyle/>
+          <a:p>
+            <a:pPr algn="ctr"/>
+          </a:p>
+        </p:txBody>
+      </p:sp>
+      <p:sp>
+        <p:nvSpPr>
+          <p:cNvPr id="4" name="TextBox 3"/>
+          <p:cNvSpPr txBox="1"/>
+          <p:nvPr/>
+        </p:nvSpPr>
+        <p:spPr>
+          <a:xfrm>
+            <a:off x="822960" y="457200"/>
             <a:ext cx="10545775" cy="731520"/>
           </a:xfrm>
           <a:prstGeom prst="rect">
@@ -12992,7 +10732,7 @@
                 </a:solidFill>
                 <a:latin typeface="Montserrat"/>
               </a:rPr>
-              <a:t>7 / 19</a:t>
+              <a:t>6 / 14</a:t>
             </a:r>
           </a:p>
         </p:txBody>
@@ -13072,7 +10812,7 @@
 </p:sld>
 </file>
 
-<file path=ppt/slides/slide8.xml><?xml version="1.0" encoding="utf-8"?>
+<file path=ppt/slides/slide7.xml><?xml version="1.0" encoding="utf-8"?>
 <p:sld xmlns:a="http://schemas.openxmlformats.org/drawingml/2006/main" xmlns:p="http://schemas.openxmlformats.org/presentationml/2006/main" xmlns:r="http://schemas.openxmlformats.org/officeDocument/2006/relationships">
   <p:cSld>
     <p:spTree>
@@ -13362,7 +11102,7 @@
                 </a:solidFill>
                 <a:latin typeface="Montserrat"/>
               </a:rPr>
-              <a:t>8 / 19</a:t>
+              <a:t>7 / 14</a:t>
             </a:r>
           </a:p>
         </p:txBody>
@@ -13376,7 +11116,7 @@
 </p:sld>
 </file>
 
-<file path=ppt/slides/slide9.xml><?xml version="1.0" encoding="utf-8"?>
+<file path=ppt/slides/slide8.xml><?xml version="1.0" encoding="utf-8"?>
 <p:sld xmlns:a="http://schemas.openxmlformats.org/drawingml/2006/main" xmlns:p="http://schemas.openxmlformats.org/presentationml/2006/main" xmlns:r="http://schemas.openxmlformats.org/officeDocument/2006/relationships">
   <p:cSld>
     <p:spTree>
@@ -13909,7 +11649,7 @@
                 </a:solidFill>
                 <a:latin typeface="Montserrat"/>
               </a:rPr>
-              <a:t>Постановка и метод</a:t>
+              <a:t>Результаты</a:t>
             </a:r>
           </a:p>
         </p:txBody>
@@ -13944,7 +11684,7 @@
                 </a:solidFill>
                 <a:latin typeface="Montserrat"/>
               </a:rPr>
-              <a:t>9 / 19</a:t>
+              <a:t>8 / 14</a:t>
             </a:r>
           </a:p>
         </p:txBody>
@@ -14091,6 +11831,760 @@
                             <p:cTn id="11" dur="300" fill="hold"/>
                             <p:tgtEl>
                               <p:spTgt spid="10"/>
+                            </p:tgtEl>
+                            <p:attrNameLst>
+                              <p:attrName>style.opacity</p:attrName>
+                            </p:attrNameLst>
+                          </p:cBhvr>
+                          <p:tavLst>
+                            <p:tav tm="0">
+                              <p:val>
+                                <p:fltVal val="0"/>
+                              </p:val>
+                            </p:tav>
+                            <p:tav tm="100000">
+                              <p:val>
+                                <p:fltVal val="1"/>
+                              </p:val>
+                            </p:tav>
+                          </p:tavLst>
+                        </p:anim>
+                      </p:childTnLst>
+                    </p:cTn>
+                  </p:par>
+                </p:childTnLst>
+              </p:cTn>
+            </p:seq>
+          </p:childTnLst>
+        </p:cTn>
+      </p:par>
+    </p:tnLst>
+  </p:timing>
+  <p:transition spd="med" fade="1"/>
+</p:sld>
+</file>
+
+<file path=ppt/slides/slide9.xml><?xml version="1.0" encoding="utf-8"?>
+<p:sld xmlns:a="http://schemas.openxmlformats.org/drawingml/2006/main" xmlns:p="http://schemas.openxmlformats.org/presentationml/2006/main" xmlns:r="http://schemas.openxmlformats.org/officeDocument/2006/relationships">
+  <p:cSld>
+    <p:spTree>
+      <p:nvGrpSpPr>
+        <p:cNvPr id="1" name=""/>
+        <p:cNvGrpSpPr/>
+        <p:nvPr/>
+      </p:nvGrpSpPr>
+      <p:grpSpPr/>
+      <p:sp>
+        <p:nvSpPr>
+          <p:cNvPr id="2" name="Rectangle 1"/>
+          <p:cNvSpPr/>
+          <p:nvPr/>
+        </p:nvSpPr>
+        <p:spPr>
+          <a:xfrm>
+            <a:off x="0" y="0"/>
+            <a:ext cx="12191695" cy="6858000"/>
+          </a:xfrm>
+          <a:prstGeom prst="rect">
+            <a:avLst/>
+          </a:prstGeom>
+          <a:solidFill>
+            <a:srgbClr val="0E1011"/>
+          </a:solidFill>
+          <a:ln>
+            <a:noFill/>
+          </a:ln>
+          <a:effectLst/>
+        </p:spPr>
+        <p:style>
+          <a:lnRef idx="1">
+            <a:schemeClr val="accent1"/>
+          </a:lnRef>
+          <a:fillRef idx="3">
+            <a:schemeClr val="accent1"/>
+          </a:fillRef>
+          <a:effectRef idx="2">
+            <a:schemeClr val="accent1"/>
+          </a:effectRef>
+          <a:fontRef idx="minor">
+            <a:schemeClr val="lt1"/>
+          </a:fontRef>
+        </p:style>
+        <p:txBody>
+          <a:bodyPr rtlCol="0" anchor="ctr"/>
+          <a:lstStyle/>
+          <a:p>
+            <a:pPr algn="ctr"/>
+          </a:p>
+        </p:txBody>
+      </p:sp>
+      <p:sp>
+        <p:nvSpPr>
+          <p:cNvPr id="3" name="Rectangle 2"/>
+          <p:cNvSpPr/>
+          <p:nvPr/>
+        </p:nvSpPr>
+        <p:spPr>
+          <a:xfrm>
+            <a:off x="0" y="0"/>
+            <a:ext cx="73152" cy="6858000"/>
+          </a:xfrm>
+          <a:prstGeom prst="rect">
+            <a:avLst/>
+          </a:prstGeom>
+          <a:ln>
+            <a:noFill/>
+          </a:ln>
+          <a:effectLst/>
+          <a:gradFill rotWithShape="1">
+            <a:gsLst>
+              <a:gs pos="0">
+                <a:srgbClr val="410913"/>
+              </a:gs>
+              <a:gs pos="50000">
+                <a:srgbClr val="610D1C"/>
+              </a:gs>
+              <a:gs pos="100000">
+                <a:srgbClr val="A2391D"/>
+              </a:gs>
+            </a:gsLst>
+            <a:lin ang="2700000"/>
+          </a:gradFill>
+        </p:spPr>
+        <p:style>
+          <a:lnRef idx="1">
+            <a:schemeClr val="accent1"/>
+          </a:lnRef>
+          <a:fillRef idx="3">
+            <a:schemeClr val="accent1"/>
+          </a:fillRef>
+          <a:effectRef idx="2">
+            <a:schemeClr val="accent1"/>
+          </a:effectRef>
+          <a:fontRef idx="minor">
+            <a:schemeClr val="lt1"/>
+          </a:fontRef>
+        </p:style>
+        <p:txBody>
+          <a:bodyPr rtlCol="0" anchor="ctr"/>
+          <a:lstStyle/>
+          <a:p>
+            <a:pPr algn="ctr"/>
+          </a:p>
+        </p:txBody>
+      </p:sp>
+      <p:sp>
+        <p:nvSpPr>
+          <p:cNvPr id="4" name="TextBox 3"/>
+          <p:cNvSpPr txBox="1"/>
+          <p:nvPr/>
+        </p:nvSpPr>
+        <p:spPr>
+          <a:xfrm>
+            <a:off x="822960" y="1188720"/>
+            <a:ext cx="10545775" cy="822960"/>
+          </a:xfrm>
+          <a:prstGeom prst="rect">
+            <a:avLst/>
+          </a:prstGeom>
+          <a:noFill/>
+        </p:spPr>
+        <p:txBody>
+          <a:bodyPr wrap="square" anchor="t">
+            <a:spAutoFit/>
+          </a:bodyPr>
+          <a:lstStyle/>
+          <a:p>
+            <a:r>
+              <a:rPr sz="3000" b="1">
+                <a:solidFill>
+                  <a:srgbClr val="F4F1EC"/>
+                </a:solidFill>
+                <a:latin typeface="Tektur"/>
+              </a:rPr>
+              <a:t>Что получилось: 60 из 140 → 140 из 140</a:t>
+            </a:r>
+          </a:p>
+        </p:txBody>
+      </p:sp>
+      <p:sp>
+        <p:nvSpPr>
+          <p:cNvPr id="5" name="TextBox 4"/>
+          <p:cNvSpPr txBox="1"/>
+          <p:nvPr/>
+        </p:nvSpPr>
+        <p:spPr>
+          <a:xfrm>
+            <a:off x="822960" y="1965960"/>
+            <a:ext cx="10545775" cy="457200"/>
+          </a:xfrm>
+          <a:prstGeom prst="rect">
+            <a:avLst/>
+          </a:prstGeom>
+          <a:noFill/>
+        </p:spPr>
+        <p:txBody>
+          <a:bodyPr wrap="square" anchor="t">
+            <a:spAutoFit/>
+          </a:bodyPr>
+          <a:lstStyle/>
+          <a:p>
+            <a:r>
+              <a:rPr sz="1400" b="0">
+                <a:solidFill>
+                  <a:srgbClr val="A8A29E"/>
+                </a:solidFill>
+                <a:latin typeface="Montserrat"/>
+              </a:rPr>
+              <a:t>На корпусе уточнения. Отдельно проверено на реальном датасете: 45 + 45, precision 1.00</a:t>
+            </a:r>
+          </a:p>
+        </p:txBody>
+      </p:sp>
+      <p:sp>
+        <p:nvSpPr>
+          <p:cNvPr id="6" name="TextBox 5"/>
+          <p:cNvSpPr txBox="1"/>
+          <p:nvPr/>
+        </p:nvSpPr>
+        <p:spPr>
+          <a:xfrm>
+            <a:off x="822960" y="5394960"/>
+            <a:ext cx="10545775" cy="548640"/>
+          </a:xfrm>
+          <a:prstGeom prst="rect">
+            <a:avLst/>
+          </a:prstGeom>
+          <a:noFill/>
+        </p:spPr>
+        <p:txBody>
+          <a:bodyPr wrap="square" anchor="t">
+            <a:spAutoFit/>
+          </a:bodyPr>
+          <a:lstStyle/>
+          <a:p>
+            <a:r>
+              <a:rPr sz="1600" b="0">
+                <a:solidFill>
+                  <a:srgbClr val="F4F1EC"/>
+                </a:solidFill>
+                <a:latin typeface="Montserrat"/>
+              </a:rPr>
+              <a:t>Было 60 matched из 140 и 80 контрпримеров. Стало 140 matched из 140 и ноль контрпримеров</a:t>
+            </a:r>
+          </a:p>
+        </p:txBody>
+      </p:sp>
+      <p:sp>
+        <p:nvSpPr>
+          <p:cNvPr id="7" name="TextBox 6"/>
+          <p:cNvSpPr txBox="1"/>
+          <p:nvPr/>
+        </p:nvSpPr>
+        <p:spPr>
+          <a:xfrm>
+            <a:off x="822960" y="2788920"/>
+            <a:ext cx="914400" cy="640080"/>
+          </a:xfrm>
+          <a:prstGeom prst="rect">
+            <a:avLst/>
+          </a:prstGeom>
+          <a:noFill/>
+        </p:spPr>
+        <p:txBody>
+          <a:bodyPr wrap="square" anchor="ctr">
+            <a:spAutoFit/>
+          </a:bodyPr>
+          <a:lstStyle/>
+          <a:p>
+            <a:r>
+              <a:rPr sz="2200" b="0">
+                <a:solidFill>
+                  <a:srgbClr val="A8A29E"/>
+                </a:solidFill>
+                <a:latin typeface="JetBrains Mono"/>
+              </a:rPr>
+              <a:t>v1</a:t>
+            </a:r>
+          </a:p>
+        </p:txBody>
+      </p:sp>
+      <p:sp>
+        <p:nvSpPr>
+          <p:cNvPr id="8" name="Rectangle 7"/>
+          <p:cNvSpPr/>
+          <p:nvPr/>
+        </p:nvSpPr>
+        <p:spPr>
+          <a:xfrm>
+            <a:off x="1828800" y="2834640"/>
+            <a:ext cx="7436815" cy="548640"/>
+          </a:xfrm>
+          <a:prstGeom prst="rect">
+            <a:avLst/>
+          </a:prstGeom>
+          <a:solidFill>
+            <a:srgbClr val="26282B"/>
+          </a:solidFill>
+          <a:ln>
+            <a:noFill/>
+          </a:ln>
+          <a:effectLst/>
+        </p:spPr>
+        <p:style>
+          <a:lnRef idx="1">
+            <a:schemeClr val="accent1"/>
+          </a:lnRef>
+          <a:fillRef idx="3">
+            <a:schemeClr val="accent1"/>
+          </a:fillRef>
+          <a:effectRef idx="2">
+            <a:schemeClr val="accent1"/>
+          </a:effectRef>
+          <a:fontRef idx="minor">
+            <a:schemeClr val="lt1"/>
+          </a:fontRef>
+        </p:style>
+        <p:txBody>
+          <a:bodyPr rtlCol="0" anchor="ctr"/>
+          <a:lstStyle/>
+          <a:p>
+            <a:pPr algn="ctr"/>
+          </a:p>
+        </p:txBody>
+      </p:sp>
+      <p:sp>
+        <p:nvSpPr>
+          <p:cNvPr id="9" name="Rectangle 8"/>
+          <p:cNvSpPr/>
+          <p:nvPr/>
+        </p:nvSpPr>
+        <p:spPr>
+          <a:xfrm>
+            <a:off x="1828800" y="2834640"/>
+            <a:ext cx="3197830" cy="548640"/>
+          </a:xfrm>
+          <a:prstGeom prst="rect">
+            <a:avLst/>
+          </a:prstGeom>
+          <a:solidFill>
+            <a:srgbClr val="DC2626"/>
+          </a:solidFill>
+          <a:ln>
+            <a:noFill/>
+          </a:ln>
+          <a:effectLst/>
+        </p:spPr>
+        <p:style>
+          <a:lnRef idx="1">
+            <a:schemeClr val="accent1"/>
+          </a:lnRef>
+          <a:fillRef idx="3">
+            <a:schemeClr val="accent1"/>
+          </a:fillRef>
+          <a:effectRef idx="2">
+            <a:schemeClr val="accent1"/>
+          </a:effectRef>
+          <a:fontRef idx="minor">
+            <a:schemeClr val="lt1"/>
+          </a:fontRef>
+        </p:style>
+        <p:txBody>
+          <a:bodyPr rtlCol="0" anchor="ctr"/>
+          <a:lstStyle/>
+          <a:p>
+            <a:pPr algn="ctr"/>
+          </a:p>
+        </p:txBody>
+      </p:sp>
+      <p:sp>
+        <p:nvSpPr>
+          <p:cNvPr id="10" name="TextBox 9"/>
+          <p:cNvSpPr txBox="1"/>
+          <p:nvPr/>
+        </p:nvSpPr>
+        <p:spPr>
+          <a:xfrm>
+            <a:off x="9357055" y="2788920"/>
+            <a:ext cx="2011680" cy="640080"/>
+          </a:xfrm>
+          <a:prstGeom prst="rect">
+            <a:avLst/>
+          </a:prstGeom>
+          <a:noFill/>
+        </p:spPr>
+        <p:txBody>
+          <a:bodyPr wrap="square" anchor="ctr">
+            <a:spAutoFit/>
+          </a:bodyPr>
+          <a:lstStyle/>
+          <a:p>
+            <a:pPr algn="r"/>
+            <a:r>
+              <a:rPr sz="4000" b="1">
+                <a:solidFill>
+                  <a:srgbClr val="F4F1EC"/>
+                </a:solidFill>
+                <a:latin typeface="Tektur"/>
+              </a:rPr>
+              <a:t>0.43</a:t>
+            </a:r>
+          </a:p>
+        </p:txBody>
+      </p:sp>
+      <p:sp>
+        <p:nvSpPr>
+          <p:cNvPr id="11" name="TextBox 10"/>
+          <p:cNvSpPr txBox="1"/>
+          <p:nvPr/>
+        </p:nvSpPr>
+        <p:spPr>
+          <a:xfrm>
+            <a:off x="822960" y="3977640"/>
+            <a:ext cx="914400" cy="640080"/>
+          </a:xfrm>
+          <a:prstGeom prst="rect">
+            <a:avLst/>
+          </a:prstGeom>
+          <a:noFill/>
+        </p:spPr>
+        <p:txBody>
+          <a:bodyPr wrap="square" anchor="ctr">
+            <a:spAutoFit/>
+          </a:bodyPr>
+          <a:lstStyle/>
+          <a:p>
+            <a:r>
+              <a:rPr sz="2200" b="0">
+                <a:solidFill>
+                  <a:srgbClr val="A8A29E"/>
+                </a:solidFill>
+                <a:latin typeface="JetBrains Mono"/>
+              </a:rPr>
+              <a:t>v2</a:t>
+            </a:r>
+          </a:p>
+        </p:txBody>
+      </p:sp>
+      <p:sp>
+        <p:nvSpPr>
+          <p:cNvPr id="12" name="Rectangle 11"/>
+          <p:cNvSpPr/>
+          <p:nvPr/>
+        </p:nvSpPr>
+        <p:spPr>
+          <a:xfrm>
+            <a:off x="1828800" y="4023360"/>
+            <a:ext cx="7436815" cy="548640"/>
+          </a:xfrm>
+          <a:prstGeom prst="rect">
+            <a:avLst/>
+          </a:prstGeom>
+          <a:solidFill>
+            <a:srgbClr val="26282B"/>
+          </a:solidFill>
+          <a:ln>
+            <a:noFill/>
+          </a:ln>
+          <a:effectLst/>
+        </p:spPr>
+        <p:style>
+          <a:lnRef idx="1">
+            <a:schemeClr val="accent1"/>
+          </a:lnRef>
+          <a:fillRef idx="3">
+            <a:schemeClr val="accent1"/>
+          </a:fillRef>
+          <a:effectRef idx="2">
+            <a:schemeClr val="accent1"/>
+          </a:effectRef>
+          <a:fontRef idx="minor">
+            <a:schemeClr val="lt1"/>
+          </a:fontRef>
+        </p:style>
+        <p:txBody>
+          <a:bodyPr rtlCol="0" anchor="ctr"/>
+          <a:lstStyle/>
+          <a:p>
+            <a:pPr algn="ctr"/>
+          </a:p>
+        </p:txBody>
+      </p:sp>
+      <p:sp>
+        <p:nvSpPr>
+          <p:cNvPr id="13" name="Rectangle 12"/>
+          <p:cNvSpPr/>
+          <p:nvPr/>
+        </p:nvSpPr>
+        <p:spPr>
+          <a:xfrm>
+            <a:off x="1828800" y="4023360"/>
+            <a:ext cx="7436815" cy="548640"/>
+          </a:xfrm>
+          <a:prstGeom prst="rect">
+            <a:avLst/>
+          </a:prstGeom>
+          <a:solidFill>
+            <a:srgbClr val="16A34A"/>
+          </a:solidFill>
+          <a:ln>
+            <a:noFill/>
+          </a:ln>
+          <a:effectLst/>
+        </p:spPr>
+        <p:style>
+          <a:lnRef idx="1">
+            <a:schemeClr val="accent1"/>
+          </a:lnRef>
+          <a:fillRef idx="3">
+            <a:schemeClr val="accent1"/>
+          </a:fillRef>
+          <a:effectRef idx="2">
+            <a:schemeClr val="accent1"/>
+          </a:effectRef>
+          <a:fontRef idx="minor">
+            <a:schemeClr val="lt1"/>
+          </a:fontRef>
+        </p:style>
+        <p:txBody>
+          <a:bodyPr rtlCol="0" anchor="ctr"/>
+          <a:lstStyle/>
+          <a:p>
+            <a:pPr algn="ctr"/>
+          </a:p>
+        </p:txBody>
+      </p:sp>
+      <p:sp>
+        <p:nvSpPr>
+          <p:cNvPr id="14" name="TextBox 13"/>
+          <p:cNvSpPr txBox="1"/>
+          <p:nvPr/>
+        </p:nvSpPr>
+        <p:spPr>
+          <a:xfrm>
+            <a:off x="9357055" y="3977640"/>
+            <a:ext cx="2011680" cy="640080"/>
+          </a:xfrm>
+          <a:prstGeom prst="rect">
+            <a:avLst/>
+          </a:prstGeom>
+          <a:noFill/>
+        </p:spPr>
+        <p:txBody>
+          <a:bodyPr wrap="square" anchor="ctr">
+            <a:spAutoFit/>
+          </a:bodyPr>
+          <a:lstStyle/>
+          <a:p>
+            <a:pPr algn="r"/>
+            <a:r>
+              <a:rPr sz="4000" b="1">
+                <a:solidFill>
+                  <a:srgbClr val="F4F1EC"/>
+                </a:solidFill>
+                <a:latin typeface="Tektur"/>
+              </a:rPr>
+              <a:t>1.00</a:t>
+            </a:r>
+          </a:p>
+        </p:txBody>
+      </p:sp>
+      <p:sp>
+        <p:nvSpPr>
+          <p:cNvPr id="15" name="TextBox 14"/>
+          <p:cNvSpPr txBox="1"/>
+          <p:nvPr/>
+        </p:nvSpPr>
+        <p:spPr>
+          <a:xfrm>
+            <a:off x="822960" y="6446520"/>
+            <a:ext cx="3840480" cy="274320"/>
+          </a:xfrm>
+          <a:prstGeom prst="rect">
+            <a:avLst/>
+          </a:prstGeom>
+          <a:noFill/>
+        </p:spPr>
+        <p:txBody>
+          <a:bodyPr wrap="square" anchor="t">
+            <a:spAutoFit/>
+          </a:bodyPr>
+          <a:lstStyle/>
+          <a:p>
+            <a:r>
+              <a:rPr sz="1000" b="0">
+                <a:solidFill>
+                  <a:srgbClr val="A8A29E"/>
+                </a:solidFill>
+                <a:latin typeface="Montserrat"/>
+              </a:rPr>
+              <a:t>Команда HTTP 418 · кейс #02 · Мадригал</a:t>
+            </a:r>
+          </a:p>
+        </p:txBody>
+      </p:sp>
+      <p:sp>
+        <p:nvSpPr>
+          <p:cNvPr id="16" name="TextBox 15"/>
+          <p:cNvSpPr txBox="1"/>
+          <p:nvPr/>
+        </p:nvSpPr>
+        <p:spPr>
+          <a:xfrm>
+            <a:off x="4389120" y="6446520"/>
+            <a:ext cx="3383280" cy="274320"/>
+          </a:xfrm>
+          <a:prstGeom prst="rect">
+            <a:avLst/>
+          </a:prstGeom>
+          <a:noFill/>
+        </p:spPr>
+        <p:txBody>
+          <a:bodyPr wrap="square" anchor="t">
+            <a:spAutoFit/>
+          </a:bodyPr>
+          <a:lstStyle/>
+          <a:p>
+            <a:pPr algn="ctr"/>
+            <a:r>
+              <a:rPr sz="1000" b="0">
+                <a:solidFill>
+                  <a:srgbClr val="A8A29E"/>
+                </a:solidFill>
+                <a:latin typeface="Montserrat"/>
+              </a:rPr>
+              <a:t>Результаты</a:t>
+            </a:r>
+          </a:p>
+        </p:txBody>
+      </p:sp>
+      <p:sp>
+        <p:nvSpPr>
+          <p:cNvPr id="17" name="TextBox 16"/>
+          <p:cNvSpPr txBox="1"/>
+          <p:nvPr/>
+        </p:nvSpPr>
+        <p:spPr>
+          <a:xfrm>
+            <a:off x="8138160" y="6446520"/>
+            <a:ext cx="3200400" cy="274320"/>
+          </a:xfrm>
+          <a:prstGeom prst="rect">
+            <a:avLst/>
+          </a:prstGeom>
+          <a:noFill/>
+        </p:spPr>
+        <p:txBody>
+          <a:bodyPr wrap="square" anchor="t">
+            <a:spAutoFit/>
+          </a:bodyPr>
+          <a:lstStyle/>
+          <a:p>
+            <a:pPr algn="r"/>
+            <a:r>
+              <a:rPr sz="1000" b="0">
+                <a:solidFill>
+                  <a:srgbClr val="A8A29E"/>
+                </a:solidFill>
+                <a:latin typeface="Montserrat"/>
+              </a:rPr>
+              <a:t>9 / 14</a:t>
+            </a:r>
+          </a:p>
+        </p:txBody>
+      </p:sp>
+    </p:spTree>
+  </p:cSld>
+  <p:clrMapOvr>
+    <a:masterClrMapping/>
+  </p:clrMapOvr>
+  <p:timing>
+    <p:tnLst>
+      <p:par>
+        <p:cTn id="1" dur="indefinite" restart="never" nodeType="tmRoot">
+          <p:childTnLst>
+            <p:seq concurrent="1" nextAc="seek">
+              <p:cTn id="2" dur="indefinite" nodeType="mainSeq">
+                <p:childTnLst>
+                  <p:par>
+                    <p:cTn id="3" presetID="10" presetClass="entr" presetSubtype="0" fill="hold" grpId="0" nodeType="clickEffect">
+                      <p:stCondLst>
+                        <p:cond delay="0"/>
+                      </p:stCondLst>
+                      <p:childTnLst>
+                        <p:set>
+                          <p:cBhvr>
+                            <p:cTn id="4" dur="1" fill="hold">
+                              <p:stCondLst>
+                                <p:cond delay="0"/>
+                              </p:stCondLst>
+                            </p:cTn>
+                            <p:tgtEl>
+                              <p:spTgt spid="9"/>
+                            </p:tgtEl>
+                            <p:attrNameLst>
+                              <p:attrName>style.visibility</p:attrName>
+                            </p:attrNameLst>
+                          </p:cBhvr>
+                          <p:to>
+                            <p:strVal val="visible"/>
+                          </p:to>
+                        </p:set>
+                        <p:anim calcmode="lin" valueType="num">
+                          <p:cBhvr additive="base">
+                            <p:cTn id="5" dur="300" fill="hold"/>
+                            <p:tgtEl>
+                              <p:spTgt spid="9"/>
+                            </p:tgtEl>
+                            <p:attrNameLst>
+                              <p:attrName>style.opacity</p:attrName>
+                            </p:attrNameLst>
+                          </p:cBhvr>
+                          <p:tavLst>
+                            <p:tav tm="0">
+                              <p:val>
+                                <p:fltVal val="0"/>
+                              </p:val>
+                            </p:tav>
+                            <p:tav tm="100000">
+                              <p:val>
+                                <p:fltVal val="1"/>
+                              </p:val>
+                            </p:tav>
+                          </p:tavLst>
+                        </p:anim>
+                      </p:childTnLst>
+                    </p:cTn>
+                  </p:par>
+                  <p:par>
+                    <p:cTn id="6" presetID="10" presetClass="entr" presetSubtype="0" fill="hold" grpId="0" nodeType="clickEffect">
+                      <p:stCondLst>
+                        <p:cond delay="0"/>
+                      </p:stCondLst>
+                      <p:childTnLst>
+                        <p:set>
+                          <p:cBhvr>
+                            <p:cTn id="7" dur="1" fill="hold">
+                              <p:stCondLst>
+                                <p:cond delay="0"/>
+                              </p:stCondLst>
+                            </p:cTn>
+                            <p:tgtEl>
+                              <p:spTgt spid="13"/>
+                            </p:tgtEl>
+                            <p:attrNameLst>
+                              <p:attrName>style.visibility</p:attrName>
+                            </p:attrNameLst>
+                          </p:cBhvr>
+                          <p:to>
+                            <p:strVal val="visible"/>
+                          </p:to>
+                        </p:set>
+                        <p:anim calcmode="lin" valueType="num">
+                          <p:cBhvr additive="base">
+                            <p:cTn id="8" dur="300" fill="hold"/>
+                            <p:tgtEl>
+                              <p:spTgt spid="13"/>
                             </p:tgtEl>
                             <p:attrNameLst>
                               <p:attrName>style.opacity</p:attrName>

--- a/presentation/slides.pptx
+++ b/presentation/slides.pptx
@@ -3939,53 +3939,9 @@
           </a:p>
         </p:txBody>
       </p:sp>
-      <p:sp>
-        <p:nvSpPr>
-          <p:cNvPr id="7" name="Rectangle 6"/>
-          <p:cNvSpPr/>
-          <p:nvPr/>
-        </p:nvSpPr>
-        <p:spPr>
-          <a:xfrm>
-            <a:off x="8826703" y="1280160"/>
-            <a:ext cx="2706624" cy="804672"/>
-          </a:xfrm>
-          <a:prstGeom prst="rect">
-            <a:avLst/>
-          </a:prstGeom>
-          <a:solidFill>
-            <a:srgbClr val="FFFFFF"/>
-          </a:solidFill>
-          <a:ln>
-            <a:noFill/>
-          </a:ln>
-          <a:effectLst/>
-        </p:spPr>
-        <p:style>
-          <a:lnRef idx="1">
-            <a:schemeClr val="accent1"/>
-          </a:lnRef>
-          <a:fillRef idx="3">
-            <a:schemeClr val="accent1"/>
-          </a:fillRef>
-          <a:effectRef idx="2">
-            <a:schemeClr val="accent1"/>
-          </a:effectRef>
-          <a:fontRef idx="minor">
-            <a:schemeClr val="lt1"/>
-          </a:fontRef>
-        </p:style>
-        <p:txBody>
-          <a:bodyPr rtlCol="0" anchor="ctr"/>
-          <a:lstStyle/>
-          <a:p>
-            <a:pPr algn="ctr"/>
-          </a:p>
-        </p:txBody>
-      </p:sp>
       <p:pic>
         <p:nvPicPr>
-          <p:cNvPr id="8" name="Picture 7" descr="madrigal-logo.png"/>
+          <p:cNvPr id="7" name="Picture 6" descr="madrigal-logo.png"/>
           <p:cNvPicPr>
             <a:picLocks noChangeAspect="1"/>
           </p:cNvPicPr>
@@ -3999,14 +3955,49 @@
         </p:blipFill>
         <p:spPr>
           <a:xfrm>
-            <a:off x="8991295" y="1426464"/>
-            <a:ext cx="2377440" cy="497677"/>
+            <a:off x="8991295" y="1298448"/>
+            <a:ext cx="2377440" cy="576072"/>
           </a:xfrm>
           <a:prstGeom prst="rect">
             <a:avLst/>
           </a:prstGeom>
         </p:spPr>
       </p:pic>
+      <p:sp>
+        <p:nvSpPr>
+          <p:cNvPr id="8" name="TextBox 7"/>
+          <p:cNvSpPr txBox="1"/>
+          <p:nvPr/>
+        </p:nvSpPr>
+        <p:spPr>
+          <a:xfrm>
+            <a:off x="8991295" y="1975104"/>
+            <a:ext cx="2377440" cy="274320"/>
+          </a:xfrm>
+          <a:prstGeom prst="rect">
+            <a:avLst/>
+          </a:prstGeom>
+          <a:noFill/>
+        </p:spPr>
+        <p:txBody>
+          <a:bodyPr wrap="square" anchor="t">
+            <a:spAutoFit/>
+          </a:bodyPr>
+          <a:lstStyle/>
+          <a:p>
+            <a:pPr algn="r"/>
+            <a:r>
+              <a:rPr sz="1000" b="0">
+                <a:solidFill>
+                  <a:srgbClr val="A8A29E"/>
+                </a:solidFill>
+                <a:latin typeface="JetBrains Mono"/>
+              </a:rPr>
+              <a:t>кейс #02 · UMIRHack 2026</a:t>
+            </a:r>
+          </a:p>
+        </p:txBody>
+      </p:sp>
       <p:sp>
         <p:nvSpPr>
           <p:cNvPr id="9" name="TextBox 8"/>
@@ -7085,53 +7076,9 @@
           </a:p>
         </p:txBody>
       </p:sp>
-      <p:sp>
-        <p:nvSpPr>
-          <p:cNvPr id="14" name="Rectangle 13"/>
-          <p:cNvSpPr/>
-          <p:nvPr/>
-        </p:nvSpPr>
-        <p:spPr>
-          <a:xfrm>
-            <a:off x="4727448" y="5532120"/>
-            <a:ext cx="2743200" cy="658368"/>
-          </a:xfrm>
-          <a:prstGeom prst="rect">
-            <a:avLst/>
-          </a:prstGeom>
-          <a:solidFill>
-            <a:srgbClr val="FFFFFF"/>
-          </a:solidFill>
-          <a:ln>
-            <a:noFill/>
-          </a:ln>
-          <a:effectLst/>
-        </p:spPr>
-        <p:style>
-          <a:lnRef idx="1">
-            <a:schemeClr val="accent1"/>
-          </a:lnRef>
-          <a:fillRef idx="3">
-            <a:schemeClr val="accent1"/>
-          </a:fillRef>
-          <a:effectRef idx="2">
-            <a:schemeClr val="accent1"/>
-          </a:effectRef>
-          <a:fontRef idx="minor">
-            <a:schemeClr val="lt1"/>
-          </a:fontRef>
-        </p:style>
-        <p:txBody>
-          <a:bodyPr rtlCol="0" anchor="ctr"/>
-          <a:lstStyle/>
-          <a:p>
-            <a:pPr algn="ctr"/>
-          </a:p>
-        </p:txBody>
-      </p:sp>
       <p:pic>
         <p:nvPicPr>
-          <p:cNvPr id="15" name="Picture 14" descr="madrigal-logo.png"/>
+          <p:cNvPr id="14" name="Picture 13" descr="madrigal-logo.png"/>
           <p:cNvPicPr>
             <a:picLocks noChangeAspect="1"/>
           </p:cNvPicPr>
@@ -7146,7 +7093,7 @@
         <p:spPr>
           <a:xfrm>
             <a:off x="4910328" y="5660136"/>
-            <a:ext cx="2377440" cy="497677"/>
+            <a:ext cx="2377440" cy="576072"/>
           </a:xfrm>
           <a:prstGeom prst="rect">
             <a:avLst/>
@@ -7155,7 +7102,7 @@
       </p:pic>
       <p:sp>
         <p:nvSpPr>
-          <p:cNvPr id="16" name="TextBox 15"/>
+          <p:cNvPr id="15" name="TextBox 14"/>
           <p:cNvSpPr txBox="1"/>
           <p:nvPr/>
         </p:nvSpPr>

--- a/presentation/slides.pptx
+++ b/presentation/slides.pptx
@@ -5296,7 +5296,7 @@
         </p:nvSpPr>
         <p:spPr>
           <a:xfrm>
-            <a:off x="822960" y="4206240"/>
+            <a:off x="822960" y="3931920"/>
             <a:ext cx="5120640" cy="1097280"/>
           </a:xfrm>
           <a:prstGeom prst="rect">
@@ -5322,43 +5322,9 @@
           </a:p>
         </p:txBody>
       </p:sp>
-      <p:sp>
-        <p:nvSpPr>
-          <p:cNvPr id="7" name="TextBox 6"/>
-          <p:cNvSpPr txBox="1"/>
-          <p:nvPr/>
-        </p:nvSpPr>
-        <p:spPr>
-          <a:xfrm>
-            <a:off x="822960" y="4800600"/>
-            <a:ext cx="5120640" cy="548640"/>
-          </a:xfrm>
-          <a:prstGeom prst="rect">
-            <a:avLst/>
-          </a:prstGeom>
-          <a:noFill/>
-        </p:spPr>
-        <p:txBody>
-          <a:bodyPr wrap="square" anchor="t">
-            <a:spAutoFit/>
-          </a:bodyPr>
-          <a:lstStyle/>
-          <a:p>
-            <a:r>
-              <a:rPr sz="1500" b="0">
-                <a:solidFill>
-                  <a:srgbClr val="A8A29E"/>
-                </a:solidFill>
-                <a:latin typeface="Montserrat"/>
-              </a:rPr>
-              <a:t>12 с на 95 МиБ — пик памяти 350 МиБ, 9% бюджета 4 ГиБ</a:t>
-            </a:r>
-          </a:p>
-        </p:txBody>
-      </p:sp>
       <p:pic>
         <p:nvPicPr>
-          <p:cNvPr id="8" name="Picture 7" descr="coverage_donut.png"/>
+          <p:cNvPr id="7" name="Picture 6" descr="coverage_donut.png"/>
           <p:cNvPicPr>
             <a:picLocks noChangeAspect="1"/>
           </p:cNvPicPr>
@@ -5372,8 +5338,8 @@
         </p:blipFill>
         <p:spPr>
           <a:xfrm>
-            <a:off x="6035040" y="2011680"/>
-            <a:ext cx="4772264" cy="3657600"/>
+            <a:off x="6035040" y="1737360"/>
+            <a:ext cx="3579198" cy="2743200"/>
           </a:xfrm>
           <a:prstGeom prst="rect">
             <a:avLst/>
@@ -5382,60 +5348,48 @@
       </p:pic>
       <p:sp>
         <p:nvSpPr>
-          <p:cNvPr id="9" name="Rounded Rectangle 8"/>
-          <p:cNvSpPr/>
-          <p:nvPr/>
-        </p:nvSpPr>
-        <p:spPr>
-          <a:xfrm>
-            <a:off x="822960" y="4937760"/>
-            <a:ext cx="1444752" cy="365760"/>
-          </a:xfrm>
-          <a:prstGeom prst="roundRect">
-            <a:avLst/>
-          </a:prstGeom>
-          <a:solidFill>
-            <a:srgbClr val="26282B"/>
-          </a:solidFill>
-          <a:ln w="12700">
-            <a:solidFill>
-              <a:srgbClr val="26282B"/>
-            </a:solidFill>
-          </a:ln>
-          <a:effectLst/>
-        </p:spPr>
-        <p:style>
-          <a:lnRef idx="1">
-            <a:schemeClr val="accent1"/>
-          </a:lnRef>
-          <a:fillRef idx="3">
-            <a:schemeClr val="accent1"/>
-          </a:fillRef>
-          <a:effectRef idx="2">
-            <a:schemeClr val="accent1"/>
-          </a:effectRef>
-          <a:fontRef idx="minor">
-            <a:schemeClr val="lt1"/>
-          </a:fontRef>
-        </p:style>
-        <p:txBody>
-          <a:bodyPr rtlCol="0" anchor="ctr"/>
-          <a:lstStyle/>
-          <a:p>
-            <a:pPr algn="ctr"/>
-          </a:p>
-        </p:txBody>
-      </p:sp>
-      <p:sp>
-        <p:nvSpPr>
-          <p:cNvPr id="10" name="TextBox 9"/>
+          <p:cNvPr id="8" name="TextBox 7"/>
           <p:cNvSpPr txBox="1"/>
           <p:nvPr/>
         </p:nvSpPr>
         <p:spPr>
           <a:xfrm>
-            <a:off x="822960" y="4983480"/>
-            <a:ext cx="1444752" cy="292608"/>
+            <a:off x="822960" y="4617720"/>
+            <a:ext cx="2377440" cy="1097280"/>
+          </a:xfrm>
+          <a:prstGeom prst="rect">
+            <a:avLst/>
+          </a:prstGeom>
+          <a:noFill/>
+        </p:spPr>
+        <p:txBody>
+          <a:bodyPr wrap="square" anchor="b">
+            <a:spAutoFit/>
+          </a:bodyPr>
+          <a:lstStyle/>
+          <a:p>
+            <a:r>
+              <a:rPr sz="4400" b="1">
+                <a:solidFill>
+                  <a:srgbClr val="D0603A"/>
+                </a:solidFill>
+                <a:latin typeface="Tektur"/>
+              </a:rPr>
+              <a:t>12 с</a:t>
+            </a:r>
+          </a:p>
+        </p:txBody>
+      </p:sp>
+      <p:sp>
+        <p:nvSpPr>
+          <p:cNvPr id="9" name="TextBox 8"/>
+          <p:cNvSpPr txBox="1"/>
+          <p:nvPr/>
+        </p:nvSpPr>
+        <p:spPr>
+          <a:xfrm>
+            <a:off x="822960" y="5669280"/>
+            <a:ext cx="2377440" cy="365760"/>
           </a:xfrm>
           <a:prstGeom prst="rect">
             <a:avLst/>
@@ -5448,75 +5402,62 @@
           </a:bodyPr>
           <a:lstStyle/>
           <a:p>
-            <a:pPr algn="ctr"/>
-            <a:r>
-              <a:rPr sz="1400" b="0">
-                <a:solidFill>
-                  <a:srgbClr val="F4F1EC"/>
+            <a:r>
+              <a:rPr sz="1500" b="0">
+                <a:solidFill>
+                  <a:srgbClr val="A8A29E"/>
                 </a:solidFill>
                 <a:latin typeface="Montserrat"/>
               </a:rPr>
-              <a:t>12 с общее время</a:t>
-            </a:r>
-          </a:p>
-        </p:txBody>
-      </p:sp>
-      <p:sp>
-        <p:nvSpPr>
-          <p:cNvPr id="11" name="Rounded Rectangle 10"/>
-          <p:cNvSpPr/>
-          <p:nvPr/>
-        </p:nvSpPr>
-        <p:spPr>
-          <a:xfrm>
-            <a:off x="2496312" y="4937760"/>
-            <a:ext cx="1600200" cy="365760"/>
-          </a:xfrm>
-          <a:prstGeom prst="roundRect">
-            <a:avLst/>
-          </a:prstGeom>
-          <a:solidFill>
-            <a:srgbClr val="26282B"/>
-          </a:solidFill>
-          <a:ln w="12700">
-            <a:solidFill>
-              <a:srgbClr val="26282B"/>
-            </a:solidFill>
-          </a:ln>
-          <a:effectLst/>
-        </p:spPr>
-        <p:style>
-          <a:lnRef idx="1">
-            <a:schemeClr val="accent1"/>
-          </a:lnRef>
-          <a:fillRef idx="3">
-            <a:schemeClr val="accent1"/>
-          </a:fillRef>
-          <a:effectRef idx="2">
-            <a:schemeClr val="accent1"/>
-          </a:effectRef>
-          <a:fontRef idx="minor">
-            <a:schemeClr val="lt1"/>
-          </a:fontRef>
-        </p:style>
-        <p:txBody>
-          <a:bodyPr rtlCol="0" anchor="ctr"/>
-          <a:lstStyle/>
-          <a:p>
-            <a:pPr algn="ctr"/>
-          </a:p>
-        </p:txBody>
-      </p:sp>
-      <p:sp>
-        <p:nvSpPr>
-          <p:cNvPr id="12" name="TextBox 11"/>
+              <a:t>общее время на 95 МиБ</a:t>
+            </a:r>
+          </a:p>
+        </p:txBody>
+      </p:sp>
+      <p:sp>
+        <p:nvSpPr>
+          <p:cNvPr id="10" name="TextBox 9"/>
           <p:cNvSpPr txBox="1"/>
           <p:nvPr/>
         </p:nvSpPr>
         <p:spPr>
           <a:xfrm>
-            <a:off x="2496312" y="4983480"/>
-            <a:ext cx="1600200" cy="292608"/>
+            <a:off x="3291840" y="4617720"/>
+            <a:ext cx="2377440" cy="1097280"/>
+          </a:xfrm>
+          <a:prstGeom prst="rect">
+            <a:avLst/>
+          </a:prstGeom>
+          <a:noFill/>
+        </p:spPr>
+        <p:txBody>
+          <a:bodyPr wrap="square" anchor="b">
+            <a:spAutoFit/>
+          </a:bodyPr>
+          <a:lstStyle/>
+          <a:p>
+            <a:r>
+              <a:rPr sz="4400" b="1">
+                <a:solidFill>
+                  <a:srgbClr val="D0603A"/>
+                </a:solidFill>
+                <a:latin typeface="Tektur"/>
+              </a:rPr>
+              <a:t>350 МиБ</a:t>
+            </a:r>
+          </a:p>
+        </p:txBody>
+      </p:sp>
+      <p:sp>
+        <p:nvSpPr>
+          <p:cNvPr id="11" name="TextBox 10"/>
+          <p:cNvSpPr txBox="1"/>
+          <p:nvPr/>
+        </p:nvSpPr>
+        <p:spPr>
+          <a:xfrm>
+            <a:off x="3291840" y="5669280"/>
+            <a:ext cx="2377440" cy="365760"/>
           </a:xfrm>
           <a:prstGeom prst="rect">
             <a:avLst/>
@@ -5529,75 +5470,62 @@
           </a:bodyPr>
           <a:lstStyle/>
           <a:p>
-            <a:pPr algn="ctr"/>
-            <a:r>
-              <a:rPr sz="1400" b="0">
-                <a:solidFill>
-                  <a:srgbClr val="F4F1EC"/>
+            <a:r>
+              <a:rPr sz="1500" b="0">
+                <a:solidFill>
+                  <a:srgbClr val="A8A29E"/>
                 </a:solidFill>
                 <a:latin typeface="Montserrat"/>
               </a:rPr>
-              <a:t>350 МиБ пик памяти</a:t>
-            </a:r>
-          </a:p>
-        </p:txBody>
-      </p:sp>
-      <p:sp>
-        <p:nvSpPr>
-          <p:cNvPr id="13" name="Rounded Rectangle 12"/>
-          <p:cNvSpPr/>
-          <p:nvPr/>
-        </p:nvSpPr>
-        <p:spPr>
-          <a:xfrm>
-            <a:off x="4325112" y="4937760"/>
-            <a:ext cx="1133856" cy="365760"/>
-          </a:xfrm>
-          <a:prstGeom prst="roundRect">
-            <a:avLst/>
-          </a:prstGeom>
-          <a:solidFill>
-            <a:srgbClr val="26282B"/>
-          </a:solidFill>
-          <a:ln w="12700">
-            <a:solidFill>
-              <a:srgbClr val="26282B"/>
-            </a:solidFill>
-          </a:ln>
-          <a:effectLst/>
-        </p:spPr>
-        <p:style>
-          <a:lnRef idx="1">
-            <a:schemeClr val="accent1"/>
-          </a:lnRef>
-          <a:fillRef idx="3">
-            <a:schemeClr val="accent1"/>
-          </a:fillRef>
-          <a:effectRef idx="2">
-            <a:schemeClr val="accent1"/>
-          </a:effectRef>
-          <a:fontRef idx="minor">
-            <a:schemeClr val="lt1"/>
-          </a:fontRef>
-        </p:style>
-        <p:txBody>
-          <a:bodyPr rtlCol="0" anchor="ctr"/>
-          <a:lstStyle/>
-          <a:p>
-            <a:pPr algn="ctr"/>
-          </a:p>
-        </p:txBody>
-      </p:sp>
-      <p:sp>
-        <p:nvSpPr>
-          <p:cNvPr id="14" name="TextBox 13"/>
+              <a:t>пик памяти · 9% бюджета</a:t>
+            </a:r>
+          </a:p>
+        </p:txBody>
+      </p:sp>
+      <p:sp>
+        <p:nvSpPr>
+          <p:cNvPr id="12" name="TextBox 11"/>
           <p:cNvSpPr txBox="1"/>
           <p:nvPr/>
         </p:nvSpPr>
         <p:spPr>
           <a:xfrm>
-            <a:off x="4325112" y="4983480"/>
-            <a:ext cx="1133856" cy="292608"/>
+            <a:off x="5760720" y="4617720"/>
+            <a:ext cx="2377440" cy="1097280"/>
+          </a:xfrm>
+          <a:prstGeom prst="rect">
+            <a:avLst/>
+          </a:prstGeom>
+          <a:noFill/>
+        </p:spPr>
+        <p:txBody>
+          <a:bodyPr wrap="square" anchor="b">
+            <a:spAutoFit/>
+          </a:bodyPr>
+          <a:lstStyle/>
+          <a:p>
+            <a:r>
+              <a:rPr sz="4400" b="1">
+                <a:solidFill>
+                  <a:srgbClr val="D0603A"/>
+                </a:solidFill>
+                <a:latin typeface="Tektur"/>
+              </a:rPr>
+              <a:t>250k</a:t>
+            </a:r>
+          </a:p>
+        </p:txBody>
+      </p:sp>
+      <p:sp>
+        <p:nvSpPr>
+          <p:cNvPr id="13" name="TextBox 12"/>
+          <p:cNvSpPr txBox="1"/>
+          <p:nvPr/>
+        </p:nvSpPr>
+        <p:spPr>
+          <a:xfrm>
+            <a:off x="5760720" y="5669280"/>
+            <a:ext cx="2377440" cy="365760"/>
           </a:xfrm>
           <a:prstGeom prst="rect">
             <a:avLst/>
@@ -5610,22 +5538,21 @@
           </a:bodyPr>
           <a:lstStyle/>
           <a:p>
-            <a:pPr algn="ctr"/>
-            <a:r>
-              <a:rPr sz="1400" b="0">
-                <a:solidFill>
-                  <a:srgbClr val="F4F1EC"/>
+            <a:r>
+              <a:rPr sz="1500" b="0">
+                <a:solidFill>
+                  <a:srgbClr val="A8A29E"/>
                 </a:solidFill>
                 <a:latin typeface="Montserrat"/>
               </a:rPr>
-              <a:t>250k пакетов</a:t>
-            </a:r>
-          </a:p>
-        </p:txBody>
-      </p:sp>
-      <p:sp>
-        <p:nvSpPr>
-          <p:cNvPr id="15" name="TextBox 14"/>
+              <a:t>пакетов разобрано</a:t>
+            </a:r>
+          </a:p>
+        </p:txBody>
+      </p:sp>
+      <p:sp>
+        <p:nvSpPr>
+          <p:cNvPr id="14" name="TextBox 13"/>
           <p:cNvSpPr txBox="1"/>
           <p:nvPr/>
         </p:nvSpPr>
@@ -5659,7 +5586,7 @@
       </p:sp>
       <p:sp>
         <p:nvSpPr>
-          <p:cNvPr id="16" name="TextBox 15"/>
+          <p:cNvPr id="15" name="TextBox 14"/>
           <p:cNvSpPr txBox="1"/>
           <p:nvPr/>
         </p:nvSpPr>
@@ -5693,7 +5620,7 @@
       </p:sp>
       <p:sp>
         <p:nvSpPr>
-          <p:cNvPr id="17" name="TextBox 16"/>
+          <p:cNvPr id="16" name="TextBox 15"/>
           <p:cNvSpPr txBox="1"/>
           <p:nvPr/>
         </p:nvSpPr>
@@ -5728,7 +5655,7 @@
       </p:sp>
       <p:sp>
         <p:nvSpPr>
-          <p:cNvPr id="18" name="TextBox 17"/>
+          <p:cNvPr id="17" name="TextBox 16"/>
           <p:cNvSpPr txBox="1"/>
           <p:nvPr/>
         </p:nvSpPr>
@@ -5775,7 +5702,7 @@
               <p:cTn id="2" dur="indefinite" nodeType="mainSeq">
                 <p:childTnLst>
                   <p:par>
-                    <p:cTn id="3" presetID="10" presetClass="entr" presetSubtype="0" fill="hold" grpId="0" nodeType="clickEffect">
+                    <p:cTn id="3" presetID="22" presetClass="entr" presetSubtype="8" fill="hold" grpId="0" nodeType="clickEffect">
                       <p:stCondLst>
                         <p:cond delay="0"/>
                       </p:stCondLst>
@@ -5800,59 +5727,9 @@
                         </p:set>
                         <p:anim calcmode="lin" valueType="num">
                           <p:cBhvr additive="base">
-                            <p:cTn id="5" dur="300" fill="hold"/>
+                            <p:cTn id="5" dur="400" fill="hold"/>
                             <p:tgtEl>
                               <p:spTgt spid="7"/>
-                            </p:tgtEl>
-                            <p:attrNameLst>
-                              <p:attrName>style.opacity</p:attrName>
-                            </p:attrNameLst>
-                          </p:cBhvr>
-                          <p:tavLst>
-                            <p:tav tm="0">
-                              <p:val>
-                                <p:fltVal val="0"/>
-                              </p:val>
-                            </p:tav>
-                            <p:tav tm="100000">
-                              <p:val>
-                                <p:fltVal val="1"/>
-                              </p:val>
-                            </p:tav>
-                          </p:tavLst>
-                        </p:anim>
-                      </p:childTnLst>
-                    </p:cTn>
-                  </p:par>
-                  <p:par>
-                    <p:cTn id="6" presetID="22" presetClass="entr" presetSubtype="8" fill="hold" grpId="0" nodeType="clickEffect">
-                      <p:stCondLst>
-                        <p:cond delay="0"/>
-                      </p:stCondLst>
-                      <p:childTnLst>
-                        <p:set>
-                          <p:cBhvr>
-                            <p:cTn id="7" dur="1" fill="hold">
-                              <p:stCondLst>
-                                <p:cond delay="0"/>
-                              </p:stCondLst>
-                            </p:cTn>
-                            <p:tgtEl>
-                              <p:spTgt spid="8"/>
-                            </p:tgtEl>
-                            <p:attrNameLst>
-                              <p:attrName>style.visibility</p:attrName>
-                            </p:attrNameLst>
-                          </p:cBhvr>
-                          <p:to>
-                            <p:strVal val="visible"/>
-                          </p:to>
-                        </p:set>
-                        <p:anim calcmode="lin" valueType="num">
-                          <p:cBhvr additive="base">
-                            <p:cTn id="8" dur="400" fill="hold"/>
-                            <p:tgtEl>
-                              <p:spTgt spid="8"/>
                             </p:tgtEl>
                             <p:attrNameLst>
                               <p:attrName>ppt_w</p:attrName>
@@ -6917,7 +6794,7 @@
                 </a:solidFill>
                 <a:latin typeface="Montserrat"/>
               </a:rPr>
-              <a:t>Релиз v1.0.0</a:t>
+              <a:t>Релиз v1.1.0</a:t>
             </a:r>
           </a:p>
         </p:txBody>
@@ -11962,8 +11839,42 @@
         </p:nvSpPr>
         <p:spPr>
           <a:xfrm>
-            <a:off x="822960" y="1965960"/>
-            <a:ext cx="10545775" cy="457200"/>
+            <a:off x="822960" y="2286000"/>
+            <a:ext cx="3200400" cy="1097280"/>
+          </a:xfrm>
+          <a:prstGeom prst="rect">
+            <a:avLst/>
+          </a:prstGeom>
+          <a:noFill/>
+        </p:spPr>
+        <p:txBody>
+          <a:bodyPr wrap="square" anchor="b">
+            <a:spAutoFit/>
+          </a:bodyPr>
+          <a:lstStyle/>
+          <a:p>
+            <a:r>
+              <a:rPr sz="6000" b="1">
+                <a:solidFill>
+                  <a:srgbClr val="DC2626"/>
+                </a:solidFill>
+                <a:latin typeface="Tektur"/>
+              </a:rPr>
+              <a:t>80</a:t>
+            </a:r>
+          </a:p>
+        </p:txBody>
+      </p:sp>
+      <p:sp>
+        <p:nvSpPr>
+          <p:cNvPr id="6" name="TextBox 5"/>
+          <p:cNvSpPr txBox="1"/>
+          <p:nvPr/>
+        </p:nvSpPr>
+        <p:spPr>
+          <a:xfrm>
+            <a:off x="822960" y="3337560"/>
+            <a:ext cx="3200400" cy="365760"/>
           </a:xfrm>
           <a:prstGeom prst="rect">
             <a:avLst/>
@@ -11977,27 +11888,95 @@
           <a:lstStyle/>
           <a:p>
             <a:r>
-              <a:rPr sz="1400" b="0">
+              <a:rPr sz="1500" b="0">
                 <a:solidFill>
                   <a:srgbClr val="A8A29E"/>
                 </a:solidFill>
                 <a:latin typeface="Montserrat"/>
               </a:rPr>
-              <a:t>На корпусе уточнения. Отдельно проверено на реальном датасете: 45 + 45, precision 1.00</a:t>
-            </a:r>
-          </a:p>
-        </p:txBody>
-      </p:sp>
-      <p:sp>
-        <p:nvSpPr>
-          <p:cNvPr id="6" name="TextBox 5"/>
+              <a:t>контрпримеров в v1</a:t>
+            </a:r>
+          </a:p>
+        </p:txBody>
+      </p:sp>
+      <p:sp>
+        <p:nvSpPr>
+          <p:cNvPr id="7" name="TextBox 6"/>
           <p:cNvSpPr txBox="1"/>
           <p:nvPr/>
         </p:nvSpPr>
         <p:spPr>
           <a:xfrm>
-            <a:off x="822960" y="5394960"/>
-            <a:ext cx="10545775" cy="548640"/>
+            <a:off x="4114800" y="2286000"/>
+            <a:ext cx="822960" cy="1097280"/>
+          </a:xfrm>
+          <a:prstGeom prst="rect">
+            <a:avLst/>
+          </a:prstGeom>
+          <a:noFill/>
+        </p:spPr>
+        <p:txBody>
+          <a:bodyPr wrap="square" anchor="b">
+            <a:spAutoFit/>
+          </a:bodyPr>
+          <a:lstStyle/>
+          <a:p>
+            <a:r>
+              <a:rPr sz="4400" b="0">
+                <a:solidFill>
+                  <a:srgbClr val="7A7570"/>
+                </a:solidFill>
+                <a:latin typeface="Tektur"/>
+              </a:rPr>
+              <a:t>→</a:t>
+            </a:r>
+          </a:p>
+        </p:txBody>
+      </p:sp>
+      <p:sp>
+        <p:nvSpPr>
+          <p:cNvPr id="8" name="TextBox 7"/>
+          <p:cNvSpPr txBox="1"/>
+          <p:nvPr/>
+        </p:nvSpPr>
+        <p:spPr>
+          <a:xfrm>
+            <a:off x="4983480" y="2286000"/>
+            <a:ext cx="3200400" cy="1097280"/>
+          </a:xfrm>
+          <a:prstGeom prst="rect">
+            <a:avLst/>
+          </a:prstGeom>
+          <a:noFill/>
+        </p:spPr>
+        <p:txBody>
+          <a:bodyPr wrap="square" anchor="b">
+            <a:spAutoFit/>
+          </a:bodyPr>
+          <a:lstStyle/>
+          <a:p>
+            <a:r>
+              <a:rPr sz="6000" b="1">
+                <a:solidFill>
+                  <a:srgbClr val="16A34A"/>
+                </a:solidFill>
+                <a:latin typeface="Tektur"/>
+              </a:rPr>
+              <a:t>0</a:t>
+            </a:r>
+          </a:p>
+        </p:txBody>
+      </p:sp>
+      <p:sp>
+        <p:nvSpPr>
+          <p:cNvPr id="9" name="TextBox 8"/>
+          <p:cNvSpPr txBox="1"/>
+          <p:nvPr/>
+        </p:nvSpPr>
+        <p:spPr>
+          <a:xfrm>
+            <a:off x="4983480" y="3337560"/>
+            <a:ext cx="3200400" cy="365760"/>
           </a:xfrm>
           <a:prstGeom prst="rect">
             <a:avLst/>
@@ -12011,6 +11990,40 @@
           <a:lstStyle/>
           <a:p>
             <a:r>
+              <a:rPr sz="1500" b="0">
+                <a:solidFill>
+                  <a:srgbClr val="A8A29E"/>
+                </a:solidFill>
+                <a:latin typeface="Montserrat"/>
+              </a:rPr>
+              <a:t>контрпримеров в v2</a:t>
+            </a:r>
+          </a:p>
+        </p:txBody>
+      </p:sp>
+      <p:sp>
+        <p:nvSpPr>
+          <p:cNvPr id="10" name="TextBox 9"/>
+          <p:cNvSpPr txBox="1"/>
+          <p:nvPr/>
+        </p:nvSpPr>
+        <p:spPr>
+          <a:xfrm>
+            <a:off x="822960" y="5760720"/>
+            <a:ext cx="10545775" cy="548640"/>
+          </a:xfrm>
+          <a:prstGeom prst="rect">
+            <a:avLst/>
+          </a:prstGeom>
+          <a:noFill/>
+        </p:spPr>
+        <p:txBody>
+          <a:bodyPr wrap="square" anchor="t">
+            <a:spAutoFit/>
+          </a:bodyPr>
+          <a:lstStyle/>
+          <a:p>
+            <a:r>
               <a:rPr sz="1600" b="0">
                 <a:solidFill>
                   <a:srgbClr val="F4F1EC"/>
@@ -12024,13 +12037,13 @@
       </p:sp>
       <p:sp>
         <p:nvSpPr>
-          <p:cNvPr id="7" name="TextBox 6"/>
+          <p:cNvPr id="11" name="TextBox 10"/>
           <p:cNvSpPr txBox="1"/>
           <p:nvPr/>
         </p:nvSpPr>
         <p:spPr>
           <a:xfrm>
-            <a:off x="822960" y="2788920"/>
+            <a:off x="822960" y="3931920"/>
             <a:ext cx="914400" cy="640080"/>
           </a:xfrm>
           <a:prstGeom prst="rect">
@@ -12058,13 +12071,13 @@
       </p:sp>
       <p:sp>
         <p:nvSpPr>
-          <p:cNvPr id="8" name="Rectangle 7"/>
+          <p:cNvPr id="12" name="Rectangle 11"/>
           <p:cNvSpPr/>
           <p:nvPr/>
         </p:nvSpPr>
         <p:spPr>
           <a:xfrm>
-            <a:off x="1828800" y="2834640"/>
+            <a:off x="1828800" y="3977640"/>
             <a:ext cx="7436815" cy="548640"/>
           </a:xfrm>
           <a:prstGeom prst="rect">
@@ -12102,13 +12115,13 @@
       </p:sp>
       <p:sp>
         <p:nvSpPr>
-          <p:cNvPr id="9" name="Rectangle 8"/>
+          <p:cNvPr id="13" name="Rectangle 12"/>
           <p:cNvSpPr/>
           <p:nvPr/>
         </p:nvSpPr>
         <p:spPr>
           <a:xfrm>
-            <a:off x="1828800" y="2834640"/>
+            <a:off x="1828800" y="3977640"/>
             <a:ext cx="3197830" cy="548640"/>
           </a:xfrm>
           <a:prstGeom prst="rect">
@@ -12146,13 +12159,13 @@
       </p:sp>
       <p:sp>
         <p:nvSpPr>
-          <p:cNvPr id="10" name="TextBox 9"/>
+          <p:cNvPr id="14" name="TextBox 13"/>
           <p:cNvSpPr txBox="1"/>
           <p:nvPr/>
         </p:nvSpPr>
         <p:spPr>
           <a:xfrm>
-            <a:off x="9357055" y="2788920"/>
+            <a:off x="9357055" y="3931920"/>
             <a:ext cx="2011680" cy="640080"/>
           </a:xfrm>
           <a:prstGeom prst="rect">
@@ -12181,13 +12194,13 @@
       </p:sp>
       <p:sp>
         <p:nvSpPr>
-          <p:cNvPr id="11" name="TextBox 10"/>
+          <p:cNvPr id="15" name="TextBox 14"/>
           <p:cNvSpPr txBox="1"/>
           <p:nvPr/>
         </p:nvSpPr>
         <p:spPr>
           <a:xfrm>
-            <a:off x="822960" y="3977640"/>
+            <a:off x="822960" y="4800600"/>
             <a:ext cx="914400" cy="640080"/>
           </a:xfrm>
           <a:prstGeom prst="rect">
@@ -12215,13 +12228,13 @@
       </p:sp>
       <p:sp>
         <p:nvSpPr>
-          <p:cNvPr id="12" name="Rectangle 11"/>
+          <p:cNvPr id="16" name="Rectangle 15"/>
           <p:cNvSpPr/>
           <p:nvPr/>
         </p:nvSpPr>
         <p:spPr>
           <a:xfrm>
-            <a:off x="1828800" y="4023360"/>
+            <a:off x="1828800" y="4846320"/>
             <a:ext cx="7436815" cy="548640"/>
           </a:xfrm>
           <a:prstGeom prst="rect">
@@ -12259,13 +12272,13 @@
       </p:sp>
       <p:sp>
         <p:nvSpPr>
-          <p:cNvPr id="13" name="Rectangle 12"/>
+          <p:cNvPr id="17" name="Rectangle 16"/>
           <p:cNvSpPr/>
           <p:nvPr/>
         </p:nvSpPr>
         <p:spPr>
           <a:xfrm>
-            <a:off x="1828800" y="4023360"/>
+            <a:off x="1828800" y="4846320"/>
             <a:ext cx="7436815" cy="548640"/>
           </a:xfrm>
           <a:prstGeom prst="rect">
@@ -12303,13 +12316,13 @@
       </p:sp>
       <p:sp>
         <p:nvSpPr>
-          <p:cNvPr id="14" name="TextBox 13"/>
+          <p:cNvPr id="18" name="TextBox 17"/>
           <p:cNvSpPr txBox="1"/>
           <p:nvPr/>
         </p:nvSpPr>
         <p:spPr>
           <a:xfrm>
-            <a:off x="9357055" y="3977640"/>
+            <a:off x="9357055" y="4800600"/>
             <a:ext cx="2011680" cy="640080"/>
           </a:xfrm>
           <a:prstGeom prst="rect">
@@ -12338,7 +12351,7 @@
       </p:sp>
       <p:sp>
         <p:nvSpPr>
-          <p:cNvPr id="15" name="TextBox 14"/>
+          <p:cNvPr id="19" name="TextBox 18"/>
           <p:cNvSpPr txBox="1"/>
           <p:nvPr/>
         </p:nvSpPr>
@@ -12372,7 +12385,7 @@
       </p:sp>
       <p:sp>
         <p:nvSpPr>
-          <p:cNvPr id="16" name="TextBox 15"/>
+          <p:cNvPr id="20" name="TextBox 19"/>
           <p:cNvSpPr txBox="1"/>
           <p:nvPr/>
         </p:nvSpPr>
@@ -12407,7 +12420,7 @@
       </p:sp>
       <p:sp>
         <p:nvSpPr>
-          <p:cNvPr id="17" name="TextBox 16"/>
+          <p:cNvPr id="21" name="TextBox 20"/>
           <p:cNvSpPr txBox="1"/>
           <p:nvPr/>
         </p:nvSpPr>
@@ -12467,7 +12480,7 @@
                               </p:stCondLst>
                             </p:cTn>
                             <p:tgtEl>
-                              <p:spTgt spid="9"/>
+                              <p:spTgt spid="13"/>
                             </p:tgtEl>
                             <p:attrNameLst>
                               <p:attrName>style.visibility</p:attrName>
@@ -12481,7 +12494,7 @@
                           <p:cBhvr additive="base">
                             <p:cTn id="5" dur="300" fill="hold"/>
                             <p:tgtEl>
-                              <p:spTgt spid="9"/>
+                              <p:spTgt spid="13"/>
                             </p:tgtEl>
                             <p:attrNameLst>
                               <p:attrName>style.opacity</p:attrName>
@@ -12517,7 +12530,7 @@
                               </p:stCondLst>
                             </p:cTn>
                             <p:tgtEl>
-                              <p:spTgt spid="13"/>
+                              <p:spTgt spid="17"/>
                             </p:tgtEl>
                             <p:attrNameLst>
                               <p:attrName>style.visibility</p:attrName>
@@ -12531,7 +12544,7 @@
                           <p:cBhvr additive="base">
                             <p:cTn id="8" dur="300" fill="hold"/>
                             <p:tgtEl>
-                              <p:spTgt spid="13"/>
+                              <p:spTgt spid="17"/>
                             </p:tgtEl>
                             <p:attrNameLst>
                               <p:attrName>style.opacity</p:attrName>
